--- a/Testarea property-based folosind QuickCheck.pptx
+++ b/Testarea property-based folosind QuickCheck.pptx
@@ -23,6 +23,7 @@
     <p:sldId id="264" r:id="rId20"/>
     <p:sldId id="273" r:id="rId21"/>
     <p:sldId id="265" r:id="rId22"/>
+    <p:sldId id="274" r:id="rId23"/>
   </p:sldIdLst>
   <p:sldSz cx="12192000" cy="6858000"/>
   <p:notesSz cx="6858000" cy="9144000"/>
@@ -123,7 +124,7 @@
   </p:defaultTextStyle>
   <p:extLst>
     <p:ext uri="{EFAFB233-063F-42B5-8137-9DF3F51BA10A}">
-      <p15:sldGuideLst xmlns:p15="http://schemas.microsoft.com/office/powerpoint/2012/main"/>
+      <p15:sldGuideLst xmlns:p15="http://schemas.microsoft.com/office/powerpoint/2012/main" xmlns=""/>
     </p:ext>
   </p:extLst>
 </p:presentation>
@@ -151,7 +152,7 @@
           <p:cNvPr id="10" name="Rectangle 9">
             <a:extLst>
               <a:ext uri="{FF2B5EF4-FFF2-40B4-BE49-F238E27FC236}">
-                <a16:creationId xmlns:a16="http://schemas.microsoft.com/office/drawing/2014/main" id="{39E3965E-AC41-4711-9D10-E25ABB132D86}"/>
+                <a16:creationId xmlns:a16="http://schemas.microsoft.com/office/drawing/2014/main" xmlns="" id="{39E3965E-AC41-4711-9D10-E25ABB132D86}"/>
               </a:ext>
             </a:extLst>
           </p:cNvPr>
@@ -311,7 +312,7 @@
           <p:cNvPr id="9" name="Straight Connector 8">
             <a:extLst>
               <a:ext uri="{FF2B5EF4-FFF2-40B4-BE49-F238E27FC236}">
-                <a16:creationId xmlns:a16="http://schemas.microsoft.com/office/drawing/2014/main" id="{1F5DC8C3-BA5F-4EED-BB9A-A14272BD82A1}"/>
+                <a16:creationId xmlns:a16="http://schemas.microsoft.com/office/drawing/2014/main" xmlns="" id="{1F5DC8C3-BA5F-4EED-BB9A-A14272BD82A1}"/>
               </a:ext>
             </a:extLst>
           </p:cNvPr>
@@ -355,7 +356,7 @@
           <p:cNvPr id="4" name="Date Placeholder 3">
             <a:extLst>
               <a:ext uri="{FF2B5EF4-FFF2-40B4-BE49-F238E27FC236}">
-                <a16:creationId xmlns:a16="http://schemas.microsoft.com/office/drawing/2014/main" id="{9925CCF1-92C0-4AF3-BFAF-4921631915AB}"/>
+                <a16:creationId xmlns:a16="http://schemas.microsoft.com/office/drawing/2014/main" xmlns="" id="{9925CCF1-92C0-4AF3-BFAF-4921631915AB}"/>
               </a:ext>
             </a:extLst>
           </p:cNvPr>
@@ -373,7 +374,7 @@
           <a:p>
             <a:fld id="{9184DA70-C731-4C70-880D-CCD4705E623C}" type="datetime1">
               <a:rPr lang="en-US" smtClean="0"/>
-              <a:t>4/21/2026</a:t>
+              <a:t>4/22/2026</a:t>
             </a:fld>
             <a:endParaRPr lang="en-US" dirty="0"/>
           </a:p>
@@ -384,7 +385,7 @@
           <p:cNvPr id="5" name="Footer Placeholder 4">
             <a:extLst>
               <a:ext uri="{FF2B5EF4-FFF2-40B4-BE49-F238E27FC236}">
-                <a16:creationId xmlns:a16="http://schemas.microsoft.com/office/drawing/2014/main" id="{051A78A9-3DFF-4937-A9F2-5D8CF495F367}"/>
+                <a16:creationId xmlns:a16="http://schemas.microsoft.com/office/drawing/2014/main" xmlns="" id="{051A78A9-3DFF-4937-A9F2-5D8CF495F367}"/>
               </a:ext>
             </a:extLst>
           </p:cNvPr>
@@ -409,7 +410,7 @@
           <p:cNvPr id="6" name="Slide Number Placeholder 5">
             <a:extLst>
               <a:ext uri="{FF2B5EF4-FFF2-40B4-BE49-F238E27FC236}">
-                <a16:creationId xmlns:a16="http://schemas.microsoft.com/office/drawing/2014/main" id="{5FAEB271-5CC0-4759-BC6E-8BE53AB227C0}"/>
+                <a16:creationId xmlns:a16="http://schemas.microsoft.com/office/drawing/2014/main" xmlns="" id="{5FAEB271-5CC0-4759-BC6E-8BE53AB227C0}"/>
               </a:ext>
             </a:extLst>
           </p:cNvPr>
@@ -543,7 +544,7 @@
           <p:cNvPr id="7" name="Date Placeholder 6">
             <a:extLst>
               <a:ext uri="{FF2B5EF4-FFF2-40B4-BE49-F238E27FC236}">
-                <a16:creationId xmlns:a16="http://schemas.microsoft.com/office/drawing/2014/main" id="{7D5506EE-1026-4F35-9ACC-BD05BE0F9B36}"/>
+                <a16:creationId xmlns:a16="http://schemas.microsoft.com/office/drawing/2014/main" xmlns="" id="{7D5506EE-1026-4F35-9ACC-BD05BE0F9B36}"/>
               </a:ext>
             </a:extLst>
           </p:cNvPr>
@@ -561,7 +562,7 @@
           <a:p>
             <a:fld id="{B612A279-0833-481D-8C56-F67FD0AC6C50}" type="datetime1">
               <a:rPr lang="en-US" smtClean="0"/>
-              <a:t>4/21/2026</a:t>
+              <a:t>4/22/2026</a:t>
             </a:fld>
             <a:endParaRPr lang="en-US" dirty="0"/>
           </a:p>
@@ -572,7 +573,7 @@
           <p:cNvPr id="8" name="Footer Placeholder 7">
             <a:extLst>
               <a:ext uri="{FF2B5EF4-FFF2-40B4-BE49-F238E27FC236}">
-                <a16:creationId xmlns:a16="http://schemas.microsoft.com/office/drawing/2014/main" id="{B7696E5F-8D95-4450-AE52-5438E6EDE2BF}"/>
+                <a16:creationId xmlns:a16="http://schemas.microsoft.com/office/drawing/2014/main" xmlns="" id="{B7696E5F-8D95-4450-AE52-5438E6EDE2BF}"/>
               </a:ext>
             </a:extLst>
           </p:cNvPr>
@@ -597,7 +598,7 @@
           <p:cNvPr id="9" name="Slide Number Placeholder 8">
             <a:extLst>
               <a:ext uri="{FF2B5EF4-FFF2-40B4-BE49-F238E27FC236}">
-                <a16:creationId xmlns:a16="http://schemas.microsoft.com/office/drawing/2014/main" id="{999B2253-74CC-409E-BEB0-F8EFCFCB5629}"/>
+                <a16:creationId xmlns:a16="http://schemas.microsoft.com/office/drawing/2014/main" xmlns="" id="{999B2253-74CC-409E-BEB0-F8EFCFCB5629}"/>
               </a:ext>
             </a:extLst>
           </p:cNvPr>
@@ -656,7 +657,7 @@
           <p:cNvPr id="9" name="Rectangle 8">
             <a:extLst>
               <a:ext uri="{FF2B5EF4-FFF2-40B4-BE49-F238E27FC236}">
-                <a16:creationId xmlns:a16="http://schemas.microsoft.com/office/drawing/2014/main" id="{E1B68A5B-D9FA-424B-A4EB-30E7223836B3}"/>
+                <a16:creationId xmlns:a16="http://schemas.microsoft.com/office/drawing/2014/main" xmlns="" id="{E1B68A5B-D9FA-424B-A4EB-30E7223836B3}"/>
               </a:ext>
             </a:extLst>
           </p:cNvPr>
@@ -785,7 +786,7 @@
           <p:cNvPr id="7" name="Date Placeholder 6">
             <a:extLst>
               <a:ext uri="{FF2B5EF4-FFF2-40B4-BE49-F238E27FC236}">
-                <a16:creationId xmlns:a16="http://schemas.microsoft.com/office/drawing/2014/main" id="{AF33D6B0-F070-45C4-A472-19F432BE3932}"/>
+                <a16:creationId xmlns:a16="http://schemas.microsoft.com/office/drawing/2014/main" xmlns="" id="{AF33D6B0-F070-45C4-A472-19F432BE3932}"/>
               </a:ext>
             </a:extLst>
           </p:cNvPr>
@@ -803,7 +804,7 @@
           <a:p>
             <a:fld id="{6587DA83-5663-4C9C-B9AA-0B40A3DAFF81}" type="datetime1">
               <a:rPr lang="en-US" smtClean="0"/>
-              <a:t>4/21/2026</a:t>
+              <a:t>4/22/2026</a:t>
             </a:fld>
             <a:endParaRPr lang="en-US" dirty="0"/>
           </a:p>
@@ -814,7 +815,7 @@
           <p:cNvPr id="8" name="Footer Placeholder 7">
             <a:extLst>
               <a:ext uri="{FF2B5EF4-FFF2-40B4-BE49-F238E27FC236}">
-                <a16:creationId xmlns:a16="http://schemas.microsoft.com/office/drawing/2014/main" id="{9975399F-DAB2-410D-967F-ED17E6F796E7}"/>
+                <a16:creationId xmlns:a16="http://schemas.microsoft.com/office/drawing/2014/main" xmlns="" id="{9975399F-DAB2-410D-967F-ED17E6F796E7}"/>
               </a:ext>
             </a:extLst>
           </p:cNvPr>
@@ -839,7 +840,7 @@
           <p:cNvPr id="10" name="Slide Number Placeholder 9">
             <a:extLst>
               <a:ext uri="{FF2B5EF4-FFF2-40B4-BE49-F238E27FC236}">
-                <a16:creationId xmlns:a16="http://schemas.microsoft.com/office/drawing/2014/main" id="{F762A46F-6BE5-4D12-9412-5CA7672EA8EC}"/>
+                <a16:creationId xmlns:a16="http://schemas.microsoft.com/office/drawing/2014/main" xmlns="" id="{F762A46F-6BE5-4D12-9412-5CA7672EA8EC}"/>
               </a:ext>
             </a:extLst>
           </p:cNvPr>
@@ -973,7 +974,7 @@
           <p:cNvPr id="7" name="Date Placeholder 6">
             <a:extLst>
               <a:ext uri="{FF2B5EF4-FFF2-40B4-BE49-F238E27FC236}">
-                <a16:creationId xmlns:a16="http://schemas.microsoft.com/office/drawing/2014/main" id="{354D8B55-9EA8-4B81-8E84-9B93B0A27559}"/>
+                <a16:creationId xmlns:a16="http://schemas.microsoft.com/office/drawing/2014/main" xmlns="" id="{354D8B55-9EA8-4B81-8E84-9B93B0A27559}"/>
               </a:ext>
             </a:extLst>
           </p:cNvPr>
@@ -991,7 +992,7 @@
           <a:p>
             <a:fld id="{4BE1D723-8F53-4F53-90B0-1982A396982E}" type="datetime1">
               <a:rPr lang="en-US" smtClean="0"/>
-              <a:t>4/21/2026</a:t>
+              <a:t>4/22/2026</a:t>
             </a:fld>
             <a:endParaRPr lang="en-US" dirty="0"/>
           </a:p>
@@ -1002,7 +1003,7 @@
           <p:cNvPr id="8" name="Footer Placeholder 7">
             <a:extLst>
               <a:ext uri="{FF2B5EF4-FFF2-40B4-BE49-F238E27FC236}">
-                <a16:creationId xmlns:a16="http://schemas.microsoft.com/office/drawing/2014/main" id="{062CA021-2578-47CB-822C-BDDFF7223B28}"/>
+                <a16:creationId xmlns:a16="http://schemas.microsoft.com/office/drawing/2014/main" xmlns="" id="{062CA021-2578-47CB-822C-BDDFF7223B28}"/>
               </a:ext>
             </a:extLst>
           </p:cNvPr>
@@ -1027,7 +1028,7 @@
           <p:cNvPr id="9" name="Slide Number Placeholder 8">
             <a:extLst>
               <a:ext uri="{FF2B5EF4-FFF2-40B4-BE49-F238E27FC236}">
-                <a16:creationId xmlns:a16="http://schemas.microsoft.com/office/drawing/2014/main" id="{C4AAB51D-4141-4682-9375-DAFD5FB9DD10}"/>
+                <a16:creationId xmlns:a16="http://schemas.microsoft.com/office/drawing/2014/main" xmlns="" id="{C4AAB51D-4141-4682-9375-DAFD5FB9DD10}"/>
               </a:ext>
             </a:extLst>
           </p:cNvPr>
@@ -1094,7 +1095,7 @@
           <p:cNvPr id="10" name="Rectangle 9">
             <a:extLst>
               <a:ext uri="{FF2B5EF4-FFF2-40B4-BE49-F238E27FC236}">
-                <a16:creationId xmlns:a16="http://schemas.microsoft.com/office/drawing/2014/main" id="{A585C21A-8B93-4657-B5DF-7EAEAD3BE127}"/>
+                <a16:creationId xmlns:a16="http://schemas.microsoft.com/office/drawing/2014/main" xmlns="" id="{A585C21A-8B93-4657-B5DF-7EAEAD3BE127}"/>
               </a:ext>
             </a:extLst>
           </p:cNvPr>
@@ -1302,7 +1303,7 @@
           <p:cNvPr id="9" name="Straight Connector 8">
             <a:extLst>
               <a:ext uri="{FF2B5EF4-FFF2-40B4-BE49-F238E27FC236}">
-                <a16:creationId xmlns:a16="http://schemas.microsoft.com/office/drawing/2014/main" id="{459DE2C1-4C52-40A3-8959-27B2C1BEBFF6}"/>
+                <a16:creationId xmlns:a16="http://schemas.microsoft.com/office/drawing/2014/main" xmlns="" id="{459DE2C1-4C52-40A3-8959-27B2C1BEBFF6}"/>
               </a:ext>
             </a:extLst>
           </p:cNvPr>
@@ -1346,7 +1347,7 @@
           <p:cNvPr id="7" name="Date Placeholder 6">
             <a:extLst>
               <a:ext uri="{FF2B5EF4-FFF2-40B4-BE49-F238E27FC236}">
-                <a16:creationId xmlns:a16="http://schemas.microsoft.com/office/drawing/2014/main" id="{AAF2E137-EC28-48F8-9198-1F02539029B6}"/>
+                <a16:creationId xmlns:a16="http://schemas.microsoft.com/office/drawing/2014/main" xmlns="" id="{AAF2E137-EC28-48F8-9198-1F02539029B6}"/>
               </a:ext>
             </a:extLst>
           </p:cNvPr>
@@ -1364,7 +1365,7 @@
           <a:p>
             <a:fld id="{97669AF7-7BEB-44E4-9852-375E34362B5B}" type="datetime1">
               <a:rPr lang="en-US" smtClean="0"/>
-              <a:t>4/21/2026</a:t>
+              <a:t>4/22/2026</a:t>
             </a:fld>
             <a:endParaRPr lang="en-US" dirty="0"/>
           </a:p>
@@ -1375,7 +1376,7 @@
           <p:cNvPr id="8" name="Footer Placeholder 7">
             <a:extLst>
               <a:ext uri="{FF2B5EF4-FFF2-40B4-BE49-F238E27FC236}">
-                <a16:creationId xmlns:a16="http://schemas.microsoft.com/office/drawing/2014/main" id="{189422CD-6F62-4DD6-89EF-07A60B42D219}"/>
+                <a16:creationId xmlns:a16="http://schemas.microsoft.com/office/drawing/2014/main" xmlns="" id="{189422CD-6F62-4DD6-89EF-07A60B42D219}"/>
               </a:ext>
             </a:extLst>
           </p:cNvPr>
@@ -1400,7 +1401,7 @@
           <p:cNvPr id="11" name="Slide Number Placeholder 10">
             <a:extLst>
               <a:ext uri="{FF2B5EF4-FFF2-40B4-BE49-F238E27FC236}">
-                <a16:creationId xmlns:a16="http://schemas.microsoft.com/office/drawing/2014/main" id="{69C6AFF8-42B4-4D05-969B-9F5FB3355555}"/>
+                <a16:creationId xmlns:a16="http://schemas.microsoft.com/office/drawing/2014/main" xmlns="" id="{69C6AFF8-42B4-4D05-969B-9F5FB3355555}"/>
               </a:ext>
             </a:extLst>
           </p:cNvPr>
@@ -1601,7 +1602,7 @@
           <p:cNvPr id="2" name="Date Placeholder 1">
             <a:extLst>
               <a:ext uri="{FF2B5EF4-FFF2-40B4-BE49-F238E27FC236}">
-                <a16:creationId xmlns:a16="http://schemas.microsoft.com/office/drawing/2014/main" id="{5782D47D-B0DC-4C40-BCC6-BBBA32584A38}"/>
+                <a16:creationId xmlns:a16="http://schemas.microsoft.com/office/drawing/2014/main" xmlns="" id="{5782D47D-B0DC-4C40-BCC6-BBBA32584A38}"/>
               </a:ext>
             </a:extLst>
           </p:cNvPr>
@@ -1619,7 +1620,7 @@
           <a:p>
             <a:fld id="{BAAAC38D-0552-4C82-B593-E6124DFADBE2}" type="datetime1">
               <a:rPr lang="en-US" smtClean="0"/>
-              <a:t>4/21/2026</a:t>
+              <a:t>4/22/2026</a:t>
             </a:fld>
             <a:endParaRPr lang="en-US" dirty="0"/>
           </a:p>
@@ -1630,7 +1631,7 @@
           <p:cNvPr id="9" name="Footer Placeholder 8">
             <a:extLst>
               <a:ext uri="{FF2B5EF4-FFF2-40B4-BE49-F238E27FC236}">
-                <a16:creationId xmlns:a16="http://schemas.microsoft.com/office/drawing/2014/main" id="{4690D34E-7EBD-44B2-83CA-4C126A18D7EF}"/>
+                <a16:creationId xmlns:a16="http://schemas.microsoft.com/office/drawing/2014/main" xmlns="" id="{4690D34E-7EBD-44B2-83CA-4C126A18D7EF}"/>
               </a:ext>
             </a:extLst>
           </p:cNvPr>
@@ -1655,7 +1656,7 @@
           <p:cNvPr id="10" name="Slide Number Placeholder 9">
             <a:extLst>
               <a:ext uri="{FF2B5EF4-FFF2-40B4-BE49-F238E27FC236}">
-                <a16:creationId xmlns:a16="http://schemas.microsoft.com/office/drawing/2014/main" id="{2AC511A1-9BBD-42DE-92FB-2AF44F8E97A9}"/>
+                <a16:creationId xmlns:a16="http://schemas.microsoft.com/office/drawing/2014/main" xmlns="" id="{2AC511A1-9BBD-42DE-92FB-2AF44F8E97A9}"/>
               </a:ext>
             </a:extLst>
           </p:cNvPr>
@@ -1998,7 +1999,7 @@
           <p:cNvPr id="2" name="Date Placeholder 1">
             <a:extLst>
               <a:ext uri="{FF2B5EF4-FFF2-40B4-BE49-F238E27FC236}">
-                <a16:creationId xmlns:a16="http://schemas.microsoft.com/office/drawing/2014/main" id="{8AF8A515-AA94-45D1-9223-5C2272618D85}"/>
+                <a16:creationId xmlns:a16="http://schemas.microsoft.com/office/drawing/2014/main" xmlns="" id="{8AF8A515-AA94-45D1-9223-5C2272618D85}"/>
               </a:ext>
             </a:extLst>
           </p:cNvPr>
@@ -2016,7 +2017,7 @@
           <a:p>
             <a:fld id="{D9DF0F1C-5577-4ACB-BB62-DF8F3C494C7E}" type="datetime1">
               <a:rPr lang="en-US" smtClean="0"/>
-              <a:t>4/21/2026</a:t>
+              <a:t>4/22/2026</a:t>
             </a:fld>
             <a:endParaRPr lang="en-US" dirty="0"/>
           </a:p>
@@ -2027,7 +2028,7 @@
           <p:cNvPr id="11" name="Footer Placeholder 10">
             <a:extLst>
               <a:ext uri="{FF2B5EF4-FFF2-40B4-BE49-F238E27FC236}">
-                <a16:creationId xmlns:a16="http://schemas.microsoft.com/office/drawing/2014/main" id="{D052F5BC-98E0-4D60-AD67-9547738B7DD4}"/>
+                <a16:creationId xmlns:a16="http://schemas.microsoft.com/office/drawing/2014/main" xmlns="" id="{D052F5BC-98E0-4D60-AD67-9547738B7DD4}"/>
               </a:ext>
             </a:extLst>
           </p:cNvPr>
@@ -2052,7 +2053,7 @@
           <p:cNvPr id="12" name="Slide Number Placeholder 11">
             <a:extLst>
               <a:ext uri="{FF2B5EF4-FFF2-40B4-BE49-F238E27FC236}">
-                <a16:creationId xmlns:a16="http://schemas.microsoft.com/office/drawing/2014/main" id="{A38552DC-952E-41EA-AAAF-C2187523C0B0}"/>
+                <a16:creationId xmlns:a16="http://schemas.microsoft.com/office/drawing/2014/main" xmlns="" id="{A38552DC-952E-41EA-AAAF-C2187523C0B0}"/>
               </a:ext>
             </a:extLst>
           </p:cNvPr>
@@ -2134,7 +2135,7 @@
           <p:cNvPr id="6" name="Date Placeholder 5">
             <a:extLst>
               <a:ext uri="{FF2B5EF4-FFF2-40B4-BE49-F238E27FC236}">
-                <a16:creationId xmlns:a16="http://schemas.microsoft.com/office/drawing/2014/main" id="{7392073F-158F-44A3-8913-917AFFC1BC20}"/>
+                <a16:creationId xmlns:a16="http://schemas.microsoft.com/office/drawing/2014/main" xmlns="" id="{7392073F-158F-44A3-8913-917AFFC1BC20}"/>
               </a:ext>
             </a:extLst>
           </p:cNvPr>
@@ -2152,7 +2153,7 @@
           <a:p>
             <a:fld id="{1775B394-D9F9-4F0C-B15D-605F45CB9E9F}" type="datetime1">
               <a:rPr lang="en-US" smtClean="0"/>
-              <a:t>4/21/2026</a:t>
+              <a:t>4/22/2026</a:t>
             </a:fld>
             <a:endParaRPr lang="en-US" dirty="0"/>
           </a:p>
@@ -2163,7 +2164,7 @@
           <p:cNvPr id="7" name="Footer Placeholder 6">
             <a:extLst>
               <a:ext uri="{FF2B5EF4-FFF2-40B4-BE49-F238E27FC236}">
-                <a16:creationId xmlns:a16="http://schemas.microsoft.com/office/drawing/2014/main" id="{EED72207-24CA-42B7-A975-2F8E41CBA904}"/>
+                <a16:creationId xmlns:a16="http://schemas.microsoft.com/office/drawing/2014/main" xmlns="" id="{EED72207-24CA-42B7-A975-2F8E41CBA904}"/>
               </a:ext>
             </a:extLst>
           </p:cNvPr>
@@ -2188,7 +2189,7 @@
           <p:cNvPr id="8" name="Slide Number Placeholder 7">
             <a:extLst>
               <a:ext uri="{FF2B5EF4-FFF2-40B4-BE49-F238E27FC236}">
-                <a16:creationId xmlns:a16="http://schemas.microsoft.com/office/drawing/2014/main" id="{D01080F2-251A-4B88-9A62-16F46D724F83}"/>
+                <a16:creationId xmlns:a16="http://schemas.microsoft.com/office/drawing/2014/main" xmlns="" id="{D01080F2-251A-4B88-9A62-16F46D724F83}"/>
               </a:ext>
             </a:extLst>
           </p:cNvPr>
@@ -2247,7 +2248,7 @@
           <p:cNvPr id="10" name="Rectangle 9">
             <a:extLst>
               <a:ext uri="{FF2B5EF4-FFF2-40B4-BE49-F238E27FC236}">
-                <a16:creationId xmlns:a16="http://schemas.microsoft.com/office/drawing/2014/main" id="{A8E9C91B-7EAD-4562-AB0E-DFB9663AECE3}"/>
+                <a16:creationId xmlns:a16="http://schemas.microsoft.com/office/drawing/2014/main" xmlns="" id="{A8E9C91B-7EAD-4562-AB0E-DFB9663AECE3}"/>
               </a:ext>
             </a:extLst>
           </p:cNvPr>
@@ -2291,7 +2292,7 @@
           <p:cNvPr id="2" name="Date Placeholder 1">
             <a:extLst>
               <a:ext uri="{FF2B5EF4-FFF2-40B4-BE49-F238E27FC236}">
-                <a16:creationId xmlns:a16="http://schemas.microsoft.com/office/drawing/2014/main" id="{94E9223F-721F-47BF-9FD5-0F8D12FF0DE1}"/>
+                <a16:creationId xmlns:a16="http://schemas.microsoft.com/office/drawing/2014/main" xmlns="" id="{94E9223F-721F-47BF-9FD5-0F8D12FF0DE1}"/>
               </a:ext>
             </a:extLst>
           </p:cNvPr>
@@ -2309,7 +2310,7 @@
           <a:p>
             <a:fld id="{39667345-2558-425A-8533-9BFDBCE15005}" type="datetime1">
               <a:rPr lang="en-US" smtClean="0"/>
-              <a:t>4/21/2026</a:t>
+              <a:t>4/22/2026</a:t>
             </a:fld>
             <a:endParaRPr lang="en-US" dirty="0"/>
           </a:p>
@@ -2320,7 +2321,7 @@
           <p:cNvPr id="3" name="Footer Placeholder 2">
             <a:extLst>
               <a:ext uri="{FF2B5EF4-FFF2-40B4-BE49-F238E27FC236}">
-                <a16:creationId xmlns:a16="http://schemas.microsoft.com/office/drawing/2014/main" id="{05915714-6BBA-4593-8591-4E26F7D58D9F}"/>
+                <a16:creationId xmlns:a16="http://schemas.microsoft.com/office/drawing/2014/main" xmlns="" id="{05915714-6BBA-4593-8591-4E26F7D58D9F}"/>
               </a:ext>
             </a:extLst>
           </p:cNvPr>
@@ -2345,7 +2346,7 @@
           <p:cNvPr id="4" name="Slide Number Placeholder 3">
             <a:extLst>
               <a:ext uri="{FF2B5EF4-FFF2-40B4-BE49-F238E27FC236}">
-                <a16:creationId xmlns:a16="http://schemas.microsoft.com/office/drawing/2014/main" id="{BE06F857-D2E1-44DD-ABDD-EBB739645B67}"/>
+                <a16:creationId xmlns:a16="http://schemas.microsoft.com/office/drawing/2014/main" xmlns="" id="{BE06F857-D2E1-44DD-ABDD-EBB739645B67}"/>
               </a:ext>
             </a:extLst>
           </p:cNvPr>
@@ -2404,7 +2405,7 @@
           <p:cNvPr id="8" name="Rectangle 7">
             <a:extLst>
               <a:ext uri="{FF2B5EF4-FFF2-40B4-BE49-F238E27FC236}">
-                <a16:creationId xmlns:a16="http://schemas.microsoft.com/office/drawing/2014/main" id="{16D90D66-BCB9-4229-A829-628874352AC0}"/>
+                <a16:creationId xmlns:a16="http://schemas.microsoft.com/office/drawing/2014/main" xmlns="" id="{16D90D66-BCB9-4229-A829-628874352AC0}"/>
               </a:ext>
             </a:extLst>
           </p:cNvPr>
@@ -2638,7 +2639,7 @@
           <a:p>
             <a:fld id="{92BEA474-078D-4E9B-9B14-09A87B19DC46}" type="datetime1">
               <a:rPr lang="en-US" smtClean="0"/>
-              <a:t>4/21/2026</a:t>
+              <a:t>4/22/2026</a:t>
             </a:fld>
             <a:endParaRPr lang="en-US" dirty="0"/>
           </a:p>
@@ -2743,7 +2744,7 @@
           <p:cNvPr id="8" name="Rectangle 7">
             <a:extLst>
               <a:ext uri="{FF2B5EF4-FFF2-40B4-BE49-F238E27FC236}">
-                <a16:creationId xmlns:a16="http://schemas.microsoft.com/office/drawing/2014/main" id="{DA134939-39C0-4522-A125-A13DFDA66490}"/>
+                <a16:creationId xmlns:a16="http://schemas.microsoft.com/office/drawing/2014/main" xmlns="" id="{DA134939-39C0-4522-A125-A13DFDA66490}"/>
               </a:ext>
             </a:extLst>
           </p:cNvPr>
@@ -2988,7 +2989,7 @@
           <a:p>
             <a:fld id="{4907D986-8816-4272-A432-0437A28A9828}" type="datetime1">
               <a:rPr lang="en-US" smtClean="0"/>
-              <a:t>4/21/2026</a:t>
+              <a:t>4/22/2026</a:t>
             </a:fld>
             <a:endParaRPr lang="en-US" dirty="0"/>
           </a:p>
@@ -3082,7 +3083,7 @@
           <p:cNvPr id="7" name="Rectangle 6">
             <a:extLst>
               <a:ext uri="{FF2B5EF4-FFF2-40B4-BE49-F238E27FC236}">
-                <a16:creationId xmlns:a16="http://schemas.microsoft.com/office/drawing/2014/main" id="{416A0E3C-60E6-4F39-BC55-5F7C224E1F7C}"/>
+                <a16:creationId xmlns:a16="http://schemas.microsoft.com/office/drawing/2014/main" xmlns="" id="{416A0E3C-60E6-4F39-BC55-5F7C224E1F7C}"/>
               </a:ext>
             </a:extLst>
           </p:cNvPr>
@@ -3249,7 +3250,7 @@
           <a:p>
             <a:fld id="{62D6E202-B606-4609-B914-27C9371A1F6D}" type="datetime1">
               <a:rPr lang="en-US" smtClean="0"/>
-              <a:t>4/21/2026</a:t>
+              <a:t>4/22/2026</a:t>
             </a:fld>
             <a:endParaRPr lang="en-US" dirty="0"/>
           </a:p>
@@ -3334,7 +3335,7 @@
           <p:cNvPr id="10" name="Straight Connector 9">
             <a:extLst>
               <a:ext uri="{FF2B5EF4-FFF2-40B4-BE49-F238E27FC236}">
-                <a16:creationId xmlns:a16="http://schemas.microsoft.com/office/drawing/2014/main" id="{C5025DAC-8B93-4160-B017-3A274A5828C0}"/>
+                <a16:creationId xmlns:a16="http://schemas.microsoft.com/office/drawing/2014/main" xmlns="" id="{C5025DAC-8B93-4160-B017-3A274A5828C0}"/>
               </a:ext>
             </a:extLst>
           </p:cNvPr>
@@ -3784,7 +3785,7 @@
         </p:nvSpPr>
         <p:spPr>
           <a:xfrm>
-            <a:off x="1066800" y="752936"/>
+            <a:off x="1075266" y="1142402"/>
             <a:ext cx="10058400" cy="2423401"/>
           </a:xfrm>
         </p:spPr>
@@ -3794,12 +3795,27 @@
           <a:p>
             <a:pPr algn="ctr"/>
             <a:r>
-              <a:rPr sz="4400" dirty="0" err="1"/>
+              <a:rPr lang="ro-RO" sz="4400" dirty="0" smtClean="0"/>
+              <a:t>Tema 20</a:t>
+            </a:r>
+            <a:br>
+              <a:rPr lang="ro-RO" sz="4400" dirty="0" smtClean="0"/>
+            </a:br>
+            <a:r>
+              <a:rPr sz="4400" dirty="0" err="1" smtClean="0"/>
               <a:t>Testarea</a:t>
             </a:r>
             <a:r>
-              <a:rPr sz="4400" dirty="0"/>
-              <a:t> property-based </a:t>
+              <a:rPr sz="4400" dirty="0" smtClean="0"/>
+              <a:t> property-based</a:t>
+            </a:r>
+            <a:r>
+              <a:rPr lang="ro-RO" sz="4400" dirty="0" smtClean="0"/>
+              <a:t> a modulelor software</a:t>
+            </a:r>
+            <a:r>
+              <a:rPr sz="4400" dirty="0" smtClean="0"/>
+              <a:t> </a:t>
             </a:r>
             <a:r>
               <a:rPr sz="4400" dirty="0" err="1"/>
@@ -3829,178 +3845,614 @@
         </p:nvSpPr>
         <p:spPr>
           <a:xfrm>
-            <a:off x="1066800" y="3946518"/>
+            <a:off x="1112108" y="4681029"/>
             <a:ext cx="10058400" cy="1143000"/>
           </a:xfrm>
         </p:spPr>
         <p:txBody>
           <a:bodyPr>
-            <a:normAutofit fontScale="40000" lnSpcReduction="20000"/>
+            <a:noAutofit/>
           </a:bodyPr>
           <a:lstStyle/>
           <a:p>
             <a:pPr algn="ctr"/>
             <a:r>
-              <a:rPr sz="2000" b="1" dirty="0"/>
+              <a:rPr lang="it-IT" sz="1400" spc="-50" dirty="0" smtClean="0">
+                <a:solidFill>
+                  <a:schemeClr val="tx1">
+                    <a:lumMod val="85000"/>
+                    <a:lumOff val="15000"/>
+                  </a:schemeClr>
+                </a:solidFill>
+                <a:latin typeface="+mj-lt"/>
+                <a:ea typeface="+mj-ea"/>
+                <a:cs typeface="+mj-cs"/>
+              </a:rPr>
               <a:t>Metode </a:t>
             </a:r>
             <a:r>
-              <a:rPr sz="2000" b="1" dirty="0" err="1"/>
-              <a:t>Formale</a:t>
-            </a:r>
-            <a:r>
-              <a:rPr sz="2000" b="1" dirty="0"/>
-              <a:t> in </a:t>
-            </a:r>
-            <a:r>
-              <a:rPr sz="2000" b="1" dirty="0" err="1"/>
-              <a:t>Ingineria</a:t>
-            </a:r>
-            <a:r>
-              <a:rPr sz="2000" b="1" dirty="0"/>
-              <a:t> Software</a:t>
-            </a:r>
+              <a:rPr lang="it-IT" sz="1400" spc="-50" dirty="0">
+                <a:solidFill>
+                  <a:schemeClr val="tx1">
+                    <a:lumMod val="85000"/>
+                    <a:lumOff val="15000"/>
+                  </a:schemeClr>
+                </a:solidFill>
+                <a:latin typeface="+mj-lt"/>
+                <a:ea typeface="+mj-ea"/>
+                <a:cs typeface="+mj-cs"/>
+              </a:rPr>
+              <a:t>Formale in Ingineria </a:t>
+            </a:r>
+            <a:r>
+              <a:rPr lang="it-IT" sz="1400" spc="-50" dirty="0">
+                <a:solidFill>
+                  <a:schemeClr val="tx1">
+                    <a:lumMod val="85000"/>
+                    <a:lumOff val="15000"/>
+                  </a:schemeClr>
+                </a:solidFill>
+                <a:latin typeface="+mj-lt"/>
+                <a:ea typeface="+mj-ea"/>
+                <a:cs typeface="+mj-cs"/>
+              </a:rPr>
+              <a:t>Software</a:t>
+            </a:r>
+            <a:endParaRPr sz="1400" spc="-50" dirty="0">
+              <a:solidFill>
+                <a:schemeClr val="tx1">
+                  <a:lumMod val="85000"/>
+                  <a:lumOff val="15000"/>
+                </a:schemeClr>
+              </a:solidFill>
+              <a:latin typeface="+mj-lt"/>
+              <a:ea typeface="+mj-ea"/>
+              <a:cs typeface="+mj-cs"/>
+            </a:endParaRPr>
           </a:p>
           <a:p>
             <a:pPr algn="ctr"/>
             <a:r>
-              <a:rPr sz="2000" b="1" dirty="0"/>
-              <a:t>Tema 20: </a:t>
-            </a:r>
-            <a:r>
-              <a:rPr sz="2000" b="1" dirty="0" err="1"/>
-              <a:t>testarea</a:t>
-            </a:r>
-            <a:r>
-              <a:rPr sz="2000" b="1" dirty="0"/>
-              <a:t> property-based a </a:t>
-            </a:r>
-            <a:r>
-              <a:rPr sz="2000" b="1" dirty="0" err="1"/>
-              <a:t>modulelor</a:t>
-            </a:r>
-            <a:r>
-              <a:rPr sz="2000" b="1" dirty="0"/>
-              <a:t> software</a:t>
-            </a:r>
+              <a:rPr lang="ro-RO" sz="1400" spc="-50" dirty="0" smtClean="0">
+                <a:solidFill>
+                  <a:schemeClr val="tx1">
+                    <a:lumMod val="85000"/>
+                    <a:lumOff val="15000"/>
+                  </a:schemeClr>
+                </a:solidFill>
+                <a:latin typeface="+mj-lt"/>
+                <a:ea typeface="+mj-ea"/>
+                <a:cs typeface="+mj-cs"/>
+              </a:rPr>
+              <a:t>Anul universitar 2025-2026</a:t>
+            </a:r>
+            <a:endParaRPr sz="1400" spc="-50" dirty="0">
+              <a:solidFill>
+                <a:schemeClr val="tx1">
+                  <a:lumMod val="85000"/>
+                  <a:lumOff val="15000"/>
+                </a:schemeClr>
+              </a:solidFill>
+              <a:latin typeface="+mj-lt"/>
+              <a:ea typeface="+mj-ea"/>
+              <a:cs typeface="+mj-cs"/>
+            </a:endParaRPr>
           </a:p>
           <a:p>
             <a:pPr algn="ctr"/>
             <a:r>
-              <a:rPr sz="2000" b="1" dirty="0"/>
-              <a:t>Mini-</a:t>
-            </a:r>
-            <a:r>
-              <a:rPr sz="2000" b="1" dirty="0" err="1"/>
-              <a:t>limbaj</a:t>
-            </a:r>
-            <a:r>
-              <a:rPr sz="2000" b="1" dirty="0"/>
-              <a:t> de </a:t>
-            </a:r>
-            <a:r>
-              <a:rPr sz="2000" b="1" dirty="0" err="1"/>
-              <a:t>expresii</a:t>
-            </a:r>
-            <a:r>
-              <a:rPr sz="2000" b="1" dirty="0"/>
-              <a:t> </a:t>
-            </a:r>
-            <a:r>
-              <a:rPr sz="2000" b="1" dirty="0" err="1"/>
-              <a:t>aritmetice</a:t>
-            </a:r>
-            <a:r>
-              <a:rPr sz="2000" b="1" dirty="0"/>
-              <a:t> in Haskell</a:t>
-            </a:r>
-          </a:p>
-          <a:p>
-            <a:pPr algn="ctr"/>
-            <a:r>
-              <a:rPr sz="2000" b="1" dirty="0" err="1"/>
+              <a:rPr sz="1400" spc="-50" dirty="0" err="1">
+                <a:solidFill>
+                  <a:schemeClr val="tx1">
+                    <a:lumMod val="85000"/>
+                    <a:lumOff val="15000"/>
+                  </a:schemeClr>
+                </a:solidFill>
+                <a:latin typeface="+mj-lt"/>
+                <a:ea typeface="+mj-ea"/>
+                <a:cs typeface="+mj-cs"/>
+              </a:rPr>
               <a:t>Echipa</a:t>
             </a:r>
             <a:r>
-              <a:rPr sz="2000" b="1" dirty="0"/>
+              <a:rPr sz="1400" spc="-50" dirty="0">
+                <a:solidFill>
+                  <a:schemeClr val="tx1">
+                    <a:lumMod val="85000"/>
+                    <a:lumOff val="15000"/>
+                  </a:schemeClr>
+                </a:solidFill>
+                <a:latin typeface="+mj-lt"/>
+                <a:ea typeface="+mj-ea"/>
+                <a:cs typeface="+mj-cs"/>
+              </a:rPr>
               <a:t>: </a:t>
             </a:r>
             <a:r>
-              <a:rPr lang="en-US" sz="2000" b="1" dirty="0"/>
-              <a:t>MIHAILA DENISA </a:t>
-            </a:r>
-            <a:r>
-              <a:rPr sz="2000" b="1" dirty="0"/>
+              <a:rPr lang="en-US" sz="1400" spc="-50" dirty="0">
+                <a:solidFill>
+                  <a:schemeClr val="tx1">
+                    <a:lumMod val="85000"/>
+                    <a:lumOff val="15000"/>
+                  </a:schemeClr>
+                </a:solidFill>
+                <a:latin typeface="+mj-lt"/>
+                <a:ea typeface="+mj-ea"/>
+                <a:cs typeface="+mj-cs"/>
+              </a:rPr>
+              <a:t>MIH</a:t>
+            </a:r>
+            <a:r>
+              <a:rPr lang="ro-RO" sz="1400" spc="-50" dirty="0">
+                <a:solidFill>
+                  <a:schemeClr val="tx1">
+                    <a:lumMod val="85000"/>
+                    <a:lumOff val="15000"/>
+                  </a:schemeClr>
+                </a:solidFill>
+                <a:latin typeface="+mj-lt"/>
+                <a:ea typeface="+mj-ea"/>
+                <a:cs typeface="+mj-cs"/>
+              </a:rPr>
+              <a:t>ă</a:t>
+            </a:r>
+            <a:r>
+              <a:rPr lang="en-US" sz="1400" spc="-50" dirty="0">
+                <a:solidFill>
+                  <a:schemeClr val="tx1">
+                    <a:lumMod val="85000"/>
+                    <a:lumOff val="15000"/>
+                  </a:schemeClr>
+                </a:solidFill>
+                <a:latin typeface="+mj-lt"/>
+                <a:ea typeface="+mj-ea"/>
+                <a:cs typeface="+mj-cs"/>
+              </a:rPr>
+              <a:t>IL</a:t>
+            </a:r>
+            <a:r>
+              <a:rPr lang="ro-RO" sz="1400" spc="-50" dirty="0">
+                <a:solidFill>
+                  <a:schemeClr val="tx1">
+                    <a:lumMod val="85000"/>
+                    <a:lumOff val="15000"/>
+                  </a:schemeClr>
+                </a:solidFill>
+                <a:latin typeface="+mj-lt"/>
+                <a:ea typeface="+mj-ea"/>
+                <a:cs typeface="+mj-cs"/>
+              </a:rPr>
+              <a:t>ă</a:t>
+            </a:r>
+            <a:r>
+              <a:rPr lang="en-US" sz="1400" spc="-50" dirty="0">
+                <a:solidFill>
+                  <a:schemeClr val="tx1">
+                    <a:lumMod val="85000"/>
+                    <a:lumOff val="15000"/>
+                  </a:schemeClr>
+                </a:solidFill>
+                <a:latin typeface="+mj-lt"/>
+                <a:ea typeface="+mj-ea"/>
+                <a:cs typeface="+mj-cs"/>
+              </a:rPr>
+              <a:t> </a:t>
+            </a:r>
+            <a:r>
+              <a:rPr lang="en-US" sz="1400" spc="-50" dirty="0">
+                <a:solidFill>
+                  <a:schemeClr val="tx1">
+                    <a:lumMod val="85000"/>
+                    <a:lumOff val="15000"/>
+                  </a:schemeClr>
+                </a:solidFill>
+                <a:latin typeface="+mj-lt"/>
+                <a:ea typeface="+mj-ea"/>
+                <a:cs typeface="+mj-cs"/>
+              </a:rPr>
+              <a:t>DENISA </a:t>
+            </a:r>
+            <a:r>
+              <a:rPr lang="ro-RO" sz="1400" spc="-50" dirty="0">
+                <a:solidFill>
+                  <a:schemeClr val="tx1">
+                    <a:lumMod val="85000"/>
+                    <a:lumOff val="15000"/>
+                  </a:schemeClr>
+                </a:solidFill>
+                <a:latin typeface="+mj-lt"/>
+                <a:ea typeface="+mj-ea"/>
+                <a:cs typeface="+mj-cs"/>
+              </a:rPr>
+              <a:t>(352)</a:t>
+            </a:r>
+            <a:r>
+              <a:rPr sz="1400" spc="-50" dirty="0">
+                <a:solidFill>
+                  <a:schemeClr val="tx1">
+                    <a:lumMod val="85000"/>
+                    <a:lumOff val="15000"/>
+                  </a:schemeClr>
+                </a:solidFill>
+                <a:latin typeface="+mj-lt"/>
+                <a:ea typeface="+mj-ea"/>
+                <a:cs typeface="+mj-cs"/>
+              </a:rPr>
               <a:t>, </a:t>
             </a:r>
             <a:r>
-              <a:rPr lang="en-US" sz="2000" b="1" dirty="0"/>
-              <a:t>NITE DAN-ALEXANDRU</a:t>
-            </a:r>
-            <a:endParaRPr sz="2000" b="1" dirty="0"/>
+              <a:rPr lang="en-US" sz="1400" spc="-50" dirty="0">
+                <a:solidFill>
+                  <a:schemeClr val="tx1">
+                    <a:lumMod val="85000"/>
+                    <a:lumOff val="15000"/>
+                  </a:schemeClr>
+                </a:solidFill>
+                <a:latin typeface="+mj-lt"/>
+                <a:ea typeface="+mj-ea"/>
+                <a:cs typeface="+mj-cs"/>
+              </a:rPr>
+              <a:t>Ni</a:t>
+            </a:r>
+            <a:r>
+              <a:rPr lang="ro-RO" sz="1400" spc="-50" dirty="0">
+                <a:solidFill>
+                  <a:schemeClr val="tx1">
+                    <a:lumMod val="85000"/>
+                    <a:lumOff val="15000"/>
+                  </a:schemeClr>
+                </a:solidFill>
+                <a:latin typeface="+mj-lt"/>
+                <a:ea typeface="+mj-ea"/>
+                <a:cs typeface="+mj-cs"/>
+              </a:rPr>
+              <a:t>ț</a:t>
+            </a:r>
+            <a:r>
+              <a:rPr lang="en-US" sz="1400" spc="-50" dirty="0">
+                <a:solidFill>
+                  <a:schemeClr val="tx1">
+                    <a:lumMod val="85000"/>
+                    <a:lumOff val="15000"/>
+                  </a:schemeClr>
+                </a:solidFill>
+                <a:latin typeface="+mj-lt"/>
+                <a:ea typeface="+mj-ea"/>
+                <a:cs typeface="+mj-cs"/>
+              </a:rPr>
+              <a:t>E DAN-ALEXANDRU</a:t>
+            </a:r>
+            <a:r>
+              <a:rPr lang="ro-RO" sz="1400" spc="-50" dirty="0">
+                <a:solidFill>
+                  <a:schemeClr val="tx1">
+                    <a:lumMod val="85000"/>
+                    <a:lumOff val="15000"/>
+                  </a:schemeClr>
+                </a:solidFill>
+                <a:latin typeface="+mj-lt"/>
+                <a:ea typeface="+mj-ea"/>
+                <a:cs typeface="+mj-cs"/>
+              </a:rPr>
+              <a:t> (344)</a:t>
+            </a:r>
+            <a:endParaRPr sz="1400" spc="-50" dirty="0">
+              <a:solidFill>
+                <a:schemeClr val="tx1">
+                  <a:lumMod val="85000"/>
+                  <a:lumOff val="15000"/>
+                </a:schemeClr>
+              </a:solidFill>
+              <a:latin typeface="+mj-lt"/>
+              <a:ea typeface="+mj-ea"/>
+              <a:cs typeface="+mj-cs"/>
+            </a:endParaRPr>
           </a:p>
         </p:txBody>
       </p:sp>
-      <p:pic>
-        <p:nvPicPr>
-          <p:cNvPr id="5" name="Picture 4">
-            <a:extLst>
-              <a:ext uri="{FF2B5EF4-FFF2-40B4-BE49-F238E27FC236}">
-                <a16:creationId xmlns:a16="http://schemas.microsoft.com/office/drawing/2014/main" id="{98859C77-2DD1-ABE7-3CC6-23F1E6F1FF3B}"/>
-              </a:ext>
-            </a:extLst>
-          </p:cNvPr>
-          <p:cNvPicPr>
-            <a:picLocks noChangeAspect="1"/>
-          </p:cNvPicPr>
+      <p:sp>
+        <p:nvSpPr>
+          <p:cNvPr id="6" name="Subtitle 2"/>
+          <p:cNvSpPr txBox="1">
+            <a:spLocks/>
+          </p:cNvSpPr>
           <p:nvPr/>
-        </p:nvPicPr>
-        <p:blipFill>
-          <a:blip r:embed="rId2"/>
-          <a:stretch>
-            <a:fillRect/>
-          </a:stretch>
-        </p:blipFill>
+        </p:nvSpPr>
         <p:spPr>
           <a:xfrm>
-            <a:off x="835226" y="3884517"/>
-            <a:ext cx="3134794" cy="2301366"/>
+            <a:off x="4580466" y="312229"/>
+            <a:ext cx="3313441" cy="847704"/>
           </a:xfrm>
           <a:prstGeom prst="rect">
             <a:avLst/>
           </a:prstGeom>
         </p:spPr>
-      </p:pic>
-      <p:pic>
-        <p:nvPicPr>
-          <p:cNvPr id="7" name="Picture 6">
-            <a:extLst>
-              <a:ext uri="{FF2B5EF4-FFF2-40B4-BE49-F238E27FC236}">
-                <a16:creationId xmlns:a16="http://schemas.microsoft.com/office/drawing/2014/main" id="{9E170917-4A1C-6282-B268-A4DDE831908F}"/>
-              </a:ext>
-            </a:extLst>
-          </p:cNvPr>
-          <p:cNvPicPr>
-            <a:picLocks noChangeAspect="1"/>
-          </p:cNvPicPr>
-          <p:nvPr/>
-        </p:nvPicPr>
-        <p:blipFill>
-          <a:blip r:embed="rId2"/>
-          <a:stretch>
-            <a:fillRect/>
-          </a:stretch>
-        </p:blipFill>
-        <p:spPr>
-          <a:xfrm>
-            <a:off x="8221980" y="3768197"/>
-            <a:ext cx="3134794" cy="2301365"/>
-          </a:xfrm>
-          <a:prstGeom prst="rect">
-            <a:avLst/>
-          </a:prstGeom>
-        </p:spPr>
-      </p:pic>
+        <p:txBody>
+          <a:bodyPr vert="horz" lIns="91440" tIns="45720" rIns="91440" bIns="45720" rtlCol="0">
+            <a:noAutofit/>
+          </a:bodyPr>
+          <a:lstStyle>
+            <a:lvl1pPr marL="0" indent="0" algn="l" defTabSz="914400" rtl="0" eaLnBrk="1" latinLnBrk="0" hangingPunct="1">
+              <a:lnSpc>
+                <a:spcPct val="110000"/>
+              </a:lnSpc>
+              <a:spcBef>
+                <a:spcPts val="1200"/>
+              </a:spcBef>
+              <a:spcAft>
+                <a:spcPts val="200"/>
+              </a:spcAft>
+              <a:buClr>
+                <a:schemeClr val="accent1"/>
+              </a:buClr>
+              <a:buSzPct val="100000"/>
+              <a:buFont typeface="Calibri" panose="020F0502020204030204" pitchFamily="34" charset="0"/>
+              <a:buNone/>
+              <a:defRPr sz="2400" kern="1200" cap="all" spc="200" baseline="0">
+                <a:solidFill>
+                  <a:schemeClr val="tx1"/>
+                </a:solidFill>
+                <a:latin typeface="+mn-lt"/>
+                <a:ea typeface="+mn-ea"/>
+                <a:cs typeface="+mn-cs"/>
+              </a:defRPr>
+            </a:lvl1pPr>
+            <a:lvl2pPr marL="457200" indent="0" algn="ctr" defTabSz="914400" rtl="0" eaLnBrk="1" latinLnBrk="0" hangingPunct="1">
+              <a:lnSpc>
+                <a:spcPct val="100000"/>
+              </a:lnSpc>
+              <a:spcBef>
+                <a:spcPts val="200"/>
+              </a:spcBef>
+              <a:spcAft>
+                <a:spcPts val="400"/>
+              </a:spcAft>
+              <a:buClrTx/>
+              <a:buFont typeface="Calibri" pitchFamily="34" charset="0"/>
+              <a:buNone/>
+              <a:defRPr sz="2400" kern="1200">
+                <a:solidFill>
+                  <a:schemeClr val="tx1">
+                    <a:lumMod val="75000"/>
+                    <a:lumOff val="25000"/>
+                  </a:schemeClr>
+                </a:solidFill>
+                <a:latin typeface="+mn-lt"/>
+                <a:ea typeface="+mn-ea"/>
+                <a:cs typeface="+mn-cs"/>
+              </a:defRPr>
+            </a:lvl2pPr>
+            <a:lvl3pPr marL="914400" indent="0" algn="ctr" defTabSz="914400" rtl="0" eaLnBrk="1" latinLnBrk="0" hangingPunct="1">
+              <a:lnSpc>
+                <a:spcPct val="100000"/>
+              </a:lnSpc>
+              <a:spcBef>
+                <a:spcPts val="200"/>
+              </a:spcBef>
+              <a:spcAft>
+                <a:spcPts val="400"/>
+              </a:spcAft>
+              <a:buClrTx/>
+              <a:buFont typeface="Calibri" pitchFamily="34" charset="0"/>
+              <a:buNone/>
+              <a:defRPr sz="2400" kern="1200">
+                <a:solidFill>
+                  <a:schemeClr val="tx1">
+                    <a:lumMod val="75000"/>
+                    <a:lumOff val="25000"/>
+                  </a:schemeClr>
+                </a:solidFill>
+                <a:latin typeface="+mn-lt"/>
+                <a:ea typeface="+mn-ea"/>
+                <a:cs typeface="+mn-cs"/>
+              </a:defRPr>
+            </a:lvl3pPr>
+            <a:lvl4pPr marL="1371600" indent="0" algn="ctr" defTabSz="914400" rtl="0" eaLnBrk="1" latinLnBrk="0" hangingPunct="1">
+              <a:lnSpc>
+                <a:spcPct val="100000"/>
+              </a:lnSpc>
+              <a:spcBef>
+                <a:spcPts val="200"/>
+              </a:spcBef>
+              <a:spcAft>
+                <a:spcPts val="400"/>
+              </a:spcAft>
+              <a:buClrTx/>
+              <a:buFont typeface="Calibri" pitchFamily="34" charset="0"/>
+              <a:buNone/>
+              <a:defRPr sz="2000" kern="1200">
+                <a:solidFill>
+                  <a:schemeClr val="tx1">
+                    <a:lumMod val="75000"/>
+                    <a:lumOff val="25000"/>
+                  </a:schemeClr>
+                </a:solidFill>
+                <a:latin typeface="+mn-lt"/>
+                <a:ea typeface="+mn-ea"/>
+                <a:cs typeface="+mn-cs"/>
+              </a:defRPr>
+            </a:lvl4pPr>
+            <a:lvl5pPr marL="1828800" indent="0" algn="ctr" defTabSz="914400" rtl="0" eaLnBrk="1" latinLnBrk="0" hangingPunct="1">
+              <a:lnSpc>
+                <a:spcPct val="100000"/>
+              </a:lnSpc>
+              <a:spcBef>
+                <a:spcPts val="200"/>
+              </a:spcBef>
+              <a:spcAft>
+                <a:spcPts val="400"/>
+              </a:spcAft>
+              <a:buClrTx/>
+              <a:buFont typeface="Calibri" pitchFamily="34" charset="0"/>
+              <a:buNone/>
+              <a:defRPr sz="2000" kern="1200">
+                <a:solidFill>
+                  <a:schemeClr val="tx1">
+                    <a:lumMod val="75000"/>
+                    <a:lumOff val="25000"/>
+                  </a:schemeClr>
+                </a:solidFill>
+                <a:latin typeface="+mn-lt"/>
+                <a:ea typeface="+mn-ea"/>
+                <a:cs typeface="+mn-cs"/>
+              </a:defRPr>
+            </a:lvl5pPr>
+            <a:lvl6pPr marL="2286000" indent="0" algn="ctr" defTabSz="914400" rtl="0" eaLnBrk="1" latinLnBrk="0" hangingPunct="1">
+              <a:lnSpc>
+                <a:spcPct val="90000"/>
+              </a:lnSpc>
+              <a:spcBef>
+                <a:spcPts val="200"/>
+              </a:spcBef>
+              <a:spcAft>
+                <a:spcPts val="400"/>
+              </a:spcAft>
+              <a:buClr>
+                <a:schemeClr val="accent1"/>
+              </a:buClr>
+              <a:buFont typeface="Calibri" pitchFamily="34" charset="0"/>
+              <a:buNone/>
+              <a:defRPr sz="2000" kern="1200">
+                <a:solidFill>
+                  <a:schemeClr val="tx1">
+                    <a:lumMod val="75000"/>
+                    <a:lumOff val="25000"/>
+                  </a:schemeClr>
+                </a:solidFill>
+                <a:latin typeface="+mn-lt"/>
+                <a:ea typeface="+mn-ea"/>
+                <a:cs typeface="+mn-cs"/>
+              </a:defRPr>
+            </a:lvl6pPr>
+            <a:lvl7pPr marL="2743200" indent="0" algn="ctr" defTabSz="914400" rtl="0" eaLnBrk="1" latinLnBrk="0" hangingPunct="1">
+              <a:lnSpc>
+                <a:spcPct val="90000"/>
+              </a:lnSpc>
+              <a:spcBef>
+                <a:spcPts val="200"/>
+              </a:spcBef>
+              <a:spcAft>
+                <a:spcPts val="400"/>
+              </a:spcAft>
+              <a:buClr>
+                <a:schemeClr val="accent1"/>
+              </a:buClr>
+              <a:buFont typeface="Calibri" pitchFamily="34" charset="0"/>
+              <a:buNone/>
+              <a:defRPr sz="2000" kern="1200">
+                <a:solidFill>
+                  <a:schemeClr val="tx1">
+                    <a:lumMod val="75000"/>
+                    <a:lumOff val="25000"/>
+                  </a:schemeClr>
+                </a:solidFill>
+                <a:latin typeface="+mn-lt"/>
+                <a:ea typeface="+mn-ea"/>
+                <a:cs typeface="+mn-cs"/>
+              </a:defRPr>
+            </a:lvl7pPr>
+            <a:lvl8pPr marL="3200400" indent="0" algn="ctr" defTabSz="914400" rtl="0" eaLnBrk="1" latinLnBrk="0" hangingPunct="1">
+              <a:lnSpc>
+                <a:spcPct val="90000"/>
+              </a:lnSpc>
+              <a:spcBef>
+                <a:spcPts val="200"/>
+              </a:spcBef>
+              <a:spcAft>
+                <a:spcPts val="400"/>
+              </a:spcAft>
+              <a:buClr>
+                <a:schemeClr val="accent1"/>
+              </a:buClr>
+              <a:buFont typeface="Calibri" pitchFamily="34" charset="0"/>
+              <a:buNone/>
+              <a:defRPr sz="2000" kern="1200">
+                <a:solidFill>
+                  <a:schemeClr val="tx1">
+                    <a:lumMod val="75000"/>
+                    <a:lumOff val="25000"/>
+                  </a:schemeClr>
+                </a:solidFill>
+                <a:latin typeface="+mn-lt"/>
+                <a:ea typeface="+mn-ea"/>
+                <a:cs typeface="+mn-cs"/>
+              </a:defRPr>
+            </a:lvl8pPr>
+            <a:lvl9pPr marL="3657600" indent="0" algn="ctr" defTabSz="914400" rtl="0" eaLnBrk="1" latinLnBrk="0" hangingPunct="1">
+              <a:lnSpc>
+                <a:spcPct val="90000"/>
+              </a:lnSpc>
+              <a:spcBef>
+                <a:spcPts val="200"/>
+              </a:spcBef>
+              <a:spcAft>
+                <a:spcPts val="400"/>
+              </a:spcAft>
+              <a:buClr>
+                <a:schemeClr val="accent1"/>
+              </a:buClr>
+              <a:buFont typeface="Calibri" pitchFamily="34" charset="0"/>
+              <a:buNone/>
+              <a:defRPr sz="2000" kern="1200">
+                <a:solidFill>
+                  <a:schemeClr val="tx1">
+                    <a:lumMod val="75000"/>
+                    <a:lumOff val="25000"/>
+                  </a:schemeClr>
+                </a:solidFill>
+                <a:latin typeface="+mn-lt"/>
+                <a:ea typeface="+mn-ea"/>
+                <a:cs typeface="+mn-cs"/>
+              </a:defRPr>
+            </a:lvl9pPr>
+          </a:lstStyle>
+          <a:p>
+            <a:pPr algn="ctr"/>
+            <a:r>
+              <a:rPr lang="ro-RO" sz="1050" spc="-50" dirty="0" smtClean="0">
+                <a:solidFill>
+                  <a:schemeClr val="tx1">
+                    <a:lumMod val="85000"/>
+                    <a:lumOff val="15000"/>
+                  </a:schemeClr>
+                </a:solidFill>
+                <a:latin typeface="+mj-lt"/>
+                <a:ea typeface="+mj-ea"/>
+                <a:cs typeface="+mj-cs"/>
+              </a:rPr>
+              <a:t>Universitatea din bucurești</a:t>
+            </a:r>
+          </a:p>
+          <a:p>
+            <a:pPr algn="ctr"/>
+            <a:r>
+              <a:rPr lang="ro-RO" sz="1050" spc="-50" dirty="0" smtClean="0">
+                <a:solidFill>
+                  <a:schemeClr val="tx1">
+                    <a:lumMod val="85000"/>
+                    <a:lumOff val="15000"/>
+                  </a:schemeClr>
+                </a:solidFill>
+                <a:latin typeface="+mj-lt"/>
+                <a:ea typeface="+mj-ea"/>
+                <a:cs typeface="+mj-cs"/>
+              </a:rPr>
+              <a:t>Facultatea de matematică și informatică</a:t>
+            </a:r>
+            <a:endParaRPr lang="vi-VN" sz="1050" spc="-50" dirty="0">
+              <a:solidFill>
+                <a:schemeClr val="tx1">
+                  <a:lumMod val="85000"/>
+                  <a:lumOff val="15000"/>
+                </a:schemeClr>
+              </a:solidFill>
+              <a:latin typeface="+mj-lt"/>
+              <a:ea typeface="+mj-ea"/>
+              <a:cs typeface="+mj-cs"/>
+            </a:endParaRPr>
+          </a:p>
+        </p:txBody>
+      </p:sp>
     </p:spTree>
   </p:cSld>
   <p:clrMapOvr>
@@ -4178,13 +4630,40 @@
               <a:t> </a:t>
             </a:r>
             <a:r>
-              <a:rPr b="0" i="0" dirty="0" err="1">
-                <a:solidFill>
-                  <a:srgbClr val="2F3338"/>
-                </a:solidFill>
-                <a:latin typeface="Segoe UI"/>
-              </a:rPr>
-              <a:t>prioritati</a:t>
+              <a:rPr b="0" i="0" dirty="0" err="1" smtClean="0">
+                <a:solidFill>
+                  <a:srgbClr val="2F3338"/>
+                </a:solidFill>
+                <a:latin typeface="Segoe UI"/>
+              </a:rPr>
+              <a:t>priorit</a:t>
+            </a:r>
+            <a:r>
+              <a:rPr lang="ro-RO" b="0" i="0" dirty="0" smtClean="0">
+                <a:solidFill>
+                  <a:srgbClr val="2F3338"/>
+                </a:solidFill>
+                <a:latin typeface="Segoe UI"/>
+              </a:rPr>
+              <a:t>ă</a:t>
+            </a:r>
+            <a:r>
+              <a:rPr lang="ro-RO" dirty="0">
+                <a:solidFill>
+                  <a:srgbClr val="2F3338"/>
+                </a:solidFill>
+                <a:latin typeface="Segoe UI"/>
+              </a:rPr>
+              <a:t>ț</a:t>
+            </a:r>
+            <a:r>
+              <a:rPr b="0" i="0" dirty="0" smtClean="0">
+                <a:solidFill>
+                  <a:srgbClr val="2F3338"/>
+                </a:solidFill>
+                <a:latin typeface="Segoe UI"/>
+              </a:rPr>
+              <a:t>i </a:t>
             </a:r>
             <a:r>
               <a:rPr b="0" i="0" dirty="0">
@@ -4193,7 +4672,7 @@
                 </a:solidFill>
                 <a:latin typeface="Segoe UI"/>
               </a:rPr>
-              <a:t> (</a:t>
+              <a:t>(</a:t>
             </a:r>
             <a:r>
               <a:rPr b="0" i="0" dirty="0" err="1">
@@ -4338,40 +4817,58 @@
               <a:t> </a:t>
             </a:r>
             <a:r>
-              <a:rPr b="0" i="0" dirty="0" err="1">
-                <a:solidFill>
-                  <a:srgbClr val="2F3338"/>
-                </a:solidFill>
-                <a:latin typeface="Segoe UI"/>
-              </a:rPr>
-              <a:t>respecta</a:t>
-            </a:r>
-            <a:r>
-              <a:rPr b="0" i="0" dirty="0">
-                <a:solidFill>
-                  <a:srgbClr val="2F3338"/>
-                </a:solidFill>
-                <a:latin typeface="Segoe UI"/>
-              </a:rPr>
-              <a:t> </a:t>
-            </a:r>
-            <a:r>
-              <a:rPr b="0" i="0" dirty="0" err="1">
-                <a:solidFill>
-                  <a:srgbClr val="2F3338"/>
-                </a:solidFill>
-                <a:latin typeface="Segoe UI"/>
-              </a:rPr>
-              <a:t>precedenta</a:t>
-            </a:r>
-            <a:r>
-              <a:rPr b="0" i="0" dirty="0">
-                <a:solidFill>
-                  <a:srgbClr val="2F3338"/>
-                </a:solidFill>
-                <a:latin typeface="Segoe UI"/>
-              </a:rPr>
-              <a:t> </a:t>
+              <a:rPr b="0" i="0" dirty="0" smtClean="0">
+                <a:solidFill>
+                  <a:srgbClr val="2F3338"/>
+                </a:solidFill>
+                <a:latin typeface="Segoe UI"/>
+              </a:rPr>
+              <a:t>respect</a:t>
+            </a:r>
+            <a:r>
+              <a:rPr lang="ro-RO" b="0" i="0" dirty="0" smtClean="0">
+                <a:solidFill>
+                  <a:srgbClr val="2F3338"/>
+                </a:solidFill>
+                <a:latin typeface="Segoe UI"/>
+              </a:rPr>
+              <a:t>ă</a:t>
+            </a:r>
+            <a:r>
+              <a:rPr b="0" i="0" dirty="0" smtClean="0">
+                <a:solidFill>
+                  <a:srgbClr val="2F3338"/>
+                </a:solidFill>
+                <a:latin typeface="Segoe UI"/>
+              </a:rPr>
+              <a:t> </a:t>
+            </a:r>
+            <a:r>
+              <a:rPr b="0" i="0" dirty="0" err="1" smtClean="0">
+                <a:solidFill>
+                  <a:srgbClr val="2F3338"/>
+                </a:solidFill>
+                <a:latin typeface="Segoe UI"/>
+              </a:rPr>
+              <a:t>preceden</a:t>
+            </a:r>
+            <a:r>
+              <a:rPr lang="ro-RO" b="0" i="0" dirty="0" smtClean="0">
+                <a:solidFill>
+                  <a:srgbClr val="2F3338"/>
+                </a:solidFill>
+                <a:latin typeface="Segoe UI"/>
+              </a:rPr>
+              <a:t>ț</a:t>
+            </a:r>
+            <a:r>
+              <a:rPr b="0" i="0" dirty="0" smtClean="0">
+                <a:solidFill>
+                  <a:srgbClr val="2F3338"/>
+                </a:solidFill>
+                <a:latin typeface="Segoe UI"/>
+              </a:rPr>
+              <a:t>a </a:t>
             </a:r>
             <a:r>
               <a:rPr b="0" i="0" dirty="0" err="1">
@@ -4555,22 +5052,22 @@
               <a:t> </a:t>
             </a:r>
             <a:r>
-              <a:rPr b="0" i="0" dirty="0" err="1">
-                <a:solidFill>
-                  <a:srgbClr val="2F3338"/>
-                </a:solidFill>
-                <a:latin typeface="Segoe UI"/>
-              </a:rPr>
-              <a:t>si</a:t>
-            </a:r>
-            <a:r>
-              <a:rPr b="0" i="0" dirty="0">
-                <a:solidFill>
-                  <a:srgbClr val="2F3338"/>
-                </a:solidFill>
-                <a:latin typeface="Segoe UI"/>
-              </a:rPr>
-              <a:t> </a:t>
+              <a:rPr lang="ro-RO" dirty="0" err="1">
+                <a:solidFill>
+                  <a:srgbClr val="2F3338"/>
+                </a:solidFill>
+                <a:latin typeface="Segoe UI"/>
+              </a:rPr>
+              <a:t>ș</a:t>
+            </a:r>
+            <a:r>
+              <a:rPr b="0" i="0" dirty="0" smtClean="0">
+                <a:solidFill>
+                  <a:srgbClr val="2F3338"/>
+                </a:solidFill>
+                <a:latin typeface="Segoe UI"/>
+              </a:rPr>
+              <a:t>i </a:t>
             </a:r>
             <a:r>
               <a:rPr b="0" i="0" dirty="0" err="1">
@@ -4827,21 +5324,34 @@
               <a:t> </a:t>
             </a:r>
             <a:r>
-              <a:rPr sz="3200" dirty="0" err="1">
+              <a:rPr sz="3200" dirty="0" err="1" smtClean="0">
                 <a:solidFill>
                   <a:schemeClr val="tx1"/>
                 </a:solidFill>
               </a:rPr>
-              <a:t>conteaza</a:t>
-            </a:r>
-            <a:r>
-              <a:rPr sz="3200" dirty="0">
+              <a:t>conteaz</a:t>
+            </a:r>
+            <a:r>
+              <a:rPr lang="ro-RO" sz="3200" dirty="0" smtClean="0">
                 <a:solidFill>
                   <a:schemeClr val="tx1"/>
                 </a:solidFill>
               </a:rPr>
+              <a:t>ă</a:t>
+            </a:r>
+            <a:r>
+              <a:rPr sz="3200" dirty="0" smtClean="0">
+                <a:solidFill>
+                  <a:schemeClr val="tx1"/>
+                </a:solidFill>
+              </a:rPr>
               <a:t>)</a:t>
             </a:r>
+            <a:endParaRPr sz="3200" dirty="0">
+              <a:solidFill>
+                <a:schemeClr val="tx1"/>
+              </a:solidFill>
+            </a:endParaRPr>
           </a:p>
         </p:txBody>
       </p:sp>
@@ -4945,13 +5455,49 @@
               <a:t>) nu </a:t>
             </a:r>
             <a:r>
+              <a:rPr sz="1600" b="0" i="0" dirty="0" err="1" smtClean="0">
+                <a:solidFill>
+                  <a:srgbClr val="2F2F2F"/>
+                </a:solidFill>
+                <a:latin typeface="Calibri"/>
+              </a:rPr>
+              <a:t>cunoa</a:t>
+            </a:r>
+            <a:r>
+              <a:rPr lang="ro-RO" sz="1600" b="0" i="0" dirty="0" smtClean="0">
+                <a:solidFill>
+                  <a:srgbClr val="2F2F2F"/>
+                </a:solidFill>
+                <a:latin typeface="Calibri"/>
+              </a:rPr>
+              <a:t>ș</a:t>
+            </a:r>
+            <a:r>
+              <a:rPr sz="1600" b="0" i="0" dirty="0" err="1" smtClean="0">
+                <a:solidFill>
+                  <a:srgbClr val="2F2F2F"/>
+                </a:solidFill>
+                <a:latin typeface="Calibri"/>
+              </a:rPr>
+              <a:t>te</a:t>
+            </a:r>
+            <a:r>
+              <a:rPr sz="1600" b="0" i="0" dirty="0" smtClean="0">
+                <a:solidFill>
+                  <a:srgbClr val="2F2F2F"/>
+                </a:solidFill>
+                <a:latin typeface="Calibri"/>
+              </a:rPr>
+              <a:t> </a:t>
+            </a:r>
+            <a:r>
               <a:rPr sz="1600" b="0" i="0" dirty="0" err="1">
                 <a:solidFill>
                   <a:srgbClr val="2F2F2F"/>
                 </a:solidFill>
                 <a:latin typeface="Calibri"/>
               </a:rPr>
-              <a:t>cunoaste</a:t>
+              <a:t>domeniul</a:t>
             </a:r>
             <a:r>
               <a:rPr sz="1600" b="0" i="0" dirty="0">
@@ -4963,40 +5509,22 @@
               <a:t> </a:t>
             </a:r>
             <a:r>
-              <a:rPr sz="1600" b="0" i="0" dirty="0" err="1">
+              <a:rPr lang="ro-RO" sz="1600" dirty="0" err="1">
                 <a:solidFill>
                   <a:srgbClr val="2F2F2F"/>
                 </a:solidFill>
                 <a:latin typeface="Calibri"/>
               </a:rPr>
-              <a:t>domeniul</a:t>
-            </a:r>
-            <a:r>
-              <a:rPr sz="1600" b="0" i="0" dirty="0">
+              <a:t>ș</a:t>
+            </a:r>
+            <a:r>
+              <a:rPr sz="1600" b="0" i="0" dirty="0" smtClean="0">
                 <a:solidFill>
                   <a:srgbClr val="2F2F2F"/>
                 </a:solidFill>
                 <a:latin typeface="Calibri"/>
               </a:rPr>
-              <a:t> </a:t>
-            </a:r>
-            <a:r>
-              <a:rPr sz="1600" b="0" i="0" dirty="0" err="1">
-                <a:solidFill>
-                  <a:srgbClr val="2F2F2F"/>
-                </a:solidFill>
-                <a:latin typeface="Calibri"/>
-              </a:rPr>
-              <a:t>si</a:t>
-            </a:r>
-            <a:r>
-              <a:rPr sz="1600" b="0" i="0" dirty="0">
-                <a:solidFill>
-                  <a:srgbClr val="2F2F2F"/>
-                </a:solidFill>
-                <a:latin typeface="Calibri"/>
-              </a:rPr>
-              <a:t> </a:t>
+              <a:t>i </a:t>
             </a:r>
             <a:r>
               <a:rPr sz="1600" b="0" i="0" dirty="0" err="1">
@@ -5132,7 +5660,7 @@
               </a:spcAft>
             </a:pPr>
             <a:r>
-              <a:rPr sz="1400" b="1" i="0">
+              <a:rPr sz="1400" b="1" i="0" dirty="0" err="1">
                 <a:solidFill>
                   <a:srgbClr val="4EC9B0"/>
                 </a:solidFill>
@@ -5141,14 +5669,83 @@
               <a:t>genSmallInt</a:t>
             </a:r>
             <a:r>
-              <a:rPr sz="1400" b="0" i="0">
+              <a:rPr sz="1400" b="0" i="0" dirty="0">
                 <a:solidFill>
                   <a:srgbClr val="D4D4D4"/>
                 </a:solidFill>
                 <a:latin typeface="Consolas"/>
               </a:rPr>
-              <a:t> - ponderi explicite pentru constante</a:t>
-            </a:r>
+              <a:t> - </a:t>
+            </a:r>
+            <a:r>
+              <a:rPr sz="1400" b="0" i="0" dirty="0" err="1">
+                <a:solidFill>
+                  <a:srgbClr val="D4D4D4"/>
+                </a:solidFill>
+                <a:latin typeface="Consolas"/>
+              </a:rPr>
+              <a:t>ponderi</a:t>
+            </a:r>
+            <a:r>
+              <a:rPr sz="1400" b="0" i="0" dirty="0">
+                <a:solidFill>
+                  <a:srgbClr val="D4D4D4"/>
+                </a:solidFill>
+                <a:latin typeface="Consolas"/>
+              </a:rPr>
+              <a:t> </a:t>
+            </a:r>
+            <a:r>
+              <a:rPr sz="1400" b="0" i="0" dirty="0" err="1">
+                <a:solidFill>
+                  <a:srgbClr val="D4D4D4"/>
+                </a:solidFill>
+                <a:latin typeface="Consolas"/>
+              </a:rPr>
+              <a:t>explicite</a:t>
+            </a:r>
+            <a:r>
+              <a:rPr sz="1400" b="0" i="0" dirty="0">
+                <a:solidFill>
+                  <a:srgbClr val="D4D4D4"/>
+                </a:solidFill>
+                <a:latin typeface="Consolas"/>
+              </a:rPr>
+              <a:t> </a:t>
+            </a:r>
+            <a:r>
+              <a:rPr sz="1400" b="0" i="0" dirty="0" err="1">
+                <a:solidFill>
+                  <a:srgbClr val="D4D4D4"/>
+                </a:solidFill>
+                <a:latin typeface="Consolas"/>
+              </a:rPr>
+              <a:t>pentru</a:t>
+            </a:r>
+            <a:r>
+              <a:rPr sz="1400" b="0" i="0" dirty="0">
+                <a:solidFill>
+                  <a:srgbClr val="D4D4D4"/>
+                </a:solidFill>
+                <a:latin typeface="Consolas"/>
+              </a:rPr>
+              <a:t> </a:t>
+            </a:r>
+            <a:r>
+              <a:rPr sz="1400" b="0" i="0" dirty="0" err="1">
+                <a:solidFill>
+                  <a:srgbClr val="D4D4D4"/>
+                </a:solidFill>
+                <a:latin typeface="Consolas"/>
+              </a:rPr>
+              <a:t>constante</a:t>
+            </a:r>
+            <a:endParaRPr sz="1400" b="0" i="0" dirty="0">
+              <a:solidFill>
+                <a:srgbClr val="D4D4D4"/>
+              </a:solidFill>
+              <a:latin typeface="Consolas"/>
+            </a:endParaRPr>
           </a:p>
           <a:p>
             <a:pPr>
@@ -5160,7 +5757,7 @@
               </a:spcAft>
             </a:pPr>
             <a:r>
-              <a:rPr sz="600" b="0" i="0">
+              <a:rPr sz="600" b="0" i="0" dirty="0">
                 <a:solidFill>
                   <a:srgbClr val="D4D4D4"/>
                 </a:solidFill>
@@ -5179,7 +5776,7 @@
               </a:spcAft>
             </a:pPr>
             <a:r>
-              <a:rPr sz="1300" b="0" i="0">
+              <a:rPr sz="1300" b="0" i="0" dirty="0">
                 <a:solidFill>
                   <a:srgbClr val="DCDCAA"/>
                 </a:solidFill>
@@ -5198,7 +5795,7 @@
               </a:spcAft>
             </a:pPr>
             <a:r>
-              <a:rPr sz="1300" b="0" i="0">
+              <a:rPr sz="1300" b="0" i="0" dirty="0">
                 <a:solidFill>
                   <a:srgbClr val="D4D4D4"/>
                 </a:solidFill>
@@ -5207,7 +5804,7 @@
               <a:t>  [ (</a:t>
             </a:r>
             <a:r>
-              <a:rPr sz="1300" b="0" i="0">
+              <a:rPr sz="1300" b="0" i="0" dirty="0">
                 <a:solidFill>
                   <a:srgbClr val="B5CEA8"/>
                 </a:solidFill>
@@ -5216,7 +5813,7 @@
               <a:t>5</a:t>
             </a:r>
             <a:r>
-              <a:rPr sz="1300" b="0" i="0">
+              <a:rPr sz="1300" b="0" i="0" dirty="0">
                 <a:solidFill>
                   <a:srgbClr val="D4D4D4"/>
                 </a:solidFill>
@@ -5225,7 +5822,7 @@
               <a:t>, </a:t>
             </a:r>
             <a:r>
-              <a:rPr sz="1300" b="0" i="0">
+              <a:rPr sz="1300" b="0" i="0" dirty="0" err="1">
                 <a:solidFill>
                   <a:srgbClr val="9CDCFE"/>
                 </a:solidFill>
@@ -5234,7 +5831,7 @@
               <a:t>chooseInt</a:t>
             </a:r>
             <a:r>
-              <a:rPr sz="1300" b="0" i="0">
+              <a:rPr sz="1300" b="0" i="0" dirty="0">
                 <a:solidFill>
                   <a:srgbClr val="D4D4D4"/>
                 </a:solidFill>
@@ -5243,14 +5840,83 @@
               <a:t> (-4, 4))</a:t>
             </a:r>
             <a:r>
-              <a:rPr sz="1300" b="0" i="0">
+              <a:rPr sz="1300" b="0" i="0" dirty="0">
                 <a:solidFill>
                   <a:srgbClr val="6A9955"/>
                 </a:solidFill>
                 <a:latin typeface="Consolas"/>
               </a:rPr>
-              <a:t>   -- 83%: numere mici, usor de citit</a:t>
-            </a:r>
+              <a:t>   -- 83%: </a:t>
+            </a:r>
+            <a:r>
+              <a:rPr sz="1300" b="0" i="0" dirty="0" err="1">
+                <a:solidFill>
+                  <a:srgbClr val="6A9955"/>
+                </a:solidFill>
+                <a:latin typeface="Consolas"/>
+              </a:rPr>
+              <a:t>numere</a:t>
+            </a:r>
+            <a:r>
+              <a:rPr sz="1300" b="0" i="0" dirty="0">
+                <a:solidFill>
+                  <a:srgbClr val="6A9955"/>
+                </a:solidFill>
+                <a:latin typeface="Consolas"/>
+              </a:rPr>
+              <a:t> </a:t>
+            </a:r>
+            <a:r>
+              <a:rPr sz="1300" b="0" i="0" dirty="0" err="1">
+                <a:solidFill>
+                  <a:srgbClr val="6A9955"/>
+                </a:solidFill>
+                <a:latin typeface="Consolas"/>
+              </a:rPr>
+              <a:t>mici</a:t>
+            </a:r>
+            <a:r>
+              <a:rPr sz="1300" b="0" i="0" dirty="0">
+                <a:solidFill>
+                  <a:srgbClr val="6A9955"/>
+                </a:solidFill>
+                <a:latin typeface="Consolas"/>
+              </a:rPr>
+              <a:t>, </a:t>
+            </a:r>
+            <a:r>
+              <a:rPr sz="1300" b="0" i="0" dirty="0" err="1">
+                <a:solidFill>
+                  <a:srgbClr val="6A9955"/>
+                </a:solidFill>
+                <a:latin typeface="Consolas"/>
+              </a:rPr>
+              <a:t>usor</a:t>
+            </a:r>
+            <a:r>
+              <a:rPr sz="1300" b="0" i="0" dirty="0">
+                <a:solidFill>
+                  <a:srgbClr val="6A9955"/>
+                </a:solidFill>
+                <a:latin typeface="Consolas"/>
+              </a:rPr>
+              <a:t> de </a:t>
+            </a:r>
+            <a:r>
+              <a:rPr sz="1300" b="0" i="0" dirty="0" err="1">
+                <a:solidFill>
+                  <a:srgbClr val="6A9955"/>
+                </a:solidFill>
+                <a:latin typeface="Consolas"/>
+              </a:rPr>
+              <a:t>citit</a:t>
+            </a:r>
+            <a:endParaRPr sz="1300" b="0" i="0" dirty="0">
+              <a:solidFill>
+                <a:srgbClr val="6A9955"/>
+              </a:solidFill>
+              <a:latin typeface="Consolas"/>
+            </a:endParaRPr>
           </a:p>
           <a:p>
             <a:pPr>
@@ -5262,7 +5928,7 @@
               </a:spcAft>
             </a:pPr>
             <a:r>
-              <a:rPr sz="1300" b="0" i="0">
+              <a:rPr sz="1300" b="0" i="0" dirty="0">
                 <a:solidFill>
                   <a:srgbClr val="D4D4D4"/>
                 </a:solidFill>
@@ -5271,7 +5937,7 @@
               <a:t>  , (</a:t>
             </a:r>
             <a:r>
-              <a:rPr sz="1300" b="0" i="0">
+              <a:rPr sz="1300" b="0" i="0" dirty="0">
                 <a:solidFill>
                   <a:srgbClr val="B5CEA8"/>
                 </a:solidFill>
@@ -5280,7 +5946,7 @@
               <a:t>1</a:t>
             </a:r>
             <a:r>
-              <a:rPr sz="1300" b="0" i="0">
+              <a:rPr sz="1300" b="0" i="0" dirty="0">
                 <a:solidFill>
                   <a:srgbClr val="D4D4D4"/>
                 </a:solidFill>
@@ -5289,7 +5955,7 @@
               <a:t>, </a:t>
             </a:r>
             <a:r>
-              <a:rPr sz="1300" b="0" i="0">
+              <a:rPr sz="1300" b="0" i="0" dirty="0" err="1">
                 <a:solidFill>
                   <a:srgbClr val="9CDCFE"/>
                 </a:solidFill>
@@ -5298,7 +5964,7 @@
               <a:t>chooseInt</a:t>
             </a:r>
             <a:r>
-              <a:rPr sz="1300" b="0" i="0">
+              <a:rPr sz="1300" b="0" i="0" dirty="0">
                 <a:solidFill>
                   <a:srgbClr val="D4D4D4"/>
                 </a:solidFill>
@@ -5307,14 +5973,65 @@
               <a:t> (-12, 12))</a:t>
             </a:r>
             <a:r>
-              <a:rPr sz="1300" b="0" i="0">
+              <a:rPr sz="1300" b="0" i="0" dirty="0">
                 <a:solidFill>
                   <a:srgbClr val="6A9955"/>
                 </a:solidFill>
                 <a:latin typeface="Consolas"/>
               </a:rPr>
-              <a:t> -- 17%: numere mai mari</a:t>
-            </a:r>
+              <a:t> -- 17%: </a:t>
+            </a:r>
+            <a:r>
+              <a:rPr sz="1300" b="0" i="0" dirty="0" err="1">
+                <a:solidFill>
+                  <a:srgbClr val="6A9955"/>
+                </a:solidFill>
+                <a:latin typeface="Consolas"/>
+              </a:rPr>
+              <a:t>numere</a:t>
+            </a:r>
+            <a:r>
+              <a:rPr sz="1300" b="0" i="0" dirty="0">
+                <a:solidFill>
+                  <a:srgbClr val="6A9955"/>
+                </a:solidFill>
+                <a:latin typeface="Consolas"/>
+              </a:rPr>
+              <a:t> </a:t>
+            </a:r>
+            <a:r>
+              <a:rPr sz="1300" b="0" i="0" dirty="0" err="1">
+                <a:solidFill>
+                  <a:srgbClr val="6A9955"/>
+                </a:solidFill>
+                <a:latin typeface="Consolas"/>
+              </a:rPr>
+              <a:t>mai</a:t>
+            </a:r>
+            <a:r>
+              <a:rPr sz="1300" b="0" i="0" dirty="0">
+                <a:solidFill>
+                  <a:srgbClr val="6A9955"/>
+                </a:solidFill>
+                <a:latin typeface="Consolas"/>
+              </a:rPr>
+              <a:t> </a:t>
+            </a:r>
+            <a:r>
+              <a:rPr sz="1300" b="0" i="0" dirty="0" err="1">
+                <a:solidFill>
+                  <a:srgbClr val="6A9955"/>
+                </a:solidFill>
+                <a:latin typeface="Consolas"/>
+              </a:rPr>
+              <a:t>mari</a:t>
+            </a:r>
+            <a:endParaRPr sz="1300" b="0" i="0" dirty="0">
+              <a:solidFill>
+                <a:srgbClr val="6A9955"/>
+              </a:solidFill>
+              <a:latin typeface="Consolas"/>
+            </a:endParaRPr>
           </a:p>
           <a:p>
             <a:pPr>
@@ -5326,7 +6043,7 @@
               </a:spcAft>
             </a:pPr>
             <a:r>
-              <a:rPr sz="1300" b="0" i="0">
+              <a:rPr sz="1300" b="0" i="0" dirty="0">
                 <a:solidFill>
                   <a:srgbClr val="D4D4D4"/>
                 </a:solidFill>
@@ -5970,10 +6687,35 @@
                 </a:solidFill>
                 <a:latin typeface="Segoe UI"/>
               </a:rPr>
-              <a:t> are pondere mai mica (un singur subarbore)</a:t>
-            </a:r>
-          </a:p>
-          <a:p>
+              <a:t> are pondere mai </a:t>
+            </a:r>
+            <a:r>
+              <a:rPr lang="it-IT" sz="1600" dirty="0" smtClean="0">
+                <a:solidFill>
+                  <a:srgbClr val="2F3338"/>
+                </a:solidFill>
+                <a:latin typeface="Segoe UI"/>
+              </a:rPr>
+              <a:t>mic</a:t>
+            </a:r>
+            <a:r>
+              <a:rPr lang="ro-RO" sz="1600" dirty="0" smtClean="0">
+                <a:solidFill>
+                  <a:srgbClr val="2F3338"/>
+                </a:solidFill>
+                <a:latin typeface="Segoe UI"/>
+              </a:rPr>
+              <a:t>ă</a:t>
+            </a:r>
+            <a:r>
+              <a:rPr lang="it-IT" sz="1600" dirty="0" smtClean="0">
+                <a:solidFill>
+                  <a:srgbClr val="2F3338"/>
+                </a:solidFill>
+                <a:latin typeface="Segoe UI"/>
+              </a:rPr>
+              <a:t> </a:t>
+            </a:r>
             <a:r>
               <a:rPr lang="it-IT" sz="1600" dirty="0">
                 <a:solidFill>
@@ -5981,6 +6723,17 @@
                 </a:solidFill>
                 <a:latin typeface="Segoe UI"/>
               </a:rPr>
+              <a:t>(un singur subarbore)</a:t>
+            </a:r>
+          </a:p>
+          <a:p>
+            <a:r>
+              <a:rPr lang="it-IT" sz="1600" dirty="0">
+                <a:solidFill>
+                  <a:srgbClr val="2F3338"/>
+                </a:solidFill>
+                <a:latin typeface="Segoe UI"/>
+              </a:rPr>
               <a:t>- </a:t>
             </a:r>
             <a:r>
@@ -5999,7 +6752,43 @@
                 </a:solidFill>
                 <a:latin typeface="Segoe UI"/>
               </a:rPr>
-              <a:t> binari sunt egali, nu favorizam niciun operator</a:t>
+              <a:t> binari sunt egali, nu </a:t>
+            </a:r>
+            <a:r>
+              <a:rPr lang="it-IT" sz="1600" dirty="0" smtClean="0">
+                <a:solidFill>
+                  <a:srgbClr val="2F3338"/>
+                </a:solidFill>
+                <a:latin typeface="Segoe UI"/>
+              </a:rPr>
+              <a:t>favoriz</a:t>
+            </a:r>
+            <a:r>
+              <a:rPr lang="ro-RO" sz="1600" dirty="0" smtClean="0">
+                <a:solidFill>
+                  <a:srgbClr val="2F3338"/>
+                </a:solidFill>
+                <a:latin typeface="Segoe UI"/>
+              </a:rPr>
+              <a:t>ă</a:t>
+            </a:r>
+            <a:r>
+              <a:rPr lang="it-IT" sz="1600" dirty="0" smtClean="0">
+                <a:solidFill>
+                  <a:srgbClr val="2F3338"/>
+                </a:solidFill>
+                <a:latin typeface="Segoe UI"/>
+              </a:rPr>
+              <a:t>m </a:t>
+            </a:r>
+            <a:r>
+              <a:rPr lang="it-IT" sz="1600" dirty="0">
+                <a:solidFill>
+                  <a:srgbClr val="2F3338"/>
+                </a:solidFill>
+                <a:latin typeface="Segoe UI"/>
+              </a:rPr>
+              <a:t>niciun operator</a:t>
             </a:r>
           </a:p>
         </p:txBody>
@@ -6196,13 +6985,58 @@
               <a:t> </a:t>
             </a:r>
             <a:r>
+              <a:rPr sz="1600" b="0" i="0" dirty="0" err="1" smtClean="0">
+                <a:solidFill>
+                  <a:srgbClr val="2F3338"/>
+                </a:solidFill>
+                <a:latin typeface="Segoe UI"/>
+              </a:rPr>
+              <a:t>folose</a:t>
+            </a:r>
+            <a:r>
+              <a:rPr lang="ro-RO" sz="1600" b="0" i="0" dirty="0" smtClean="0">
+                <a:solidFill>
+                  <a:srgbClr val="2F3338"/>
+                </a:solidFill>
+                <a:latin typeface="Segoe UI"/>
+              </a:rPr>
+              <a:t>ș</a:t>
+            </a:r>
+            <a:r>
+              <a:rPr sz="1600" b="0" i="0" dirty="0" err="1" smtClean="0">
+                <a:solidFill>
+                  <a:srgbClr val="2F3338"/>
+                </a:solidFill>
+                <a:latin typeface="Segoe UI"/>
+              </a:rPr>
+              <a:t>te</a:t>
+            </a:r>
+            <a:r>
+              <a:rPr sz="1600" b="0" i="0" dirty="0" smtClean="0">
+                <a:solidFill>
+                  <a:srgbClr val="2F3338"/>
+                </a:solidFill>
+                <a:latin typeface="Segoe UI"/>
+              </a:rPr>
+              <a:t> </a:t>
+            </a:r>
+            <a:r>
+              <a:rPr sz="1600" b="0" i="0" dirty="0">
+                <a:solidFill>
+                  <a:srgbClr val="2F3338"/>
+                </a:solidFill>
+                <a:latin typeface="Segoe UI"/>
+              </a:rPr>
+              <a:t>sized + frequency </a:t>
+            </a:r>
+            <a:r>
               <a:rPr sz="1600" b="0" i="0" dirty="0" err="1">
                 <a:solidFill>
                   <a:srgbClr val="2F3338"/>
                 </a:solidFill>
                 <a:latin typeface="Segoe UI"/>
               </a:rPr>
-              <a:t>foloseste</a:t>
+              <a:t>pentru</a:t>
             </a:r>
             <a:r>
               <a:rPr sz="1600" b="0" i="0" dirty="0">
@@ -6211,7 +7045,7 @@
                 </a:solidFill>
                 <a:latin typeface="Segoe UI"/>
               </a:rPr>
-              <a:t> sized + frequency </a:t>
+              <a:t> </a:t>
             </a:r>
             <a:r>
               <a:rPr sz="1600" b="0" i="0" dirty="0" err="1">
@@ -6220,7 +7054,7 @@
                 </a:solidFill>
                 <a:latin typeface="Segoe UI"/>
               </a:rPr>
-              <a:t>pentru</a:t>
+              <a:t>controlul</a:t>
             </a:r>
             <a:r>
               <a:rPr sz="1600" b="0" i="0" dirty="0">
@@ -6232,70 +7066,79 @@
               <a:t> </a:t>
             </a:r>
             <a:r>
-              <a:rPr sz="1600" b="0" i="0" dirty="0" err="1">
-                <a:solidFill>
-                  <a:srgbClr val="2F3338"/>
-                </a:solidFill>
-                <a:latin typeface="Segoe UI"/>
-              </a:rPr>
-              <a:t>controlul</a:t>
-            </a:r>
-            <a:r>
-              <a:rPr sz="1600" b="0" i="0" dirty="0">
-                <a:solidFill>
-                  <a:srgbClr val="2F3338"/>
-                </a:solidFill>
-                <a:latin typeface="Segoe UI"/>
-              </a:rPr>
-              <a:t> </a:t>
-            </a:r>
-            <a:r>
-              <a:rPr sz="1600" b="0" i="0" dirty="0" err="1">
-                <a:solidFill>
-                  <a:srgbClr val="2F3338"/>
-                </a:solidFill>
-                <a:latin typeface="Segoe UI"/>
-              </a:rPr>
-              <a:t>recursivitatii</a:t>
-            </a:r>
-            <a:r>
-              <a:rPr sz="1600" b="0" i="0" dirty="0">
-                <a:solidFill>
-                  <a:srgbClr val="2F3338"/>
-                </a:solidFill>
-                <a:latin typeface="Segoe UI"/>
-              </a:rPr>
-              <a:t> </a:t>
-            </a:r>
-            <a:r>
-              <a:rPr sz="1600" b="0" i="0" dirty="0" err="1">
-                <a:solidFill>
-                  <a:srgbClr val="2F3338"/>
-                </a:solidFill>
-                <a:latin typeface="Segoe UI"/>
-              </a:rPr>
-              <a:t>si</a:t>
-            </a:r>
-            <a:r>
-              <a:rPr sz="1600" b="0" i="0" dirty="0">
-                <a:solidFill>
-                  <a:srgbClr val="2F3338"/>
-                </a:solidFill>
-                <a:latin typeface="Segoe UI"/>
-              </a:rPr>
-              <a:t> </a:t>
-            </a:r>
-            <a:r>
-              <a:rPr sz="1600" b="0" i="0" dirty="0" err="1">
-                <a:solidFill>
-                  <a:srgbClr val="2F3338"/>
-                </a:solidFill>
-                <a:latin typeface="Segoe UI"/>
-              </a:rPr>
-              <a:t>distributiei</a:t>
-            </a:r>
-            <a:r>
-              <a:rPr sz="1600" b="0" i="0" dirty="0">
+              <a:rPr sz="1600" b="0" i="0" dirty="0" err="1" smtClean="0">
+                <a:solidFill>
+                  <a:srgbClr val="2F3338"/>
+                </a:solidFill>
+                <a:latin typeface="Segoe UI"/>
+              </a:rPr>
+              <a:t>recursivita</a:t>
+            </a:r>
+            <a:r>
+              <a:rPr lang="ro-RO" sz="1600" b="0" i="0" dirty="0" smtClean="0">
+                <a:solidFill>
+                  <a:srgbClr val="2F3338"/>
+                </a:solidFill>
+                <a:latin typeface="Segoe UI"/>
+              </a:rPr>
+              <a:t>ț</a:t>
+            </a:r>
+            <a:r>
+              <a:rPr sz="1600" b="0" i="0" dirty="0" smtClean="0">
+                <a:solidFill>
+                  <a:srgbClr val="2F3338"/>
+                </a:solidFill>
+                <a:latin typeface="Segoe UI"/>
+              </a:rPr>
+              <a:t>ii </a:t>
+            </a:r>
+            <a:r>
+              <a:rPr lang="ro-RO" sz="1600" dirty="0" err="1">
+                <a:solidFill>
+                  <a:srgbClr val="2F3338"/>
+                </a:solidFill>
+                <a:latin typeface="Segoe UI"/>
+              </a:rPr>
+              <a:t>ș</a:t>
+            </a:r>
+            <a:r>
+              <a:rPr sz="1600" b="0" i="0" dirty="0" smtClean="0">
+                <a:solidFill>
+                  <a:srgbClr val="2F3338"/>
+                </a:solidFill>
+                <a:latin typeface="Segoe UI"/>
+              </a:rPr>
+              <a:t>i </a:t>
+            </a:r>
+            <a:r>
+              <a:rPr sz="1600" b="0" i="0" dirty="0" err="1" smtClean="0">
+                <a:solidFill>
+                  <a:srgbClr val="2F3338"/>
+                </a:solidFill>
+                <a:latin typeface="Segoe UI"/>
+              </a:rPr>
+              <a:t>distribu</a:t>
+            </a:r>
+            <a:r>
+              <a:rPr lang="ro-RO" sz="1600" b="0" i="0" dirty="0" smtClean="0">
+                <a:solidFill>
+                  <a:srgbClr val="2F3338"/>
+                </a:solidFill>
+                <a:latin typeface="Segoe UI"/>
+              </a:rPr>
+              <a:t>ț</a:t>
+            </a:r>
+            <a:r>
+              <a:rPr sz="1600" b="0" i="0" dirty="0" err="1" smtClean="0">
+                <a:solidFill>
+                  <a:srgbClr val="2F3338"/>
+                </a:solidFill>
+                <a:latin typeface="Segoe UI"/>
+              </a:rPr>
+              <a:t>iei</a:t>
+            </a:r>
+            <a:r>
+              <a:rPr sz="1600" b="0" i="0" dirty="0" smtClean="0">
                 <a:solidFill>
                   <a:srgbClr val="2F3338"/>
                 </a:solidFill>
@@ -6377,13 +7220,58 @@
               <a:t> </a:t>
             </a:r>
             <a:r>
+              <a:rPr sz="1600" b="0" i="0" dirty="0" smtClean="0">
+                <a:solidFill>
+                  <a:srgbClr val="2F3338"/>
+                </a:solidFill>
+                <a:latin typeface="Segoe UI"/>
+              </a:rPr>
+              <a:t>f</a:t>
+            </a:r>
+            <a:r>
+              <a:rPr lang="ro-RO" sz="1600" b="0" i="0" dirty="0" smtClean="0">
+                <a:solidFill>
+                  <a:srgbClr val="2F3338"/>
+                </a:solidFill>
+                <a:latin typeface="Segoe UI"/>
+              </a:rPr>
+              <a:t>ă</a:t>
+            </a:r>
+            <a:r>
+              <a:rPr sz="1600" b="0" i="0" dirty="0" smtClean="0">
+                <a:solidFill>
+                  <a:srgbClr val="2F3338"/>
+                </a:solidFill>
+                <a:latin typeface="Segoe UI"/>
+              </a:rPr>
+              <a:t>r</a:t>
+            </a:r>
+            <a:r>
+              <a:rPr lang="ro-RO" sz="1600" b="0" i="0" dirty="0" smtClean="0">
+                <a:solidFill>
+                  <a:srgbClr val="2F3338"/>
+                </a:solidFill>
+                <a:latin typeface="Segoe UI"/>
+              </a:rPr>
+              <a:t>ă</a:t>
+            </a:r>
+            <a:r>
+              <a:rPr sz="1600" b="0" i="0" dirty="0" smtClean="0">
+                <a:solidFill>
+                  <a:srgbClr val="2F3338"/>
+                </a:solidFill>
+                <a:latin typeface="Segoe UI"/>
+              </a:rPr>
+              <a:t> </a:t>
+            </a:r>
+            <a:r>
               <a:rPr sz="1600" b="0" i="0" dirty="0" err="1">
                 <a:solidFill>
                   <a:srgbClr val="2F3338"/>
                 </a:solidFill>
                 <a:latin typeface="Segoe UI"/>
               </a:rPr>
-              <a:t>fara</a:t>
+              <a:t>variabile</a:t>
             </a:r>
             <a:r>
               <a:rPr sz="1600" b="0" i="0" dirty="0">
@@ -6392,16 +7280,43 @@
                 </a:solidFill>
                 <a:latin typeface="Segoe UI"/>
               </a:rPr>
-              <a:t> </a:t>
-            </a:r>
-            <a:r>
-              <a:rPr sz="1600" b="0" i="0" dirty="0" err="1">
-                <a:solidFill>
-                  <a:srgbClr val="2F3338"/>
-                </a:solidFill>
-                <a:latin typeface="Segoe UI"/>
-              </a:rPr>
-              <a:t>variabile</a:t>
+              <a:t> (utile in </a:t>
+            </a:r>
+            <a:r>
+              <a:rPr sz="1600" b="0" i="0" dirty="0" err="1" smtClean="0">
+                <a:solidFill>
+                  <a:srgbClr val="2F3338"/>
+                </a:solidFill>
+                <a:latin typeface="Segoe UI"/>
+              </a:rPr>
+              <a:t>propriet</a:t>
+            </a:r>
+            <a:r>
+              <a:rPr lang="ro-RO" sz="1600" b="0" i="0" dirty="0" smtClean="0">
+                <a:solidFill>
+                  <a:srgbClr val="2F3338"/>
+                </a:solidFill>
+                <a:latin typeface="Segoe UI"/>
+              </a:rPr>
+              <a:t>ăț</a:t>
+            </a:r>
+            <a:r>
+              <a:rPr sz="1600" b="0" i="0" dirty="0" err="1" smtClean="0">
+                <a:solidFill>
+                  <a:srgbClr val="2F3338"/>
+                </a:solidFill>
+                <a:latin typeface="Segoe UI"/>
+              </a:rPr>
+              <a:t>ile</a:t>
+            </a:r>
+            <a:r>
+              <a:rPr sz="1600" b="0" i="0" dirty="0" smtClean="0">
+                <a:solidFill>
+                  <a:srgbClr val="2F3338"/>
+                </a:solidFill>
+                <a:latin typeface="Segoe UI"/>
+              </a:rPr>
+              <a:t> </a:t>
             </a:r>
             <a:r>
               <a:rPr sz="1600" b="0" i="0" dirty="0">
@@ -6410,34 +7325,34 @@
                 </a:solidFill>
                 <a:latin typeface="Segoe UI"/>
               </a:rPr>
-              <a:t> (utile in </a:t>
-            </a:r>
-            <a:r>
-              <a:rPr sz="1600" b="0" i="0" dirty="0" err="1">
-                <a:solidFill>
-                  <a:srgbClr val="2F3338"/>
-                </a:solidFill>
-                <a:latin typeface="Segoe UI"/>
-              </a:rPr>
-              <a:t>proprietatile</a:t>
-            </a:r>
-            <a:r>
-              <a:rPr sz="1600" b="0" i="0" dirty="0">
-                <a:solidFill>
-                  <a:srgbClr val="2F3338"/>
-                </a:solidFill>
-                <a:latin typeface="Segoe UI"/>
-              </a:rPr>
-              <a:t> de </a:t>
-            </a:r>
-            <a:r>
-              <a:rPr sz="1600" b="0" i="0" dirty="0" err="1">
-                <a:solidFill>
-                  <a:srgbClr val="2F3338"/>
-                </a:solidFill>
-                <a:latin typeface="Segoe UI"/>
-              </a:rPr>
-              <a:t>substitutie</a:t>
+              <a:t>de </a:t>
+            </a:r>
+            <a:r>
+              <a:rPr sz="1600" b="0" i="0" dirty="0" err="1" smtClean="0">
+                <a:solidFill>
+                  <a:srgbClr val="2F3338"/>
+                </a:solidFill>
+                <a:latin typeface="Segoe UI"/>
+              </a:rPr>
+              <a:t>substitu</a:t>
+            </a:r>
+            <a:r>
+              <a:rPr lang="ro-RO" sz="1600" b="0" i="0" dirty="0" smtClean="0">
+                <a:solidFill>
+                  <a:srgbClr val="2F3338"/>
+                </a:solidFill>
+                <a:latin typeface="Segoe UI"/>
+              </a:rPr>
+              <a:t>ț</a:t>
+            </a:r>
+            <a:r>
+              <a:rPr sz="1600" b="0" i="0" dirty="0" err="1" smtClean="0">
+                <a:solidFill>
+                  <a:srgbClr val="2F3338"/>
+                </a:solidFill>
+                <a:latin typeface="Segoe UI"/>
+              </a:rPr>
+              <a:t>ie</a:t>
             </a:r>
             <a:r>
               <a:rPr sz="1600" b="0" i="0" dirty="0">
@@ -6785,22 +7700,31 @@
               <a:t> </a:t>
             </a:r>
             <a:r>
-              <a:rPr sz="1600" b="0" i="0" dirty="0" err="1">
-                <a:solidFill>
-                  <a:srgbClr val="2F3338"/>
-                </a:solidFill>
-                <a:latin typeface="Segoe UI"/>
-              </a:rPr>
-              <a:t>relevanta</a:t>
-            </a:r>
-            <a:r>
-              <a:rPr sz="1600" b="0" i="0" dirty="0">
-                <a:solidFill>
-                  <a:srgbClr val="2F3338"/>
-                </a:solidFill>
-                <a:latin typeface="Segoe UI"/>
-              </a:rPr>
-              <a:t> </a:t>
+              <a:rPr sz="1600" b="0" i="0" dirty="0" err="1" smtClean="0">
+                <a:solidFill>
+                  <a:srgbClr val="2F3338"/>
+                </a:solidFill>
+                <a:latin typeface="Segoe UI"/>
+              </a:rPr>
+              <a:t>relevan</a:t>
+            </a:r>
+            <a:r>
+              <a:rPr lang="ro-RO" sz="1600" b="0" i="0" dirty="0" smtClean="0">
+                <a:solidFill>
+                  <a:srgbClr val="2F3338"/>
+                </a:solidFill>
+                <a:latin typeface="Segoe UI"/>
+              </a:rPr>
+              <a:t>ț</a:t>
+            </a:r>
+            <a:r>
+              <a:rPr sz="1600" b="0" i="0" dirty="0" smtClean="0">
+                <a:solidFill>
+                  <a:srgbClr val="2F3338"/>
+                </a:solidFill>
+                <a:latin typeface="Segoe UI"/>
+              </a:rPr>
+              <a:t>a </a:t>
             </a:r>
             <a:r>
               <a:rPr sz="1600" b="0" i="0" dirty="0" err="1">
@@ -7174,13 +8098,58 @@
               </a:spcAft>
             </a:pPr>
             <a:r>
+              <a:rPr sz="2000" b="1" i="0" dirty="0" smtClean="0">
+                <a:solidFill>
+                  <a:srgbClr val="9A3412"/>
+                </a:solidFill>
+                <a:latin typeface="Segoe UI"/>
+              </a:rPr>
+              <a:t>F</a:t>
+            </a:r>
+            <a:r>
+              <a:rPr lang="ro-RO" sz="2000" b="1" i="0" dirty="0" smtClean="0">
+                <a:solidFill>
+                  <a:srgbClr val="9A3412"/>
+                </a:solidFill>
+                <a:latin typeface="Segoe UI"/>
+              </a:rPr>
+              <a:t>ă</a:t>
+            </a:r>
+            <a:r>
+              <a:rPr sz="2000" b="1" i="0" dirty="0" smtClean="0">
+                <a:solidFill>
+                  <a:srgbClr val="9A3412"/>
+                </a:solidFill>
+                <a:latin typeface="Segoe UI"/>
+              </a:rPr>
+              <a:t>r</a:t>
+            </a:r>
+            <a:r>
+              <a:rPr lang="ro-RO" sz="2000" b="1" i="0" dirty="0" smtClean="0">
+                <a:solidFill>
+                  <a:srgbClr val="9A3412"/>
+                </a:solidFill>
+                <a:latin typeface="Segoe UI"/>
+              </a:rPr>
+              <a:t>ă</a:t>
+            </a:r>
+            <a:r>
+              <a:rPr sz="2000" b="1" i="0" dirty="0" smtClean="0">
+                <a:solidFill>
+                  <a:srgbClr val="9A3412"/>
+                </a:solidFill>
+                <a:latin typeface="Segoe UI"/>
+              </a:rPr>
+              <a:t> </a:t>
+            </a:r>
+            <a:r>
               <a:rPr sz="2000" b="1" i="0" dirty="0">
                 <a:solidFill>
                   <a:srgbClr val="9A3412"/>
                 </a:solidFill>
                 <a:latin typeface="Segoe UI"/>
               </a:rPr>
-              <a:t>Fara shrink</a:t>
+              <a:t>shrink</a:t>
             </a:r>
           </a:p>
           <a:p>
@@ -7389,8 +8358,40 @@
           <a:lstStyle/>
           <a:p>
             <a:r>
-              <a:rPr sz="3400"/>
-              <a:t>Cele 16 proprietati (grupate)</a:t>
+              <a:rPr sz="3400" dirty="0" err="1"/>
+              <a:t>Cele</a:t>
+            </a:r>
+            <a:r>
+              <a:rPr sz="3400" dirty="0"/>
+              <a:t> 16 </a:t>
+            </a:r>
+            <a:r>
+              <a:rPr sz="3400" dirty="0" err="1" smtClean="0"/>
+              <a:t>propriet</a:t>
+            </a:r>
+            <a:r>
+              <a:rPr lang="ro-RO" sz="3400" dirty="0" smtClean="0"/>
+              <a:t>ă</a:t>
+            </a:r>
+            <a:r>
+              <a:rPr lang="ro-RO" sz="3400" dirty="0"/>
+              <a:t>ț</a:t>
+            </a:r>
+            <a:r>
+              <a:rPr sz="3400" dirty="0" smtClean="0"/>
+              <a:t>i </a:t>
+            </a:r>
+            <a:r>
+              <a:rPr sz="3400" dirty="0"/>
+              <a:t>(</a:t>
+            </a:r>
+            <a:r>
+              <a:rPr sz="3400" dirty="0" err="1"/>
+              <a:t>grupate</a:t>
+            </a:r>
+            <a:r>
+              <a:rPr sz="3400" dirty="0"/>
+              <a:t>)</a:t>
             </a:r>
           </a:p>
         </p:txBody>
@@ -7400,7 +8401,7 @@
           <p:cNvPr id="6" name="Content Placeholder 5">
             <a:extLst>
               <a:ext uri="{FF2B5EF4-FFF2-40B4-BE49-F238E27FC236}">
-                <a16:creationId xmlns:a16="http://schemas.microsoft.com/office/drawing/2014/main" id="{79473285-A0EB-EEFF-685E-F4C3C4112120}"/>
+                <a16:creationId xmlns:a16="http://schemas.microsoft.com/office/drawing/2014/main" xmlns="" id="{79473285-A0EB-EEFF-685E-F4C3C4112120}"/>
               </a:ext>
             </a:extLst>
           </p:cNvPr>
@@ -7445,24 +8446,40 @@
               <a:t> </a:t>
             </a:r>
             <a:r>
-              <a:rPr lang="en-US" sz="1400" b="1" kern="1000" spc="10" dirty="0" err="1">
+              <a:rPr lang="en-US" sz="1400" b="1" kern="1000" spc="10" dirty="0" smtClean="0">
                 <a:solidFill>
                   <a:schemeClr val="tx1"/>
                 </a:solidFill>
               </a:rPr>
-              <a:t>semantica</a:t>
-            </a:r>
-            <a:r>
-              <a:rPr lang="en-US" sz="1400" b="1" kern="1000" spc="10" dirty="0">
+              <a:t>semantic</a:t>
+            </a:r>
+            <a:r>
+              <a:rPr lang="ro-RO" sz="1400" b="1" kern="1000" spc="10" dirty="0" smtClean="0">
                 <a:solidFill>
                   <a:schemeClr val="tx1"/>
                 </a:solidFill>
               </a:rPr>
+              <a:t>ă</a:t>
+            </a:r>
+            <a:r>
+              <a:rPr lang="en-US" sz="1400" b="1" kern="1000" spc="10" dirty="0" smtClean="0">
+                <a:solidFill>
+                  <a:schemeClr val="tx1"/>
+                </a:solidFill>
+              </a:rPr>
               <a:t>:</a:t>
+            </a:r>
+            <a:r>
+              <a:rPr lang="en-US" sz="1400" b="1" kern="1000" spc="10" dirty="0"/>
+              <a:t/>
             </a:r>
             <a:br>
               <a:rPr lang="en-US" sz="1400" b="1" kern="1000" spc="10" dirty="0"/>
             </a:br>
+            <a:r>
+              <a:rPr lang="en-US" sz="1400" b="1" kern="1000" spc="10" dirty="0"/>
+              <a:t/>
+            </a:r>
             <a:br>
               <a:rPr lang="en-US" sz="1400" b="1" kern="1000" spc="10" dirty="0"/>
             </a:br>
@@ -7479,16 +8496,32 @@
               <a:t> </a:t>
             </a:r>
             <a:r>
-              <a:rPr lang="en-US" sz="1400" kern="1000" spc="10" dirty="0" err="1"/>
-              <a:t>pastreaza</a:t>
-            </a:r>
-            <a:r>
-              <a:rPr lang="en-US" sz="1400" kern="1000" spc="10" dirty="0"/>
+              <a:rPr lang="en-US" sz="1400" kern="1000" spc="10" dirty="0" smtClean="0"/>
+              <a:t>p</a:t>
+            </a:r>
+            <a:r>
+              <a:rPr lang="ro-RO" sz="1400" kern="1000" spc="10" dirty="0" smtClean="0"/>
+              <a:t>ăs</a:t>
+            </a:r>
+            <a:r>
+              <a:rPr lang="en-US" sz="1400" kern="1000" spc="10" dirty="0" err="1" smtClean="0"/>
+              <a:t>treaz</a:t>
+            </a:r>
+            <a:r>
+              <a:rPr lang="ro-RO" sz="1400" kern="1000" spc="10" dirty="0" smtClean="0"/>
+              <a:t>ă</a:t>
+            </a:r>
+            <a:r>
+              <a:rPr lang="en-US" sz="1400" kern="1000" spc="10" dirty="0" smtClean="0"/>
               <a:t> </a:t>
             </a:r>
             <a:r>
               <a:rPr lang="en-US" sz="1400" kern="1000" spc="10" dirty="0" err="1"/>
               <a:t>semantica</a:t>
+            </a:r>
+            <a:r>
+              <a:rPr lang="en-US" sz="1400" kern="1000" spc="10" dirty="0"/>
+              <a:t/>
             </a:r>
             <a:br>
               <a:rPr lang="en-US" sz="1400" kern="1000" spc="10" dirty="0"/>
@@ -7514,11 +8547,23 @@
               <a:t> </a:t>
             </a:r>
             <a:r>
-              <a:rPr lang="en-US" sz="1400" kern="1000" spc="10" dirty="0" err="1"/>
-              <a:t>pastreaza</a:t>
-            </a:r>
-            <a:r>
-              <a:rPr lang="en-US" sz="1400" kern="1000" spc="10" dirty="0"/>
+              <a:rPr lang="en-US" sz="1400" kern="1000" spc="10" dirty="0" smtClean="0"/>
+              <a:t>p</a:t>
+            </a:r>
+            <a:r>
+              <a:rPr lang="ro-RO" sz="1400" kern="1000" spc="10" dirty="0" smtClean="0"/>
+              <a:t>ă</a:t>
+            </a:r>
+            <a:r>
+              <a:rPr lang="en-US" sz="1400" kern="1000" spc="10" dirty="0" err="1" smtClean="0"/>
+              <a:t>streaz</a:t>
+            </a:r>
+            <a:r>
+              <a:rPr lang="ro-RO" sz="1400" kern="1000" spc="10" dirty="0" smtClean="0"/>
+              <a:t>ă</a:t>
+            </a:r>
+            <a:r>
+              <a:rPr lang="en-US" sz="1400" kern="1000" spc="10" dirty="0" smtClean="0"/>
               <a:t> </a:t>
             </a:r>
             <a:r>
@@ -7582,12 +8627,20 @@
               <a:t> </a:t>
             </a:r>
             <a:r>
-              <a:rPr lang="en-US" sz="1400" kern="1000" spc="10" dirty="0" err="1"/>
-              <a:t>idempotenta</a:t>
+              <a:rPr lang="en-US" sz="1400" kern="1000" spc="10" dirty="0" smtClean="0"/>
+              <a:t>idempotent</a:t>
+            </a:r>
+            <a:r>
+              <a:rPr lang="ro-RO" sz="1400" kern="1000" spc="10" dirty="0" smtClean="0"/>
+              <a:t>ă</a:t>
+            </a:r>
+            <a:r>
+              <a:rPr lang="en-US" sz="1400" kern="1000" spc="10" dirty="0" smtClean="0"/>
+              <a:t>:</a:t>
             </a:r>
             <a:r>
               <a:rPr lang="en-US" sz="1400" kern="1000" spc="10" dirty="0"/>
-              <a:t>: simplify(simplify(e)) == simplify(e)</a:t>
+              <a:t> simplify(simplify(e)) == simplify(e)</a:t>
             </a:r>
             <a:br>
               <a:rPr lang="en-US" sz="1400" kern="1000" spc="10" dirty="0"/>
@@ -7605,11 +8658,27 @@
               <a:t> nu </a:t>
             </a:r>
             <a:r>
-              <a:rPr lang="en-US" sz="1400" kern="1000" spc="10" dirty="0" err="1"/>
-              <a:t>mareste</a:t>
-            </a:r>
-            <a:r>
-              <a:rPr lang="en-US" sz="1400" kern="1000" spc="10" dirty="0"/>
+              <a:rPr lang="en-US" sz="1400" kern="1000" spc="10" dirty="0" smtClean="0"/>
+              <a:t>m</a:t>
+            </a:r>
+            <a:r>
+              <a:rPr lang="ro-RO" sz="1400" kern="1000" spc="10" dirty="0" smtClean="0"/>
+              <a:t>ă</a:t>
+            </a:r>
+            <a:r>
+              <a:rPr lang="en-US" sz="1400" kern="1000" spc="10" dirty="0" smtClean="0"/>
+              <a:t>re</a:t>
+            </a:r>
+            <a:r>
+              <a:rPr lang="ro-RO" sz="1400" kern="1000" spc="10" dirty="0" smtClean="0"/>
+              <a:t>ș</a:t>
+            </a:r>
+            <a:r>
+              <a:rPr lang="en-US" sz="1400" kern="1000" spc="10" dirty="0" err="1" smtClean="0"/>
+              <a:t>te</a:t>
+            </a:r>
+            <a:r>
+              <a:rPr lang="en-US" sz="1400" kern="1000" spc="10" dirty="0" smtClean="0"/>
               <a:t> </a:t>
             </a:r>
             <a:r>
@@ -7621,20 +8690,44 @@
               <a:t> / </a:t>
             </a:r>
             <a:r>
-              <a:rPr lang="en-US" sz="1400" kern="1000" spc="10" dirty="0" err="1"/>
-              <a:t>adancimea</a:t>
+              <a:rPr lang="en-US" sz="1400" kern="1000" spc="10" dirty="0" smtClean="0"/>
+              <a:t>ad</a:t>
+            </a:r>
+            <a:r>
+              <a:rPr lang="ro-RO" sz="1400" kern="1000" spc="10" dirty="0" smtClean="0"/>
+              <a:t>â</a:t>
+            </a:r>
+            <a:r>
+              <a:rPr lang="en-US" sz="1400" kern="1000" spc="10" dirty="0" err="1" smtClean="0"/>
+              <a:t>ncimea</a:t>
+            </a:r>
+            <a:r>
+              <a:rPr lang="en-US" sz="1400" kern="1000" spc="10" dirty="0" smtClean="0"/>
+              <a:t> </a:t>
             </a:r>
             <a:r>
               <a:rPr lang="en-US" sz="1400" kern="1000" spc="10" dirty="0"/>
-              <a:t> / </a:t>
-            </a:r>
-            <a:r>
-              <a:rPr lang="en-US" sz="1400" kern="1000" spc="10" dirty="0" err="1"/>
-              <a:t>numarul</a:t>
+              <a:t>/ </a:t>
+            </a:r>
+            <a:r>
+              <a:rPr lang="en-US" sz="1400" kern="1000" spc="10" dirty="0" err="1" smtClean="0"/>
+              <a:t>num</a:t>
+            </a:r>
+            <a:r>
+              <a:rPr lang="ro-RO" sz="1400" kern="1000" spc="10" dirty="0" smtClean="0"/>
+              <a:t>ă</a:t>
+            </a:r>
+            <a:r>
+              <a:rPr lang="en-US" sz="1400" kern="1000" spc="10" dirty="0" err="1" smtClean="0"/>
+              <a:t>rul</a:t>
+            </a:r>
+            <a:r>
+              <a:rPr lang="en-US" sz="1400" kern="1000" spc="10" dirty="0" smtClean="0"/>
+              <a:t> </a:t>
             </a:r>
             <a:r>
               <a:rPr lang="en-US" sz="1400" kern="1000" spc="10" dirty="0"/>
-              <a:t> de </a:t>
+              <a:t>de </a:t>
             </a:r>
             <a:r>
               <a:rPr lang="en-US" sz="1400" kern="1000" spc="10" dirty="0" err="1"/>
@@ -7681,20 +8774,20 @@
               <a:t> </a:t>
             </a:r>
             <a:r>
-              <a:rPr lang="en-US" sz="1400" b="1" kern="1000" spc="10" dirty="0" err="1">
+              <a:rPr lang="ro-RO" sz="1400" b="1" kern="1000" spc="10" dirty="0" err="1">
                 <a:solidFill>
                   <a:schemeClr val="tx1"/>
                 </a:solidFill>
               </a:rPr>
-              <a:t>si</a:t>
-            </a:r>
-            <a:r>
-              <a:rPr lang="en-US" sz="1400" b="1" kern="1000" spc="10" dirty="0">
+              <a:t>ș</a:t>
+            </a:r>
+            <a:r>
+              <a:rPr lang="en-US" sz="1400" b="1" kern="1000" spc="10" dirty="0" smtClean="0">
                 <a:solidFill>
                   <a:schemeClr val="tx1"/>
                 </a:solidFill>
               </a:rPr>
-              <a:t> </a:t>
+              <a:t>i </a:t>
             </a:r>
             <a:r>
               <a:rPr lang="en-US" sz="1400" b="1" kern="1000" spc="10" dirty="0" err="1">
@@ -7769,7 +8862,7 @@
           <p:cNvPr id="7" name="Content Placeholder 6">
             <a:extLst>
               <a:ext uri="{FF2B5EF4-FFF2-40B4-BE49-F238E27FC236}">
-                <a16:creationId xmlns:a16="http://schemas.microsoft.com/office/drawing/2014/main" id="{73C5F9BF-9E45-7174-B44C-B1278054712F}"/>
+                <a16:creationId xmlns:a16="http://schemas.microsoft.com/office/drawing/2014/main" xmlns="" id="{73C5F9BF-9E45-7174-B44C-B1278054712F}"/>
               </a:ext>
             </a:extLst>
           </p:cNvPr>
@@ -7793,7 +8886,31 @@
                   <a:schemeClr val="tx1"/>
                 </a:solidFill>
               </a:rPr>
-              <a:t>Elemente neutre si absorbante:</a:t>
+              <a:t>Elemente neutre </a:t>
+            </a:r>
+            <a:r>
+              <a:rPr lang="ro-RO" sz="1200" b="1" dirty="0" smtClean="0">
+                <a:solidFill>
+                  <a:schemeClr val="tx1"/>
+                </a:solidFill>
+              </a:rPr>
+              <a:t>ș</a:t>
+            </a:r>
+            <a:r>
+              <a:rPr lang="it-IT" sz="1200" b="1" dirty="0" smtClean="0">
+                <a:solidFill>
+                  <a:schemeClr val="tx1"/>
+                </a:solidFill>
+              </a:rPr>
+              <a:t>i </a:t>
+            </a:r>
+            <a:r>
+              <a:rPr lang="it-IT" sz="1200" b="1" dirty="0">
+                <a:solidFill>
+                  <a:schemeClr val="tx1"/>
+                </a:solidFill>
+              </a:rPr>
+              <a:t>absorbante:</a:t>
             </a:r>
             <a:endParaRPr lang="it-IT" sz="1200" dirty="0">
               <a:solidFill>
@@ -7821,12 +8938,100 @@
           </a:p>
           <a:p>
             <a:r>
+              <a:rPr lang="it-IT" sz="1200" b="1" dirty="0" smtClean="0">
+                <a:solidFill>
+                  <a:schemeClr val="tx1"/>
+                </a:solidFill>
+              </a:rPr>
+              <a:t>Nega</a:t>
+            </a:r>
+            <a:r>
+              <a:rPr lang="ro-RO" sz="1200" b="1" dirty="0" smtClean="0">
+                <a:solidFill>
+                  <a:schemeClr val="tx1"/>
+                </a:solidFill>
+              </a:rPr>
+              <a:t>ț</a:t>
+            </a:r>
+            <a:r>
+              <a:rPr lang="it-IT" sz="1200" b="1" dirty="0" smtClean="0">
+                <a:solidFill>
+                  <a:schemeClr val="tx1"/>
+                </a:solidFill>
+              </a:rPr>
+              <a:t>ie</a:t>
+            </a:r>
+            <a:r>
               <a:rPr lang="it-IT" sz="1200" b="1" dirty="0">
                 <a:solidFill>
                   <a:schemeClr val="tx1"/>
                 </a:solidFill>
               </a:rPr>
-              <a:t>Negatie, scadere, substitutie:</a:t>
+              <a:t>, </a:t>
+            </a:r>
+            <a:r>
+              <a:rPr lang="it-IT" sz="1200" b="1" dirty="0" smtClean="0">
+                <a:solidFill>
+                  <a:schemeClr val="tx1"/>
+                </a:solidFill>
+              </a:rPr>
+              <a:t>sc</a:t>
+            </a:r>
+            <a:r>
+              <a:rPr lang="ro-RO" sz="1200" b="1" dirty="0" smtClean="0">
+                <a:solidFill>
+                  <a:schemeClr val="tx1"/>
+                </a:solidFill>
+              </a:rPr>
+              <a:t>ă</a:t>
+            </a:r>
+            <a:r>
+              <a:rPr lang="it-IT" sz="1200" b="1" dirty="0" smtClean="0">
+                <a:solidFill>
+                  <a:schemeClr val="tx1"/>
+                </a:solidFill>
+              </a:rPr>
+              <a:t>dere</a:t>
+            </a:r>
+            <a:r>
+              <a:rPr lang="it-IT" sz="1200" b="1" dirty="0">
+                <a:solidFill>
+                  <a:schemeClr val="tx1"/>
+                </a:solidFill>
+              </a:rPr>
+              <a:t>, </a:t>
+            </a:r>
+            <a:r>
+              <a:rPr lang="it-IT" sz="1200" b="1" dirty="0" smtClean="0">
+                <a:solidFill>
+                  <a:schemeClr val="tx1"/>
+                </a:solidFill>
+              </a:rPr>
+              <a:t>substitu</a:t>
+            </a:r>
+            <a:r>
+              <a:rPr lang="ro-RO" sz="1200" b="1" dirty="0" smtClean="0">
+                <a:solidFill>
+                  <a:schemeClr val="tx1"/>
+                </a:solidFill>
+              </a:rPr>
+              <a:t>ț</a:t>
+            </a:r>
+            <a:r>
+              <a:rPr lang="it-IT" sz="1200" b="1" dirty="0" smtClean="0">
+                <a:solidFill>
+                  <a:schemeClr val="tx1"/>
+                </a:solidFill>
+              </a:rPr>
+              <a:t>ie</a:t>
+            </a:r>
+            <a:r>
+              <a:rPr lang="it-IT" sz="1200" b="1" dirty="0">
+                <a:solidFill>
+                  <a:schemeClr val="tx1"/>
+                </a:solidFill>
+              </a:rPr>
+              <a:t>:</a:t>
             </a:r>
             <a:endParaRPr lang="it-IT" sz="1200" dirty="0">
               <a:solidFill>
@@ -7848,8 +9053,36 @@
           </a:p>
           <a:p>
             <a:r>
+              <a:rPr lang="it-IT" sz="1200" dirty="0" smtClean="0"/>
+              <a:t>Substitu</a:t>
+            </a:r>
+            <a:r>
+              <a:rPr lang="ro-RO" sz="1200" dirty="0" smtClean="0"/>
+              <a:t>ț</a:t>
+            </a:r>
+            <a:r>
+              <a:rPr lang="it-IT" sz="1200" dirty="0" smtClean="0"/>
+              <a:t>ia p</a:t>
+            </a:r>
+            <a:r>
+              <a:rPr lang="ro-RO" sz="1200" dirty="0" smtClean="0"/>
+              <a:t>ă</a:t>
+            </a:r>
+            <a:r>
+              <a:rPr lang="it-IT" sz="1200" dirty="0" smtClean="0"/>
+              <a:t>streaz</a:t>
+            </a:r>
+            <a:r>
+              <a:rPr lang="ro-RO" sz="1200" dirty="0" smtClean="0"/>
+              <a:t>ă</a:t>
+            </a:r>
+            <a:r>
+              <a:rPr lang="it-IT" sz="1200" dirty="0" smtClean="0"/>
+              <a:t> </a:t>
+            </a:r>
+            <a:r>
               <a:rPr lang="it-IT" sz="1200" dirty="0"/>
-              <a:t>Substitutia pastreaza semantica</a:t>
+              <a:t>semantica</a:t>
             </a:r>
           </a:p>
           <a:p>
@@ -8397,7 +9630,7 @@
         <p:spPr>
           <a:xfrm>
             <a:off x="1097280" y="5408077"/>
-            <a:ext cx="10058400" cy="1097280"/>
+            <a:ext cx="10058400" cy="815608"/>
           </a:xfrm>
           <a:prstGeom prst="rect">
             <a:avLst/>
@@ -8446,34 +9679,61 @@
               <a:t> </a:t>
             </a:r>
             <a:r>
-              <a:rPr sz="1700" b="1" i="0" dirty="0" err="1">
-                <a:solidFill>
-                  <a:srgbClr val="2F3338"/>
-                </a:solidFill>
-                <a:latin typeface="Segoe UI"/>
-              </a:rPr>
-              <a:t>distributie</a:t>
-            </a:r>
-            <a:r>
-              <a:rPr sz="1700" b="1" i="0" dirty="0">
-                <a:solidFill>
-                  <a:srgbClr val="2F3338"/>
-                </a:solidFill>
-                <a:latin typeface="Segoe UI"/>
-              </a:rPr>
-              <a:t> </a:t>
-            </a:r>
-            <a:r>
-              <a:rPr sz="1700" b="1" i="0" dirty="0" err="1">
-                <a:solidFill>
-                  <a:srgbClr val="2F3338"/>
-                </a:solidFill>
-                <a:latin typeface="Segoe UI"/>
-              </a:rPr>
-              <a:t>echilibrata</a:t>
-            </a:r>
-            <a:r>
-              <a:rPr sz="1700" b="1" i="0" dirty="0">
+              <a:rPr sz="1700" b="1" i="0" dirty="0" err="1" smtClean="0">
+                <a:solidFill>
+                  <a:srgbClr val="2F3338"/>
+                </a:solidFill>
+                <a:latin typeface="Segoe UI"/>
+              </a:rPr>
+              <a:t>distribu</a:t>
+            </a:r>
+            <a:r>
+              <a:rPr lang="ro-RO" sz="1700" b="1" i="0" dirty="0" smtClean="0">
+                <a:solidFill>
+                  <a:srgbClr val="2F3338"/>
+                </a:solidFill>
+                <a:latin typeface="Segoe UI"/>
+              </a:rPr>
+              <a:t>ț</a:t>
+            </a:r>
+            <a:r>
+              <a:rPr sz="1700" b="1" i="0" dirty="0" err="1" smtClean="0">
+                <a:solidFill>
+                  <a:srgbClr val="2F3338"/>
+                </a:solidFill>
+                <a:latin typeface="Segoe UI"/>
+              </a:rPr>
+              <a:t>ie</a:t>
+            </a:r>
+            <a:r>
+              <a:rPr sz="1700" b="1" i="0" dirty="0" smtClean="0">
+                <a:solidFill>
+                  <a:srgbClr val="2F3338"/>
+                </a:solidFill>
+                <a:latin typeface="Segoe UI"/>
+              </a:rPr>
+              <a:t> </a:t>
+            </a:r>
+            <a:r>
+              <a:rPr sz="1700" b="1" i="0" dirty="0" err="1" smtClean="0">
+                <a:solidFill>
+                  <a:srgbClr val="2F3338"/>
+                </a:solidFill>
+                <a:latin typeface="Segoe UI"/>
+              </a:rPr>
+              <a:t>echilibrat</a:t>
+            </a:r>
+            <a:r>
+              <a:rPr lang="ro-RO" sz="1700" b="1" i="0" dirty="0" smtClean="0">
+                <a:solidFill>
+                  <a:srgbClr val="2F3338"/>
+                </a:solidFill>
+                <a:latin typeface="Segoe UI"/>
+              </a:rPr>
+              <a:t>ă</a:t>
+            </a:r>
+            <a:r>
+              <a:rPr sz="1700" b="1" i="0" dirty="0" smtClean="0">
                 <a:solidFill>
                   <a:srgbClr val="2F3338"/>
                 </a:solidFill>
@@ -8481,6 +9741,12 @@
               </a:rPr>
               <a:t>:</a:t>
             </a:r>
+            <a:endParaRPr sz="1700" b="1" i="0" dirty="0">
+              <a:solidFill>
+                <a:srgbClr val="2F3338"/>
+              </a:solidFill>
+              <a:latin typeface="Segoe UI"/>
+            </a:endParaRPr>
           </a:p>
           <a:p>
             <a:pPr algn="l">
@@ -8555,22 +9821,22 @@
               <a:t> </a:t>
             </a:r>
             <a:r>
-              <a:rPr sz="1500" b="0" i="0" dirty="0" err="1">
-                <a:solidFill>
-                  <a:srgbClr val="2F3338"/>
-                </a:solidFill>
-                <a:latin typeface="Segoe UI"/>
-              </a:rPr>
-              <a:t>si</a:t>
-            </a:r>
-            <a:r>
-              <a:rPr sz="1500" b="0" i="0" dirty="0">
-                <a:solidFill>
-                  <a:srgbClr val="2F3338"/>
-                </a:solidFill>
-                <a:latin typeface="Segoe UI"/>
-              </a:rPr>
-              <a:t> </a:t>
+              <a:rPr lang="ro-RO" sz="1500" dirty="0" err="1">
+                <a:solidFill>
+                  <a:srgbClr val="2F3338"/>
+                </a:solidFill>
+                <a:latin typeface="Segoe UI"/>
+              </a:rPr>
+              <a:t>ș</a:t>
+            </a:r>
+            <a:r>
+              <a:rPr sz="1500" b="0" i="0" dirty="0" smtClean="0">
+                <a:solidFill>
+                  <a:srgbClr val="2F3338"/>
+                </a:solidFill>
+                <a:latin typeface="Segoe UI"/>
+              </a:rPr>
+              <a:t>i </a:t>
             </a:r>
             <a:r>
               <a:rPr sz="1500" b="0" i="0" dirty="0" err="1">
@@ -8679,16 +9945,43 @@
               <a:t> </a:t>
             </a:r>
             <a:r>
-              <a:rPr sz="1500" b="0" i="0" dirty="0" err="1">
-                <a:solidFill>
-                  <a:srgbClr val="2F3338"/>
-                </a:solidFill>
-                <a:latin typeface="Segoe UI"/>
-              </a:rPr>
-              <a:t>fara</a:t>
-            </a:r>
-            <a:r>
-              <a:rPr sz="1500" b="0" i="0" dirty="0">
+              <a:rPr sz="1500" b="0" i="0" dirty="0" smtClean="0">
+                <a:solidFill>
+                  <a:srgbClr val="2F3338"/>
+                </a:solidFill>
+                <a:latin typeface="Segoe UI"/>
+              </a:rPr>
+              <a:t>f</a:t>
+            </a:r>
+            <a:r>
+              <a:rPr lang="ro-RO" sz="1500" b="0" i="0" dirty="0" smtClean="0">
+                <a:solidFill>
+                  <a:srgbClr val="2F3338"/>
+                </a:solidFill>
+                <a:latin typeface="Segoe UI"/>
+              </a:rPr>
+              <a:t>ă</a:t>
+            </a:r>
+            <a:r>
+              <a:rPr sz="1500" b="0" i="0" dirty="0" smtClean="0">
+                <a:solidFill>
+                  <a:srgbClr val="2F3338"/>
+                </a:solidFill>
+                <a:latin typeface="Segoe UI"/>
+              </a:rPr>
+              <a:t>r</a:t>
+            </a:r>
+            <a:r>
+              <a:rPr lang="ro-RO" sz="1500" b="0" i="0" dirty="0" smtClean="0">
+                <a:solidFill>
+                  <a:srgbClr val="2F3338"/>
+                </a:solidFill>
+                <a:latin typeface="Segoe UI"/>
+              </a:rPr>
+              <a:t>ă</a:t>
+            </a:r>
+            <a:r>
+              <a:rPr sz="1500" b="0" i="0" dirty="0" smtClean="0">
                 <a:solidFill>
                   <a:srgbClr val="2F3338"/>
                 </a:solidFill>
@@ -8755,9 +10048,30 @@
           <a:lstStyle/>
           <a:p>
             <a:r>
-              <a:rPr sz="3400"/>
-              <a:t>Analiza: eficienta metodei</a:t>
-            </a:r>
+              <a:rPr sz="3400" dirty="0" err="1"/>
+              <a:t>Analiza</a:t>
+            </a:r>
+            <a:r>
+              <a:rPr sz="3400" dirty="0"/>
+              <a:t>: </a:t>
+            </a:r>
+            <a:r>
+              <a:rPr sz="3400" dirty="0" err="1" smtClean="0"/>
+              <a:t>eficien</a:t>
+            </a:r>
+            <a:r>
+              <a:rPr lang="ro-RO" sz="3400" dirty="0" smtClean="0"/>
+              <a:t>ț</a:t>
+            </a:r>
+            <a:r>
+              <a:rPr sz="3400" dirty="0" smtClean="0"/>
+              <a:t>a </a:t>
+            </a:r>
+            <a:r>
+              <a:rPr sz="3400" dirty="0" err="1"/>
+              <a:t>metodei</a:t>
+            </a:r>
+            <a:endParaRPr sz="3400" dirty="0"/>
           </a:p>
         </p:txBody>
       </p:sp>
@@ -8808,27 +10122,174 @@
           <a:lstStyle/>
           <a:p>
             <a:r>
-              <a:rPr sz="1800"/>
-              <a:t>120 de cazuri per proprietate, generate automat</a:t>
-            </a:r>
-          </a:p>
-          <a:p>
-            <a:r>
-              <a:rPr sz="1800"/>
-              <a:t>Contraexemplele sunt reduse la forma minima</a:t>
-            </a:r>
-          </a:p>
-          <a:p>
-            <a:r>
-              <a:rPr sz="1800"/>
-              <a:t>Proprietatile servesc drept documentatie executabila</a:t>
-            </a:r>
-          </a:p>
-          <a:p>
-            <a:r>
-              <a:rPr sz="1800"/>
-              <a:t>classify ofera vizibilitate asupra distributiei testelor</a:t>
-            </a:r>
+              <a:rPr sz="1800" dirty="0"/>
+              <a:t>120 de </a:t>
+            </a:r>
+            <a:r>
+              <a:rPr sz="1800" dirty="0" err="1"/>
+              <a:t>cazuri</a:t>
+            </a:r>
+            <a:r>
+              <a:rPr sz="1800" dirty="0"/>
+              <a:t> per </a:t>
+            </a:r>
+            <a:r>
+              <a:rPr sz="1800" dirty="0" err="1"/>
+              <a:t>proprietate</a:t>
+            </a:r>
+            <a:r>
+              <a:rPr sz="1800" dirty="0"/>
+              <a:t>, generate automat</a:t>
+            </a:r>
+          </a:p>
+          <a:p>
+            <a:r>
+              <a:rPr sz="1800" dirty="0" err="1"/>
+              <a:t>Contraexemplele</a:t>
+            </a:r>
+            <a:r>
+              <a:rPr sz="1800" dirty="0"/>
+              <a:t> </a:t>
+            </a:r>
+            <a:r>
+              <a:rPr sz="1800" dirty="0" err="1"/>
+              <a:t>sunt</a:t>
+            </a:r>
+            <a:r>
+              <a:rPr sz="1800" dirty="0"/>
+              <a:t> </a:t>
+            </a:r>
+            <a:r>
+              <a:rPr sz="1800" dirty="0" err="1"/>
+              <a:t>reduse</a:t>
+            </a:r>
+            <a:r>
+              <a:rPr sz="1800" dirty="0"/>
+              <a:t> la forma </a:t>
+            </a:r>
+            <a:r>
+              <a:rPr sz="1800" dirty="0" smtClean="0"/>
+              <a:t>minim</a:t>
+            </a:r>
+            <a:r>
+              <a:rPr lang="ro-RO" sz="1800" dirty="0" smtClean="0"/>
+              <a:t>ă</a:t>
+            </a:r>
+            <a:endParaRPr sz="1800" dirty="0"/>
+          </a:p>
+          <a:p>
+            <a:r>
+              <a:rPr sz="1800" dirty="0" err="1" smtClean="0"/>
+              <a:t>Propriet</a:t>
+            </a:r>
+            <a:r>
+              <a:rPr lang="ro-RO" sz="1800" dirty="0" smtClean="0"/>
+              <a:t>ăț</a:t>
+            </a:r>
+            <a:r>
+              <a:rPr sz="1800" dirty="0" err="1" smtClean="0"/>
+              <a:t>ile</a:t>
+            </a:r>
+            <a:r>
+              <a:rPr sz="1800" dirty="0" smtClean="0"/>
+              <a:t> </a:t>
+            </a:r>
+            <a:r>
+              <a:rPr sz="1800" dirty="0" err="1"/>
+              <a:t>servesc</a:t>
+            </a:r>
+            <a:r>
+              <a:rPr sz="1800" dirty="0"/>
+              <a:t> </a:t>
+            </a:r>
+            <a:r>
+              <a:rPr sz="1800" dirty="0" err="1"/>
+              <a:t>drept</a:t>
+            </a:r>
+            <a:r>
+              <a:rPr sz="1800" dirty="0"/>
+              <a:t> </a:t>
+            </a:r>
+            <a:r>
+              <a:rPr sz="1800" dirty="0" err="1" smtClean="0"/>
+              <a:t>documenta</a:t>
+            </a:r>
+            <a:r>
+              <a:rPr lang="ro-RO" sz="1800" dirty="0" smtClean="0"/>
+              <a:t>ț</a:t>
+            </a:r>
+            <a:r>
+              <a:rPr sz="1800" dirty="0" err="1" smtClean="0"/>
+              <a:t>ie</a:t>
+            </a:r>
+            <a:r>
+              <a:rPr sz="1800" dirty="0" smtClean="0"/>
+              <a:t> </a:t>
+            </a:r>
+            <a:r>
+              <a:rPr sz="1800" dirty="0" err="1" smtClean="0"/>
+              <a:t>executabil</a:t>
+            </a:r>
+            <a:r>
+              <a:rPr lang="ro-RO" sz="1800" dirty="0" smtClean="0"/>
+              <a:t>ă</a:t>
+            </a:r>
+            <a:endParaRPr sz="1800" dirty="0"/>
+          </a:p>
+          <a:p>
+            <a:r>
+              <a:rPr sz="1800" dirty="0"/>
+              <a:t>classify </a:t>
+            </a:r>
+            <a:r>
+              <a:rPr sz="1800" dirty="0" err="1" smtClean="0"/>
+              <a:t>ofer</a:t>
+            </a:r>
+            <a:r>
+              <a:rPr lang="ro-RO" sz="1800" dirty="0" smtClean="0"/>
+              <a:t>ă</a:t>
+            </a:r>
+            <a:r>
+              <a:rPr sz="1800" dirty="0" smtClean="0"/>
+              <a:t> </a:t>
+            </a:r>
+            <a:r>
+              <a:rPr sz="1800" dirty="0" err="1"/>
+              <a:t>vizibilitate</a:t>
+            </a:r>
+            <a:r>
+              <a:rPr sz="1800" dirty="0"/>
+              <a:t> </a:t>
+            </a:r>
+            <a:r>
+              <a:rPr sz="1800" dirty="0" err="1"/>
+              <a:t>asupra</a:t>
+            </a:r>
+            <a:r>
+              <a:rPr sz="1800" dirty="0"/>
+              <a:t> </a:t>
+            </a:r>
+            <a:r>
+              <a:rPr sz="1800" dirty="0" err="1" smtClean="0"/>
+              <a:t>distribu</a:t>
+            </a:r>
+            <a:r>
+              <a:rPr lang="ro-RO" sz="1800" dirty="0" smtClean="0"/>
+              <a:t>ț</a:t>
+            </a:r>
+            <a:r>
+              <a:rPr sz="1800" dirty="0" err="1" smtClean="0"/>
+              <a:t>iei</a:t>
+            </a:r>
+            <a:r>
+              <a:rPr sz="1800" dirty="0" smtClean="0"/>
+              <a:t> </a:t>
+            </a:r>
+            <a:r>
+              <a:rPr sz="1800" dirty="0" err="1"/>
+              <a:t>testelor</a:t>
+            </a:r>
+            <a:endParaRPr sz="1800" dirty="0"/>
           </a:p>
         </p:txBody>
       </p:sp>
@@ -8848,9 +10309,26 @@
           <a:lstStyle/>
           <a:p>
             <a:r>
-              <a:rPr sz="2400"/>
-              <a:t>Limitari observate</a:t>
-            </a:r>
+              <a:rPr sz="2400" dirty="0" smtClean="0"/>
+              <a:t>Limit</a:t>
+            </a:r>
+            <a:r>
+              <a:rPr lang="ro-RO" sz="2400" dirty="0" smtClean="0"/>
+              <a:t>ă</a:t>
+            </a:r>
+            <a:r>
+              <a:rPr sz="2400" dirty="0" err="1" smtClean="0"/>
+              <a:t>ri</a:t>
+            </a:r>
+            <a:r>
+              <a:rPr sz="2400" dirty="0" smtClean="0"/>
+              <a:t> </a:t>
+            </a:r>
+            <a:r>
+              <a:rPr sz="2400" dirty="0" err="1"/>
+              <a:t>observate</a:t>
+            </a:r>
+            <a:endParaRPr sz="2400" dirty="0"/>
           </a:p>
         </p:txBody>
       </p:sp>
@@ -8870,27 +10348,194 @@
           <a:lstStyle/>
           <a:p>
             <a:r>
-              <a:rPr sz="1800"/>
-              <a:t>Proprietatile trebuie formulate corect</a:t>
-            </a:r>
-          </a:p>
-          <a:p>
-            <a:r>
-              <a:rPr sz="1800"/>
-              <a:t>Un generator prost acopera doar cazuri banale</a:t>
-            </a:r>
-          </a:p>
-          <a:p>
-            <a:r>
-              <a:rPr sz="1800"/>
-              <a:t>Maybe introduce evaluari partiale (rezolvat cu genEnvFor)</a:t>
-            </a:r>
-          </a:p>
-          <a:p>
-            <a:r>
-              <a:rPr sz="1800"/>
-              <a:t>QuickCheck completeaza, nu inlocuieste demonstratia formala</a:t>
-            </a:r>
+              <a:rPr sz="1800" dirty="0" err="1" smtClean="0"/>
+              <a:t>Propriet</a:t>
+            </a:r>
+            <a:r>
+              <a:rPr lang="ro-RO" sz="1800" dirty="0" smtClean="0"/>
+              <a:t>ăț</a:t>
+            </a:r>
+            <a:r>
+              <a:rPr sz="1800" dirty="0" err="1" smtClean="0"/>
+              <a:t>ile</a:t>
+            </a:r>
+            <a:r>
+              <a:rPr sz="1800" dirty="0" smtClean="0"/>
+              <a:t> </a:t>
+            </a:r>
+            <a:r>
+              <a:rPr sz="1800" dirty="0" err="1"/>
+              <a:t>trebuie</a:t>
+            </a:r>
+            <a:r>
+              <a:rPr sz="1800" dirty="0"/>
+              <a:t> formulate </a:t>
+            </a:r>
+            <a:r>
+              <a:rPr sz="1800" dirty="0" err="1"/>
+              <a:t>corect</a:t>
+            </a:r>
+            <a:endParaRPr sz="1800" dirty="0"/>
+          </a:p>
+          <a:p>
+            <a:r>
+              <a:rPr sz="1800" dirty="0"/>
+              <a:t>Un generator prost </a:t>
+            </a:r>
+            <a:r>
+              <a:rPr sz="1800" dirty="0" err="1" smtClean="0"/>
+              <a:t>acoper</a:t>
+            </a:r>
+            <a:r>
+              <a:rPr lang="ro-RO" sz="1800" dirty="0" smtClean="0"/>
+              <a:t>ă</a:t>
+            </a:r>
+            <a:r>
+              <a:rPr sz="1800" dirty="0" smtClean="0"/>
+              <a:t> </a:t>
+            </a:r>
+            <a:r>
+              <a:rPr sz="1800" dirty="0" err="1"/>
+              <a:t>doar</a:t>
+            </a:r>
+            <a:r>
+              <a:rPr sz="1800" dirty="0"/>
+              <a:t> </a:t>
+            </a:r>
+            <a:r>
+              <a:rPr sz="1800" dirty="0" err="1"/>
+              <a:t>cazuri</a:t>
+            </a:r>
+            <a:r>
+              <a:rPr sz="1800" dirty="0"/>
+              <a:t> </a:t>
+            </a:r>
+            <a:r>
+              <a:rPr sz="1800" dirty="0" err="1"/>
+              <a:t>banale</a:t>
+            </a:r>
+            <a:endParaRPr sz="1800" dirty="0"/>
+          </a:p>
+          <a:p>
+            <a:r>
+              <a:rPr sz="1800" dirty="0"/>
+              <a:t>Maybe introduce </a:t>
+            </a:r>
+            <a:r>
+              <a:rPr sz="1800" dirty="0" err="1" smtClean="0"/>
+              <a:t>evalu</a:t>
+            </a:r>
+            <a:r>
+              <a:rPr lang="ro-RO" sz="1800" dirty="0" smtClean="0"/>
+              <a:t>ă</a:t>
+            </a:r>
+            <a:r>
+              <a:rPr sz="1800" dirty="0" err="1" smtClean="0"/>
+              <a:t>ri</a:t>
+            </a:r>
+            <a:r>
+              <a:rPr sz="1800" dirty="0" smtClean="0"/>
+              <a:t> par</a:t>
+            </a:r>
+            <a:r>
+              <a:rPr lang="ro-RO" sz="1800" dirty="0" smtClean="0"/>
+              <a:t>ț</a:t>
+            </a:r>
+            <a:r>
+              <a:rPr sz="1800" dirty="0" err="1" smtClean="0"/>
+              <a:t>iale</a:t>
+            </a:r>
+            <a:r>
+              <a:rPr sz="1800" dirty="0" smtClean="0"/>
+              <a:t> </a:t>
+            </a:r>
+            <a:r>
+              <a:rPr sz="1800" dirty="0"/>
+              <a:t>(</a:t>
+            </a:r>
+            <a:r>
+              <a:rPr sz="1800" dirty="0" err="1"/>
+              <a:t>rezolvat</a:t>
+            </a:r>
+            <a:r>
+              <a:rPr sz="1800" dirty="0"/>
+              <a:t> cu </a:t>
+            </a:r>
+            <a:r>
+              <a:rPr sz="1800" dirty="0" err="1"/>
+              <a:t>genEnvFor</a:t>
+            </a:r>
+            <a:r>
+              <a:rPr sz="1800" dirty="0"/>
+              <a:t>)</a:t>
+            </a:r>
+          </a:p>
+          <a:p>
+            <a:r>
+              <a:rPr sz="1800" dirty="0" err="1"/>
+              <a:t>QuickCheck</a:t>
+            </a:r>
+            <a:r>
+              <a:rPr sz="1800" dirty="0"/>
+              <a:t> </a:t>
+            </a:r>
+            <a:r>
+              <a:rPr sz="1800" dirty="0" err="1" smtClean="0"/>
+              <a:t>completea</a:t>
+            </a:r>
+            <a:r>
+              <a:rPr lang="ro-RO" sz="1800" dirty="0" smtClean="0"/>
+              <a:t>ză</a:t>
+            </a:r>
+            <a:r>
+              <a:rPr sz="1800" dirty="0" smtClean="0"/>
+              <a:t>, </a:t>
+            </a:r>
+            <a:r>
+              <a:rPr sz="1800" dirty="0"/>
+              <a:t>nu </a:t>
+            </a:r>
+            <a:r>
+              <a:rPr lang="ro-RO" sz="1800" dirty="0"/>
+              <a:t>î</a:t>
+            </a:r>
+            <a:r>
+              <a:rPr sz="1800" dirty="0" err="1" smtClean="0"/>
+              <a:t>nlocuie</a:t>
+            </a:r>
+            <a:r>
+              <a:rPr lang="ro-RO" sz="1800" dirty="0" smtClean="0"/>
+              <a:t>ș</a:t>
+            </a:r>
+            <a:r>
+              <a:rPr sz="1800" dirty="0" err="1" smtClean="0"/>
+              <a:t>te</a:t>
+            </a:r>
+            <a:r>
+              <a:rPr sz="1800" dirty="0" smtClean="0"/>
+              <a:t> </a:t>
+            </a:r>
+            <a:r>
+              <a:rPr sz="1800" dirty="0" err="1" smtClean="0"/>
+              <a:t>demonstra</a:t>
+            </a:r>
+            <a:r>
+              <a:rPr lang="ro-RO" sz="1800" dirty="0" smtClean="0"/>
+              <a:t>ț</a:t>
+            </a:r>
+            <a:r>
+              <a:rPr sz="1800" dirty="0" err="1" smtClean="0"/>
+              <a:t>ia</a:t>
+            </a:r>
+            <a:r>
+              <a:rPr sz="1800" dirty="0" smtClean="0"/>
+              <a:t> formal</a:t>
+            </a:r>
+            <a:r>
+              <a:rPr lang="ro-RO" sz="1800" dirty="0" smtClean="0"/>
+              <a:t>ă</a:t>
+            </a:r>
+            <a:endParaRPr sz="1800" dirty="0"/>
           </a:p>
         </p:txBody>
       </p:sp>
@@ -10076,6 +11721,162 @@
         </p:txBody>
       </p:sp>
     </p:spTree>
+  </p:cSld>
+  <p:clrMapOvr>
+    <a:masterClrMapping/>
+  </p:clrMapOvr>
+</p:sld>
+</file>
+
+<file path=ppt/slides/slide19.xml><?xml version="1.0" encoding="utf-8"?>
+<p:sld xmlns:a="http://schemas.openxmlformats.org/drawingml/2006/main" xmlns:r="http://schemas.openxmlformats.org/officeDocument/2006/relationships" xmlns:p="http://schemas.openxmlformats.org/presentationml/2006/main">
+  <p:cSld>
+    <p:spTree>
+      <p:nvGrpSpPr>
+        <p:cNvPr id="1" name=""/>
+        <p:cNvGrpSpPr/>
+        <p:nvPr/>
+      </p:nvGrpSpPr>
+      <p:grpSpPr>
+        <a:xfrm>
+          <a:off x="0" y="0"/>
+          <a:ext cx="0" cy="0"/>
+          <a:chOff x="0" y="0"/>
+          <a:chExt cx="0" cy="0"/>
+        </a:xfrm>
+      </p:grpSpPr>
+      <p:sp>
+        <p:nvSpPr>
+          <p:cNvPr id="2" name="Title 1"/>
+          <p:cNvSpPr>
+            <a:spLocks noGrp="1"/>
+          </p:cNvSpPr>
+          <p:nvPr>
+            <p:ph type="title"/>
+          </p:nvPr>
+        </p:nvSpPr>
+        <p:spPr/>
+        <p:txBody>
+          <a:bodyPr/>
+          <a:lstStyle/>
+          <a:p>
+            <a:r>
+              <a:rPr lang="ro-RO" dirty="0" smtClean="0"/>
+              <a:t>Bibliografie</a:t>
+            </a:r>
+            <a:endParaRPr lang="en-US" dirty="0"/>
+          </a:p>
+        </p:txBody>
+      </p:sp>
+      <p:sp>
+        <p:nvSpPr>
+          <p:cNvPr id="3" name="Content Placeholder 2"/>
+          <p:cNvSpPr>
+            <a:spLocks noGrp="1"/>
+          </p:cNvSpPr>
+          <p:nvPr>
+            <p:ph idx="1"/>
+          </p:nvPr>
+        </p:nvSpPr>
+        <p:spPr/>
+        <p:txBody>
+          <a:bodyPr/>
+          <a:lstStyle/>
+          <a:p>
+            <a:r>
+              <a:rPr lang="en-US" dirty="0"/>
+              <a:t>[39] K. </a:t>
+            </a:r>
+            <a:r>
+              <a:rPr lang="en-US" dirty="0" err="1"/>
+              <a:t>Claessen</a:t>
+            </a:r>
+            <a:r>
+              <a:rPr lang="en-US" dirty="0"/>
+              <a:t> </a:t>
+            </a:r>
+            <a:r>
+              <a:rPr lang="en-US" dirty="0" err="1"/>
+              <a:t>și</a:t>
+            </a:r>
+            <a:r>
+              <a:rPr lang="en-US" dirty="0"/>
+              <a:t> J. Hughes, “</a:t>
+            </a:r>
+            <a:r>
+              <a:rPr lang="en-US" dirty="0" err="1"/>
+              <a:t>QuickCheck</a:t>
+            </a:r>
+            <a:r>
+              <a:rPr lang="en-US" dirty="0"/>
+              <a:t>: a lightweight tool for random testing of Haskell programs,” in Proceedings of the 5th ACM SIGPLAN International Conference on Functional Programming (ICFP ’00), Montreal, Canada, 2000, pp. 268–279, </a:t>
+            </a:r>
+            <a:r>
+              <a:rPr lang="en-US" dirty="0">
+                <a:hlinkClick r:id="rId2"/>
+              </a:rPr>
+              <a:t>https://dl.acm.org/doi/epdf/10.1145/351240.351266 </a:t>
+            </a:r>
+            <a:endParaRPr lang="en-US" dirty="0"/>
+          </a:p>
+          <a:p>
+            <a:r>
+              <a:rPr lang="en-US" dirty="0"/>
+              <a:t>[40] </a:t>
+            </a:r>
+            <a:r>
+              <a:rPr lang="en-US" dirty="0" err="1"/>
+              <a:t>QuickCheck</a:t>
+            </a:r>
+            <a:r>
+              <a:rPr lang="en-US" dirty="0"/>
+              <a:t> Library Documentation. </a:t>
+            </a:r>
+            <a:r>
+              <a:rPr lang="en-US" dirty="0" err="1"/>
+              <a:t>Hackage</a:t>
+            </a:r>
+            <a:r>
+              <a:rPr lang="en-US" dirty="0"/>
+              <a:t>. </a:t>
+            </a:r>
+            <a:r>
+              <a:rPr lang="en-US" dirty="0">
+                <a:hlinkClick r:id="rId3"/>
+              </a:rPr>
+              <a:t>https://hackage.haskell.org/package/QuickCheck </a:t>
+            </a:r>
+            <a:endParaRPr lang="en-US" dirty="0"/>
+          </a:p>
+          <a:p>
+            <a:r>
+              <a:rPr lang="en-US" dirty="0"/>
+              <a:t>[41] </a:t>
+            </a:r>
+            <a:r>
+              <a:rPr lang="en-US" dirty="0" err="1"/>
+              <a:t>QuickCheck</a:t>
+            </a:r>
+            <a:r>
+              <a:rPr lang="en-US" dirty="0"/>
+              <a:t>: Automatic Testing (online tutorial). </a:t>
+            </a:r>
+            <a:r>
+              <a:rPr lang="en-US" dirty="0">
+                <a:hlinkClick r:id="rId4"/>
+              </a:rPr>
+              <a:t>https://sulzmann.github.io/ProgrammingParadigms/lec-haskell-testing.html </a:t>
+            </a:r>
+            <a:endParaRPr lang="en-US" dirty="0"/>
+          </a:p>
+        </p:txBody>
+      </p:sp>
+    </p:spTree>
+    <p:extLst>
+      <p:ext uri="{BB962C8B-B14F-4D97-AF65-F5344CB8AC3E}">
+        <p14:creationId xmlns:p14="http://schemas.microsoft.com/office/powerpoint/2010/main" val="3798079610"/>
+      </p:ext>
+    </p:extLst>
   </p:cSld>
   <p:clrMapOvr>
     <a:masterClrMapping/>
@@ -10205,8 +12006,8 @@
         </p:nvSpPr>
         <p:spPr>
           <a:xfrm>
-            <a:off x="1325880" y="2548037"/>
-            <a:ext cx="9601200" cy="1790234"/>
+            <a:off x="1325880" y="3036733"/>
+            <a:ext cx="9601200" cy="2067233"/>
           </a:xfrm>
           <a:prstGeom prst="rect">
             <a:avLst/>
@@ -10228,7 +12029,7 @@
               </a:spcAft>
             </a:pPr>
             <a:r>
-              <a:rPr sz="1700" b="0" i="0" dirty="0">
+              <a:rPr sz="2000" b="0" i="0" dirty="0">
                 <a:solidFill>
                   <a:srgbClr val="2F3338"/>
                 </a:solidFill>
@@ -10237,7 +12038,7 @@
               <a:t>- </a:t>
             </a:r>
             <a:r>
-              <a:rPr sz="1700" b="1" i="0" dirty="0" err="1">
+              <a:rPr sz="2000" b="1" i="0" dirty="0" err="1">
                 <a:solidFill>
                   <a:srgbClr val="2F3338"/>
                 </a:solidFill>
@@ -10246,7 +12047,7 @@
               <a:t>Problema</a:t>
             </a:r>
             <a:r>
-              <a:rPr sz="1700" b="0" i="0" dirty="0">
+              <a:rPr sz="2000" b="0" i="0" dirty="0">
                 <a:solidFill>
                   <a:srgbClr val="2F3338"/>
                 </a:solidFill>
@@ -10255,7 +12056,7 @@
               <a:t>: de </a:t>
             </a:r>
             <a:r>
-              <a:rPr sz="1700" b="0" i="0" dirty="0" err="1">
+              <a:rPr sz="2000" b="0" i="0" dirty="0" err="1">
                 <a:solidFill>
                   <a:srgbClr val="2F3338"/>
                 </a:solidFill>
@@ -10264,16 +12065,16 @@
               <a:t>ce</a:t>
             </a:r>
             <a:r>
-              <a:rPr sz="1700" b="0" i="0" dirty="0">
-                <a:solidFill>
-                  <a:srgbClr val="2F3338"/>
-                </a:solidFill>
-                <a:latin typeface="Segoe UI"/>
-              </a:rPr>
-              <a:t> </a:t>
-            </a:r>
-            <a:r>
-              <a:rPr sz="1700" b="0" i="0" dirty="0" err="1">
+              <a:rPr sz="2000" b="0" i="0" dirty="0">
+                <a:solidFill>
+                  <a:srgbClr val="2F3338"/>
+                </a:solidFill>
+                <a:latin typeface="Segoe UI"/>
+              </a:rPr>
+              <a:t> </a:t>
+            </a:r>
+            <a:r>
+              <a:rPr sz="2000" b="0" i="0" dirty="0" err="1">
                 <a:solidFill>
                   <a:srgbClr val="2F3338"/>
                 </a:solidFill>
@@ -10282,34 +12083,52 @@
               <a:t>testarea</a:t>
             </a:r>
             <a:r>
-              <a:rPr sz="1700" b="0" i="0" dirty="0">
-                <a:solidFill>
-                  <a:srgbClr val="2F3338"/>
-                </a:solidFill>
-                <a:latin typeface="Segoe UI"/>
-              </a:rPr>
-              <a:t> </a:t>
-            </a:r>
-            <a:r>
-              <a:rPr sz="1700" b="0" i="0" dirty="0" err="1">
-                <a:solidFill>
-                  <a:srgbClr val="2F3338"/>
-                </a:solidFill>
-                <a:latin typeface="Segoe UI"/>
-              </a:rPr>
-              <a:t>clasica</a:t>
-            </a:r>
-            <a:r>
-              <a:rPr sz="1700" b="0" i="0" dirty="0">
-                <a:solidFill>
-                  <a:srgbClr val="2F3338"/>
-                </a:solidFill>
-                <a:latin typeface="Segoe UI"/>
-              </a:rPr>
-              <a:t> nu </a:t>
-            </a:r>
-            <a:r>
-              <a:rPr sz="1700" b="0" i="0" dirty="0" err="1">
+              <a:rPr sz="2000" b="0" i="0" dirty="0">
+                <a:solidFill>
+                  <a:srgbClr val="2F3338"/>
+                </a:solidFill>
+                <a:latin typeface="Segoe UI"/>
+              </a:rPr>
+              <a:t> </a:t>
+            </a:r>
+            <a:r>
+              <a:rPr sz="2000" b="0" i="0" dirty="0" err="1" smtClean="0">
+                <a:solidFill>
+                  <a:srgbClr val="2F3338"/>
+                </a:solidFill>
+                <a:latin typeface="Segoe UI"/>
+              </a:rPr>
+              <a:t>clasic</a:t>
+            </a:r>
+            <a:r>
+              <a:rPr lang="ro-RO" sz="2000" b="0" i="0" dirty="0" smtClean="0">
+                <a:solidFill>
+                  <a:srgbClr val="2F3338"/>
+                </a:solidFill>
+                <a:latin typeface="Segoe UI"/>
+              </a:rPr>
+              <a:t>ă</a:t>
+            </a:r>
+            <a:r>
+              <a:rPr sz="2000" b="0" i="0" dirty="0" smtClean="0">
+                <a:solidFill>
+                  <a:srgbClr val="2F3338"/>
+                </a:solidFill>
+                <a:latin typeface="Segoe UI"/>
+              </a:rPr>
+              <a:t> </a:t>
+            </a:r>
+            <a:r>
+              <a:rPr sz="2000" b="0" i="0" dirty="0">
+                <a:solidFill>
+                  <a:srgbClr val="2F3338"/>
+                </a:solidFill>
+                <a:latin typeface="Segoe UI"/>
+              </a:rPr>
+              <a:t>nu </a:t>
+            </a:r>
+            <a:r>
+              <a:rPr sz="2000" b="0" i="0" dirty="0" err="1">
                 <a:solidFill>
                   <a:srgbClr val="2F3338"/>
                 </a:solidFill>
@@ -10318,24 +12137,33 @@
               <a:t>este</a:t>
             </a:r>
             <a:r>
-              <a:rPr sz="1700" b="0" i="0" dirty="0">
-                <a:solidFill>
-                  <a:srgbClr val="2F3338"/>
-                </a:solidFill>
-                <a:latin typeface="Segoe UI"/>
-              </a:rPr>
-              <a:t> </a:t>
-            </a:r>
-            <a:r>
-              <a:rPr sz="1700" b="0" i="0" dirty="0" err="1">
-                <a:solidFill>
-                  <a:srgbClr val="2F3338"/>
-                </a:solidFill>
-                <a:latin typeface="Segoe UI"/>
-              </a:rPr>
-              <a:t>suficienta</a:t>
-            </a:r>
-            <a:endParaRPr sz="1700" b="0" i="0" dirty="0">
+              <a:rPr sz="2000" b="0" i="0" dirty="0">
+                <a:solidFill>
+                  <a:srgbClr val="2F3338"/>
+                </a:solidFill>
+                <a:latin typeface="Segoe UI"/>
+              </a:rPr>
+              <a:t> </a:t>
+            </a:r>
+            <a:r>
+              <a:rPr sz="2000" b="0" i="0" dirty="0" err="1" smtClean="0">
+                <a:solidFill>
+                  <a:srgbClr val="2F3338"/>
+                </a:solidFill>
+                <a:latin typeface="Segoe UI"/>
+              </a:rPr>
+              <a:t>suficient</a:t>
+            </a:r>
+            <a:r>
+              <a:rPr lang="ro-RO" sz="2000" b="0" i="0" dirty="0" smtClean="0">
+                <a:solidFill>
+                  <a:srgbClr val="2F3338"/>
+                </a:solidFill>
+                <a:latin typeface="Segoe UI"/>
+              </a:rPr>
+              <a:t>ă</a:t>
+            </a:r>
+            <a:endParaRPr sz="2000" b="0" i="0" dirty="0">
               <a:solidFill>
                 <a:srgbClr val="2F3338"/>
               </a:solidFill>
@@ -10352,7 +12180,7 @@
               </a:spcAft>
             </a:pPr>
             <a:r>
-              <a:rPr sz="1700" b="0" i="0" dirty="0">
+              <a:rPr sz="2000" b="0" i="0" dirty="0">
                 <a:solidFill>
                   <a:srgbClr val="2F3338"/>
                 </a:solidFill>
@@ -10361,7 +12189,7 @@
               <a:t>- </a:t>
             </a:r>
             <a:r>
-              <a:rPr sz="1700" b="1" i="0" dirty="0" err="1">
+              <a:rPr sz="2000" b="1" i="0" dirty="0" err="1">
                 <a:solidFill>
                   <a:srgbClr val="2F3338"/>
                 </a:solidFill>
@@ -10370,7 +12198,7 @@
               <a:t>QuickCheck</a:t>
             </a:r>
             <a:r>
-              <a:rPr sz="1700" b="0" i="0" dirty="0">
+              <a:rPr sz="2000" b="0" i="0" dirty="0">
                 <a:solidFill>
                   <a:srgbClr val="2F3338"/>
                 </a:solidFill>
@@ -10379,7 +12207,7 @@
               <a:t>: </a:t>
             </a:r>
             <a:r>
-              <a:rPr sz="1700" b="0" i="0" dirty="0" err="1">
+              <a:rPr sz="2000" b="0" i="0" dirty="0" err="1">
                 <a:solidFill>
                   <a:srgbClr val="2F3338"/>
                 </a:solidFill>
@@ -10388,7 +12216,7 @@
               <a:t>concepte</a:t>
             </a:r>
             <a:r>
-              <a:rPr sz="1700" b="0" i="0" dirty="0">
+              <a:rPr sz="2000" b="0" i="0" dirty="0">
                 <a:solidFill>
                   <a:srgbClr val="2F3338"/>
                 </a:solidFill>
@@ -10397,7 +12225,7 @@
               <a:t>, </a:t>
             </a:r>
             <a:r>
-              <a:rPr sz="1700" b="0" i="0" dirty="0" err="1">
+              <a:rPr sz="2000" b="0" i="0" dirty="0" err="1">
                 <a:solidFill>
                   <a:srgbClr val="2F3338"/>
                 </a:solidFill>
@@ -10406,7 +12234,7 @@
               <a:t>generare</a:t>
             </a:r>
             <a:r>
-              <a:rPr sz="1700" b="0" i="0" dirty="0">
+              <a:rPr sz="2000" b="0" i="0" dirty="0">
                 <a:solidFill>
                   <a:srgbClr val="2F3338"/>
                 </a:solidFill>
@@ -10425,7 +12253,7 @@
               </a:spcAft>
             </a:pPr>
             <a:r>
-              <a:rPr sz="1700" b="0" i="0" dirty="0">
+              <a:rPr sz="2000" b="0" i="0" dirty="0">
                 <a:solidFill>
                   <a:srgbClr val="2F3338"/>
                 </a:solidFill>
@@ -10434,7 +12262,7 @@
               <a:t>- </a:t>
             </a:r>
             <a:r>
-              <a:rPr sz="1700" b="1" i="0" dirty="0" err="1">
+              <a:rPr sz="2000" b="1" i="0" dirty="0" err="1">
                 <a:solidFill>
                   <a:srgbClr val="2F3338"/>
                 </a:solidFill>
@@ -10443,16 +12271,16 @@
               <a:t>Arhitectura</a:t>
             </a:r>
             <a:r>
-              <a:rPr sz="1700" b="1" i="0" dirty="0">
-                <a:solidFill>
-                  <a:srgbClr val="2F3338"/>
-                </a:solidFill>
-                <a:latin typeface="Segoe UI"/>
-              </a:rPr>
-              <a:t> </a:t>
-            </a:r>
-            <a:r>
-              <a:rPr sz="1700" b="1" i="0" dirty="0" err="1">
+              <a:rPr sz="2000" b="1" i="0" dirty="0">
+                <a:solidFill>
+                  <a:srgbClr val="2F3338"/>
+                </a:solidFill>
+                <a:latin typeface="Segoe UI"/>
+              </a:rPr>
+              <a:t> </a:t>
+            </a:r>
+            <a:r>
+              <a:rPr sz="2000" b="1" i="0" dirty="0" err="1">
                 <a:solidFill>
                   <a:srgbClr val="2F3338"/>
                 </a:solidFill>
@@ -10461,7 +12289,7 @@
               <a:t>modulului</a:t>
             </a:r>
             <a:r>
-              <a:rPr sz="1700" b="0" i="0" dirty="0">
+              <a:rPr sz="2000" b="0" i="0" dirty="0">
                 <a:solidFill>
                   <a:srgbClr val="2F3338"/>
                 </a:solidFill>
@@ -10470,7 +12298,7 @@
               <a:t>: AST, evaluator, </a:t>
             </a:r>
             <a:r>
-              <a:rPr sz="1700" b="0" i="0" dirty="0" err="1">
+              <a:rPr sz="2000" b="0" i="0" dirty="0" err="1">
                 <a:solidFill>
                   <a:srgbClr val="2F3338"/>
                 </a:solidFill>
@@ -10479,7 +12307,7 @@
               <a:t>simplificator</a:t>
             </a:r>
             <a:r>
-              <a:rPr sz="1700" b="0" i="0" dirty="0">
+              <a:rPr sz="2000" b="0" i="0" dirty="0">
                 <a:solidFill>
                   <a:srgbClr val="2F3338"/>
                 </a:solidFill>
@@ -10498,7 +12326,7 @@
               </a:spcAft>
             </a:pPr>
             <a:r>
-              <a:rPr sz="1700" b="0" i="0" dirty="0">
+              <a:rPr sz="2000" b="0" i="0" dirty="0">
                 <a:solidFill>
                   <a:srgbClr val="2F3338"/>
                 </a:solidFill>
@@ -10507,7 +12335,7 @@
               <a:t>- </a:t>
             </a:r>
             <a:r>
-              <a:rPr sz="1700" b="1" i="0" dirty="0" err="1">
+              <a:rPr sz="2000" b="1" i="0" dirty="0" err="1">
                 <a:solidFill>
                   <a:srgbClr val="2F3338"/>
                 </a:solidFill>
@@ -10516,7 +12344,7 @@
               <a:t>Generatoare</a:t>
             </a:r>
             <a:r>
-              <a:rPr sz="1700" b="1" i="0" dirty="0">
+              <a:rPr sz="2000" b="1" i="0" dirty="0">
                 <a:solidFill>
                   <a:srgbClr val="2F3338"/>
                 </a:solidFill>
@@ -10525,7 +12353,7 @@
               <a:t> custom</a:t>
             </a:r>
             <a:r>
-              <a:rPr sz="1700" b="0" i="0" dirty="0">
+              <a:rPr sz="2000" b="0" i="0" dirty="0">
                 <a:solidFill>
                   <a:srgbClr val="2F3338"/>
                 </a:solidFill>
@@ -10534,7 +12362,7 @@
               <a:t>: </a:t>
             </a:r>
             <a:r>
-              <a:rPr sz="1700" b="0" i="0" dirty="0" err="1">
+              <a:rPr sz="2000" b="0" i="0" dirty="0" err="1">
                 <a:solidFill>
                   <a:srgbClr val="2F3338"/>
                 </a:solidFill>
@@ -10543,7 +12371,7 @@
               <a:t>genSmallInt</a:t>
             </a:r>
             <a:r>
-              <a:rPr sz="1700" b="0" i="0" dirty="0">
+              <a:rPr sz="2000" b="0" i="0" dirty="0">
                 <a:solidFill>
                   <a:srgbClr val="2F3338"/>
                 </a:solidFill>
@@ -10552,7 +12380,7 @@
               <a:t>, </a:t>
             </a:r>
             <a:r>
-              <a:rPr sz="1700" b="0" i="0" dirty="0" err="1">
+              <a:rPr sz="2000" b="0" i="0" dirty="0" err="1">
                 <a:solidFill>
                   <a:srgbClr val="2F3338"/>
                 </a:solidFill>
@@ -10561,7 +12389,7 @@
               <a:t>genExpr</a:t>
             </a:r>
             <a:r>
-              <a:rPr sz="1700" b="0" i="0" dirty="0">
+              <a:rPr sz="2000" b="0" i="0" dirty="0">
                 <a:solidFill>
                   <a:srgbClr val="2F3338"/>
                 </a:solidFill>
@@ -10570,7 +12398,7 @@
               <a:t>, </a:t>
             </a:r>
             <a:r>
-              <a:rPr sz="1700" b="0" i="0" dirty="0" err="1">
+              <a:rPr sz="2000" b="0" i="0" dirty="0" err="1">
                 <a:solidFill>
                   <a:srgbClr val="2F3338"/>
                 </a:solidFill>
@@ -10579,7 +12407,7 @@
               <a:t>genClosedExpr</a:t>
             </a:r>
             <a:r>
-              <a:rPr sz="1700" b="0" i="0" dirty="0">
+              <a:rPr sz="2000" b="0" i="0" dirty="0">
                 <a:solidFill>
                   <a:srgbClr val="2F3338"/>
                 </a:solidFill>
@@ -10588,7 +12416,7 @@
               <a:t>, </a:t>
             </a:r>
             <a:r>
-              <a:rPr sz="1700" b="0" i="0" dirty="0" err="1">
+              <a:rPr sz="2000" b="0" i="0" dirty="0" err="1">
                 <a:solidFill>
                   <a:srgbClr val="2F3338"/>
                 </a:solidFill>
@@ -10596,7 +12424,7 @@
               </a:rPr>
               <a:t>genEnvFor</a:t>
             </a:r>
-            <a:endParaRPr sz="1700" b="0" i="0" dirty="0">
+            <a:endParaRPr sz="2000" b="0" i="0" dirty="0">
               <a:solidFill>
                 <a:srgbClr val="2F3338"/>
               </a:solidFill>
@@ -10613,7 +12441,7 @@
               </a:spcAft>
             </a:pPr>
             <a:r>
-              <a:rPr sz="1700" b="0" i="0" dirty="0">
+              <a:rPr sz="2000" b="0" i="0" dirty="0">
                 <a:solidFill>
                   <a:srgbClr val="2F3338"/>
                 </a:solidFill>
@@ -10622,25 +12450,43 @@
               <a:t>- Cele 16 </a:t>
             </a:r>
             <a:r>
-              <a:rPr sz="1700" b="0" i="0" dirty="0" err="1">
-                <a:solidFill>
-                  <a:srgbClr val="2F3338"/>
-                </a:solidFill>
-                <a:latin typeface="Segoe UI"/>
-              </a:rPr>
-              <a:t>proprietati</a:t>
-            </a:r>
-            <a:r>
-              <a:rPr sz="1700" b="0" i="0" dirty="0">
-                <a:solidFill>
-                  <a:srgbClr val="2F3338"/>
-                </a:solidFill>
-                <a:latin typeface="Segoe UI"/>
-              </a:rPr>
-              <a:t> </a:t>
-            </a:r>
-            <a:r>
-              <a:rPr sz="1700" b="0" i="0" dirty="0" err="1">
+              <a:rPr sz="2000" b="0" i="0" dirty="0" err="1" smtClean="0">
+                <a:solidFill>
+                  <a:srgbClr val="2F3338"/>
+                </a:solidFill>
+                <a:latin typeface="Segoe UI"/>
+              </a:rPr>
+              <a:t>propriet</a:t>
+            </a:r>
+            <a:r>
+              <a:rPr lang="ro-RO" sz="2000" b="0" i="0" dirty="0" smtClean="0">
+                <a:solidFill>
+                  <a:srgbClr val="2F3338"/>
+                </a:solidFill>
+                <a:latin typeface="Segoe UI"/>
+              </a:rPr>
+              <a:t>ă</a:t>
+            </a:r>
+            <a:r>
+              <a:rPr lang="ro-RO" sz="2000" dirty="0">
+                <a:solidFill>
+                  <a:srgbClr val="2F3338"/>
+                </a:solidFill>
+                <a:latin typeface="Segoe UI"/>
+              </a:rPr>
+              <a:t>ț</a:t>
+            </a:r>
+            <a:r>
+              <a:rPr sz="2000" b="0" i="0" dirty="0" smtClean="0">
+                <a:solidFill>
+                  <a:srgbClr val="2F3338"/>
+                </a:solidFill>
+                <a:latin typeface="Segoe UI"/>
+              </a:rPr>
+              <a:t>i </a:t>
+            </a:r>
+            <a:r>
+              <a:rPr sz="2000" b="0" i="0" dirty="0" err="1">
                 <a:solidFill>
                   <a:srgbClr val="2F3338"/>
                 </a:solidFill>
@@ -10649,34 +12495,34 @@
               <a:t>formale</a:t>
             </a:r>
             <a:r>
-              <a:rPr sz="1700" b="0" i="0" dirty="0">
-                <a:solidFill>
-                  <a:srgbClr val="2F3338"/>
-                </a:solidFill>
-                <a:latin typeface="Segoe UI"/>
-              </a:rPr>
-              <a:t> </a:t>
-            </a:r>
-            <a:r>
-              <a:rPr sz="1700" b="0" i="0" dirty="0" err="1">
-                <a:solidFill>
-                  <a:srgbClr val="2F3338"/>
-                </a:solidFill>
-                <a:latin typeface="Segoe UI"/>
-              </a:rPr>
-              <a:t>si</a:t>
-            </a:r>
-            <a:r>
-              <a:rPr sz="1700" b="0" i="0" dirty="0">
-                <a:solidFill>
-                  <a:srgbClr val="2F3338"/>
-                </a:solidFill>
-                <a:latin typeface="Segoe UI"/>
-              </a:rPr>
-              <a:t> </a:t>
-            </a:r>
-            <a:r>
-              <a:rPr sz="1700" b="0" i="0" dirty="0" err="1">
+              <a:rPr sz="2000" b="0" i="0" dirty="0">
+                <a:solidFill>
+                  <a:srgbClr val="2F3338"/>
+                </a:solidFill>
+                <a:latin typeface="Segoe UI"/>
+              </a:rPr>
+              <a:t> </a:t>
+            </a:r>
+            <a:r>
+              <a:rPr lang="ro-RO" sz="2000" dirty="0" err="1">
+                <a:solidFill>
+                  <a:srgbClr val="2F3338"/>
+                </a:solidFill>
+                <a:latin typeface="Segoe UI"/>
+              </a:rPr>
+              <a:t>ș</a:t>
+            </a:r>
+            <a:r>
+              <a:rPr sz="2000" b="0" i="0" dirty="0" smtClean="0">
+                <a:solidFill>
+                  <a:srgbClr val="2F3338"/>
+                </a:solidFill>
+                <a:latin typeface="Segoe UI"/>
+              </a:rPr>
+              <a:t>i </a:t>
+            </a:r>
+            <a:r>
+              <a:rPr sz="2000" b="0" i="0" dirty="0" err="1">
                 <a:solidFill>
                   <a:srgbClr val="2F3338"/>
                 </a:solidFill>
@@ -10685,16 +12531,16 @@
               <a:t>rezultatele</a:t>
             </a:r>
             <a:r>
-              <a:rPr sz="1700" b="0" i="0" dirty="0">
-                <a:solidFill>
-                  <a:srgbClr val="2F3338"/>
-                </a:solidFill>
-                <a:latin typeface="Segoe UI"/>
-              </a:rPr>
-              <a:t> </a:t>
-            </a:r>
-            <a:r>
-              <a:rPr sz="1700" b="0" i="0" dirty="0" err="1">
+              <a:rPr sz="2000" b="0" i="0" dirty="0">
+                <a:solidFill>
+                  <a:srgbClr val="2F3338"/>
+                </a:solidFill>
+                <a:latin typeface="Segoe UI"/>
+              </a:rPr>
+              <a:t> </a:t>
+            </a:r>
+            <a:r>
+              <a:rPr sz="2000" b="0" i="0" dirty="0" err="1">
                 <a:solidFill>
                   <a:srgbClr val="2F3338"/>
                 </a:solidFill>
@@ -10702,7 +12548,7 @@
               </a:rPr>
               <a:t>experimentale</a:t>
             </a:r>
-            <a:endParaRPr sz="1700" b="0" i="0" dirty="0">
+            <a:endParaRPr sz="2000" b="0" i="0" dirty="0">
               <a:solidFill>
                 <a:srgbClr val="2F3338"/>
               </a:solidFill>
@@ -10719,7 +12565,7 @@
               </a:spcAft>
             </a:pPr>
             <a:r>
-              <a:rPr sz="1700" b="0" i="0" dirty="0">
+              <a:rPr sz="2000" b="0" i="0" dirty="0">
                 <a:solidFill>
                   <a:srgbClr val="2F3338"/>
                 </a:solidFill>
@@ -10728,7 +12574,7 @@
               <a:t>- </a:t>
             </a:r>
             <a:r>
-              <a:rPr sz="1700" b="0" i="0" dirty="0" err="1">
+              <a:rPr sz="2000" b="0" i="0" dirty="0" err="1">
                 <a:solidFill>
                   <a:srgbClr val="2F3338"/>
                 </a:solidFill>
@@ -10737,7 +12583,7 @@
               <a:t>Avantaje</a:t>
             </a:r>
             <a:r>
-              <a:rPr sz="1700" b="0" i="0" dirty="0">
+              <a:rPr sz="2000" b="0" i="0" dirty="0">
                 <a:solidFill>
                   <a:srgbClr val="2F3338"/>
                 </a:solidFill>
@@ -10746,16 +12592,34 @@
               <a:t>, </a:t>
             </a:r>
             <a:r>
-              <a:rPr sz="1700" b="0" i="0" dirty="0" err="1">
-                <a:solidFill>
-                  <a:srgbClr val="2F3338"/>
-                </a:solidFill>
-                <a:latin typeface="Segoe UI"/>
-              </a:rPr>
-              <a:t>limitari</a:t>
-            </a:r>
-            <a:r>
-              <a:rPr sz="1700" b="0" i="0" dirty="0">
+              <a:rPr sz="2000" b="0" i="0" dirty="0" smtClean="0">
+                <a:solidFill>
+                  <a:srgbClr val="2F3338"/>
+                </a:solidFill>
+                <a:latin typeface="Segoe UI"/>
+              </a:rPr>
+              <a:t>limit</a:t>
+            </a:r>
+            <a:r>
+              <a:rPr lang="ro-RO" sz="2000" b="0" i="0" dirty="0" smtClean="0">
+                <a:solidFill>
+                  <a:srgbClr val="2F3338"/>
+                </a:solidFill>
+                <a:latin typeface="Segoe UI"/>
+              </a:rPr>
+              <a:t>ă</a:t>
+            </a:r>
+            <a:r>
+              <a:rPr sz="2000" b="0" i="0" dirty="0" err="1" smtClean="0">
+                <a:solidFill>
+                  <a:srgbClr val="2F3338"/>
+                </a:solidFill>
+                <a:latin typeface="Segoe UI"/>
+              </a:rPr>
+              <a:t>ri</a:t>
+            </a:r>
+            <a:r>
+              <a:rPr sz="2000" b="0" i="0" dirty="0">
                 <a:solidFill>
                   <a:srgbClr val="2F3338"/>
                 </a:solidFill>
@@ -10764,25 +12628,34 @@
               <a:t>, </a:t>
             </a:r>
             <a:r>
-              <a:rPr sz="1700" b="0" i="0" dirty="0" err="1">
-                <a:solidFill>
-                  <a:srgbClr val="2F3338"/>
-                </a:solidFill>
-                <a:latin typeface="Segoe UI"/>
-              </a:rPr>
-              <a:t>directii</a:t>
-            </a:r>
-            <a:r>
-              <a:rPr sz="1700" b="0" i="0" dirty="0">
-                <a:solidFill>
-                  <a:srgbClr val="2F3338"/>
-                </a:solidFill>
-                <a:latin typeface="Segoe UI"/>
-              </a:rPr>
-              <a:t> </a:t>
-            </a:r>
-            <a:r>
-              <a:rPr sz="1700" b="0" i="0" dirty="0" err="1">
+              <a:rPr sz="2000" b="0" i="0" dirty="0" err="1" smtClean="0">
+                <a:solidFill>
+                  <a:srgbClr val="2F3338"/>
+                </a:solidFill>
+                <a:latin typeface="Segoe UI"/>
+              </a:rPr>
+              <a:t>direc</a:t>
+            </a:r>
+            <a:r>
+              <a:rPr lang="ro-RO" sz="2000" b="0" i="0" dirty="0" smtClean="0">
+                <a:solidFill>
+                  <a:srgbClr val="2F3338"/>
+                </a:solidFill>
+                <a:latin typeface="Segoe UI"/>
+              </a:rPr>
+              <a:t>ț</a:t>
+            </a:r>
+            <a:r>
+              <a:rPr sz="2000" b="0" i="0" dirty="0" smtClean="0">
+                <a:solidFill>
+                  <a:srgbClr val="2F3338"/>
+                </a:solidFill>
+                <a:latin typeface="Segoe UI"/>
+              </a:rPr>
+              <a:t>ii </a:t>
+            </a:r>
+            <a:r>
+              <a:rPr sz="2000" b="0" i="0" dirty="0" err="1">
                 <a:solidFill>
                   <a:srgbClr val="2F3338"/>
                 </a:solidFill>
@@ -10791,34 +12664,34 @@
               <a:t>viitoare</a:t>
             </a:r>
             <a:r>
-              <a:rPr sz="1700" b="0" i="0" dirty="0">
-                <a:solidFill>
-                  <a:srgbClr val="2F3338"/>
-                </a:solidFill>
-                <a:latin typeface="Segoe UI"/>
-              </a:rPr>
-              <a:t> </a:t>
-            </a:r>
-            <a:r>
-              <a:rPr sz="1700" b="0" i="0" dirty="0" err="1">
-                <a:solidFill>
-                  <a:srgbClr val="2F3338"/>
-                </a:solidFill>
-                <a:latin typeface="Segoe UI"/>
-              </a:rPr>
-              <a:t>si</a:t>
-            </a:r>
-            <a:r>
-              <a:rPr sz="1700" b="0" i="0" dirty="0">
-                <a:solidFill>
-                  <a:srgbClr val="2F3338"/>
-                </a:solidFill>
-                <a:latin typeface="Segoe UI"/>
-              </a:rPr>
-              <a:t> </a:t>
-            </a:r>
-            <a:r>
-              <a:rPr sz="1700" b="0" i="0" dirty="0" err="1">
+              <a:rPr sz="2000" b="0" i="0" dirty="0">
+                <a:solidFill>
+                  <a:srgbClr val="2F3338"/>
+                </a:solidFill>
+                <a:latin typeface="Segoe UI"/>
+              </a:rPr>
+              <a:t> </a:t>
+            </a:r>
+            <a:r>
+              <a:rPr lang="ro-RO" sz="2000" dirty="0" err="1">
+                <a:solidFill>
+                  <a:srgbClr val="2F3338"/>
+                </a:solidFill>
+                <a:latin typeface="Segoe UI"/>
+              </a:rPr>
+              <a:t>ș</a:t>
+            </a:r>
+            <a:r>
+              <a:rPr sz="2000" b="0" i="0" dirty="0" smtClean="0">
+                <a:solidFill>
+                  <a:srgbClr val="2F3338"/>
+                </a:solidFill>
+                <a:latin typeface="Segoe UI"/>
+              </a:rPr>
+              <a:t>i </a:t>
+            </a:r>
+            <a:r>
+              <a:rPr sz="2000" b="0" i="0" dirty="0" err="1">
                 <a:solidFill>
                   <a:srgbClr val="2F3338"/>
                 </a:solidFill>
@@ -10826,7 +12699,7 @@
               </a:rPr>
               <a:t>concluzii</a:t>
             </a:r>
-            <a:endParaRPr sz="1700" b="0" i="0" dirty="0">
+            <a:endParaRPr sz="2000" b="0" i="0" dirty="0">
               <a:solidFill>
                 <a:srgbClr val="2F3338"/>
               </a:solidFill>
@@ -10876,13 +12749,49 @@
           <a:lstStyle/>
           <a:p>
             <a:r>
+              <a:rPr lang="ro-RO" sz="3500" dirty="0" smtClean="0">
+                <a:solidFill>
+                  <a:srgbClr val="2F3338"/>
+                </a:solidFill>
+                <a:latin typeface="Bookman Old Style (Headings)"/>
+              </a:rPr>
+              <a:t>De </a:t>
+            </a:r>
+            <a:r>
+              <a:rPr sz="3500" dirty="0" err="1" smtClean="0">
+                <a:solidFill>
+                  <a:srgbClr val="2F3338"/>
+                </a:solidFill>
+                <a:latin typeface="Bookman Old Style (Headings)"/>
+              </a:rPr>
+              <a:t>ce</a:t>
+            </a:r>
+            <a:r>
+              <a:rPr sz="3500" dirty="0" smtClean="0">
+                <a:solidFill>
+                  <a:srgbClr val="2F3338"/>
+                </a:solidFill>
+                <a:latin typeface="Bookman Old Style (Headings)"/>
+              </a:rPr>
+              <a:t> </a:t>
+            </a:r>
+            <a:r>
+              <a:rPr sz="3500" dirty="0" err="1">
+                <a:solidFill>
+                  <a:srgbClr val="2F3338"/>
+                </a:solidFill>
+                <a:latin typeface="Bookman Old Style (Headings)"/>
+              </a:rPr>
+              <a:t>avem</a:t>
+            </a:r>
+            <a:r>
               <a:rPr sz="3500" dirty="0">
                 <a:solidFill>
                   <a:srgbClr val="2F3338"/>
                 </a:solidFill>
                 <a:latin typeface="Bookman Old Style (Headings)"/>
               </a:rPr>
-              <a:t>Context: de </a:t>
+              <a:t> </a:t>
             </a:r>
             <a:r>
               <a:rPr sz="3500" dirty="0" err="1">
@@ -10891,7 +12800,7 @@
                 </a:solidFill>
                 <a:latin typeface="Bookman Old Style (Headings)"/>
               </a:rPr>
-              <a:t>ce</a:t>
+              <a:t>nevoie</a:t>
             </a:r>
             <a:r>
               <a:rPr sz="3500" dirty="0">
@@ -10900,7 +12809,7 @@
                 </a:solidFill>
                 <a:latin typeface="Bookman Old Style (Headings)"/>
               </a:rPr>
-              <a:t> </a:t>
+              <a:t> de </a:t>
             </a:r>
             <a:r>
               <a:rPr sz="3500" dirty="0" err="1">
@@ -10909,7 +12818,7 @@
                 </a:solidFill>
                 <a:latin typeface="Bookman Old Style (Headings)"/>
               </a:rPr>
-              <a:t>avem</a:t>
+              <a:t>metode</a:t>
             </a:r>
             <a:r>
               <a:rPr sz="3500" dirty="0">
@@ -10921,49 +12830,22 @@
               <a:t> </a:t>
             </a:r>
             <a:r>
-              <a:rPr sz="3500" dirty="0" err="1">
+              <a:rPr sz="3500" dirty="0" err="1" smtClean="0">
                 <a:solidFill>
                   <a:srgbClr val="2F3338"/>
                 </a:solidFill>
                 <a:latin typeface="Bookman Old Style (Headings)"/>
               </a:rPr>
-              <a:t>nevoie</a:t>
-            </a:r>
-            <a:r>
-              <a:rPr sz="3500" dirty="0">
+              <a:t>formale</a:t>
+            </a:r>
+            <a:r>
+              <a:rPr lang="ro-RO" sz="3500" dirty="0" smtClean="0">
                 <a:solidFill>
                   <a:srgbClr val="2F3338"/>
                 </a:solidFill>
                 <a:latin typeface="Bookman Old Style (Headings)"/>
               </a:rPr>
-              <a:t> de </a:t>
-            </a:r>
-            <a:r>
-              <a:rPr sz="3500" dirty="0" err="1">
-                <a:solidFill>
-                  <a:srgbClr val="2F3338"/>
-                </a:solidFill>
-                <a:latin typeface="Bookman Old Style (Headings)"/>
-              </a:rPr>
-              <a:t>metode</a:t>
-            </a:r>
-            <a:r>
-              <a:rPr sz="3500" dirty="0">
-                <a:solidFill>
-                  <a:srgbClr val="2F3338"/>
-                </a:solidFill>
-                <a:latin typeface="Bookman Old Style (Headings)"/>
-              </a:rPr>
-              <a:t> </a:t>
-            </a:r>
-            <a:r>
-              <a:rPr sz="3500" dirty="0" err="1">
-                <a:solidFill>
-                  <a:srgbClr val="2F3338"/>
-                </a:solidFill>
-                <a:latin typeface="Bookman Old Style (Headings)"/>
-              </a:rPr>
-              <a:t>formale</a:t>
+              <a:t>?</a:t>
             </a:r>
             <a:endParaRPr sz="3500" dirty="0">
               <a:solidFill>
@@ -11005,13 +12887,40 @@
               </a:spcAft>
             </a:pPr>
             <a:r>
+              <a:rPr lang="ro-RO" sz="1600" dirty="0">
+                <a:solidFill>
+                  <a:srgbClr val="2F3338"/>
+                </a:solidFill>
+                <a:latin typeface="Consolas" panose="020B0609020204030204" pitchFamily="49" charset="0"/>
+              </a:rPr>
+              <a:t>Î</a:t>
+            </a:r>
+            <a:r>
+              <a:rPr sz="1600" b="0" i="0" dirty="0" smtClean="0">
+                <a:solidFill>
+                  <a:srgbClr val="2F3338"/>
+                </a:solidFill>
+                <a:latin typeface="Consolas" panose="020B0609020204030204" pitchFamily="49" charset="0"/>
+              </a:rPr>
+              <a:t>n </a:t>
+            </a:r>
+            <a:r>
+              <a:rPr sz="1600" b="0" i="0" dirty="0" err="1">
+                <a:solidFill>
+                  <a:srgbClr val="2F3338"/>
+                </a:solidFill>
+                <a:latin typeface="Consolas" panose="020B0609020204030204" pitchFamily="49" charset="0"/>
+              </a:rPr>
+              <a:t>proiecte</a:t>
+            </a:r>
+            <a:r>
               <a:rPr sz="1600" b="0" i="0" dirty="0">
                 <a:solidFill>
                   <a:srgbClr val="2F3338"/>
                 </a:solidFill>
                 <a:latin typeface="Consolas" panose="020B0609020204030204" pitchFamily="49" charset="0"/>
               </a:rPr>
-              <a:t>In </a:t>
+              <a:t> </a:t>
             </a:r>
             <a:r>
               <a:rPr sz="1600" b="0" i="0" dirty="0" err="1">
@@ -11020,7 +12929,7 @@
                 </a:solidFill>
                 <a:latin typeface="Consolas" panose="020B0609020204030204" pitchFamily="49" charset="0"/>
               </a:rPr>
-              <a:t>proiecte</a:t>
+              <a:t>reale</a:t>
             </a:r>
             <a:r>
               <a:rPr sz="1600" b="0" i="0" dirty="0">
@@ -11029,7 +12938,7 @@
                 </a:solidFill>
                 <a:latin typeface="Consolas" panose="020B0609020204030204" pitchFamily="49" charset="0"/>
               </a:rPr>
-              <a:t> </a:t>
+              <a:t>, </a:t>
             </a:r>
             <a:r>
               <a:rPr sz="1600" b="0" i="0" dirty="0" err="1">
@@ -11038,7 +12947,7 @@
                 </a:solidFill>
                 <a:latin typeface="Consolas" panose="020B0609020204030204" pitchFamily="49" charset="0"/>
               </a:rPr>
-              <a:t>reale</a:t>
+              <a:t>codul</a:t>
             </a:r>
             <a:r>
               <a:rPr sz="1600" b="0" i="0" dirty="0">
@@ -11047,7 +12956,7 @@
                 </a:solidFill>
                 <a:latin typeface="Consolas" panose="020B0609020204030204" pitchFamily="49" charset="0"/>
               </a:rPr>
-              <a:t>, </a:t>
+              <a:t> </a:t>
             </a:r>
             <a:r>
               <a:rPr sz="1600" b="0" i="0" dirty="0" err="1">
@@ -11056,7 +12965,7 @@
                 </a:solidFill>
                 <a:latin typeface="Consolas" panose="020B0609020204030204" pitchFamily="49" charset="0"/>
               </a:rPr>
-              <a:t>codul</a:t>
+              <a:t>poate</a:t>
             </a:r>
             <a:r>
               <a:rPr sz="1600" b="0" i="0" dirty="0">
@@ -11068,13 +12977,49 @@
               <a:t> </a:t>
             </a:r>
             <a:r>
+              <a:rPr sz="1600" b="0" i="0" dirty="0" smtClean="0">
+                <a:solidFill>
+                  <a:srgbClr val="2F3338"/>
+                </a:solidFill>
+                <a:latin typeface="Consolas" panose="020B0609020204030204" pitchFamily="49" charset="0"/>
+              </a:rPr>
+              <a:t>p</a:t>
+            </a:r>
+            <a:r>
+              <a:rPr lang="ro-RO" sz="1600" b="0" i="0" dirty="0" smtClean="0">
+                <a:solidFill>
+                  <a:srgbClr val="2F3338"/>
+                </a:solidFill>
+                <a:latin typeface="Consolas" panose="020B0609020204030204" pitchFamily="49" charset="0"/>
+              </a:rPr>
+              <a:t>ă</a:t>
+            </a:r>
+            <a:r>
+              <a:rPr sz="1600" b="0" i="0" dirty="0" err="1" smtClean="0">
+                <a:solidFill>
+                  <a:srgbClr val="2F3338"/>
+                </a:solidFill>
+                <a:latin typeface="Consolas" panose="020B0609020204030204" pitchFamily="49" charset="0"/>
+              </a:rPr>
+              <a:t>rea</a:t>
+            </a:r>
+            <a:r>
+              <a:rPr sz="1600" b="0" i="0" dirty="0" smtClean="0">
+                <a:solidFill>
+                  <a:srgbClr val="2F3338"/>
+                </a:solidFill>
+                <a:latin typeface="Consolas" panose="020B0609020204030204" pitchFamily="49" charset="0"/>
+              </a:rPr>
+              <a:t> </a:t>
+            </a:r>
+            <a:r>
               <a:rPr sz="1600" b="0" i="0" dirty="0" err="1">
                 <a:solidFill>
                   <a:srgbClr val="2F3338"/>
                 </a:solidFill>
                 <a:latin typeface="Consolas" panose="020B0609020204030204" pitchFamily="49" charset="0"/>
               </a:rPr>
-              <a:t>poate</a:t>
+              <a:t>corect</a:t>
             </a:r>
             <a:r>
               <a:rPr sz="1600" b="0" i="0" dirty="0">
@@ -11083,7 +13028,7 @@
                 </a:solidFill>
                 <a:latin typeface="Consolas" panose="020B0609020204030204" pitchFamily="49" charset="0"/>
               </a:rPr>
-              <a:t> </a:t>
+              <a:t> pe </a:t>
             </a:r>
             <a:r>
               <a:rPr sz="1600" b="0" i="0" dirty="0" err="1">
@@ -11092,7 +13037,7 @@
                 </a:solidFill>
                 <a:latin typeface="Consolas" panose="020B0609020204030204" pitchFamily="49" charset="0"/>
               </a:rPr>
-              <a:t>parea</a:t>
+              <a:t>exemplele</a:t>
             </a:r>
             <a:r>
               <a:rPr sz="1600" b="0" i="0" dirty="0">
@@ -11110,7 +13055,7 @@
                 </a:solidFill>
                 <a:latin typeface="Consolas" panose="020B0609020204030204" pitchFamily="49" charset="0"/>
               </a:rPr>
-              <a:t>corect</a:t>
+              <a:t>alese</a:t>
             </a:r>
             <a:r>
               <a:rPr sz="1600" b="0" i="0" dirty="0">
@@ -11119,7 +13064,7 @@
                 </a:solidFill>
                 <a:latin typeface="Consolas" panose="020B0609020204030204" pitchFamily="49" charset="0"/>
               </a:rPr>
-              <a:t> pe </a:t>
+              <a:t> manual, </a:t>
             </a:r>
             <a:r>
               <a:rPr sz="1600" b="0" i="0" dirty="0" err="1">
@@ -11128,7 +13073,7 @@
                 </a:solidFill>
                 <a:latin typeface="Consolas" panose="020B0609020204030204" pitchFamily="49" charset="0"/>
               </a:rPr>
-              <a:t>exemplele</a:t>
+              <a:t>dar</a:t>
             </a:r>
             <a:r>
               <a:rPr sz="1600" b="0" i="0" dirty="0">
@@ -11140,13 +13085,76 @@
               <a:t> </a:t>
             </a:r>
             <a:r>
+              <a:rPr sz="1600" b="0" i="0" dirty="0" smtClean="0">
+                <a:solidFill>
+                  <a:srgbClr val="2F3338"/>
+                </a:solidFill>
+                <a:latin typeface="Consolas" panose="020B0609020204030204" pitchFamily="49" charset="0"/>
+              </a:rPr>
+              <a:t>s</a:t>
+            </a:r>
+            <a:r>
+              <a:rPr lang="ro-RO" sz="1600" b="0" i="0" dirty="0" smtClean="0">
+                <a:solidFill>
+                  <a:srgbClr val="2F3338"/>
+                </a:solidFill>
+                <a:latin typeface="Consolas" panose="020B0609020204030204" pitchFamily="49" charset="0"/>
+              </a:rPr>
+              <a:t>ă</a:t>
+            </a:r>
+            <a:r>
+              <a:rPr sz="1600" b="0" i="0" dirty="0" smtClean="0">
+                <a:solidFill>
+                  <a:srgbClr val="2F3338"/>
+                </a:solidFill>
+                <a:latin typeface="Consolas" panose="020B0609020204030204" pitchFamily="49" charset="0"/>
+              </a:rPr>
+              <a:t> e</a:t>
+            </a:r>
+            <a:r>
+              <a:rPr lang="ro-RO" sz="1600" b="0" i="0" dirty="0" smtClean="0">
+                <a:solidFill>
+                  <a:srgbClr val="2F3338"/>
+                </a:solidFill>
+                <a:latin typeface="Consolas" panose="020B0609020204030204" pitchFamily="49" charset="0"/>
+              </a:rPr>
+              <a:t>ș</a:t>
+            </a:r>
+            <a:r>
+              <a:rPr sz="1600" b="0" i="0" dirty="0" err="1" smtClean="0">
+                <a:solidFill>
+                  <a:srgbClr val="2F3338"/>
+                </a:solidFill>
+                <a:latin typeface="Consolas" panose="020B0609020204030204" pitchFamily="49" charset="0"/>
+              </a:rPr>
+              <a:t>ueze</a:t>
+            </a:r>
+            <a:r>
+              <a:rPr sz="1600" b="0" i="0" dirty="0" smtClean="0">
+                <a:solidFill>
+                  <a:srgbClr val="2F3338"/>
+                </a:solidFill>
+                <a:latin typeface="Consolas" panose="020B0609020204030204" pitchFamily="49" charset="0"/>
+              </a:rPr>
+              <a:t> </a:t>
+            </a:r>
+            <a:r>
+              <a:rPr sz="1600" b="0" i="0" dirty="0">
+                <a:solidFill>
+                  <a:srgbClr val="2F3338"/>
+                </a:solidFill>
+                <a:latin typeface="Consolas" panose="020B0609020204030204" pitchFamily="49" charset="0"/>
+              </a:rPr>
+              <a:t>pe </a:t>
+            </a:r>
+            <a:r>
               <a:rPr sz="1600" b="0" i="0" dirty="0" err="1">
                 <a:solidFill>
                   <a:srgbClr val="2F3338"/>
                 </a:solidFill>
                 <a:latin typeface="Consolas" panose="020B0609020204030204" pitchFamily="49" charset="0"/>
               </a:rPr>
-              <a:t>alese</a:t>
+              <a:t>cazuri</a:t>
             </a:r>
             <a:r>
               <a:rPr sz="1600" b="0" i="0" dirty="0">
@@ -11155,98 +13163,41 @@
                 </a:solidFill>
                 <a:latin typeface="Consolas" panose="020B0609020204030204" pitchFamily="49" charset="0"/>
               </a:rPr>
-              <a:t> manual, </a:t>
-            </a:r>
-            <a:r>
-              <a:rPr sz="1600" b="0" i="0" dirty="0" err="1">
+              <a:t> </a:t>
+            </a:r>
+            <a:r>
+              <a:rPr sz="1600" b="0" i="0" dirty="0" smtClean="0">
                 <a:solidFill>
                   <a:srgbClr val="2F3338"/>
                 </a:solidFill>
                 <a:latin typeface="Consolas" panose="020B0609020204030204" pitchFamily="49" charset="0"/>
               </a:rPr>
-              <a:t>dar</a:t>
-            </a:r>
-            <a:r>
-              <a:rPr sz="1600" b="0" i="0" dirty="0">
+              <a:t>limit</a:t>
+            </a:r>
+            <a:r>
+              <a:rPr lang="ro-RO" sz="1600" b="0" i="0" dirty="0" smtClean="0">
                 <a:solidFill>
                   <a:srgbClr val="2F3338"/>
                 </a:solidFill>
                 <a:latin typeface="Consolas" panose="020B0609020204030204" pitchFamily="49" charset="0"/>
               </a:rPr>
-              <a:t> </a:t>
-            </a:r>
-            <a:r>
-              <a:rPr sz="1600" b="0" i="0" dirty="0" err="1">
+              <a:t>ă</a:t>
+            </a:r>
+            <a:r>
+              <a:rPr sz="1600" b="0" i="0" dirty="0" smtClean="0">
                 <a:solidFill>
                   <a:srgbClr val="2F3338"/>
                 </a:solidFill>
                 <a:latin typeface="Consolas" panose="020B0609020204030204" pitchFamily="49" charset="0"/>
               </a:rPr>
-              <a:t>sa</a:t>
-            </a:r>
-            <a:r>
-              <a:rPr sz="1600" b="0" i="0" dirty="0">
-                <a:solidFill>
-                  <a:srgbClr val="2F3338"/>
-                </a:solidFill>
-                <a:latin typeface="Consolas" panose="020B0609020204030204" pitchFamily="49" charset="0"/>
-              </a:rPr>
-              <a:t> </a:t>
-            </a:r>
-            <a:r>
-              <a:rPr sz="1600" b="0" i="0" dirty="0" err="1">
-                <a:solidFill>
-                  <a:srgbClr val="2F3338"/>
-                </a:solidFill>
-                <a:latin typeface="Consolas" panose="020B0609020204030204" pitchFamily="49" charset="0"/>
-              </a:rPr>
-              <a:t>esueze</a:t>
-            </a:r>
-            <a:r>
-              <a:rPr sz="1600" b="0" i="0" dirty="0">
-                <a:solidFill>
-                  <a:srgbClr val="2F3338"/>
-                </a:solidFill>
-                <a:latin typeface="Consolas" panose="020B0609020204030204" pitchFamily="49" charset="0"/>
-              </a:rPr>
-              <a:t> pe </a:t>
-            </a:r>
-            <a:r>
-              <a:rPr sz="1600" b="0" i="0" dirty="0" err="1">
-                <a:solidFill>
-                  <a:srgbClr val="2F3338"/>
-                </a:solidFill>
-                <a:latin typeface="Consolas" panose="020B0609020204030204" pitchFamily="49" charset="0"/>
-              </a:rPr>
-              <a:t>cazuri</a:t>
-            </a:r>
-            <a:r>
-              <a:rPr sz="1600" b="0" i="0" dirty="0">
-                <a:solidFill>
-                  <a:srgbClr val="2F3338"/>
-                </a:solidFill>
-                <a:latin typeface="Consolas" panose="020B0609020204030204" pitchFamily="49" charset="0"/>
-              </a:rPr>
-              <a:t> </a:t>
-            </a:r>
-            <a:r>
-              <a:rPr sz="1600" b="0" i="0" dirty="0" err="1">
-                <a:solidFill>
-                  <a:srgbClr val="2F3338"/>
-                </a:solidFill>
-                <a:latin typeface="Consolas" panose="020B0609020204030204" pitchFamily="49" charset="0"/>
-              </a:rPr>
-              <a:t>limita</a:t>
-            </a:r>
-            <a:r>
-              <a:rPr sz="1600" b="0" i="0" dirty="0">
-                <a:solidFill>
-                  <a:srgbClr val="2F3338"/>
-                </a:solidFill>
-                <a:latin typeface="Consolas" panose="020B0609020204030204" pitchFamily="49" charset="0"/>
-              </a:rPr>
               <a:t>.</a:t>
             </a:r>
+            <a:endParaRPr sz="1600" b="0" i="0" dirty="0">
+              <a:solidFill>
+                <a:srgbClr val="2F3338"/>
+              </a:solidFill>
+              <a:latin typeface="Consolas" panose="020B0609020204030204" pitchFamily="49" charset="0"/>
+            </a:endParaRPr>
           </a:p>
           <a:p>
             <a:pPr algn="l">
@@ -11294,13 +13245,58 @@
               <a:t> ne </a:t>
             </a:r>
             <a:r>
+              <a:rPr sz="1600" b="0" i="0" dirty="0" err="1" smtClean="0">
+                <a:solidFill>
+                  <a:srgbClr val="2F3338"/>
+                </a:solidFill>
+                <a:latin typeface="Consolas" panose="020B0609020204030204" pitchFamily="49" charset="0"/>
+              </a:rPr>
+              <a:t>ajut</a:t>
+            </a:r>
+            <a:r>
+              <a:rPr lang="ro-RO" sz="1600" b="0" i="0" dirty="0" smtClean="0">
+                <a:solidFill>
+                  <a:srgbClr val="2F3338"/>
+                </a:solidFill>
+                <a:latin typeface="Consolas" panose="020B0609020204030204" pitchFamily="49" charset="0"/>
+              </a:rPr>
+              <a:t>ă</a:t>
+            </a:r>
+            <a:r>
+              <a:rPr sz="1600" b="0" i="0" dirty="0" smtClean="0">
+                <a:solidFill>
+                  <a:srgbClr val="2F3338"/>
+                </a:solidFill>
+                <a:latin typeface="Consolas" panose="020B0609020204030204" pitchFamily="49" charset="0"/>
+              </a:rPr>
+              <a:t> s</a:t>
+            </a:r>
+            <a:r>
+              <a:rPr lang="ro-RO" sz="1600" b="0" i="0" dirty="0" smtClean="0">
+                <a:solidFill>
+                  <a:srgbClr val="2F3338"/>
+                </a:solidFill>
+                <a:latin typeface="Consolas" panose="020B0609020204030204" pitchFamily="49" charset="0"/>
+              </a:rPr>
+              <a:t>ă</a:t>
+            </a:r>
+            <a:r>
+              <a:rPr sz="1600" b="0" i="0" dirty="0" smtClean="0">
+                <a:solidFill>
+                  <a:srgbClr val="2F3338"/>
+                </a:solidFill>
+                <a:latin typeface="Consolas" panose="020B0609020204030204" pitchFamily="49" charset="0"/>
+              </a:rPr>
+              <a:t> </a:t>
+            </a:r>
+            <a:r>
               <a:rPr sz="1600" b="0" i="0" dirty="0" err="1">
                 <a:solidFill>
                   <a:srgbClr val="2F3338"/>
                 </a:solidFill>
                 <a:latin typeface="Consolas" panose="020B0609020204030204" pitchFamily="49" charset="0"/>
               </a:rPr>
-              <a:t>ajuta</a:t>
+              <a:t>definim</a:t>
             </a:r>
             <a:r>
               <a:rPr sz="1600" b="0" i="0" dirty="0">
@@ -11318,7 +13314,7 @@
                 </a:solidFill>
                 <a:latin typeface="Consolas" panose="020B0609020204030204" pitchFamily="49" charset="0"/>
               </a:rPr>
-              <a:t>sa</a:t>
+              <a:t>clar</a:t>
             </a:r>
             <a:r>
               <a:rPr sz="1600" b="0" i="0" dirty="0">
@@ -11336,7 +13332,7 @@
                 </a:solidFill>
                 <a:latin typeface="Consolas" panose="020B0609020204030204" pitchFamily="49" charset="0"/>
               </a:rPr>
-              <a:t>definim</a:t>
+              <a:t>ce</a:t>
             </a:r>
             <a:r>
               <a:rPr sz="1600" b="0" i="0" dirty="0">
@@ -11348,52 +13344,34 @@
               <a:t> </a:t>
             </a:r>
             <a:r>
-              <a:rPr sz="1600" b="0" i="0" dirty="0" err="1">
+              <a:rPr lang="ro-RO" sz="1600" dirty="0">
                 <a:solidFill>
                   <a:srgbClr val="2F3338"/>
                 </a:solidFill>
                 <a:latin typeface="Consolas" panose="020B0609020204030204" pitchFamily="49" charset="0"/>
               </a:rPr>
-              <a:t>clar</a:t>
-            </a:r>
-            <a:r>
-              <a:rPr sz="1600" b="0" i="0" dirty="0">
+              <a:t>î</a:t>
+            </a:r>
+            <a:r>
+              <a:rPr sz="1600" b="0" i="0" dirty="0" err="1" smtClean="0">
                 <a:solidFill>
                   <a:srgbClr val="2F3338"/>
                 </a:solidFill>
                 <a:latin typeface="Consolas" panose="020B0609020204030204" pitchFamily="49" charset="0"/>
               </a:rPr>
-              <a:t> </a:t>
-            </a:r>
-            <a:r>
-              <a:rPr sz="1600" b="0" i="0" dirty="0" err="1">
+              <a:t>nseamn</a:t>
+            </a:r>
+            <a:r>
+              <a:rPr lang="ro-RO" sz="1600" b="0" i="0" dirty="0" smtClean="0">
                 <a:solidFill>
                   <a:srgbClr val="2F3338"/>
                 </a:solidFill>
                 <a:latin typeface="Consolas" panose="020B0609020204030204" pitchFamily="49" charset="0"/>
               </a:rPr>
-              <a:t>ce</a:t>
-            </a:r>
-            <a:r>
-              <a:rPr sz="1600" b="0" i="0" dirty="0">
-                <a:solidFill>
-                  <a:srgbClr val="2F3338"/>
-                </a:solidFill>
-                <a:latin typeface="Consolas" panose="020B0609020204030204" pitchFamily="49" charset="0"/>
-              </a:rPr>
-              <a:t> </a:t>
-            </a:r>
-            <a:r>
-              <a:rPr sz="1600" b="0" i="0" dirty="0" err="1">
-                <a:solidFill>
-                  <a:srgbClr val="2F3338"/>
-                </a:solidFill>
-                <a:latin typeface="Consolas" panose="020B0609020204030204" pitchFamily="49" charset="0"/>
-              </a:rPr>
-              <a:t>inseamna</a:t>
-            </a:r>
-            <a:r>
-              <a:rPr sz="1600" b="0" i="0" dirty="0">
+              <a:t>ă</a:t>
+            </a:r>
+            <a:r>
+              <a:rPr sz="1600" b="0" i="0" dirty="0" smtClean="0">
                 <a:solidFill>
                   <a:srgbClr val="2F3338"/>
                 </a:solidFill>
@@ -11530,13 +13508,67 @@
               <a:t>- </a:t>
             </a:r>
             <a:r>
+              <a:rPr lang="ro-RO" dirty="0" err="1">
+                <a:solidFill>
+                  <a:srgbClr val="2F3338"/>
+                </a:solidFill>
+                <a:latin typeface="Segoe UI"/>
+              </a:rPr>
+              <a:t>C</a:t>
+            </a:r>
+            <a:r>
+              <a:rPr b="0" i="0" dirty="0" smtClean="0">
+                <a:solidFill>
+                  <a:srgbClr val="2F3338"/>
+                </a:solidFill>
+                <a:latin typeface="Segoe UI"/>
+              </a:rPr>
+              <a:t>e </a:t>
+            </a:r>
+            <a:r>
+              <a:rPr b="0" i="0" dirty="0" err="1" smtClean="0">
+                <a:solidFill>
+                  <a:srgbClr val="2F3338"/>
+                </a:solidFill>
+                <a:latin typeface="Segoe UI"/>
+              </a:rPr>
+              <a:t>propriet</a:t>
+            </a:r>
+            <a:r>
+              <a:rPr lang="ro-RO" b="0" i="0" dirty="0" smtClean="0">
+                <a:solidFill>
+                  <a:srgbClr val="2F3338"/>
+                </a:solidFill>
+                <a:latin typeface="Segoe UI"/>
+              </a:rPr>
+              <a:t>ă</a:t>
+            </a:r>
+            <a:r>
+              <a:rPr lang="ro-RO" dirty="0">
+                <a:solidFill>
+                  <a:srgbClr val="2F3338"/>
+                </a:solidFill>
+                <a:latin typeface="Segoe UI"/>
+              </a:rPr>
+              <a:t>ț</a:t>
+            </a:r>
+            <a:r>
+              <a:rPr b="0" i="0" dirty="0" smtClean="0">
+                <a:solidFill>
+                  <a:srgbClr val="2F3338"/>
+                </a:solidFill>
+                <a:latin typeface="Segoe UI"/>
+              </a:rPr>
+              <a:t>i </a:t>
+            </a:r>
+            <a:r>
               <a:rPr b="0" i="0" dirty="0" err="1">
                 <a:solidFill>
                   <a:srgbClr val="2F3338"/>
                 </a:solidFill>
                 <a:latin typeface="Segoe UI"/>
               </a:rPr>
-              <a:t>ce</a:t>
+              <a:t>trebuie</a:t>
             </a:r>
             <a:r>
               <a:rPr b="0" i="0" dirty="0">
@@ -11548,70 +13580,88 @@
               <a:t> </a:t>
             </a:r>
             <a:r>
-              <a:rPr b="0" i="0" dirty="0" err="1">
-                <a:solidFill>
-                  <a:srgbClr val="2F3338"/>
-                </a:solidFill>
-                <a:latin typeface="Segoe UI"/>
-              </a:rPr>
-              <a:t>proprietati</a:t>
-            </a:r>
-            <a:r>
-              <a:rPr b="0" i="0" dirty="0">
-                <a:solidFill>
-                  <a:srgbClr val="2F3338"/>
-                </a:solidFill>
-                <a:latin typeface="Segoe UI"/>
-              </a:rPr>
-              <a:t> </a:t>
-            </a:r>
-            <a:r>
-              <a:rPr b="0" i="0" dirty="0" err="1">
-                <a:solidFill>
-                  <a:srgbClr val="2F3338"/>
-                </a:solidFill>
-                <a:latin typeface="Segoe UI"/>
-              </a:rPr>
-              <a:t>trebuie</a:t>
-            </a:r>
-            <a:r>
-              <a:rPr b="0" i="0" dirty="0">
-                <a:solidFill>
-                  <a:srgbClr val="2F3338"/>
-                </a:solidFill>
-                <a:latin typeface="Segoe UI"/>
-              </a:rPr>
-              <a:t> </a:t>
-            </a:r>
-            <a:r>
-              <a:rPr b="0" i="0" dirty="0" err="1">
-                <a:solidFill>
-                  <a:srgbClr val="2F3338"/>
-                </a:solidFill>
-                <a:latin typeface="Segoe UI"/>
-              </a:rPr>
-              <a:t>sa</a:t>
-            </a:r>
-            <a:r>
-              <a:rPr b="0" i="0" dirty="0">
-                <a:solidFill>
-                  <a:srgbClr val="2F3338"/>
-                </a:solidFill>
-                <a:latin typeface="Segoe UI"/>
-              </a:rPr>
-              <a:t> </a:t>
-            </a:r>
-            <a:r>
-              <a:rPr b="0" i="0" dirty="0" err="1">
-                <a:solidFill>
-                  <a:srgbClr val="2F3338"/>
-                </a:solidFill>
-                <a:latin typeface="Segoe UI"/>
-              </a:rPr>
-              <a:t>ramana</a:t>
-            </a:r>
-            <a:r>
-              <a:rPr b="0" i="0" dirty="0">
+              <a:rPr b="0" i="0" dirty="0" smtClean="0">
+                <a:solidFill>
+                  <a:srgbClr val="2F3338"/>
+                </a:solidFill>
+                <a:latin typeface="Segoe UI"/>
+              </a:rPr>
+              <a:t>s</a:t>
+            </a:r>
+            <a:r>
+              <a:rPr lang="ro-RO" b="0" i="0" dirty="0" smtClean="0">
+                <a:solidFill>
+                  <a:srgbClr val="2F3338"/>
+                </a:solidFill>
+                <a:latin typeface="Segoe UI"/>
+              </a:rPr>
+              <a:t>ă</a:t>
+            </a:r>
+            <a:r>
+              <a:rPr b="0" i="0" dirty="0" smtClean="0">
+                <a:solidFill>
+                  <a:srgbClr val="2F3338"/>
+                </a:solidFill>
+                <a:latin typeface="Segoe UI"/>
+              </a:rPr>
+              <a:t> </a:t>
+            </a:r>
+            <a:r>
+              <a:rPr lang="ro-RO" dirty="0" smtClean="0">
+                <a:solidFill>
+                  <a:srgbClr val="2F3338"/>
+                </a:solidFill>
+                <a:latin typeface="Segoe UI"/>
+              </a:rPr>
+              <a:t>r</a:t>
+            </a:r>
+            <a:r>
+              <a:rPr lang="ro-RO" dirty="0">
+                <a:solidFill>
+                  <a:srgbClr val="2F3338"/>
+                </a:solidFill>
+                <a:latin typeface="Segoe UI"/>
+              </a:rPr>
+              <a:t>ă</a:t>
+            </a:r>
+            <a:r>
+              <a:rPr b="0" i="0" dirty="0" smtClean="0">
+                <a:solidFill>
+                  <a:srgbClr val="2F3338"/>
+                </a:solidFill>
+                <a:latin typeface="Segoe UI"/>
+              </a:rPr>
+              <a:t>m</a:t>
+            </a:r>
+            <a:r>
+              <a:rPr lang="ro-RO" b="0" i="0" dirty="0" smtClean="0">
+                <a:solidFill>
+                  <a:srgbClr val="2F3338"/>
+                </a:solidFill>
+                <a:latin typeface="Segoe UI"/>
+              </a:rPr>
+              <a:t>â</a:t>
+            </a:r>
+            <a:r>
+              <a:rPr b="0" i="0" dirty="0" smtClean="0">
+                <a:solidFill>
+                  <a:srgbClr val="2F3338"/>
+                </a:solidFill>
+                <a:latin typeface="Segoe UI"/>
+              </a:rPr>
+              <a:t>n</a:t>
+            </a:r>
+            <a:r>
+              <a:rPr lang="ro-RO" b="0" i="0" dirty="0" smtClean="0">
+                <a:solidFill>
+                  <a:srgbClr val="2F3338"/>
+                </a:solidFill>
+                <a:latin typeface="Segoe UI"/>
+              </a:rPr>
+              <a:t>ă</a:t>
+            </a:r>
+            <a:r>
+              <a:rPr b="0" i="0" dirty="0" smtClean="0">
                 <a:solidFill>
                   <a:srgbClr val="2F3338"/>
                 </a:solidFill>
@@ -11708,13 +13758,58 @@
               <a:t>- </a:t>
             </a:r>
             <a:r>
+              <a:rPr lang="ro-RO" dirty="0" err="1">
+                <a:solidFill>
+                  <a:srgbClr val="2F3338"/>
+                </a:solidFill>
+                <a:latin typeface="Segoe UI"/>
+              </a:rPr>
+              <a:t>C</a:t>
+            </a:r>
+            <a:r>
+              <a:rPr b="0" i="0" dirty="0" smtClean="0">
+                <a:solidFill>
+                  <a:srgbClr val="2F3338"/>
+                </a:solidFill>
+                <a:latin typeface="Segoe UI"/>
+              </a:rPr>
+              <a:t>e </a:t>
+            </a:r>
+            <a:r>
+              <a:rPr b="0" i="0" dirty="0" err="1" smtClean="0">
+                <a:solidFill>
+                  <a:srgbClr val="2F3338"/>
+                </a:solidFill>
+                <a:latin typeface="Segoe UI"/>
+              </a:rPr>
+              <a:t>invarian</a:t>
+            </a:r>
+            <a:r>
+              <a:rPr lang="ro-RO" b="0" i="0" dirty="0" smtClean="0">
+                <a:solidFill>
+                  <a:srgbClr val="2F3338"/>
+                </a:solidFill>
+                <a:latin typeface="Segoe UI"/>
+              </a:rPr>
+              <a:t>ț</a:t>
+            </a:r>
+            <a:r>
+              <a:rPr b="0" i="0" dirty="0" smtClean="0">
+                <a:solidFill>
+                  <a:srgbClr val="2F3338"/>
+                </a:solidFill>
+                <a:latin typeface="Segoe UI"/>
+              </a:rPr>
+              <a:t>i </a:t>
+            </a:r>
+            <a:r>
               <a:rPr b="0" i="0" dirty="0" err="1">
                 <a:solidFill>
                   <a:srgbClr val="2F3338"/>
                 </a:solidFill>
                 <a:latin typeface="Segoe UI"/>
               </a:rPr>
-              <a:t>ce</a:t>
+              <a:t>semantici</a:t>
             </a:r>
             <a:r>
               <a:rPr b="0" i="0" dirty="0">
@@ -11732,7 +13827,7 @@
                 </a:solidFill>
                 <a:latin typeface="Segoe UI"/>
               </a:rPr>
-              <a:t>invarianti</a:t>
+              <a:t>trebuie</a:t>
             </a:r>
             <a:r>
               <a:rPr b="0" i="0" dirty="0">
@@ -11744,13 +13839,94 @@
               <a:t> </a:t>
             </a:r>
             <a:r>
-              <a:rPr b="0" i="0" dirty="0" err="1">
-                <a:solidFill>
-                  <a:srgbClr val="2F3338"/>
-                </a:solidFill>
-                <a:latin typeface="Segoe UI"/>
-              </a:rPr>
-              <a:t>semantici</a:t>
+              <a:rPr b="0" i="0" dirty="0" smtClean="0">
+                <a:solidFill>
+                  <a:srgbClr val="2F3338"/>
+                </a:solidFill>
+                <a:latin typeface="Segoe UI"/>
+              </a:rPr>
+              <a:t>p</a:t>
+            </a:r>
+            <a:r>
+              <a:rPr lang="ro-RO" b="0" i="0" dirty="0" smtClean="0">
+                <a:solidFill>
+                  <a:srgbClr val="2F3338"/>
+                </a:solidFill>
+                <a:latin typeface="Segoe UI"/>
+              </a:rPr>
+              <a:t>ăs</a:t>
+            </a:r>
+            <a:r>
+              <a:rPr b="0" i="0" dirty="0" err="1" smtClean="0">
+                <a:solidFill>
+                  <a:srgbClr val="2F3338"/>
+                </a:solidFill>
+                <a:latin typeface="Segoe UI"/>
+              </a:rPr>
+              <a:t>tra</a:t>
+            </a:r>
+            <a:r>
+              <a:rPr lang="ro-RO" b="0" i="0" dirty="0" smtClean="0">
+                <a:solidFill>
+                  <a:srgbClr val="2F3338"/>
+                </a:solidFill>
+                <a:latin typeface="Segoe UI"/>
+              </a:rPr>
+              <a:t>ț</a:t>
+            </a:r>
+            <a:r>
+              <a:rPr b="0" i="0" dirty="0" smtClean="0">
+                <a:solidFill>
+                  <a:srgbClr val="2F3338"/>
+                </a:solidFill>
+                <a:latin typeface="Segoe UI"/>
+              </a:rPr>
+              <a:t>i dup</a:t>
+            </a:r>
+            <a:r>
+              <a:rPr lang="ro-RO" b="0" i="0" dirty="0" smtClean="0">
+                <a:solidFill>
+                  <a:srgbClr val="2F3338"/>
+                </a:solidFill>
+                <a:latin typeface="Segoe UI"/>
+              </a:rPr>
+              <a:t>ă</a:t>
+            </a:r>
+            <a:r>
+              <a:rPr b="0" i="0" dirty="0" smtClean="0">
+                <a:solidFill>
+                  <a:srgbClr val="2F3338"/>
+                </a:solidFill>
+                <a:latin typeface="Segoe UI"/>
+              </a:rPr>
+              <a:t> transform</a:t>
+            </a:r>
+            <a:r>
+              <a:rPr lang="ro-RO" b="0" i="0" dirty="0" smtClean="0">
+                <a:solidFill>
+                  <a:srgbClr val="2F3338"/>
+                </a:solidFill>
+                <a:latin typeface="Segoe UI"/>
+              </a:rPr>
+              <a:t>ă</a:t>
+            </a:r>
+            <a:r>
+              <a:rPr b="0" i="0" dirty="0" err="1" smtClean="0">
+                <a:solidFill>
+                  <a:srgbClr val="2F3338"/>
+                </a:solidFill>
+                <a:latin typeface="Segoe UI"/>
+              </a:rPr>
+              <a:t>ri</a:t>
+            </a:r>
+            <a:r>
+              <a:rPr b="0" i="0" dirty="0" smtClean="0">
+                <a:solidFill>
+                  <a:srgbClr val="2F3338"/>
+                </a:solidFill>
+                <a:latin typeface="Segoe UI"/>
+              </a:rPr>
+              <a:t> </a:t>
             </a:r>
             <a:r>
               <a:rPr b="0" i="0" dirty="0">
@@ -11759,79 +13935,7 @@
                 </a:solidFill>
                 <a:latin typeface="Segoe UI"/>
               </a:rPr>
-              <a:t> </a:t>
-            </a:r>
-            <a:r>
-              <a:rPr b="0" i="0" dirty="0" err="1">
-                <a:solidFill>
-                  <a:srgbClr val="2F3338"/>
-                </a:solidFill>
-                <a:latin typeface="Segoe UI"/>
-              </a:rPr>
-              <a:t>trebuie</a:t>
-            </a:r>
-            <a:r>
-              <a:rPr b="0" i="0" dirty="0">
-                <a:solidFill>
-                  <a:srgbClr val="2F3338"/>
-                </a:solidFill>
-                <a:latin typeface="Segoe UI"/>
-              </a:rPr>
-              <a:t> </a:t>
-            </a:r>
-            <a:r>
-              <a:rPr b="0" i="0" dirty="0" err="1">
-                <a:solidFill>
-                  <a:srgbClr val="2F3338"/>
-                </a:solidFill>
-                <a:latin typeface="Segoe UI"/>
-              </a:rPr>
-              <a:t>pastrati</a:t>
-            </a:r>
-            <a:r>
-              <a:rPr b="0" i="0" dirty="0">
-                <a:solidFill>
-                  <a:srgbClr val="2F3338"/>
-                </a:solidFill>
-                <a:latin typeface="Segoe UI"/>
-              </a:rPr>
-              <a:t> </a:t>
-            </a:r>
-            <a:r>
-              <a:rPr b="0" i="0" dirty="0" err="1">
-                <a:solidFill>
-                  <a:srgbClr val="2F3338"/>
-                </a:solidFill>
-                <a:latin typeface="Segoe UI"/>
-              </a:rPr>
-              <a:t>dupa</a:t>
-            </a:r>
-            <a:r>
-              <a:rPr b="0" i="0" dirty="0">
-                <a:solidFill>
-                  <a:srgbClr val="2F3338"/>
-                </a:solidFill>
-                <a:latin typeface="Segoe UI"/>
-              </a:rPr>
-              <a:t> </a:t>
-            </a:r>
-            <a:r>
-              <a:rPr b="0" i="0" dirty="0" err="1">
-                <a:solidFill>
-                  <a:srgbClr val="2F3338"/>
-                </a:solidFill>
-                <a:latin typeface="Segoe UI"/>
-              </a:rPr>
-              <a:t>transformari</a:t>
-            </a:r>
-            <a:r>
-              <a:rPr b="0" i="0" dirty="0">
-                <a:solidFill>
-                  <a:srgbClr val="2F3338"/>
-                </a:solidFill>
-                <a:latin typeface="Segoe UI"/>
-              </a:rPr>
-              <a:t> (ex: </a:t>
+              <a:t>(ex: </a:t>
             </a:r>
             <a:r>
               <a:rPr b="0" i="0" dirty="0" err="1">
@@ -11871,13 +13975,58 @@
               <a:t>- </a:t>
             </a:r>
             <a:r>
+              <a:rPr lang="ro-RO" dirty="0" err="1">
+                <a:solidFill>
+                  <a:srgbClr val="2F3338"/>
+                </a:solidFill>
+                <a:latin typeface="Segoe UI"/>
+              </a:rPr>
+              <a:t>C</a:t>
+            </a:r>
+            <a:r>
+              <a:rPr b="0" i="0" dirty="0" smtClean="0">
+                <a:solidFill>
+                  <a:srgbClr val="2F3338"/>
+                </a:solidFill>
+                <a:latin typeface="Segoe UI"/>
+              </a:rPr>
+              <a:t>e </a:t>
+            </a:r>
+            <a:r>
+              <a:rPr b="0" i="0" dirty="0" err="1" smtClean="0">
+                <a:solidFill>
+                  <a:srgbClr val="2F3338"/>
+                </a:solidFill>
+                <a:latin typeface="Segoe UI"/>
+              </a:rPr>
+              <a:t>garan</a:t>
+            </a:r>
+            <a:r>
+              <a:rPr lang="ro-RO" b="0" i="0" dirty="0" smtClean="0">
+                <a:solidFill>
+                  <a:srgbClr val="2F3338"/>
+                </a:solidFill>
+                <a:latin typeface="Segoe UI"/>
+              </a:rPr>
+              <a:t>ț</a:t>
+            </a:r>
+            <a:r>
+              <a:rPr b="0" i="0" dirty="0" smtClean="0">
+                <a:solidFill>
+                  <a:srgbClr val="2F3338"/>
+                </a:solidFill>
+                <a:latin typeface="Segoe UI"/>
+              </a:rPr>
+              <a:t>ii </a:t>
+            </a:r>
+            <a:r>
               <a:rPr b="0" i="0" dirty="0" err="1">
                 <a:solidFill>
                   <a:srgbClr val="2F3338"/>
                 </a:solidFill>
                 <a:latin typeface="Segoe UI"/>
               </a:rPr>
-              <a:t>ce</a:t>
+              <a:t>vrem</a:t>
             </a:r>
             <a:r>
               <a:rPr b="0" i="0" dirty="0">
@@ -11895,7 +14044,7 @@
                 </a:solidFill>
                 <a:latin typeface="Segoe UI"/>
               </a:rPr>
-              <a:t>garantii</a:t>
+              <a:t>pentru</a:t>
             </a:r>
             <a:r>
               <a:rPr b="0" i="0" dirty="0">
@@ -11904,88 +14053,79 @@
                 </a:solidFill>
                 <a:latin typeface="Segoe UI"/>
               </a:rPr>
-              <a:t> </a:t>
-            </a:r>
-            <a:r>
-              <a:rPr b="0" i="0" dirty="0" err="1">
-                <a:solidFill>
-                  <a:srgbClr val="2F3338"/>
-                </a:solidFill>
-                <a:latin typeface="Segoe UI"/>
-              </a:rPr>
-              <a:t>vrem</a:t>
-            </a:r>
-            <a:r>
-              <a:rPr b="0" i="0" dirty="0">
-                <a:solidFill>
-                  <a:srgbClr val="2F3338"/>
-                </a:solidFill>
-                <a:latin typeface="Segoe UI"/>
-              </a:rPr>
-              <a:t> </a:t>
-            </a:r>
-            <a:r>
-              <a:rPr b="0" i="0" dirty="0" err="1">
-                <a:solidFill>
-                  <a:srgbClr val="2F3338"/>
-                </a:solidFill>
-                <a:latin typeface="Segoe UI"/>
-              </a:rPr>
-              <a:t>pentru</a:t>
-            </a:r>
-            <a:r>
-              <a:rPr b="0" i="0" dirty="0">
-                <a:solidFill>
-                  <a:srgbClr val="2F3338"/>
-                </a:solidFill>
-                <a:latin typeface="Segoe UI"/>
-              </a:rPr>
               <a:t> parser, evaluator </a:t>
             </a:r>
             <a:r>
-              <a:rPr b="0" i="0" dirty="0" err="1">
-                <a:solidFill>
-                  <a:srgbClr val="2F3338"/>
-                </a:solidFill>
-                <a:latin typeface="Segoe UI"/>
-              </a:rPr>
-              <a:t>si</a:t>
-            </a:r>
-            <a:r>
-              <a:rPr b="0" i="0" dirty="0">
-                <a:solidFill>
-                  <a:srgbClr val="2F3338"/>
-                </a:solidFill>
-                <a:latin typeface="Segoe UI"/>
-              </a:rPr>
-              <a:t> </a:t>
-            </a:r>
-            <a:r>
-              <a:rPr b="0" i="0" dirty="0" err="1">
-                <a:solidFill>
-                  <a:srgbClr val="2F3338"/>
-                </a:solidFill>
-                <a:latin typeface="Segoe UI"/>
-              </a:rPr>
-              <a:t>proprietatile</a:t>
-            </a:r>
-            <a:r>
-              <a:rPr b="0" i="0" dirty="0">
-                <a:solidFill>
-                  <a:srgbClr val="2F3338"/>
-                </a:solidFill>
-                <a:latin typeface="Segoe UI"/>
-              </a:rPr>
-              <a:t> </a:t>
-            </a:r>
-            <a:r>
-              <a:rPr b="0" i="0" dirty="0" err="1">
-                <a:solidFill>
-                  <a:srgbClr val="2F3338"/>
-                </a:solidFill>
-                <a:latin typeface="Segoe UI"/>
-              </a:rPr>
-              <a:t>algebraice</a:t>
+              <a:rPr lang="ro-RO" dirty="0" err="1">
+                <a:solidFill>
+                  <a:srgbClr val="2F3338"/>
+                </a:solidFill>
+                <a:latin typeface="Segoe UI"/>
+              </a:rPr>
+              <a:t>ș</a:t>
+            </a:r>
+            <a:r>
+              <a:rPr b="0" i="0" dirty="0" smtClean="0">
+                <a:solidFill>
+                  <a:srgbClr val="2F3338"/>
+                </a:solidFill>
+                <a:latin typeface="Segoe UI"/>
+              </a:rPr>
+              <a:t>i </a:t>
+            </a:r>
+            <a:r>
+              <a:rPr b="0" i="0" dirty="0" err="1" smtClean="0">
+                <a:solidFill>
+                  <a:srgbClr val="2F3338"/>
+                </a:solidFill>
+                <a:latin typeface="Segoe UI"/>
+              </a:rPr>
+              <a:t>propriet</a:t>
+            </a:r>
+            <a:r>
+              <a:rPr lang="ro-RO" b="0" i="0" dirty="0" smtClean="0">
+                <a:solidFill>
+                  <a:srgbClr val="2F3338"/>
+                </a:solidFill>
+                <a:latin typeface="Segoe UI"/>
+              </a:rPr>
+              <a:t>ă</a:t>
+            </a:r>
+            <a:r>
+              <a:rPr lang="ro-RO" dirty="0">
+                <a:solidFill>
+                  <a:srgbClr val="2F3338"/>
+                </a:solidFill>
+                <a:latin typeface="Segoe UI"/>
+              </a:rPr>
+              <a:t>ț</a:t>
+            </a:r>
+            <a:r>
+              <a:rPr b="0" i="0" dirty="0" err="1" smtClean="0">
+                <a:solidFill>
+                  <a:srgbClr val="2F3338"/>
+                </a:solidFill>
+                <a:latin typeface="Segoe UI"/>
+              </a:rPr>
+              <a:t>ile</a:t>
+            </a:r>
+            <a:r>
+              <a:rPr b="0" i="0" dirty="0" smtClean="0">
+                <a:solidFill>
+                  <a:srgbClr val="2F3338"/>
+                </a:solidFill>
+                <a:latin typeface="Segoe UI"/>
+              </a:rPr>
+              <a:t> </a:t>
+            </a:r>
+            <a:r>
+              <a:rPr b="0" i="0" dirty="0" err="1" smtClean="0">
+                <a:solidFill>
+                  <a:srgbClr val="2F3338"/>
+                </a:solidFill>
+                <a:latin typeface="Segoe UI"/>
+              </a:rPr>
+              <a:t>algebrice</a:t>
             </a:r>
             <a:endParaRPr b="0" i="0" dirty="0">
               <a:solidFill>
@@ -12010,7 +14150,43 @@
                 </a:solidFill>
                 <a:latin typeface="Segoe UI"/>
               </a:rPr>
-              <a:t>- cum </a:t>
+              <a:t>- </a:t>
+            </a:r>
+            <a:r>
+              <a:rPr lang="ro-RO" b="0" i="0" dirty="0" smtClean="0">
+                <a:solidFill>
+                  <a:srgbClr val="2F3338"/>
+                </a:solidFill>
+                <a:latin typeface="Segoe UI"/>
+              </a:rPr>
+              <a:t>C</a:t>
+            </a:r>
+            <a:r>
+              <a:rPr b="0" i="0" dirty="0" smtClean="0">
+                <a:solidFill>
+                  <a:srgbClr val="2F3338"/>
+                </a:solidFill>
+                <a:latin typeface="Segoe UI"/>
+              </a:rPr>
+              <a:t>um valid</a:t>
+            </a:r>
+            <a:r>
+              <a:rPr lang="ro-RO" b="0" i="0" dirty="0" smtClean="0">
+                <a:solidFill>
+                  <a:srgbClr val="2F3338"/>
+                </a:solidFill>
+                <a:latin typeface="Segoe UI"/>
+              </a:rPr>
+              <a:t>ă</a:t>
+            </a:r>
+            <a:r>
+              <a:rPr b="0" i="0" dirty="0" smtClean="0">
+                <a:solidFill>
+                  <a:srgbClr val="2F3338"/>
+                </a:solidFill>
+                <a:latin typeface="Segoe UI"/>
+              </a:rPr>
+              <a:t>m </a:t>
             </a:r>
             <a:r>
               <a:rPr b="0" i="0" dirty="0" err="1">
@@ -12019,7 +14195,7 @@
                 </a:solidFill>
                 <a:latin typeface="Segoe UI"/>
               </a:rPr>
-              <a:t>validam</a:t>
+              <a:t>sistematic</a:t>
             </a:r>
             <a:r>
               <a:rPr b="0" i="0" dirty="0">
@@ -12037,7 +14213,7 @@
                 </a:solidFill>
                 <a:latin typeface="Segoe UI"/>
               </a:rPr>
-              <a:t>sistematic</a:t>
+              <a:t>corectitudinea</a:t>
             </a:r>
             <a:r>
               <a:rPr b="0" i="0" dirty="0">
@@ -12046,16 +14222,34 @@
                 </a:solidFill>
                 <a:latin typeface="Segoe UI"/>
               </a:rPr>
-              <a:t> </a:t>
-            </a:r>
-            <a:r>
-              <a:rPr b="0" i="0" dirty="0" err="1">
-                <a:solidFill>
-                  <a:srgbClr val="2F3338"/>
-                </a:solidFill>
-                <a:latin typeface="Segoe UI"/>
-              </a:rPr>
-              <a:t>corectitudinea</a:t>
+              <a:t> pe o </a:t>
+            </a:r>
+            <a:r>
+              <a:rPr b="0" i="0" dirty="0" err="1" smtClean="0">
+                <a:solidFill>
+                  <a:srgbClr val="2F3338"/>
+                </a:solidFill>
+                <a:latin typeface="Segoe UI"/>
+              </a:rPr>
+              <a:t>clas</a:t>
+            </a:r>
+            <a:r>
+              <a:rPr lang="ro-RO" b="0" i="0" dirty="0" smtClean="0">
+                <a:solidFill>
+                  <a:srgbClr val="2F3338"/>
+                </a:solidFill>
+                <a:latin typeface="Segoe UI"/>
+              </a:rPr>
+              <a:t>ă</a:t>
+            </a:r>
+            <a:r>
+              <a:rPr b="0" i="0" dirty="0" smtClean="0">
+                <a:solidFill>
+                  <a:srgbClr val="2F3338"/>
+                </a:solidFill>
+                <a:latin typeface="Segoe UI"/>
+              </a:rPr>
+              <a:t> </a:t>
             </a:r>
             <a:r>
               <a:rPr b="0" i="0" dirty="0">
@@ -12064,25 +14258,7 @@
                 </a:solidFill>
                 <a:latin typeface="Segoe UI"/>
               </a:rPr>
-              <a:t> pe o </a:t>
-            </a:r>
-            <a:r>
-              <a:rPr b="0" i="0" dirty="0" err="1">
-                <a:solidFill>
-                  <a:srgbClr val="2F3338"/>
-                </a:solidFill>
-                <a:latin typeface="Segoe UI"/>
-              </a:rPr>
-              <a:t>clasa</a:t>
-            </a:r>
-            <a:r>
-              <a:rPr b="0" i="0" dirty="0">
-                <a:solidFill>
-                  <a:srgbClr val="2F3338"/>
-                </a:solidFill>
-                <a:latin typeface="Segoe UI"/>
-              </a:rPr>
-              <a:t> mare de </a:t>
+              <a:t>mare de </a:t>
             </a:r>
             <a:r>
               <a:rPr b="0" i="0" dirty="0" err="1">
@@ -12205,12 +14381,28 @@
               <a:t> </a:t>
             </a:r>
             <a:r>
-              <a:rPr sz="3400" dirty="0" err="1">
+              <a:rPr sz="3400" dirty="0" err="1" smtClean="0">
                 <a:solidFill>
                   <a:schemeClr val="tx1"/>
                 </a:solidFill>
               </a:rPr>
-              <a:t>clasica</a:t>
+              <a:t>clasic</a:t>
+            </a:r>
+            <a:r>
+              <a:rPr lang="ro-RO" sz="3400" dirty="0" smtClean="0">
+                <a:solidFill>
+                  <a:schemeClr val="tx1"/>
+                </a:solidFill>
+              </a:rPr>
+              <a:t>ă</a:t>
+            </a:r>
+            <a:r>
+              <a:rPr sz="3400" dirty="0" smtClean="0">
+                <a:solidFill>
+                  <a:schemeClr val="tx1"/>
+                </a:solidFill>
+              </a:rPr>
+              <a:t> </a:t>
             </a:r>
             <a:r>
               <a:rPr sz="3400" dirty="0">
@@ -12218,7 +14410,7 @@
                   <a:schemeClr val="tx1"/>
                 </a:solidFill>
               </a:rPr>
-              <a:t> vs. property-based testing</a:t>
+              <a:t>vs. property-based testing</a:t>
             </a:r>
           </a:p>
         </p:txBody>
@@ -12265,13 +14457,22 @@
               <a:t> </a:t>
             </a:r>
             <a:r>
-              <a:rPr lang="en-US" sz="2400" b="1" dirty="0" err="1">
+              <a:rPr lang="en-US" sz="2400" b="1" dirty="0" err="1" smtClean="0">
                 <a:solidFill>
                   <a:srgbClr val="1F4E79"/>
                 </a:solidFill>
                 <a:latin typeface="Segoe UI"/>
               </a:rPr>
-              <a:t>clasica</a:t>
+              <a:t>clasic</a:t>
+            </a:r>
+            <a:r>
+              <a:rPr lang="ro-RO" sz="2400" b="1" dirty="0" smtClean="0">
+                <a:solidFill>
+                  <a:srgbClr val="1F4E79"/>
+                </a:solidFill>
+                <a:latin typeface="Segoe UI"/>
+              </a:rPr>
+              <a:t>ă</a:t>
             </a:r>
             <a:endParaRPr lang="en-US" sz="2400" b="1" dirty="0">
               <a:solidFill>
@@ -12437,11 +14638,23 @@
             </a:endParaRPr>
           </a:p>
           <a:p>
+            <a:r>
+              <a:rPr lang="en-US" sz="1600" dirty="0">
+                <a:latin typeface="Consolas"/>
+              </a:rPr>
+              <a:t/>
+            </a:r>
             <a:br>
               <a:rPr lang="en-US" sz="1600" dirty="0">
                 <a:latin typeface="Consolas"/>
               </a:rPr>
             </a:br>
+            <a:r>
+              <a:rPr lang="en-US" sz="1600" dirty="0">
+                <a:latin typeface="Consolas"/>
+              </a:rPr>
+              <a:t/>
+            </a:r>
             <a:br>
               <a:rPr lang="en-US" sz="1600" dirty="0">
                 <a:latin typeface="Consolas"/>
@@ -12496,25 +14709,31 @@
               <a:t> </a:t>
             </a:r>
             <a:r>
-              <a:rPr sz="1600" dirty="0" err="1">
-                <a:latin typeface="Consolas"/>
-              </a:rPr>
-              <a:t>si</a:t>
-            </a:r>
-            <a:r>
-              <a:rPr sz="1600" dirty="0">
-                <a:latin typeface="Consolas"/>
-              </a:rPr>
-              <a:t> </a:t>
-            </a:r>
-            <a:r>
-              <a:rPr sz="1600" dirty="0" err="1">
-                <a:latin typeface="Consolas"/>
-              </a:rPr>
-              <a:t>cauta</a:t>
-            </a:r>
-            <a:r>
-              <a:rPr sz="1600" dirty="0">
+              <a:rPr lang="ro-RO" sz="1600" dirty="0" err="1">
+                <a:latin typeface="Consolas"/>
+              </a:rPr>
+              <a:t>ș</a:t>
+            </a:r>
+            <a:r>
+              <a:rPr sz="1600" dirty="0" smtClean="0">
+                <a:latin typeface="Consolas"/>
+              </a:rPr>
+              <a:t>i </a:t>
+            </a:r>
+            <a:r>
+              <a:rPr sz="1600" dirty="0" err="1" smtClean="0">
+                <a:latin typeface="Consolas"/>
+              </a:rPr>
+              <a:t>caut</a:t>
+            </a:r>
+            <a:r>
+              <a:rPr lang="ro-RO" sz="1600" dirty="0" smtClean="0">
+                <a:latin typeface="Consolas"/>
+              </a:rPr>
+              <a:t>ă</a:t>
+            </a:r>
+            <a:r>
+              <a:rPr sz="1600" dirty="0" smtClean="0">
                 <a:latin typeface="Consolas"/>
               </a:rPr>
               <a:t> </a:t>
@@ -12695,6 +14914,15 @@
               </a:rPr>
               <a:t>eval env (Mul (Const 5) (Const 0)) == Just 0</a:t>
             </a:r>
+            <a:r>
+              <a:rPr lang="en-US" sz="1600" dirty="0">
+                <a:solidFill>
+                  <a:srgbClr val="D4D4D4"/>
+                </a:solidFill>
+                <a:latin typeface="Consolas"/>
+              </a:rPr>
+              <a:t/>
+            </a:r>
             <a:br>
               <a:rPr lang="en-US" sz="1600" dirty="0">
                 <a:solidFill>
@@ -12703,6 +14931,15 @@
                 <a:latin typeface="Consolas"/>
               </a:rPr>
             </a:br>
+            <a:r>
+              <a:rPr lang="en-US" sz="1600" dirty="0">
+                <a:solidFill>
+                  <a:srgbClr val="D4D4D4"/>
+                </a:solidFill>
+                <a:latin typeface="Consolas"/>
+              </a:rPr>
+              <a:t/>
+            </a:r>
             <a:br>
               <a:rPr lang="en-US" sz="1600" dirty="0">
                 <a:solidFill>
@@ -12711,6 +14948,15 @@
                 <a:latin typeface="Consolas"/>
               </a:rPr>
             </a:br>
+            <a:r>
+              <a:rPr lang="en-US" sz="1600" dirty="0">
+                <a:solidFill>
+                  <a:srgbClr val="D4D4D4"/>
+                </a:solidFill>
+                <a:latin typeface="Consolas"/>
+              </a:rPr>
+              <a:t/>
+            </a:r>
             <a:br>
               <a:rPr lang="en-US" sz="1600" dirty="0">
                 <a:solidFill>
@@ -12719,6 +14965,15 @@
                 <a:latin typeface="Consolas"/>
               </a:rPr>
             </a:br>
+            <a:r>
+              <a:rPr lang="en-US" sz="1600" dirty="0">
+                <a:solidFill>
+                  <a:srgbClr val="D4D4D4"/>
+                </a:solidFill>
+                <a:latin typeface="Consolas"/>
+              </a:rPr>
+              <a:t/>
+            </a:r>
             <a:br>
               <a:rPr lang="en-US" sz="1600" dirty="0">
                 <a:solidFill>
@@ -12745,10 +15000,28 @@
               <a:t>: </a:t>
             </a:r>
             <a:r>
+              <a:rPr sz="1600" dirty="0" err="1" smtClean="0">
+                <a:latin typeface="Consolas"/>
+              </a:rPr>
+              <a:t>acoper</a:t>
+            </a:r>
+            <a:r>
+              <a:rPr lang="ro-RO" sz="1600" dirty="0" smtClean="0">
+                <a:latin typeface="Consolas"/>
+              </a:rPr>
+              <a:t>ă</a:t>
+            </a:r>
+            <a:r>
+              <a:rPr sz="1600" dirty="0" smtClean="0">
+                <a:latin typeface="Consolas"/>
+              </a:rPr>
+              <a:t> </a:t>
+            </a:r>
+            <a:r>
               <a:rPr sz="1600" dirty="0" err="1">
                 <a:latin typeface="Consolas"/>
               </a:rPr>
-              <a:t>acopera</a:t>
+              <a:t>doar</a:t>
             </a:r>
             <a:r>
               <a:rPr sz="1600" dirty="0">
@@ -12760,43 +15033,43 @@
               <a:rPr sz="1600" dirty="0" err="1">
                 <a:latin typeface="Consolas"/>
               </a:rPr>
-              <a:t>doar</a:t>
+              <a:t>cazurile</a:t>
             </a:r>
             <a:r>
               <a:rPr sz="1600" dirty="0">
                 <a:latin typeface="Consolas"/>
               </a:rPr>
-              <a:t> </a:t>
+              <a:t> la care </a:t>
             </a:r>
             <a:r>
               <a:rPr sz="1600" dirty="0" err="1">
                 <a:latin typeface="Consolas"/>
               </a:rPr>
-              <a:t>cazurile</a:t>
+              <a:t>te-ai</a:t>
             </a:r>
             <a:r>
               <a:rPr sz="1600" dirty="0">
                 <a:latin typeface="Consolas"/>
               </a:rPr>
-              <a:t> la care </a:t>
-            </a:r>
-            <a:r>
-              <a:rPr sz="1600" dirty="0" err="1">
-                <a:latin typeface="Consolas"/>
-              </a:rPr>
-              <a:t>te</a:t>
-            </a:r>
-            <a:r>
-              <a:rPr sz="1600" dirty="0">
-                <a:latin typeface="Consolas"/>
-              </a:rPr>
-              <a:t>-ai </a:t>
-            </a:r>
-            <a:r>
-              <a:rPr sz="1600" dirty="0" err="1">
-                <a:latin typeface="Consolas"/>
-              </a:rPr>
-              <a:t>gandit</a:t>
+              <a:t> </a:t>
+            </a:r>
+            <a:r>
+              <a:rPr sz="1600" dirty="0" smtClean="0">
+                <a:latin typeface="Consolas"/>
+              </a:rPr>
+              <a:t>g</a:t>
+            </a:r>
+            <a:r>
+              <a:rPr lang="ro-RO" sz="1600" dirty="0" smtClean="0">
+                <a:latin typeface="Consolas"/>
+              </a:rPr>
+              <a:t>â</a:t>
+            </a:r>
+            <a:r>
+              <a:rPr sz="1600" dirty="0" err="1" smtClean="0">
+                <a:latin typeface="Consolas"/>
+              </a:rPr>
+              <a:t>ndit</a:t>
             </a:r>
             <a:r>
               <a:rPr sz="1600" dirty="0">
@@ -12984,6 +15257,15 @@
               </a:rPr>
               <a:t> property-based testing</a:t>
             </a:r>
+            <a:r>
+              <a:rPr lang="en-US" sz="2400" dirty="0">
+                <a:solidFill>
+                  <a:srgbClr val="2F3338"/>
+                </a:solidFill>
+                <a:latin typeface="Segoe UI"/>
+              </a:rPr>
+              <a:t/>
+            </a:r>
             <a:br>
               <a:rPr lang="en-US" sz="2400" dirty="0">
                 <a:solidFill>
@@ -12992,6 +15274,15 @@
                 <a:latin typeface="Segoe UI"/>
               </a:rPr>
             </a:br>
+            <a:r>
+              <a:rPr lang="en-US" sz="2400" b="1" dirty="0">
+                <a:solidFill>
+                  <a:srgbClr val="4B5563"/>
+                </a:solidFill>
+                <a:latin typeface="Segoe UI"/>
+              </a:rPr>
+              <a:t/>
+            </a:r>
             <a:br>
               <a:rPr lang="en-US" sz="2400" b="1" dirty="0">
                 <a:solidFill>
@@ -13034,7 +15325,25 @@
                 </a:solidFill>
                 <a:latin typeface="Segoe UI"/>
               </a:rPr>
-              <a:t> in </a:t>
+              <a:t> </a:t>
+            </a:r>
+            <a:r>
+              <a:rPr lang="ro-RO" sz="2400" b="1" dirty="0" smtClean="0">
+                <a:solidFill>
+                  <a:srgbClr val="4B5563"/>
+                </a:solidFill>
+                <a:latin typeface="Segoe UI"/>
+              </a:rPr>
+              <a:t>î</a:t>
+            </a:r>
+            <a:r>
+              <a:rPr lang="en-US" sz="2400" b="1" dirty="0" smtClean="0">
+                <a:solidFill>
+                  <a:srgbClr val="4B5563"/>
+                </a:solidFill>
+                <a:latin typeface="Segoe UI"/>
+              </a:rPr>
+              <a:t>n </a:t>
             </a:r>
             <a:r>
               <a:rPr lang="en-US" sz="2400" b="1" dirty="0" err="1">
@@ -13064,6 +15373,15 @@
                 <a:spcPts val="0"/>
               </a:spcAft>
             </a:pPr>
+            <a:r>
+              <a:rPr lang="en-US" sz="2400" dirty="0">
+                <a:solidFill>
+                  <a:srgbClr val="2F3338"/>
+                </a:solidFill>
+                <a:latin typeface="Segoe UI"/>
+              </a:rPr>
+              <a:t/>
+            </a:r>
             <a:br>
               <a:rPr lang="en-US" sz="2400" dirty="0">
                 <a:solidFill>
@@ -13330,16 +15648,25 @@
               <a:t> </a:t>
             </a:r>
             <a:r>
-              <a:rPr lang="en-US" sz="2000" dirty="0" err="1">
-                <a:solidFill>
-                  <a:srgbClr val="2F3338"/>
-                </a:solidFill>
-                <a:latin typeface="Segoe UI"/>
-              </a:rPr>
-              <a:t>intre</a:t>
-            </a:r>
-            <a:r>
-              <a:rPr lang="en-US" sz="2000" dirty="0">
+              <a:rPr lang="ro-RO" sz="2000" dirty="0" err="1">
+                <a:solidFill>
+                  <a:srgbClr val="2F3338"/>
+                </a:solidFill>
+                <a:latin typeface="Segoe UI"/>
+              </a:rPr>
+              <a:t>î</a:t>
+            </a:r>
+            <a:r>
+              <a:rPr lang="en-US" sz="2000" dirty="0" err="1" smtClean="0">
+                <a:solidFill>
+                  <a:srgbClr val="2F3338"/>
+                </a:solidFill>
+                <a:latin typeface="Segoe UI"/>
+              </a:rPr>
+              <a:t>ntre</a:t>
+            </a:r>
+            <a:r>
+              <a:rPr lang="en-US" sz="2000" dirty="0" smtClean="0">
                 <a:solidFill>
                   <a:srgbClr val="2F3338"/>
                 </a:solidFill>
@@ -13436,16 +15763,25 @@
               <a:t> - </a:t>
             </a:r>
             <a:r>
-              <a:rPr lang="en-US" sz="2000" dirty="0" err="1">
-                <a:solidFill>
-                  <a:srgbClr val="2F3338"/>
-                </a:solidFill>
-                <a:latin typeface="Segoe UI"/>
-              </a:rPr>
-              <a:t>controleaza</a:t>
-            </a:r>
-            <a:r>
-              <a:rPr lang="en-US" sz="2000" dirty="0">
+              <a:rPr lang="en-US" sz="2000" dirty="0" err="1" smtClean="0">
+                <a:solidFill>
+                  <a:srgbClr val="2F3338"/>
+                </a:solidFill>
+                <a:latin typeface="Segoe UI"/>
+              </a:rPr>
+              <a:t>controleaz</a:t>
+            </a:r>
+            <a:r>
+              <a:rPr lang="ro-RO" sz="2000" dirty="0" smtClean="0">
+                <a:solidFill>
+                  <a:srgbClr val="2F3338"/>
+                </a:solidFill>
+                <a:latin typeface="Segoe UI"/>
+              </a:rPr>
+              <a:t>ă</a:t>
+            </a:r>
+            <a:r>
+              <a:rPr lang="en-US" sz="2000" dirty="0" smtClean="0">
                 <a:solidFill>
                   <a:srgbClr val="2F3338"/>
                 </a:solidFill>
@@ -13542,8 +15878,32 @@
                 </a:solidFill>
                 <a:latin typeface="Segoe UI"/>
               </a:rPr>
-              <a:t> la forma minima</a:t>
-            </a:r>
+              <a:t> la forma </a:t>
+            </a:r>
+            <a:r>
+              <a:rPr lang="en-US" sz="2000" dirty="0" smtClean="0">
+                <a:solidFill>
+                  <a:srgbClr val="2F3338"/>
+                </a:solidFill>
+                <a:latin typeface="Segoe UI"/>
+              </a:rPr>
+              <a:t>minim</a:t>
+            </a:r>
+            <a:r>
+              <a:rPr lang="ro-RO" sz="2000" dirty="0" smtClean="0">
+                <a:solidFill>
+                  <a:srgbClr val="2F3338"/>
+                </a:solidFill>
+                <a:latin typeface="Segoe UI"/>
+              </a:rPr>
+              <a:t>ă</a:t>
+            </a:r>
+            <a:endParaRPr lang="en-US" sz="2000" dirty="0">
+              <a:solidFill>
+                <a:srgbClr val="2F3338"/>
+              </a:solidFill>
+              <a:latin typeface="Segoe UI"/>
+            </a:endParaRPr>
           </a:p>
           <a:p>
             <a:pPr>
@@ -13582,34 +15942,61 @@
               <a:t> - </a:t>
             </a:r>
             <a:r>
-              <a:rPr lang="en-US" sz="2000" dirty="0" err="1">
-                <a:solidFill>
-                  <a:srgbClr val="2F3338"/>
-                </a:solidFill>
-                <a:latin typeface="Segoe UI"/>
-              </a:rPr>
-              <a:t>arata</a:t>
-            </a:r>
-            <a:r>
-              <a:rPr lang="en-US" sz="2000" dirty="0">
-                <a:solidFill>
-                  <a:srgbClr val="2F3338"/>
-                </a:solidFill>
-                <a:latin typeface="Segoe UI"/>
-              </a:rPr>
-              <a:t> </a:t>
-            </a:r>
-            <a:r>
-              <a:rPr lang="en-US" sz="2000" dirty="0" err="1">
-                <a:solidFill>
-                  <a:srgbClr val="2F3338"/>
-                </a:solidFill>
-                <a:latin typeface="Segoe UI"/>
-              </a:rPr>
-              <a:t>distributia</a:t>
-            </a:r>
-            <a:r>
-              <a:rPr lang="en-US" sz="2000" dirty="0">
+              <a:rPr lang="en-US" sz="2000" dirty="0" err="1" smtClean="0">
+                <a:solidFill>
+                  <a:srgbClr val="2F3338"/>
+                </a:solidFill>
+                <a:latin typeface="Segoe UI"/>
+              </a:rPr>
+              <a:t>arat</a:t>
+            </a:r>
+            <a:r>
+              <a:rPr lang="ro-RO" sz="2000" dirty="0" smtClean="0">
+                <a:solidFill>
+                  <a:srgbClr val="2F3338"/>
+                </a:solidFill>
+                <a:latin typeface="Segoe UI"/>
+              </a:rPr>
+              <a:t>ă</a:t>
+            </a:r>
+            <a:r>
+              <a:rPr lang="en-US" sz="2000" dirty="0" smtClean="0">
+                <a:solidFill>
+                  <a:srgbClr val="2F3338"/>
+                </a:solidFill>
+                <a:latin typeface="Segoe UI"/>
+              </a:rPr>
+              <a:t> </a:t>
+            </a:r>
+            <a:r>
+              <a:rPr lang="en-US" sz="2000" dirty="0" err="1" smtClean="0">
+                <a:solidFill>
+                  <a:srgbClr val="2F3338"/>
+                </a:solidFill>
+                <a:latin typeface="Segoe UI"/>
+              </a:rPr>
+              <a:t>distribu</a:t>
+            </a:r>
+            <a:r>
+              <a:rPr lang="ro-RO" sz="2000" dirty="0" smtClean="0">
+                <a:solidFill>
+                  <a:srgbClr val="2F3338"/>
+                </a:solidFill>
+                <a:latin typeface="Segoe UI"/>
+              </a:rPr>
+              <a:t>ț</a:t>
+            </a:r>
+            <a:r>
+              <a:rPr lang="en-US" sz="2000" dirty="0" err="1" smtClean="0">
+                <a:solidFill>
+                  <a:srgbClr val="2F3338"/>
+                </a:solidFill>
+                <a:latin typeface="Segoe UI"/>
+              </a:rPr>
+              <a:t>ia</a:t>
+            </a:r>
+            <a:r>
+              <a:rPr lang="en-US" sz="2000" dirty="0" smtClean="0">
                 <a:solidFill>
                   <a:srgbClr val="2F3338"/>
                 </a:solidFill>
@@ -13673,13 +16060,31 @@
               <a:t> - </a:t>
             </a:r>
             <a:r>
-              <a:rPr lang="en-US" sz="2000" dirty="0" err="1">
-                <a:solidFill>
-                  <a:srgbClr val="2F3338"/>
-                </a:solidFill>
-                <a:latin typeface="Segoe UI"/>
-              </a:rPr>
-              <a:t>ruleaza</a:t>
+              <a:rPr lang="en-US" sz="2000" dirty="0" err="1" smtClean="0">
+                <a:solidFill>
+                  <a:srgbClr val="2F3338"/>
+                </a:solidFill>
+                <a:latin typeface="Segoe UI"/>
+              </a:rPr>
+              <a:t>ruleaz</a:t>
+            </a:r>
+            <a:r>
+              <a:rPr lang="ro-RO" sz="2000" dirty="0" smtClean="0">
+                <a:solidFill>
+                  <a:srgbClr val="2F3338"/>
+                </a:solidFill>
+                <a:latin typeface="Segoe UI"/>
+              </a:rPr>
+              <a:t>ă</a:t>
+            </a:r>
+            <a:r>
+              <a:rPr lang="en-US" sz="2000" dirty="0" smtClean="0">
+                <a:solidFill>
+                  <a:srgbClr val="2F3338"/>
+                </a:solidFill>
+                <a:latin typeface="Segoe UI"/>
+              </a:rPr>
+              <a:t> </a:t>
             </a:r>
             <a:r>
               <a:rPr lang="en-US" sz="2000" dirty="0">
@@ -13688,7 +16093,7 @@
                 </a:solidFill>
                 <a:latin typeface="Segoe UI"/>
               </a:rPr>
-              <a:t> cu </a:t>
+              <a:t>cu </a:t>
             </a:r>
             <a:r>
               <a:rPr lang="en-US" sz="2000" dirty="0" err="1">
@@ -14066,13 +16471,31 @@
               <a:t> </a:t>
             </a:r>
             <a:r>
-              <a:rPr sz="1600" b="0" i="0" dirty="0" err="1">
-                <a:solidFill>
-                  <a:srgbClr val="2F3338"/>
-                </a:solidFill>
-                <a:latin typeface="Segoe UI"/>
-              </a:rPr>
-              <a:t>sigura</a:t>
+              <a:rPr sz="1600" b="0" i="0" dirty="0" err="1" smtClean="0">
+                <a:solidFill>
+                  <a:srgbClr val="2F3338"/>
+                </a:solidFill>
+                <a:latin typeface="Segoe UI"/>
+              </a:rPr>
+              <a:t>sigur</a:t>
+            </a:r>
+            <a:r>
+              <a:rPr lang="ro-RO" sz="1600" b="0" i="0" dirty="0" smtClean="0">
+                <a:solidFill>
+                  <a:srgbClr val="2F3338"/>
+                </a:solidFill>
+                <a:latin typeface="Segoe UI"/>
+              </a:rPr>
+              <a:t>ă</a:t>
+            </a:r>
+            <a:r>
+              <a:rPr sz="1600" b="0" i="0" dirty="0" smtClean="0">
+                <a:solidFill>
+                  <a:srgbClr val="2F3338"/>
+                </a:solidFill>
+                <a:latin typeface="Segoe UI"/>
+              </a:rPr>
+              <a:t>: </a:t>
             </a:r>
             <a:r>
               <a:rPr sz="1600" b="0" i="0" dirty="0">
@@ -14081,7 +16504,7 @@
                 </a:solidFill>
                 <a:latin typeface="Segoe UI"/>
               </a:rPr>
-              <a:t>: eval :: Env -&gt; Expr -&gt; Maybe Int</a:t>
+              <a:t>eval :: Env -&gt; Expr -&gt; Maybe Int</a:t>
             </a:r>
           </a:p>
           <a:p>
@@ -14157,13 +16580,49 @@
               <a:t> </a:t>
             </a:r>
             <a:r>
-              <a:rPr sz="1600" b="0" i="0" dirty="0" err="1">
-                <a:solidFill>
-                  <a:srgbClr val="2F3338"/>
-                </a:solidFill>
-                <a:latin typeface="Segoe UI"/>
-              </a:rPr>
-              <a:t>pana</a:t>
+              <a:rPr sz="1600" b="0" i="0" dirty="0" smtClean="0">
+                <a:solidFill>
+                  <a:srgbClr val="2F3338"/>
+                </a:solidFill>
+                <a:latin typeface="Segoe UI"/>
+              </a:rPr>
+              <a:t>p</a:t>
+            </a:r>
+            <a:r>
+              <a:rPr lang="ro-RO" sz="1600" b="0" i="0" dirty="0" smtClean="0">
+                <a:solidFill>
+                  <a:srgbClr val="2F3338"/>
+                </a:solidFill>
+                <a:latin typeface="Segoe UI"/>
+              </a:rPr>
+              <a:t>â</a:t>
+            </a:r>
+            <a:r>
+              <a:rPr sz="1600" b="0" i="0" dirty="0" smtClean="0">
+                <a:solidFill>
+                  <a:srgbClr val="2F3338"/>
+                </a:solidFill>
+                <a:latin typeface="Segoe UI"/>
+              </a:rPr>
+              <a:t>n</a:t>
+            </a:r>
+            <a:r>
+              <a:rPr lang="ro-RO" sz="1600" dirty="0">
+                <a:solidFill>
+                  <a:srgbClr val="2F3338"/>
+                </a:solidFill>
+                <a:latin typeface="Segoe UI"/>
+              </a:rPr>
+              <a:t>ă</a:t>
+            </a:r>
+            <a:r>
+              <a:rPr sz="1600" b="0" i="0" dirty="0" smtClean="0">
+                <a:solidFill>
+                  <a:srgbClr val="2F3338"/>
+                </a:solidFill>
+                <a:latin typeface="Segoe UI"/>
+              </a:rPr>
+              <a:t> </a:t>
             </a:r>
             <a:r>
               <a:rPr sz="1600" b="0" i="0" dirty="0">
@@ -14172,7 +16631,7 @@
                 </a:solidFill>
                 <a:latin typeface="Segoe UI"/>
               </a:rPr>
-              <a:t> la </a:t>
+              <a:t>la </a:t>
             </a:r>
             <a:r>
               <a:rPr sz="1600" b="0" i="0" dirty="0" err="1">
@@ -14248,31 +16707,49 @@
               <a:t> text cu </a:t>
             </a:r>
             <a:r>
-              <a:rPr sz="1600" b="0" i="0" dirty="0" err="1">
-                <a:solidFill>
-                  <a:srgbClr val="2F3338"/>
-                </a:solidFill>
-                <a:latin typeface="Segoe UI"/>
-              </a:rPr>
-              <a:t>precedenta</a:t>
-            </a:r>
-            <a:r>
-              <a:rPr sz="1600" b="0" i="0" dirty="0">
-                <a:solidFill>
-                  <a:srgbClr val="2F3338"/>
-                </a:solidFill>
-                <a:latin typeface="Segoe UI"/>
-              </a:rPr>
-              <a:t> </a:t>
-            </a:r>
-            <a:r>
-              <a:rPr sz="1600" b="0" i="0" dirty="0" err="1">
-                <a:solidFill>
-                  <a:srgbClr val="2F3338"/>
-                </a:solidFill>
-                <a:latin typeface="Segoe UI"/>
-              </a:rPr>
-              <a:t>corecta</a:t>
+              <a:rPr sz="1600" b="0" i="0" dirty="0" err="1" smtClean="0">
+                <a:solidFill>
+                  <a:srgbClr val="2F3338"/>
+                </a:solidFill>
+                <a:latin typeface="Segoe UI"/>
+              </a:rPr>
+              <a:t>preceden</a:t>
+            </a:r>
+            <a:r>
+              <a:rPr lang="ro-RO" sz="1600" b="0" i="0" dirty="0" smtClean="0">
+                <a:solidFill>
+                  <a:srgbClr val="2F3338"/>
+                </a:solidFill>
+                <a:latin typeface="Segoe UI"/>
+              </a:rPr>
+              <a:t>ță</a:t>
+            </a:r>
+            <a:r>
+              <a:rPr sz="1600" b="0" i="0" dirty="0" smtClean="0">
+                <a:solidFill>
+                  <a:srgbClr val="2F3338"/>
+                </a:solidFill>
+                <a:latin typeface="Segoe UI"/>
+              </a:rPr>
+              <a:t> </a:t>
+            </a:r>
+            <a:r>
+              <a:rPr sz="1600" b="0" i="0" dirty="0" err="1" smtClean="0">
+                <a:solidFill>
+                  <a:srgbClr val="2F3338"/>
+                </a:solidFill>
+                <a:latin typeface="Segoe UI"/>
+              </a:rPr>
+              <a:t>corect</a:t>
+            </a:r>
+            <a:r>
+              <a:rPr lang="ro-RO" sz="1600" b="0" i="0" dirty="0" smtClean="0">
+                <a:solidFill>
+                  <a:srgbClr val="2F3338"/>
+                </a:solidFill>
+                <a:latin typeface="Segoe UI"/>
+              </a:rPr>
+              <a:t>ă</a:t>
             </a:r>
             <a:endParaRPr sz="1600" b="0" i="0" dirty="0">
               <a:solidFill>
@@ -14336,34 +16813,70 @@
               <a:t> text -&gt; Expr (</a:t>
             </a:r>
             <a:r>
-              <a:rPr sz="1600" b="0" i="0" dirty="0" err="1">
-                <a:solidFill>
-                  <a:srgbClr val="2F3338"/>
-                </a:solidFill>
-                <a:latin typeface="Segoe UI"/>
-              </a:rPr>
-              <a:t>respecta</a:t>
-            </a:r>
-            <a:r>
-              <a:rPr sz="1600" b="0" i="0" dirty="0">
-                <a:solidFill>
-                  <a:srgbClr val="2F3338"/>
-                </a:solidFill>
-                <a:latin typeface="Segoe UI"/>
-              </a:rPr>
-              <a:t> </a:t>
-            </a:r>
-            <a:r>
-              <a:rPr sz="1600" b="0" i="0" dirty="0" err="1">
-                <a:solidFill>
-                  <a:srgbClr val="2F3338"/>
-                </a:solidFill>
-                <a:latin typeface="Segoe UI"/>
-              </a:rPr>
-              <a:t>prioritatile</a:t>
-            </a:r>
-            <a:r>
-              <a:rPr sz="1600" b="0" i="0" dirty="0">
+              <a:rPr sz="1600" b="0" i="0" dirty="0" smtClean="0">
+                <a:solidFill>
+                  <a:srgbClr val="2F3338"/>
+                </a:solidFill>
+                <a:latin typeface="Segoe UI"/>
+              </a:rPr>
+              <a:t>respect</a:t>
+            </a:r>
+            <a:r>
+              <a:rPr lang="ro-RO" sz="1600" b="0" i="0" dirty="0" smtClean="0">
+                <a:solidFill>
+                  <a:srgbClr val="2F3338"/>
+                </a:solidFill>
+                <a:latin typeface="Segoe UI"/>
+              </a:rPr>
+              <a:t>ă</a:t>
+            </a:r>
+            <a:r>
+              <a:rPr sz="1600" b="0" i="0" dirty="0" smtClean="0">
+                <a:solidFill>
+                  <a:srgbClr val="2F3338"/>
+                </a:solidFill>
+                <a:latin typeface="Segoe UI"/>
+              </a:rPr>
+              <a:t> </a:t>
+            </a:r>
+            <a:r>
+              <a:rPr sz="1600" b="0" i="0" dirty="0" err="1" smtClean="0">
+                <a:solidFill>
+                  <a:srgbClr val="2F3338"/>
+                </a:solidFill>
+                <a:latin typeface="Segoe UI"/>
+              </a:rPr>
+              <a:t>priorit</a:t>
+            </a:r>
+            <a:r>
+              <a:rPr lang="ro-RO" sz="1600" b="0" i="0" dirty="0" smtClean="0">
+                <a:solidFill>
+                  <a:srgbClr val="2F3338"/>
+                </a:solidFill>
+                <a:latin typeface="Segoe UI"/>
+              </a:rPr>
+              <a:t>ă</a:t>
+            </a:r>
+            <a:r>
+              <a:rPr lang="ro-RO" sz="1600" dirty="0">
+                <a:solidFill>
+                  <a:srgbClr val="2F3338"/>
+                </a:solidFill>
+                <a:latin typeface="Segoe UI"/>
+              </a:rPr>
+              <a:t>ț</a:t>
+            </a:r>
+            <a:r>
+              <a:rPr sz="1600" b="0" i="0" dirty="0" err="1" smtClean="0">
+                <a:solidFill>
+                  <a:srgbClr val="2F3338"/>
+                </a:solidFill>
+                <a:latin typeface="Segoe UI"/>
+              </a:rPr>
+              <a:t>ile</a:t>
+            </a:r>
+            <a:r>
+              <a:rPr sz="1600" b="0" i="0" dirty="0" smtClean="0">
                 <a:solidFill>
                   <a:srgbClr val="2F3338"/>
                 </a:solidFill>
@@ -14445,22 +16958,31 @@
               <a:t> custom + 16 </a:t>
             </a:r>
             <a:r>
-              <a:rPr sz="1600" b="0" i="0" dirty="0" err="1">
-                <a:solidFill>
-                  <a:srgbClr val="2F3338"/>
-                </a:solidFill>
-                <a:latin typeface="Segoe UI"/>
-              </a:rPr>
-              <a:t>proprietati</a:t>
-            </a:r>
-            <a:r>
-              <a:rPr sz="1600" b="0" i="0" dirty="0">
-                <a:solidFill>
-                  <a:srgbClr val="2F3338"/>
-                </a:solidFill>
-                <a:latin typeface="Segoe UI"/>
-              </a:rPr>
-              <a:t> </a:t>
+              <a:rPr sz="1600" b="0" i="0" dirty="0" err="1" smtClean="0">
+                <a:solidFill>
+                  <a:srgbClr val="2F3338"/>
+                </a:solidFill>
+                <a:latin typeface="Segoe UI"/>
+              </a:rPr>
+              <a:t>propriet</a:t>
+            </a:r>
+            <a:r>
+              <a:rPr lang="ro-RO" sz="1600" b="0" i="0" dirty="0" smtClean="0">
+                <a:solidFill>
+                  <a:srgbClr val="2F3338"/>
+                </a:solidFill>
+                <a:latin typeface="Segoe UI"/>
+              </a:rPr>
+              <a:t>ăț</a:t>
+            </a:r>
+            <a:r>
+              <a:rPr sz="1600" b="0" i="0" dirty="0" smtClean="0">
+                <a:solidFill>
+                  <a:srgbClr val="2F3338"/>
+                </a:solidFill>
+                <a:latin typeface="Segoe UI"/>
+              </a:rPr>
+              <a:t>i </a:t>
             </a:r>
             <a:r>
               <a:rPr sz="1600" b="0" i="0" dirty="0" err="1">
@@ -14477,147 +16999,6 @@
               </a:solidFill>
               <a:latin typeface="Segoe UI"/>
             </a:endParaRPr>
-          </a:p>
-        </p:txBody>
-      </p:sp>
-      <p:sp>
-        <p:nvSpPr>
-          <p:cNvPr id="5" name="TextBox 4"/>
-          <p:cNvSpPr txBox="1"/>
-          <p:nvPr/>
-        </p:nvSpPr>
-        <p:spPr>
-          <a:xfrm>
-            <a:off x="1325880" y="4434840"/>
-            <a:ext cx="9601200" cy="320040"/>
-          </a:xfrm>
-          <a:prstGeom prst="rect">
-            <a:avLst/>
-          </a:prstGeom>
-          <a:noFill/>
-        </p:spPr>
-        <p:txBody>
-          <a:bodyPr wrap="square">
-            <a:spAutoFit/>
-          </a:bodyPr>
-          <a:lstStyle/>
-          <a:p>
-            <a:pPr algn="l">
-              <a:spcBef>
-                <a:spcPts val="0"/>
-              </a:spcBef>
-              <a:spcAft>
-                <a:spcPts val="200"/>
-              </a:spcAft>
-            </a:pPr>
-            <a:r>
-              <a:rPr sz="1400" b="0" i="1" dirty="0" err="1">
-                <a:solidFill>
-                  <a:srgbClr val="4B5563"/>
-                </a:solidFill>
-                <a:latin typeface="Segoe UI"/>
-              </a:rPr>
-              <a:t>Evaluarea</a:t>
-            </a:r>
-            <a:r>
-              <a:rPr sz="1400" b="0" i="1" dirty="0">
-                <a:solidFill>
-                  <a:srgbClr val="4B5563"/>
-                </a:solidFill>
-                <a:latin typeface="Segoe UI"/>
-              </a:rPr>
-              <a:t> </a:t>
-            </a:r>
-            <a:r>
-              <a:rPr sz="1400" b="0" i="1" dirty="0" err="1">
-                <a:solidFill>
-                  <a:srgbClr val="4B5563"/>
-                </a:solidFill>
-                <a:latin typeface="Segoe UI"/>
-              </a:rPr>
-              <a:t>intoarce</a:t>
-            </a:r>
-            <a:r>
-              <a:rPr sz="1400" b="0" i="1" dirty="0">
-                <a:solidFill>
-                  <a:srgbClr val="4B5563"/>
-                </a:solidFill>
-                <a:latin typeface="Segoe UI"/>
-              </a:rPr>
-              <a:t> Nothing </a:t>
-            </a:r>
-            <a:r>
-              <a:rPr sz="1400" b="0" i="1" dirty="0" err="1">
-                <a:solidFill>
-                  <a:srgbClr val="4B5563"/>
-                </a:solidFill>
-                <a:latin typeface="Segoe UI"/>
-              </a:rPr>
-              <a:t>daca</a:t>
-            </a:r>
-            <a:r>
-              <a:rPr sz="1400" b="0" i="1" dirty="0">
-                <a:solidFill>
-                  <a:srgbClr val="4B5563"/>
-                </a:solidFill>
-                <a:latin typeface="Segoe UI"/>
-              </a:rPr>
-              <a:t> o </a:t>
-            </a:r>
-            <a:r>
-              <a:rPr sz="1400" b="0" i="1" dirty="0" err="1">
-                <a:solidFill>
-                  <a:srgbClr val="4B5563"/>
-                </a:solidFill>
-                <a:latin typeface="Segoe UI"/>
-              </a:rPr>
-              <a:t>variabila</a:t>
-            </a:r>
-            <a:r>
-              <a:rPr sz="1400" b="0" i="1" dirty="0">
-                <a:solidFill>
-                  <a:srgbClr val="4B5563"/>
-                </a:solidFill>
-                <a:latin typeface="Segoe UI"/>
-              </a:rPr>
-              <a:t> </a:t>
-            </a:r>
-            <a:r>
-              <a:rPr sz="1400" b="0" i="1" dirty="0" err="1">
-                <a:solidFill>
-                  <a:srgbClr val="4B5563"/>
-                </a:solidFill>
-                <a:latin typeface="Segoe UI"/>
-              </a:rPr>
-              <a:t>lipseste</a:t>
-            </a:r>
-            <a:r>
-              <a:rPr sz="1400" b="0" i="1" dirty="0">
-                <a:solidFill>
-                  <a:srgbClr val="4B5563"/>
-                </a:solidFill>
-                <a:latin typeface="Segoe UI"/>
-              </a:rPr>
-              <a:t> din </a:t>
-            </a:r>
-            <a:r>
-              <a:rPr sz="1400" b="0" i="1" dirty="0" err="1">
-                <a:solidFill>
-                  <a:srgbClr val="4B5563"/>
-                </a:solidFill>
-                <a:latin typeface="Segoe UI"/>
-              </a:rPr>
-              <a:t>mediu</a:t>
-            </a:r>
-            <a:r>
-              <a:rPr sz="1400" b="0" i="1" dirty="0">
-                <a:solidFill>
-                  <a:srgbClr val="4B5563"/>
-                </a:solidFill>
-                <a:latin typeface="Segoe UI"/>
-              </a:rPr>
-              <a:t>.</a:t>
-            </a:r>
           </a:p>
         </p:txBody>
       </p:sp>
@@ -14678,12 +17059,16 @@
               <a:t>: AST </a:t>
             </a:r>
             <a:r>
-              <a:rPr sz="3400" dirty="0" err="1"/>
-              <a:t>si</a:t>
+              <a:rPr lang="ro-RO" sz="3400" dirty="0" err="1"/>
+              <a:t>ș</a:t>
+            </a:r>
+            <a:r>
+              <a:rPr sz="3400" dirty="0" smtClean="0"/>
+              <a:t>i </a:t>
             </a:r>
             <a:r>
               <a:rPr sz="3400" dirty="0"/>
-              <a:t> evaluator</a:t>
+              <a:t>evaluator</a:t>
             </a:r>
           </a:p>
         </p:txBody>
@@ -14765,13 +17150,31 @@
               </a:spcAft>
             </a:pPr>
             <a:r>
-              <a:rPr sz="1400" b="1" i="0">
+              <a:rPr sz="1400" b="1" i="0" dirty="0">
                 <a:solidFill>
                   <a:srgbClr val="4EC9B0"/>
                 </a:solidFill>
                 <a:latin typeface="Consolas"/>
               </a:rPr>
-              <a:t>AST (Expr)</a:t>
+              <a:t>AST (</a:t>
+            </a:r>
+            <a:r>
+              <a:rPr sz="1400" b="1" i="0" dirty="0" err="1">
+                <a:solidFill>
+                  <a:srgbClr val="4EC9B0"/>
+                </a:solidFill>
+                <a:latin typeface="Consolas"/>
+              </a:rPr>
+              <a:t>Expr</a:t>
+            </a:r>
+            <a:r>
+              <a:rPr sz="1400" b="1" i="0" dirty="0">
+                <a:solidFill>
+                  <a:srgbClr val="4EC9B0"/>
+                </a:solidFill>
+                <a:latin typeface="Consolas"/>
+              </a:rPr>
+              <a:t>)</a:t>
             </a:r>
           </a:p>
           <a:p>
@@ -14784,7 +17187,7 @@
               </a:spcAft>
             </a:pPr>
             <a:r>
-              <a:rPr sz="600" b="0" i="0">
+              <a:rPr sz="600" b="0" i="0" dirty="0">
                 <a:solidFill>
                   <a:srgbClr val="D4D4D4"/>
                 </a:solidFill>
@@ -14803,14 +17206,29 @@
               </a:spcAft>
             </a:pPr>
             <a:r>
-              <a:rPr sz="1300" b="0" i="0">
+              <a:rPr sz="1300" b="0" i="0" dirty="0">
                 <a:solidFill>
                   <a:srgbClr val="569CD6"/>
                 </a:solidFill>
                 <a:latin typeface="Consolas"/>
               </a:rPr>
-              <a:t>data Expr</a:t>
-            </a:r>
+              <a:t>data </a:t>
+            </a:r>
+            <a:r>
+              <a:rPr sz="1300" b="0" i="0" dirty="0" err="1">
+                <a:solidFill>
+                  <a:srgbClr val="569CD6"/>
+                </a:solidFill>
+                <a:latin typeface="Consolas"/>
+              </a:rPr>
+              <a:t>Expr</a:t>
+            </a:r>
+            <a:endParaRPr sz="1300" b="0" i="0" dirty="0">
+              <a:solidFill>
+                <a:srgbClr val="569CD6"/>
+              </a:solidFill>
+              <a:latin typeface="Consolas"/>
+            </a:endParaRPr>
           </a:p>
           <a:p>
             <a:pPr algn="l">
@@ -14822,14 +17240,47 @@
               </a:spcAft>
             </a:pPr>
             <a:r>
-              <a:rPr sz="1300" b="0" i="0">
+              <a:rPr sz="1300" b="0" i="0" dirty="0">
                 <a:solidFill>
                   <a:srgbClr val="D4D4D4"/>
                 </a:solidFill>
                 <a:latin typeface="Consolas"/>
               </a:rPr>
-              <a:t>  = Const Int</a:t>
-            </a:r>
+              <a:t>  = </a:t>
+            </a:r>
+            <a:r>
+              <a:rPr sz="1300" b="0" i="0" dirty="0" err="1">
+                <a:solidFill>
+                  <a:srgbClr val="D4D4D4"/>
+                </a:solidFill>
+                <a:latin typeface="Consolas"/>
+              </a:rPr>
+              <a:t>Const</a:t>
+            </a:r>
+            <a:r>
+              <a:rPr sz="1300" b="0" i="0" dirty="0">
+                <a:solidFill>
+                  <a:srgbClr val="D4D4D4"/>
+                </a:solidFill>
+                <a:latin typeface="Consolas"/>
+              </a:rPr>
+              <a:t> </a:t>
+            </a:r>
+            <a:r>
+              <a:rPr sz="1300" b="0" i="0" dirty="0" err="1">
+                <a:solidFill>
+                  <a:srgbClr val="D4D4D4"/>
+                </a:solidFill>
+                <a:latin typeface="Consolas"/>
+              </a:rPr>
+              <a:t>Int</a:t>
+            </a:r>
+            <a:endParaRPr sz="1300" b="0" i="0" dirty="0">
+              <a:solidFill>
+                <a:srgbClr val="D4D4D4"/>
+              </a:solidFill>
+              <a:latin typeface="Consolas"/>
+            </a:endParaRPr>
           </a:p>
           <a:p>
             <a:pPr algn="l">
@@ -14841,13 +17292,31 @@
               </a:spcAft>
             </a:pPr>
             <a:r>
-              <a:rPr sz="1300" b="0" i="0">
+              <a:rPr sz="1300" b="0" i="0" dirty="0">
                 <a:solidFill>
                   <a:srgbClr val="D4D4D4"/>
                 </a:solidFill>
                 <a:latin typeface="Consolas"/>
               </a:rPr>
-              <a:t>  | Var String</a:t>
+              <a:t>  | </a:t>
+            </a:r>
+            <a:r>
+              <a:rPr sz="1300" b="0" i="0" dirty="0" err="1">
+                <a:solidFill>
+                  <a:srgbClr val="D4D4D4"/>
+                </a:solidFill>
+                <a:latin typeface="Consolas"/>
+              </a:rPr>
+              <a:t>Var</a:t>
+            </a:r>
+            <a:r>
+              <a:rPr sz="1300" b="0" i="0" dirty="0">
+                <a:solidFill>
+                  <a:srgbClr val="D4D4D4"/>
+                </a:solidFill>
+                <a:latin typeface="Consolas"/>
+              </a:rPr>
+              <a:t> String</a:t>
             </a:r>
           </a:p>
           <a:p>
@@ -14860,14 +17329,83 @@
               </a:spcAft>
             </a:pPr>
             <a:r>
-              <a:rPr sz="1300" b="0" i="0">
+              <a:rPr sz="1300" b="0" i="0" dirty="0">
                 <a:solidFill>
                   <a:srgbClr val="D4D4D4"/>
                 </a:solidFill>
                 <a:latin typeface="Consolas"/>
               </a:rPr>
-              <a:t>  | Add Expr Expr | Sub Expr Expr</a:t>
-            </a:r>
+              <a:t>  | Add </a:t>
+            </a:r>
+            <a:r>
+              <a:rPr sz="1300" b="0" i="0" dirty="0" err="1">
+                <a:solidFill>
+                  <a:srgbClr val="D4D4D4"/>
+                </a:solidFill>
+                <a:latin typeface="Consolas"/>
+              </a:rPr>
+              <a:t>Expr</a:t>
+            </a:r>
+            <a:r>
+              <a:rPr sz="1300" b="0" i="0" dirty="0">
+                <a:solidFill>
+                  <a:srgbClr val="D4D4D4"/>
+                </a:solidFill>
+                <a:latin typeface="Consolas"/>
+              </a:rPr>
+              <a:t> </a:t>
+            </a:r>
+            <a:r>
+              <a:rPr sz="1300" b="0" i="0" dirty="0" err="1">
+                <a:solidFill>
+                  <a:srgbClr val="D4D4D4"/>
+                </a:solidFill>
+                <a:latin typeface="Consolas"/>
+              </a:rPr>
+              <a:t>Expr</a:t>
+            </a:r>
+            <a:r>
+              <a:rPr sz="1300" b="0" i="0" dirty="0">
+                <a:solidFill>
+                  <a:srgbClr val="D4D4D4"/>
+                </a:solidFill>
+                <a:latin typeface="Consolas"/>
+              </a:rPr>
+              <a:t> | Sub </a:t>
+            </a:r>
+            <a:r>
+              <a:rPr sz="1300" b="0" i="0" dirty="0" err="1">
+                <a:solidFill>
+                  <a:srgbClr val="D4D4D4"/>
+                </a:solidFill>
+                <a:latin typeface="Consolas"/>
+              </a:rPr>
+              <a:t>Expr</a:t>
+            </a:r>
+            <a:r>
+              <a:rPr sz="1300" b="0" i="0" dirty="0">
+                <a:solidFill>
+                  <a:srgbClr val="D4D4D4"/>
+                </a:solidFill>
+                <a:latin typeface="Consolas"/>
+              </a:rPr>
+              <a:t> </a:t>
+            </a:r>
+            <a:r>
+              <a:rPr sz="1300" b="0" i="0" dirty="0" err="1">
+                <a:solidFill>
+                  <a:srgbClr val="D4D4D4"/>
+                </a:solidFill>
+                <a:latin typeface="Consolas"/>
+              </a:rPr>
+              <a:t>Expr</a:t>
+            </a:r>
+            <a:endParaRPr sz="1300" b="0" i="0" dirty="0">
+              <a:solidFill>
+                <a:srgbClr val="D4D4D4"/>
+              </a:solidFill>
+              <a:latin typeface="Consolas"/>
+            </a:endParaRPr>
           </a:p>
           <a:p>
             <a:pPr algn="l">
@@ -14879,14 +17417,101 @@
               </a:spcAft>
             </a:pPr>
             <a:r>
-              <a:rPr sz="1300" b="0" i="0">
+              <a:rPr sz="1300" b="0" i="0" dirty="0">
                 <a:solidFill>
                   <a:srgbClr val="D4D4D4"/>
                 </a:solidFill>
                 <a:latin typeface="Consolas"/>
               </a:rPr>
-              <a:t>  | Mul Expr Expr | Neg Expr</a:t>
-            </a:r>
+              <a:t>  | </a:t>
+            </a:r>
+            <a:r>
+              <a:rPr sz="1300" b="0" i="0" dirty="0" err="1">
+                <a:solidFill>
+                  <a:srgbClr val="D4D4D4"/>
+                </a:solidFill>
+                <a:latin typeface="Consolas"/>
+              </a:rPr>
+              <a:t>Mul</a:t>
+            </a:r>
+            <a:r>
+              <a:rPr sz="1300" b="0" i="0" dirty="0">
+                <a:solidFill>
+                  <a:srgbClr val="D4D4D4"/>
+                </a:solidFill>
+                <a:latin typeface="Consolas"/>
+              </a:rPr>
+              <a:t> </a:t>
+            </a:r>
+            <a:r>
+              <a:rPr sz="1300" b="0" i="0" dirty="0" err="1">
+                <a:solidFill>
+                  <a:srgbClr val="D4D4D4"/>
+                </a:solidFill>
+                <a:latin typeface="Consolas"/>
+              </a:rPr>
+              <a:t>Expr</a:t>
+            </a:r>
+            <a:r>
+              <a:rPr sz="1300" b="0" i="0" dirty="0">
+                <a:solidFill>
+                  <a:srgbClr val="D4D4D4"/>
+                </a:solidFill>
+                <a:latin typeface="Consolas"/>
+              </a:rPr>
+              <a:t> </a:t>
+            </a:r>
+            <a:r>
+              <a:rPr sz="1300" b="0" i="0" dirty="0" err="1">
+                <a:solidFill>
+                  <a:srgbClr val="D4D4D4"/>
+                </a:solidFill>
+                <a:latin typeface="Consolas"/>
+              </a:rPr>
+              <a:t>Expr</a:t>
+            </a:r>
+            <a:r>
+              <a:rPr sz="1300" b="0" i="0" dirty="0">
+                <a:solidFill>
+                  <a:srgbClr val="D4D4D4"/>
+                </a:solidFill>
+                <a:latin typeface="Consolas"/>
+              </a:rPr>
+              <a:t> | </a:t>
+            </a:r>
+            <a:r>
+              <a:rPr sz="1300" b="0" i="0" dirty="0" err="1">
+                <a:solidFill>
+                  <a:srgbClr val="D4D4D4"/>
+                </a:solidFill>
+                <a:latin typeface="Consolas"/>
+              </a:rPr>
+              <a:t>Neg</a:t>
+            </a:r>
+            <a:r>
+              <a:rPr sz="1300" b="0" i="0" dirty="0">
+                <a:solidFill>
+                  <a:srgbClr val="D4D4D4"/>
+                </a:solidFill>
+                <a:latin typeface="Consolas"/>
+              </a:rPr>
+              <a:t> </a:t>
+            </a:r>
+            <a:r>
+              <a:rPr sz="1300" b="0" i="0" dirty="0" err="1">
+                <a:solidFill>
+                  <a:srgbClr val="D4D4D4"/>
+                </a:solidFill>
+                <a:latin typeface="Consolas"/>
+              </a:rPr>
+              <a:t>Expr</a:t>
+            </a:r>
+            <a:endParaRPr sz="1300" b="0" i="0" dirty="0">
+              <a:solidFill>
+                <a:srgbClr val="D4D4D4"/>
+              </a:solidFill>
+              <a:latin typeface="Consolas"/>
+            </a:endParaRPr>
           </a:p>
         </p:txBody>
       </p:sp>
@@ -15612,13 +18237,58 @@
               </a:spcAft>
             </a:pPr>
             <a:r>
-              <a:rPr sz="1200" b="1" i="0" dirty="0" err="1">
+              <a:rPr sz="1200" i="0" dirty="0" smtClean="0">
                 <a:solidFill>
                   <a:srgbClr val="4B5563"/>
                 </a:solidFill>
                 <a:latin typeface="Segoe UI"/>
               </a:rPr>
-              <a:t>Radacina</a:t>
+              <a:t>R</a:t>
+            </a:r>
+            <a:r>
+              <a:rPr lang="ro-RO" sz="1200" i="0" dirty="0" smtClean="0">
+                <a:solidFill>
+                  <a:srgbClr val="4B5563"/>
+                </a:solidFill>
+                <a:latin typeface="Segoe UI"/>
+              </a:rPr>
+              <a:t>ă</a:t>
+            </a:r>
+            <a:r>
+              <a:rPr sz="1200" i="0" dirty="0" smtClean="0">
+                <a:solidFill>
+                  <a:srgbClr val="4B5563"/>
+                </a:solidFill>
+                <a:latin typeface="Segoe UI"/>
+              </a:rPr>
+              <a:t>d</a:t>
+            </a:r>
+            <a:r>
+              <a:rPr lang="ro-RO" sz="1200" i="0" dirty="0" smtClean="0">
+                <a:solidFill>
+                  <a:srgbClr val="4B5563"/>
+                </a:solidFill>
+                <a:latin typeface="Segoe UI"/>
+              </a:rPr>
+              <a:t>ă</a:t>
+            </a:r>
+            <a:r>
+              <a:rPr sz="1200" i="0" dirty="0" err="1" smtClean="0">
+                <a:solidFill>
+                  <a:srgbClr val="4B5563"/>
+                </a:solidFill>
+                <a:latin typeface="Segoe UI"/>
+              </a:rPr>
+              <a:t>cina</a:t>
+            </a:r>
+            <a:r>
+              <a:rPr sz="1200" i="0" dirty="0">
+                <a:solidFill>
+                  <a:srgbClr val="4B5563"/>
+                </a:solidFill>
+                <a:latin typeface="Segoe UI"/>
+              </a:rPr>
+              <a:t>:</a:t>
             </a:r>
             <a:r>
               <a:rPr sz="1200" b="1" i="0" dirty="0">
@@ -15627,6 +18297,42 @@
                 </a:solidFill>
                 <a:latin typeface="Segoe UI"/>
               </a:rPr>
+              <a:t> </a:t>
+            </a:r>
+            <a:r>
+              <a:rPr sz="1200" b="1" i="0" dirty="0">
+                <a:solidFill>
+                  <a:srgbClr val="1F4E79"/>
+                </a:solidFill>
+                <a:latin typeface="Consolas"/>
+              </a:rPr>
+              <a:t>Add</a:t>
+            </a:r>
+            <a:r>
+              <a:rPr sz="1200" b="0" i="0" dirty="0">
+                <a:solidFill>
+                  <a:srgbClr val="4B5563"/>
+                </a:solidFill>
+                <a:latin typeface="Segoe UI"/>
+              </a:rPr>
+              <a:t>  |  </a:t>
+            </a:r>
+            <a:r>
+              <a:rPr sz="1200" b="0" i="0" dirty="0" err="1">
+                <a:solidFill>
+                  <a:srgbClr val="4B5563"/>
+                </a:solidFill>
+                <a:latin typeface="Segoe UI"/>
+              </a:rPr>
+              <a:t>Subarbori</a:t>
+            </a:r>
+            <a:r>
+              <a:rPr sz="1200" b="0" i="0" dirty="0">
+                <a:solidFill>
+                  <a:srgbClr val="4B5563"/>
+                </a:solidFill>
+                <a:latin typeface="Segoe UI"/>
+              </a:rPr>
               <a:t>: </a:t>
             </a:r>
             <a:r>
@@ -15636,7 +18342,7 @@
                 </a:solidFill>
                 <a:latin typeface="Consolas"/>
               </a:rPr>
-              <a:t>Add</a:t>
+              <a:t>Mul(1,x)</a:t>
             </a:r>
             <a:r>
               <a:rPr sz="1200" b="0" i="0" dirty="0">
@@ -15645,61 +18351,25 @@
                 </a:solidFill>
                 <a:latin typeface="Segoe UI"/>
               </a:rPr>
-              <a:t>  |  </a:t>
-            </a:r>
-            <a:r>
-              <a:rPr sz="1200" b="0" i="0" dirty="0" err="1">
+              <a:t> </a:t>
+            </a:r>
+            <a:r>
+              <a:rPr lang="ro-RO" sz="1200" dirty="0" err="1">
                 <a:solidFill>
                   <a:srgbClr val="4B5563"/>
                 </a:solidFill>
                 <a:latin typeface="Segoe UI"/>
               </a:rPr>
-              <a:t>Subarbori</a:t>
-            </a:r>
-            <a:r>
-              <a:rPr sz="1200" b="0" i="0" dirty="0">
+              <a:t>ș</a:t>
+            </a:r>
+            <a:r>
+              <a:rPr sz="1200" b="0" i="0" dirty="0" smtClean="0">
                 <a:solidFill>
                   <a:srgbClr val="4B5563"/>
                 </a:solidFill>
                 <a:latin typeface="Segoe UI"/>
               </a:rPr>
-              <a:t>: </a:t>
-            </a:r>
-            <a:r>
-              <a:rPr sz="1200" b="1" i="0" dirty="0">
-                <a:solidFill>
-                  <a:srgbClr val="1F4E79"/>
-                </a:solidFill>
-                <a:latin typeface="Consolas"/>
-              </a:rPr>
-              <a:t>Mul(1,x)</a:t>
-            </a:r>
-            <a:r>
-              <a:rPr sz="1200" b="0" i="0" dirty="0">
-                <a:solidFill>
-                  <a:srgbClr val="4B5563"/>
-                </a:solidFill>
-                <a:latin typeface="Segoe UI"/>
-              </a:rPr>
-              <a:t> </a:t>
-            </a:r>
-            <a:r>
-              <a:rPr sz="1200" b="0" i="0" dirty="0" err="1">
-                <a:solidFill>
-                  <a:srgbClr val="4B5563"/>
-                </a:solidFill>
-                <a:latin typeface="Segoe UI"/>
-              </a:rPr>
-              <a:t>si</a:t>
-            </a:r>
-            <a:r>
-              <a:rPr sz="1200" b="0" i="0" dirty="0">
-                <a:solidFill>
-                  <a:srgbClr val="4B5563"/>
-                </a:solidFill>
-                <a:latin typeface="Segoe UI"/>
-              </a:rPr>
-              <a:t> </a:t>
+              <a:t>i </a:t>
             </a:r>
             <a:r>
               <a:rPr sz="1200" b="1" i="0" dirty="0">
@@ -15992,7 +18662,7 @@
         <p:spPr>
           <a:xfrm>
             <a:off x="1153160" y="5762752"/>
-            <a:ext cx="10058400" cy="1051560"/>
+            <a:ext cx="10058400" cy="579646"/>
           </a:xfrm>
           <a:prstGeom prst="rect">
             <a:avLst/>
@@ -16104,13 +18774,67 @@
               <a:t> </a:t>
             </a:r>
             <a:r>
-              <a:rPr sz="1500" b="0" i="0" dirty="0" err="1">
-                <a:solidFill>
-                  <a:srgbClr val="2F3338"/>
-                </a:solidFill>
-                <a:latin typeface="Segoe UI"/>
-              </a:rPr>
-              <a:t>explicita</a:t>
+              <a:rPr sz="1500" b="0" i="0" dirty="0" smtClean="0">
+                <a:solidFill>
+                  <a:srgbClr val="2F3338"/>
+                </a:solidFill>
+                <a:latin typeface="Segoe UI"/>
+              </a:rPr>
+              <a:t>explicit</a:t>
+            </a:r>
+            <a:r>
+              <a:rPr lang="ro-RO" sz="1500" b="0" i="0" dirty="0" smtClean="0">
+                <a:solidFill>
+                  <a:srgbClr val="2F3338"/>
+                </a:solidFill>
+                <a:latin typeface="Segoe UI"/>
+              </a:rPr>
+              <a:t>ă</a:t>
+            </a:r>
+            <a:r>
+              <a:rPr sz="1500" b="0" i="0" dirty="0" smtClean="0">
+                <a:solidFill>
+                  <a:srgbClr val="2F3338"/>
+                </a:solidFill>
+                <a:latin typeface="Segoe UI"/>
+              </a:rPr>
+              <a:t> </a:t>
+            </a:r>
+            <a:r>
+              <a:rPr lang="ro-RO" sz="1500" dirty="0" err="1">
+                <a:solidFill>
+                  <a:srgbClr val="2F3338"/>
+                </a:solidFill>
+                <a:latin typeface="Segoe UI"/>
+              </a:rPr>
+              <a:t>ș</a:t>
+            </a:r>
+            <a:r>
+              <a:rPr sz="1500" b="0" i="0" dirty="0" smtClean="0">
+                <a:solidFill>
+                  <a:srgbClr val="2F3338"/>
+                </a:solidFill>
+                <a:latin typeface="Segoe UI"/>
+              </a:rPr>
+              <a:t>i u</a:t>
+            </a:r>
+            <a:r>
+              <a:rPr lang="ro-RO" sz="1500" b="0" i="0" dirty="0" smtClean="0">
+                <a:solidFill>
+                  <a:srgbClr val="2F3338"/>
+                </a:solidFill>
+                <a:latin typeface="Segoe UI"/>
+              </a:rPr>
+              <a:t>ș</a:t>
+            </a:r>
+            <a:r>
+              <a:rPr sz="1500" b="0" i="0" dirty="0" smtClean="0">
+                <a:solidFill>
+                  <a:srgbClr val="2F3338"/>
+                </a:solidFill>
+                <a:latin typeface="Segoe UI"/>
+              </a:rPr>
+              <a:t>or </a:t>
             </a:r>
             <a:r>
               <a:rPr sz="1500" b="0" i="0" dirty="0">
@@ -16119,43 +18843,7 @@
                 </a:solidFill>
                 <a:latin typeface="Segoe UI"/>
               </a:rPr>
-              <a:t> </a:t>
-            </a:r>
-            <a:r>
-              <a:rPr sz="1500" b="0" i="0" dirty="0" err="1">
-                <a:solidFill>
-                  <a:srgbClr val="2F3338"/>
-                </a:solidFill>
-                <a:latin typeface="Segoe UI"/>
-              </a:rPr>
-              <a:t>si</a:t>
-            </a:r>
-            <a:r>
-              <a:rPr sz="1500" b="0" i="0" dirty="0">
-                <a:solidFill>
-                  <a:srgbClr val="2F3338"/>
-                </a:solidFill>
-                <a:latin typeface="Segoe UI"/>
-              </a:rPr>
-              <a:t> </a:t>
-            </a:r>
-            <a:r>
-              <a:rPr sz="1500" b="0" i="0" dirty="0" err="1">
-                <a:solidFill>
-                  <a:srgbClr val="2F3338"/>
-                </a:solidFill>
-                <a:latin typeface="Segoe UI"/>
-              </a:rPr>
-              <a:t>usor</a:t>
-            </a:r>
-            <a:r>
-              <a:rPr sz="1500" b="0" i="0" dirty="0">
-                <a:solidFill>
-                  <a:srgbClr val="2F3338"/>
-                </a:solidFill>
-                <a:latin typeface="Segoe UI"/>
-              </a:rPr>
-              <a:t> de </a:t>
+              <a:t>de </a:t>
             </a:r>
             <a:r>
               <a:rPr sz="1500" b="0" i="0" dirty="0" err="1">
@@ -16204,13 +18892,49 @@
               </a:spcAft>
             </a:pPr>
             <a:r>
+              <a:rPr sz="1500" b="0" i="0" dirty="0" err="1" smtClean="0">
+                <a:solidFill>
+                  <a:srgbClr val="2F3338"/>
+                </a:solidFill>
+                <a:latin typeface="Segoe UI"/>
+              </a:rPr>
+              <a:t>Func</a:t>
+            </a:r>
+            <a:r>
+              <a:rPr lang="ro-RO" sz="1500" b="0" i="0" dirty="0" smtClean="0">
+                <a:solidFill>
+                  <a:srgbClr val="2F3338"/>
+                </a:solidFill>
+                <a:latin typeface="Segoe UI"/>
+              </a:rPr>
+              <a:t>ț</a:t>
+            </a:r>
+            <a:r>
+              <a:rPr sz="1500" b="0" i="0" dirty="0" smtClean="0">
+                <a:solidFill>
+                  <a:srgbClr val="2F3338"/>
+                </a:solidFill>
+                <a:latin typeface="Segoe UI"/>
+              </a:rPr>
+              <a:t>ii </a:t>
+            </a:r>
+            <a:r>
+              <a:rPr sz="1500" b="0" i="0" dirty="0">
+                <a:solidFill>
+                  <a:srgbClr val="2F3338"/>
+                </a:solidFill>
+                <a:latin typeface="Segoe UI"/>
+              </a:rPr>
+              <a:t>precum size/depth/</a:t>
+            </a:r>
+            <a:r>
               <a:rPr sz="1500" b="0" i="0" dirty="0" err="1">
                 <a:solidFill>
                   <a:srgbClr val="2F3338"/>
                 </a:solidFill>
                 <a:latin typeface="Segoe UI"/>
               </a:rPr>
-              <a:t>Functii</a:t>
+              <a:t>operatorCount</a:t>
             </a:r>
             <a:r>
               <a:rPr sz="1500" b="0" i="0" dirty="0">
@@ -16219,7 +18943,7 @@
                 </a:solidFill>
                 <a:latin typeface="Segoe UI"/>
               </a:rPr>
-              <a:t> precum size/depth/</a:t>
+              <a:t> </a:t>
             </a:r>
             <a:r>
               <a:rPr sz="1500" b="0" i="0" dirty="0" err="1">
@@ -16228,7 +18952,7 @@
                 </a:solidFill>
                 <a:latin typeface="Segoe UI"/>
               </a:rPr>
-              <a:t>operatorCount</a:t>
+              <a:t>folosesc</a:t>
             </a:r>
             <a:r>
               <a:rPr sz="1500" b="0" i="0" dirty="0">
@@ -16237,62 +18961,59 @@
                 </a:solidFill>
                 <a:latin typeface="Segoe UI"/>
               </a:rPr>
-              <a:t> </a:t>
-            </a:r>
-            <a:r>
-              <a:rPr sz="1500" b="0" i="0" dirty="0" err="1">
-                <a:solidFill>
-                  <a:srgbClr val="2F3338"/>
-                </a:solidFill>
-                <a:latin typeface="Segoe UI"/>
-              </a:rPr>
-              <a:t>folosesc</a:t>
-            </a:r>
-            <a:r>
-              <a:rPr sz="1500" b="0" i="0" dirty="0">
-                <a:solidFill>
-                  <a:srgbClr val="2F3338"/>
-                </a:solidFill>
-                <a:latin typeface="Segoe UI"/>
-              </a:rPr>
               <a:t> direct </a:t>
             </a:r>
             <a:r>
-              <a:rPr sz="1500" b="0" i="0" dirty="0" err="1">
-                <a:solidFill>
-                  <a:srgbClr val="2F3338"/>
-                </a:solidFill>
-                <a:latin typeface="Segoe UI"/>
-              </a:rPr>
-              <a:t>aceasta</a:t>
-            </a:r>
-            <a:r>
-              <a:rPr sz="1500" b="0" i="0" dirty="0">
-                <a:solidFill>
-                  <a:srgbClr val="2F3338"/>
-                </a:solidFill>
-                <a:latin typeface="Segoe UI"/>
-              </a:rPr>
-              <a:t> </a:t>
-            </a:r>
-            <a:r>
-              <a:rPr sz="1500" b="0" i="0" dirty="0" err="1">
-                <a:solidFill>
-                  <a:srgbClr val="2F3338"/>
-                </a:solidFill>
-                <a:latin typeface="Segoe UI"/>
-              </a:rPr>
-              <a:t>structura</a:t>
-            </a:r>
-            <a:r>
-              <a:rPr sz="1500" b="0" i="0" dirty="0">
-                <a:solidFill>
-                  <a:srgbClr val="2F3338"/>
-                </a:solidFill>
-                <a:latin typeface="Segoe UI"/>
-              </a:rPr>
-              <a:t>.</a:t>
-            </a:r>
+              <a:rPr sz="1500" b="0" i="0" dirty="0" err="1" smtClean="0">
+                <a:solidFill>
+                  <a:srgbClr val="2F3338"/>
+                </a:solidFill>
+                <a:latin typeface="Segoe UI"/>
+              </a:rPr>
+              <a:t>aceast</a:t>
+            </a:r>
+            <a:r>
+              <a:rPr lang="ro-RO" sz="1500" b="0" i="0" dirty="0" smtClean="0">
+                <a:solidFill>
+                  <a:srgbClr val="2F3338"/>
+                </a:solidFill>
+                <a:latin typeface="Segoe UI"/>
+              </a:rPr>
+              <a:t>ă</a:t>
+            </a:r>
+            <a:r>
+              <a:rPr sz="1500" b="0" i="0" dirty="0" smtClean="0">
+                <a:solidFill>
+                  <a:srgbClr val="2F3338"/>
+                </a:solidFill>
+                <a:latin typeface="Segoe UI"/>
+              </a:rPr>
+              <a:t> </a:t>
+            </a:r>
+            <a:r>
+              <a:rPr sz="1500" b="0" i="0" dirty="0" err="1" smtClean="0">
+                <a:solidFill>
+                  <a:srgbClr val="2F3338"/>
+                </a:solidFill>
+                <a:latin typeface="Segoe UI"/>
+              </a:rPr>
+              <a:t>structur</a:t>
+            </a:r>
+            <a:r>
+              <a:rPr lang="ro-RO" sz="1500" b="0" i="0" dirty="0" smtClean="0">
+                <a:solidFill>
+                  <a:srgbClr val="2F3338"/>
+                </a:solidFill>
+                <a:latin typeface="Segoe UI"/>
+              </a:rPr>
+              <a:t>ă.</a:t>
+            </a:r>
+            <a:endParaRPr sz="1500" b="0" i="0" dirty="0">
+              <a:solidFill>
+                <a:srgbClr val="2F3338"/>
+              </a:solidFill>
+              <a:latin typeface="Segoe UI"/>
+            </a:endParaRPr>
           </a:p>
         </p:txBody>
       </p:sp>
@@ -16369,12 +19090,36 @@
               <a:t> </a:t>
             </a:r>
             <a:r>
-              <a:rPr sz="3500" dirty="0" err="1">
-                <a:solidFill>
-                  <a:srgbClr val="2F3338"/>
-                </a:solidFill>
-              </a:rPr>
-              <a:t>operationala</a:t>
+              <a:rPr sz="3500" dirty="0" smtClean="0">
+                <a:solidFill>
+                  <a:srgbClr val="2F3338"/>
+                </a:solidFill>
+              </a:rPr>
+              <a:t>opera</a:t>
+            </a:r>
+            <a:r>
+              <a:rPr lang="ro-RO" sz="3500" dirty="0" smtClean="0">
+                <a:solidFill>
+                  <a:srgbClr val="2F3338"/>
+                </a:solidFill>
+              </a:rPr>
+              <a:t>ț</a:t>
+            </a:r>
+            <a:r>
+              <a:rPr sz="3500" dirty="0" err="1" smtClean="0">
+                <a:solidFill>
+                  <a:srgbClr val="2F3338"/>
+                </a:solidFill>
+              </a:rPr>
+              <a:t>ional</a:t>
+            </a:r>
+            <a:r>
+              <a:rPr lang="ro-RO" sz="3500" dirty="0" smtClean="0">
+                <a:solidFill>
+                  <a:srgbClr val="2F3338"/>
+                </a:solidFill>
+              </a:rPr>
+              <a:t>ă</a:t>
             </a:r>
             <a:endParaRPr sz="3500" dirty="0">
               <a:solidFill>
@@ -16649,13 +19394,121 @@
               </a:spcAft>
             </a:pPr>
             <a:r>
-              <a:rPr sz="1600" b="0" i="0">
-                <a:solidFill>
-                  <a:srgbClr val="2F3338"/>
-                </a:solidFill>
-                <a:latin typeface="Segoe UI"/>
-              </a:rPr>
-              <a:t>- Maybe encodeaza explicit esecul partial (Nothing)</a:t>
+              <a:rPr sz="1600" b="0" i="0" dirty="0">
+                <a:solidFill>
+                  <a:srgbClr val="2F3338"/>
+                </a:solidFill>
+                <a:latin typeface="Segoe UI"/>
+              </a:rPr>
+              <a:t>- Maybe </a:t>
+            </a:r>
+            <a:r>
+              <a:rPr sz="1600" b="0" i="0" dirty="0" err="1" smtClean="0">
+                <a:solidFill>
+                  <a:srgbClr val="2F3338"/>
+                </a:solidFill>
+                <a:latin typeface="Segoe UI"/>
+              </a:rPr>
+              <a:t>encodeaz</a:t>
+            </a:r>
+            <a:r>
+              <a:rPr lang="ro-RO" sz="1600" b="0" i="0" dirty="0" smtClean="0">
+                <a:solidFill>
+                  <a:srgbClr val="2F3338"/>
+                </a:solidFill>
+                <a:latin typeface="Segoe UI"/>
+              </a:rPr>
+              <a:t>ă</a:t>
+            </a:r>
+            <a:r>
+              <a:rPr sz="1600" b="0" i="0" dirty="0" smtClean="0">
+                <a:solidFill>
+                  <a:srgbClr val="2F3338"/>
+                </a:solidFill>
+                <a:latin typeface="Segoe UI"/>
+              </a:rPr>
+              <a:t> </a:t>
+            </a:r>
+            <a:r>
+              <a:rPr sz="1600" b="0" i="0" dirty="0">
+                <a:solidFill>
+                  <a:srgbClr val="2F3338"/>
+                </a:solidFill>
+                <a:latin typeface="Segoe UI"/>
+              </a:rPr>
+              <a:t>explicit </a:t>
+            </a:r>
+            <a:r>
+              <a:rPr sz="1600" b="0" i="0" dirty="0" smtClean="0">
+                <a:solidFill>
+                  <a:srgbClr val="2F3338"/>
+                </a:solidFill>
+                <a:latin typeface="Segoe UI"/>
+              </a:rPr>
+              <a:t>e</a:t>
+            </a:r>
+            <a:r>
+              <a:rPr lang="ro-RO" sz="1600" b="0" i="0" dirty="0" smtClean="0">
+                <a:solidFill>
+                  <a:srgbClr val="2F3338"/>
+                </a:solidFill>
+                <a:latin typeface="Segoe UI"/>
+              </a:rPr>
+              <a:t>ș</a:t>
+            </a:r>
+            <a:r>
+              <a:rPr sz="1600" b="0" i="0" dirty="0" err="1" smtClean="0">
+                <a:solidFill>
+                  <a:srgbClr val="2F3338"/>
+                </a:solidFill>
+                <a:latin typeface="Segoe UI"/>
+              </a:rPr>
+              <a:t>ecul</a:t>
+            </a:r>
+            <a:r>
+              <a:rPr sz="1600" b="0" i="0" dirty="0" smtClean="0">
+                <a:solidFill>
+                  <a:srgbClr val="2F3338"/>
+                </a:solidFill>
+                <a:latin typeface="Segoe UI"/>
+              </a:rPr>
+              <a:t> par</a:t>
+            </a:r>
+            <a:r>
+              <a:rPr lang="ro-RO" sz="1600" b="0" i="0" dirty="0" smtClean="0">
+                <a:solidFill>
+                  <a:srgbClr val="2F3338"/>
+                </a:solidFill>
+                <a:latin typeface="Segoe UI"/>
+              </a:rPr>
+              <a:t>ț</a:t>
+            </a:r>
+            <a:r>
+              <a:rPr sz="1600" b="0" i="0" dirty="0" err="1" smtClean="0">
+                <a:solidFill>
+                  <a:srgbClr val="2F3338"/>
+                </a:solidFill>
+                <a:latin typeface="Segoe UI"/>
+              </a:rPr>
+              <a:t>ial</a:t>
+            </a:r>
+            <a:r>
+              <a:rPr sz="1600" b="0" i="0" dirty="0" smtClean="0">
+                <a:solidFill>
+                  <a:srgbClr val="2F3338"/>
+                </a:solidFill>
+                <a:latin typeface="Segoe UI"/>
+              </a:rPr>
+              <a:t> </a:t>
+            </a:r>
+            <a:r>
+              <a:rPr sz="1600" b="0" i="0" dirty="0">
+                <a:solidFill>
+                  <a:srgbClr val="2F3338"/>
+                </a:solidFill>
+                <a:latin typeface="Segoe UI"/>
+              </a:rPr>
+              <a:t>(Nothing)</a:t>
             </a:r>
           </a:p>
           <a:p>
@@ -16668,14 +19521,209 @@
               </a:spcAft>
             </a:pPr>
             <a:r>
-              <a:rPr sz="1600" b="0" i="0">
-                <a:solidFill>
-                  <a:srgbClr val="2F3338"/>
-                </a:solidFill>
-                <a:latin typeface="Segoe UI"/>
-              </a:rPr>
-              <a:t>- operatiile binare reusesc doar daca ambele subexpresii sunt evaluabile</a:t>
-            </a:r>
+              <a:rPr sz="1600" b="0" i="0" dirty="0">
+                <a:solidFill>
+                  <a:srgbClr val="2F3338"/>
+                </a:solidFill>
+                <a:latin typeface="Segoe UI"/>
+              </a:rPr>
+              <a:t>- </a:t>
+            </a:r>
+            <a:r>
+              <a:rPr sz="1600" b="0" i="0" dirty="0" smtClean="0">
+                <a:solidFill>
+                  <a:srgbClr val="2F3338"/>
+                </a:solidFill>
+                <a:latin typeface="Segoe UI"/>
+              </a:rPr>
+              <a:t>opera</a:t>
+            </a:r>
+            <a:r>
+              <a:rPr lang="ro-RO" sz="1600" b="0" i="0" dirty="0" smtClean="0">
+                <a:solidFill>
+                  <a:srgbClr val="2F3338"/>
+                </a:solidFill>
+                <a:latin typeface="Segoe UI"/>
+              </a:rPr>
+              <a:t>ț</a:t>
+            </a:r>
+            <a:r>
+              <a:rPr sz="1600" b="0" i="0" dirty="0" err="1" smtClean="0">
+                <a:solidFill>
+                  <a:srgbClr val="2F3338"/>
+                </a:solidFill>
+                <a:latin typeface="Segoe UI"/>
+              </a:rPr>
+              <a:t>iile</a:t>
+            </a:r>
+            <a:r>
+              <a:rPr sz="1600" b="0" i="0" dirty="0" smtClean="0">
+                <a:solidFill>
+                  <a:srgbClr val="2F3338"/>
+                </a:solidFill>
+                <a:latin typeface="Segoe UI"/>
+              </a:rPr>
+              <a:t> </a:t>
+            </a:r>
+            <a:r>
+              <a:rPr sz="1600" b="0" i="0" dirty="0" err="1">
+                <a:solidFill>
+                  <a:srgbClr val="2F3338"/>
+                </a:solidFill>
+                <a:latin typeface="Segoe UI"/>
+              </a:rPr>
+              <a:t>binare</a:t>
+            </a:r>
+            <a:r>
+              <a:rPr sz="1600" b="0" i="0" dirty="0">
+                <a:solidFill>
+                  <a:srgbClr val="2F3338"/>
+                </a:solidFill>
+                <a:latin typeface="Segoe UI"/>
+              </a:rPr>
+              <a:t> </a:t>
+            </a:r>
+            <a:r>
+              <a:rPr sz="1600" b="0" i="0" dirty="0" err="1" smtClean="0">
+                <a:solidFill>
+                  <a:srgbClr val="2F3338"/>
+                </a:solidFill>
+                <a:latin typeface="Segoe UI"/>
+              </a:rPr>
+              <a:t>reu</a:t>
+            </a:r>
+            <a:r>
+              <a:rPr lang="ro-RO" sz="1600" b="0" i="0" dirty="0" smtClean="0">
+                <a:solidFill>
+                  <a:srgbClr val="2F3338"/>
+                </a:solidFill>
+                <a:latin typeface="Segoe UI"/>
+              </a:rPr>
+              <a:t>ș</a:t>
+            </a:r>
+            <a:r>
+              <a:rPr sz="1600" b="0" i="0" dirty="0" smtClean="0">
+                <a:solidFill>
+                  <a:srgbClr val="2F3338"/>
+                </a:solidFill>
+                <a:latin typeface="Segoe UI"/>
+              </a:rPr>
+              <a:t>esc </a:t>
+            </a:r>
+            <a:r>
+              <a:rPr sz="1600" b="0" i="0" dirty="0" err="1">
+                <a:solidFill>
+                  <a:srgbClr val="2F3338"/>
+                </a:solidFill>
+                <a:latin typeface="Segoe UI"/>
+              </a:rPr>
+              <a:t>doar</a:t>
+            </a:r>
+            <a:r>
+              <a:rPr sz="1600" b="0" i="0" dirty="0">
+                <a:solidFill>
+                  <a:srgbClr val="2F3338"/>
+                </a:solidFill>
+                <a:latin typeface="Segoe UI"/>
+              </a:rPr>
+              <a:t> </a:t>
+            </a:r>
+            <a:r>
+              <a:rPr sz="1600" b="0" i="0" dirty="0" err="1" smtClean="0">
+                <a:solidFill>
+                  <a:srgbClr val="2F3338"/>
+                </a:solidFill>
+                <a:latin typeface="Segoe UI"/>
+              </a:rPr>
+              <a:t>dac</a:t>
+            </a:r>
+            <a:r>
+              <a:rPr lang="ro-RO" sz="1600" b="0" i="0" dirty="0" smtClean="0">
+                <a:solidFill>
+                  <a:srgbClr val="2F3338"/>
+                </a:solidFill>
+                <a:latin typeface="Segoe UI"/>
+              </a:rPr>
+              <a:t>ă</a:t>
+            </a:r>
+            <a:r>
+              <a:rPr sz="1600" b="0" i="0" dirty="0" smtClean="0">
+                <a:solidFill>
+                  <a:srgbClr val="2F3338"/>
+                </a:solidFill>
+                <a:latin typeface="Segoe UI"/>
+              </a:rPr>
+              <a:t> </a:t>
+            </a:r>
+            <a:r>
+              <a:rPr sz="1600" b="0" i="0" dirty="0" err="1">
+                <a:solidFill>
+                  <a:srgbClr val="2F3338"/>
+                </a:solidFill>
+                <a:latin typeface="Segoe UI"/>
+              </a:rPr>
+              <a:t>ambele</a:t>
+            </a:r>
+            <a:r>
+              <a:rPr sz="1600" b="0" i="0" dirty="0">
+                <a:solidFill>
+                  <a:srgbClr val="2F3338"/>
+                </a:solidFill>
+                <a:latin typeface="Segoe UI"/>
+              </a:rPr>
+              <a:t> </a:t>
+            </a:r>
+            <a:r>
+              <a:rPr sz="1600" b="0" i="0" dirty="0" err="1">
+                <a:solidFill>
+                  <a:srgbClr val="2F3338"/>
+                </a:solidFill>
+                <a:latin typeface="Segoe UI"/>
+              </a:rPr>
+              <a:t>subexpresii</a:t>
+            </a:r>
+            <a:r>
+              <a:rPr sz="1600" b="0" i="0" dirty="0">
+                <a:solidFill>
+                  <a:srgbClr val="2F3338"/>
+                </a:solidFill>
+                <a:latin typeface="Segoe UI"/>
+              </a:rPr>
+              <a:t> </a:t>
+            </a:r>
+            <a:r>
+              <a:rPr sz="1600" b="0" i="0" dirty="0" err="1">
+                <a:solidFill>
+                  <a:srgbClr val="2F3338"/>
+                </a:solidFill>
+                <a:latin typeface="Segoe UI"/>
+              </a:rPr>
+              <a:t>sunt</a:t>
+            </a:r>
+            <a:r>
+              <a:rPr sz="1600" b="0" i="0" dirty="0">
+                <a:solidFill>
+                  <a:srgbClr val="2F3338"/>
+                </a:solidFill>
+                <a:latin typeface="Segoe UI"/>
+              </a:rPr>
+              <a:t> </a:t>
+            </a:r>
+            <a:r>
+              <a:rPr sz="1600" b="0" i="0" dirty="0" err="1">
+                <a:solidFill>
+                  <a:srgbClr val="2F3338"/>
+                </a:solidFill>
+                <a:latin typeface="Segoe UI"/>
+              </a:rPr>
+              <a:t>evaluabile</a:t>
+            </a:r>
+            <a:endParaRPr sz="1600" b="0" i="0" dirty="0">
+              <a:solidFill>
+                <a:srgbClr val="2F3338"/>
+              </a:solidFill>
+              <a:latin typeface="Segoe UI"/>
+            </a:endParaRPr>
           </a:p>
           <a:p>
             <a:pPr algn="l">
@@ -16687,14 +19735,146 @@
               </a:spcAft>
             </a:pPr>
             <a:r>
-              <a:rPr sz="1600" b="0" i="0">
-                <a:solidFill>
-                  <a:srgbClr val="2F3338"/>
-                </a:solidFill>
-                <a:latin typeface="Segoe UI"/>
-              </a:rPr>
-              <a:t>- design-ul evita exceptii runtime pentru variabile nedefinite</a:t>
-            </a:r>
+              <a:rPr sz="1600" b="0" i="0" dirty="0">
+                <a:solidFill>
+                  <a:srgbClr val="2F3338"/>
+                </a:solidFill>
+                <a:latin typeface="Segoe UI"/>
+              </a:rPr>
+              <a:t>- design-</a:t>
+            </a:r>
+            <a:r>
+              <a:rPr sz="1600" b="0" i="0" dirty="0" err="1">
+                <a:solidFill>
+                  <a:srgbClr val="2F3338"/>
+                </a:solidFill>
+                <a:latin typeface="Segoe UI"/>
+              </a:rPr>
+              <a:t>ul</a:t>
+            </a:r>
+            <a:r>
+              <a:rPr sz="1600" b="0" i="0" dirty="0">
+                <a:solidFill>
+                  <a:srgbClr val="2F3338"/>
+                </a:solidFill>
+                <a:latin typeface="Segoe UI"/>
+              </a:rPr>
+              <a:t> </a:t>
+            </a:r>
+            <a:r>
+              <a:rPr sz="1600" b="0" i="0" dirty="0" err="1" smtClean="0">
+                <a:solidFill>
+                  <a:srgbClr val="2F3338"/>
+                </a:solidFill>
+                <a:latin typeface="Segoe UI"/>
+              </a:rPr>
+              <a:t>evit</a:t>
+            </a:r>
+            <a:r>
+              <a:rPr lang="ro-RO" sz="1600" b="0" i="0" dirty="0" smtClean="0">
+                <a:solidFill>
+                  <a:srgbClr val="2F3338"/>
+                </a:solidFill>
+                <a:latin typeface="Segoe UI"/>
+              </a:rPr>
+              <a:t>ă</a:t>
+            </a:r>
+            <a:r>
+              <a:rPr sz="1600" b="0" i="0" dirty="0" smtClean="0">
+                <a:solidFill>
+                  <a:srgbClr val="2F3338"/>
+                </a:solidFill>
+                <a:latin typeface="Segoe UI"/>
+              </a:rPr>
+              <a:t> </a:t>
+            </a:r>
+            <a:r>
+              <a:rPr sz="1600" b="0" i="0" dirty="0" err="1" smtClean="0">
+                <a:solidFill>
+                  <a:srgbClr val="2F3338"/>
+                </a:solidFill>
+                <a:latin typeface="Segoe UI"/>
+              </a:rPr>
+              <a:t>excep</a:t>
+            </a:r>
+            <a:r>
+              <a:rPr lang="ro-RO" sz="1600" b="0" i="0" dirty="0" smtClean="0">
+                <a:solidFill>
+                  <a:srgbClr val="2F3338"/>
+                </a:solidFill>
+                <a:latin typeface="Segoe UI"/>
+              </a:rPr>
+              <a:t>ț</a:t>
+            </a:r>
+            <a:r>
+              <a:rPr sz="1600" b="0" i="0" dirty="0" smtClean="0">
+                <a:solidFill>
+                  <a:srgbClr val="2F3338"/>
+                </a:solidFill>
+                <a:latin typeface="Segoe UI"/>
+              </a:rPr>
+              <a:t>ii </a:t>
+            </a:r>
+            <a:r>
+              <a:rPr sz="1600" b="0" i="0" dirty="0">
+                <a:solidFill>
+                  <a:srgbClr val="2F3338"/>
+                </a:solidFill>
+                <a:latin typeface="Segoe UI"/>
+              </a:rPr>
+              <a:t>runtime </a:t>
+            </a:r>
+            <a:r>
+              <a:rPr sz="1600" b="0" i="0" dirty="0" err="1">
+                <a:solidFill>
+                  <a:srgbClr val="2F3338"/>
+                </a:solidFill>
+                <a:latin typeface="Segoe UI"/>
+              </a:rPr>
+              <a:t>pentru</a:t>
+            </a:r>
+            <a:r>
+              <a:rPr sz="1600" b="0" i="0" dirty="0">
+                <a:solidFill>
+                  <a:srgbClr val="2F3338"/>
+                </a:solidFill>
+                <a:latin typeface="Segoe UI"/>
+              </a:rPr>
+              <a:t> </a:t>
+            </a:r>
+            <a:r>
+              <a:rPr sz="1600" b="0" i="0" dirty="0" err="1">
+                <a:solidFill>
+                  <a:srgbClr val="2F3338"/>
+                </a:solidFill>
+                <a:latin typeface="Segoe UI"/>
+              </a:rPr>
+              <a:t>variabile</a:t>
+            </a:r>
+            <a:r>
+              <a:rPr sz="1600" b="0" i="0" dirty="0">
+                <a:solidFill>
+                  <a:srgbClr val="2F3338"/>
+                </a:solidFill>
+                <a:latin typeface="Segoe UI"/>
+              </a:rPr>
+              <a:t> </a:t>
+            </a:r>
+            <a:r>
+              <a:rPr sz="1600" b="0" i="0" dirty="0" err="1">
+                <a:solidFill>
+                  <a:srgbClr val="2F3338"/>
+                </a:solidFill>
+                <a:latin typeface="Segoe UI"/>
+              </a:rPr>
+              <a:t>nedefinite</a:t>
+            </a:r>
+            <a:endParaRPr sz="1600" b="0" i="0" dirty="0">
+              <a:solidFill>
+                <a:srgbClr val="2F3338"/>
+              </a:solidFill>
+              <a:latin typeface="Segoe UI"/>
+            </a:endParaRPr>
           </a:p>
         </p:txBody>
       </p:sp>
@@ -16755,20 +19935,20 @@
               <a:t> </a:t>
             </a:r>
             <a:r>
-              <a:rPr sz="3500" dirty="0" err="1">
-                <a:solidFill>
-                  <a:srgbClr val="2F3338"/>
-                </a:solidFill>
-              </a:rPr>
-              <a:t>si</a:t>
-            </a:r>
-            <a:r>
-              <a:rPr sz="3500" dirty="0">
-                <a:solidFill>
-                  <a:srgbClr val="2F3338"/>
-                </a:solidFill>
-              </a:rPr>
-              <a:t> </a:t>
+              <a:rPr lang="ro-RO" sz="3500" dirty="0" err="1">
+                <a:solidFill>
+                  <a:srgbClr val="2F3338"/>
+                </a:solidFill>
+              </a:rPr>
+              <a:t>ș</a:t>
+            </a:r>
+            <a:r>
+              <a:rPr sz="3500" dirty="0" smtClean="0">
+                <a:solidFill>
+                  <a:srgbClr val="2F3338"/>
+                </a:solidFill>
+              </a:rPr>
+              <a:t>i </a:t>
             </a:r>
             <a:r>
               <a:rPr sz="3500" dirty="0" err="1">
@@ -16811,7 +19991,7 @@
         <p:spPr>
           <a:xfrm>
             <a:off x="1097280" y="2027982"/>
-            <a:ext cx="10058400" cy="548640"/>
+            <a:ext cx="10058400" cy="338554"/>
           </a:xfrm>
           <a:prstGeom prst="rect">
             <a:avLst/>
@@ -16851,13 +20031,40 @@
               <a:t> </a:t>
             </a:r>
             <a:r>
+              <a:rPr sz="1600" b="0" i="0" dirty="0" err="1" smtClean="0">
+                <a:solidFill>
+                  <a:srgbClr val="2F3338"/>
+                </a:solidFill>
+                <a:latin typeface="Segoe UI"/>
+              </a:rPr>
+              <a:t>aplic</a:t>
+            </a:r>
+            <a:r>
+              <a:rPr lang="ro-RO" sz="1600" b="0" i="0" dirty="0" smtClean="0">
+                <a:solidFill>
+                  <a:srgbClr val="2F3338"/>
+                </a:solidFill>
+                <a:latin typeface="Segoe UI"/>
+              </a:rPr>
+              <a:t>ă</a:t>
+            </a:r>
+            <a:r>
+              <a:rPr sz="1600" b="0" i="0" dirty="0" smtClean="0">
+                <a:solidFill>
+                  <a:srgbClr val="2F3338"/>
+                </a:solidFill>
+                <a:latin typeface="Segoe UI"/>
+              </a:rPr>
+              <a:t> </a:t>
+            </a:r>
+            <a:r>
               <a:rPr sz="1600" b="0" i="0" dirty="0" err="1">
                 <a:solidFill>
                   <a:srgbClr val="2F3338"/>
                 </a:solidFill>
                 <a:latin typeface="Segoe UI"/>
               </a:rPr>
-              <a:t>aplica</a:t>
+              <a:t>reguli</a:t>
             </a:r>
             <a:r>
               <a:rPr sz="1600" b="0" i="0" dirty="0">
@@ -16866,16 +20073,52 @@
                 </a:solidFill>
                 <a:latin typeface="Segoe UI"/>
               </a:rPr>
-              <a:t> reguli </a:t>
-            </a:r>
-            <a:r>
-              <a:rPr sz="1600" b="0" i="0" dirty="0" err="1">
-                <a:solidFill>
-                  <a:srgbClr val="2F3338"/>
-                </a:solidFill>
-                <a:latin typeface="Segoe UI"/>
-              </a:rPr>
-              <a:t>pana</a:t>
+              <a:t> </a:t>
+            </a:r>
+            <a:r>
+              <a:rPr sz="1600" b="0" i="0" dirty="0" smtClean="0">
+                <a:solidFill>
+                  <a:srgbClr val="2F3338"/>
+                </a:solidFill>
+                <a:latin typeface="Segoe UI"/>
+              </a:rPr>
+              <a:t>p</a:t>
+            </a:r>
+            <a:r>
+              <a:rPr lang="ro-RO" sz="1600" b="0" i="0" dirty="0" smtClean="0">
+                <a:solidFill>
+                  <a:srgbClr val="2F3338"/>
+                </a:solidFill>
+                <a:latin typeface="Segoe UI"/>
+              </a:rPr>
+              <a:t>â</a:t>
+            </a:r>
+            <a:r>
+              <a:rPr sz="1600" b="0" i="0" dirty="0" smtClean="0">
+                <a:solidFill>
+                  <a:srgbClr val="2F3338"/>
+                </a:solidFill>
+                <a:latin typeface="Segoe UI"/>
+              </a:rPr>
+              <a:t>n</a:t>
+            </a:r>
+            <a:r>
+              <a:rPr lang="ro-RO" sz="1600" b="0" i="0" dirty="0" smtClean="0">
+                <a:solidFill>
+                  <a:srgbClr val="2F3338"/>
+                </a:solidFill>
+                <a:latin typeface="Segoe UI"/>
+              </a:rPr>
+              <a:t>ă</a:t>
+            </a:r>
+            <a:r>
+              <a:rPr sz="1600" b="0" i="0" dirty="0" smtClean="0">
+                <a:solidFill>
+                  <a:srgbClr val="2F3338"/>
+                </a:solidFill>
+                <a:latin typeface="Segoe UI"/>
+              </a:rPr>
+              <a:t> </a:t>
             </a:r>
             <a:r>
               <a:rPr sz="1600" b="0" i="0" dirty="0">
@@ -16884,7 +20127,7 @@
                 </a:solidFill>
                 <a:latin typeface="Segoe UI"/>
               </a:rPr>
-              <a:t> la </a:t>
+              <a:t>la </a:t>
             </a:r>
             <a:r>
               <a:rPr sz="1600" b="0" i="0" dirty="0" err="1">
@@ -17379,7 +20622,7 @@
     </a:clrScheme>
     <a:fontScheme name="Retrospect">
       <a:majorFont>
-        <a:latin typeface="Bookman Old Style" panose="020F0302020204030204"/>
+        <a:latin typeface="Bookman Old Style"/>
         <a:ea typeface=""/>
         <a:cs typeface=""/>
         <a:font script="Jpan" typeface="ＭＳ Ｐゴシック"/>
@@ -17414,7 +20657,7 @@
         <a:font script="Geor" typeface="Sylfaen"/>
       </a:majorFont>
       <a:minorFont>
-        <a:latin typeface="Franklin Gothic Book" panose="020F0502020204030204"/>
+        <a:latin typeface="Franklin Gothic Book"/>
         <a:ea typeface=""/>
         <a:cs typeface=""/>
         <a:font script="Jpan" typeface="ＭＳ Ｐゴシック"/>
@@ -17613,19 +20856,30 @@
   <a:extraClrSchemeLst/>
   <a:extLst>
     <a:ext uri="{05A4C25C-085E-4340-85A3-A5531E510DB2}">
-      <thm15:themeFamily xmlns:thm15="http://schemas.microsoft.com/office/thememl/2012/main" name="TWO.pptx" id="{80AA9D2D-EE59-4148-A11E-A51EEE828B28}" vid="{AEAFD717-D3C8-4034-8F7E-D5220B0CCEB8}"/>
+      <thm15:themeFamily xmlns:thm15="http://schemas.microsoft.com/office/thememl/2012/main" xmlns="" name="TWO.pptx" id="{80AA9D2D-EE59-4148-A11E-A51EEE828B28}" vid="{AEAFD717-D3C8-4034-8F7E-D5220B0CCEB8}"/>
     </a:ext>
   </a:extLst>
 </a:theme>
 </file>
 
 <file path=customXml/item1.xml><?xml version="1.0" encoding="utf-8"?>
-<?mso-contentType ?>
-<FormTemplates xmlns="http://schemas.microsoft.com/sharepoint/v3/contenttype/forms">
-  <Display>DocumentLibraryForm</Display>
-  <Edit>DocumentLibraryForm</Edit>
-  <New>DocumentLibraryForm</New>
-</FormTemplates>
+<p:properties xmlns:p="http://schemas.microsoft.com/office/2006/metadata/properties" xmlns:xsi="http://www.w3.org/2001/XMLSchema-instance" xmlns:pc="http://schemas.microsoft.com/office/infopath/2007/PartnerControls">
+  <documentManagement>
+    <_ip_UnifiedCompliancePolicyUIAction xmlns="http://schemas.microsoft.com/sharepoint/v3" xsi:nil="true"/>
+    <Image xmlns="71af3243-3dd4-4a8d-8c0d-dd76da1f02a5">
+      <Url xsi:nil="true"/>
+      <Description xsi:nil="true"/>
+    </Image>
+    <Status xmlns="71af3243-3dd4-4a8d-8c0d-dd76da1f02a5">Not started</Status>
+    <Background xmlns="71af3243-3dd4-4a8d-8c0d-dd76da1f02a5">false</Background>
+    <_ip_UnifiedCompliancePolicyProperties xmlns="http://schemas.microsoft.com/sharepoint/v3" xsi:nil="true"/>
+    <ImageTagsTaxHTField xmlns="71af3243-3dd4-4a8d-8c0d-dd76da1f02a5">
+      <Terms xmlns="http://schemas.microsoft.com/office/infopath/2007/PartnerControls"/>
+    </ImageTagsTaxHTField>
+    <TaxCatchAll xmlns="230e9df3-be65-4c73-a93b-d1236ebd677e" xsi:nil="true"/>
+    <MediaServiceKeyPoints xmlns="71af3243-3dd4-4a8d-8c0d-dd76da1f02a5" xsi:nil="true"/>
+  </documentManagement>
+</p:properties>
 </file>
 
 <file path=customXml/item2.xml><?xml version="1.0" encoding="utf-8"?>
@@ -17935,29 +21189,22 @@
 </file>
 
 <file path=customXml/item3.xml><?xml version="1.0" encoding="utf-8"?>
-<p:properties xmlns:p="http://schemas.microsoft.com/office/2006/metadata/properties" xmlns:xsi="http://www.w3.org/2001/XMLSchema-instance" xmlns:pc="http://schemas.microsoft.com/office/infopath/2007/PartnerControls">
-  <documentManagement>
-    <_ip_UnifiedCompliancePolicyUIAction xmlns="http://schemas.microsoft.com/sharepoint/v3" xsi:nil="true"/>
-    <Image xmlns="71af3243-3dd4-4a8d-8c0d-dd76da1f02a5">
-      <Url xsi:nil="true"/>
-      <Description xsi:nil="true"/>
-    </Image>
-    <Status xmlns="71af3243-3dd4-4a8d-8c0d-dd76da1f02a5">Not started</Status>
-    <Background xmlns="71af3243-3dd4-4a8d-8c0d-dd76da1f02a5">false</Background>
-    <_ip_UnifiedCompliancePolicyProperties xmlns="http://schemas.microsoft.com/sharepoint/v3" xsi:nil="true"/>
-    <ImageTagsTaxHTField xmlns="71af3243-3dd4-4a8d-8c0d-dd76da1f02a5">
-      <Terms xmlns="http://schemas.microsoft.com/office/infopath/2007/PartnerControls"/>
-    </ImageTagsTaxHTField>
-    <TaxCatchAll xmlns="230e9df3-be65-4c73-a93b-d1236ebd677e" xsi:nil="true"/>
-    <MediaServiceKeyPoints xmlns="71af3243-3dd4-4a8d-8c0d-dd76da1f02a5" xsi:nil="true"/>
-  </documentManagement>
-</p:properties>
+<?mso-contentType ?>
+<FormTemplates xmlns="http://schemas.microsoft.com/sharepoint/v3/contenttype/forms">
+  <Display>DocumentLibraryForm</Display>
+  <Edit>DocumentLibraryForm</Edit>
+  <New>DocumentLibraryForm</New>
+</FormTemplates>
 </file>
 
 <file path=customXml/itemProps1.xml><?xml version="1.0" encoding="utf-8"?>
-<ds:datastoreItem xmlns:ds="http://schemas.openxmlformats.org/officeDocument/2006/customXml" ds:itemID="{19DAD249-BF80-48EF-9AFB-36A11BCDC2CE}">
+<ds:datastoreItem xmlns:ds="http://schemas.openxmlformats.org/officeDocument/2006/customXml" ds:itemID="{6F4F4D41-822D-40F2-A7AC-E4E6CB36CA7A}">
   <ds:schemaRefs>
-    <ds:schemaRef ds:uri="http://schemas.microsoft.com/sharepoint/v3/contenttype/forms"/>
+    <ds:schemaRef ds:uri="http://schemas.microsoft.com/office/2006/metadata/properties"/>
+    <ds:schemaRef ds:uri="http://schemas.microsoft.com/office/infopath/2007/PartnerControls"/>
+    <ds:schemaRef ds:uri="http://schemas.microsoft.com/sharepoint/v3"/>
+    <ds:schemaRef ds:uri="71af3243-3dd4-4a8d-8c0d-dd76da1f02a5"/>
+    <ds:schemaRef ds:uri="230e9df3-be65-4c73-a93b-d1236ebd677e"/>
   </ds:schemaRefs>
 </ds:datastoreItem>
 </file>
@@ -17984,13 +21231,9 @@
 </file>
 
 <file path=customXml/itemProps3.xml><?xml version="1.0" encoding="utf-8"?>
-<ds:datastoreItem xmlns:ds="http://schemas.openxmlformats.org/officeDocument/2006/customXml" ds:itemID="{6F4F4D41-822D-40F2-A7AC-E4E6CB36CA7A}">
+<ds:datastoreItem xmlns:ds="http://schemas.openxmlformats.org/officeDocument/2006/customXml" ds:itemID="{19DAD249-BF80-48EF-9AFB-36A11BCDC2CE}">
   <ds:schemaRefs>
-    <ds:schemaRef ds:uri="http://schemas.microsoft.com/office/2006/metadata/properties"/>
-    <ds:schemaRef ds:uri="http://schemas.microsoft.com/office/infopath/2007/PartnerControls"/>
-    <ds:schemaRef ds:uri="http://schemas.microsoft.com/sharepoint/v3"/>
-    <ds:schemaRef ds:uri="71af3243-3dd4-4a8d-8c0d-dd76da1f02a5"/>
-    <ds:schemaRef ds:uri="230e9df3-be65-4c73-a93b-d1236ebd677e"/>
+    <ds:schemaRef ds:uri="http://schemas.microsoft.com/sharepoint/v3/contenttype/forms"/>
   </ds:schemaRefs>
 </ds:datastoreItem>
 </file>
--- a/Testarea property-based folosind QuickCheck.pptx
+++ b/Testarea property-based folosind QuickCheck.pptx
@@ -22,8 +22,16 @@
     <p:sldId id="263" r:id="rId19"/>
     <p:sldId id="264" r:id="rId20"/>
     <p:sldId id="273" r:id="rId21"/>
-    <p:sldId id="265" r:id="rId22"/>
-    <p:sldId id="274" r:id="rId23"/>
+    <p:sldId id="277" r:id="rId22"/>
+    <p:sldId id="278" r:id="rId23"/>
+    <p:sldId id="279" r:id="rId24"/>
+    <p:sldId id="280" r:id="rId25"/>
+    <p:sldId id="281" r:id="rId26"/>
+    <p:sldId id="282" r:id="rId27"/>
+    <p:sldId id="283" r:id="rId28"/>
+    <p:sldId id="284" r:id="rId29"/>
+    <p:sldId id="265" r:id="rId30"/>
+    <p:sldId id="274" r:id="rId31"/>
   </p:sldIdLst>
   <p:sldSz cx="12192000" cy="6858000"/>
   <p:notesSz cx="6858000" cy="9144000"/>
@@ -124,7 +132,7 @@
   </p:defaultTextStyle>
   <p:extLst>
     <p:ext uri="{EFAFB233-063F-42B5-8137-9DF3F51BA10A}">
-      <p15:sldGuideLst xmlns:p15="http://schemas.microsoft.com/office/powerpoint/2012/main" xmlns=""/>
+      <p15:sldGuideLst xmlns="" xmlns:p15="http://schemas.microsoft.com/office/powerpoint/2012/main"/>
     </p:ext>
   </p:extLst>
 </p:presentation>
@@ -152,7 +160,7 @@
           <p:cNvPr id="10" name="Rectangle 9">
             <a:extLst>
               <a:ext uri="{FF2B5EF4-FFF2-40B4-BE49-F238E27FC236}">
-                <a16:creationId xmlns:a16="http://schemas.microsoft.com/office/drawing/2014/main" xmlns="" id="{39E3965E-AC41-4711-9D10-E25ABB132D86}"/>
+                <a16:creationId xmlns="" xmlns:a16="http://schemas.microsoft.com/office/drawing/2014/main" id="{39E3965E-AC41-4711-9D10-E25ABB132D86}"/>
               </a:ext>
             </a:extLst>
           </p:cNvPr>
@@ -312,7 +320,7 @@
           <p:cNvPr id="9" name="Straight Connector 8">
             <a:extLst>
               <a:ext uri="{FF2B5EF4-FFF2-40B4-BE49-F238E27FC236}">
-                <a16:creationId xmlns:a16="http://schemas.microsoft.com/office/drawing/2014/main" xmlns="" id="{1F5DC8C3-BA5F-4EED-BB9A-A14272BD82A1}"/>
+                <a16:creationId xmlns="" xmlns:a16="http://schemas.microsoft.com/office/drawing/2014/main" id="{1F5DC8C3-BA5F-4EED-BB9A-A14272BD82A1}"/>
               </a:ext>
             </a:extLst>
           </p:cNvPr>
@@ -356,7 +364,7 @@
           <p:cNvPr id="4" name="Date Placeholder 3">
             <a:extLst>
               <a:ext uri="{FF2B5EF4-FFF2-40B4-BE49-F238E27FC236}">
-                <a16:creationId xmlns:a16="http://schemas.microsoft.com/office/drawing/2014/main" xmlns="" id="{9925CCF1-92C0-4AF3-BFAF-4921631915AB}"/>
+                <a16:creationId xmlns="" xmlns:a16="http://schemas.microsoft.com/office/drawing/2014/main" id="{9925CCF1-92C0-4AF3-BFAF-4921631915AB}"/>
               </a:ext>
             </a:extLst>
           </p:cNvPr>
@@ -385,7 +393,7 @@
           <p:cNvPr id="5" name="Footer Placeholder 4">
             <a:extLst>
               <a:ext uri="{FF2B5EF4-FFF2-40B4-BE49-F238E27FC236}">
-                <a16:creationId xmlns:a16="http://schemas.microsoft.com/office/drawing/2014/main" xmlns="" id="{051A78A9-3DFF-4937-A9F2-5D8CF495F367}"/>
+                <a16:creationId xmlns="" xmlns:a16="http://schemas.microsoft.com/office/drawing/2014/main" id="{051A78A9-3DFF-4937-A9F2-5D8CF495F367}"/>
               </a:ext>
             </a:extLst>
           </p:cNvPr>
@@ -410,7 +418,7 @@
           <p:cNvPr id="6" name="Slide Number Placeholder 5">
             <a:extLst>
               <a:ext uri="{FF2B5EF4-FFF2-40B4-BE49-F238E27FC236}">
-                <a16:creationId xmlns:a16="http://schemas.microsoft.com/office/drawing/2014/main" xmlns="" id="{5FAEB271-5CC0-4759-BC6E-8BE53AB227C0}"/>
+                <a16:creationId xmlns="" xmlns:a16="http://schemas.microsoft.com/office/drawing/2014/main" id="{5FAEB271-5CC0-4759-BC6E-8BE53AB227C0}"/>
               </a:ext>
             </a:extLst>
           </p:cNvPr>
@@ -544,7 +552,7 @@
           <p:cNvPr id="7" name="Date Placeholder 6">
             <a:extLst>
               <a:ext uri="{FF2B5EF4-FFF2-40B4-BE49-F238E27FC236}">
-                <a16:creationId xmlns:a16="http://schemas.microsoft.com/office/drawing/2014/main" xmlns="" id="{7D5506EE-1026-4F35-9ACC-BD05BE0F9B36}"/>
+                <a16:creationId xmlns="" xmlns:a16="http://schemas.microsoft.com/office/drawing/2014/main" id="{7D5506EE-1026-4F35-9ACC-BD05BE0F9B36}"/>
               </a:ext>
             </a:extLst>
           </p:cNvPr>
@@ -573,7 +581,7 @@
           <p:cNvPr id="8" name="Footer Placeholder 7">
             <a:extLst>
               <a:ext uri="{FF2B5EF4-FFF2-40B4-BE49-F238E27FC236}">
-                <a16:creationId xmlns:a16="http://schemas.microsoft.com/office/drawing/2014/main" xmlns="" id="{B7696E5F-8D95-4450-AE52-5438E6EDE2BF}"/>
+                <a16:creationId xmlns="" xmlns:a16="http://schemas.microsoft.com/office/drawing/2014/main" id="{B7696E5F-8D95-4450-AE52-5438E6EDE2BF}"/>
               </a:ext>
             </a:extLst>
           </p:cNvPr>
@@ -598,7 +606,7 @@
           <p:cNvPr id="9" name="Slide Number Placeholder 8">
             <a:extLst>
               <a:ext uri="{FF2B5EF4-FFF2-40B4-BE49-F238E27FC236}">
-                <a16:creationId xmlns:a16="http://schemas.microsoft.com/office/drawing/2014/main" xmlns="" id="{999B2253-74CC-409E-BEB0-F8EFCFCB5629}"/>
+                <a16:creationId xmlns="" xmlns:a16="http://schemas.microsoft.com/office/drawing/2014/main" id="{999B2253-74CC-409E-BEB0-F8EFCFCB5629}"/>
               </a:ext>
             </a:extLst>
           </p:cNvPr>
@@ -657,7 +665,7 @@
           <p:cNvPr id="9" name="Rectangle 8">
             <a:extLst>
               <a:ext uri="{FF2B5EF4-FFF2-40B4-BE49-F238E27FC236}">
-                <a16:creationId xmlns:a16="http://schemas.microsoft.com/office/drawing/2014/main" xmlns="" id="{E1B68A5B-D9FA-424B-A4EB-30E7223836B3}"/>
+                <a16:creationId xmlns="" xmlns:a16="http://schemas.microsoft.com/office/drawing/2014/main" id="{E1B68A5B-D9FA-424B-A4EB-30E7223836B3}"/>
               </a:ext>
             </a:extLst>
           </p:cNvPr>
@@ -786,7 +794,7 @@
           <p:cNvPr id="7" name="Date Placeholder 6">
             <a:extLst>
               <a:ext uri="{FF2B5EF4-FFF2-40B4-BE49-F238E27FC236}">
-                <a16:creationId xmlns:a16="http://schemas.microsoft.com/office/drawing/2014/main" xmlns="" id="{AF33D6B0-F070-45C4-A472-19F432BE3932}"/>
+                <a16:creationId xmlns="" xmlns:a16="http://schemas.microsoft.com/office/drawing/2014/main" id="{AF33D6B0-F070-45C4-A472-19F432BE3932}"/>
               </a:ext>
             </a:extLst>
           </p:cNvPr>
@@ -815,7 +823,7 @@
           <p:cNvPr id="8" name="Footer Placeholder 7">
             <a:extLst>
               <a:ext uri="{FF2B5EF4-FFF2-40B4-BE49-F238E27FC236}">
-                <a16:creationId xmlns:a16="http://schemas.microsoft.com/office/drawing/2014/main" xmlns="" id="{9975399F-DAB2-410D-967F-ED17E6F796E7}"/>
+                <a16:creationId xmlns="" xmlns:a16="http://schemas.microsoft.com/office/drawing/2014/main" id="{9975399F-DAB2-410D-967F-ED17E6F796E7}"/>
               </a:ext>
             </a:extLst>
           </p:cNvPr>
@@ -840,7 +848,7 @@
           <p:cNvPr id="10" name="Slide Number Placeholder 9">
             <a:extLst>
               <a:ext uri="{FF2B5EF4-FFF2-40B4-BE49-F238E27FC236}">
-                <a16:creationId xmlns:a16="http://schemas.microsoft.com/office/drawing/2014/main" xmlns="" id="{F762A46F-6BE5-4D12-9412-5CA7672EA8EC}"/>
+                <a16:creationId xmlns="" xmlns:a16="http://schemas.microsoft.com/office/drawing/2014/main" id="{F762A46F-6BE5-4D12-9412-5CA7672EA8EC}"/>
               </a:ext>
             </a:extLst>
           </p:cNvPr>
@@ -974,7 +982,7 @@
           <p:cNvPr id="7" name="Date Placeholder 6">
             <a:extLst>
               <a:ext uri="{FF2B5EF4-FFF2-40B4-BE49-F238E27FC236}">
-                <a16:creationId xmlns:a16="http://schemas.microsoft.com/office/drawing/2014/main" xmlns="" id="{354D8B55-9EA8-4B81-8E84-9B93B0A27559}"/>
+                <a16:creationId xmlns="" xmlns:a16="http://schemas.microsoft.com/office/drawing/2014/main" id="{354D8B55-9EA8-4B81-8E84-9B93B0A27559}"/>
               </a:ext>
             </a:extLst>
           </p:cNvPr>
@@ -1003,7 +1011,7 @@
           <p:cNvPr id="8" name="Footer Placeholder 7">
             <a:extLst>
               <a:ext uri="{FF2B5EF4-FFF2-40B4-BE49-F238E27FC236}">
-                <a16:creationId xmlns:a16="http://schemas.microsoft.com/office/drawing/2014/main" xmlns="" id="{062CA021-2578-47CB-822C-BDDFF7223B28}"/>
+                <a16:creationId xmlns="" xmlns:a16="http://schemas.microsoft.com/office/drawing/2014/main" id="{062CA021-2578-47CB-822C-BDDFF7223B28}"/>
               </a:ext>
             </a:extLst>
           </p:cNvPr>
@@ -1028,7 +1036,7 @@
           <p:cNvPr id="9" name="Slide Number Placeholder 8">
             <a:extLst>
               <a:ext uri="{FF2B5EF4-FFF2-40B4-BE49-F238E27FC236}">
-                <a16:creationId xmlns:a16="http://schemas.microsoft.com/office/drawing/2014/main" xmlns="" id="{C4AAB51D-4141-4682-9375-DAFD5FB9DD10}"/>
+                <a16:creationId xmlns="" xmlns:a16="http://schemas.microsoft.com/office/drawing/2014/main" id="{C4AAB51D-4141-4682-9375-DAFD5FB9DD10}"/>
               </a:ext>
             </a:extLst>
           </p:cNvPr>
@@ -1095,7 +1103,7 @@
           <p:cNvPr id="10" name="Rectangle 9">
             <a:extLst>
               <a:ext uri="{FF2B5EF4-FFF2-40B4-BE49-F238E27FC236}">
-                <a16:creationId xmlns:a16="http://schemas.microsoft.com/office/drawing/2014/main" xmlns="" id="{A585C21A-8B93-4657-B5DF-7EAEAD3BE127}"/>
+                <a16:creationId xmlns="" xmlns:a16="http://schemas.microsoft.com/office/drawing/2014/main" id="{A585C21A-8B93-4657-B5DF-7EAEAD3BE127}"/>
               </a:ext>
             </a:extLst>
           </p:cNvPr>
@@ -1303,7 +1311,7 @@
           <p:cNvPr id="9" name="Straight Connector 8">
             <a:extLst>
               <a:ext uri="{FF2B5EF4-FFF2-40B4-BE49-F238E27FC236}">
-                <a16:creationId xmlns:a16="http://schemas.microsoft.com/office/drawing/2014/main" xmlns="" id="{459DE2C1-4C52-40A3-8959-27B2C1BEBFF6}"/>
+                <a16:creationId xmlns="" xmlns:a16="http://schemas.microsoft.com/office/drawing/2014/main" id="{459DE2C1-4C52-40A3-8959-27B2C1BEBFF6}"/>
               </a:ext>
             </a:extLst>
           </p:cNvPr>
@@ -1347,7 +1355,7 @@
           <p:cNvPr id="7" name="Date Placeholder 6">
             <a:extLst>
               <a:ext uri="{FF2B5EF4-FFF2-40B4-BE49-F238E27FC236}">
-                <a16:creationId xmlns:a16="http://schemas.microsoft.com/office/drawing/2014/main" xmlns="" id="{AAF2E137-EC28-48F8-9198-1F02539029B6}"/>
+                <a16:creationId xmlns="" xmlns:a16="http://schemas.microsoft.com/office/drawing/2014/main" id="{AAF2E137-EC28-48F8-9198-1F02539029B6}"/>
               </a:ext>
             </a:extLst>
           </p:cNvPr>
@@ -1376,7 +1384,7 @@
           <p:cNvPr id="8" name="Footer Placeholder 7">
             <a:extLst>
               <a:ext uri="{FF2B5EF4-FFF2-40B4-BE49-F238E27FC236}">
-                <a16:creationId xmlns:a16="http://schemas.microsoft.com/office/drawing/2014/main" xmlns="" id="{189422CD-6F62-4DD6-89EF-07A60B42D219}"/>
+                <a16:creationId xmlns="" xmlns:a16="http://schemas.microsoft.com/office/drawing/2014/main" id="{189422CD-6F62-4DD6-89EF-07A60B42D219}"/>
               </a:ext>
             </a:extLst>
           </p:cNvPr>
@@ -1401,7 +1409,7 @@
           <p:cNvPr id="11" name="Slide Number Placeholder 10">
             <a:extLst>
               <a:ext uri="{FF2B5EF4-FFF2-40B4-BE49-F238E27FC236}">
-                <a16:creationId xmlns:a16="http://schemas.microsoft.com/office/drawing/2014/main" xmlns="" id="{69C6AFF8-42B4-4D05-969B-9F5FB3355555}"/>
+                <a16:creationId xmlns="" xmlns:a16="http://schemas.microsoft.com/office/drawing/2014/main" id="{69C6AFF8-42B4-4D05-969B-9F5FB3355555}"/>
               </a:ext>
             </a:extLst>
           </p:cNvPr>
@@ -1602,7 +1610,7 @@
           <p:cNvPr id="2" name="Date Placeholder 1">
             <a:extLst>
               <a:ext uri="{FF2B5EF4-FFF2-40B4-BE49-F238E27FC236}">
-                <a16:creationId xmlns:a16="http://schemas.microsoft.com/office/drawing/2014/main" xmlns="" id="{5782D47D-B0DC-4C40-BCC6-BBBA32584A38}"/>
+                <a16:creationId xmlns="" xmlns:a16="http://schemas.microsoft.com/office/drawing/2014/main" id="{5782D47D-B0DC-4C40-BCC6-BBBA32584A38}"/>
               </a:ext>
             </a:extLst>
           </p:cNvPr>
@@ -1631,7 +1639,7 @@
           <p:cNvPr id="9" name="Footer Placeholder 8">
             <a:extLst>
               <a:ext uri="{FF2B5EF4-FFF2-40B4-BE49-F238E27FC236}">
-                <a16:creationId xmlns:a16="http://schemas.microsoft.com/office/drawing/2014/main" xmlns="" id="{4690D34E-7EBD-44B2-83CA-4C126A18D7EF}"/>
+                <a16:creationId xmlns="" xmlns:a16="http://schemas.microsoft.com/office/drawing/2014/main" id="{4690D34E-7EBD-44B2-83CA-4C126A18D7EF}"/>
               </a:ext>
             </a:extLst>
           </p:cNvPr>
@@ -1656,7 +1664,7 @@
           <p:cNvPr id="10" name="Slide Number Placeholder 9">
             <a:extLst>
               <a:ext uri="{FF2B5EF4-FFF2-40B4-BE49-F238E27FC236}">
-                <a16:creationId xmlns:a16="http://schemas.microsoft.com/office/drawing/2014/main" xmlns="" id="{2AC511A1-9BBD-42DE-92FB-2AF44F8E97A9}"/>
+                <a16:creationId xmlns="" xmlns:a16="http://schemas.microsoft.com/office/drawing/2014/main" id="{2AC511A1-9BBD-42DE-92FB-2AF44F8E97A9}"/>
               </a:ext>
             </a:extLst>
           </p:cNvPr>
@@ -1999,7 +2007,7 @@
           <p:cNvPr id="2" name="Date Placeholder 1">
             <a:extLst>
               <a:ext uri="{FF2B5EF4-FFF2-40B4-BE49-F238E27FC236}">
-                <a16:creationId xmlns:a16="http://schemas.microsoft.com/office/drawing/2014/main" xmlns="" id="{8AF8A515-AA94-45D1-9223-5C2272618D85}"/>
+                <a16:creationId xmlns="" xmlns:a16="http://schemas.microsoft.com/office/drawing/2014/main" id="{8AF8A515-AA94-45D1-9223-5C2272618D85}"/>
               </a:ext>
             </a:extLst>
           </p:cNvPr>
@@ -2028,7 +2036,7 @@
           <p:cNvPr id="11" name="Footer Placeholder 10">
             <a:extLst>
               <a:ext uri="{FF2B5EF4-FFF2-40B4-BE49-F238E27FC236}">
-                <a16:creationId xmlns:a16="http://schemas.microsoft.com/office/drawing/2014/main" xmlns="" id="{D052F5BC-98E0-4D60-AD67-9547738B7DD4}"/>
+                <a16:creationId xmlns="" xmlns:a16="http://schemas.microsoft.com/office/drawing/2014/main" id="{D052F5BC-98E0-4D60-AD67-9547738B7DD4}"/>
               </a:ext>
             </a:extLst>
           </p:cNvPr>
@@ -2053,7 +2061,7 @@
           <p:cNvPr id="12" name="Slide Number Placeholder 11">
             <a:extLst>
               <a:ext uri="{FF2B5EF4-FFF2-40B4-BE49-F238E27FC236}">
-                <a16:creationId xmlns:a16="http://schemas.microsoft.com/office/drawing/2014/main" xmlns="" id="{A38552DC-952E-41EA-AAAF-C2187523C0B0}"/>
+                <a16:creationId xmlns="" xmlns:a16="http://schemas.microsoft.com/office/drawing/2014/main" id="{A38552DC-952E-41EA-AAAF-C2187523C0B0}"/>
               </a:ext>
             </a:extLst>
           </p:cNvPr>
@@ -2135,7 +2143,7 @@
           <p:cNvPr id="6" name="Date Placeholder 5">
             <a:extLst>
               <a:ext uri="{FF2B5EF4-FFF2-40B4-BE49-F238E27FC236}">
-                <a16:creationId xmlns:a16="http://schemas.microsoft.com/office/drawing/2014/main" xmlns="" id="{7392073F-158F-44A3-8913-917AFFC1BC20}"/>
+                <a16:creationId xmlns="" xmlns:a16="http://schemas.microsoft.com/office/drawing/2014/main" id="{7392073F-158F-44A3-8913-917AFFC1BC20}"/>
               </a:ext>
             </a:extLst>
           </p:cNvPr>
@@ -2164,7 +2172,7 @@
           <p:cNvPr id="7" name="Footer Placeholder 6">
             <a:extLst>
               <a:ext uri="{FF2B5EF4-FFF2-40B4-BE49-F238E27FC236}">
-                <a16:creationId xmlns:a16="http://schemas.microsoft.com/office/drawing/2014/main" xmlns="" id="{EED72207-24CA-42B7-A975-2F8E41CBA904}"/>
+                <a16:creationId xmlns="" xmlns:a16="http://schemas.microsoft.com/office/drawing/2014/main" id="{EED72207-24CA-42B7-A975-2F8E41CBA904}"/>
               </a:ext>
             </a:extLst>
           </p:cNvPr>
@@ -2189,7 +2197,7 @@
           <p:cNvPr id="8" name="Slide Number Placeholder 7">
             <a:extLst>
               <a:ext uri="{FF2B5EF4-FFF2-40B4-BE49-F238E27FC236}">
-                <a16:creationId xmlns:a16="http://schemas.microsoft.com/office/drawing/2014/main" xmlns="" id="{D01080F2-251A-4B88-9A62-16F46D724F83}"/>
+                <a16:creationId xmlns="" xmlns:a16="http://schemas.microsoft.com/office/drawing/2014/main" id="{D01080F2-251A-4B88-9A62-16F46D724F83}"/>
               </a:ext>
             </a:extLst>
           </p:cNvPr>
@@ -2248,7 +2256,7 @@
           <p:cNvPr id="10" name="Rectangle 9">
             <a:extLst>
               <a:ext uri="{FF2B5EF4-FFF2-40B4-BE49-F238E27FC236}">
-                <a16:creationId xmlns:a16="http://schemas.microsoft.com/office/drawing/2014/main" xmlns="" id="{A8E9C91B-7EAD-4562-AB0E-DFB9663AECE3}"/>
+                <a16:creationId xmlns="" xmlns:a16="http://schemas.microsoft.com/office/drawing/2014/main" id="{A8E9C91B-7EAD-4562-AB0E-DFB9663AECE3}"/>
               </a:ext>
             </a:extLst>
           </p:cNvPr>
@@ -2292,7 +2300,7 @@
           <p:cNvPr id="2" name="Date Placeholder 1">
             <a:extLst>
               <a:ext uri="{FF2B5EF4-FFF2-40B4-BE49-F238E27FC236}">
-                <a16:creationId xmlns:a16="http://schemas.microsoft.com/office/drawing/2014/main" xmlns="" id="{94E9223F-721F-47BF-9FD5-0F8D12FF0DE1}"/>
+                <a16:creationId xmlns="" xmlns:a16="http://schemas.microsoft.com/office/drawing/2014/main" id="{94E9223F-721F-47BF-9FD5-0F8D12FF0DE1}"/>
               </a:ext>
             </a:extLst>
           </p:cNvPr>
@@ -2321,7 +2329,7 @@
           <p:cNvPr id="3" name="Footer Placeholder 2">
             <a:extLst>
               <a:ext uri="{FF2B5EF4-FFF2-40B4-BE49-F238E27FC236}">
-                <a16:creationId xmlns:a16="http://schemas.microsoft.com/office/drawing/2014/main" xmlns="" id="{05915714-6BBA-4593-8591-4E26F7D58D9F}"/>
+                <a16:creationId xmlns="" xmlns:a16="http://schemas.microsoft.com/office/drawing/2014/main" id="{05915714-6BBA-4593-8591-4E26F7D58D9F}"/>
               </a:ext>
             </a:extLst>
           </p:cNvPr>
@@ -2346,7 +2354,7 @@
           <p:cNvPr id="4" name="Slide Number Placeholder 3">
             <a:extLst>
               <a:ext uri="{FF2B5EF4-FFF2-40B4-BE49-F238E27FC236}">
-                <a16:creationId xmlns:a16="http://schemas.microsoft.com/office/drawing/2014/main" xmlns="" id="{BE06F857-D2E1-44DD-ABDD-EBB739645B67}"/>
+                <a16:creationId xmlns="" xmlns:a16="http://schemas.microsoft.com/office/drawing/2014/main" id="{BE06F857-D2E1-44DD-ABDD-EBB739645B67}"/>
               </a:ext>
             </a:extLst>
           </p:cNvPr>
@@ -2405,7 +2413,7 @@
           <p:cNvPr id="8" name="Rectangle 7">
             <a:extLst>
               <a:ext uri="{FF2B5EF4-FFF2-40B4-BE49-F238E27FC236}">
-                <a16:creationId xmlns:a16="http://schemas.microsoft.com/office/drawing/2014/main" xmlns="" id="{16D90D66-BCB9-4229-A829-628874352AC0}"/>
+                <a16:creationId xmlns="" xmlns:a16="http://schemas.microsoft.com/office/drawing/2014/main" id="{16D90D66-BCB9-4229-A829-628874352AC0}"/>
               </a:ext>
             </a:extLst>
           </p:cNvPr>
@@ -2744,7 +2752,7 @@
           <p:cNvPr id="8" name="Rectangle 7">
             <a:extLst>
               <a:ext uri="{FF2B5EF4-FFF2-40B4-BE49-F238E27FC236}">
-                <a16:creationId xmlns:a16="http://schemas.microsoft.com/office/drawing/2014/main" xmlns="" id="{DA134939-39C0-4522-A125-A13DFDA66490}"/>
+                <a16:creationId xmlns="" xmlns:a16="http://schemas.microsoft.com/office/drawing/2014/main" id="{DA134939-39C0-4522-A125-A13DFDA66490}"/>
               </a:ext>
             </a:extLst>
           </p:cNvPr>
@@ -3083,7 +3091,7 @@
           <p:cNvPr id="7" name="Rectangle 6">
             <a:extLst>
               <a:ext uri="{FF2B5EF4-FFF2-40B4-BE49-F238E27FC236}">
-                <a16:creationId xmlns:a16="http://schemas.microsoft.com/office/drawing/2014/main" xmlns="" id="{416A0E3C-60E6-4F39-BC55-5F7C224E1F7C}"/>
+                <a16:creationId xmlns="" xmlns:a16="http://schemas.microsoft.com/office/drawing/2014/main" id="{416A0E3C-60E6-4F39-BC55-5F7C224E1F7C}"/>
               </a:ext>
             </a:extLst>
           </p:cNvPr>
@@ -3335,7 +3343,7 @@
           <p:cNvPr id="10" name="Straight Connector 9">
             <a:extLst>
               <a:ext uri="{FF2B5EF4-FFF2-40B4-BE49-F238E27FC236}">
-                <a16:creationId xmlns:a16="http://schemas.microsoft.com/office/drawing/2014/main" xmlns="" id="{C5025DAC-8B93-4160-B017-3A274A5828C0}"/>
+                <a16:creationId xmlns="" xmlns:a16="http://schemas.microsoft.com/office/drawing/2014/main" id="{C5025DAC-8B93-4160-B017-3A274A5828C0}"/>
               </a:ext>
             </a:extLst>
           </p:cNvPr>
@@ -3882,21 +3890,7 @@
                 <a:ea typeface="+mj-ea"/>
                 <a:cs typeface="+mj-cs"/>
               </a:rPr>
-              <a:t>Formale in Ingineria </a:t>
-            </a:r>
-            <a:r>
-              <a:rPr lang="it-IT" sz="1400" spc="-50" dirty="0">
-                <a:solidFill>
-                  <a:schemeClr val="tx1">
-                    <a:lumMod val="85000"/>
-                    <a:lumOff val="15000"/>
-                  </a:schemeClr>
-                </a:solidFill>
-                <a:latin typeface="+mj-lt"/>
-                <a:ea typeface="+mj-ea"/>
-                <a:cs typeface="+mj-cs"/>
-              </a:rPr>
-              <a:t>Software</a:t>
+              <a:t>Formale in Ingineria Software</a:t>
             </a:r>
             <a:endParaRPr sz="1400" spc="-50" dirty="0">
               <a:solidFill>
@@ -4036,21 +4030,7 @@
                 <a:ea typeface="+mj-ea"/>
                 <a:cs typeface="+mj-cs"/>
               </a:rPr>
-              <a:t> </a:t>
-            </a:r>
-            <a:r>
-              <a:rPr lang="en-US" sz="1400" spc="-50" dirty="0">
-                <a:solidFill>
-                  <a:schemeClr val="tx1">
-                    <a:lumMod val="85000"/>
-                    <a:lumOff val="15000"/>
-                  </a:schemeClr>
-                </a:solidFill>
-                <a:latin typeface="+mj-lt"/>
-                <a:ea typeface="+mj-ea"/>
-                <a:cs typeface="+mj-cs"/>
-              </a:rPr>
-              <a:t>DENISA </a:t>
+              <a:t> DENISA </a:t>
             </a:r>
             <a:r>
               <a:rPr lang="ro-RO" sz="1400" spc="-50" dirty="0">
@@ -8401,7 +8381,7 @@
           <p:cNvPr id="6" name="Content Placeholder 5">
             <a:extLst>
               <a:ext uri="{FF2B5EF4-FFF2-40B4-BE49-F238E27FC236}">
-                <a16:creationId xmlns:a16="http://schemas.microsoft.com/office/drawing/2014/main" xmlns="" id="{79473285-A0EB-EEFF-685E-F4C3C4112120}"/>
+                <a16:creationId xmlns="" xmlns:a16="http://schemas.microsoft.com/office/drawing/2014/main" id="{79473285-A0EB-EEFF-685E-F4C3C4112120}"/>
               </a:ext>
             </a:extLst>
           </p:cNvPr>
@@ -8862,7 +8842,7 @@
           <p:cNvPr id="7" name="Content Placeholder 6">
             <a:extLst>
               <a:ext uri="{FF2B5EF4-FFF2-40B4-BE49-F238E27FC236}">
-                <a16:creationId xmlns:a16="http://schemas.microsoft.com/office/drawing/2014/main" xmlns="" id="{73C5F9BF-9E45-7174-B44C-B1278054712F}"/>
+                <a16:creationId xmlns="" xmlns:a16="http://schemas.microsoft.com/office/drawing/2014/main" id="{73C5F9BF-9E45-7174-B44C-B1278054712F}"/>
               </a:ext>
             </a:extLst>
           </p:cNvPr>
@@ -10680,8 +10660,8 @@
         </p:nvSpPr>
         <p:spPr>
           <a:xfrm>
-            <a:off x="1097280" y="1783080"/>
-            <a:ext cx="4846320" cy="4526280"/>
+            <a:off x="1097280" y="2079425"/>
+            <a:ext cx="4846320" cy="3440842"/>
           </a:xfrm>
           <a:prstGeom prst="roundRect">
             <a:avLst/>
@@ -10726,8 +10706,8 @@
         </p:nvSpPr>
         <p:spPr>
           <a:xfrm>
-            <a:off x="6309360" y="1783080"/>
-            <a:ext cx="4846320" cy="4526280"/>
+            <a:off x="6309360" y="2079425"/>
+            <a:ext cx="4846320" cy="3440842"/>
           </a:xfrm>
           <a:prstGeom prst="roundRect">
             <a:avLst/>
@@ -10772,7 +10752,7 @@
         </p:nvSpPr>
         <p:spPr>
           <a:xfrm>
-            <a:off x="1325880" y="1965960"/>
+            <a:off x="1325880" y="2262305"/>
             <a:ext cx="4389120" cy="411480"/>
           </a:xfrm>
           <a:prstGeom prst="rect">
@@ -10814,8 +10794,8 @@
         </p:nvSpPr>
         <p:spPr>
           <a:xfrm>
-            <a:off x="1325880" y="2423160"/>
-            <a:ext cx="4389120" cy="2331720"/>
+            <a:off x="1325880" y="2584033"/>
+            <a:ext cx="4389120" cy="1772555"/>
           </a:xfrm>
           <a:prstGeom prst="roundRect">
             <a:avLst/>
@@ -10902,7 +10882,7 @@
         </p:nvSpPr>
         <p:spPr>
           <a:xfrm>
-            <a:off x="1490472" y="2788920"/>
+            <a:off x="1490472" y="3085265"/>
             <a:ext cx="4059935" cy="1874519"/>
           </a:xfrm>
           <a:prstGeom prst="rect">
@@ -11001,7 +10981,7 @@
         </p:nvSpPr>
         <p:spPr>
           <a:xfrm>
-            <a:off x="6537960" y="1965960"/>
+            <a:off x="6537960" y="2262305"/>
             <a:ext cx="4389120" cy="411480"/>
           </a:xfrm>
           <a:prstGeom prst="rect">
@@ -11043,7 +11023,7 @@
         </p:nvSpPr>
         <p:spPr>
           <a:xfrm>
-            <a:off x="6537960" y="2423160"/>
+            <a:off x="6537960" y="2719505"/>
             <a:ext cx="4389120" cy="3566160"/>
           </a:xfrm>
           <a:prstGeom prst="rect">
@@ -11535,94 +11515,6 @@
                 <a:latin typeface="Segoe UI"/>
               </a:rPr>
               <a:t> closed-expression</a:t>
-            </a:r>
-          </a:p>
-        </p:txBody>
-      </p:sp>
-      <p:sp>
-        <p:nvSpPr>
-          <p:cNvPr id="11" name="Rounded Rectangle 10"/>
-          <p:cNvSpPr/>
-          <p:nvPr/>
-        </p:nvSpPr>
-        <p:spPr>
-          <a:xfrm>
-            <a:off x="1097280" y="5897880"/>
-            <a:ext cx="10058400" cy="658368"/>
-          </a:xfrm>
-          <a:prstGeom prst="roundRect">
-            <a:avLst/>
-          </a:prstGeom>
-          <a:solidFill>
-            <a:srgbClr val="E8F1FF"/>
-          </a:solidFill>
-          <a:ln w="14604">
-            <a:solidFill>
-              <a:srgbClr val="B4CAE6"/>
-            </a:solidFill>
-          </a:ln>
-        </p:spPr>
-        <p:style>
-          <a:lnRef idx="1">
-            <a:schemeClr val="accent1"/>
-          </a:lnRef>
-          <a:fillRef idx="3">
-            <a:schemeClr val="accent1"/>
-          </a:fillRef>
-          <a:effectRef idx="2">
-            <a:schemeClr val="accent1"/>
-          </a:effectRef>
-          <a:fontRef idx="minor">
-            <a:schemeClr val="lt1"/>
-          </a:fontRef>
-        </p:style>
-        <p:txBody>
-          <a:bodyPr rtlCol="0" anchor="ctr"/>
-          <a:lstStyle/>
-          <a:p>
-            <a:pPr algn="ctr"/>
-            <a:endParaRPr/>
-          </a:p>
-        </p:txBody>
-      </p:sp>
-      <p:sp>
-        <p:nvSpPr>
-          <p:cNvPr id="12" name="TextBox 11"/>
-          <p:cNvSpPr txBox="1"/>
-          <p:nvPr/>
-        </p:nvSpPr>
-        <p:spPr>
-          <a:xfrm>
-            <a:off x="1325880" y="6035040"/>
-            <a:ext cx="9601200" cy="411480"/>
-          </a:xfrm>
-          <a:prstGeom prst="rect">
-            <a:avLst/>
-          </a:prstGeom>
-          <a:noFill/>
-        </p:spPr>
-        <p:txBody>
-          <a:bodyPr wrap="square">
-            <a:spAutoFit/>
-          </a:bodyPr>
-          <a:lstStyle/>
-          <a:p>
-            <a:pPr algn="l">
-              <a:spcBef>
-                <a:spcPts val="0"/>
-              </a:spcBef>
-              <a:spcAft>
-                <a:spcPts val="200"/>
-              </a:spcAft>
-            </a:pPr>
-            <a:r>
-              <a:rPr sz="1400" b="1" i="0">
-                <a:solidFill>
-                  <a:srgbClr val="1F4E79"/>
-                </a:solidFill>
-                <a:latin typeface="Segoe UI"/>
-              </a:rPr>
-              <a:t>Mesaj cheie: Pipeline-ul de testare este reproductibil si usor de rulat in echipa.</a:t>
             </a:r>
           </a:p>
         </p:txBody>
@@ -11668,59 +11560,681 @@
           <a:lstStyle/>
           <a:p>
             <a:r>
-              <a:rPr sz="3600"/>
-              <a:t>Concluzii</a:t>
+              <a:rPr sz="3500" b="1">
+                <a:solidFill>
+                  <a:srgbClr val="2F3338"/>
+                </a:solidFill>
+                <a:latin typeface="Segoe UI Semibold"/>
+              </a:rPr>
+              <a:t>Walkthrough demo din app/Main.hs</a:t>
             </a:r>
           </a:p>
         </p:txBody>
       </p:sp>
       <p:sp>
         <p:nvSpPr>
-          <p:cNvPr id="3" name="Content Placeholder 2"/>
-          <p:cNvSpPr>
-            <a:spLocks noGrp="1"/>
-          </p:cNvSpPr>
-          <p:nvPr>
-            <p:ph idx="1"/>
-          </p:nvPr>
+          <p:cNvPr id="3" name="Rounded Rectangle 2"/>
+          <p:cNvSpPr/>
+          <p:nvPr/>
         </p:nvSpPr>
-        <p:spPr/>
+        <p:spPr>
+          <a:xfrm>
+            <a:off x="1097280" y="2092974"/>
+            <a:ext cx="4846320" cy="3994573"/>
+          </a:xfrm>
+          <a:prstGeom prst="roundRect">
+            <a:avLst/>
+          </a:prstGeom>
+          <a:solidFill>
+            <a:srgbClr val="F5F8FC"/>
+          </a:solidFill>
+          <a:ln w="13970">
+            <a:solidFill>
+              <a:srgbClr val="D5DFEC"/>
+            </a:solidFill>
+          </a:ln>
+        </p:spPr>
+        <p:style>
+          <a:lnRef idx="1">
+            <a:schemeClr val="accent1"/>
+          </a:lnRef>
+          <a:fillRef idx="3">
+            <a:schemeClr val="accent1"/>
+          </a:fillRef>
+          <a:effectRef idx="2">
+            <a:schemeClr val="accent1"/>
+          </a:effectRef>
+          <a:fontRef idx="minor">
+            <a:schemeClr val="lt1"/>
+          </a:fontRef>
+        </p:style>
         <p:txBody>
-          <a:bodyPr/>
+          <a:bodyPr rtlCol="0" anchor="ctr"/>
           <a:lstStyle/>
           <a:p>
-            <a:r>
-              <a:rPr sz="2100"/>
-              <a:t>QuickCheck valideaza comportamentul general, nu doar exemple particulare</a:t>
-            </a:r>
-          </a:p>
-          <a:p>
-            <a:r>
-              <a:rPr sz="2100"/>
-              <a:t>Generatoarele manuale (frequency, sized, shrink) sunt esentiale</a:t>
-            </a:r>
-          </a:p>
-          <a:p>
-            <a:r>
-              <a:rPr sz="2100"/>
-              <a:t>Mini-limbajul aritmetic este un exemplu natural pentru metode formale</a:t>
-            </a:r>
-          </a:p>
-          <a:p>
-            <a:r>
-              <a:rPr sz="2100"/>
-              <a:t>Specificam invarianti valabili pentru orice intrare</a:t>
-            </a:r>
-          </a:p>
-          <a:p>
-            <a:r>
-              <a:rPr sz="2100"/>
-              <a:t>Diferenta-cheie fata de testarea clasica: gandim in proprietati, nu in cazuri izolate</a:t>
+            <a:pPr algn="ctr"/>
+            <a:endParaRPr/>
+          </a:p>
+        </p:txBody>
+      </p:sp>
+      <p:sp>
+        <p:nvSpPr>
+          <p:cNvPr id="4" name="Rounded Rectangle 3"/>
+          <p:cNvSpPr/>
+          <p:nvPr/>
+        </p:nvSpPr>
+        <p:spPr>
+          <a:xfrm>
+            <a:off x="6309360" y="2092974"/>
+            <a:ext cx="4846320" cy="3994573"/>
+          </a:xfrm>
+          <a:prstGeom prst="roundRect">
+            <a:avLst/>
+          </a:prstGeom>
+          <a:solidFill>
+            <a:srgbClr val="EEF4FF"/>
+          </a:solidFill>
+          <a:ln w="13970">
+            <a:solidFill>
+              <a:srgbClr val="D5DFEC"/>
+            </a:solidFill>
+          </a:ln>
+        </p:spPr>
+        <p:style>
+          <a:lnRef idx="1">
+            <a:schemeClr val="accent1"/>
+          </a:lnRef>
+          <a:fillRef idx="3">
+            <a:schemeClr val="accent1"/>
+          </a:fillRef>
+          <a:effectRef idx="2">
+            <a:schemeClr val="accent1"/>
+          </a:effectRef>
+          <a:fontRef idx="minor">
+            <a:schemeClr val="lt1"/>
+          </a:fontRef>
+        </p:style>
+        <p:txBody>
+          <a:bodyPr rtlCol="0" anchor="ctr"/>
+          <a:lstStyle/>
+          <a:p>
+            <a:pPr algn="ctr"/>
+            <a:endParaRPr/>
+          </a:p>
+        </p:txBody>
+      </p:sp>
+      <p:sp>
+        <p:nvSpPr>
+          <p:cNvPr id="5" name="TextBox 4"/>
+          <p:cNvSpPr txBox="1"/>
+          <p:nvPr/>
+        </p:nvSpPr>
+        <p:spPr>
+          <a:xfrm>
+            <a:off x="1325880" y="2275854"/>
+            <a:ext cx="4389120" cy="365760"/>
+          </a:xfrm>
+          <a:prstGeom prst="rect">
+            <a:avLst/>
+          </a:prstGeom>
+          <a:noFill/>
+        </p:spPr>
+        <p:txBody>
+          <a:bodyPr wrap="square">
+            <a:spAutoFit/>
+          </a:bodyPr>
+          <a:lstStyle/>
+          <a:p>
+            <a:pPr algn="l">
+              <a:spcBef>
+                <a:spcPts val="0"/>
+              </a:spcBef>
+              <a:spcAft>
+                <a:spcPts val="200"/>
+              </a:spcAft>
+            </a:pPr>
+            <a:r>
+              <a:rPr sz="1700" b="1" i="0">
+                <a:solidFill>
+                  <a:srgbClr val="1F4E79"/>
+                </a:solidFill>
+                <a:latin typeface="Segoe UI"/>
+              </a:rPr>
+              <a:t>Cod demo (expresie + mediu)</a:t>
+            </a:r>
+          </a:p>
+        </p:txBody>
+      </p:sp>
+      <p:sp>
+        <p:nvSpPr>
+          <p:cNvPr id="6" name="Rounded Rectangle 5"/>
+          <p:cNvSpPr/>
+          <p:nvPr/>
+        </p:nvSpPr>
+        <p:spPr>
+          <a:xfrm>
+            <a:off x="1325880" y="2687334"/>
+            <a:ext cx="4389120" cy="2392680"/>
+          </a:xfrm>
+          <a:prstGeom prst="roundRect">
+            <a:avLst/>
+          </a:prstGeom>
+          <a:solidFill>
+            <a:srgbClr val="1E1E1E"/>
+          </a:solidFill>
+          <a:ln w="13970">
+            <a:solidFill>
+              <a:srgbClr val="2D2D30"/>
+            </a:solidFill>
+          </a:ln>
+        </p:spPr>
+        <p:style>
+          <a:lnRef idx="1">
+            <a:schemeClr val="accent1"/>
+          </a:lnRef>
+          <a:fillRef idx="3">
+            <a:schemeClr val="accent1"/>
+          </a:fillRef>
+          <a:effectRef idx="2">
+            <a:schemeClr val="accent1"/>
+          </a:effectRef>
+          <a:fontRef idx="minor">
+            <a:schemeClr val="lt1"/>
+          </a:fontRef>
+        </p:style>
+        <p:txBody>
+          <a:bodyPr rtlCol="0" anchor="ctr"/>
+          <a:lstStyle/>
+          <a:p>
+            <a:pPr algn="ctr"/>
+            <a:endParaRPr/>
+          </a:p>
+        </p:txBody>
+      </p:sp>
+      <p:sp>
+        <p:nvSpPr>
+          <p:cNvPr id="7" name="TextBox 6"/>
+          <p:cNvSpPr txBox="1"/>
+          <p:nvPr/>
+        </p:nvSpPr>
+        <p:spPr>
+          <a:xfrm>
+            <a:off x="1490472" y="2778774"/>
+            <a:ext cx="4059935" cy="274320"/>
+          </a:xfrm>
+          <a:prstGeom prst="rect">
+            <a:avLst/>
+          </a:prstGeom>
+          <a:noFill/>
+        </p:spPr>
+        <p:txBody>
+          <a:bodyPr wrap="square">
+            <a:spAutoFit/>
+          </a:bodyPr>
+          <a:lstStyle/>
+          <a:p>
+            <a:pPr algn="l">
+              <a:spcBef>
+                <a:spcPts val="0"/>
+              </a:spcBef>
+              <a:spcAft>
+                <a:spcPts val="200"/>
+              </a:spcAft>
+            </a:pPr>
+            <a:r>
+              <a:rPr sz="1200" b="1" i="0">
+                <a:solidFill>
+                  <a:srgbClr val="9CDCFE"/>
+                </a:solidFill>
+                <a:latin typeface="Consolas"/>
+              </a:rPr>
+              <a:t>Main.hs</a:t>
+            </a:r>
+          </a:p>
+        </p:txBody>
+      </p:sp>
+      <p:sp>
+        <p:nvSpPr>
+          <p:cNvPr id="8" name="TextBox 7"/>
+          <p:cNvSpPr txBox="1"/>
+          <p:nvPr/>
+        </p:nvSpPr>
+        <p:spPr>
+          <a:xfrm>
+            <a:off x="1490472" y="3071382"/>
+            <a:ext cx="4059935" cy="3136392"/>
+          </a:xfrm>
+          <a:prstGeom prst="rect">
+            <a:avLst/>
+          </a:prstGeom>
+          <a:noFill/>
+        </p:spPr>
+        <p:txBody>
+          <a:bodyPr wrap="square">
+            <a:spAutoFit/>
+          </a:bodyPr>
+          <a:lstStyle/>
+          <a:p>
+            <a:pPr algn="l">
+              <a:spcBef>
+                <a:spcPts val="0"/>
+              </a:spcBef>
+              <a:spcAft>
+                <a:spcPts val="200"/>
+              </a:spcAft>
+            </a:pPr>
+            <a:r>
+              <a:rPr sz="1150" b="0" i="0">
+                <a:solidFill>
+                  <a:srgbClr val="D4D4D4"/>
+                </a:solidFill>
+                <a:latin typeface="Consolas"/>
+              </a:rPr>
+              <a:t>demoExpr = Add (Mul (Const 1) (Var "x"))</a:t>
+            </a:r>
+          </a:p>
+          <a:p>
+            <a:pPr algn="l">
+              <a:spcBef>
+                <a:spcPts val="0"/>
+              </a:spcBef>
+              <a:spcAft>
+                <a:spcPts val="200"/>
+              </a:spcAft>
+            </a:pPr>
+            <a:r>
+              <a:rPr sz="1150" b="0" i="0">
+                <a:solidFill>
+                  <a:srgbClr val="D4D4D4"/>
+                </a:solidFill>
+                <a:latin typeface="Consolas"/>
+              </a:rPr>
+              <a:t>               (Neg (Neg (Var "y")))</a:t>
+            </a:r>
+          </a:p>
+          <a:p>
+            <a:pPr algn="l">
+              <a:spcBef>
+                <a:spcPts val="0"/>
+              </a:spcBef>
+              <a:spcAft>
+                <a:spcPts val="200"/>
+              </a:spcAft>
+            </a:pPr>
+            <a:endParaRPr sz="1150" b="0" i="0">
+              <a:solidFill>
+                <a:srgbClr val="D4D4D4"/>
+              </a:solidFill>
+              <a:latin typeface="Consolas"/>
+            </a:endParaRPr>
+          </a:p>
+          <a:p>
+            <a:pPr algn="l">
+              <a:spcBef>
+                <a:spcPts val="0"/>
+              </a:spcBef>
+              <a:spcAft>
+                <a:spcPts val="200"/>
+              </a:spcAft>
+            </a:pPr>
+            <a:r>
+              <a:rPr sz="1150" b="0" i="0">
+                <a:solidFill>
+                  <a:srgbClr val="D4D4D4"/>
+                </a:solidFill>
+                <a:latin typeface="Consolas"/>
+              </a:rPr>
+              <a:t>demoEnv = Map.fromList [("x", 4), ("y", 7)]</a:t>
+            </a:r>
+          </a:p>
+          <a:p>
+            <a:pPr algn="l">
+              <a:spcBef>
+                <a:spcPts val="0"/>
+              </a:spcBef>
+              <a:spcAft>
+                <a:spcPts val="200"/>
+              </a:spcAft>
+            </a:pPr>
+            <a:endParaRPr sz="1150" b="0" i="0">
+              <a:solidFill>
+                <a:srgbClr val="D4D4D4"/>
+              </a:solidFill>
+              <a:latin typeface="Consolas"/>
+            </a:endParaRPr>
+          </a:p>
+          <a:p>
+            <a:pPr algn="l">
+              <a:spcBef>
+                <a:spcPts val="0"/>
+              </a:spcBef>
+              <a:spcAft>
+                <a:spcPts val="200"/>
+              </a:spcAft>
+            </a:pPr>
+            <a:r>
+              <a:rPr sz="1150" b="0" i="0">
+                <a:solidFill>
+                  <a:srgbClr val="D4D4D4"/>
+                </a:solidFill>
+                <a:latin typeface="Consolas"/>
+              </a:rPr>
+              <a:t>pretty demoExpr      =&gt; "1 * x + -(-y)"</a:t>
+            </a:r>
+          </a:p>
+          <a:p>
+            <a:pPr algn="l">
+              <a:spcBef>
+                <a:spcPts val="0"/>
+              </a:spcBef>
+              <a:spcAft>
+                <a:spcPts val="200"/>
+              </a:spcAft>
+            </a:pPr>
+            <a:r>
+              <a:rPr sz="1150" b="0" i="0">
+                <a:solidFill>
+                  <a:srgbClr val="D4D4D4"/>
+                </a:solidFill>
+                <a:latin typeface="Consolas"/>
+              </a:rPr>
+              <a:t>simplify demoExpr    =&gt; "x + y"</a:t>
+            </a:r>
+          </a:p>
+        </p:txBody>
+      </p:sp>
+      <p:sp>
+        <p:nvSpPr>
+          <p:cNvPr id="9" name="TextBox 8"/>
+          <p:cNvSpPr txBox="1"/>
+          <p:nvPr/>
+        </p:nvSpPr>
+        <p:spPr>
+          <a:xfrm>
+            <a:off x="6537960" y="2275854"/>
+            <a:ext cx="4389120" cy="365760"/>
+          </a:xfrm>
+          <a:prstGeom prst="rect">
+            <a:avLst/>
+          </a:prstGeom>
+          <a:noFill/>
+        </p:spPr>
+        <p:txBody>
+          <a:bodyPr wrap="square">
+            <a:spAutoFit/>
+          </a:bodyPr>
+          <a:lstStyle/>
+          <a:p>
+            <a:pPr algn="l">
+              <a:spcBef>
+                <a:spcPts val="0"/>
+              </a:spcBef>
+              <a:spcAft>
+                <a:spcPts val="200"/>
+              </a:spcAft>
+            </a:pPr>
+            <a:r>
+              <a:rPr sz="1700" b="1" i="0">
+                <a:solidFill>
+                  <a:srgbClr val="1F4E79"/>
+                </a:solidFill>
+                <a:latin typeface="Segoe UI"/>
+              </a:rPr>
+              <a:t>Output real din executabil</a:t>
+            </a:r>
+          </a:p>
+        </p:txBody>
+      </p:sp>
+      <p:sp>
+        <p:nvSpPr>
+          <p:cNvPr id="10" name="Rounded Rectangle 9"/>
+          <p:cNvSpPr/>
+          <p:nvPr/>
+        </p:nvSpPr>
+        <p:spPr>
+          <a:xfrm>
+            <a:off x="6537960" y="2687334"/>
+            <a:ext cx="4389120" cy="2392680"/>
+          </a:xfrm>
+          <a:prstGeom prst="roundRect">
+            <a:avLst/>
+          </a:prstGeom>
+          <a:solidFill>
+            <a:srgbClr val="1E1E1E"/>
+          </a:solidFill>
+          <a:ln w="13970">
+            <a:solidFill>
+              <a:srgbClr val="2D2D30"/>
+            </a:solidFill>
+          </a:ln>
+        </p:spPr>
+        <p:style>
+          <a:lnRef idx="1">
+            <a:schemeClr val="accent1"/>
+          </a:lnRef>
+          <a:fillRef idx="3">
+            <a:schemeClr val="accent1"/>
+          </a:fillRef>
+          <a:effectRef idx="2">
+            <a:schemeClr val="accent1"/>
+          </a:effectRef>
+          <a:fontRef idx="minor">
+            <a:schemeClr val="lt1"/>
+          </a:fontRef>
+        </p:style>
+        <p:txBody>
+          <a:bodyPr rtlCol="0" anchor="ctr"/>
+          <a:lstStyle/>
+          <a:p>
+            <a:pPr algn="ctr"/>
+            <a:endParaRPr/>
+          </a:p>
+        </p:txBody>
+      </p:sp>
+      <p:sp>
+        <p:nvSpPr>
+          <p:cNvPr id="11" name="TextBox 10"/>
+          <p:cNvSpPr txBox="1"/>
+          <p:nvPr/>
+        </p:nvSpPr>
+        <p:spPr>
+          <a:xfrm>
+            <a:off x="6702552" y="2778774"/>
+            <a:ext cx="4059935" cy="274320"/>
+          </a:xfrm>
+          <a:prstGeom prst="rect">
+            <a:avLst/>
+          </a:prstGeom>
+          <a:noFill/>
+        </p:spPr>
+        <p:txBody>
+          <a:bodyPr wrap="square">
+            <a:spAutoFit/>
+          </a:bodyPr>
+          <a:lstStyle/>
+          <a:p>
+            <a:pPr algn="l">
+              <a:spcBef>
+                <a:spcPts val="0"/>
+              </a:spcBef>
+              <a:spcAft>
+                <a:spcPts val="200"/>
+              </a:spcAft>
+            </a:pPr>
+            <a:r>
+              <a:rPr sz="1200" b="1" i="0">
+                <a:solidFill>
+                  <a:srgbClr val="9CDCFE"/>
+                </a:solidFill>
+                <a:latin typeface="Consolas"/>
+              </a:rPr>
+              <a:t>mfis-quickcheck-expr.exe</a:t>
+            </a:r>
+          </a:p>
+        </p:txBody>
+      </p:sp>
+      <p:sp>
+        <p:nvSpPr>
+          <p:cNvPr id="12" name="TextBox 11"/>
+          <p:cNvSpPr txBox="1"/>
+          <p:nvPr/>
+        </p:nvSpPr>
+        <p:spPr>
+          <a:xfrm>
+            <a:off x="6702552" y="3071382"/>
+            <a:ext cx="4059935" cy="3136392"/>
+          </a:xfrm>
+          <a:prstGeom prst="rect">
+            <a:avLst/>
+          </a:prstGeom>
+          <a:noFill/>
+        </p:spPr>
+        <p:txBody>
+          <a:bodyPr wrap="square">
+            <a:spAutoFit/>
+          </a:bodyPr>
+          <a:lstStyle/>
+          <a:p>
+            <a:pPr algn="l">
+              <a:spcBef>
+                <a:spcPts val="0"/>
+              </a:spcBef>
+              <a:spcAft>
+                <a:spcPts val="200"/>
+              </a:spcAft>
+            </a:pPr>
+            <a:r>
+              <a:rPr sz="1150" b="0" i="0">
+                <a:solidFill>
+                  <a:srgbClr val="D4D4D4"/>
+                </a:solidFill>
+                <a:latin typeface="Consolas"/>
+              </a:rPr>
+              <a:t>Dimensiune: 7</a:t>
+            </a:r>
+          </a:p>
+          <a:p>
+            <a:pPr algn="l">
+              <a:spcBef>
+                <a:spcPts val="0"/>
+              </a:spcBef>
+              <a:spcAft>
+                <a:spcPts val="200"/>
+              </a:spcAft>
+            </a:pPr>
+            <a:r>
+              <a:rPr sz="1150" b="0" i="0">
+                <a:solidFill>
+                  <a:srgbClr val="D4D4D4"/>
+                </a:solidFill>
+                <a:latin typeface="Consolas"/>
+              </a:rPr>
+              <a:t>Adancime: 4</a:t>
+            </a:r>
+          </a:p>
+          <a:p>
+            <a:pPr algn="l">
+              <a:spcBef>
+                <a:spcPts val="0"/>
+              </a:spcBef>
+              <a:spcAft>
+                <a:spcPts val="200"/>
+              </a:spcAft>
+            </a:pPr>
+            <a:r>
+              <a:rPr sz="1150" b="0" i="0">
+                <a:solidFill>
+                  <a:srgbClr val="D4D4D4"/>
+                </a:solidFill>
+                <a:latin typeface="Consolas"/>
+              </a:rPr>
+              <a:t>Numar operatori: 4</a:t>
+            </a:r>
+          </a:p>
+          <a:p>
+            <a:pPr algn="l">
+              <a:spcBef>
+                <a:spcPts val="0"/>
+              </a:spcBef>
+              <a:spcAft>
+                <a:spcPts val="200"/>
+              </a:spcAft>
+            </a:pPr>
+            <a:r>
+              <a:rPr sz="1150" b="0" i="0">
+                <a:solidFill>
+                  <a:srgbClr val="D4D4D4"/>
+                </a:solidFill>
+                <a:latin typeface="Consolas"/>
+              </a:rPr>
+              <a:t>Variabile libere: ["x","y"]</a:t>
+            </a:r>
+          </a:p>
+          <a:p>
+            <a:pPr algn="l">
+              <a:spcBef>
+                <a:spcPts val="0"/>
+              </a:spcBef>
+              <a:spcAft>
+                <a:spcPts val="200"/>
+              </a:spcAft>
+            </a:pPr>
+            <a:r>
+              <a:rPr sz="1150" b="0" i="0">
+                <a:solidFill>
+                  <a:srgbClr val="D4D4D4"/>
+                </a:solidFill>
+                <a:latin typeface="Consolas"/>
+              </a:rPr>
+              <a:t>Valoare in mediu: Just 11</a:t>
+            </a:r>
+          </a:p>
+          <a:p>
+            <a:pPr algn="l">
+              <a:spcBef>
+                <a:spcPts val="0"/>
+              </a:spcBef>
+              <a:spcAft>
+                <a:spcPts val="200"/>
+              </a:spcAft>
+            </a:pPr>
+            <a:r>
+              <a:rPr sz="1150" b="0" i="0">
+                <a:solidFill>
+                  <a:srgbClr val="D4D4D4"/>
+                </a:solidFill>
+                <a:latin typeface="Consolas"/>
+              </a:rPr>
+              <a:t>Valoare simplificata: Just 11</a:t>
+            </a:r>
+          </a:p>
+          <a:p>
+            <a:pPr algn="l">
+              <a:spcBef>
+                <a:spcPts val="0"/>
+              </a:spcBef>
+              <a:spcAft>
+                <a:spcPts val="200"/>
+              </a:spcAft>
+            </a:pPr>
+            <a:r>
+              <a:rPr sz="1150" b="0" i="0">
+                <a:solidFill>
+                  <a:srgbClr val="D4D4D4"/>
+                </a:solidFill>
+                <a:latin typeface="Consolas"/>
+              </a:rPr>
+              <a:t>Semantica pastrata: True</a:t>
             </a:r>
           </a:p>
         </p:txBody>
       </p:sp>
     </p:spTree>
+    <p:extLst>
+      <p:ext uri="{BB962C8B-B14F-4D97-AF65-F5344CB8AC3E}">
+        <p14:creationId xmlns:p14="http://schemas.microsoft.com/office/powerpoint/2010/main" val="3402472528"/>
+      </p:ext>
+    </p:extLst>
   </p:cSld>
   <p:clrMapOvr>
     <a:masterClrMapping/>
@@ -11761,120 +12275,482 @@
           <a:lstStyle/>
           <a:p>
             <a:r>
-              <a:rPr lang="ro-RO" dirty="0" smtClean="0"/>
-              <a:t>Bibliografie</a:t>
-            </a:r>
-            <a:endParaRPr lang="en-US" dirty="0"/>
+              <a:rPr sz="3500" b="1">
+                <a:solidFill>
+                  <a:srgbClr val="2F3338"/>
+                </a:solidFill>
+                <a:latin typeface="Segoe UI Semibold"/>
+              </a:rPr>
+              <a:t>Expr.hs: functii structurale folosite in teste</a:t>
+            </a:r>
           </a:p>
         </p:txBody>
       </p:sp>
       <p:sp>
         <p:nvSpPr>
-          <p:cNvPr id="3" name="Content Placeholder 2"/>
-          <p:cNvSpPr>
-            <a:spLocks noGrp="1"/>
-          </p:cNvSpPr>
-          <p:nvPr>
-            <p:ph idx="1"/>
-          </p:nvPr>
+          <p:cNvPr id="3" name="Rounded Rectangle 2"/>
+          <p:cNvSpPr/>
+          <p:nvPr/>
         </p:nvSpPr>
-        <p:spPr/>
+        <p:spPr>
+          <a:xfrm>
+            <a:off x="1097280" y="2302932"/>
+            <a:ext cx="10058400" cy="3960707"/>
+          </a:xfrm>
+          <a:prstGeom prst="roundRect">
+            <a:avLst/>
+          </a:prstGeom>
+          <a:solidFill>
+            <a:srgbClr val="F5F8FC"/>
+          </a:solidFill>
+          <a:ln w="13970">
+            <a:solidFill>
+              <a:srgbClr val="D5DFEC"/>
+            </a:solidFill>
+          </a:ln>
+        </p:spPr>
+        <p:style>
+          <a:lnRef idx="1">
+            <a:schemeClr val="accent1"/>
+          </a:lnRef>
+          <a:fillRef idx="3">
+            <a:schemeClr val="accent1"/>
+          </a:fillRef>
+          <a:effectRef idx="2">
+            <a:schemeClr val="accent1"/>
+          </a:effectRef>
+          <a:fontRef idx="minor">
+            <a:schemeClr val="lt1"/>
+          </a:fontRef>
+        </p:style>
         <p:txBody>
-          <a:bodyPr/>
+          <a:bodyPr rtlCol="0" anchor="ctr"/>
           <a:lstStyle/>
           <a:p>
-            <a:r>
-              <a:rPr lang="en-US" dirty="0"/>
-              <a:t>[39] K. </a:t>
-            </a:r>
-            <a:r>
-              <a:rPr lang="en-US" dirty="0" err="1"/>
-              <a:t>Claessen</a:t>
-            </a:r>
-            <a:r>
-              <a:rPr lang="en-US" dirty="0"/>
-              <a:t> </a:t>
-            </a:r>
-            <a:r>
-              <a:rPr lang="en-US" dirty="0" err="1"/>
-              <a:t>și</a:t>
-            </a:r>
-            <a:r>
-              <a:rPr lang="en-US" dirty="0"/>
-              <a:t> J. Hughes, “</a:t>
-            </a:r>
-            <a:r>
-              <a:rPr lang="en-US" dirty="0" err="1"/>
-              <a:t>QuickCheck</a:t>
-            </a:r>
-            <a:r>
-              <a:rPr lang="en-US" dirty="0"/>
-              <a:t>: a lightweight tool for random testing of Haskell programs,” in Proceedings of the 5th ACM SIGPLAN International Conference on Functional Programming (ICFP ’00), Montreal, Canada, 2000, pp. 268–279, </a:t>
-            </a:r>
-            <a:r>
-              <a:rPr lang="en-US" dirty="0">
-                <a:hlinkClick r:id="rId2"/>
-              </a:rPr>
-              <a:t>https://dl.acm.org/doi/epdf/10.1145/351240.351266 </a:t>
-            </a:r>
-            <a:endParaRPr lang="en-US" dirty="0"/>
-          </a:p>
-          <a:p>
-            <a:r>
-              <a:rPr lang="en-US" dirty="0"/>
-              <a:t>[40] </a:t>
-            </a:r>
-            <a:r>
-              <a:rPr lang="en-US" dirty="0" err="1"/>
-              <a:t>QuickCheck</a:t>
-            </a:r>
-            <a:r>
-              <a:rPr lang="en-US" dirty="0"/>
-              <a:t> Library Documentation. </a:t>
-            </a:r>
-            <a:r>
-              <a:rPr lang="en-US" dirty="0" err="1"/>
-              <a:t>Hackage</a:t>
-            </a:r>
-            <a:r>
-              <a:rPr lang="en-US" dirty="0"/>
-              <a:t>. </a:t>
-            </a:r>
-            <a:r>
-              <a:rPr lang="en-US" dirty="0">
-                <a:hlinkClick r:id="rId3"/>
-              </a:rPr>
-              <a:t>https://hackage.haskell.org/package/QuickCheck </a:t>
-            </a:r>
-            <a:endParaRPr lang="en-US" dirty="0"/>
-          </a:p>
-          <a:p>
-            <a:r>
-              <a:rPr lang="en-US" dirty="0"/>
-              <a:t>[41] </a:t>
-            </a:r>
-            <a:r>
-              <a:rPr lang="en-US" dirty="0" err="1"/>
-              <a:t>QuickCheck</a:t>
-            </a:r>
-            <a:r>
-              <a:rPr lang="en-US" dirty="0"/>
-              <a:t>: Automatic Testing (online tutorial). </a:t>
-            </a:r>
-            <a:r>
-              <a:rPr lang="en-US" dirty="0">
-                <a:hlinkClick r:id="rId4"/>
-              </a:rPr>
-              <a:t>https://sulzmann.github.io/ProgrammingParadigms/lec-haskell-testing.html </a:t>
-            </a:r>
-            <a:endParaRPr lang="en-US" dirty="0"/>
+            <a:pPr algn="ctr"/>
+            <a:endParaRPr/>
+          </a:p>
+        </p:txBody>
+      </p:sp>
+      <p:sp>
+        <p:nvSpPr>
+          <p:cNvPr id="4" name="TextBox 3"/>
+          <p:cNvSpPr txBox="1"/>
+          <p:nvPr/>
+        </p:nvSpPr>
+        <p:spPr>
+          <a:xfrm>
+            <a:off x="1325880" y="2436727"/>
+            <a:ext cx="9601200" cy="365760"/>
+          </a:xfrm>
+          <a:prstGeom prst="rect">
+            <a:avLst/>
+          </a:prstGeom>
+          <a:noFill/>
+        </p:spPr>
+        <p:txBody>
+          <a:bodyPr wrap="square">
+            <a:spAutoFit/>
+          </a:bodyPr>
+          <a:lstStyle/>
+          <a:p>
+            <a:pPr algn="l">
+              <a:spcBef>
+                <a:spcPts val="0"/>
+              </a:spcBef>
+              <a:spcAft>
+                <a:spcPts val="200"/>
+              </a:spcAft>
+            </a:pPr>
+            <a:r>
+              <a:rPr sz="1600" b="0" i="1">
+                <a:solidFill>
+                  <a:srgbClr val="4B5563"/>
+                </a:solidFill>
+                <a:latin typeface="Segoe UI"/>
+              </a:rPr>
+              <a:t>Functii care masoara si manipuleaza structura AST-ului</a:t>
+            </a:r>
+          </a:p>
+        </p:txBody>
+      </p:sp>
+      <p:sp>
+        <p:nvSpPr>
+          <p:cNvPr id="5" name="TextBox 4"/>
+          <p:cNvSpPr txBox="1"/>
+          <p:nvPr/>
+        </p:nvSpPr>
+        <p:spPr>
+          <a:xfrm>
+            <a:off x="1325880" y="2848207"/>
+            <a:ext cx="9601200" cy="2103120"/>
+          </a:xfrm>
+          <a:prstGeom prst="rect">
+            <a:avLst/>
+          </a:prstGeom>
+          <a:noFill/>
+        </p:spPr>
+        <p:txBody>
+          <a:bodyPr wrap="square">
+            <a:spAutoFit/>
+          </a:bodyPr>
+          <a:lstStyle/>
+          <a:p>
+            <a:pPr algn="l">
+              <a:spcBef>
+                <a:spcPts val="0"/>
+              </a:spcBef>
+              <a:spcAft>
+                <a:spcPts val="200"/>
+              </a:spcAft>
+            </a:pPr>
+            <a:r>
+              <a:rPr sz="1500" b="0" i="0">
+                <a:solidFill>
+                  <a:srgbClr val="2F3338"/>
+                </a:solidFill>
+                <a:latin typeface="Segoe UI"/>
+              </a:rPr>
+              <a:t>- size expr: numarul total de noduri din arbore</a:t>
+            </a:r>
+          </a:p>
+          <a:p>
+            <a:pPr algn="l">
+              <a:spcBef>
+                <a:spcPts val="0"/>
+              </a:spcBef>
+              <a:spcAft>
+                <a:spcPts val="200"/>
+              </a:spcAft>
+            </a:pPr>
+            <a:r>
+              <a:rPr sz="1500" b="0" i="0">
+                <a:solidFill>
+                  <a:srgbClr val="2F3338"/>
+                </a:solidFill>
+                <a:latin typeface="Segoe UI"/>
+              </a:rPr>
+              <a:t>- depth expr: adancimea maxima a arborelui</a:t>
+            </a:r>
+          </a:p>
+          <a:p>
+            <a:pPr algn="l">
+              <a:spcBef>
+                <a:spcPts val="0"/>
+              </a:spcBef>
+              <a:spcAft>
+                <a:spcPts val="200"/>
+              </a:spcAft>
+            </a:pPr>
+            <a:r>
+              <a:rPr sz="1500" b="0" i="0">
+                <a:solidFill>
+                  <a:srgbClr val="2F3338"/>
+                </a:solidFill>
+                <a:latin typeface="Segoe UI"/>
+              </a:rPr>
+              <a:t>- operatorCount expr: numarul de operatori (Add/Sub/Mul/Neg)</a:t>
+            </a:r>
+          </a:p>
+          <a:p>
+            <a:pPr algn="l">
+              <a:spcBef>
+                <a:spcPts val="0"/>
+              </a:spcBef>
+              <a:spcAft>
+                <a:spcPts val="200"/>
+              </a:spcAft>
+            </a:pPr>
+            <a:r>
+              <a:rPr sz="1500" b="0" i="0">
+                <a:solidFill>
+                  <a:srgbClr val="2F3338"/>
+                </a:solidFill>
+                <a:latin typeface="Segoe UI"/>
+              </a:rPr>
+              <a:t>- freeVars expr: multimea variabilelor libere (fara duplicate)</a:t>
+            </a:r>
+          </a:p>
+          <a:p>
+            <a:pPr algn="l">
+              <a:spcBef>
+                <a:spcPts val="0"/>
+              </a:spcBef>
+              <a:spcAft>
+                <a:spcPts val="200"/>
+              </a:spcAft>
+            </a:pPr>
+            <a:r>
+              <a:rPr sz="1500" b="0" i="0">
+                <a:solidFill>
+                  <a:srgbClr val="2F3338"/>
+                </a:solidFill>
+                <a:latin typeface="Segoe UI"/>
+              </a:rPr>
+              <a:t>- substitute name replacement expr: inlocuire recursiva in AST</a:t>
+            </a:r>
+          </a:p>
+        </p:txBody>
+      </p:sp>
+      <p:sp>
+        <p:nvSpPr>
+          <p:cNvPr id="6" name="Rounded Rectangle 5"/>
+          <p:cNvSpPr/>
+          <p:nvPr/>
+        </p:nvSpPr>
+        <p:spPr>
+          <a:xfrm>
+            <a:off x="1325880" y="4314605"/>
+            <a:ext cx="9601200" cy="1600200"/>
+          </a:xfrm>
+          <a:prstGeom prst="roundRect">
+            <a:avLst/>
+          </a:prstGeom>
+          <a:solidFill>
+            <a:srgbClr val="1E1E1E"/>
+          </a:solidFill>
+          <a:ln w="13970">
+            <a:solidFill>
+              <a:srgbClr val="2D2D30"/>
+            </a:solidFill>
+          </a:ln>
+        </p:spPr>
+        <p:style>
+          <a:lnRef idx="1">
+            <a:schemeClr val="accent1"/>
+          </a:lnRef>
+          <a:fillRef idx="3">
+            <a:schemeClr val="accent1"/>
+          </a:fillRef>
+          <a:effectRef idx="2">
+            <a:schemeClr val="accent1"/>
+          </a:effectRef>
+          <a:fontRef idx="minor">
+            <a:schemeClr val="lt1"/>
+          </a:fontRef>
+        </p:style>
+        <p:txBody>
+          <a:bodyPr rtlCol="0" anchor="ctr"/>
+          <a:lstStyle/>
+          <a:p>
+            <a:pPr algn="ctr"/>
+            <a:endParaRPr/>
+          </a:p>
+        </p:txBody>
+      </p:sp>
+      <p:sp>
+        <p:nvSpPr>
+          <p:cNvPr id="7" name="TextBox 6"/>
+          <p:cNvSpPr txBox="1"/>
+          <p:nvPr/>
+        </p:nvSpPr>
+        <p:spPr>
+          <a:xfrm>
+            <a:off x="1490472" y="4406045"/>
+            <a:ext cx="9272016" cy="274320"/>
+          </a:xfrm>
+          <a:prstGeom prst="rect">
+            <a:avLst/>
+          </a:prstGeom>
+          <a:noFill/>
+        </p:spPr>
+        <p:txBody>
+          <a:bodyPr wrap="square">
+            <a:spAutoFit/>
+          </a:bodyPr>
+          <a:lstStyle/>
+          <a:p>
+            <a:pPr algn="l">
+              <a:spcBef>
+                <a:spcPts val="0"/>
+              </a:spcBef>
+              <a:spcAft>
+                <a:spcPts val="200"/>
+              </a:spcAft>
+            </a:pPr>
+            <a:r>
+              <a:rPr sz="1200" b="1" i="0" dirty="0" err="1">
+                <a:solidFill>
+                  <a:srgbClr val="9CDCFE"/>
+                </a:solidFill>
+                <a:latin typeface="Consolas"/>
+              </a:rPr>
+              <a:t>Exemple</a:t>
+            </a:r>
+            <a:r>
+              <a:rPr sz="1200" b="1" i="0" dirty="0">
+                <a:solidFill>
+                  <a:srgbClr val="9CDCFE"/>
+                </a:solidFill>
+                <a:latin typeface="Consolas"/>
+              </a:rPr>
+              <a:t> concrete in </a:t>
+            </a:r>
+            <a:r>
+              <a:rPr sz="1200" b="1" i="0" dirty="0" err="1">
+                <a:solidFill>
+                  <a:srgbClr val="9CDCFE"/>
+                </a:solidFill>
+                <a:latin typeface="Consolas"/>
+              </a:rPr>
+              <a:t>proiect</a:t>
+            </a:r>
+            <a:endParaRPr sz="1200" b="1" i="0" dirty="0">
+              <a:solidFill>
+                <a:srgbClr val="9CDCFE"/>
+              </a:solidFill>
+              <a:latin typeface="Consolas"/>
+            </a:endParaRPr>
+          </a:p>
+        </p:txBody>
+      </p:sp>
+      <p:sp>
+        <p:nvSpPr>
+          <p:cNvPr id="8" name="TextBox 7"/>
+          <p:cNvSpPr txBox="1"/>
+          <p:nvPr/>
+        </p:nvSpPr>
+        <p:spPr>
+          <a:xfrm>
+            <a:off x="1490472" y="4698653"/>
+            <a:ext cx="9272016" cy="1124712"/>
+          </a:xfrm>
+          <a:prstGeom prst="rect">
+            <a:avLst/>
+          </a:prstGeom>
+          <a:noFill/>
+        </p:spPr>
+        <p:txBody>
+          <a:bodyPr wrap="square">
+            <a:spAutoFit/>
+          </a:bodyPr>
+          <a:lstStyle/>
+          <a:p>
+            <a:pPr algn="l">
+              <a:spcBef>
+                <a:spcPts val="0"/>
+              </a:spcBef>
+              <a:spcAft>
+                <a:spcPts val="200"/>
+              </a:spcAft>
+            </a:pPr>
+            <a:r>
+              <a:rPr sz="1150" b="0" i="0" dirty="0" err="1">
+                <a:solidFill>
+                  <a:srgbClr val="D4D4D4"/>
+                </a:solidFill>
+                <a:latin typeface="Consolas"/>
+              </a:rPr>
+              <a:t>prop_simplifyDoesNotIncreaseSize</a:t>
+            </a:r>
+            <a:r>
+              <a:rPr sz="1150" b="0" i="0" dirty="0">
+                <a:solidFill>
+                  <a:srgbClr val="D4D4D4"/>
+                </a:solidFill>
+                <a:latin typeface="Consolas"/>
+              </a:rPr>
+              <a:t>      =&gt; size (simplify e) &lt;= size e</a:t>
+            </a:r>
+          </a:p>
+          <a:p>
+            <a:pPr algn="l">
+              <a:spcBef>
+                <a:spcPts val="0"/>
+              </a:spcBef>
+              <a:spcAft>
+                <a:spcPts val="200"/>
+              </a:spcAft>
+            </a:pPr>
+            <a:r>
+              <a:rPr sz="1150" b="0" i="0" dirty="0" err="1">
+                <a:solidFill>
+                  <a:srgbClr val="D4D4D4"/>
+                </a:solidFill>
+                <a:latin typeface="Consolas"/>
+              </a:rPr>
+              <a:t>prop_simplifyDoesNotIncreaseDepth</a:t>
+            </a:r>
+            <a:r>
+              <a:rPr sz="1150" b="0" i="0" dirty="0">
+                <a:solidFill>
+                  <a:srgbClr val="D4D4D4"/>
+                </a:solidFill>
+                <a:latin typeface="Consolas"/>
+              </a:rPr>
+              <a:t>     =&gt; depth (simplify e) &lt;= depth e</a:t>
+            </a:r>
+          </a:p>
+          <a:p>
+            <a:pPr algn="l">
+              <a:spcBef>
+                <a:spcPts val="0"/>
+              </a:spcBef>
+              <a:spcAft>
+                <a:spcPts val="200"/>
+              </a:spcAft>
+            </a:pPr>
+            <a:r>
+              <a:rPr sz="1150" b="0" i="0" dirty="0" err="1">
+                <a:solidFill>
+                  <a:srgbClr val="D4D4D4"/>
+                </a:solidFill>
+                <a:latin typeface="Consolas"/>
+              </a:rPr>
+              <a:t>prop_simplifyDoesNotIncreaseOperators</a:t>
+            </a:r>
+            <a:r>
+              <a:rPr sz="1150" b="0" i="0" dirty="0">
+                <a:solidFill>
+                  <a:srgbClr val="D4D4D4"/>
+                </a:solidFill>
+                <a:latin typeface="Consolas"/>
+              </a:rPr>
+              <a:t> =&gt; </a:t>
+            </a:r>
+            <a:r>
+              <a:rPr sz="1150" b="0" i="0" dirty="0" err="1">
+                <a:solidFill>
+                  <a:srgbClr val="D4D4D4"/>
+                </a:solidFill>
+                <a:latin typeface="Consolas"/>
+              </a:rPr>
+              <a:t>operatorCount</a:t>
+            </a:r>
+            <a:r>
+              <a:rPr sz="1150" b="0" i="0" dirty="0">
+                <a:solidFill>
+                  <a:srgbClr val="D4D4D4"/>
+                </a:solidFill>
+                <a:latin typeface="Consolas"/>
+              </a:rPr>
+              <a:t> (simplify e) &lt;= </a:t>
+            </a:r>
+            <a:r>
+              <a:rPr sz="1150" b="0" i="0" dirty="0" err="1">
+                <a:solidFill>
+                  <a:srgbClr val="D4D4D4"/>
+                </a:solidFill>
+                <a:latin typeface="Consolas"/>
+              </a:rPr>
+              <a:t>operatorCount</a:t>
+            </a:r>
+            <a:r>
+              <a:rPr sz="1150" b="0" i="0" dirty="0">
+                <a:solidFill>
+                  <a:srgbClr val="D4D4D4"/>
+                </a:solidFill>
+                <a:latin typeface="Consolas"/>
+              </a:rPr>
+              <a:t> e</a:t>
+            </a:r>
           </a:p>
         </p:txBody>
       </p:sp>
     </p:spTree>
     <p:extLst>
       <p:ext uri="{BB962C8B-B14F-4D97-AF65-F5344CB8AC3E}">
-        <p14:creationId xmlns:p14="http://schemas.microsoft.com/office/powerpoint/2010/main" val="3798079610"/>
+        <p14:creationId xmlns:p14="http://schemas.microsoft.com/office/powerpoint/2010/main" val="1914907223"/>
       </p:ext>
     </p:extLst>
   </p:cSld>
@@ -12709,6 +13585,5220 @@
         </p:txBody>
       </p:sp>
     </p:spTree>
+  </p:cSld>
+  <p:clrMapOvr>
+    <a:masterClrMapping/>
+  </p:clrMapOvr>
+</p:sld>
+</file>
+
+<file path=ppt/slides/slide20.xml><?xml version="1.0" encoding="utf-8"?>
+<p:sld xmlns:a="http://schemas.openxmlformats.org/drawingml/2006/main" xmlns:r="http://schemas.openxmlformats.org/officeDocument/2006/relationships" xmlns:p="http://schemas.openxmlformats.org/presentationml/2006/main">
+  <p:cSld>
+    <p:spTree>
+      <p:nvGrpSpPr>
+        <p:cNvPr id="1" name=""/>
+        <p:cNvGrpSpPr/>
+        <p:nvPr/>
+      </p:nvGrpSpPr>
+      <p:grpSpPr>
+        <a:xfrm>
+          <a:off x="0" y="0"/>
+          <a:ext cx="0" cy="0"/>
+          <a:chOff x="0" y="0"/>
+          <a:chExt cx="0" cy="0"/>
+        </a:xfrm>
+      </p:grpSpPr>
+      <p:sp>
+        <p:nvSpPr>
+          <p:cNvPr id="2" name="Title 1"/>
+          <p:cNvSpPr>
+            <a:spLocks noGrp="1"/>
+          </p:cNvSpPr>
+          <p:nvPr>
+            <p:ph type="title"/>
+          </p:nvPr>
+        </p:nvSpPr>
+        <p:spPr/>
+        <p:txBody>
+          <a:bodyPr/>
+          <a:lstStyle/>
+          <a:p>
+            <a:r>
+              <a:rPr sz="3500" b="1" dirty="0" err="1">
+                <a:solidFill>
+                  <a:srgbClr val="2F3338"/>
+                </a:solidFill>
+                <a:latin typeface="Segoe UI Semibold"/>
+              </a:rPr>
+              <a:t>Parser.hs</a:t>
+            </a:r>
+            <a:r>
+              <a:rPr sz="3500" b="1" dirty="0">
+                <a:solidFill>
+                  <a:srgbClr val="2F3338"/>
+                </a:solidFill>
+                <a:latin typeface="Segoe UI Semibold"/>
+              </a:rPr>
+              <a:t>: </a:t>
+            </a:r>
+            <a:r>
+              <a:rPr sz="3500" b="1" dirty="0" err="1">
+                <a:solidFill>
+                  <a:srgbClr val="2F3338"/>
+                </a:solidFill>
+                <a:latin typeface="Segoe UI Semibold"/>
+              </a:rPr>
+              <a:t>gramatica</a:t>
+            </a:r>
+            <a:r>
+              <a:rPr sz="3500" b="1" dirty="0">
+                <a:solidFill>
+                  <a:srgbClr val="2F3338"/>
+                </a:solidFill>
+                <a:latin typeface="Segoe UI Semibold"/>
+              </a:rPr>
+              <a:t> </a:t>
+            </a:r>
+            <a:r>
+              <a:rPr lang="ro-RO" sz="3500" b="1" dirty="0">
+                <a:solidFill>
+                  <a:srgbClr val="2F3338"/>
+                </a:solidFill>
+                <a:latin typeface="Segoe UI Semibold"/>
+              </a:rPr>
+              <a:t>ș</a:t>
+            </a:r>
+            <a:r>
+              <a:rPr sz="3500" b="1" dirty="0" smtClean="0">
+                <a:solidFill>
+                  <a:srgbClr val="2F3338"/>
+                </a:solidFill>
+                <a:latin typeface="Segoe UI Semibold"/>
+              </a:rPr>
+              <a:t>i </a:t>
+            </a:r>
+            <a:r>
+              <a:rPr sz="3500" b="1" dirty="0" err="1" smtClean="0">
+                <a:solidFill>
+                  <a:srgbClr val="2F3338"/>
+                </a:solidFill>
+                <a:latin typeface="Segoe UI Semibold"/>
+              </a:rPr>
+              <a:t>preceden</a:t>
+            </a:r>
+            <a:r>
+              <a:rPr lang="ro-RO" sz="3500" b="1" dirty="0" smtClean="0">
+                <a:solidFill>
+                  <a:srgbClr val="2F3338"/>
+                </a:solidFill>
+                <a:latin typeface="Segoe UI Semibold"/>
+              </a:rPr>
+              <a:t>ț</a:t>
+            </a:r>
+            <a:r>
+              <a:rPr sz="3500" b="1" dirty="0" smtClean="0">
+                <a:solidFill>
+                  <a:srgbClr val="2F3338"/>
+                </a:solidFill>
+                <a:latin typeface="Segoe UI Semibold"/>
+              </a:rPr>
+              <a:t>a </a:t>
+            </a:r>
+            <a:r>
+              <a:rPr sz="3500" b="1" dirty="0" err="1">
+                <a:solidFill>
+                  <a:srgbClr val="2F3338"/>
+                </a:solidFill>
+                <a:latin typeface="Segoe UI Semibold"/>
+              </a:rPr>
+              <a:t>operatorilor</a:t>
+            </a:r>
+            <a:endParaRPr sz="3500" b="1" dirty="0">
+              <a:solidFill>
+                <a:srgbClr val="2F3338"/>
+              </a:solidFill>
+              <a:latin typeface="Segoe UI Semibold"/>
+            </a:endParaRPr>
+          </a:p>
+        </p:txBody>
+      </p:sp>
+      <p:sp>
+        <p:nvSpPr>
+          <p:cNvPr id="3" name="Rounded Rectangle 2"/>
+          <p:cNvSpPr/>
+          <p:nvPr/>
+        </p:nvSpPr>
+        <p:spPr>
+          <a:xfrm>
+            <a:off x="1097280" y="2236913"/>
+            <a:ext cx="4846320" cy="3638973"/>
+          </a:xfrm>
+          <a:prstGeom prst="roundRect">
+            <a:avLst/>
+          </a:prstGeom>
+          <a:solidFill>
+            <a:srgbClr val="F5F8FC"/>
+          </a:solidFill>
+          <a:ln w="13970">
+            <a:solidFill>
+              <a:srgbClr val="D5DFEC"/>
+            </a:solidFill>
+          </a:ln>
+        </p:spPr>
+        <p:style>
+          <a:lnRef idx="1">
+            <a:schemeClr val="accent1"/>
+          </a:lnRef>
+          <a:fillRef idx="3">
+            <a:schemeClr val="accent1"/>
+          </a:fillRef>
+          <a:effectRef idx="2">
+            <a:schemeClr val="accent1"/>
+          </a:effectRef>
+          <a:fontRef idx="minor">
+            <a:schemeClr val="lt1"/>
+          </a:fontRef>
+        </p:style>
+        <p:txBody>
+          <a:bodyPr rtlCol="0" anchor="ctr"/>
+          <a:lstStyle/>
+          <a:p>
+            <a:pPr algn="ctr"/>
+            <a:endParaRPr/>
+          </a:p>
+        </p:txBody>
+      </p:sp>
+      <p:sp>
+        <p:nvSpPr>
+          <p:cNvPr id="4" name="Rounded Rectangle 3"/>
+          <p:cNvSpPr/>
+          <p:nvPr/>
+        </p:nvSpPr>
+        <p:spPr>
+          <a:xfrm>
+            <a:off x="6309360" y="2236913"/>
+            <a:ext cx="4846320" cy="3638973"/>
+          </a:xfrm>
+          <a:prstGeom prst="roundRect">
+            <a:avLst/>
+          </a:prstGeom>
+          <a:solidFill>
+            <a:srgbClr val="EEF4FF"/>
+          </a:solidFill>
+          <a:ln w="13970">
+            <a:solidFill>
+              <a:srgbClr val="D5DFEC"/>
+            </a:solidFill>
+          </a:ln>
+        </p:spPr>
+        <p:style>
+          <a:lnRef idx="1">
+            <a:schemeClr val="accent1"/>
+          </a:lnRef>
+          <a:fillRef idx="3">
+            <a:schemeClr val="accent1"/>
+          </a:fillRef>
+          <a:effectRef idx="2">
+            <a:schemeClr val="accent1"/>
+          </a:effectRef>
+          <a:fontRef idx="minor">
+            <a:schemeClr val="lt1"/>
+          </a:fontRef>
+        </p:style>
+        <p:txBody>
+          <a:bodyPr rtlCol="0" anchor="ctr"/>
+          <a:lstStyle/>
+          <a:p>
+            <a:pPr algn="ctr"/>
+            <a:endParaRPr/>
+          </a:p>
+        </p:txBody>
+      </p:sp>
+      <p:sp>
+        <p:nvSpPr>
+          <p:cNvPr id="5" name="TextBox 4"/>
+          <p:cNvSpPr txBox="1"/>
+          <p:nvPr/>
+        </p:nvSpPr>
+        <p:spPr>
+          <a:xfrm>
+            <a:off x="1325880" y="2419793"/>
+            <a:ext cx="4389120" cy="365760"/>
+          </a:xfrm>
+          <a:prstGeom prst="rect">
+            <a:avLst/>
+          </a:prstGeom>
+          <a:noFill/>
+        </p:spPr>
+        <p:txBody>
+          <a:bodyPr wrap="square">
+            <a:spAutoFit/>
+          </a:bodyPr>
+          <a:lstStyle/>
+          <a:p>
+            <a:pPr algn="l">
+              <a:spcBef>
+                <a:spcPts val="0"/>
+              </a:spcBef>
+              <a:spcAft>
+                <a:spcPts val="200"/>
+              </a:spcAft>
+            </a:pPr>
+            <a:r>
+              <a:rPr sz="1700" b="1" i="0">
+                <a:solidFill>
+                  <a:srgbClr val="1F4E79"/>
+                </a:solidFill>
+                <a:latin typeface="Segoe UI"/>
+              </a:rPr>
+              <a:t>Structura parserului (ReadP)</a:t>
+            </a:r>
+          </a:p>
+        </p:txBody>
+      </p:sp>
+      <p:sp>
+        <p:nvSpPr>
+          <p:cNvPr id="6" name="Rounded Rectangle 5"/>
+          <p:cNvSpPr/>
+          <p:nvPr/>
+        </p:nvSpPr>
+        <p:spPr>
+          <a:xfrm>
+            <a:off x="1325880" y="2831273"/>
+            <a:ext cx="4389120" cy="2113280"/>
+          </a:xfrm>
+          <a:prstGeom prst="roundRect">
+            <a:avLst/>
+          </a:prstGeom>
+          <a:solidFill>
+            <a:srgbClr val="1E1E1E"/>
+          </a:solidFill>
+          <a:ln w="13970">
+            <a:solidFill>
+              <a:srgbClr val="2D2D30"/>
+            </a:solidFill>
+          </a:ln>
+        </p:spPr>
+        <p:style>
+          <a:lnRef idx="1">
+            <a:schemeClr val="accent1"/>
+          </a:lnRef>
+          <a:fillRef idx="3">
+            <a:schemeClr val="accent1"/>
+          </a:fillRef>
+          <a:effectRef idx="2">
+            <a:schemeClr val="accent1"/>
+          </a:effectRef>
+          <a:fontRef idx="minor">
+            <a:schemeClr val="lt1"/>
+          </a:fontRef>
+        </p:style>
+        <p:txBody>
+          <a:bodyPr rtlCol="0" anchor="ctr"/>
+          <a:lstStyle/>
+          <a:p>
+            <a:pPr algn="ctr"/>
+            <a:endParaRPr/>
+          </a:p>
+        </p:txBody>
+      </p:sp>
+      <p:sp>
+        <p:nvSpPr>
+          <p:cNvPr id="7" name="TextBox 6"/>
+          <p:cNvSpPr txBox="1"/>
+          <p:nvPr/>
+        </p:nvSpPr>
+        <p:spPr>
+          <a:xfrm>
+            <a:off x="1490472" y="2922713"/>
+            <a:ext cx="4059935" cy="274320"/>
+          </a:xfrm>
+          <a:prstGeom prst="rect">
+            <a:avLst/>
+          </a:prstGeom>
+          <a:noFill/>
+        </p:spPr>
+        <p:txBody>
+          <a:bodyPr wrap="square">
+            <a:spAutoFit/>
+          </a:bodyPr>
+          <a:lstStyle/>
+          <a:p>
+            <a:pPr algn="l">
+              <a:spcBef>
+                <a:spcPts val="0"/>
+              </a:spcBef>
+              <a:spcAft>
+                <a:spcPts val="200"/>
+              </a:spcAft>
+            </a:pPr>
+            <a:r>
+              <a:rPr sz="1200" b="1" i="0">
+                <a:solidFill>
+                  <a:srgbClr val="9CDCFE"/>
+                </a:solidFill>
+                <a:latin typeface="Consolas"/>
+              </a:rPr>
+              <a:t>Parser pipeline</a:t>
+            </a:r>
+          </a:p>
+        </p:txBody>
+      </p:sp>
+      <p:sp>
+        <p:nvSpPr>
+          <p:cNvPr id="8" name="TextBox 7"/>
+          <p:cNvSpPr txBox="1"/>
+          <p:nvPr/>
+        </p:nvSpPr>
+        <p:spPr>
+          <a:xfrm>
+            <a:off x="1490472" y="3147585"/>
+            <a:ext cx="4059935" cy="3136392"/>
+          </a:xfrm>
+          <a:prstGeom prst="rect">
+            <a:avLst/>
+          </a:prstGeom>
+          <a:noFill/>
+        </p:spPr>
+        <p:txBody>
+          <a:bodyPr wrap="square">
+            <a:spAutoFit/>
+          </a:bodyPr>
+          <a:lstStyle/>
+          <a:p>
+            <a:pPr algn="l">
+              <a:spcBef>
+                <a:spcPts val="0"/>
+              </a:spcBef>
+              <a:spcAft>
+                <a:spcPts val="200"/>
+              </a:spcAft>
+            </a:pPr>
+            <a:r>
+              <a:rPr sz="1150" b="0" i="0">
+                <a:solidFill>
+                  <a:srgbClr val="D4D4D4"/>
+                </a:solidFill>
+                <a:latin typeface="Consolas"/>
+              </a:rPr>
+              <a:t>exprP  = chainl1 termP addOp</a:t>
+            </a:r>
+          </a:p>
+          <a:p>
+            <a:pPr algn="l">
+              <a:spcBef>
+                <a:spcPts val="0"/>
+              </a:spcBef>
+              <a:spcAft>
+                <a:spcPts val="200"/>
+              </a:spcAft>
+            </a:pPr>
+            <a:r>
+              <a:rPr sz="1150" b="0" i="0">
+                <a:solidFill>
+                  <a:srgbClr val="D4D4D4"/>
+                </a:solidFill>
+                <a:latin typeface="Consolas"/>
+              </a:rPr>
+              <a:t>termP  = chainl1 factorP mulOp</a:t>
+            </a:r>
+          </a:p>
+          <a:p>
+            <a:pPr algn="l">
+              <a:spcBef>
+                <a:spcPts val="0"/>
+              </a:spcBef>
+              <a:spcAft>
+                <a:spcPts val="200"/>
+              </a:spcAft>
+            </a:pPr>
+            <a:r>
+              <a:rPr sz="1150" b="0" i="0">
+                <a:solidFill>
+                  <a:srgbClr val="D4D4D4"/>
+                </a:solidFill>
+                <a:latin typeface="Consolas"/>
+              </a:rPr>
+              <a:t>factorP = negP +++ atomP</a:t>
+            </a:r>
+          </a:p>
+          <a:p>
+            <a:pPr algn="l">
+              <a:spcBef>
+                <a:spcPts val="0"/>
+              </a:spcBef>
+              <a:spcAft>
+                <a:spcPts val="200"/>
+              </a:spcAft>
+            </a:pPr>
+            <a:r>
+              <a:rPr sz="1150" b="0" i="0">
+                <a:solidFill>
+                  <a:srgbClr val="D4D4D4"/>
+                </a:solidFill>
+                <a:latin typeface="Consolas"/>
+              </a:rPr>
+              <a:t>atomP  = negConstP +++ parens exprP</a:t>
+            </a:r>
+          </a:p>
+          <a:p>
+            <a:pPr algn="l">
+              <a:spcBef>
+                <a:spcPts val="0"/>
+              </a:spcBef>
+              <a:spcAft>
+                <a:spcPts val="200"/>
+              </a:spcAft>
+            </a:pPr>
+            <a:r>
+              <a:rPr sz="1150" b="0" i="0">
+                <a:solidFill>
+                  <a:srgbClr val="D4D4D4"/>
+                </a:solidFill>
+                <a:latin typeface="Consolas"/>
+              </a:rPr>
+              <a:t>         +++ integerP +++ variableP</a:t>
+            </a:r>
+          </a:p>
+        </p:txBody>
+      </p:sp>
+      <p:sp>
+        <p:nvSpPr>
+          <p:cNvPr id="9" name="TextBox 8"/>
+          <p:cNvSpPr txBox="1"/>
+          <p:nvPr/>
+        </p:nvSpPr>
+        <p:spPr>
+          <a:xfrm>
+            <a:off x="6537960" y="2419793"/>
+            <a:ext cx="4389120" cy="365760"/>
+          </a:xfrm>
+          <a:prstGeom prst="rect">
+            <a:avLst/>
+          </a:prstGeom>
+          <a:noFill/>
+        </p:spPr>
+        <p:txBody>
+          <a:bodyPr wrap="square">
+            <a:spAutoFit/>
+          </a:bodyPr>
+          <a:lstStyle/>
+          <a:p>
+            <a:pPr algn="l">
+              <a:spcBef>
+                <a:spcPts val="0"/>
+              </a:spcBef>
+              <a:spcAft>
+                <a:spcPts val="200"/>
+              </a:spcAft>
+            </a:pPr>
+            <a:r>
+              <a:rPr sz="1700" b="1" i="0">
+                <a:solidFill>
+                  <a:srgbClr val="1F4E79"/>
+                </a:solidFill>
+                <a:latin typeface="Segoe UI"/>
+              </a:rPr>
+              <a:t>Detalii suportate in proiect</a:t>
+            </a:r>
+          </a:p>
+        </p:txBody>
+      </p:sp>
+      <p:sp>
+        <p:nvSpPr>
+          <p:cNvPr id="10" name="TextBox 9"/>
+          <p:cNvSpPr txBox="1"/>
+          <p:nvPr/>
+        </p:nvSpPr>
+        <p:spPr>
+          <a:xfrm>
+            <a:off x="6537960" y="2831273"/>
+            <a:ext cx="4389120" cy="3611880"/>
+          </a:xfrm>
+          <a:prstGeom prst="rect">
+            <a:avLst/>
+          </a:prstGeom>
+          <a:noFill/>
+        </p:spPr>
+        <p:txBody>
+          <a:bodyPr wrap="square">
+            <a:spAutoFit/>
+          </a:bodyPr>
+          <a:lstStyle/>
+          <a:p>
+            <a:pPr algn="l">
+              <a:spcBef>
+                <a:spcPts val="0"/>
+              </a:spcBef>
+              <a:spcAft>
+                <a:spcPts val="200"/>
+              </a:spcAft>
+            </a:pPr>
+            <a:r>
+              <a:rPr sz="1400" b="0" i="0">
+                <a:solidFill>
+                  <a:srgbClr val="2F3338"/>
+                </a:solidFill>
+                <a:latin typeface="Segoe UI"/>
+              </a:rPr>
+              <a:t>- spatii ignorate prin token/skipSpaces</a:t>
+            </a:r>
+          </a:p>
+          <a:p>
+            <a:pPr algn="l">
+              <a:spcBef>
+                <a:spcPts val="0"/>
+              </a:spcBef>
+              <a:spcAft>
+                <a:spcPts val="200"/>
+              </a:spcAft>
+            </a:pPr>
+            <a:r>
+              <a:rPr sz="1400" b="0" i="0">
+                <a:solidFill>
+                  <a:srgbClr val="2F3338"/>
+                </a:solidFill>
+                <a:latin typeface="Segoe UI"/>
+              </a:rPr>
+              <a:t>- variabile: litera + alfanumeric/underscore</a:t>
+            </a:r>
+          </a:p>
+          <a:p>
+            <a:pPr algn="l">
+              <a:spcBef>
+                <a:spcPts val="0"/>
+              </a:spcBef>
+              <a:spcAft>
+                <a:spcPts val="200"/>
+              </a:spcAft>
+            </a:pPr>
+            <a:r>
+              <a:rPr sz="1400" b="0" i="0">
+                <a:solidFill>
+                  <a:srgbClr val="2F3338"/>
+                </a:solidFill>
+                <a:latin typeface="Segoe UI"/>
+              </a:rPr>
+              <a:t>- constante negative explicite: (-3)</a:t>
+            </a:r>
+          </a:p>
+          <a:p>
+            <a:pPr algn="l">
+              <a:spcBef>
+                <a:spcPts val="0"/>
+              </a:spcBef>
+              <a:spcAft>
+                <a:spcPts val="200"/>
+              </a:spcAft>
+            </a:pPr>
+            <a:r>
+              <a:rPr sz="1400" b="0" i="0">
+                <a:solidFill>
+                  <a:srgbClr val="2F3338"/>
+                </a:solidFill>
+                <a:latin typeface="Segoe UI"/>
+              </a:rPr>
+              <a:t>- negare unara: -x, -(a+b)</a:t>
+            </a:r>
+          </a:p>
+          <a:p>
+            <a:pPr algn="l">
+              <a:spcBef>
+                <a:spcPts val="0"/>
+              </a:spcBef>
+              <a:spcAft>
+                <a:spcPts val="200"/>
+              </a:spcAft>
+            </a:pPr>
+            <a:r>
+              <a:rPr sz="1400" b="0" i="0">
+                <a:solidFill>
+                  <a:srgbClr val="2F3338"/>
+                </a:solidFill>
+                <a:latin typeface="Segoe UI"/>
+              </a:rPr>
+              <a:t>- parseExpr valideaza input complet (eof)</a:t>
+            </a:r>
+          </a:p>
+        </p:txBody>
+      </p:sp>
+    </p:spTree>
+    <p:extLst>
+      <p:ext uri="{BB962C8B-B14F-4D97-AF65-F5344CB8AC3E}">
+        <p14:creationId xmlns:p14="http://schemas.microsoft.com/office/powerpoint/2010/main" val="2713072793"/>
+      </p:ext>
+    </p:extLst>
+  </p:cSld>
+  <p:clrMapOvr>
+    <a:masterClrMapping/>
+  </p:clrMapOvr>
+</p:sld>
+</file>
+
+<file path=ppt/slides/slide21.xml><?xml version="1.0" encoding="utf-8"?>
+<p:sld xmlns:a="http://schemas.openxmlformats.org/drawingml/2006/main" xmlns:r="http://schemas.openxmlformats.org/officeDocument/2006/relationships" xmlns:p="http://schemas.openxmlformats.org/presentationml/2006/main">
+  <p:cSld>
+    <p:spTree>
+      <p:nvGrpSpPr>
+        <p:cNvPr id="1" name=""/>
+        <p:cNvGrpSpPr/>
+        <p:nvPr/>
+      </p:nvGrpSpPr>
+      <p:grpSpPr>
+        <a:xfrm>
+          <a:off x="0" y="0"/>
+          <a:ext cx="0" cy="0"/>
+          <a:chOff x="0" y="0"/>
+          <a:chExt cx="0" cy="0"/>
+        </a:xfrm>
+      </p:grpSpPr>
+      <p:sp>
+        <p:nvSpPr>
+          <p:cNvPr id="2" name="Title 1"/>
+          <p:cNvSpPr>
+            <a:spLocks noGrp="1"/>
+          </p:cNvSpPr>
+          <p:nvPr>
+            <p:ph type="title"/>
+          </p:nvPr>
+        </p:nvSpPr>
+        <p:spPr/>
+        <p:txBody>
+          <a:bodyPr/>
+          <a:lstStyle/>
+          <a:p>
+            <a:r>
+              <a:rPr sz="3500" b="1" dirty="0" err="1">
+                <a:solidFill>
+                  <a:srgbClr val="2F3338"/>
+                </a:solidFill>
+                <a:latin typeface="Segoe UI Semibold"/>
+              </a:rPr>
+              <a:t>Pretty.hs</a:t>
+            </a:r>
+            <a:r>
+              <a:rPr sz="3500" b="1" dirty="0">
+                <a:solidFill>
+                  <a:srgbClr val="2F3338"/>
+                </a:solidFill>
+                <a:latin typeface="Segoe UI Semibold"/>
+              </a:rPr>
+              <a:t>: </a:t>
+            </a:r>
+            <a:r>
+              <a:rPr sz="3500" b="1" dirty="0" err="1">
+                <a:solidFill>
+                  <a:srgbClr val="2F3338"/>
+                </a:solidFill>
+                <a:latin typeface="Segoe UI Semibold"/>
+              </a:rPr>
+              <a:t>reguli</a:t>
+            </a:r>
+            <a:r>
+              <a:rPr sz="3500" b="1" dirty="0">
+                <a:solidFill>
+                  <a:srgbClr val="2F3338"/>
+                </a:solidFill>
+                <a:latin typeface="Segoe UI Semibold"/>
+              </a:rPr>
+              <a:t> de </a:t>
+            </a:r>
+            <a:r>
+              <a:rPr sz="3500" b="1" dirty="0" err="1">
+                <a:solidFill>
+                  <a:srgbClr val="2F3338"/>
+                </a:solidFill>
+                <a:latin typeface="Segoe UI Semibold"/>
+              </a:rPr>
+              <a:t>parantezare</a:t>
+            </a:r>
+            <a:r>
+              <a:rPr sz="3500" b="1" dirty="0">
+                <a:solidFill>
+                  <a:srgbClr val="2F3338"/>
+                </a:solidFill>
+                <a:latin typeface="Segoe UI Semibold"/>
+              </a:rPr>
+              <a:t> </a:t>
+            </a:r>
+            <a:r>
+              <a:rPr lang="ro-RO" sz="3500" b="1" dirty="0" err="1">
+                <a:solidFill>
+                  <a:srgbClr val="2F3338"/>
+                </a:solidFill>
+                <a:latin typeface="Segoe UI Semibold"/>
+              </a:rPr>
+              <a:t>ș</a:t>
+            </a:r>
+            <a:r>
+              <a:rPr sz="3500" b="1" dirty="0" smtClean="0">
+                <a:solidFill>
+                  <a:srgbClr val="2F3338"/>
+                </a:solidFill>
+                <a:latin typeface="Segoe UI Semibold"/>
+              </a:rPr>
+              <a:t>i </a:t>
+            </a:r>
+            <a:r>
+              <a:rPr sz="3500" b="1" dirty="0" err="1" smtClean="0">
+                <a:solidFill>
+                  <a:srgbClr val="2F3338"/>
+                </a:solidFill>
+                <a:latin typeface="Segoe UI Semibold"/>
+              </a:rPr>
+              <a:t>preceden</a:t>
+            </a:r>
+            <a:r>
+              <a:rPr lang="ro-RO" sz="3500" b="1" dirty="0" smtClean="0">
+                <a:solidFill>
+                  <a:srgbClr val="2F3338"/>
+                </a:solidFill>
+                <a:latin typeface="Segoe UI Semibold"/>
+              </a:rPr>
+              <a:t>ță</a:t>
+            </a:r>
+            <a:endParaRPr sz="3500" b="1" dirty="0">
+              <a:solidFill>
+                <a:srgbClr val="2F3338"/>
+              </a:solidFill>
+              <a:latin typeface="Segoe UI Semibold"/>
+            </a:endParaRPr>
+          </a:p>
+        </p:txBody>
+      </p:sp>
+      <p:sp>
+        <p:nvSpPr>
+          <p:cNvPr id="3" name="Rounded Rectangle 2"/>
+          <p:cNvSpPr/>
+          <p:nvPr/>
+        </p:nvSpPr>
+        <p:spPr>
+          <a:xfrm>
+            <a:off x="1097280" y="2126842"/>
+            <a:ext cx="10058400" cy="2148840"/>
+          </a:xfrm>
+          <a:prstGeom prst="roundRect">
+            <a:avLst/>
+          </a:prstGeom>
+          <a:solidFill>
+            <a:srgbClr val="F5F8FC"/>
+          </a:solidFill>
+          <a:ln w="13970">
+            <a:solidFill>
+              <a:srgbClr val="D5DFEC"/>
+            </a:solidFill>
+          </a:ln>
+        </p:spPr>
+        <p:style>
+          <a:lnRef idx="1">
+            <a:schemeClr val="accent1"/>
+          </a:lnRef>
+          <a:fillRef idx="3">
+            <a:schemeClr val="accent1"/>
+          </a:fillRef>
+          <a:effectRef idx="2">
+            <a:schemeClr val="accent1"/>
+          </a:effectRef>
+          <a:fontRef idx="minor">
+            <a:schemeClr val="lt1"/>
+          </a:fontRef>
+        </p:style>
+        <p:txBody>
+          <a:bodyPr rtlCol="0" anchor="ctr"/>
+          <a:lstStyle/>
+          <a:p>
+            <a:pPr algn="ctr"/>
+            <a:endParaRPr/>
+          </a:p>
+        </p:txBody>
+      </p:sp>
+      <p:sp>
+        <p:nvSpPr>
+          <p:cNvPr id="4" name="TextBox 3"/>
+          <p:cNvSpPr txBox="1"/>
+          <p:nvPr/>
+        </p:nvSpPr>
+        <p:spPr>
+          <a:xfrm>
+            <a:off x="1325880" y="2355442"/>
+            <a:ext cx="9601200" cy="836126"/>
+          </a:xfrm>
+          <a:prstGeom prst="rect">
+            <a:avLst/>
+          </a:prstGeom>
+          <a:noFill/>
+        </p:spPr>
+        <p:txBody>
+          <a:bodyPr wrap="square">
+            <a:spAutoFit/>
+          </a:bodyPr>
+          <a:lstStyle/>
+          <a:p>
+            <a:pPr algn="l">
+              <a:spcBef>
+                <a:spcPts val="0"/>
+              </a:spcBef>
+              <a:spcAft>
+                <a:spcPts val="200"/>
+              </a:spcAft>
+            </a:pPr>
+            <a:r>
+              <a:rPr sz="1500" b="0" i="0" dirty="0">
+                <a:solidFill>
+                  <a:srgbClr val="2F3338"/>
+                </a:solidFill>
+                <a:latin typeface="Segoe UI"/>
+              </a:rPr>
+              <a:t>- pretty </a:t>
+            </a:r>
+            <a:r>
+              <a:rPr sz="1500" b="0" i="0" dirty="0" err="1" smtClean="0">
+                <a:solidFill>
+                  <a:srgbClr val="2F3338"/>
+                </a:solidFill>
+                <a:latin typeface="Segoe UI"/>
+              </a:rPr>
+              <a:t>porne</a:t>
+            </a:r>
+            <a:r>
+              <a:rPr lang="ro-RO" sz="1500" b="0" i="0" dirty="0" smtClean="0">
+                <a:solidFill>
+                  <a:srgbClr val="2F3338"/>
+                </a:solidFill>
+                <a:latin typeface="Segoe UI"/>
+              </a:rPr>
+              <a:t>ș</a:t>
+            </a:r>
+            <a:r>
+              <a:rPr sz="1500" b="0" i="0" dirty="0" err="1" smtClean="0">
+                <a:solidFill>
+                  <a:srgbClr val="2F3338"/>
+                </a:solidFill>
+                <a:latin typeface="Segoe UI"/>
+              </a:rPr>
+              <a:t>te</a:t>
+            </a:r>
+            <a:r>
+              <a:rPr sz="1500" b="0" i="0" dirty="0" smtClean="0">
+                <a:solidFill>
+                  <a:srgbClr val="2F3338"/>
+                </a:solidFill>
+                <a:latin typeface="Segoe UI"/>
+              </a:rPr>
+              <a:t> </a:t>
+            </a:r>
+            <a:r>
+              <a:rPr sz="1500" b="0" i="0" dirty="0">
+                <a:solidFill>
+                  <a:srgbClr val="2F3338"/>
+                </a:solidFill>
+                <a:latin typeface="Segoe UI"/>
+              </a:rPr>
+              <a:t>cu context 0 </a:t>
+            </a:r>
+            <a:r>
+              <a:rPr lang="ro-RO" sz="1500" dirty="0" err="1">
+                <a:solidFill>
+                  <a:srgbClr val="2F3338"/>
+                </a:solidFill>
+                <a:latin typeface="Segoe UI"/>
+              </a:rPr>
+              <a:t>ș</a:t>
+            </a:r>
+            <a:r>
+              <a:rPr sz="1500" b="0" i="0" dirty="0" smtClean="0">
+                <a:solidFill>
+                  <a:srgbClr val="2F3338"/>
+                </a:solidFill>
+                <a:latin typeface="Segoe UI"/>
+              </a:rPr>
+              <a:t>i </a:t>
+            </a:r>
+            <a:r>
+              <a:rPr sz="1500" b="0" i="0" dirty="0" err="1" smtClean="0">
+                <a:solidFill>
+                  <a:srgbClr val="2F3338"/>
+                </a:solidFill>
+                <a:latin typeface="Segoe UI"/>
+              </a:rPr>
+              <a:t>deleg</a:t>
+            </a:r>
+            <a:r>
+              <a:rPr lang="ro-RO" sz="1500" b="0" i="0" dirty="0" smtClean="0">
+                <a:solidFill>
+                  <a:srgbClr val="2F3338"/>
+                </a:solidFill>
+                <a:latin typeface="Segoe UI"/>
+              </a:rPr>
+              <a:t>ă</a:t>
+            </a:r>
+            <a:r>
+              <a:rPr sz="1500" b="0" i="0" dirty="0" smtClean="0">
+                <a:solidFill>
+                  <a:srgbClr val="2F3338"/>
+                </a:solidFill>
+                <a:latin typeface="Segoe UI"/>
+              </a:rPr>
+              <a:t> </a:t>
+            </a:r>
+            <a:r>
+              <a:rPr lang="ro-RO" sz="1500" dirty="0">
+                <a:solidFill>
+                  <a:srgbClr val="2F3338"/>
+                </a:solidFill>
+                <a:latin typeface="Segoe UI"/>
+              </a:rPr>
+              <a:t>î</a:t>
+            </a:r>
+            <a:r>
+              <a:rPr sz="1500" b="0" i="0" dirty="0" smtClean="0">
+                <a:solidFill>
+                  <a:srgbClr val="2F3338"/>
+                </a:solidFill>
+                <a:latin typeface="Segoe UI"/>
+              </a:rPr>
+              <a:t>n </a:t>
+            </a:r>
+            <a:r>
+              <a:rPr sz="1500" b="0" i="0" dirty="0" err="1">
+                <a:solidFill>
+                  <a:srgbClr val="2F3338"/>
+                </a:solidFill>
+                <a:latin typeface="Segoe UI"/>
+              </a:rPr>
+              <a:t>prettyPrec</a:t>
+            </a:r>
+            <a:endParaRPr sz="1500" b="0" i="0" dirty="0">
+              <a:solidFill>
+                <a:srgbClr val="2F3338"/>
+              </a:solidFill>
+              <a:latin typeface="Segoe UI"/>
+            </a:endParaRPr>
+          </a:p>
+          <a:p>
+            <a:pPr algn="l">
+              <a:spcBef>
+                <a:spcPts val="0"/>
+              </a:spcBef>
+              <a:spcAft>
+                <a:spcPts val="200"/>
+              </a:spcAft>
+            </a:pPr>
+            <a:r>
+              <a:rPr sz="1500" b="0" i="0" dirty="0">
+                <a:solidFill>
+                  <a:srgbClr val="2F3338"/>
+                </a:solidFill>
+                <a:latin typeface="Segoe UI"/>
+              </a:rPr>
+              <a:t>- </a:t>
+            </a:r>
+            <a:r>
+              <a:rPr sz="1500" b="0" i="0" dirty="0" err="1">
+                <a:solidFill>
+                  <a:srgbClr val="2F3338"/>
+                </a:solidFill>
+                <a:latin typeface="Segoe UI"/>
+              </a:rPr>
+              <a:t>atomPrec</a:t>
+            </a:r>
+            <a:r>
+              <a:rPr sz="1500" b="0" i="0" dirty="0">
+                <a:solidFill>
+                  <a:srgbClr val="2F3338"/>
+                </a:solidFill>
+                <a:latin typeface="Segoe UI"/>
+              </a:rPr>
+              <a:t>=11, </a:t>
+            </a:r>
+            <a:r>
+              <a:rPr sz="1500" b="0" i="0" dirty="0" err="1">
+                <a:solidFill>
+                  <a:srgbClr val="2F3338"/>
+                </a:solidFill>
+                <a:latin typeface="Segoe UI"/>
+              </a:rPr>
+              <a:t>negPrec</a:t>
+            </a:r>
+            <a:r>
+              <a:rPr sz="1500" b="0" i="0" dirty="0">
+                <a:solidFill>
+                  <a:srgbClr val="2F3338"/>
+                </a:solidFill>
+                <a:latin typeface="Segoe UI"/>
+              </a:rPr>
+              <a:t>=9, </a:t>
+            </a:r>
+            <a:r>
+              <a:rPr sz="1500" b="0" i="0" dirty="0" err="1">
+                <a:solidFill>
+                  <a:srgbClr val="2F3338"/>
+                </a:solidFill>
+                <a:latin typeface="Segoe UI"/>
+              </a:rPr>
+              <a:t>mulPrec</a:t>
+            </a:r>
+            <a:r>
+              <a:rPr sz="1500" b="0" i="0" dirty="0">
+                <a:solidFill>
+                  <a:srgbClr val="2F3338"/>
+                </a:solidFill>
+                <a:latin typeface="Segoe UI"/>
+              </a:rPr>
+              <a:t>=7, </a:t>
+            </a:r>
+            <a:r>
+              <a:rPr sz="1500" b="0" i="0" dirty="0" err="1">
+                <a:solidFill>
+                  <a:srgbClr val="2F3338"/>
+                </a:solidFill>
+                <a:latin typeface="Segoe UI"/>
+              </a:rPr>
+              <a:t>addPrec</a:t>
+            </a:r>
+            <a:r>
+              <a:rPr sz="1500" b="0" i="0" dirty="0">
+                <a:solidFill>
+                  <a:srgbClr val="2F3338"/>
+                </a:solidFill>
+                <a:latin typeface="Segoe UI"/>
+              </a:rPr>
+              <a:t>=6</a:t>
+            </a:r>
+          </a:p>
+          <a:p>
+            <a:pPr algn="l">
+              <a:spcBef>
+                <a:spcPts val="0"/>
+              </a:spcBef>
+              <a:spcAft>
+                <a:spcPts val="200"/>
+              </a:spcAft>
+            </a:pPr>
+            <a:r>
+              <a:rPr sz="1500" b="0" i="0" dirty="0">
+                <a:solidFill>
+                  <a:srgbClr val="2F3338"/>
+                </a:solidFill>
+                <a:latin typeface="Segoe UI"/>
+              </a:rPr>
+              <a:t>- </a:t>
+            </a:r>
+            <a:r>
+              <a:rPr sz="1500" b="0" i="0" dirty="0" err="1">
+                <a:solidFill>
+                  <a:srgbClr val="2F3338"/>
+                </a:solidFill>
+                <a:latin typeface="Segoe UI"/>
+              </a:rPr>
+              <a:t>wrapIf</a:t>
+            </a:r>
+            <a:r>
+              <a:rPr sz="1500" b="0" i="0" dirty="0">
+                <a:solidFill>
+                  <a:srgbClr val="2F3338"/>
+                </a:solidFill>
+                <a:latin typeface="Segoe UI"/>
+              </a:rPr>
+              <a:t> </a:t>
+            </a:r>
+            <a:r>
+              <a:rPr sz="1500" b="0" i="0" dirty="0" err="1" smtClean="0">
+                <a:solidFill>
+                  <a:srgbClr val="2F3338"/>
+                </a:solidFill>
+                <a:latin typeface="Segoe UI"/>
+              </a:rPr>
+              <a:t>adaug</a:t>
+            </a:r>
+            <a:r>
+              <a:rPr lang="ro-RO" sz="1500" b="0" i="0" dirty="0" smtClean="0">
+                <a:solidFill>
+                  <a:srgbClr val="2F3338"/>
+                </a:solidFill>
+                <a:latin typeface="Segoe UI"/>
+              </a:rPr>
+              <a:t>ă</a:t>
+            </a:r>
+            <a:r>
+              <a:rPr sz="1500" b="0" i="0" dirty="0" smtClean="0">
+                <a:solidFill>
+                  <a:srgbClr val="2F3338"/>
+                </a:solidFill>
+                <a:latin typeface="Segoe UI"/>
+              </a:rPr>
+              <a:t> </a:t>
+            </a:r>
+            <a:r>
+              <a:rPr sz="1500" b="0" i="0" dirty="0" err="1">
+                <a:solidFill>
+                  <a:srgbClr val="2F3338"/>
+                </a:solidFill>
+                <a:latin typeface="Segoe UI"/>
+              </a:rPr>
+              <a:t>paranteze</a:t>
+            </a:r>
+            <a:r>
+              <a:rPr sz="1500" b="0" i="0" dirty="0">
+                <a:solidFill>
+                  <a:srgbClr val="2F3338"/>
+                </a:solidFill>
+                <a:latin typeface="Segoe UI"/>
+              </a:rPr>
+              <a:t> </a:t>
+            </a:r>
+            <a:r>
+              <a:rPr sz="1500" b="0" i="0" dirty="0" err="1">
+                <a:solidFill>
+                  <a:srgbClr val="2F3338"/>
+                </a:solidFill>
+                <a:latin typeface="Segoe UI"/>
+              </a:rPr>
+              <a:t>doar</a:t>
+            </a:r>
+            <a:r>
+              <a:rPr sz="1500" b="0" i="0" dirty="0">
+                <a:solidFill>
+                  <a:srgbClr val="2F3338"/>
+                </a:solidFill>
+                <a:latin typeface="Segoe UI"/>
+              </a:rPr>
+              <a:t> </a:t>
+            </a:r>
+            <a:r>
+              <a:rPr sz="1500" b="0" i="0" dirty="0" smtClean="0">
+                <a:solidFill>
+                  <a:srgbClr val="2F3338"/>
+                </a:solidFill>
+                <a:latin typeface="Segoe UI"/>
+              </a:rPr>
+              <a:t>c</a:t>
+            </a:r>
+            <a:r>
+              <a:rPr lang="ro-RO" sz="1500" b="0" i="0" dirty="0" smtClean="0">
+                <a:solidFill>
+                  <a:srgbClr val="2F3338"/>
+                </a:solidFill>
+                <a:latin typeface="Segoe UI"/>
+              </a:rPr>
+              <a:t>â</a:t>
+            </a:r>
+            <a:r>
+              <a:rPr sz="1500" b="0" i="0" dirty="0" err="1" smtClean="0">
+                <a:solidFill>
+                  <a:srgbClr val="2F3338"/>
+                </a:solidFill>
+                <a:latin typeface="Segoe UI"/>
+              </a:rPr>
+              <a:t>nd</a:t>
+            </a:r>
+            <a:r>
+              <a:rPr sz="1500" b="0" i="0" dirty="0" smtClean="0">
+                <a:solidFill>
+                  <a:srgbClr val="2F3338"/>
+                </a:solidFill>
+                <a:latin typeface="Segoe UI"/>
+              </a:rPr>
+              <a:t> </a:t>
+            </a:r>
+            <a:r>
+              <a:rPr sz="1500" b="0" i="0" dirty="0" err="1">
+                <a:solidFill>
+                  <a:srgbClr val="2F3338"/>
+                </a:solidFill>
+                <a:latin typeface="Segoe UI"/>
+              </a:rPr>
+              <a:t>contextul</a:t>
+            </a:r>
+            <a:r>
+              <a:rPr sz="1500" b="0" i="0" dirty="0">
+                <a:solidFill>
+                  <a:srgbClr val="2F3338"/>
+                </a:solidFill>
+                <a:latin typeface="Segoe UI"/>
+              </a:rPr>
+              <a:t> o </a:t>
+            </a:r>
+            <a:r>
+              <a:rPr sz="1500" b="0" i="0" dirty="0" err="1">
+                <a:solidFill>
+                  <a:srgbClr val="2F3338"/>
+                </a:solidFill>
+                <a:latin typeface="Segoe UI"/>
+              </a:rPr>
+              <a:t>cere</a:t>
+            </a:r>
+            <a:endParaRPr sz="1500" b="0" i="0" dirty="0">
+              <a:solidFill>
+                <a:srgbClr val="2F3338"/>
+              </a:solidFill>
+              <a:latin typeface="Segoe UI"/>
+            </a:endParaRPr>
+          </a:p>
+        </p:txBody>
+      </p:sp>
+      <p:sp>
+        <p:nvSpPr>
+          <p:cNvPr id="5" name="Rounded Rectangle 4"/>
+          <p:cNvSpPr/>
+          <p:nvPr/>
+        </p:nvSpPr>
+        <p:spPr>
+          <a:xfrm>
+            <a:off x="1097280" y="4367121"/>
+            <a:ext cx="10058400" cy="1737360"/>
+          </a:xfrm>
+          <a:prstGeom prst="roundRect">
+            <a:avLst/>
+          </a:prstGeom>
+          <a:solidFill>
+            <a:srgbClr val="1E1E1E"/>
+          </a:solidFill>
+          <a:ln w="13970">
+            <a:solidFill>
+              <a:srgbClr val="2D2D30"/>
+            </a:solidFill>
+          </a:ln>
+        </p:spPr>
+        <p:style>
+          <a:lnRef idx="1">
+            <a:schemeClr val="accent1"/>
+          </a:lnRef>
+          <a:fillRef idx="3">
+            <a:schemeClr val="accent1"/>
+          </a:fillRef>
+          <a:effectRef idx="2">
+            <a:schemeClr val="accent1"/>
+          </a:effectRef>
+          <a:fontRef idx="minor">
+            <a:schemeClr val="lt1"/>
+          </a:fontRef>
+        </p:style>
+        <p:txBody>
+          <a:bodyPr rtlCol="0" anchor="ctr"/>
+          <a:lstStyle/>
+          <a:p>
+            <a:pPr algn="ctr"/>
+            <a:endParaRPr/>
+          </a:p>
+        </p:txBody>
+      </p:sp>
+      <p:sp>
+        <p:nvSpPr>
+          <p:cNvPr id="6" name="TextBox 5"/>
+          <p:cNvSpPr txBox="1"/>
+          <p:nvPr/>
+        </p:nvSpPr>
+        <p:spPr>
+          <a:xfrm>
+            <a:off x="1261872" y="4458561"/>
+            <a:ext cx="9729216" cy="274320"/>
+          </a:xfrm>
+          <a:prstGeom prst="rect">
+            <a:avLst/>
+          </a:prstGeom>
+          <a:noFill/>
+        </p:spPr>
+        <p:txBody>
+          <a:bodyPr wrap="square">
+            <a:spAutoFit/>
+          </a:bodyPr>
+          <a:lstStyle/>
+          <a:p>
+            <a:pPr algn="l">
+              <a:spcBef>
+                <a:spcPts val="0"/>
+              </a:spcBef>
+              <a:spcAft>
+                <a:spcPts val="200"/>
+              </a:spcAft>
+            </a:pPr>
+            <a:r>
+              <a:rPr sz="1200" b="1" i="0">
+                <a:solidFill>
+                  <a:srgbClr val="9CDCFE"/>
+                </a:solidFill>
+                <a:latin typeface="Consolas"/>
+              </a:rPr>
+              <a:t>Detaliu important</a:t>
+            </a:r>
+          </a:p>
+        </p:txBody>
+      </p:sp>
+      <p:sp>
+        <p:nvSpPr>
+          <p:cNvPr id="7" name="TextBox 6"/>
+          <p:cNvSpPr txBox="1"/>
+          <p:nvPr/>
+        </p:nvSpPr>
+        <p:spPr>
+          <a:xfrm>
+            <a:off x="1261872" y="4751170"/>
+            <a:ext cx="9729216" cy="1261872"/>
+          </a:xfrm>
+          <a:prstGeom prst="rect">
+            <a:avLst/>
+          </a:prstGeom>
+          <a:noFill/>
+        </p:spPr>
+        <p:txBody>
+          <a:bodyPr wrap="square">
+            <a:spAutoFit/>
+          </a:bodyPr>
+          <a:lstStyle/>
+          <a:p>
+            <a:pPr algn="l">
+              <a:spcBef>
+                <a:spcPts val="0"/>
+              </a:spcBef>
+              <a:spcAft>
+                <a:spcPts val="200"/>
+              </a:spcAft>
+            </a:pPr>
+            <a:r>
+              <a:rPr sz="1150" b="0" i="0">
+                <a:solidFill>
+                  <a:srgbClr val="D4D4D4"/>
+                </a:solidFill>
+                <a:latin typeface="Consolas"/>
+              </a:rPr>
+              <a:t>prettyConst n | n &lt; 0 = "(" ++ show n ++ ")"</a:t>
+            </a:r>
+          </a:p>
+          <a:p>
+            <a:pPr algn="l">
+              <a:spcBef>
+                <a:spcPts val="0"/>
+              </a:spcBef>
+              <a:spcAft>
+                <a:spcPts val="200"/>
+              </a:spcAft>
+            </a:pPr>
+            <a:r>
+              <a:rPr sz="1150" b="0" i="0">
+                <a:solidFill>
+                  <a:srgbClr val="D4D4D4"/>
+                </a:solidFill>
+                <a:latin typeface="Consolas"/>
+              </a:rPr>
+              <a:t>-- constantele negative sunt parenthezate pentru a evita confuzia cu Sub</a:t>
+            </a:r>
+          </a:p>
+        </p:txBody>
+      </p:sp>
+    </p:spTree>
+    <p:extLst>
+      <p:ext uri="{BB962C8B-B14F-4D97-AF65-F5344CB8AC3E}">
+        <p14:creationId xmlns:p14="http://schemas.microsoft.com/office/powerpoint/2010/main" val="700420125"/>
+      </p:ext>
+    </p:extLst>
+  </p:cSld>
+  <p:clrMapOvr>
+    <a:masterClrMapping/>
+  </p:clrMapOvr>
+</p:sld>
+</file>
+
+<file path=ppt/slides/slide22.xml><?xml version="1.0" encoding="utf-8"?>
+<p:sld xmlns:a="http://schemas.openxmlformats.org/drawingml/2006/main" xmlns:r="http://schemas.openxmlformats.org/officeDocument/2006/relationships" xmlns:p="http://schemas.openxmlformats.org/presentationml/2006/main">
+  <p:cSld>
+    <p:spTree>
+      <p:nvGrpSpPr>
+        <p:cNvPr id="1" name=""/>
+        <p:cNvGrpSpPr/>
+        <p:nvPr/>
+      </p:nvGrpSpPr>
+      <p:grpSpPr>
+        <a:xfrm>
+          <a:off x="0" y="0"/>
+          <a:ext cx="0" cy="0"/>
+          <a:chOff x="0" y="0"/>
+          <a:chExt cx="0" cy="0"/>
+        </a:xfrm>
+      </p:grpSpPr>
+      <p:sp>
+        <p:nvSpPr>
+          <p:cNvPr id="2" name="Title 1"/>
+          <p:cNvSpPr>
+            <a:spLocks noGrp="1"/>
+          </p:cNvSpPr>
+          <p:nvPr>
+            <p:ph type="title"/>
+          </p:nvPr>
+        </p:nvSpPr>
+        <p:spPr/>
+        <p:txBody>
+          <a:bodyPr/>
+          <a:lstStyle/>
+          <a:p>
+            <a:r>
+              <a:rPr sz="3500" b="1" dirty="0" err="1">
+                <a:solidFill>
+                  <a:srgbClr val="2F3338"/>
+                </a:solidFill>
+                <a:latin typeface="Segoe UI Semibold"/>
+              </a:rPr>
+              <a:t>Spec.hs</a:t>
+            </a:r>
+            <a:r>
+              <a:rPr sz="3500" b="1" dirty="0">
+                <a:solidFill>
+                  <a:srgbClr val="2F3338"/>
+                </a:solidFill>
+                <a:latin typeface="Segoe UI Semibold"/>
+              </a:rPr>
+              <a:t>: </a:t>
+            </a:r>
+            <a:r>
+              <a:rPr sz="3500" b="1" dirty="0" err="1">
+                <a:solidFill>
+                  <a:srgbClr val="2F3338"/>
+                </a:solidFill>
+                <a:latin typeface="Segoe UI Semibold"/>
+              </a:rPr>
+              <a:t>infrastructura</a:t>
+            </a:r>
+            <a:r>
+              <a:rPr sz="3500" b="1" dirty="0">
+                <a:solidFill>
+                  <a:srgbClr val="2F3338"/>
+                </a:solidFill>
+                <a:latin typeface="Segoe UI Semibold"/>
+              </a:rPr>
+              <a:t> de </a:t>
+            </a:r>
+            <a:r>
+              <a:rPr sz="3500" b="1" dirty="0" err="1">
+                <a:solidFill>
+                  <a:srgbClr val="2F3338"/>
+                </a:solidFill>
+                <a:latin typeface="Segoe UI Semibold"/>
+              </a:rPr>
+              <a:t>rulare</a:t>
+            </a:r>
+            <a:r>
+              <a:rPr sz="3500" b="1" dirty="0">
+                <a:solidFill>
+                  <a:srgbClr val="2F3338"/>
+                </a:solidFill>
+                <a:latin typeface="Segoe UI Semibold"/>
+              </a:rPr>
+              <a:t> a </a:t>
+            </a:r>
+            <a:r>
+              <a:rPr sz="3500" b="1" dirty="0" err="1" smtClean="0">
+                <a:solidFill>
+                  <a:srgbClr val="2F3338"/>
+                </a:solidFill>
+                <a:latin typeface="Segoe UI Semibold"/>
+              </a:rPr>
+              <a:t>propriet</a:t>
+            </a:r>
+            <a:r>
+              <a:rPr lang="ro-RO" sz="3500" b="1" dirty="0" smtClean="0">
+                <a:solidFill>
+                  <a:srgbClr val="2F3338"/>
+                </a:solidFill>
+                <a:latin typeface="Segoe UI Semibold"/>
+              </a:rPr>
+              <a:t>ăț</a:t>
+            </a:r>
+            <a:r>
+              <a:rPr sz="3500" b="1" dirty="0" err="1" smtClean="0">
+                <a:solidFill>
+                  <a:srgbClr val="2F3338"/>
+                </a:solidFill>
+                <a:latin typeface="Segoe UI Semibold"/>
+              </a:rPr>
+              <a:t>ilor</a:t>
+            </a:r>
+            <a:endParaRPr sz="3500" b="1" dirty="0">
+              <a:solidFill>
+                <a:srgbClr val="2F3338"/>
+              </a:solidFill>
+              <a:latin typeface="Segoe UI Semibold"/>
+            </a:endParaRPr>
+          </a:p>
+        </p:txBody>
+      </p:sp>
+      <p:sp>
+        <p:nvSpPr>
+          <p:cNvPr id="3" name="Rounded Rectangle 2"/>
+          <p:cNvSpPr/>
+          <p:nvPr/>
+        </p:nvSpPr>
+        <p:spPr>
+          <a:xfrm>
+            <a:off x="1097280" y="2253847"/>
+            <a:ext cx="4846320" cy="3232573"/>
+          </a:xfrm>
+          <a:prstGeom prst="roundRect">
+            <a:avLst/>
+          </a:prstGeom>
+          <a:solidFill>
+            <a:srgbClr val="F5F8FC"/>
+          </a:solidFill>
+          <a:ln w="13970">
+            <a:solidFill>
+              <a:srgbClr val="D5DFEC"/>
+            </a:solidFill>
+          </a:ln>
+        </p:spPr>
+        <p:style>
+          <a:lnRef idx="1">
+            <a:schemeClr val="accent1"/>
+          </a:lnRef>
+          <a:fillRef idx="3">
+            <a:schemeClr val="accent1"/>
+          </a:fillRef>
+          <a:effectRef idx="2">
+            <a:schemeClr val="accent1"/>
+          </a:effectRef>
+          <a:fontRef idx="minor">
+            <a:schemeClr val="lt1"/>
+          </a:fontRef>
+        </p:style>
+        <p:txBody>
+          <a:bodyPr rtlCol="0" anchor="ctr"/>
+          <a:lstStyle/>
+          <a:p>
+            <a:pPr algn="ctr"/>
+            <a:endParaRPr/>
+          </a:p>
+        </p:txBody>
+      </p:sp>
+      <p:sp>
+        <p:nvSpPr>
+          <p:cNvPr id="4" name="Rounded Rectangle 3"/>
+          <p:cNvSpPr/>
+          <p:nvPr/>
+        </p:nvSpPr>
+        <p:spPr>
+          <a:xfrm>
+            <a:off x="6309360" y="2253847"/>
+            <a:ext cx="4846320" cy="3232573"/>
+          </a:xfrm>
+          <a:prstGeom prst="roundRect">
+            <a:avLst/>
+          </a:prstGeom>
+          <a:solidFill>
+            <a:srgbClr val="EEF4FF"/>
+          </a:solidFill>
+          <a:ln w="13970">
+            <a:solidFill>
+              <a:srgbClr val="D5DFEC"/>
+            </a:solidFill>
+          </a:ln>
+        </p:spPr>
+        <p:style>
+          <a:lnRef idx="1">
+            <a:schemeClr val="accent1"/>
+          </a:lnRef>
+          <a:fillRef idx="3">
+            <a:schemeClr val="accent1"/>
+          </a:fillRef>
+          <a:effectRef idx="2">
+            <a:schemeClr val="accent1"/>
+          </a:effectRef>
+          <a:fontRef idx="minor">
+            <a:schemeClr val="lt1"/>
+          </a:fontRef>
+        </p:style>
+        <p:txBody>
+          <a:bodyPr rtlCol="0" anchor="ctr"/>
+          <a:lstStyle/>
+          <a:p>
+            <a:pPr algn="ctr"/>
+            <a:endParaRPr/>
+          </a:p>
+        </p:txBody>
+      </p:sp>
+      <p:sp>
+        <p:nvSpPr>
+          <p:cNvPr id="5" name="TextBox 4"/>
+          <p:cNvSpPr txBox="1"/>
+          <p:nvPr/>
+        </p:nvSpPr>
+        <p:spPr>
+          <a:xfrm>
+            <a:off x="1325880" y="2436727"/>
+            <a:ext cx="4389120" cy="365760"/>
+          </a:xfrm>
+          <a:prstGeom prst="rect">
+            <a:avLst/>
+          </a:prstGeom>
+          <a:noFill/>
+        </p:spPr>
+        <p:txBody>
+          <a:bodyPr wrap="square">
+            <a:spAutoFit/>
+          </a:bodyPr>
+          <a:lstStyle/>
+          <a:p>
+            <a:pPr algn="l">
+              <a:spcBef>
+                <a:spcPts val="0"/>
+              </a:spcBef>
+              <a:spcAft>
+                <a:spcPts val="200"/>
+              </a:spcAft>
+            </a:pPr>
+            <a:r>
+              <a:rPr sz="1700" b="1" i="0" dirty="0" smtClean="0">
+                <a:solidFill>
+                  <a:srgbClr val="1F4E79"/>
+                </a:solidFill>
+                <a:latin typeface="Segoe UI"/>
+              </a:rPr>
+              <a:t>Set</a:t>
+            </a:r>
+            <a:r>
+              <a:rPr lang="ro-RO" sz="1700" b="1" i="0" dirty="0" smtClean="0">
+                <a:solidFill>
+                  <a:srgbClr val="1F4E79"/>
+                </a:solidFill>
+                <a:latin typeface="Segoe UI"/>
+              </a:rPr>
+              <a:t>ă</a:t>
+            </a:r>
+            <a:r>
+              <a:rPr sz="1700" b="1" i="0" dirty="0" err="1" smtClean="0">
+                <a:solidFill>
+                  <a:srgbClr val="1F4E79"/>
+                </a:solidFill>
+                <a:latin typeface="Segoe UI"/>
+              </a:rPr>
+              <a:t>ri</a:t>
+            </a:r>
+            <a:r>
+              <a:rPr sz="1700" b="1" i="0" dirty="0" smtClean="0">
+                <a:solidFill>
+                  <a:srgbClr val="1F4E79"/>
+                </a:solidFill>
+                <a:latin typeface="Segoe UI"/>
+              </a:rPr>
+              <a:t> </a:t>
+            </a:r>
+            <a:r>
+              <a:rPr sz="1700" b="1" i="0" dirty="0">
+                <a:solidFill>
+                  <a:srgbClr val="1F4E79"/>
+                </a:solidFill>
+                <a:latin typeface="Segoe UI"/>
+              </a:rPr>
+              <a:t>de </a:t>
+            </a:r>
+            <a:r>
+              <a:rPr sz="1700" b="1" i="0" dirty="0" err="1" smtClean="0">
+                <a:solidFill>
+                  <a:srgbClr val="1F4E79"/>
+                </a:solidFill>
+                <a:latin typeface="Segoe UI"/>
+              </a:rPr>
+              <a:t>execu</a:t>
+            </a:r>
+            <a:r>
+              <a:rPr lang="ro-RO" sz="1700" b="1" i="0" dirty="0" smtClean="0">
+                <a:solidFill>
+                  <a:srgbClr val="1F4E79"/>
+                </a:solidFill>
+                <a:latin typeface="Segoe UI"/>
+              </a:rPr>
+              <a:t>ț</a:t>
+            </a:r>
+            <a:r>
+              <a:rPr sz="1700" b="1" i="0" dirty="0" err="1" smtClean="0">
+                <a:solidFill>
+                  <a:srgbClr val="1F4E79"/>
+                </a:solidFill>
+                <a:latin typeface="Segoe UI"/>
+              </a:rPr>
+              <a:t>ie</a:t>
+            </a:r>
+            <a:endParaRPr sz="1700" b="1" i="0" dirty="0">
+              <a:solidFill>
+                <a:srgbClr val="1F4E79"/>
+              </a:solidFill>
+              <a:latin typeface="Segoe UI"/>
+            </a:endParaRPr>
+          </a:p>
+        </p:txBody>
+      </p:sp>
+      <p:sp>
+        <p:nvSpPr>
+          <p:cNvPr id="6" name="Rounded Rectangle 5"/>
+          <p:cNvSpPr/>
+          <p:nvPr/>
+        </p:nvSpPr>
+        <p:spPr>
+          <a:xfrm>
+            <a:off x="1325880" y="2848207"/>
+            <a:ext cx="4389120" cy="2240280"/>
+          </a:xfrm>
+          <a:prstGeom prst="roundRect">
+            <a:avLst/>
+          </a:prstGeom>
+          <a:solidFill>
+            <a:srgbClr val="1E1E1E"/>
+          </a:solidFill>
+          <a:ln w="13970">
+            <a:solidFill>
+              <a:srgbClr val="2D2D30"/>
+            </a:solidFill>
+          </a:ln>
+        </p:spPr>
+        <p:style>
+          <a:lnRef idx="1">
+            <a:schemeClr val="accent1"/>
+          </a:lnRef>
+          <a:fillRef idx="3">
+            <a:schemeClr val="accent1"/>
+          </a:fillRef>
+          <a:effectRef idx="2">
+            <a:schemeClr val="accent1"/>
+          </a:effectRef>
+          <a:fontRef idx="minor">
+            <a:schemeClr val="lt1"/>
+          </a:fontRef>
+        </p:style>
+        <p:txBody>
+          <a:bodyPr rtlCol="0" anchor="ctr"/>
+          <a:lstStyle/>
+          <a:p>
+            <a:pPr algn="ctr"/>
+            <a:endParaRPr/>
+          </a:p>
+        </p:txBody>
+      </p:sp>
+      <p:sp>
+        <p:nvSpPr>
+          <p:cNvPr id="7" name="TextBox 6"/>
+          <p:cNvSpPr txBox="1"/>
+          <p:nvPr/>
+        </p:nvSpPr>
+        <p:spPr>
+          <a:xfrm>
+            <a:off x="1490472" y="2939647"/>
+            <a:ext cx="4059935" cy="274320"/>
+          </a:xfrm>
+          <a:prstGeom prst="rect">
+            <a:avLst/>
+          </a:prstGeom>
+          <a:noFill/>
+        </p:spPr>
+        <p:txBody>
+          <a:bodyPr wrap="square">
+            <a:spAutoFit/>
+          </a:bodyPr>
+          <a:lstStyle/>
+          <a:p>
+            <a:pPr algn="l">
+              <a:spcBef>
+                <a:spcPts val="0"/>
+              </a:spcBef>
+              <a:spcAft>
+                <a:spcPts val="200"/>
+              </a:spcAft>
+            </a:pPr>
+            <a:r>
+              <a:rPr sz="1200" b="1" i="0">
+                <a:solidFill>
+                  <a:srgbClr val="9CDCFE"/>
+                </a:solidFill>
+                <a:latin typeface="Consolas"/>
+              </a:rPr>
+              <a:t>runProperty</a:t>
+            </a:r>
+          </a:p>
+        </p:txBody>
+      </p:sp>
+      <p:sp>
+        <p:nvSpPr>
+          <p:cNvPr id="8" name="TextBox 7"/>
+          <p:cNvSpPr txBox="1"/>
+          <p:nvPr/>
+        </p:nvSpPr>
+        <p:spPr>
+          <a:xfrm>
+            <a:off x="1490472" y="3232255"/>
+            <a:ext cx="4059935" cy="1764792"/>
+          </a:xfrm>
+          <a:prstGeom prst="rect">
+            <a:avLst/>
+          </a:prstGeom>
+          <a:noFill/>
+        </p:spPr>
+        <p:txBody>
+          <a:bodyPr wrap="square">
+            <a:spAutoFit/>
+          </a:bodyPr>
+          <a:lstStyle/>
+          <a:p>
+            <a:pPr algn="l">
+              <a:spcBef>
+                <a:spcPts val="0"/>
+              </a:spcBef>
+              <a:spcAft>
+                <a:spcPts val="200"/>
+              </a:spcAft>
+            </a:pPr>
+            <a:r>
+              <a:rPr sz="1150" b="0" i="0">
+                <a:solidFill>
+                  <a:srgbClr val="D4D4D4"/>
+                </a:solidFill>
+                <a:latin typeface="Consolas"/>
+              </a:rPr>
+              <a:t>runProperty descr prop = do</a:t>
+            </a:r>
+          </a:p>
+          <a:p>
+            <a:pPr algn="l">
+              <a:spcBef>
+                <a:spcPts val="0"/>
+              </a:spcBef>
+              <a:spcAft>
+                <a:spcPts val="200"/>
+              </a:spcAft>
+            </a:pPr>
+            <a:r>
+              <a:rPr sz="1150" b="0" i="0">
+                <a:solidFill>
+                  <a:srgbClr val="D4D4D4"/>
+                </a:solidFill>
+                <a:latin typeface="Consolas"/>
+              </a:rPr>
+              <a:t>  putStrLn ("-- " ++ descr)</a:t>
+            </a:r>
+          </a:p>
+          <a:p>
+            <a:pPr algn="l">
+              <a:spcBef>
+                <a:spcPts val="0"/>
+              </a:spcBef>
+              <a:spcAft>
+                <a:spcPts val="200"/>
+              </a:spcAft>
+            </a:pPr>
+            <a:r>
+              <a:rPr sz="1150" b="0" i="0">
+                <a:solidFill>
+                  <a:srgbClr val="D4D4D4"/>
+                </a:solidFill>
+                <a:latin typeface="Consolas"/>
+              </a:rPr>
+              <a:t>  quickCheckWith stdArgs</a:t>
+            </a:r>
+          </a:p>
+          <a:p>
+            <a:pPr algn="l">
+              <a:spcBef>
+                <a:spcPts val="0"/>
+              </a:spcBef>
+              <a:spcAft>
+                <a:spcPts val="200"/>
+              </a:spcAft>
+            </a:pPr>
+            <a:r>
+              <a:rPr sz="1150" b="0" i="0">
+                <a:solidFill>
+                  <a:srgbClr val="D4D4D4"/>
+                </a:solidFill>
+                <a:latin typeface="Consolas"/>
+              </a:rPr>
+              <a:t>    { maxSuccess = 120</a:t>
+            </a:r>
+          </a:p>
+          <a:p>
+            <a:pPr algn="l">
+              <a:spcBef>
+                <a:spcPts val="0"/>
+              </a:spcBef>
+              <a:spcAft>
+                <a:spcPts val="200"/>
+              </a:spcAft>
+            </a:pPr>
+            <a:r>
+              <a:rPr sz="1150" b="0" i="0">
+                <a:solidFill>
+                  <a:srgbClr val="D4D4D4"/>
+                </a:solidFill>
+                <a:latin typeface="Consolas"/>
+              </a:rPr>
+              <a:t>    , maxSize = 12</a:t>
+            </a:r>
+          </a:p>
+          <a:p>
+            <a:pPr algn="l">
+              <a:spcBef>
+                <a:spcPts val="0"/>
+              </a:spcBef>
+              <a:spcAft>
+                <a:spcPts val="200"/>
+              </a:spcAft>
+            </a:pPr>
+            <a:r>
+              <a:rPr sz="1150" b="0" i="0">
+                <a:solidFill>
+                  <a:srgbClr val="D4D4D4"/>
+                </a:solidFill>
+                <a:latin typeface="Consolas"/>
+              </a:rPr>
+              <a:t>    } prop</a:t>
+            </a:r>
+          </a:p>
+        </p:txBody>
+      </p:sp>
+      <p:sp>
+        <p:nvSpPr>
+          <p:cNvPr id="9" name="TextBox 8"/>
+          <p:cNvSpPr txBox="1"/>
+          <p:nvPr/>
+        </p:nvSpPr>
+        <p:spPr>
+          <a:xfrm>
+            <a:off x="6537960" y="2436727"/>
+            <a:ext cx="4389120" cy="365760"/>
+          </a:xfrm>
+          <a:prstGeom prst="rect">
+            <a:avLst/>
+          </a:prstGeom>
+          <a:noFill/>
+        </p:spPr>
+        <p:txBody>
+          <a:bodyPr wrap="square">
+            <a:spAutoFit/>
+          </a:bodyPr>
+          <a:lstStyle/>
+          <a:p>
+            <a:pPr algn="l">
+              <a:spcBef>
+                <a:spcPts val="0"/>
+              </a:spcBef>
+              <a:spcAft>
+                <a:spcPts val="200"/>
+              </a:spcAft>
+            </a:pPr>
+            <a:r>
+              <a:rPr sz="1700" b="1" i="0" dirty="0" err="1">
+                <a:solidFill>
+                  <a:srgbClr val="1F4E79"/>
+                </a:solidFill>
+                <a:latin typeface="Segoe UI"/>
+              </a:rPr>
+              <a:t>Ordinea</a:t>
+            </a:r>
+            <a:r>
+              <a:rPr sz="1700" b="1" i="0" dirty="0">
+                <a:solidFill>
+                  <a:srgbClr val="1F4E79"/>
+                </a:solidFill>
+                <a:latin typeface="Segoe UI"/>
+              </a:rPr>
+              <a:t> </a:t>
+            </a:r>
+            <a:r>
+              <a:rPr sz="1700" b="1" i="0" dirty="0" err="1" smtClean="0">
+                <a:solidFill>
+                  <a:srgbClr val="1F4E79"/>
+                </a:solidFill>
+                <a:latin typeface="Segoe UI"/>
+              </a:rPr>
+              <a:t>rulat</a:t>
+            </a:r>
+            <a:r>
+              <a:rPr lang="ro-RO" sz="1700" b="1" i="0" dirty="0" smtClean="0">
+                <a:solidFill>
+                  <a:srgbClr val="1F4E79"/>
+                </a:solidFill>
+                <a:latin typeface="Segoe UI"/>
+              </a:rPr>
+              <a:t>ă</a:t>
+            </a:r>
+            <a:r>
+              <a:rPr sz="1700" b="1" i="0" dirty="0" smtClean="0">
+                <a:solidFill>
+                  <a:srgbClr val="1F4E79"/>
+                </a:solidFill>
+                <a:latin typeface="Segoe UI"/>
+              </a:rPr>
+              <a:t> </a:t>
+            </a:r>
+            <a:r>
+              <a:rPr lang="ro-RO" sz="1700" b="1" dirty="0">
+                <a:solidFill>
+                  <a:srgbClr val="1F4E79"/>
+                </a:solidFill>
+                <a:latin typeface="Segoe UI"/>
+              </a:rPr>
+              <a:t>î</a:t>
+            </a:r>
+            <a:r>
+              <a:rPr sz="1700" b="1" i="0" dirty="0" smtClean="0">
+                <a:solidFill>
+                  <a:srgbClr val="1F4E79"/>
+                </a:solidFill>
+                <a:latin typeface="Segoe UI"/>
+              </a:rPr>
+              <a:t>n </a:t>
+            </a:r>
+            <a:r>
+              <a:rPr sz="1700" b="1" i="0" dirty="0">
+                <a:solidFill>
+                  <a:srgbClr val="1F4E79"/>
+                </a:solidFill>
+                <a:latin typeface="Segoe UI"/>
+              </a:rPr>
+              <a:t>main</a:t>
+            </a:r>
+          </a:p>
+        </p:txBody>
+      </p:sp>
+      <p:sp>
+        <p:nvSpPr>
+          <p:cNvPr id="10" name="TextBox 9"/>
+          <p:cNvSpPr txBox="1"/>
+          <p:nvPr/>
+        </p:nvSpPr>
+        <p:spPr>
+          <a:xfrm>
+            <a:off x="6537960" y="2848207"/>
+            <a:ext cx="4389120" cy="3611880"/>
+          </a:xfrm>
+          <a:prstGeom prst="rect">
+            <a:avLst/>
+          </a:prstGeom>
+          <a:noFill/>
+        </p:spPr>
+        <p:txBody>
+          <a:bodyPr wrap="square">
+            <a:spAutoFit/>
+          </a:bodyPr>
+          <a:lstStyle/>
+          <a:p>
+            <a:pPr algn="l">
+              <a:spcBef>
+                <a:spcPts val="0"/>
+              </a:spcBef>
+              <a:spcAft>
+                <a:spcPts val="200"/>
+              </a:spcAft>
+            </a:pPr>
+            <a:r>
+              <a:rPr sz="1400" b="0" i="0">
+                <a:solidFill>
+                  <a:srgbClr val="2F3338"/>
+                </a:solidFill>
+                <a:latin typeface="Segoe UI"/>
+              </a:rPr>
+              <a:t>- 2 proprietati semantice</a:t>
+            </a:r>
+          </a:p>
+          <a:p>
+            <a:pPr algn="l">
+              <a:spcBef>
+                <a:spcPts val="0"/>
+              </a:spcBef>
+              <a:spcAft>
+                <a:spcPts val="200"/>
+              </a:spcAft>
+            </a:pPr>
+            <a:r>
+              <a:rPr sz="1400" b="0" i="0">
+                <a:solidFill>
+                  <a:srgbClr val="2F3338"/>
+                </a:solidFill>
+                <a:latin typeface="Segoe UI"/>
+              </a:rPr>
+              <a:t>- 4 proprietati structurale</a:t>
+            </a:r>
+          </a:p>
+          <a:p>
+            <a:pPr algn="l">
+              <a:spcBef>
+                <a:spcPts val="0"/>
+              </a:spcBef>
+              <a:spcAft>
+                <a:spcPts val="200"/>
+              </a:spcAft>
+            </a:pPr>
+            <a:r>
+              <a:rPr sz="1400" b="0" i="0">
+                <a:solidFill>
+                  <a:srgbClr val="2F3338"/>
+                </a:solidFill>
+                <a:latin typeface="Segoe UI"/>
+              </a:rPr>
+              <a:t>- 4 proprietati algebrice</a:t>
+            </a:r>
+          </a:p>
+          <a:p>
+            <a:pPr algn="l">
+              <a:spcBef>
+                <a:spcPts val="0"/>
+              </a:spcBef>
+              <a:spcAft>
+                <a:spcPts val="200"/>
+              </a:spcAft>
+            </a:pPr>
+            <a:r>
+              <a:rPr sz="1400" b="0" i="0">
+                <a:solidFill>
+                  <a:srgbClr val="2F3338"/>
+                </a:solidFill>
+                <a:latin typeface="Segoe UI"/>
+              </a:rPr>
+              <a:t>- 3 neutre/absorbante</a:t>
+            </a:r>
+          </a:p>
+          <a:p>
+            <a:pPr algn="l">
+              <a:spcBef>
+                <a:spcPts val="0"/>
+              </a:spcBef>
+              <a:spcAft>
+                <a:spcPts val="200"/>
+              </a:spcAft>
+            </a:pPr>
+            <a:r>
+              <a:rPr sz="1400" b="0" i="0">
+                <a:solidFill>
+                  <a:srgbClr val="2F3338"/>
+                </a:solidFill>
+                <a:latin typeface="Segoe UI"/>
+              </a:rPr>
+              <a:t>- 2 negatie/scadere</a:t>
+            </a:r>
+          </a:p>
+          <a:p>
+            <a:pPr algn="l">
+              <a:spcBef>
+                <a:spcPts val="0"/>
+              </a:spcBef>
+              <a:spcAft>
+                <a:spcPts val="200"/>
+              </a:spcAft>
+            </a:pPr>
+            <a:r>
+              <a:rPr sz="1400" b="0" i="0">
+                <a:solidFill>
+                  <a:srgbClr val="2F3338"/>
+                </a:solidFill>
+                <a:latin typeface="Segoe UI"/>
+              </a:rPr>
+              <a:t>- 1 substitutie (total: 16)</a:t>
+            </a:r>
+          </a:p>
+        </p:txBody>
+      </p:sp>
+    </p:spTree>
+    <p:extLst>
+      <p:ext uri="{BB962C8B-B14F-4D97-AF65-F5344CB8AC3E}">
+        <p14:creationId xmlns:p14="http://schemas.microsoft.com/office/powerpoint/2010/main" val="2794709070"/>
+      </p:ext>
+    </p:extLst>
+  </p:cSld>
+  <p:clrMapOvr>
+    <a:masterClrMapping/>
+  </p:clrMapOvr>
+</p:sld>
+</file>
+
+<file path=ppt/slides/slide23.xml><?xml version="1.0" encoding="utf-8"?>
+<p:sld xmlns:a="http://schemas.openxmlformats.org/drawingml/2006/main" xmlns:r="http://schemas.openxmlformats.org/officeDocument/2006/relationships" xmlns:p="http://schemas.openxmlformats.org/presentationml/2006/main">
+  <p:cSld>
+    <p:spTree>
+      <p:nvGrpSpPr>
+        <p:cNvPr id="1" name=""/>
+        <p:cNvGrpSpPr/>
+        <p:nvPr/>
+      </p:nvGrpSpPr>
+      <p:grpSpPr>
+        <a:xfrm>
+          <a:off x="0" y="0"/>
+          <a:ext cx="0" cy="0"/>
+          <a:chOff x="0" y="0"/>
+          <a:chExt cx="0" cy="0"/>
+        </a:xfrm>
+      </p:grpSpPr>
+      <p:sp>
+        <p:nvSpPr>
+          <p:cNvPr id="2" name="Title 1"/>
+          <p:cNvSpPr>
+            <a:spLocks noGrp="1"/>
+          </p:cNvSpPr>
+          <p:nvPr>
+            <p:ph type="title"/>
+          </p:nvPr>
+        </p:nvSpPr>
+        <p:spPr/>
+        <p:txBody>
+          <a:bodyPr/>
+          <a:lstStyle/>
+          <a:p>
+            <a:r>
+              <a:rPr sz="3500" b="1" dirty="0" err="1">
+                <a:solidFill>
+                  <a:srgbClr val="2F3338"/>
+                </a:solidFill>
+                <a:latin typeface="Segoe UI Semibold"/>
+              </a:rPr>
+              <a:t>Rezultate</a:t>
+            </a:r>
+            <a:r>
+              <a:rPr sz="3500" b="1" dirty="0">
+                <a:solidFill>
+                  <a:srgbClr val="2F3338"/>
+                </a:solidFill>
+                <a:latin typeface="Segoe UI Semibold"/>
+              </a:rPr>
+              <a:t> </a:t>
+            </a:r>
+            <a:r>
+              <a:rPr sz="3500" b="1" dirty="0" err="1">
+                <a:solidFill>
+                  <a:srgbClr val="2F3338"/>
+                </a:solidFill>
+                <a:latin typeface="Segoe UI Semibold"/>
+              </a:rPr>
+              <a:t>reale</a:t>
+            </a:r>
+            <a:r>
+              <a:rPr sz="3500" b="1" dirty="0">
+                <a:solidFill>
+                  <a:srgbClr val="2F3338"/>
+                </a:solidFill>
+                <a:latin typeface="Segoe UI Semibold"/>
+              </a:rPr>
+              <a:t> din spec.exe (</a:t>
+            </a:r>
+            <a:r>
+              <a:rPr sz="3500" b="1" dirty="0" err="1">
+                <a:solidFill>
+                  <a:srgbClr val="2F3338"/>
+                </a:solidFill>
+                <a:latin typeface="Segoe UI Semibold"/>
+              </a:rPr>
+              <a:t>rulare</a:t>
+            </a:r>
+            <a:r>
+              <a:rPr sz="3500" b="1" dirty="0">
+                <a:solidFill>
+                  <a:srgbClr val="2F3338"/>
+                </a:solidFill>
+                <a:latin typeface="Segoe UI Semibold"/>
+              </a:rPr>
+              <a:t> </a:t>
+            </a:r>
+            <a:r>
+              <a:rPr sz="3500" b="1" dirty="0" err="1" smtClean="0">
+                <a:solidFill>
+                  <a:srgbClr val="2F3338"/>
+                </a:solidFill>
+                <a:latin typeface="Segoe UI Semibold"/>
+              </a:rPr>
+              <a:t>curent</a:t>
+            </a:r>
+            <a:r>
+              <a:rPr lang="ro-RO" sz="3500" b="1" dirty="0" smtClean="0">
+                <a:solidFill>
+                  <a:srgbClr val="2F3338"/>
+                </a:solidFill>
+                <a:latin typeface="Segoe UI Semibold"/>
+              </a:rPr>
+              <a:t>ă</a:t>
+            </a:r>
+            <a:r>
+              <a:rPr sz="3500" b="1" dirty="0" smtClean="0">
+                <a:solidFill>
+                  <a:srgbClr val="2F3338"/>
+                </a:solidFill>
+                <a:latin typeface="Segoe UI Semibold"/>
+              </a:rPr>
+              <a:t>)</a:t>
+            </a:r>
+            <a:endParaRPr sz="3500" b="1" dirty="0">
+              <a:solidFill>
+                <a:srgbClr val="2F3338"/>
+              </a:solidFill>
+              <a:latin typeface="Segoe UI Semibold"/>
+            </a:endParaRPr>
+          </a:p>
+        </p:txBody>
+      </p:sp>
+      <p:sp>
+        <p:nvSpPr>
+          <p:cNvPr id="3" name="Rounded Rectangle 2"/>
+          <p:cNvSpPr/>
+          <p:nvPr/>
+        </p:nvSpPr>
+        <p:spPr>
+          <a:xfrm>
+            <a:off x="1097280" y="2524791"/>
+            <a:ext cx="10058400" cy="2707640"/>
+          </a:xfrm>
+          <a:prstGeom prst="roundRect">
+            <a:avLst/>
+          </a:prstGeom>
+          <a:solidFill>
+            <a:srgbClr val="1E1E1E"/>
+          </a:solidFill>
+          <a:ln w="13970">
+            <a:solidFill>
+              <a:srgbClr val="2D2D30"/>
+            </a:solidFill>
+          </a:ln>
+        </p:spPr>
+        <p:style>
+          <a:lnRef idx="1">
+            <a:schemeClr val="accent1"/>
+          </a:lnRef>
+          <a:fillRef idx="3">
+            <a:schemeClr val="accent1"/>
+          </a:fillRef>
+          <a:effectRef idx="2">
+            <a:schemeClr val="accent1"/>
+          </a:effectRef>
+          <a:fontRef idx="minor">
+            <a:schemeClr val="lt1"/>
+          </a:fontRef>
+        </p:style>
+        <p:txBody>
+          <a:bodyPr rtlCol="0" anchor="ctr"/>
+          <a:lstStyle/>
+          <a:p>
+            <a:pPr algn="ctr"/>
+            <a:endParaRPr/>
+          </a:p>
+        </p:txBody>
+      </p:sp>
+      <p:sp>
+        <p:nvSpPr>
+          <p:cNvPr id="4" name="TextBox 3"/>
+          <p:cNvSpPr txBox="1"/>
+          <p:nvPr/>
+        </p:nvSpPr>
+        <p:spPr>
+          <a:xfrm>
+            <a:off x="1261872" y="2616231"/>
+            <a:ext cx="9729216" cy="274320"/>
+          </a:xfrm>
+          <a:prstGeom prst="rect">
+            <a:avLst/>
+          </a:prstGeom>
+          <a:noFill/>
+        </p:spPr>
+        <p:txBody>
+          <a:bodyPr wrap="square">
+            <a:spAutoFit/>
+          </a:bodyPr>
+          <a:lstStyle/>
+          <a:p>
+            <a:pPr algn="l">
+              <a:spcBef>
+                <a:spcPts val="0"/>
+              </a:spcBef>
+              <a:spcAft>
+                <a:spcPts val="200"/>
+              </a:spcAft>
+            </a:pPr>
+            <a:r>
+              <a:rPr sz="1200" b="1" i="0">
+                <a:solidFill>
+                  <a:srgbClr val="9CDCFE"/>
+                </a:solidFill>
+                <a:latin typeface="Consolas"/>
+              </a:rPr>
+              <a:t>Output observat local</a:t>
+            </a:r>
+          </a:p>
+        </p:txBody>
+      </p:sp>
+      <p:sp>
+        <p:nvSpPr>
+          <p:cNvPr id="5" name="TextBox 4"/>
+          <p:cNvSpPr txBox="1"/>
+          <p:nvPr/>
+        </p:nvSpPr>
+        <p:spPr>
+          <a:xfrm>
+            <a:off x="1261872" y="2908839"/>
+            <a:ext cx="9729216" cy="4050791"/>
+          </a:xfrm>
+          <a:prstGeom prst="rect">
+            <a:avLst/>
+          </a:prstGeom>
+          <a:noFill/>
+        </p:spPr>
+        <p:txBody>
+          <a:bodyPr wrap="square">
+            <a:spAutoFit/>
+          </a:bodyPr>
+          <a:lstStyle/>
+          <a:p>
+            <a:pPr algn="l">
+              <a:spcBef>
+                <a:spcPts val="0"/>
+              </a:spcBef>
+              <a:spcAft>
+                <a:spcPts val="200"/>
+              </a:spcAft>
+            </a:pPr>
+            <a:r>
+              <a:rPr sz="1150" b="0" i="0">
+                <a:solidFill>
+                  <a:srgbClr val="D4D4D4"/>
+                </a:solidFill>
+                <a:latin typeface="Consolas"/>
+              </a:rPr>
+              <a:t>+++ OK, passed 120 tests: simplify preserves meaning</a:t>
+            </a:r>
+          </a:p>
+          <a:p>
+            <a:pPr algn="l">
+              <a:spcBef>
+                <a:spcPts val="0"/>
+              </a:spcBef>
+              <a:spcAft>
+                <a:spcPts val="200"/>
+              </a:spcAft>
+            </a:pPr>
+            <a:r>
+              <a:rPr sz="1150" b="0" i="0">
+                <a:solidFill>
+                  <a:srgbClr val="D4D4D4"/>
+                </a:solidFill>
+                <a:latin typeface="Consolas"/>
+              </a:rPr>
+              <a:t>68.3% cu variabile | 31.7% fara variabile | 20.8% expr mare (&gt;8)</a:t>
+            </a:r>
+          </a:p>
+          <a:p>
+            <a:pPr algn="l">
+              <a:spcBef>
+                <a:spcPts val="0"/>
+              </a:spcBef>
+              <a:spcAft>
+                <a:spcPts val="200"/>
+              </a:spcAft>
+            </a:pPr>
+            <a:endParaRPr sz="1150" b="0" i="0">
+              <a:solidFill>
+                <a:srgbClr val="D4D4D4"/>
+              </a:solidFill>
+              <a:latin typeface="Consolas"/>
+            </a:endParaRPr>
+          </a:p>
+          <a:p>
+            <a:pPr algn="l">
+              <a:spcBef>
+                <a:spcPts val="0"/>
+              </a:spcBef>
+              <a:spcAft>
+                <a:spcPts val="200"/>
+              </a:spcAft>
+            </a:pPr>
+            <a:r>
+              <a:rPr sz="1150" b="0" i="0">
+                <a:solidFill>
+                  <a:srgbClr val="D4D4D4"/>
+                </a:solidFill>
+                <a:latin typeface="Consolas"/>
+              </a:rPr>
+              <a:t>+++ OK, passed 120 tests: pretty-parse preserves meaning</a:t>
+            </a:r>
+          </a:p>
+          <a:p>
+            <a:pPr algn="l">
+              <a:spcBef>
+                <a:spcPts val="0"/>
+              </a:spcBef>
+              <a:spcAft>
+                <a:spcPts val="200"/>
+              </a:spcAft>
+            </a:pPr>
+            <a:r>
+              <a:rPr sz="1150" b="0" i="0">
+                <a:solidFill>
+                  <a:srgbClr val="D4D4D4"/>
+                </a:solidFill>
+                <a:latin typeface="Consolas"/>
+              </a:rPr>
+              <a:t>28.3% expresie terminala | 24.2% adancime &gt; 4</a:t>
+            </a:r>
+          </a:p>
+          <a:p>
+            <a:pPr algn="l">
+              <a:spcBef>
+                <a:spcPts val="0"/>
+              </a:spcBef>
+              <a:spcAft>
+                <a:spcPts val="200"/>
+              </a:spcAft>
+            </a:pPr>
+            <a:endParaRPr sz="1150" b="0" i="0">
+              <a:solidFill>
+                <a:srgbClr val="D4D4D4"/>
+              </a:solidFill>
+              <a:latin typeface="Consolas"/>
+            </a:endParaRPr>
+          </a:p>
+          <a:p>
+            <a:pPr algn="l">
+              <a:spcBef>
+                <a:spcPts val="0"/>
+              </a:spcBef>
+              <a:spcAft>
+                <a:spcPts val="200"/>
+              </a:spcAft>
+            </a:pPr>
+            <a:r>
+              <a:rPr sz="1150" b="0" i="0">
+                <a:solidFill>
+                  <a:srgbClr val="D4D4D4"/>
+                </a:solidFill>
+                <a:latin typeface="Consolas"/>
+              </a:rPr>
+              <a:t>+++ OK, passed 120 tests: add commutative</a:t>
+            </a:r>
+          </a:p>
+          <a:p>
+            <a:pPr algn="l">
+              <a:spcBef>
+                <a:spcPts val="0"/>
+              </a:spcBef>
+              <a:spcAft>
+                <a:spcPts val="200"/>
+              </a:spcAft>
+            </a:pPr>
+            <a:r>
+              <a:rPr sz="1150" b="0" i="0">
+                <a:solidFill>
+                  <a:srgbClr val="D4D4D4"/>
+                </a:solidFill>
+                <a:latin typeface="Consolas"/>
+              </a:rPr>
+              <a:t>52.5% expresii mari | 16.7% expresii mici</a:t>
+            </a:r>
+          </a:p>
+          <a:p>
+            <a:pPr algn="l">
+              <a:spcBef>
+                <a:spcPts val="0"/>
+              </a:spcBef>
+              <a:spcAft>
+                <a:spcPts val="200"/>
+              </a:spcAft>
+            </a:pPr>
+            <a:endParaRPr sz="1150" b="0" i="0">
+              <a:solidFill>
+                <a:srgbClr val="D4D4D4"/>
+              </a:solidFill>
+              <a:latin typeface="Consolas"/>
+            </a:endParaRPr>
+          </a:p>
+          <a:p>
+            <a:pPr algn="l">
+              <a:spcBef>
+                <a:spcPts val="0"/>
+              </a:spcBef>
+              <a:spcAft>
+                <a:spcPts val="200"/>
+              </a:spcAft>
+            </a:pPr>
+            <a:r>
+              <a:rPr sz="1150" b="0" i="0">
+                <a:solidFill>
+                  <a:srgbClr val="D4D4D4"/>
+                </a:solidFill>
+                <a:latin typeface="Consolas"/>
+              </a:rPr>
+              <a:t>[... toate cele 16 proprietati: PASS ...]</a:t>
+            </a:r>
+          </a:p>
+        </p:txBody>
+      </p:sp>
+    </p:spTree>
+    <p:extLst>
+      <p:ext uri="{BB962C8B-B14F-4D97-AF65-F5344CB8AC3E}">
+        <p14:creationId xmlns:p14="http://schemas.microsoft.com/office/powerpoint/2010/main" val="3025025174"/>
+      </p:ext>
+    </p:extLst>
+  </p:cSld>
+  <p:clrMapOvr>
+    <a:masterClrMapping/>
+  </p:clrMapOvr>
+</p:sld>
+</file>
+
+<file path=ppt/slides/slide24.xml><?xml version="1.0" encoding="utf-8"?>
+<p:sld xmlns:a="http://schemas.openxmlformats.org/drawingml/2006/main" xmlns:r="http://schemas.openxmlformats.org/officeDocument/2006/relationships" xmlns:p="http://schemas.openxmlformats.org/presentationml/2006/main">
+  <p:cSld>
+    <p:spTree>
+      <p:nvGrpSpPr>
+        <p:cNvPr id="1" name=""/>
+        <p:cNvGrpSpPr/>
+        <p:nvPr/>
+      </p:nvGrpSpPr>
+      <p:grpSpPr>
+        <a:xfrm>
+          <a:off x="0" y="0"/>
+          <a:ext cx="0" cy="0"/>
+          <a:chOff x="0" y="0"/>
+          <a:chExt cx="0" cy="0"/>
+        </a:xfrm>
+      </p:grpSpPr>
+      <p:sp>
+        <p:nvSpPr>
+          <p:cNvPr id="2" name="Title 1"/>
+          <p:cNvSpPr>
+            <a:spLocks noGrp="1"/>
+          </p:cNvSpPr>
+          <p:nvPr>
+            <p:ph type="title"/>
+          </p:nvPr>
+        </p:nvSpPr>
+        <p:spPr/>
+        <p:txBody>
+          <a:bodyPr/>
+          <a:lstStyle/>
+          <a:p>
+            <a:r>
+              <a:rPr sz="3500" b="1" dirty="0" err="1">
+                <a:solidFill>
+                  <a:srgbClr val="2F3338"/>
+                </a:solidFill>
+                <a:latin typeface="Segoe UI Semibold"/>
+              </a:rPr>
+              <a:t>Configurare</a:t>
+            </a:r>
+            <a:r>
+              <a:rPr sz="3500" b="1" dirty="0">
+                <a:solidFill>
+                  <a:srgbClr val="2F3338"/>
+                </a:solidFill>
+                <a:latin typeface="Segoe UI Semibold"/>
+              </a:rPr>
+              <a:t> </a:t>
+            </a:r>
+            <a:r>
+              <a:rPr sz="3500" b="1" dirty="0" err="1">
+                <a:solidFill>
+                  <a:srgbClr val="2F3338"/>
+                </a:solidFill>
+                <a:latin typeface="Segoe UI Semibold"/>
+              </a:rPr>
+              <a:t>proiect</a:t>
+            </a:r>
+            <a:r>
+              <a:rPr sz="3500" b="1" dirty="0">
+                <a:solidFill>
+                  <a:srgbClr val="2F3338"/>
+                </a:solidFill>
+                <a:latin typeface="Segoe UI Semibold"/>
+              </a:rPr>
+              <a:t> din </a:t>
+            </a:r>
+            <a:r>
+              <a:rPr sz="3500" b="1" dirty="0" smtClean="0">
+                <a:solidFill>
+                  <a:srgbClr val="2F3338"/>
+                </a:solidFill>
+                <a:latin typeface="Segoe UI Semibold"/>
+              </a:rPr>
+              <a:t>fi</a:t>
+            </a:r>
+            <a:r>
+              <a:rPr lang="ro-RO" sz="3500" b="1" dirty="0" smtClean="0">
+                <a:solidFill>
+                  <a:srgbClr val="2F3338"/>
+                </a:solidFill>
+                <a:latin typeface="Segoe UI Semibold"/>
+              </a:rPr>
+              <a:t>ș</a:t>
+            </a:r>
+            <a:r>
+              <a:rPr sz="3500" b="1" dirty="0" err="1" smtClean="0">
+                <a:solidFill>
+                  <a:srgbClr val="2F3338"/>
+                </a:solidFill>
+                <a:latin typeface="Segoe UI Semibold"/>
+              </a:rPr>
+              <a:t>ierul</a:t>
+            </a:r>
+            <a:r>
+              <a:rPr sz="3500" b="1" dirty="0" smtClean="0">
+                <a:solidFill>
+                  <a:srgbClr val="2F3338"/>
+                </a:solidFill>
+                <a:latin typeface="Segoe UI Semibold"/>
+              </a:rPr>
+              <a:t> </a:t>
+            </a:r>
+            <a:r>
+              <a:rPr sz="3500" b="1" dirty="0">
+                <a:solidFill>
+                  <a:srgbClr val="2F3338"/>
+                </a:solidFill>
+                <a:latin typeface="Segoe UI Semibold"/>
+              </a:rPr>
+              <a:t>.cabal</a:t>
+            </a:r>
+          </a:p>
+        </p:txBody>
+      </p:sp>
+      <p:sp>
+        <p:nvSpPr>
+          <p:cNvPr id="3" name="Rounded Rectangle 2"/>
+          <p:cNvSpPr/>
+          <p:nvPr/>
+        </p:nvSpPr>
+        <p:spPr>
+          <a:xfrm>
+            <a:off x="1097280" y="2252132"/>
+            <a:ext cx="10058400" cy="4011507"/>
+          </a:xfrm>
+          <a:prstGeom prst="roundRect">
+            <a:avLst/>
+          </a:prstGeom>
+          <a:solidFill>
+            <a:srgbClr val="F5F8FC"/>
+          </a:solidFill>
+          <a:ln w="13970">
+            <a:solidFill>
+              <a:srgbClr val="D5DFEC"/>
+            </a:solidFill>
+          </a:ln>
+        </p:spPr>
+        <p:style>
+          <a:lnRef idx="1">
+            <a:schemeClr val="accent1"/>
+          </a:lnRef>
+          <a:fillRef idx="3">
+            <a:schemeClr val="accent1"/>
+          </a:fillRef>
+          <a:effectRef idx="2">
+            <a:schemeClr val="accent1"/>
+          </a:effectRef>
+          <a:fontRef idx="minor">
+            <a:schemeClr val="lt1"/>
+          </a:fontRef>
+        </p:style>
+        <p:txBody>
+          <a:bodyPr rtlCol="0" anchor="ctr"/>
+          <a:lstStyle/>
+          <a:p>
+            <a:pPr algn="ctr"/>
+            <a:endParaRPr/>
+          </a:p>
+        </p:txBody>
+      </p:sp>
+      <p:sp>
+        <p:nvSpPr>
+          <p:cNvPr id="4" name="TextBox 3"/>
+          <p:cNvSpPr txBox="1"/>
+          <p:nvPr/>
+        </p:nvSpPr>
+        <p:spPr>
+          <a:xfrm>
+            <a:off x="1325880" y="2482447"/>
+            <a:ext cx="9601200" cy="2468880"/>
+          </a:xfrm>
+          <a:prstGeom prst="rect">
+            <a:avLst/>
+          </a:prstGeom>
+          <a:noFill/>
+        </p:spPr>
+        <p:txBody>
+          <a:bodyPr wrap="square">
+            <a:spAutoFit/>
+          </a:bodyPr>
+          <a:lstStyle/>
+          <a:p>
+            <a:pPr algn="l">
+              <a:spcBef>
+                <a:spcPts val="0"/>
+              </a:spcBef>
+              <a:spcAft>
+                <a:spcPts val="200"/>
+              </a:spcAft>
+            </a:pPr>
+            <a:r>
+              <a:rPr sz="1500" b="0" i="0" dirty="0">
+                <a:solidFill>
+                  <a:srgbClr val="2F3338"/>
+                </a:solidFill>
+                <a:latin typeface="Segoe UI"/>
+              </a:rPr>
+              <a:t>- library: </a:t>
+            </a:r>
+            <a:r>
+              <a:rPr sz="1500" b="0" i="0" dirty="0" err="1">
+                <a:solidFill>
+                  <a:srgbClr val="2F3338"/>
+                </a:solidFill>
+                <a:latin typeface="Segoe UI"/>
+              </a:rPr>
+              <a:t>modulele</a:t>
+            </a:r>
+            <a:r>
+              <a:rPr sz="1500" b="0" i="0" dirty="0">
+                <a:solidFill>
+                  <a:srgbClr val="2F3338"/>
+                </a:solidFill>
+                <a:latin typeface="Segoe UI"/>
+              </a:rPr>
+              <a:t> </a:t>
+            </a:r>
+            <a:r>
+              <a:rPr sz="1500" b="0" i="0" dirty="0" err="1">
+                <a:solidFill>
+                  <a:srgbClr val="2F3338"/>
+                </a:solidFill>
+                <a:latin typeface="Segoe UI"/>
+              </a:rPr>
+              <a:t>Expr</a:t>
+            </a:r>
+            <a:r>
+              <a:rPr sz="1500" b="0" i="0" dirty="0">
+                <a:solidFill>
+                  <a:srgbClr val="2F3338"/>
+                </a:solidFill>
+                <a:latin typeface="Segoe UI"/>
+              </a:rPr>
+              <a:t>, </a:t>
+            </a:r>
+            <a:r>
+              <a:rPr sz="1500" b="0" i="0" dirty="0" err="1">
+                <a:solidFill>
+                  <a:srgbClr val="2F3338"/>
+                </a:solidFill>
+                <a:latin typeface="Segoe UI"/>
+              </a:rPr>
+              <a:t>Eval</a:t>
+            </a:r>
+            <a:r>
+              <a:rPr sz="1500" b="0" i="0" dirty="0">
+                <a:solidFill>
+                  <a:srgbClr val="2F3338"/>
+                </a:solidFill>
+                <a:latin typeface="Segoe UI"/>
+              </a:rPr>
+              <a:t>, Pretty, Parser, Simplify</a:t>
+            </a:r>
+          </a:p>
+          <a:p>
+            <a:pPr algn="l">
+              <a:spcBef>
+                <a:spcPts val="0"/>
+              </a:spcBef>
+              <a:spcAft>
+                <a:spcPts val="200"/>
+              </a:spcAft>
+            </a:pPr>
+            <a:r>
+              <a:rPr sz="1500" b="0" i="0" dirty="0">
+                <a:solidFill>
+                  <a:srgbClr val="2F3338"/>
+                </a:solidFill>
+                <a:latin typeface="Segoe UI"/>
+              </a:rPr>
+              <a:t>- executable: </a:t>
+            </a:r>
+            <a:r>
+              <a:rPr sz="1500" b="0" i="0" dirty="0" err="1">
+                <a:solidFill>
+                  <a:srgbClr val="2F3338"/>
+                </a:solidFill>
+                <a:latin typeface="Segoe UI"/>
+              </a:rPr>
+              <a:t>mfis-quickcheck-expr</a:t>
+            </a:r>
+            <a:r>
+              <a:rPr sz="1500" b="0" i="0" dirty="0">
+                <a:solidFill>
+                  <a:srgbClr val="2F3338"/>
+                </a:solidFill>
+                <a:latin typeface="Segoe UI"/>
+              </a:rPr>
+              <a:t> (app/</a:t>
+            </a:r>
+            <a:r>
+              <a:rPr sz="1500" b="0" i="0" dirty="0" err="1">
+                <a:solidFill>
+                  <a:srgbClr val="2F3338"/>
+                </a:solidFill>
+                <a:latin typeface="Segoe UI"/>
+              </a:rPr>
+              <a:t>Main.hs</a:t>
+            </a:r>
+            <a:r>
+              <a:rPr sz="1500" b="0" i="0" dirty="0">
+                <a:solidFill>
+                  <a:srgbClr val="2F3338"/>
+                </a:solidFill>
+                <a:latin typeface="Segoe UI"/>
+              </a:rPr>
+              <a:t>)</a:t>
+            </a:r>
+          </a:p>
+          <a:p>
+            <a:pPr algn="l">
+              <a:spcBef>
+                <a:spcPts val="0"/>
+              </a:spcBef>
+              <a:spcAft>
+                <a:spcPts val="200"/>
+              </a:spcAft>
+            </a:pPr>
+            <a:r>
+              <a:rPr sz="1500" b="0" i="0" dirty="0">
+                <a:solidFill>
+                  <a:srgbClr val="2F3338"/>
+                </a:solidFill>
+                <a:latin typeface="Segoe UI"/>
+              </a:rPr>
+              <a:t>- test-suite: spec (test/</a:t>
+            </a:r>
+            <a:r>
+              <a:rPr sz="1500" b="0" i="0" dirty="0" err="1">
+                <a:solidFill>
+                  <a:srgbClr val="2F3338"/>
+                </a:solidFill>
+                <a:latin typeface="Segoe UI"/>
+              </a:rPr>
+              <a:t>Spec.hs</a:t>
+            </a:r>
+            <a:r>
+              <a:rPr sz="1500" b="0" i="0" dirty="0">
+                <a:solidFill>
+                  <a:srgbClr val="2F3338"/>
+                </a:solidFill>
+                <a:latin typeface="Segoe UI"/>
+              </a:rPr>
+              <a:t>, type exitcode-stdio-1.0)</a:t>
+            </a:r>
+          </a:p>
+          <a:p>
+            <a:pPr algn="l">
+              <a:spcBef>
+                <a:spcPts val="0"/>
+              </a:spcBef>
+              <a:spcAft>
+                <a:spcPts val="200"/>
+              </a:spcAft>
+            </a:pPr>
+            <a:r>
+              <a:rPr sz="1500" b="0" i="0" dirty="0">
+                <a:solidFill>
+                  <a:srgbClr val="2F3338"/>
+                </a:solidFill>
+                <a:latin typeface="Segoe UI"/>
+              </a:rPr>
+              <a:t>- </a:t>
+            </a:r>
+            <a:r>
+              <a:rPr sz="1500" b="0" i="0" dirty="0" err="1">
+                <a:solidFill>
+                  <a:srgbClr val="2F3338"/>
+                </a:solidFill>
+                <a:latin typeface="Segoe UI"/>
+              </a:rPr>
+              <a:t>dependinte</a:t>
+            </a:r>
+            <a:r>
+              <a:rPr sz="1500" b="0" i="0" dirty="0">
+                <a:solidFill>
+                  <a:srgbClr val="2F3338"/>
+                </a:solidFill>
+                <a:latin typeface="Segoe UI"/>
+              </a:rPr>
+              <a:t>: base, containers, </a:t>
+            </a:r>
+            <a:r>
+              <a:rPr sz="1500" b="0" i="0" dirty="0" err="1">
+                <a:solidFill>
+                  <a:srgbClr val="2F3338"/>
+                </a:solidFill>
+                <a:latin typeface="Segoe UI"/>
+              </a:rPr>
+              <a:t>QuickCheck</a:t>
+            </a:r>
+            <a:r>
+              <a:rPr sz="1500" b="0" i="0" dirty="0">
+                <a:solidFill>
+                  <a:srgbClr val="2F3338"/>
+                </a:solidFill>
+                <a:latin typeface="Segoe UI"/>
+              </a:rPr>
+              <a:t> &gt;=2.14 &amp;&amp; &lt;3 (in test-suite)</a:t>
+            </a:r>
+          </a:p>
+          <a:p>
+            <a:pPr algn="l">
+              <a:spcBef>
+                <a:spcPts val="0"/>
+              </a:spcBef>
+              <a:spcAft>
+                <a:spcPts val="200"/>
+              </a:spcAft>
+            </a:pPr>
+            <a:r>
+              <a:rPr sz="1500" b="0" i="0" dirty="0">
+                <a:solidFill>
+                  <a:srgbClr val="2F3338"/>
+                </a:solidFill>
+                <a:latin typeface="Segoe UI"/>
+              </a:rPr>
+              <a:t>- </a:t>
+            </a:r>
+            <a:r>
+              <a:rPr sz="1500" b="0" i="0" dirty="0" err="1">
+                <a:solidFill>
+                  <a:srgbClr val="2F3338"/>
+                </a:solidFill>
+                <a:latin typeface="Segoe UI"/>
+              </a:rPr>
+              <a:t>ghc</a:t>
+            </a:r>
+            <a:r>
+              <a:rPr sz="1500" b="0" i="0" dirty="0">
+                <a:solidFill>
+                  <a:srgbClr val="2F3338"/>
+                </a:solidFill>
+                <a:latin typeface="Segoe UI"/>
+              </a:rPr>
+              <a:t>-options: set consistent de warning-</a:t>
+            </a:r>
+            <a:r>
+              <a:rPr sz="1500" b="0" i="0" dirty="0" err="1">
+                <a:solidFill>
+                  <a:srgbClr val="2F3338"/>
+                </a:solidFill>
+                <a:latin typeface="Segoe UI"/>
+              </a:rPr>
+              <a:t>uri</a:t>
+            </a:r>
+            <a:r>
+              <a:rPr sz="1500" b="0" i="0" dirty="0">
+                <a:solidFill>
+                  <a:srgbClr val="2F3338"/>
+                </a:solidFill>
+                <a:latin typeface="Segoe UI"/>
+              </a:rPr>
+              <a:t> (-Wall, -</a:t>
+            </a:r>
+            <a:r>
+              <a:rPr sz="1500" b="0" i="0" dirty="0" err="1">
+                <a:solidFill>
+                  <a:srgbClr val="2F3338"/>
+                </a:solidFill>
+                <a:latin typeface="Segoe UI"/>
+              </a:rPr>
+              <a:t>Wcompat</a:t>
+            </a:r>
+            <a:r>
+              <a:rPr sz="1500" b="0" i="0" dirty="0">
+                <a:solidFill>
+                  <a:srgbClr val="2F3338"/>
+                </a:solidFill>
+                <a:latin typeface="Segoe UI"/>
+              </a:rPr>
+              <a:t> etc.)</a:t>
+            </a:r>
+          </a:p>
+        </p:txBody>
+      </p:sp>
+      <p:sp>
+        <p:nvSpPr>
+          <p:cNvPr id="5" name="Rounded Rectangle 4"/>
+          <p:cNvSpPr/>
+          <p:nvPr/>
+        </p:nvSpPr>
+        <p:spPr>
+          <a:xfrm>
+            <a:off x="1325880" y="4128331"/>
+            <a:ext cx="9601200" cy="1600200"/>
+          </a:xfrm>
+          <a:prstGeom prst="roundRect">
+            <a:avLst/>
+          </a:prstGeom>
+          <a:solidFill>
+            <a:srgbClr val="1E1E1E"/>
+          </a:solidFill>
+          <a:ln w="13970">
+            <a:solidFill>
+              <a:srgbClr val="2D2D30"/>
+            </a:solidFill>
+          </a:ln>
+        </p:spPr>
+        <p:style>
+          <a:lnRef idx="1">
+            <a:schemeClr val="accent1"/>
+          </a:lnRef>
+          <a:fillRef idx="3">
+            <a:schemeClr val="accent1"/>
+          </a:fillRef>
+          <a:effectRef idx="2">
+            <a:schemeClr val="accent1"/>
+          </a:effectRef>
+          <a:fontRef idx="minor">
+            <a:schemeClr val="lt1"/>
+          </a:fontRef>
+        </p:style>
+        <p:txBody>
+          <a:bodyPr rtlCol="0" anchor="ctr"/>
+          <a:lstStyle/>
+          <a:p>
+            <a:pPr algn="ctr"/>
+            <a:endParaRPr/>
+          </a:p>
+        </p:txBody>
+      </p:sp>
+      <p:sp>
+        <p:nvSpPr>
+          <p:cNvPr id="6" name="TextBox 5"/>
+          <p:cNvSpPr txBox="1"/>
+          <p:nvPr/>
+        </p:nvSpPr>
+        <p:spPr>
+          <a:xfrm>
+            <a:off x="1490472" y="4219771"/>
+            <a:ext cx="9272016" cy="274320"/>
+          </a:xfrm>
+          <a:prstGeom prst="rect">
+            <a:avLst/>
+          </a:prstGeom>
+          <a:noFill/>
+        </p:spPr>
+        <p:txBody>
+          <a:bodyPr wrap="square">
+            <a:spAutoFit/>
+          </a:bodyPr>
+          <a:lstStyle/>
+          <a:p>
+            <a:pPr algn="l">
+              <a:spcBef>
+                <a:spcPts val="0"/>
+              </a:spcBef>
+              <a:spcAft>
+                <a:spcPts val="200"/>
+              </a:spcAft>
+            </a:pPr>
+            <a:r>
+              <a:rPr sz="1200" b="1" i="0">
+                <a:solidFill>
+                  <a:srgbClr val="9CDCFE"/>
+                </a:solidFill>
+                <a:latin typeface="Consolas"/>
+              </a:rPr>
+              <a:t>Componente declarate</a:t>
+            </a:r>
+          </a:p>
+        </p:txBody>
+      </p:sp>
+      <p:sp>
+        <p:nvSpPr>
+          <p:cNvPr id="7" name="TextBox 6"/>
+          <p:cNvSpPr txBox="1"/>
+          <p:nvPr/>
+        </p:nvSpPr>
+        <p:spPr>
+          <a:xfrm>
+            <a:off x="1490472" y="4512379"/>
+            <a:ext cx="9272016" cy="1124712"/>
+          </a:xfrm>
+          <a:prstGeom prst="rect">
+            <a:avLst/>
+          </a:prstGeom>
+          <a:noFill/>
+        </p:spPr>
+        <p:txBody>
+          <a:bodyPr wrap="square">
+            <a:spAutoFit/>
+          </a:bodyPr>
+          <a:lstStyle/>
+          <a:p>
+            <a:pPr algn="l">
+              <a:spcBef>
+                <a:spcPts val="0"/>
+              </a:spcBef>
+              <a:spcAft>
+                <a:spcPts val="200"/>
+              </a:spcAft>
+            </a:pPr>
+            <a:r>
+              <a:rPr sz="1150" b="0" i="0">
+                <a:solidFill>
+                  <a:srgbClr val="D4D4D4"/>
+                </a:solidFill>
+                <a:latin typeface="Consolas"/>
+              </a:rPr>
+              <a:t>library -&gt; src/</a:t>
+            </a:r>
+          </a:p>
+          <a:p>
+            <a:pPr algn="l">
+              <a:spcBef>
+                <a:spcPts val="0"/>
+              </a:spcBef>
+              <a:spcAft>
+                <a:spcPts val="200"/>
+              </a:spcAft>
+            </a:pPr>
+            <a:r>
+              <a:rPr sz="1150" b="0" i="0">
+                <a:solidFill>
+                  <a:srgbClr val="D4D4D4"/>
+                </a:solidFill>
+                <a:latin typeface="Consolas"/>
+              </a:rPr>
+              <a:t>executable mfis-quickcheck-expr -&gt; app/Main.hs</a:t>
+            </a:r>
+          </a:p>
+          <a:p>
+            <a:pPr algn="l">
+              <a:spcBef>
+                <a:spcPts val="0"/>
+              </a:spcBef>
+              <a:spcAft>
+                <a:spcPts val="200"/>
+              </a:spcAft>
+            </a:pPr>
+            <a:r>
+              <a:rPr sz="1150" b="0" i="0">
+                <a:solidFill>
+                  <a:srgbClr val="D4D4D4"/>
+                </a:solidFill>
+                <a:latin typeface="Consolas"/>
+              </a:rPr>
+              <a:t>test-suite spec -&gt; test/Spec.hs</a:t>
+            </a:r>
+          </a:p>
+        </p:txBody>
+      </p:sp>
+    </p:spTree>
+    <p:extLst>
+      <p:ext uri="{BB962C8B-B14F-4D97-AF65-F5344CB8AC3E}">
+        <p14:creationId xmlns:p14="http://schemas.microsoft.com/office/powerpoint/2010/main" val="1604651166"/>
+      </p:ext>
+    </p:extLst>
+  </p:cSld>
+  <p:clrMapOvr>
+    <a:masterClrMapping/>
+  </p:clrMapOvr>
+</p:sld>
+</file>
+
+<file path=ppt/slides/slide25.xml><?xml version="1.0" encoding="utf-8"?>
+<p:sld xmlns:a="http://schemas.openxmlformats.org/drawingml/2006/main" xmlns:r="http://schemas.openxmlformats.org/officeDocument/2006/relationships" xmlns:p="http://schemas.openxmlformats.org/presentationml/2006/main">
+  <p:cSld>
+    <p:spTree>
+      <p:nvGrpSpPr>
+        <p:cNvPr id="1" name=""/>
+        <p:cNvGrpSpPr/>
+        <p:nvPr/>
+      </p:nvGrpSpPr>
+      <p:grpSpPr>
+        <a:xfrm>
+          <a:off x="0" y="0"/>
+          <a:ext cx="0" cy="0"/>
+          <a:chOff x="0" y="0"/>
+          <a:chExt cx="0" cy="0"/>
+        </a:xfrm>
+      </p:grpSpPr>
+      <p:sp>
+        <p:nvSpPr>
+          <p:cNvPr id="2" name="Title 1"/>
+          <p:cNvSpPr>
+            <a:spLocks noGrp="1"/>
+          </p:cNvSpPr>
+          <p:nvPr>
+            <p:ph type="title"/>
+          </p:nvPr>
+        </p:nvSpPr>
+        <p:spPr/>
+        <p:txBody>
+          <a:bodyPr/>
+          <a:lstStyle/>
+          <a:p>
+            <a:r>
+              <a:rPr sz="3500" b="1" dirty="0" smtClean="0">
+                <a:solidFill>
+                  <a:srgbClr val="2F3338"/>
+                </a:solidFill>
+                <a:latin typeface="Segoe UI Semibold"/>
+              </a:rPr>
+              <a:t>Limit</a:t>
+            </a:r>
+            <a:r>
+              <a:rPr lang="ro-RO" sz="3500" b="1" dirty="0" smtClean="0">
+                <a:solidFill>
+                  <a:srgbClr val="2F3338"/>
+                </a:solidFill>
+                <a:latin typeface="Segoe UI Semibold"/>
+              </a:rPr>
+              <a:t>ă</a:t>
+            </a:r>
+            <a:r>
+              <a:rPr sz="3500" b="1" dirty="0" err="1" smtClean="0">
+                <a:solidFill>
+                  <a:srgbClr val="2F3338"/>
+                </a:solidFill>
+                <a:latin typeface="Segoe UI Semibold"/>
+              </a:rPr>
+              <a:t>ri</a:t>
+            </a:r>
+            <a:r>
+              <a:rPr sz="3500" b="1" dirty="0" smtClean="0">
+                <a:solidFill>
+                  <a:srgbClr val="2F3338"/>
+                </a:solidFill>
+                <a:latin typeface="Segoe UI Semibold"/>
+              </a:rPr>
+              <a:t> </a:t>
+            </a:r>
+            <a:r>
+              <a:rPr sz="3500" b="1" dirty="0">
+                <a:solidFill>
+                  <a:srgbClr val="2F3338"/>
+                </a:solidFill>
+                <a:latin typeface="Segoe UI Semibold"/>
+              </a:rPr>
+              <a:t>concrete ale </a:t>
+            </a:r>
+            <a:r>
+              <a:rPr sz="3500" b="1" dirty="0" smtClean="0">
+                <a:solidFill>
+                  <a:srgbClr val="2F3338"/>
+                </a:solidFill>
+                <a:latin typeface="Segoe UI Semibold"/>
+              </a:rPr>
+              <a:t>implement</a:t>
+            </a:r>
+            <a:r>
+              <a:rPr lang="ro-RO" sz="3500" b="1" dirty="0" smtClean="0">
+                <a:solidFill>
+                  <a:srgbClr val="2F3338"/>
+                </a:solidFill>
+                <a:latin typeface="Segoe UI Semibold"/>
+              </a:rPr>
+              <a:t>ă</a:t>
+            </a:r>
+            <a:r>
+              <a:rPr sz="3500" b="1" dirty="0" err="1" smtClean="0">
+                <a:solidFill>
+                  <a:srgbClr val="2F3338"/>
+                </a:solidFill>
+                <a:latin typeface="Segoe UI Semibold"/>
+              </a:rPr>
+              <a:t>rii</a:t>
+            </a:r>
+            <a:r>
+              <a:rPr sz="3500" b="1" dirty="0" smtClean="0">
+                <a:solidFill>
+                  <a:srgbClr val="2F3338"/>
+                </a:solidFill>
+                <a:latin typeface="Segoe UI Semibold"/>
+              </a:rPr>
+              <a:t> </a:t>
+            </a:r>
+            <a:r>
+              <a:rPr sz="3500" b="1" dirty="0" err="1">
+                <a:solidFill>
+                  <a:srgbClr val="2F3338"/>
+                </a:solidFill>
+                <a:latin typeface="Segoe UI Semibold"/>
+              </a:rPr>
+              <a:t>actuale</a:t>
+            </a:r>
+            <a:endParaRPr sz="3500" b="1" dirty="0">
+              <a:solidFill>
+                <a:srgbClr val="2F3338"/>
+              </a:solidFill>
+              <a:latin typeface="Segoe UI Semibold"/>
+            </a:endParaRPr>
+          </a:p>
+        </p:txBody>
+      </p:sp>
+      <p:sp>
+        <p:nvSpPr>
+          <p:cNvPr id="3" name="Rounded Rectangle 2"/>
+          <p:cNvSpPr/>
+          <p:nvPr/>
+        </p:nvSpPr>
+        <p:spPr>
+          <a:xfrm>
+            <a:off x="1097280" y="2355451"/>
+            <a:ext cx="10058400" cy="2724573"/>
+          </a:xfrm>
+          <a:prstGeom prst="roundRect">
+            <a:avLst/>
+          </a:prstGeom>
+          <a:solidFill>
+            <a:srgbClr val="FFF7ED"/>
+          </a:solidFill>
+          <a:ln w="13970">
+            <a:solidFill>
+              <a:srgbClr val="FDBA74"/>
+            </a:solidFill>
+          </a:ln>
+        </p:spPr>
+        <p:style>
+          <a:lnRef idx="1">
+            <a:schemeClr val="accent1"/>
+          </a:lnRef>
+          <a:fillRef idx="3">
+            <a:schemeClr val="accent1"/>
+          </a:fillRef>
+          <a:effectRef idx="2">
+            <a:schemeClr val="accent1"/>
+          </a:effectRef>
+          <a:fontRef idx="minor">
+            <a:schemeClr val="lt1"/>
+          </a:fontRef>
+        </p:style>
+        <p:txBody>
+          <a:bodyPr rtlCol="0" anchor="ctr"/>
+          <a:lstStyle/>
+          <a:p>
+            <a:pPr algn="ctr"/>
+            <a:endParaRPr/>
+          </a:p>
+        </p:txBody>
+      </p:sp>
+      <p:sp>
+        <p:nvSpPr>
+          <p:cNvPr id="4" name="TextBox 3"/>
+          <p:cNvSpPr txBox="1"/>
+          <p:nvPr/>
+        </p:nvSpPr>
+        <p:spPr>
+          <a:xfrm>
+            <a:off x="1325880" y="2900715"/>
+            <a:ext cx="9601200" cy="1349087"/>
+          </a:xfrm>
+          <a:prstGeom prst="rect">
+            <a:avLst/>
+          </a:prstGeom>
+          <a:noFill/>
+        </p:spPr>
+        <p:txBody>
+          <a:bodyPr wrap="square">
+            <a:spAutoFit/>
+          </a:bodyPr>
+          <a:lstStyle/>
+          <a:p>
+            <a:pPr algn="l">
+              <a:spcBef>
+                <a:spcPts val="0"/>
+              </a:spcBef>
+              <a:spcAft>
+                <a:spcPts val="200"/>
+              </a:spcAft>
+            </a:pPr>
+            <a:r>
+              <a:rPr sz="1500" b="0" i="0" dirty="0">
+                <a:solidFill>
+                  <a:srgbClr val="2F3338"/>
+                </a:solidFill>
+                <a:latin typeface="Segoe UI"/>
+              </a:rPr>
+              <a:t>- </a:t>
+            </a:r>
+            <a:r>
+              <a:rPr sz="1500" b="0" i="0" dirty="0" err="1">
+                <a:solidFill>
+                  <a:srgbClr val="2F3338"/>
+                </a:solidFill>
+                <a:latin typeface="Segoe UI"/>
+              </a:rPr>
+              <a:t>Limbajul</a:t>
+            </a:r>
+            <a:r>
+              <a:rPr sz="1500" b="0" i="0" dirty="0">
+                <a:solidFill>
+                  <a:srgbClr val="2F3338"/>
+                </a:solidFill>
+                <a:latin typeface="Segoe UI"/>
+              </a:rPr>
+              <a:t> include </a:t>
+            </a:r>
+            <a:r>
+              <a:rPr sz="1500" b="0" i="0" dirty="0" err="1">
+                <a:solidFill>
+                  <a:srgbClr val="2F3338"/>
+                </a:solidFill>
+                <a:latin typeface="Segoe UI"/>
+              </a:rPr>
+              <a:t>doar</a:t>
+            </a:r>
+            <a:r>
+              <a:rPr sz="1500" b="0" i="0" dirty="0">
+                <a:solidFill>
+                  <a:srgbClr val="2F3338"/>
+                </a:solidFill>
+                <a:latin typeface="Segoe UI"/>
+              </a:rPr>
+              <a:t> </a:t>
+            </a:r>
+            <a:r>
+              <a:rPr sz="1500" b="0" i="0" dirty="0" err="1">
+                <a:solidFill>
+                  <a:srgbClr val="2F3338"/>
+                </a:solidFill>
+                <a:latin typeface="Segoe UI"/>
+              </a:rPr>
+              <a:t>Int</a:t>
+            </a:r>
+            <a:r>
+              <a:rPr sz="1500" b="0" i="0" dirty="0">
+                <a:solidFill>
+                  <a:srgbClr val="2F3338"/>
+                </a:solidFill>
+                <a:latin typeface="Segoe UI"/>
+              </a:rPr>
+              <a:t> + </a:t>
+            </a:r>
+            <a:r>
+              <a:rPr sz="1500" b="0" i="0" dirty="0" err="1">
+                <a:solidFill>
+                  <a:srgbClr val="2F3338"/>
+                </a:solidFill>
+                <a:latin typeface="Segoe UI"/>
+              </a:rPr>
+              <a:t>operatori</a:t>
+            </a:r>
+            <a:r>
+              <a:rPr sz="1500" b="0" i="0" dirty="0">
+                <a:solidFill>
+                  <a:srgbClr val="2F3338"/>
+                </a:solidFill>
+                <a:latin typeface="Segoe UI"/>
+              </a:rPr>
+              <a:t> Add/Sub/</a:t>
+            </a:r>
+            <a:r>
+              <a:rPr sz="1500" b="0" i="0" dirty="0" err="1">
+                <a:solidFill>
+                  <a:srgbClr val="2F3338"/>
+                </a:solidFill>
+                <a:latin typeface="Segoe UI"/>
+              </a:rPr>
+              <a:t>Mul</a:t>
+            </a:r>
+            <a:r>
+              <a:rPr sz="1500" b="0" i="0" dirty="0">
+                <a:solidFill>
+                  <a:srgbClr val="2F3338"/>
+                </a:solidFill>
+                <a:latin typeface="Segoe UI"/>
+              </a:rPr>
+              <a:t>/</a:t>
+            </a:r>
+            <a:r>
+              <a:rPr sz="1500" b="0" i="0" dirty="0" err="1">
+                <a:solidFill>
+                  <a:srgbClr val="2F3338"/>
+                </a:solidFill>
+                <a:latin typeface="Segoe UI"/>
+              </a:rPr>
+              <a:t>Neg</a:t>
+            </a:r>
+            <a:r>
+              <a:rPr sz="1500" b="0" i="0" dirty="0">
+                <a:solidFill>
+                  <a:srgbClr val="2F3338"/>
+                </a:solidFill>
+                <a:latin typeface="Segoe UI"/>
+              </a:rPr>
+              <a:t> (</a:t>
+            </a:r>
+            <a:r>
+              <a:rPr sz="1500" b="0" i="0" dirty="0" smtClean="0">
+                <a:solidFill>
+                  <a:srgbClr val="2F3338"/>
+                </a:solidFill>
+                <a:latin typeface="Segoe UI"/>
+              </a:rPr>
+              <a:t>f</a:t>
+            </a:r>
+            <a:r>
+              <a:rPr lang="ro-RO" sz="1500" b="0" i="0" dirty="0" smtClean="0">
+                <a:solidFill>
+                  <a:srgbClr val="2F3338"/>
+                </a:solidFill>
+                <a:latin typeface="Segoe UI"/>
+              </a:rPr>
+              <a:t>ă</a:t>
+            </a:r>
+            <a:r>
+              <a:rPr sz="1500" b="0" i="0" dirty="0" smtClean="0">
+                <a:solidFill>
+                  <a:srgbClr val="2F3338"/>
+                </a:solidFill>
+                <a:latin typeface="Segoe UI"/>
+              </a:rPr>
+              <a:t>r</a:t>
+            </a:r>
+            <a:r>
+              <a:rPr lang="ro-RO" sz="1500" b="0" i="0" dirty="0" smtClean="0">
+                <a:solidFill>
+                  <a:srgbClr val="2F3338"/>
+                </a:solidFill>
+                <a:latin typeface="Segoe UI"/>
+              </a:rPr>
+              <a:t>ă</a:t>
+            </a:r>
+            <a:r>
+              <a:rPr sz="1500" b="0" i="0" dirty="0" smtClean="0">
+                <a:solidFill>
+                  <a:srgbClr val="2F3338"/>
+                </a:solidFill>
+                <a:latin typeface="Segoe UI"/>
+              </a:rPr>
+              <a:t> </a:t>
+            </a:r>
+            <a:r>
+              <a:rPr lang="ro-RO" sz="1500" dirty="0">
+                <a:solidFill>
+                  <a:srgbClr val="2F3338"/>
+                </a:solidFill>
+                <a:latin typeface="Segoe UI"/>
+              </a:rPr>
+              <a:t>î</a:t>
+            </a:r>
+            <a:r>
+              <a:rPr sz="1500" b="0" i="0" dirty="0" err="1" smtClean="0">
+                <a:solidFill>
+                  <a:srgbClr val="2F3338"/>
+                </a:solidFill>
+                <a:latin typeface="Segoe UI"/>
+              </a:rPr>
+              <a:t>mp</a:t>
+            </a:r>
+            <a:r>
+              <a:rPr lang="ro-RO" sz="1500" b="0" i="0" dirty="0" smtClean="0">
+                <a:solidFill>
+                  <a:srgbClr val="2F3338"/>
+                </a:solidFill>
+                <a:latin typeface="Segoe UI"/>
+              </a:rPr>
+              <a:t>ă</a:t>
+            </a:r>
+            <a:r>
+              <a:rPr sz="1500" b="0" i="0" dirty="0" smtClean="0">
+                <a:solidFill>
+                  <a:srgbClr val="2F3338"/>
+                </a:solidFill>
+                <a:latin typeface="Segoe UI"/>
+              </a:rPr>
+              <a:t>r</a:t>
+            </a:r>
+            <a:r>
+              <a:rPr lang="ro-RO" sz="1500" b="0" i="0" dirty="0" smtClean="0">
+                <a:solidFill>
+                  <a:srgbClr val="2F3338"/>
+                </a:solidFill>
+                <a:latin typeface="Segoe UI"/>
+              </a:rPr>
+              <a:t>ț</a:t>
+            </a:r>
+            <a:r>
+              <a:rPr sz="1500" b="0" i="0" dirty="0" smtClean="0">
+                <a:solidFill>
+                  <a:srgbClr val="2F3338"/>
+                </a:solidFill>
+                <a:latin typeface="Segoe UI"/>
+              </a:rPr>
+              <a:t>ire</a:t>
+            </a:r>
+            <a:r>
+              <a:rPr sz="1500" b="0" i="0" dirty="0">
+                <a:solidFill>
+                  <a:srgbClr val="2F3338"/>
+                </a:solidFill>
+                <a:latin typeface="Segoe UI"/>
+              </a:rPr>
+              <a:t>, </a:t>
+            </a:r>
+            <a:r>
+              <a:rPr sz="1500" b="0" i="0" dirty="0" err="1" smtClean="0">
+                <a:solidFill>
+                  <a:srgbClr val="2F3338"/>
+                </a:solidFill>
+                <a:latin typeface="Segoe UI"/>
+              </a:rPr>
+              <a:t>compara</a:t>
+            </a:r>
+            <a:r>
+              <a:rPr lang="ro-RO" sz="1500" b="0" i="0" dirty="0" smtClean="0">
+                <a:solidFill>
+                  <a:srgbClr val="2F3338"/>
+                </a:solidFill>
+                <a:latin typeface="Segoe UI"/>
+              </a:rPr>
+              <a:t>ț</a:t>
+            </a:r>
+            <a:r>
+              <a:rPr sz="1500" b="0" i="0" dirty="0" smtClean="0">
+                <a:solidFill>
+                  <a:srgbClr val="2F3338"/>
+                </a:solidFill>
+                <a:latin typeface="Segoe UI"/>
+              </a:rPr>
+              <a:t>ii</a:t>
+            </a:r>
+            <a:r>
+              <a:rPr sz="1500" b="0" i="0" dirty="0">
+                <a:solidFill>
+                  <a:srgbClr val="2F3338"/>
+                </a:solidFill>
+                <a:latin typeface="Segoe UI"/>
+              </a:rPr>
+              <a:t>, </a:t>
+            </a:r>
+            <a:r>
+              <a:rPr sz="1500" b="0" i="0" dirty="0" err="1">
+                <a:solidFill>
+                  <a:srgbClr val="2F3338"/>
+                </a:solidFill>
+                <a:latin typeface="Segoe UI"/>
+              </a:rPr>
+              <a:t>booleene</a:t>
+            </a:r>
+            <a:r>
+              <a:rPr sz="1500" b="0" i="0" dirty="0">
+                <a:solidFill>
+                  <a:srgbClr val="2F3338"/>
+                </a:solidFill>
+                <a:latin typeface="Segoe UI"/>
+              </a:rPr>
+              <a:t>).</a:t>
+            </a:r>
+          </a:p>
+          <a:p>
+            <a:pPr algn="l">
+              <a:spcBef>
+                <a:spcPts val="0"/>
+              </a:spcBef>
+              <a:spcAft>
+                <a:spcPts val="200"/>
+              </a:spcAft>
+            </a:pPr>
+            <a:r>
+              <a:rPr sz="1500" b="0" i="0" dirty="0">
+                <a:solidFill>
+                  <a:srgbClr val="2F3338"/>
+                </a:solidFill>
+                <a:latin typeface="Segoe UI"/>
+              </a:rPr>
+              <a:t>- </a:t>
+            </a:r>
+            <a:r>
+              <a:rPr sz="1500" b="0" i="0" dirty="0" err="1">
+                <a:solidFill>
+                  <a:srgbClr val="2F3338"/>
+                </a:solidFill>
+                <a:latin typeface="Segoe UI"/>
+              </a:rPr>
+              <a:t>parseExpr</a:t>
+            </a:r>
+            <a:r>
+              <a:rPr sz="1500" b="0" i="0" dirty="0">
+                <a:solidFill>
+                  <a:srgbClr val="2F3338"/>
+                </a:solidFill>
+                <a:latin typeface="Segoe UI"/>
+              </a:rPr>
+              <a:t> </a:t>
+            </a:r>
+            <a:r>
+              <a:rPr lang="ro-RO" sz="1500" dirty="0" err="1">
+                <a:solidFill>
+                  <a:srgbClr val="2F3338"/>
+                </a:solidFill>
+                <a:latin typeface="Segoe UI"/>
+              </a:rPr>
+              <a:t>î</a:t>
+            </a:r>
+            <a:r>
+              <a:rPr sz="1500" b="0" i="0" dirty="0" err="1" smtClean="0">
+                <a:solidFill>
+                  <a:srgbClr val="2F3338"/>
+                </a:solidFill>
+                <a:latin typeface="Segoe UI"/>
+              </a:rPr>
+              <a:t>ntoarce</a:t>
+            </a:r>
+            <a:r>
+              <a:rPr sz="1500" b="0" i="0" dirty="0" smtClean="0">
+                <a:solidFill>
+                  <a:srgbClr val="2F3338"/>
+                </a:solidFill>
+                <a:latin typeface="Segoe UI"/>
+              </a:rPr>
+              <a:t> </a:t>
+            </a:r>
+            <a:r>
+              <a:rPr sz="1500" b="0" i="0" dirty="0">
+                <a:solidFill>
+                  <a:srgbClr val="2F3338"/>
+                </a:solidFill>
+                <a:latin typeface="Segoe UI"/>
+              </a:rPr>
+              <a:t>Maybe </a:t>
+            </a:r>
+            <a:r>
+              <a:rPr sz="1500" b="0" i="0" dirty="0" err="1">
+                <a:solidFill>
+                  <a:srgbClr val="2F3338"/>
+                </a:solidFill>
+                <a:latin typeface="Segoe UI"/>
+              </a:rPr>
+              <a:t>Expr</a:t>
+            </a:r>
+            <a:r>
+              <a:rPr sz="1500" b="0" i="0" dirty="0">
+                <a:solidFill>
+                  <a:srgbClr val="2F3338"/>
+                </a:solidFill>
+                <a:latin typeface="Segoe UI"/>
+              </a:rPr>
+              <a:t>, </a:t>
+            </a:r>
+            <a:r>
+              <a:rPr sz="1500" b="0" i="0" dirty="0" err="1">
+                <a:solidFill>
+                  <a:srgbClr val="2F3338"/>
+                </a:solidFill>
+                <a:latin typeface="Segoe UI"/>
+              </a:rPr>
+              <a:t>deci</a:t>
+            </a:r>
+            <a:r>
+              <a:rPr sz="1500" b="0" i="0" dirty="0">
+                <a:solidFill>
+                  <a:srgbClr val="2F3338"/>
+                </a:solidFill>
+                <a:latin typeface="Segoe UI"/>
+              </a:rPr>
+              <a:t> nu </a:t>
+            </a:r>
+            <a:r>
+              <a:rPr sz="1500" b="0" i="0" dirty="0" err="1" smtClean="0">
+                <a:solidFill>
+                  <a:srgbClr val="2F3338"/>
+                </a:solidFill>
+                <a:latin typeface="Segoe UI"/>
+              </a:rPr>
+              <a:t>ofer</a:t>
+            </a:r>
+            <a:r>
+              <a:rPr lang="ro-RO" sz="1500" b="0" i="0" dirty="0" smtClean="0">
+                <a:solidFill>
+                  <a:srgbClr val="2F3338"/>
+                </a:solidFill>
+                <a:latin typeface="Segoe UI"/>
+              </a:rPr>
+              <a:t>ă</a:t>
+            </a:r>
+            <a:r>
+              <a:rPr sz="1500" b="0" i="0" dirty="0" smtClean="0">
+                <a:solidFill>
+                  <a:srgbClr val="2F3338"/>
+                </a:solidFill>
+                <a:latin typeface="Segoe UI"/>
+              </a:rPr>
+              <a:t> </a:t>
+            </a:r>
+            <a:r>
+              <a:rPr sz="1500" b="0" i="0" dirty="0" err="1">
+                <a:solidFill>
+                  <a:srgbClr val="2F3338"/>
+                </a:solidFill>
+                <a:latin typeface="Segoe UI"/>
+              </a:rPr>
+              <a:t>mesaj</a:t>
+            </a:r>
+            <a:r>
+              <a:rPr sz="1500" b="0" i="0" dirty="0">
+                <a:solidFill>
+                  <a:srgbClr val="2F3338"/>
+                </a:solidFill>
+                <a:latin typeface="Segoe UI"/>
+              </a:rPr>
+              <a:t> de </a:t>
+            </a:r>
+            <a:r>
+              <a:rPr sz="1500" b="0" i="0" dirty="0" err="1">
+                <a:solidFill>
+                  <a:srgbClr val="2F3338"/>
+                </a:solidFill>
+                <a:latin typeface="Segoe UI"/>
+              </a:rPr>
+              <a:t>eroare</a:t>
+            </a:r>
+            <a:r>
+              <a:rPr sz="1500" b="0" i="0" dirty="0">
+                <a:solidFill>
+                  <a:srgbClr val="2F3338"/>
+                </a:solidFill>
+                <a:latin typeface="Segoe UI"/>
+              </a:rPr>
+              <a:t> </a:t>
+            </a:r>
+            <a:r>
+              <a:rPr sz="1500" b="0" i="0" dirty="0" err="1">
+                <a:solidFill>
+                  <a:srgbClr val="2F3338"/>
+                </a:solidFill>
+                <a:latin typeface="Segoe UI"/>
+              </a:rPr>
+              <a:t>detaliat</a:t>
+            </a:r>
+            <a:r>
+              <a:rPr sz="1500" b="0" i="0" dirty="0">
+                <a:solidFill>
+                  <a:srgbClr val="2F3338"/>
+                </a:solidFill>
+                <a:latin typeface="Segoe UI"/>
+              </a:rPr>
+              <a:t> la </a:t>
+            </a:r>
+            <a:r>
+              <a:rPr sz="1500" b="0" i="0" dirty="0" err="1">
+                <a:solidFill>
+                  <a:srgbClr val="2F3338"/>
+                </a:solidFill>
+                <a:latin typeface="Segoe UI"/>
+              </a:rPr>
+              <a:t>parsare</a:t>
+            </a:r>
+            <a:r>
+              <a:rPr sz="1500" b="0" i="0" dirty="0">
+                <a:solidFill>
+                  <a:srgbClr val="2F3338"/>
+                </a:solidFill>
+                <a:latin typeface="Segoe UI"/>
+              </a:rPr>
+              <a:t>.</a:t>
+            </a:r>
+          </a:p>
+          <a:p>
+            <a:pPr algn="l">
+              <a:spcBef>
+                <a:spcPts val="0"/>
+              </a:spcBef>
+              <a:spcAft>
+                <a:spcPts val="200"/>
+              </a:spcAft>
+            </a:pPr>
+            <a:r>
+              <a:rPr sz="1500" b="0" i="0" dirty="0">
+                <a:solidFill>
+                  <a:srgbClr val="2F3338"/>
+                </a:solidFill>
+                <a:latin typeface="Segoe UI"/>
+              </a:rPr>
+              <a:t>- </a:t>
+            </a:r>
+            <a:r>
+              <a:rPr sz="1500" b="0" i="0" dirty="0" err="1">
+                <a:solidFill>
+                  <a:srgbClr val="2F3338"/>
+                </a:solidFill>
+                <a:latin typeface="Segoe UI"/>
+              </a:rPr>
+              <a:t>variablePool</a:t>
+            </a:r>
+            <a:r>
+              <a:rPr sz="1500" b="0" i="0" dirty="0">
+                <a:solidFill>
+                  <a:srgbClr val="2F3338"/>
+                </a:solidFill>
+                <a:latin typeface="Segoe UI"/>
+              </a:rPr>
+              <a:t> </a:t>
+            </a:r>
+            <a:r>
+              <a:rPr sz="1500" b="0" i="0" dirty="0" err="1">
+                <a:solidFill>
+                  <a:srgbClr val="2F3338"/>
+                </a:solidFill>
+                <a:latin typeface="Segoe UI"/>
+              </a:rPr>
+              <a:t>este</a:t>
+            </a:r>
+            <a:r>
+              <a:rPr sz="1500" b="0" i="0" dirty="0">
+                <a:solidFill>
+                  <a:srgbClr val="2F3338"/>
+                </a:solidFill>
+                <a:latin typeface="Segoe UI"/>
+              </a:rPr>
+              <a:t> </a:t>
+            </a:r>
+            <a:r>
+              <a:rPr sz="1500" b="0" i="0" dirty="0" err="1">
+                <a:solidFill>
+                  <a:srgbClr val="2F3338"/>
+                </a:solidFill>
+                <a:latin typeface="Segoe UI"/>
+              </a:rPr>
+              <a:t>finit</a:t>
+            </a:r>
+            <a:r>
+              <a:rPr sz="1500" b="0" i="0" dirty="0">
+                <a:solidFill>
+                  <a:srgbClr val="2F3338"/>
+                </a:solidFill>
+                <a:latin typeface="Segoe UI"/>
+              </a:rPr>
+              <a:t> (</a:t>
+            </a:r>
+            <a:r>
+              <a:rPr sz="1500" b="0" i="0" dirty="0" err="1">
+                <a:solidFill>
+                  <a:srgbClr val="2F3338"/>
+                </a:solidFill>
+                <a:latin typeface="Segoe UI"/>
+              </a:rPr>
+              <a:t>x,y,z,u,v,w,a,b,c</a:t>
+            </a:r>
+            <a:r>
+              <a:rPr sz="1500" b="0" i="0" dirty="0">
+                <a:solidFill>
+                  <a:srgbClr val="2F3338"/>
+                </a:solidFill>
+                <a:latin typeface="Segoe UI"/>
+              </a:rPr>
+              <a:t>), </a:t>
+            </a:r>
+            <a:r>
+              <a:rPr sz="1500" b="0" i="0" dirty="0" err="1">
+                <a:solidFill>
+                  <a:srgbClr val="2F3338"/>
+                </a:solidFill>
+                <a:latin typeface="Segoe UI"/>
+              </a:rPr>
+              <a:t>deci</a:t>
+            </a:r>
+            <a:r>
+              <a:rPr sz="1500" b="0" i="0" dirty="0">
+                <a:solidFill>
+                  <a:srgbClr val="2F3338"/>
+                </a:solidFill>
+                <a:latin typeface="Segoe UI"/>
+              </a:rPr>
+              <a:t> </a:t>
+            </a:r>
+            <a:r>
+              <a:rPr sz="1500" b="0" i="0" dirty="0" err="1">
+                <a:solidFill>
+                  <a:srgbClr val="2F3338"/>
+                </a:solidFill>
+                <a:latin typeface="Segoe UI"/>
+              </a:rPr>
+              <a:t>varietatea</a:t>
+            </a:r>
+            <a:r>
+              <a:rPr sz="1500" b="0" i="0" dirty="0">
+                <a:solidFill>
+                  <a:srgbClr val="2F3338"/>
+                </a:solidFill>
+                <a:latin typeface="Segoe UI"/>
+              </a:rPr>
+              <a:t> </a:t>
+            </a:r>
+            <a:r>
+              <a:rPr sz="1500" b="0" i="0" dirty="0" err="1">
+                <a:solidFill>
+                  <a:srgbClr val="2F3338"/>
+                </a:solidFill>
+                <a:latin typeface="Segoe UI"/>
+              </a:rPr>
+              <a:t>numelor</a:t>
+            </a:r>
+            <a:r>
+              <a:rPr sz="1500" b="0" i="0" dirty="0">
+                <a:solidFill>
+                  <a:srgbClr val="2F3338"/>
+                </a:solidFill>
+                <a:latin typeface="Segoe UI"/>
+              </a:rPr>
+              <a:t> </a:t>
+            </a:r>
+            <a:r>
+              <a:rPr sz="1500" b="0" i="0" dirty="0" err="1">
+                <a:solidFill>
+                  <a:srgbClr val="2F3338"/>
+                </a:solidFill>
+                <a:latin typeface="Segoe UI"/>
+              </a:rPr>
+              <a:t>este</a:t>
+            </a:r>
+            <a:r>
+              <a:rPr sz="1500" b="0" i="0" dirty="0">
+                <a:solidFill>
+                  <a:srgbClr val="2F3338"/>
+                </a:solidFill>
+                <a:latin typeface="Segoe UI"/>
+              </a:rPr>
+              <a:t> </a:t>
+            </a:r>
+            <a:r>
+              <a:rPr sz="1500" b="0" i="0" dirty="0" err="1" smtClean="0">
+                <a:solidFill>
+                  <a:srgbClr val="2F3338"/>
+                </a:solidFill>
+                <a:latin typeface="Segoe UI"/>
+              </a:rPr>
+              <a:t>controlat</a:t>
+            </a:r>
+            <a:r>
+              <a:rPr lang="ro-RO" sz="1500" b="0" i="0" dirty="0" smtClean="0">
+                <a:solidFill>
+                  <a:srgbClr val="2F3338"/>
+                </a:solidFill>
+                <a:latin typeface="Segoe UI"/>
+              </a:rPr>
+              <a:t>ă</a:t>
+            </a:r>
+            <a:r>
+              <a:rPr sz="1500" b="0" i="0" dirty="0" smtClean="0">
+                <a:solidFill>
+                  <a:srgbClr val="2F3338"/>
+                </a:solidFill>
+                <a:latin typeface="Segoe UI"/>
+              </a:rPr>
+              <a:t>.</a:t>
+            </a:r>
+            <a:endParaRPr sz="1500" b="0" i="0" dirty="0">
+              <a:solidFill>
+                <a:srgbClr val="2F3338"/>
+              </a:solidFill>
+              <a:latin typeface="Segoe UI"/>
+            </a:endParaRPr>
+          </a:p>
+          <a:p>
+            <a:pPr algn="l">
+              <a:spcBef>
+                <a:spcPts val="0"/>
+              </a:spcBef>
+              <a:spcAft>
+                <a:spcPts val="200"/>
+              </a:spcAft>
+            </a:pPr>
+            <a:r>
+              <a:rPr sz="1500" b="0" i="0" dirty="0">
+                <a:solidFill>
+                  <a:srgbClr val="2F3338"/>
+                </a:solidFill>
+                <a:latin typeface="Segoe UI"/>
+              </a:rPr>
+              <a:t>- </a:t>
+            </a:r>
+            <a:r>
+              <a:rPr sz="1500" b="0" i="0" dirty="0" err="1">
+                <a:solidFill>
+                  <a:srgbClr val="2F3338"/>
+                </a:solidFill>
+                <a:latin typeface="Segoe UI"/>
+              </a:rPr>
+              <a:t>Distribuirea</a:t>
+            </a:r>
+            <a:r>
+              <a:rPr sz="1500" b="0" i="0" dirty="0">
+                <a:solidFill>
+                  <a:srgbClr val="2F3338"/>
+                </a:solidFill>
+                <a:latin typeface="Segoe UI"/>
+              </a:rPr>
+              <a:t> </a:t>
+            </a:r>
+            <a:r>
+              <a:rPr sz="1500" b="0" i="0" dirty="0" err="1">
+                <a:solidFill>
+                  <a:srgbClr val="2F3338"/>
+                </a:solidFill>
+                <a:latin typeface="Segoe UI"/>
+              </a:rPr>
+              <a:t>constructorilor</a:t>
+            </a:r>
+            <a:r>
+              <a:rPr sz="1500" b="0" i="0" dirty="0">
+                <a:solidFill>
+                  <a:srgbClr val="2F3338"/>
+                </a:solidFill>
+                <a:latin typeface="Segoe UI"/>
+              </a:rPr>
+              <a:t> </a:t>
+            </a:r>
+            <a:r>
+              <a:rPr sz="1500" b="0" i="0" dirty="0" err="1">
+                <a:solidFill>
+                  <a:srgbClr val="2F3338"/>
+                </a:solidFill>
+                <a:latin typeface="Segoe UI"/>
+              </a:rPr>
+              <a:t>este</a:t>
+            </a:r>
+            <a:r>
+              <a:rPr sz="1500" b="0" i="0" dirty="0">
+                <a:solidFill>
+                  <a:srgbClr val="2F3338"/>
+                </a:solidFill>
+                <a:latin typeface="Segoe UI"/>
+              </a:rPr>
+              <a:t> </a:t>
+            </a:r>
+            <a:r>
+              <a:rPr sz="1500" b="0" i="0" dirty="0" smtClean="0">
+                <a:solidFill>
+                  <a:srgbClr val="2F3338"/>
+                </a:solidFill>
+                <a:latin typeface="Segoe UI"/>
+              </a:rPr>
+              <a:t>fix</a:t>
+            </a:r>
+            <a:r>
+              <a:rPr lang="ro-RO" sz="1500" b="0" i="0" dirty="0" smtClean="0">
+                <a:solidFill>
+                  <a:srgbClr val="2F3338"/>
+                </a:solidFill>
+                <a:latin typeface="Segoe UI"/>
+              </a:rPr>
+              <a:t>ă</a:t>
+            </a:r>
+            <a:r>
+              <a:rPr sz="1500" b="0" i="0" dirty="0" smtClean="0">
+                <a:solidFill>
+                  <a:srgbClr val="2F3338"/>
+                </a:solidFill>
+                <a:latin typeface="Segoe UI"/>
+              </a:rPr>
+              <a:t> </a:t>
+            </a:r>
+            <a:r>
+              <a:rPr lang="ro-RO" sz="1500" dirty="0">
+                <a:solidFill>
+                  <a:srgbClr val="2F3338"/>
+                </a:solidFill>
+                <a:latin typeface="Segoe UI"/>
+              </a:rPr>
+              <a:t>î</a:t>
+            </a:r>
+            <a:r>
+              <a:rPr sz="1500" b="0" i="0" dirty="0" smtClean="0">
+                <a:solidFill>
+                  <a:srgbClr val="2F3338"/>
+                </a:solidFill>
+                <a:latin typeface="Segoe UI"/>
+              </a:rPr>
+              <a:t>n </a:t>
+            </a:r>
+            <a:r>
+              <a:rPr sz="1500" b="0" i="0" dirty="0">
+                <a:solidFill>
+                  <a:srgbClr val="2F3338"/>
+                </a:solidFill>
+                <a:latin typeface="Segoe UI"/>
+              </a:rPr>
+              <a:t>generator (frequency), </a:t>
+            </a:r>
+            <a:r>
+              <a:rPr sz="1500" b="0" i="0" dirty="0" err="1" smtClean="0">
+                <a:solidFill>
+                  <a:srgbClr val="2F3338"/>
+                </a:solidFill>
+                <a:latin typeface="Segoe UI"/>
+              </a:rPr>
+              <a:t>necesit</a:t>
+            </a:r>
+            <a:r>
+              <a:rPr lang="ro-RO" sz="1500" b="0" i="0" dirty="0" smtClean="0">
+                <a:solidFill>
+                  <a:srgbClr val="2F3338"/>
+                </a:solidFill>
+                <a:latin typeface="Segoe UI"/>
+              </a:rPr>
+              <a:t>â</a:t>
+            </a:r>
+            <a:r>
+              <a:rPr sz="1500" b="0" i="0" dirty="0" err="1" smtClean="0">
+                <a:solidFill>
+                  <a:srgbClr val="2F3338"/>
+                </a:solidFill>
+                <a:latin typeface="Segoe UI"/>
+              </a:rPr>
+              <a:t>nd</a:t>
+            </a:r>
+            <a:r>
+              <a:rPr sz="1500" b="0" i="0" dirty="0" smtClean="0">
+                <a:solidFill>
+                  <a:srgbClr val="2F3338"/>
+                </a:solidFill>
+                <a:latin typeface="Segoe UI"/>
+              </a:rPr>
+              <a:t> </a:t>
+            </a:r>
+            <a:r>
+              <a:rPr sz="1500" b="0" i="0" dirty="0" err="1">
+                <a:solidFill>
+                  <a:srgbClr val="2F3338"/>
+                </a:solidFill>
+                <a:latin typeface="Segoe UI"/>
+              </a:rPr>
+              <a:t>recalibrare</a:t>
+            </a:r>
+            <a:r>
+              <a:rPr sz="1500" b="0" i="0" dirty="0">
+                <a:solidFill>
+                  <a:srgbClr val="2F3338"/>
+                </a:solidFill>
+                <a:latin typeface="Segoe UI"/>
+              </a:rPr>
+              <a:t> la </a:t>
+            </a:r>
+            <a:r>
+              <a:rPr sz="1500" b="0" i="0" dirty="0" err="1">
+                <a:solidFill>
+                  <a:srgbClr val="2F3338"/>
+                </a:solidFill>
+                <a:latin typeface="Segoe UI"/>
+              </a:rPr>
+              <a:t>extinderea</a:t>
+            </a:r>
+            <a:r>
+              <a:rPr sz="1500" b="0" i="0" dirty="0">
+                <a:solidFill>
+                  <a:srgbClr val="2F3338"/>
+                </a:solidFill>
+                <a:latin typeface="Segoe UI"/>
+              </a:rPr>
+              <a:t> AST-</a:t>
+            </a:r>
+            <a:r>
+              <a:rPr sz="1500" b="0" i="0" dirty="0" err="1">
+                <a:solidFill>
+                  <a:srgbClr val="2F3338"/>
+                </a:solidFill>
+                <a:latin typeface="Segoe UI"/>
+              </a:rPr>
+              <a:t>ului</a:t>
+            </a:r>
+            <a:r>
+              <a:rPr sz="1500" b="0" i="0" dirty="0">
+                <a:solidFill>
+                  <a:srgbClr val="2F3338"/>
+                </a:solidFill>
+                <a:latin typeface="Segoe UI"/>
+              </a:rPr>
+              <a:t>.</a:t>
+            </a:r>
+          </a:p>
+          <a:p>
+            <a:pPr algn="l">
+              <a:spcBef>
+                <a:spcPts val="0"/>
+              </a:spcBef>
+              <a:spcAft>
+                <a:spcPts val="200"/>
+              </a:spcAft>
+            </a:pPr>
+            <a:r>
+              <a:rPr sz="1500" b="0" i="0" dirty="0">
+                <a:solidFill>
+                  <a:srgbClr val="2F3338"/>
+                </a:solidFill>
+                <a:latin typeface="Segoe UI"/>
+              </a:rPr>
+              <a:t>- </a:t>
+            </a:r>
+            <a:r>
+              <a:rPr sz="1500" b="0" i="0" dirty="0" err="1">
+                <a:solidFill>
+                  <a:srgbClr val="2F3338"/>
+                </a:solidFill>
+                <a:latin typeface="Segoe UI"/>
+              </a:rPr>
+              <a:t>Testarea</a:t>
+            </a:r>
+            <a:r>
+              <a:rPr sz="1500" b="0" i="0" dirty="0">
+                <a:solidFill>
+                  <a:srgbClr val="2F3338"/>
+                </a:solidFill>
+                <a:latin typeface="Segoe UI"/>
+              </a:rPr>
+              <a:t> </a:t>
+            </a:r>
+            <a:r>
+              <a:rPr sz="1500" b="0" i="0" dirty="0" err="1">
+                <a:solidFill>
+                  <a:srgbClr val="2F3338"/>
+                </a:solidFill>
+                <a:latin typeface="Segoe UI"/>
+              </a:rPr>
+              <a:t>este</a:t>
+            </a:r>
+            <a:r>
+              <a:rPr sz="1500" b="0" i="0" dirty="0">
+                <a:solidFill>
+                  <a:srgbClr val="2F3338"/>
+                </a:solidFill>
+                <a:latin typeface="Segoe UI"/>
+              </a:rPr>
+              <a:t> </a:t>
+            </a:r>
+            <a:r>
+              <a:rPr sz="1500" b="0" i="0" dirty="0" smtClean="0">
+                <a:solidFill>
+                  <a:srgbClr val="2F3338"/>
+                </a:solidFill>
+                <a:latin typeface="Segoe UI"/>
+              </a:rPr>
+              <a:t>probabilistic</a:t>
+            </a:r>
+            <a:r>
+              <a:rPr lang="ro-RO" sz="1500" b="0" i="0" dirty="0" smtClean="0">
+                <a:solidFill>
+                  <a:srgbClr val="2F3338"/>
+                </a:solidFill>
+                <a:latin typeface="Segoe UI"/>
+              </a:rPr>
+              <a:t>ă</a:t>
+            </a:r>
+            <a:r>
+              <a:rPr sz="1500" b="0" i="0" dirty="0" smtClean="0">
+                <a:solidFill>
+                  <a:srgbClr val="2F3338"/>
+                </a:solidFill>
+                <a:latin typeface="Segoe UI"/>
+              </a:rPr>
+              <a:t>: </a:t>
+            </a:r>
+            <a:r>
+              <a:rPr sz="1500" b="0" i="0" dirty="0" err="1">
+                <a:solidFill>
+                  <a:srgbClr val="2F3338"/>
+                </a:solidFill>
+                <a:latin typeface="Segoe UI"/>
+              </a:rPr>
+              <a:t>trecerea</a:t>
+            </a:r>
+            <a:r>
+              <a:rPr sz="1500" b="0" i="0" dirty="0">
+                <a:solidFill>
+                  <a:srgbClr val="2F3338"/>
+                </a:solidFill>
+                <a:latin typeface="Segoe UI"/>
+              </a:rPr>
+              <a:t> </a:t>
+            </a:r>
+            <a:r>
+              <a:rPr sz="1500" b="0" i="0" dirty="0" err="1">
+                <a:solidFill>
+                  <a:srgbClr val="2F3338"/>
+                </a:solidFill>
+                <a:latin typeface="Segoe UI"/>
+              </a:rPr>
+              <a:t>testelor</a:t>
+            </a:r>
+            <a:r>
+              <a:rPr sz="1500" b="0" i="0" dirty="0">
+                <a:solidFill>
+                  <a:srgbClr val="2F3338"/>
+                </a:solidFill>
+                <a:latin typeface="Segoe UI"/>
+              </a:rPr>
+              <a:t> nu </a:t>
+            </a:r>
+            <a:r>
+              <a:rPr sz="1500" b="0" i="0" dirty="0" err="1" smtClean="0">
+                <a:solidFill>
+                  <a:srgbClr val="2F3338"/>
+                </a:solidFill>
+                <a:latin typeface="Segoe UI"/>
+              </a:rPr>
+              <a:t>echivaleaz</a:t>
+            </a:r>
+            <a:r>
+              <a:rPr lang="ro-RO" sz="1500" b="0" i="0" dirty="0" smtClean="0">
+                <a:solidFill>
+                  <a:srgbClr val="2F3338"/>
+                </a:solidFill>
+                <a:latin typeface="Segoe UI"/>
+              </a:rPr>
+              <a:t>ă</a:t>
+            </a:r>
+            <a:r>
+              <a:rPr sz="1500" b="0" i="0" dirty="0" smtClean="0">
+                <a:solidFill>
+                  <a:srgbClr val="2F3338"/>
+                </a:solidFill>
+                <a:latin typeface="Segoe UI"/>
+              </a:rPr>
+              <a:t> </a:t>
+            </a:r>
+            <a:r>
+              <a:rPr sz="1500" b="0" i="0" dirty="0">
+                <a:solidFill>
+                  <a:srgbClr val="2F3338"/>
+                </a:solidFill>
+                <a:latin typeface="Segoe UI"/>
+              </a:rPr>
+              <a:t>cu </a:t>
+            </a:r>
+            <a:r>
+              <a:rPr sz="1500" b="0" i="0" dirty="0" err="1" smtClean="0">
+                <a:solidFill>
+                  <a:srgbClr val="2F3338"/>
+                </a:solidFill>
+                <a:latin typeface="Segoe UI"/>
+              </a:rPr>
+              <a:t>demonstra</a:t>
+            </a:r>
+            <a:r>
+              <a:rPr lang="ro-RO" sz="1500" b="0" i="0" dirty="0" smtClean="0">
+                <a:solidFill>
+                  <a:srgbClr val="2F3338"/>
+                </a:solidFill>
+                <a:latin typeface="Segoe UI"/>
+              </a:rPr>
+              <a:t>ț</a:t>
+            </a:r>
+            <a:r>
+              <a:rPr sz="1500" b="0" i="0" dirty="0" err="1" smtClean="0">
+                <a:solidFill>
+                  <a:srgbClr val="2F3338"/>
+                </a:solidFill>
+                <a:latin typeface="Segoe UI"/>
+              </a:rPr>
+              <a:t>ie</a:t>
+            </a:r>
+            <a:r>
+              <a:rPr sz="1500" b="0" i="0" dirty="0" smtClean="0">
+                <a:solidFill>
+                  <a:srgbClr val="2F3338"/>
+                </a:solidFill>
+                <a:latin typeface="Segoe UI"/>
+              </a:rPr>
+              <a:t> </a:t>
+            </a:r>
+            <a:r>
+              <a:rPr sz="1500" b="0" i="0" dirty="0" err="1" smtClean="0">
+                <a:solidFill>
+                  <a:srgbClr val="2F3338"/>
+                </a:solidFill>
+                <a:latin typeface="Segoe UI"/>
+              </a:rPr>
+              <a:t>matematic</a:t>
+            </a:r>
+            <a:r>
+              <a:rPr lang="ro-RO" sz="1500" b="0" i="0" dirty="0" smtClean="0">
+                <a:solidFill>
+                  <a:srgbClr val="2F3338"/>
+                </a:solidFill>
+                <a:latin typeface="Segoe UI"/>
+              </a:rPr>
+              <a:t>ă</a:t>
+            </a:r>
+            <a:r>
+              <a:rPr sz="1500" b="0" i="0" dirty="0" smtClean="0">
+                <a:solidFill>
+                  <a:srgbClr val="2F3338"/>
+                </a:solidFill>
+                <a:latin typeface="Segoe UI"/>
+              </a:rPr>
+              <a:t> </a:t>
+            </a:r>
+            <a:r>
+              <a:rPr sz="1500" b="0" i="0" dirty="0" err="1" smtClean="0">
+                <a:solidFill>
+                  <a:srgbClr val="2F3338"/>
+                </a:solidFill>
+                <a:latin typeface="Segoe UI"/>
+              </a:rPr>
+              <a:t>complet</a:t>
+            </a:r>
+            <a:r>
+              <a:rPr lang="ro-RO" sz="1500" b="0" i="0" dirty="0" smtClean="0">
+                <a:solidFill>
+                  <a:srgbClr val="2F3338"/>
+                </a:solidFill>
+                <a:latin typeface="Segoe UI"/>
+              </a:rPr>
+              <a:t>ă</a:t>
+            </a:r>
+            <a:r>
+              <a:rPr sz="1500" b="0" i="0" dirty="0" smtClean="0">
+                <a:solidFill>
+                  <a:srgbClr val="2F3338"/>
+                </a:solidFill>
+                <a:latin typeface="Segoe UI"/>
+              </a:rPr>
+              <a:t>.</a:t>
+            </a:r>
+            <a:endParaRPr sz="1500" b="0" i="0" dirty="0">
+              <a:solidFill>
+                <a:srgbClr val="2F3338"/>
+              </a:solidFill>
+              <a:latin typeface="Segoe UI"/>
+            </a:endParaRPr>
+          </a:p>
+        </p:txBody>
+      </p:sp>
+    </p:spTree>
+    <p:extLst>
+      <p:ext uri="{BB962C8B-B14F-4D97-AF65-F5344CB8AC3E}">
+        <p14:creationId xmlns:p14="http://schemas.microsoft.com/office/powerpoint/2010/main" val="2232890793"/>
+      </p:ext>
+    </p:extLst>
+  </p:cSld>
+  <p:clrMapOvr>
+    <a:masterClrMapping/>
+  </p:clrMapOvr>
+</p:sld>
+</file>
+
+<file path=ppt/slides/slide26.xml><?xml version="1.0" encoding="utf-8"?>
+<p:sld xmlns:a="http://schemas.openxmlformats.org/drawingml/2006/main" xmlns:r="http://schemas.openxmlformats.org/officeDocument/2006/relationships" xmlns:p="http://schemas.openxmlformats.org/presentationml/2006/main">
+  <p:cSld>
+    <p:spTree>
+      <p:nvGrpSpPr>
+        <p:cNvPr id="1" name=""/>
+        <p:cNvGrpSpPr/>
+        <p:nvPr/>
+      </p:nvGrpSpPr>
+      <p:grpSpPr>
+        <a:xfrm>
+          <a:off x="0" y="0"/>
+          <a:ext cx="0" cy="0"/>
+          <a:chOff x="0" y="0"/>
+          <a:chExt cx="0" cy="0"/>
+        </a:xfrm>
+      </p:grpSpPr>
+      <p:sp>
+        <p:nvSpPr>
+          <p:cNvPr id="2" name="Title 1"/>
+          <p:cNvSpPr>
+            <a:spLocks noGrp="1"/>
+          </p:cNvSpPr>
+          <p:nvPr>
+            <p:ph type="title"/>
+          </p:nvPr>
+        </p:nvSpPr>
+        <p:spPr/>
+        <p:txBody>
+          <a:bodyPr/>
+          <a:lstStyle/>
+          <a:p>
+            <a:r>
+              <a:rPr sz="3600"/>
+              <a:t>Concluzii</a:t>
+            </a:r>
+          </a:p>
+        </p:txBody>
+      </p:sp>
+      <p:sp>
+        <p:nvSpPr>
+          <p:cNvPr id="3" name="Content Placeholder 2"/>
+          <p:cNvSpPr>
+            <a:spLocks noGrp="1"/>
+          </p:cNvSpPr>
+          <p:nvPr>
+            <p:ph idx="1"/>
+          </p:nvPr>
+        </p:nvSpPr>
+        <p:spPr/>
+        <p:txBody>
+          <a:bodyPr/>
+          <a:lstStyle/>
+          <a:p>
+            <a:r>
+              <a:rPr sz="2100" dirty="0" err="1"/>
+              <a:t>QuickCheck</a:t>
+            </a:r>
+            <a:r>
+              <a:rPr sz="2100" dirty="0"/>
+              <a:t> </a:t>
+            </a:r>
+            <a:r>
+              <a:rPr sz="2100" dirty="0" err="1" smtClean="0"/>
+              <a:t>valideaz</a:t>
+            </a:r>
+            <a:r>
+              <a:rPr lang="ro-RO" sz="2100" dirty="0" smtClean="0"/>
+              <a:t>ă</a:t>
+            </a:r>
+            <a:r>
+              <a:rPr sz="2100" dirty="0" smtClean="0"/>
+              <a:t> </a:t>
+            </a:r>
+            <a:r>
+              <a:rPr sz="2100" dirty="0" err="1"/>
+              <a:t>comportamentul</a:t>
+            </a:r>
+            <a:r>
+              <a:rPr sz="2100" dirty="0"/>
+              <a:t> general, nu </a:t>
+            </a:r>
+            <a:r>
+              <a:rPr sz="2100" dirty="0" err="1"/>
+              <a:t>doar</a:t>
+            </a:r>
+            <a:r>
+              <a:rPr sz="2100" dirty="0"/>
+              <a:t> </a:t>
+            </a:r>
+            <a:r>
+              <a:rPr sz="2100" dirty="0" err="1"/>
+              <a:t>exemple</a:t>
+            </a:r>
+            <a:r>
+              <a:rPr sz="2100" dirty="0"/>
+              <a:t> </a:t>
+            </a:r>
+            <a:r>
+              <a:rPr sz="2100" dirty="0" err="1"/>
+              <a:t>particulare</a:t>
+            </a:r>
+            <a:endParaRPr sz="2100" dirty="0"/>
+          </a:p>
+          <a:p>
+            <a:r>
+              <a:rPr sz="2100" dirty="0" err="1"/>
+              <a:t>Generatoarele</a:t>
+            </a:r>
+            <a:r>
+              <a:rPr sz="2100" dirty="0"/>
+              <a:t> </a:t>
+            </a:r>
+            <a:r>
+              <a:rPr sz="2100" dirty="0" err="1"/>
+              <a:t>manuale</a:t>
+            </a:r>
+            <a:r>
+              <a:rPr sz="2100" dirty="0"/>
+              <a:t> (frequency, sized, shrink) </a:t>
+            </a:r>
+            <a:r>
+              <a:rPr sz="2100" dirty="0" err="1"/>
+              <a:t>sunt</a:t>
+            </a:r>
+            <a:r>
+              <a:rPr sz="2100" dirty="0"/>
+              <a:t> </a:t>
+            </a:r>
+            <a:r>
+              <a:rPr sz="2100" dirty="0" err="1" smtClean="0"/>
+              <a:t>esen</a:t>
+            </a:r>
+            <a:r>
+              <a:rPr lang="ro-RO" sz="2100" dirty="0" smtClean="0"/>
+              <a:t>ț</a:t>
+            </a:r>
+            <a:r>
+              <a:rPr sz="2100" dirty="0" err="1" smtClean="0"/>
+              <a:t>iale</a:t>
+            </a:r>
+            <a:endParaRPr sz="2100" dirty="0"/>
+          </a:p>
+          <a:p>
+            <a:r>
+              <a:rPr sz="2100" dirty="0"/>
+              <a:t>Mini-</a:t>
+            </a:r>
+            <a:r>
+              <a:rPr sz="2100" dirty="0" err="1"/>
+              <a:t>limbajul</a:t>
+            </a:r>
+            <a:r>
+              <a:rPr sz="2100" dirty="0"/>
+              <a:t> </a:t>
+            </a:r>
+            <a:r>
+              <a:rPr sz="2100" dirty="0" err="1"/>
+              <a:t>aritmetic</a:t>
+            </a:r>
+            <a:r>
+              <a:rPr sz="2100" dirty="0"/>
+              <a:t> </a:t>
+            </a:r>
+            <a:r>
+              <a:rPr sz="2100" dirty="0" err="1"/>
+              <a:t>este</a:t>
+            </a:r>
+            <a:r>
+              <a:rPr sz="2100" dirty="0"/>
+              <a:t> un </a:t>
+            </a:r>
+            <a:r>
+              <a:rPr sz="2100" dirty="0" err="1"/>
+              <a:t>exemplu</a:t>
+            </a:r>
+            <a:r>
+              <a:rPr sz="2100" dirty="0"/>
+              <a:t> natural </a:t>
+            </a:r>
+            <a:r>
+              <a:rPr sz="2100" dirty="0" err="1"/>
+              <a:t>pentru</a:t>
+            </a:r>
+            <a:r>
+              <a:rPr sz="2100" dirty="0"/>
+              <a:t> </a:t>
+            </a:r>
+            <a:r>
+              <a:rPr sz="2100" dirty="0" err="1"/>
+              <a:t>metode</a:t>
+            </a:r>
+            <a:r>
+              <a:rPr sz="2100" dirty="0"/>
+              <a:t> </a:t>
+            </a:r>
+            <a:r>
+              <a:rPr sz="2100" dirty="0" err="1"/>
+              <a:t>formale</a:t>
+            </a:r>
+            <a:endParaRPr sz="2100" dirty="0"/>
+          </a:p>
+          <a:p>
+            <a:r>
+              <a:rPr sz="2100" dirty="0" smtClean="0"/>
+              <a:t>Specific</a:t>
+            </a:r>
+            <a:r>
+              <a:rPr lang="ro-RO" sz="2100" dirty="0" smtClean="0"/>
+              <a:t>ă</a:t>
+            </a:r>
+            <a:r>
+              <a:rPr sz="2100" dirty="0" smtClean="0"/>
+              <a:t>m </a:t>
+            </a:r>
+            <a:r>
+              <a:rPr sz="2100" dirty="0" err="1" smtClean="0"/>
+              <a:t>invarian</a:t>
+            </a:r>
+            <a:r>
+              <a:rPr lang="ro-RO" sz="2100" dirty="0" smtClean="0"/>
+              <a:t>ț</a:t>
+            </a:r>
+            <a:r>
+              <a:rPr sz="2100" dirty="0" smtClean="0"/>
+              <a:t>i </a:t>
+            </a:r>
+            <a:r>
+              <a:rPr sz="2100" dirty="0" err="1"/>
+              <a:t>valabili</a:t>
+            </a:r>
+            <a:r>
+              <a:rPr sz="2100" dirty="0"/>
+              <a:t> </a:t>
+            </a:r>
+            <a:r>
+              <a:rPr sz="2100" dirty="0" err="1"/>
+              <a:t>pentru</a:t>
+            </a:r>
+            <a:r>
+              <a:rPr sz="2100" dirty="0"/>
+              <a:t> </a:t>
+            </a:r>
+            <a:r>
+              <a:rPr sz="2100" dirty="0" err="1"/>
+              <a:t>orice</a:t>
+            </a:r>
+            <a:r>
+              <a:rPr sz="2100" dirty="0"/>
+              <a:t> </a:t>
+            </a:r>
+            <a:r>
+              <a:rPr sz="2100" dirty="0" err="1"/>
+              <a:t>intrare</a:t>
+            </a:r>
+            <a:endParaRPr sz="2100" dirty="0"/>
+          </a:p>
+          <a:p>
+            <a:r>
+              <a:rPr sz="2100" dirty="0" err="1" smtClean="0"/>
+              <a:t>Diferen</a:t>
+            </a:r>
+            <a:r>
+              <a:rPr lang="ro-RO" sz="2100" dirty="0" smtClean="0"/>
+              <a:t>ț</a:t>
+            </a:r>
+            <a:r>
+              <a:rPr sz="2100" dirty="0" smtClean="0"/>
+              <a:t>a-</a:t>
+            </a:r>
+            <a:r>
+              <a:rPr sz="2100" dirty="0" err="1" smtClean="0"/>
+              <a:t>cheie</a:t>
+            </a:r>
+            <a:r>
+              <a:rPr sz="2100" dirty="0" smtClean="0"/>
+              <a:t> </a:t>
+            </a:r>
+            <a:r>
+              <a:rPr sz="2100" dirty="0" err="1" smtClean="0"/>
+              <a:t>fa</a:t>
+            </a:r>
+            <a:r>
+              <a:rPr lang="ro-RO" sz="2100" dirty="0" smtClean="0"/>
+              <a:t>ț</a:t>
+            </a:r>
+            <a:r>
+              <a:rPr lang="ro-RO" sz="2100" dirty="0"/>
+              <a:t>ă</a:t>
+            </a:r>
+            <a:r>
+              <a:rPr sz="2100" dirty="0" smtClean="0"/>
+              <a:t> </a:t>
+            </a:r>
+            <a:r>
+              <a:rPr sz="2100" dirty="0"/>
+              <a:t>de </a:t>
+            </a:r>
+            <a:r>
+              <a:rPr sz="2100" dirty="0" err="1"/>
+              <a:t>testarea</a:t>
+            </a:r>
+            <a:r>
+              <a:rPr sz="2100" dirty="0"/>
+              <a:t> </a:t>
+            </a:r>
+            <a:r>
+              <a:rPr sz="2100" dirty="0" err="1" smtClean="0"/>
+              <a:t>clasic</a:t>
+            </a:r>
+            <a:r>
+              <a:rPr lang="ro-RO" sz="2100" dirty="0" smtClean="0"/>
+              <a:t>ă</a:t>
+            </a:r>
+            <a:r>
+              <a:rPr sz="2100" dirty="0" smtClean="0"/>
+              <a:t>: g</a:t>
+            </a:r>
+            <a:r>
+              <a:rPr lang="ro-RO" sz="2100" dirty="0" smtClean="0"/>
+              <a:t>â</a:t>
+            </a:r>
+            <a:r>
+              <a:rPr sz="2100" dirty="0" err="1" smtClean="0"/>
+              <a:t>ndim</a:t>
+            </a:r>
+            <a:r>
+              <a:rPr sz="2100" dirty="0" smtClean="0"/>
+              <a:t> </a:t>
+            </a:r>
+            <a:r>
+              <a:rPr lang="ro-RO" sz="2100" dirty="0"/>
+              <a:t>î</a:t>
+            </a:r>
+            <a:r>
+              <a:rPr sz="2100" dirty="0" smtClean="0"/>
+              <a:t>n </a:t>
+            </a:r>
+            <a:r>
+              <a:rPr sz="2100" dirty="0" err="1" smtClean="0"/>
+              <a:t>propriet</a:t>
+            </a:r>
+            <a:r>
+              <a:rPr lang="ro-RO" sz="2100" dirty="0" smtClean="0"/>
+              <a:t>ăț</a:t>
+            </a:r>
+            <a:r>
+              <a:rPr sz="2100" dirty="0" smtClean="0"/>
+              <a:t>i</a:t>
+            </a:r>
+            <a:r>
+              <a:rPr sz="2100" dirty="0"/>
+              <a:t>, nu </a:t>
+            </a:r>
+            <a:r>
+              <a:rPr lang="ro-RO" sz="2100" dirty="0" smtClean="0"/>
+              <a:t>î</a:t>
+            </a:r>
+            <a:r>
+              <a:rPr sz="2100" dirty="0" smtClean="0"/>
+              <a:t>n </a:t>
+            </a:r>
+            <a:r>
+              <a:rPr sz="2100" dirty="0" err="1"/>
+              <a:t>cazuri</a:t>
+            </a:r>
+            <a:r>
+              <a:rPr sz="2100" dirty="0"/>
+              <a:t> </a:t>
+            </a:r>
+            <a:r>
+              <a:rPr sz="2100" dirty="0" err="1"/>
+              <a:t>izolate</a:t>
+            </a:r>
+            <a:endParaRPr sz="2100" dirty="0"/>
+          </a:p>
+        </p:txBody>
+      </p:sp>
+    </p:spTree>
+  </p:cSld>
+  <p:clrMapOvr>
+    <a:masterClrMapping/>
+  </p:clrMapOvr>
+</p:sld>
+</file>
+
+<file path=ppt/slides/slide27.xml><?xml version="1.0" encoding="utf-8"?>
+<p:sld xmlns:a="http://schemas.openxmlformats.org/drawingml/2006/main" xmlns:r="http://schemas.openxmlformats.org/officeDocument/2006/relationships" xmlns:p="http://schemas.openxmlformats.org/presentationml/2006/main">
+  <p:cSld>
+    <p:spTree>
+      <p:nvGrpSpPr>
+        <p:cNvPr id="1" name=""/>
+        <p:cNvGrpSpPr/>
+        <p:nvPr/>
+      </p:nvGrpSpPr>
+      <p:grpSpPr>
+        <a:xfrm>
+          <a:off x="0" y="0"/>
+          <a:ext cx="0" cy="0"/>
+          <a:chOff x="0" y="0"/>
+          <a:chExt cx="0" cy="0"/>
+        </a:xfrm>
+      </p:grpSpPr>
+      <p:sp>
+        <p:nvSpPr>
+          <p:cNvPr id="2" name="Title 1"/>
+          <p:cNvSpPr>
+            <a:spLocks noGrp="1"/>
+          </p:cNvSpPr>
+          <p:nvPr>
+            <p:ph type="title"/>
+          </p:nvPr>
+        </p:nvSpPr>
+        <p:spPr/>
+        <p:txBody>
+          <a:bodyPr/>
+          <a:lstStyle/>
+          <a:p>
+            <a:r>
+              <a:rPr lang="ro-RO" dirty="0" smtClean="0"/>
+              <a:t>Bibliografie</a:t>
+            </a:r>
+            <a:endParaRPr lang="en-US" dirty="0"/>
+          </a:p>
+        </p:txBody>
+      </p:sp>
+      <p:sp>
+        <p:nvSpPr>
+          <p:cNvPr id="3" name="Content Placeholder 2"/>
+          <p:cNvSpPr>
+            <a:spLocks noGrp="1"/>
+          </p:cNvSpPr>
+          <p:nvPr>
+            <p:ph idx="1"/>
+          </p:nvPr>
+        </p:nvSpPr>
+        <p:spPr/>
+        <p:txBody>
+          <a:bodyPr/>
+          <a:lstStyle/>
+          <a:p>
+            <a:r>
+              <a:rPr lang="en-US" dirty="0"/>
+              <a:t>[39] K. </a:t>
+            </a:r>
+            <a:r>
+              <a:rPr lang="en-US" dirty="0" err="1"/>
+              <a:t>Claessen</a:t>
+            </a:r>
+            <a:r>
+              <a:rPr lang="en-US" dirty="0"/>
+              <a:t> </a:t>
+            </a:r>
+            <a:r>
+              <a:rPr lang="en-US" dirty="0" err="1"/>
+              <a:t>și</a:t>
+            </a:r>
+            <a:r>
+              <a:rPr lang="en-US" dirty="0"/>
+              <a:t> J. Hughes, “</a:t>
+            </a:r>
+            <a:r>
+              <a:rPr lang="en-US" dirty="0" err="1"/>
+              <a:t>QuickCheck</a:t>
+            </a:r>
+            <a:r>
+              <a:rPr lang="en-US" dirty="0"/>
+              <a:t>: a lightweight tool for random testing of Haskell programs,” in Proceedings of the 5th ACM SIGPLAN International Conference on Functional Programming (ICFP ’00), Montreal, Canada, 2000, pp. 268–279, </a:t>
+            </a:r>
+            <a:r>
+              <a:rPr lang="en-US" dirty="0">
+                <a:hlinkClick r:id="rId2"/>
+              </a:rPr>
+              <a:t>https://dl.acm.org/doi/epdf/10.1145/351240.351266 </a:t>
+            </a:r>
+            <a:endParaRPr lang="en-US" dirty="0"/>
+          </a:p>
+          <a:p>
+            <a:r>
+              <a:rPr lang="en-US" dirty="0"/>
+              <a:t>[40] </a:t>
+            </a:r>
+            <a:r>
+              <a:rPr lang="en-US" dirty="0" err="1"/>
+              <a:t>QuickCheck</a:t>
+            </a:r>
+            <a:r>
+              <a:rPr lang="en-US" dirty="0"/>
+              <a:t> Library Documentation. </a:t>
+            </a:r>
+            <a:r>
+              <a:rPr lang="en-US" dirty="0" err="1"/>
+              <a:t>Hackage</a:t>
+            </a:r>
+            <a:r>
+              <a:rPr lang="en-US" dirty="0"/>
+              <a:t>. </a:t>
+            </a:r>
+            <a:r>
+              <a:rPr lang="en-US" dirty="0">
+                <a:hlinkClick r:id="rId3"/>
+              </a:rPr>
+              <a:t>https://hackage.haskell.org/package/QuickCheck </a:t>
+            </a:r>
+            <a:endParaRPr lang="en-US" dirty="0"/>
+          </a:p>
+          <a:p>
+            <a:r>
+              <a:rPr lang="en-US" dirty="0"/>
+              <a:t>[41] </a:t>
+            </a:r>
+            <a:r>
+              <a:rPr lang="en-US" dirty="0" err="1"/>
+              <a:t>QuickCheck</a:t>
+            </a:r>
+            <a:r>
+              <a:rPr lang="en-US" dirty="0"/>
+              <a:t>: Automatic Testing (online tutorial). </a:t>
+            </a:r>
+            <a:r>
+              <a:rPr lang="en-US" dirty="0">
+                <a:hlinkClick r:id="rId4"/>
+              </a:rPr>
+              <a:t>https://sulzmann.github.io/ProgrammingParadigms/lec-haskell-testing.html </a:t>
+            </a:r>
+            <a:endParaRPr lang="en-US" dirty="0"/>
+          </a:p>
+        </p:txBody>
+      </p:sp>
+    </p:spTree>
+    <p:extLst>
+      <p:ext uri="{BB962C8B-B14F-4D97-AF65-F5344CB8AC3E}">
+        <p14:creationId xmlns:p14="http://schemas.microsoft.com/office/powerpoint/2010/main" val="3798079610"/>
+      </p:ext>
+    </p:extLst>
   </p:cSld>
   <p:clrMapOvr>
     <a:masterClrMapping/>
@@ -15578,7 +21668,7 @@
               <a:t> generator de </a:t>
             </a:r>
             <a:r>
-              <a:rPr lang="en-US" sz="2000" dirty="0" err="1">
+              <a:rPr lang="en-US" sz="2000" dirty="0" err="1" smtClean="0">
                 <a:solidFill>
                   <a:srgbClr val="2F3338"/>
                 </a:solidFill>
@@ -20856,30 +26946,19 @@
   <a:extraClrSchemeLst/>
   <a:extLst>
     <a:ext uri="{05A4C25C-085E-4340-85A3-A5531E510DB2}">
-      <thm15:themeFamily xmlns:thm15="http://schemas.microsoft.com/office/thememl/2012/main" xmlns="" name="TWO.pptx" id="{80AA9D2D-EE59-4148-A11E-A51EEE828B28}" vid="{AEAFD717-D3C8-4034-8F7E-D5220B0CCEB8}"/>
+      <thm15:themeFamily xmlns="" xmlns:thm15="http://schemas.microsoft.com/office/thememl/2012/main" name="TWO.pptx" id="{80AA9D2D-EE59-4148-A11E-A51EEE828B28}" vid="{AEAFD717-D3C8-4034-8F7E-D5220B0CCEB8}"/>
     </a:ext>
   </a:extLst>
 </a:theme>
 </file>
 
 <file path=customXml/item1.xml><?xml version="1.0" encoding="utf-8"?>
-<p:properties xmlns:p="http://schemas.microsoft.com/office/2006/metadata/properties" xmlns:xsi="http://www.w3.org/2001/XMLSchema-instance" xmlns:pc="http://schemas.microsoft.com/office/infopath/2007/PartnerControls">
-  <documentManagement>
-    <_ip_UnifiedCompliancePolicyUIAction xmlns="http://schemas.microsoft.com/sharepoint/v3" xsi:nil="true"/>
-    <Image xmlns="71af3243-3dd4-4a8d-8c0d-dd76da1f02a5">
-      <Url xsi:nil="true"/>
-      <Description xsi:nil="true"/>
-    </Image>
-    <Status xmlns="71af3243-3dd4-4a8d-8c0d-dd76da1f02a5">Not started</Status>
-    <Background xmlns="71af3243-3dd4-4a8d-8c0d-dd76da1f02a5">false</Background>
-    <_ip_UnifiedCompliancePolicyProperties xmlns="http://schemas.microsoft.com/sharepoint/v3" xsi:nil="true"/>
-    <ImageTagsTaxHTField xmlns="71af3243-3dd4-4a8d-8c0d-dd76da1f02a5">
-      <Terms xmlns="http://schemas.microsoft.com/office/infopath/2007/PartnerControls"/>
-    </ImageTagsTaxHTField>
-    <TaxCatchAll xmlns="230e9df3-be65-4c73-a93b-d1236ebd677e" xsi:nil="true"/>
-    <MediaServiceKeyPoints xmlns="71af3243-3dd4-4a8d-8c0d-dd76da1f02a5" xsi:nil="true"/>
-  </documentManagement>
-</p:properties>
+<?mso-contentType ?>
+<FormTemplates xmlns="http://schemas.microsoft.com/sharepoint/v3/contenttype/forms">
+  <Display>DocumentLibraryForm</Display>
+  <Edit>DocumentLibraryForm</Edit>
+  <New>DocumentLibraryForm</New>
+</FormTemplates>
 </file>
 
 <file path=customXml/item2.xml><?xml version="1.0" encoding="utf-8"?>
@@ -21189,22 +27268,29 @@
 </file>
 
 <file path=customXml/item3.xml><?xml version="1.0" encoding="utf-8"?>
-<?mso-contentType ?>
-<FormTemplates xmlns="http://schemas.microsoft.com/sharepoint/v3/contenttype/forms">
-  <Display>DocumentLibraryForm</Display>
-  <Edit>DocumentLibraryForm</Edit>
-  <New>DocumentLibraryForm</New>
-</FormTemplates>
+<p:properties xmlns:p="http://schemas.microsoft.com/office/2006/metadata/properties" xmlns:xsi="http://www.w3.org/2001/XMLSchema-instance" xmlns:pc="http://schemas.microsoft.com/office/infopath/2007/PartnerControls">
+  <documentManagement>
+    <_ip_UnifiedCompliancePolicyUIAction xmlns="http://schemas.microsoft.com/sharepoint/v3" xsi:nil="true"/>
+    <Image xmlns="71af3243-3dd4-4a8d-8c0d-dd76da1f02a5">
+      <Url xsi:nil="true"/>
+      <Description xsi:nil="true"/>
+    </Image>
+    <Status xmlns="71af3243-3dd4-4a8d-8c0d-dd76da1f02a5">Not started</Status>
+    <Background xmlns="71af3243-3dd4-4a8d-8c0d-dd76da1f02a5">false</Background>
+    <_ip_UnifiedCompliancePolicyProperties xmlns="http://schemas.microsoft.com/sharepoint/v3" xsi:nil="true"/>
+    <ImageTagsTaxHTField xmlns="71af3243-3dd4-4a8d-8c0d-dd76da1f02a5">
+      <Terms xmlns="http://schemas.microsoft.com/office/infopath/2007/PartnerControls"/>
+    </ImageTagsTaxHTField>
+    <TaxCatchAll xmlns="230e9df3-be65-4c73-a93b-d1236ebd677e" xsi:nil="true"/>
+    <MediaServiceKeyPoints xmlns="71af3243-3dd4-4a8d-8c0d-dd76da1f02a5" xsi:nil="true"/>
+  </documentManagement>
+</p:properties>
 </file>
 
 <file path=customXml/itemProps1.xml><?xml version="1.0" encoding="utf-8"?>
-<ds:datastoreItem xmlns:ds="http://schemas.openxmlformats.org/officeDocument/2006/customXml" ds:itemID="{6F4F4D41-822D-40F2-A7AC-E4E6CB36CA7A}">
+<ds:datastoreItem xmlns:ds="http://schemas.openxmlformats.org/officeDocument/2006/customXml" ds:itemID="{19DAD249-BF80-48EF-9AFB-36A11BCDC2CE}">
   <ds:schemaRefs>
-    <ds:schemaRef ds:uri="http://schemas.microsoft.com/office/2006/metadata/properties"/>
-    <ds:schemaRef ds:uri="http://schemas.microsoft.com/office/infopath/2007/PartnerControls"/>
-    <ds:schemaRef ds:uri="http://schemas.microsoft.com/sharepoint/v3"/>
-    <ds:schemaRef ds:uri="71af3243-3dd4-4a8d-8c0d-dd76da1f02a5"/>
-    <ds:schemaRef ds:uri="230e9df3-be65-4c73-a93b-d1236ebd677e"/>
+    <ds:schemaRef ds:uri="http://schemas.microsoft.com/sharepoint/v3/contenttype/forms"/>
   </ds:schemaRefs>
 </ds:datastoreItem>
 </file>
@@ -21231,9 +27317,13 @@
 </file>
 
 <file path=customXml/itemProps3.xml><?xml version="1.0" encoding="utf-8"?>
-<ds:datastoreItem xmlns:ds="http://schemas.openxmlformats.org/officeDocument/2006/customXml" ds:itemID="{19DAD249-BF80-48EF-9AFB-36A11BCDC2CE}">
+<ds:datastoreItem xmlns:ds="http://schemas.openxmlformats.org/officeDocument/2006/customXml" ds:itemID="{6F4F4D41-822D-40F2-A7AC-E4E6CB36CA7A}">
   <ds:schemaRefs>
-    <ds:schemaRef ds:uri="http://schemas.microsoft.com/sharepoint/v3/contenttype/forms"/>
+    <ds:schemaRef ds:uri="http://schemas.microsoft.com/office/2006/metadata/properties"/>
+    <ds:schemaRef ds:uri="http://schemas.microsoft.com/office/infopath/2007/PartnerControls"/>
+    <ds:schemaRef ds:uri="http://schemas.microsoft.com/sharepoint/v3"/>
+    <ds:schemaRef ds:uri="71af3243-3dd4-4a8d-8c0d-dd76da1f02a5"/>
+    <ds:schemaRef ds:uri="230e9df3-be65-4c73-a93b-d1236ebd677e"/>
   </ds:schemaRefs>
 </ds:datastoreItem>
 </file>
--- a/Testarea property-based folosind QuickCheck.pptx
+++ b/Testarea property-based folosind QuickCheck.pptx
@@ -132,7 +132,7 @@
   </p:defaultTextStyle>
   <p:extLst>
     <p:ext uri="{EFAFB233-063F-42B5-8137-9DF3F51BA10A}">
-      <p15:sldGuideLst xmlns="" xmlns:p15="http://schemas.microsoft.com/office/powerpoint/2012/main"/>
+      <p15:sldGuideLst xmlns:p15="http://schemas.microsoft.com/office/powerpoint/2012/main" xmlns=""/>
     </p:ext>
   </p:extLst>
 </p:presentation>
@@ -160,7 +160,7 @@
           <p:cNvPr id="10" name="Rectangle 9">
             <a:extLst>
               <a:ext uri="{FF2B5EF4-FFF2-40B4-BE49-F238E27FC236}">
-                <a16:creationId xmlns="" xmlns:a16="http://schemas.microsoft.com/office/drawing/2014/main" id="{39E3965E-AC41-4711-9D10-E25ABB132D86}"/>
+                <a16:creationId xmlns:a16="http://schemas.microsoft.com/office/drawing/2014/main" xmlns="" id="{39E3965E-AC41-4711-9D10-E25ABB132D86}"/>
               </a:ext>
             </a:extLst>
           </p:cNvPr>
@@ -320,7 +320,7 @@
           <p:cNvPr id="9" name="Straight Connector 8">
             <a:extLst>
               <a:ext uri="{FF2B5EF4-FFF2-40B4-BE49-F238E27FC236}">
-                <a16:creationId xmlns="" xmlns:a16="http://schemas.microsoft.com/office/drawing/2014/main" id="{1F5DC8C3-BA5F-4EED-BB9A-A14272BD82A1}"/>
+                <a16:creationId xmlns:a16="http://schemas.microsoft.com/office/drawing/2014/main" xmlns="" id="{1F5DC8C3-BA5F-4EED-BB9A-A14272BD82A1}"/>
               </a:ext>
             </a:extLst>
           </p:cNvPr>
@@ -364,7 +364,7 @@
           <p:cNvPr id="4" name="Date Placeholder 3">
             <a:extLst>
               <a:ext uri="{FF2B5EF4-FFF2-40B4-BE49-F238E27FC236}">
-                <a16:creationId xmlns="" xmlns:a16="http://schemas.microsoft.com/office/drawing/2014/main" id="{9925CCF1-92C0-4AF3-BFAF-4921631915AB}"/>
+                <a16:creationId xmlns:a16="http://schemas.microsoft.com/office/drawing/2014/main" xmlns="" id="{9925CCF1-92C0-4AF3-BFAF-4921631915AB}"/>
               </a:ext>
             </a:extLst>
           </p:cNvPr>
@@ -393,7 +393,7 @@
           <p:cNvPr id="5" name="Footer Placeholder 4">
             <a:extLst>
               <a:ext uri="{FF2B5EF4-FFF2-40B4-BE49-F238E27FC236}">
-                <a16:creationId xmlns="" xmlns:a16="http://schemas.microsoft.com/office/drawing/2014/main" id="{051A78A9-3DFF-4937-A9F2-5D8CF495F367}"/>
+                <a16:creationId xmlns:a16="http://schemas.microsoft.com/office/drawing/2014/main" xmlns="" id="{051A78A9-3DFF-4937-A9F2-5D8CF495F367}"/>
               </a:ext>
             </a:extLst>
           </p:cNvPr>
@@ -418,7 +418,7 @@
           <p:cNvPr id="6" name="Slide Number Placeholder 5">
             <a:extLst>
               <a:ext uri="{FF2B5EF4-FFF2-40B4-BE49-F238E27FC236}">
-                <a16:creationId xmlns="" xmlns:a16="http://schemas.microsoft.com/office/drawing/2014/main" id="{5FAEB271-5CC0-4759-BC6E-8BE53AB227C0}"/>
+                <a16:creationId xmlns:a16="http://schemas.microsoft.com/office/drawing/2014/main" xmlns="" id="{5FAEB271-5CC0-4759-BC6E-8BE53AB227C0}"/>
               </a:ext>
             </a:extLst>
           </p:cNvPr>
@@ -552,7 +552,7 @@
           <p:cNvPr id="7" name="Date Placeholder 6">
             <a:extLst>
               <a:ext uri="{FF2B5EF4-FFF2-40B4-BE49-F238E27FC236}">
-                <a16:creationId xmlns="" xmlns:a16="http://schemas.microsoft.com/office/drawing/2014/main" id="{7D5506EE-1026-4F35-9ACC-BD05BE0F9B36}"/>
+                <a16:creationId xmlns:a16="http://schemas.microsoft.com/office/drawing/2014/main" xmlns="" id="{7D5506EE-1026-4F35-9ACC-BD05BE0F9B36}"/>
               </a:ext>
             </a:extLst>
           </p:cNvPr>
@@ -581,7 +581,7 @@
           <p:cNvPr id="8" name="Footer Placeholder 7">
             <a:extLst>
               <a:ext uri="{FF2B5EF4-FFF2-40B4-BE49-F238E27FC236}">
-                <a16:creationId xmlns="" xmlns:a16="http://schemas.microsoft.com/office/drawing/2014/main" id="{B7696E5F-8D95-4450-AE52-5438E6EDE2BF}"/>
+                <a16:creationId xmlns:a16="http://schemas.microsoft.com/office/drawing/2014/main" xmlns="" id="{B7696E5F-8D95-4450-AE52-5438E6EDE2BF}"/>
               </a:ext>
             </a:extLst>
           </p:cNvPr>
@@ -606,7 +606,7 @@
           <p:cNvPr id="9" name="Slide Number Placeholder 8">
             <a:extLst>
               <a:ext uri="{FF2B5EF4-FFF2-40B4-BE49-F238E27FC236}">
-                <a16:creationId xmlns="" xmlns:a16="http://schemas.microsoft.com/office/drawing/2014/main" id="{999B2253-74CC-409E-BEB0-F8EFCFCB5629}"/>
+                <a16:creationId xmlns:a16="http://schemas.microsoft.com/office/drawing/2014/main" xmlns="" id="{999B2253-74CC-409E-BEB0-F8EFCFCB5629}"/>
               </a:ext>
             </a:extLst>
           </p:cNvPr>
@@ -665,7 +665,7 @@
           <p:cNvPr id="9" name="Rectangle 8">
             <a:extLst>
               <a:ext uri="{FF2B5EF4-FFF2-40B4-BE49-F238E27FC236}">
-                <a16:creationId xmlns="" xmlns:a16="http://schemas.microsoft.com/office/drawing/2014/main" id="{E1B68A5B-D9FA-424B-A4EB-30E7223836B3}"/>
+                <a16:creationId xmlns:a16="http://schemas.microsoft.com/office/drawing/2014/main" xmlns="" id="{E1B68A5B-D9FA-424B-A4EB-30E7223836B3}"/>
               </a:ext>
             </a:extLst>
           </p:cNvPr>
@@ -794,7 +794,7 @@
           <p:cNvPr id="7" name="Date Placeholder 6">
             <a:extLst>
               <a:ext uri="{FF2B5EF4-FFF2-40B4-BE49-F238E27FC236}">
-                <a16:creationId xmlns="" xmlns:a16="http://schemas.microsoft.com/office/drawing/2014/main" id="{AF33D6B0-F070-45C4-A472-19F432BE3932}"/>
+                <a16:creationId xmlns:a16="http://schemas.microsoft.com/office/drawing/2014/main" xmlns="" id="{AF33D6B0-F070-45C4-A472-19F432BE3932}"/>
               </a:ext>
             </a:extLst>
           </p:cNvPr>
@@ -823,7 +823,7 @@
           <p:cNvPr id="8" name="Footer Placeholder 7">
             <a:extLst>
               <a:ext uri="{FF2B5EF4-FFF2-40B4-BE49-F238E27FC236}">
-                <a16:creationId xmlns="" xmlns:a16="http://schemas.microsoft.com/office/drawing/2014/main" id="{9975399F-DAB2-410D-967F-ED17E6F796E7}"/>
+                <a16:creationId xmlns:a16="http://schemas.microsoft.com/office/drawing/2014/main" xmlns="" id="{9975399F-DAB2-410D-967F-ED17E6F796E7}"/>
               </a:ext>
             </a:extLst>
           </p:cNvPr>
@@ -848,7 +848,7 @@
           <p:cNvPr id="10" name="Slide Number Placeholder 9">
             <a:extLst>
               <a:ext uri="{FF2B5EF4-FFF2-40B4-BE49-F238E27FC236}">
-                <a16:creationId xmlns="" xmlns:a16="http://schemas.microsoft.com/office/drawing/2014/main" id="{F762A46F-6BE5-4D12-9412-5CA7672EA8EC}"/>
+                <a16:creationId xmlns:a16="http://schemas.microsoft.com/office/drawing/2014/main" xmlns="" id="{F762A46F-6BE5-4D12-9412-5CA7672EA8EC}"/>
               </a:ext>
             </a:extLst>
           </p:cNvPr>
@@ -982,7 +982,7 @@
           <p:cNvPr id="7" name="Date Placeholder 6">
             <a:extLst>
               <a:ext uri="{FF2B5EF4-FFF2-40B4-BE49-F238E27FC236}">
-                <a16:creationId xmlns="" xmlns:a16="http://schemas.microsoft.com/office/drawing/2014/main" id="{354D8B55-9EA8-4B81-8E84-9B93B0A27559}"/>
+                <a16:creationId xmlns:a16="http://schemas.microsoft.com/office/drawing/2014/main" xmlns="" id="{354D8B55-9EA8-4B81-8E84-9B93B0A27559}"/>
               </a:ext>
             </a:extLst>
           </p:cNvPr>
@@ -1011,7 +1011,7 @@
           <p:cNvPr id="8" name="Footer Placeholder 7">
             <a:extLst>
               <a:ext uri="{FF2B5EF4-FFF2-40B4-BE49-F238E27FC236}">
-                <a16:creationId xmlns="" xmlns:a16="http://schemas.microsoft.com/office/drawing/2014/main" id="{062CA021-2578-47CB-822C-BDDFF7223B28}"/>
+                <a16:creationId xmlns:a16="http://schemas.microsoft.com/office/drawing/2014/main" xmlns="" id="{062CA021-2578-47CB-822C-BDDFF7223B28}"/>
               </a:ext>
             </a:extLst>
           </p:cNvPr>
@@ -1036,7 +1036,7 @@
           <p:cNvPr id="9" name="Slide Number Placeholder 8">
             <a:extLst>
               <a:ext uri="{FF2B5EF4-FFF2-40B4-BE49-F238E27FC236}">
-                <a16:creationId xmlns="" xmlns:a16="http://schemas.microsoft.com/office/drawing/2014/main" id="{C4AAB51D-4141-4682-9375-DAFD5FB9DD10}"/>
+                <a16:creationId xmlns:a16="http://schemas.microsoft.com/office/drawing/2014/main" xmlns="" id="{C4AAB51D-4141-4682-9375-DAFD5FB9DD10}"/>
               </a:ext>
             </a:extLst>
           </p:cNvPr>
@@ -1103,7 +1103,7 @@
           <p:cNvPr id="10" name="Rectangle 9">
             <a:extLst>
               <a:ext uri="{FF2B5EF4-FFF2-40B4-BE49-F238E27FC236}">
-                <a16:creationId xmlns="" xmlns:a16="http://schemas.microsoft.com/office/drawing/2014/main" id="{A585C21A-8B93-4657-B5DF-7EAEAD3BE127}"/>
+                <a16:creationId xmlns:a16="http://schemas.microsoft.com/office/drawing/2014/main" xmlns="" id="{A585C21A-8B93-4657-B5DF-7EAEAD3BE127}"/>
               </a:ext>
             </a:extLst>
           </p:cNvPr>
@@ -1311,7 +1311,7 @@
           <p:cNvPr id="9" name="Straight Connector 8">
             <a:extLst>
               <a:ext uri="{FF2B5EF4-FFF2-40B4-BE49-F238E27FC236}">
-                <a16:creationId xmlns="" xmlns:a16="http://schemas.microsoft.com/office/drawing/2014/main" id="{459DE2C1-4C52-40A3-8959-27B2C1BEBFF6}"/>
+                <a16:creationId xmlns:a16="http://schemas.microsoft.com/office/drawing/2014/main" xmlns="" id="{459DE2C1-4C52-40A3-8959-27B2C1BEBFF6}"/>
               </a:ext>
             </a:extLst>
           </p:cNvPr>
@@ -1355,7 +1355,7 @@
           <p:cNvPr id="7" name="Date Placeholder 6">
             <a:extLst>
               <a:ext uri="{FF2B5EF4-FFF2-40B4-BE49-F238E27FC236}">
-                <a16:creationId xmlns="" xmlns:a16="http://schemas.microsoft.com/office/drawing/2014/main" id="{AAF2E137-EC28-48F8-9198-1F02539029B6}"/>
+                <a16:creationId xmlns:a16="http://schemas.microsoft.com/office/drawing/2014/main" xmlns="" id="{AAF2E137-EC28-48F8-9198-1F02539029B6}"/>
               </a:ext>
             </a:extLst>
           </p:cNvPr>
@@ -1384,7 +1384,7 @@
           <p:cNvPr id="8" name="Footer Placeholder 7">
             <a:extLst>
               <a:ext uri="{FF2B5EF4-FFF2-40B4-BE49-F238E27FC236}">
-                <a16:creationId xmlns="" xmlns:a16="http://schemas.microsoft.com/office/drawing/2014/main" id="{189422CD-6F62-4DD6-89EF-07A60B42D219}"/>
+                <a16:creationId xmlns:a16="http://schemas.microsoft.com/office/drawing/2014/main" xmlns="" id="{189422CD-6F62-4DD6-89EF-07A60B42D219}"/>
               </a:ext>
             </a:extLst>
           </p:cNvPr>
@@ -1409,7 +1409,7 @@
           <p:cNvPr id="11" name="Slide Number Placeholder 10">
             <a:extLst>
               <a:ext uri="{FF2B5EF4-FFF2-40B4-BE49-F238E27FC236}">
-                <a16:creationId xmlns="" xmlns:a16="http://schemas.microsoft.com/office/drawing/2014/main" id="{69C6AFF8-42B4-4D05-969B-9F5FB3355555}"/>
+                <a16:creationId xmlns:a16="http://schemas.microsoft.com/office/drawing/2014/main" xmlns="" id="{69C6AFF8-42B4-4D05-969B-9F5FB3355555}"/>
               </a:ext>
             </a:extLst>
           </p:cNvPr>
@@ -1610,7 +1610,7 @@
           <p:cNvPr id="2" name="Date Placeholder 1">
             <a:extLst>
               <a:ext uri="{FF2B5EF4-FFF2-40B4-BE49-F238E27FC236}">
-                <a16:creationId xmlns="" xmlns:a16="http://schemas.microsoft.com/office/drawing/2014/main" id="{5782D47D-B0DC-4C40-BCC6-BBBA32584A38}"/>
+                <a16:creationId xmlns:a16="http://schemas.microsoft.com/office/drawing/2014/main" xmlns="" id="{5782D47D-B0DC-4C40-BCC6-BBBA32584A38}"/>
               </a:ext>
             </a:extLst>
           </p:cNvPr>
@@ -1639,7 +1639,7 @@
           <p:cNvPr id="9" name="Footer Placeholder 8">
             <a:extLst>
               <a:ext uri="{FF2B5EF4-FFF2-40B4-BE49-F238E27FC236}">
-                <a16:creationId xmlns="" xmlns:a16="http://schemas.microsoft.com/office/drawing/2014/main" id="{4690D34E-7EBD-44B2-83CA-4C126A18D7EF}"/>
+                <a16:creationId xmlns:a16="http://schemas.microsoft.com/office/drawing/2014/main" xmlns="" id="{4690D34E-7EBD-44B2-83CA-4C126A18D7EF}"/>
               </a:ext>
             </a:extLst>
           </p:cNvPr>
@@ -1664,7 +1664,7 @@
           <p:cNvPr id="10" name="Slide Number Placeholder 9">
             <a:extLst>
               <a:ext uri="{FF2B5EF4-FFF2-40B4-BE49-F238E27FC236}">
-                <a16:creationId xmlns="" xmlns:a16="http://schemas.microsoft.com/office/drawing/2014/main" id="{2AC511A1-9BBD-42DE-92FB-2AF44F8E97A9}"/>
+                <a16:creationId xmlns:a16="http://schemas.microsoft.com/office/drawing/2014/main" xmlns="" id="{2AC511A1-9BBD-42DE-92FB-2AF44F8E97A9}"/>
               </a:ext>
             </a:extLst>
           </p:cNvPr>
@@ -2007,7 +2007,7 @@
           <p:cNvPr id="2" name="Date Placeholder 1">
             <a:extLst>
               <a:ext uri="{FF2B5EF4-FFF2-40B4-BE49-F238E27FC236}">
-                <a16:creationId xmlns="" xmlns:a16="http://schemas.microsoft.com/office/drawing/2014/main" id="{8AF8A515-AA94-45D1-9223-5C2272618D85}"/>
+                <a16:creationId xmlns:a16="http://schemas.microsoft.com/office/drawing/2014/main" xmlns="" id="{8AF8A515-AA94-45D1-9223-5C2272618D85}"/>
               </a:ext>
             </a:extLst>
           </p:cNvPr>
@@ -2036,7 +2036,7 @@
           <p:cNvPr id="11" name="Footer Placeholder 10">
             <a:extLst>
               <a:ext uri="{FF2B5EF4-FFF2-40B4-BE49-F238E27FC236}">
-                <a16:creationId xmlns="" xmlns:a16="http://schemas.microsoft.com/office/drawing/2014/main" id="{D052F5BC-98E0-4D60-AD67-9547738B7DD4}"/>
+                <a16:creationId xmlns:a16="http://schemas.microsoft.com/office/drawing/2014/main" xmlns="" id="{D052F5BC-98E0-4D60-AD67-9547738B7DD4}"/>
               </a:ext>
             </a:extLst>
           </p:cNvPr>
@@ -2061,7 +2061,7 @@
           <p:cNvPr id="12" name="Slide Number Placeholder 11">
             <a:extLst>
               <a:ext uri="{FF2B5EF4-FFF2-40B4-BE49-F238E27FC236}">
-                <a16:creationId xmlns="" xmlns:a16="http://schemas.microsoft.com/office/drawing/2014/main" id="{A38552DC-952E-41EA-AAAF-C2187523C0B0}"/>
+                <a16:creationId xmlns:a16="http://schemas.microsoft.com/office/drawing/2014/main" xmlns="" id="{A38552DC-952E-41EA-AAAF-C2187523C0B0}"/>
               </a:ext>
             </a:extLst>
           </p:cNvPr>
@@ -2143,7 +2143,7 @@
           <p:cNvPr id="6" name="Date Placeholder 5">
             <a:extLst>
               <a:ext uri="{FF2B5EF4-FFF2-40B4-BE49-F238E27FC236}">
-                <a16:creationId xmlns="" xmlns:a16="http://schemas.microsoft.com/office/drawing/2014/main" id="{7392073F-158F-44A3-8913-917AFFC1BC20}"/>
+                <a16:creationId xmlns:a16="http://schemas.microsoft.com/office/drawing/2014/main" xmlns="" id="{7392073F-158F-44A3-8913-917AFFC1BC20}"/>
               </a:ext>
             </a:extLst>
           </p:cNvPr>
@@ -2172,7 +2172,7 @@
           <p:cNvPr id="7" name="Footer Placeholder 6">
             <a:extLst>
               <a:ext uri="{FF2B5EF4-FFF2-40B4-BE49-F238E27FC236}">
-                <a16:creationId xmlns="" xmlns:a16="http://schemas.microsoft.com/office/drawing/2014/main" id="{EED72207-24CA-42B7-A975-2F8E41CBA904}"/>
+                <a16:creationId xmlns:a16="http://schemas.microsoft.com/office/drawing/2014/main" xmlns="" id="{EED72207-24CA-42B7-A975-2F8E41CBA904}"/>
               </a:ext>
             </a:extLst>
           </p:cNvPr>
@@ -2197,7 +2197,7 @@
           <p:cNvPr id="8" name="Slide Number Placeholder 7">
             <a:extLst>
               <a:ext uri="{FF2B5EF4-FFF2-40B4-BE49-F238E27FC236}">
-                <a16:creationId xmlns="" xmlns:a16="http://schemas.microsoft.com/office/drawing/2014/main" id="{D01080F2-251A-4B88-9A62-16F46D724F83}"/>
+                <a16:creationId xmlns:a16="http://schemas.microsoft.com/office/drawing/2014/main" xmlns="" id="{D01080F2-251A-4B88-9A62-16F46D724F83}"/>
               </a:ext>
             </a:extLst>
           </p:cNvPr>
@@ -2256,7 +2256,7 @@
           <p:cNvPr id="10" name="Rectangle 9">
             <a:extLst>
               <a:ext uri="{FF2B5EF4-FFF2-40B4-BE49-F238E27FC236}">
-                <a16:creationId xmlns="" xmlns:a16="http://schemas.microsoft.com/office/drawing/2014/main" id="{A8E9C91B-7EAD-4562-AB0E-DFB9663AECE3}"/>
+                <a16:creationId xmlns:a16="http://schemas.microsoft.com/office/drawing/2014/main" xmlns="" id="{A8E9C91B-7EAD-4562-AB0E-DFB9663AECE3}"/>
               </a:ext>
             </a:extLst>
           </p:cNvPr>
@@ -2300,7 +2300,7 @@
           <p:cNvPr id="2" name="Date Placeholder 1">
             <a:extLst>
               <a:ext uri="{FF2B5EF4-FFF2-40B4-BE49-F238E27FC236}">
-                <a16:creationId xmlns="" xmlns:a16="http://schemas.microsoft.com/office/drawing/2014/main" id="{94E9223F-721F-47BF-9FD5-0F8D12FF0DE1}"/>
+                <a16:creationId xmlns:a16="http://schemas.microsoft.com/office/drawing/2014/main" xmlns="" id="{94E9223F-721F-47BF-9FD5-0F8D12FF0DE1}"/>
               </a:ext>
             </a:extLst>
           </p:cNvPr>
@@ -2329,7 +2329,7 @@
           <p:cNvPr id="3" name="Footer Placeholder 2">
             <a:extLst>
               <a:ext uri="{FF2B5EF4-FFF2-40B4-BE49-F238E27FC236}">
-                <a16:creationId xmlns="" xmlns:a16="http://schemas.microsoft.com/office/drawing/2014/main" id="{05915714-6BBA-4593-8591-4E26F7D58D9F}"/>
+                <a16:creationId xmlns:a16="http://schemas.microsoft.com/office/drawing/2014/main" xmlns="" id="{05915714-6BBA-4593-8591-4E26F7D58D9F}"/>
               </a:ext>
             </a:extLst>
           </p:cNvPr>
@@ -2354,7 +2354,7 @@
           <p:cNvPr id="4" name="Slide Number Placeholder 3">
             <a:extLst>
               <a:ext uri="{FF2B5EF4-FFF2-40B4-BE49-F238E27FC236}">
-                <a16:creationId xmlns="" xmlns:a16="http://schemas.microsoft.com/office/drawing/2014/main" id="{BE06F857-D2E1-44DD-ABDD-EBB739645B67}"/>
+                <a16:creationId xmlns:a16="http://schemas.microsoft.com/office/drawing/2014/main" xmlns="" id="{BE06F857-D2E1-44DD-ABDD-EBB739645B67}"/>
               </a:ext>
             </a:extLst>
           </p:cNvPr>
@@ -2413,7 +2413,7 @@
           <p:cNvPr id="8" name="Rectangle 7">
             <a:extLst>
               <a:ext uri="{FF2B5EF4-FFF2-40B4-BE49-F238E27FC236}">
-                <a16:creationId xmlns="" xmlns:a16="http://schemas.microsoft.com/office/drawing/2014/main" id="{16D90D66-BCB9-4229-A829-628874352AC0}"/>
+                <a16:creationId xmlns:a16="http://schemas.microsoft.com/office/drawing/2014/main" xmlns="" id="{16D90D66-BCB9-4229-A829-628874352AC0}"/>
               </a:ext>
             </a:extLst>
           </p:cNvPr>
@@ -2752,7 +2752,7 @@
           <p:cNvPr id="8" name="Rectangle 7">
             <a:extLst>
               <a:ext uri="{FF2B5EF4-FFF2-40B4-BE49-F238E27FC236}">
-                <a16:creationId xmlns="" xmlns:a16="http://schemas.microsoft.com/office/drawing/2014/main" id="{DA134939-39C0-4522-A125-A13DFDA66490}"/>
+                <a16:creationId xmlns:a16="http://schemas.microsoft.com/office/drawing/2014/main" xmlns="" id="{DA134939-39C0-4522-A125-A13DFDA66490}"/>
               </a:ext>
             </a:extLst>
           </p:cNvPr>
@@ -3091,7 +3091,7 @@
           <p:cNvPr id="7" name="Rectangle 6">
             <a:extLst>
               <a:ext uri="{FF2B5EF4-FFF2-40B4-BE49-F238E27FC236}">
-                <a16:creationId xmlns="" xmlns:a16="http://schemas.microsoft.com/office/drawing/2014/main" id="{416A0E3C-60E6-4F39-BC55-5F7C224E1F7C}"/>
+                <a16:creationId xmlns:a16="http://schemas.microsoft.com/office/drawing/2014/main" xmlns="" id="{416A0E3C-60E6-4F39-BC55-5F7C224E1F7C}"/>
               </a:ext>
             </a:extLst>
           </p:cNvPr>
@@ -3343,7 +3343,7 @@
           <p:cNvPr id="10" name="Straight Connector 9">
             <a:extLst>
               <a:ext uri="{FF2B5EF4-FFF2-40B4-BE49-F238E27FC236}">
-                <a16:creationId xmlns="" xmlns:a16="http://schemas.microsoft.com/office/drawing/2014/main" id="{C5025DAC-8B93-4160-B017-3A274A5828C0}"/>
+                <a16:creationId xmlns:a16="http://schemas.microsoft.com/office/drawing/2014/main" xmlns="" id="{C5025DAC-8B93-4160-B017-3A274A5828C0}"/>
               </a:ext>
             </a:extLst>
           </p:cNvPr>
@@ -3793,29 +3793,28 @@
         </p:nvSpPr>
         <p:spPr>
           <a:xfrm>
-            <a:off x="1075266" y="1142402"/>
+            <a:off x="1168399" y="1819735"/>
             <a:ext cx="10058400" cy="2423401"/>
           </a:xfrm>
         </p:spPr>
         <p:txBody>
-          <a:bodyPr/>
+          <a:bodyPr>
+            <a:normAutofit/>
+          </a:bodyPr>
           <a:lstStyle/>
           <a:p>
             <a:pPr algn="ctr"/>
-            <a:r>
-              <a:rPr lang="ro-RO" sz="4400" dirty="0" smtClean="0"/>
-              <a:t>Tema 20</a:t>
-            </a:r>
-            <a:br>
-              <a:rPr lang="ro-RO" sz="4400" dirty="0" smtClean="0"/>
-            </a:br>
             <a:r>
               <a:rPr sz="4400" dirty="0" err="1" smtClean="0"/>
               <a:t>Testarea</a:t>
             </a:r>
             <a:r>
               <a:rPr sz="4400" dirty="0" smtClean="0"/>
-              <a:t> property-based</a:t>
+              <a:t> </a:t>
+            </a:r>
+            <a:r>
+              <a:rPr sz="4400" dirty="0" smtClean="0"/>
+              <a:t>property-based</a:t>
             </a:r>
             <a:r>
               <a:rPr lang="ro-RO" sz="4400" dirty="0" smtClean="0"/>
@@ -3834,10 +3833,92 @@
               <a:t> </a:t>
             </a:r>
             <a:r>
-              <a:rPr sz="4400" dirty="0" err="1"/>
+              <a:rPr sz="4400" dirty="0" err="1" smtClean="0"/>
               <a:t>QuickCheck</a:t>
             </a:r>
-            <a:endParaRPr sz="4400" dirty="0"/>
+            <a:r>
+              <a:rPr lang="ro-RO" sz="4400" dirty="0"/>
+              <a:t/>
+            </a:r>
+            <a:br>
+              <a:rPr lang="ro-RO" sz="4400" dirty="0"/>
+            </a:br>
+            <a:r>
+              <a:rPr lang="ro-RO" sz="2400" dirty="0" smtClean="0"/>
+              <a:t>- Tema 20 –</a:t>
+            </a:r>
+            <a:br>
+              <a:rPr lang="ro-RO" sz="2400" dirty="0" smtClean="0"/>
+            </a:br>
+            <a:r>
+              <a:rPr lang="en-US" sz="2400" dirty="0"/>
+              <a:t>Mini-</a:t>
+            </a:r>
+            <a:r>
+              <a:rPr lang="en-US" sz="2400" dirty="0" err="1"/>
+              <a:t>limbaj</a:t>
+            </a:r>
+            <a:r>
+              <a:rPr lang="en-US" sz="2400" dirty="0"/>
+              <a:t> </a:t>
+            </a:r>
+            <a:r>
+              <a:rPr lang="en-US" sz="2400" dirty="0" err="1"/>
+              <a:t>aritmetic</a:t>
+            </a:r>
+            <a:r>
+              <a:rPr lang="en-US" sz="2400" dirty="0"/>
+              <a:t> </a:t>
+            </a:r>
+            <a:r>
+              <a:rPr lang="en-US" sz="2400" dirty="0" err="1"/>
+              <a:t>în</a:t>
+            </a:r>
+            <a:r>
+              <a:rPr lang="en-US" sz="2400" dirty="0"/>
+              <a:t> Haskell </a:t>
+            </a:r>
+            <a:r>
+              <a:rPr lang="en-US" sz="2400" dirty="0" err="1"/>
+              <a:t>testat</a:t>
+            </a:r>
+            <a:r>
+              <a:rPr lang="en-US" sz="2400" dirty="0"/>
+              <a:t> cu </a:t>
+            </a:r>
+            <a:r>
+              <a:rPr lang="en-US" sz="2400" dirty="0" err="1"/>
+              <a:t>QuickCheck</a:t>
+            </a:r>
+            <a:r>
+              <a:rPr lang="en-US" sz="2400" dirty="0"/>
+              <a:t>: 19 </a:t>
+            </a:r>
+            <a:r>
+              <a:rPr lang="en-US" sz="2400" dirty="0" err="1"/>
+              <a:t>proprietăți</a:t>
+            </a:r>
+            <a:r>
+              <a:rPr lang="en-US" sz="2400" dirty="0"/>
+              <a:t> </a:t>
+            </a:r>
+            <a:r>
+              <a:rPr lang="en-US" sz="2400" dirty="0" err="1"/>
+              <a:t>formale</a:t>
+            </a:r>
+            <a:r>
+              <a:rPr lang="en-US" sz="2400" dirty="0"/>
+              <a:t>, </a:t>
+            </a:r>
+            <a:r>
+              <a:rPr lang="en-US" sz="2400" dirty="0" err="1"/>
+              <a:t>generatoare</a:t>
+            </a:r>
+            <a:r>
+              <a:rPr lang="en-US" sz="2400" dirty="0"/>
+              <a:t> custom, shrinking automat</a:t>
+            </a:r>
+            <a:endParaRPr sz="2400" dirty="0"/>
           </a:p>
         </p:txBody>
       </p:sp>
@@ -3907,35 +3988,7 @@
           <a:p>
             <a:pPr algn="ctr"/>
             <a:r>
-              <a:rPr lang="ro-RO" sz="1400" spc="-50" dirty="0" smtClean="0">
-                <a:solidFill>
-                  <a:schemeClr val="tx1">
-                    <a:lumMod val="85000"/>
-                    <a:lumOff val="15000"/>
-                  </a:schemeClr>
-                </a:solidFill>
-                <a:latin typeface="+mj-lt"/>
-                <a:ea typeface="+mj-ea"/>
-                <a:cs typeface="+mj-cs"/>
-              </a:rPr>
-              <a:t>Anul universitar 2025-2026</a:t>
-            </a:r>
-            <a:endParaRPr sz="1400" spc="-50" dirty="0">
-              <a:solidFill>
-                <a:schemeClr val="tx1">
-                  <a:lumMod val="85000"/>
-                  <a:lumOff val="15000"/>
-                </a:schemeClr>
-              </a:solidFill>
-              <a:latin typeface="+mj-lt"/>
-              <a:ea typeface="+mj-ea"/>
-              <a:cs typeface="+mj-cs"/>
-            </a:endParaRPr>
-          </a:p>
-          <a:p>
-            <a:pPr algn="ctr"/>
-            <a:r>
-              <a:rPr sz="1400" spc="-50" dirty="0" err="1">
+              <a:rPr sz="1400" spc="-50" dirty="0" err="1" smtClean="0">
                 <a:solidFill>
                   <a:schemeClr val="tx1">
                     <a:lumMod val="85000"/>
@@ -4140,8 +4193,8 @@
         </p:nvSpPr>
         <p:spPr>
           <a:xfrm>
-            <a:off x="4580466" y="312229"/>
-            <a:ext cx="3313441" cy="847704"/>
+            <a:off x="4495799" y="168296"/>
+            <a:ext cx="3403601" cy="1000104"/>
           </a:xfrm>
           <a:prstGeom prst="rect">
             <a:avLst/>
@@ -4417,8 +4470,42 @@
                 <a:ea typeface="+mj-ea"/>
                 <a:cs typeface="+mj-cs"/>
               </a:rPr>
-              <a:t>Facultatea de matematică și informatică</a:t>
-            </a:r>
+              <a:t>Facultatea de matematică și </a:t>
+            </a:r>
+            <a:r>
+              <a:rPr lang="ro-RO" sz="1050" spc="-50" dirty="0" smtClean="0">
+                <a:solidFill>
+                  <a:schemeClr val="tx1">
+                    <a:lumMod val="85000"/>
+                    <a:lumOff val="15000"/>
+                  </a:schemeClr>
+                </a:solidFill>
+                <a:latin typeface="+mj-lt"/>
+                <a:ea typeface="+mj-ea"/>
+                <a:cs typeface="+mj-cs"/>
+              </a:rPr>
+              <a:t>informatică</a:t>
+            </a:r>
+          </a:p>
+          <a:p>
+            <a:pPr algn="ctr"/>
+            <a:r>
+              <a:rPr lang="vi-VN" sz="1050" spc="-50" dirty="0">
+                <a:solidFill>
+                  <a:schemeClr val="tx1">
+                    <a:lumMod val="85000"/>
+                    <a:lumOff val="15000"/>
+                  </a:schemeClr>
+                </a:solidFill>
+                <a:latin typeface="+mj-lt"/>
+                <a:ea typeface="+mj-ea"/>
+                <a:cs typeface="+mj-cs"/>
+              </a:rPr>
+              <a:t>Anul universitar 2025-2026</a:t>
+            </a:r>
+          </a:p>
+          <a:p>
+            <a:pPr algn="ctr"/>
             <a:endParaRPr lang="vi-VN" sz="1050" spc="-50" dirty="0">
               <a:solidFill>
                 <a:schemeClr val="tx1">
@@ -8343,7 +8430,19 @@
             </a:r>
             <a:r>
               <a:rPr sz="3400" dirty="0"/>
-              <a:t> 16 </a:t>
+              <a:t> </a:t>
+            </a:r>
+            <a:r>
+              <a:rPr sz="3400" dirty="0" smtClean="0"/>
+              <a:t>1</a:t>
+            </a:r>
+            <a:r>
+              <a:rPr lang="ro-RO" sz="3400" dirty="0" smtClean="0"/>
+              <a:t>9</a:t>
+            </a:r>
+            <a:r>
+              <a:rPr sz="3400" dirty="0" smtClean="0"/>
+              <a:t> </a:t>
             </a:r>
             <a:r>
               <a:rPr sz="3400" dirty="0" err="1" smtClean="0"/>
@@ -8381,7 +8480,7 @@
           <p:cNvPr id="6" name="Content Placeholder 5">
             <a:extLst>
               <a:ext uri="{FF2B5EF4-FFF2-40B4-BE49-F238E27FC236}">
-                <a16:creationId xmlns="" xmlns:a16="http://schemas.microsoft.com/office/drawing/2014/main" id="{79473285-A0EB-EEFF-685E-F4C3C4112120}"/>
+                <a16:creationId xmlns:a16="http://schemas.microsoft.com/office/drawing/2014/main" xmlns="" id="{79473285-A0EB-EEFF-685E-F4C3C4112120}"/>
               </a:ext>
             </a:extLst>
           </p:cNvPr>
@@ -8842,7 +8941,7 @@
           <p:cNvPr id="7" name="Content Placeholder 6">
             <a:extLst>
               <a:ext uri="{FF2B5EF4-FFF2-40B4-BE49-F238E27FC236}">
-                <a16:creationId xmlns="" xmlns:a16="http://schemas.microsoft.com/office/drawing/2014/main" id="{73C5F9BF-9E45-7174-B44C-B1278054712F}"/>
+                <a16:creationId xmlns:a16="http://schemas.microsoft.com/office/drawing/2014/main" xmlns="" id="{73C5F9BF-9E45-7174-B44C-B1278054712F}"/>
               </a:ext>
             </a:extLst>
           </p:cNvPr>
@@ -12809,12 +12908,28 @@
               <a:t> </a:t>
             </a:r>
             <a:r>
-              <a:rPr sz="3500" dirty="0" err="1">
-                <a:solidFill>
-                  <a:srgbClr val="2F3338"/>
-                </a:solidFill>
-              </a:rPr>
-              <a:t>prezentarii</a:t>
+              <a:rPr sz="3500" dirty="0" err="1" smtClean="0">
+                <a:solidFill>
+                  <a:srgbClr val="2F3338"/>
+                </a:solidFill>
+              </a:rPr>
+              <a:t>prezent</a:t>
+            </a:r>
+            <a:r>
+              <a:rPr lang="ro-RO" sz="3500" dirty="0" smtClean="0">
+                <a:solidFill>
+                  <a:srgbClr val="2F3338"/>
+                </a:solidFill>
+              </a:rPr>
+              <a:t>ă</a:t>
+            </a:r>
+            <a:r>
+              <a:rPr sz="3500" dirty="0" err="1" smtClean="0">
+                <a:solidFill>
+                  <a:srgbClr val="2F3338"/>
+                </a:solidFill>
+              </a:rPr>
+              <a:t>rii</a:t>
             </a:r>
             <a:endParaRPr sz="3500" dirty="0">
               <a:solidFill>
@@ -12832,8 +12947,8 @@
         </p:nvSpPr>
         <p:spPr>
           <a:xfrm>
-            <a:off x="1097280" y="2108200"/>
-            <a:ext cx="10058400" cy="3924300"/>
+            <a:off x="1097280" y="2954867"/>
+            <a:ext cx="10058400" cy="2302934"/>
           </a:xfrm>
           <a:prstGeom prst="roundRect">
             <a:avLst/>
@@ -13323,10 +13438,37 @@
                 </a:solidFill>
                 <a:latin typeface="Segoe UI"/>
               </a:rPr>
-              <a:t>- Cele 16 </a:t>
-            </a:r>
-            <a:r>
-              <a:rPr sz="2000" b="0" i="0" dirty="0" err="1" smtClean="0">
+              <a:t>- </a:t>
+            </a:r>
+            <a:r>
+              <a:rPr sz="2000" b="1" i="0" dirty="0" smtClean="0">
+                <a:solidFill>
+                  <a:srgbClr val="2F3338"/>
+                </a:solidFill>
+                <a:latin typeface="Segoe UI"/>
+              </a:rPr>
+              <a:t>1</a:t>
+            </a:r>
+            <a:r>
+              <a:rPr lang="ro-RO" sz="2000" b="1" i="0" dirty="0" smtClean="0">
+                <a:solidFill>
+                  <a:srgbClr val="2F3338"/>
+                </a:solidFill>
+                <a:latin typeface="Segoe UI"/>
+              </a:rPr>
+              <a:t>9</a:t>
+            </a:r>
+            <a:r>
+              <a:rPr sz="2000" b="1" i="0" dirty="0" smtClean="0">
+                <a:solidFill>
+                  <a:srgbClr val="2F3338"/>
+                </a:solidFill>
+                <a:latin typeface="Segoe UI"/>
+              </a:rPr>
+              <a:t> </a:t>
+            </a:r>
+            <a:r>
+              <a:rPr sz="2000" b="1" i="0" dirty="0" err="1" smtClean="0">
                 <a:solidFill>
                   <a:srgbClr val="2F3338"/>
                 </a:solidFill>
@@ -13335,7 +13477,7 @@
               <a:t>propriet</a:t>
             </a:r>
             <a:r>
-              <a:rPr lang="ro-RO" sz="2000" b="0" i="0" dirty="0" smtClean="0">
+              <a:rPr lang="ro-RO" sz="2000" b="1" i="0" dirty="0" smtClean="0">
                 <a:solidFill>
                   <a:srgbClr val="2F3338"/>
                 </a:solidFill>
@@ -13344,7 +13486,7 @@
               <a:t>ă</a:t>
             </a:r>
             <a:r>
-              <a:rPr lang="ro-RO" sz="2000" dirty="0">
+              <a:rPr lang="ro-RO" sz="2000" b="1" dirty="0">
                 <a:solidFill>
                   <a:srgbClr val="2F3338"/>
                 </a:solidFill>
@@ -13353,7 +13495,7 @@
               <a:t>ț</a:t>
             </a:r>
             <a:r>
-              <a:rPr sz="2000" b="0" i="0" dirty="0" smtClean="0">
+              <a:rPr sz="2000" b="1" i="0" dirty="0" smtClean="0">
                 <a:solidFill>
                   <a:srgbClr val="2F3338"/>
                 </a:solidFill>
@@ -13362,7 +13504,7 @@
               <a:t>i </a:t>
             </a:r>
             <a:r>
-              <a:rPr sz="2000" b="0" i="0" dirty="0" err="1">
+              <a:rPr sz="2000" b="1" i="0" dirty="0" err="1">
                 <a:solidFill>
                   <a:srgbClr val="2F3338"/>
                 </a:solidFill>
@@ -13371,7 +13513,7 @@
               <a:t>formale</a:t>
             </a:r>
             <a:r>
-              <a:rPr sz="2000" b="0" i="0" dirty="0">
+              <a:rPr sz="2000" b="1" i="0" dirty="0">
                 <a:solidFill>
                   <a:srgbClr val="2F3338"/>
                 </a:solidFill>
@@ -13450,7 +13592,7 @@
               <a:t>- </a:t>
             </a:r>
             <a:r>
-              <a:rPr sz="2000" b="0" i="0" dirty="0" err="1">
+              <a:rPr sz="2000" b="1" i="0" dirty="0" err="1">
                 <a:solidFill>
                   <a:srgbClr val="2F3338"/>
                 </a:solidFill>
@@ -13459,7 +13601,7 @@
               <a:t>Avantaje</a:t>
             </a:r>
             <a:r>
-              <a:rPr sz="2000" b="0" i="0" dirty="0">
+              <a:rPr sz="2000" b="1" i="0" dirty="0">
                 <a:solidFill>
                   <a:srgbClr val="2F3338"/>
                 </a:solidFill>
@@ -13468,7 +13610,7 @@
               <a:t>, </a:t>
             </a:r>
             <a:r>
-              <a:rPr sz="2000" b="0" i="0" dirty="0" smtClean="0">
+              <a:rPr sz="2000" b="1" i="0" dirty="0" smtClean="0">
                 <a:solidFill>
                   <a:srgbClr val="2F3338"/>
                 </a:solidFill>
@@ -13477,7 +13619,7 @@
               <a:t>limit</a:t>
             </a:r>
             <a:r>
-              <a:rPr lang="ro-RO" sz="2000" b="0" i="0" dirty="0" smtClean="0">
+              <a:rPr lang="ro-RO" sz="2000" b="1" i="0" dirty="0" smtClean="0">
                 <a:solidFill>
                   <a:srgbClr val="2F3338"/>
                 </a:solidFill>
@@ -13486,7 +13628,7 @@
               <a:t>ă</a:t>
             </a:r>
             <a:r>
-              <a:rPr sz="2000" b="0" i="0" dirty="0" err="1" smtClean="0">
+              <a:rPr sz="2000" b="1" i="0" dirty="0" err="1" smtClean="0">
                 <a:solidFill>
                   <a:srgbClr val="2F3338"/>
                 </a:solidFill>
@@ -13495,7 +13637,7 @@
               <a:t>ri</a:t>
             </a:r>
             <a:r>
-              <a:rPr sz="2000" b="0" i="0" dirty="0">
+              <a:rPr sz="2000" b="1" i="0" dirty="0">
                 <a:solidFill>
                   <a:srgbClr val="2F3338"/>
                 </a:solidFill>
@@ -13504,52 +13646,7 @@
               <a:t>, </a:t>
             </a:r>
             <a:r>
-              <a:rPr sz="2000" b="0" i="0" dirty="0" err="1" smtClean="0">
-                <a:solidFill>
-                  <a:srgbClr val="2F3338"/>
-                </a:solidFill>
-                <a:latin typeface="Segoe UI"/>
-              </a:rPr>
-              <a:t>direc</a:t>
-            </a:r>
-            <a:r>
-              <a:rPr lang="ro-RO" sz="2000" b="0" i="0" dirty="0" smtClean="0">
-                <a:solidFill>
-                  <a:srgbClr val="2F3338"/>
-                </a:solidFill>
-                <a:latin typeface="Segoe UI"/>
-              </a:rPr>
-              <a:t>ț</a:t>
-            </a:r>
-            <a:r>
-              <a:rPr sz="2000" b="0" i="0" dirty="0" smtClean="0">
-                <a:solidFill>
-                  <a:srgbClr val="2F3338"/>
-                </a:solidFill>
-                <a:latin typeface="Segoe UI"/>
-              </a:rPr>
-              <a:t>ii </a:t>
-            </a:r>
-            <a:r>
-              <a:rPr sz="2000" b="0" i="0" dirty="0" err="1">
-                <a:solidFill>
-                  <a:srgbClr val="2F3338"/>
-                </a:solidFill>
-                <a:latin typeface="Segoe UI"/>
-              </a:rPr>
-              <a:t>viitoare</a:t>
-            </a:r>
-            <a:r>
-              <a:rPr sz="2000" b="0" i="0" dirty="0">
-                <a:solidFill>
-                  <a:srgbClr val="2F3338"/>
-                </a:solidFill>
-                <a:latin typeface="Segoe UI"/>
-              </a:rPr>
-              <a:t> </a:t>
-            </a:r>
-            <a:r>
-              <a:rPr lang="ro-RO" sz="2000" dirty="0" err="1">
+              <a:rPr lang="ro-RO" sz="2000" b="1" dirty="0" smtClean="0">
                 <a:solidFill>
                   <a:srgbClr val="2F3338"/>
                 </a:solidFill>
@@ -13558,7 +13655,7 @@
               <a:t>ș</a:t>
             </a:r>
             <a:r>
-              <a:rPr sz="2000" b="0" i="0" dirty="0" smtClean="0">
+              <a:rPr sz="2000" b="1" i="0" dirty="0" smtClean="0">
                 <a:solidFill>
                   <a:srgbClr val="2F3338"/>
                 </a:solidFill>
@@ -13567,7 +13664,7 @@
               <a:t>i </a:t>
             </a:r>
             <a:r>
-              <a:rPr sz="2000" b="0" i="0" dirty="0" err="1">
+              <a:rPr sz="2000" b="1" i="0" dirty="0" err="1">
                 <a:solidFill>
                   <a:srgbClr val="2F3338"/>
                 </a:solidFill>
@@ -13575,7 +13672,7 @@
               </a:rPr>
               <a:t>concluzii</a:t>
             </a:r>
-            <a:endParaRPr sz="2000" b="0" i="0" dirty="0">
+            <a:endParaRPr sz="2000" b="1" i="0" dirty="0">
               <a:solidFill>
                 <a:srgbClr val="2F3338"/>
               </a:solidFill>
@@ -15664,7 +15761,7 @@
         <p:spPr>
           <a:xfrm>
             <a:off x="6537960" y="2848207"/>
-            <a:ext cx="4389120" cy="3611880"/>
+            <a:ext cx="4389120" cy="1815882"/>
           </a:xfrm>
           <a:prstGeom prst="rect">
             <a:avLst/>
@@ -15686,14 +15783,47 @@
               </a:spcAft>
             </a:pPr>
             <a:r>
-              <a:rPr sz="1400" b="0" i="0">
-                <a:solidFill>
-                  <a:srgbClr val="2F3338"/>
-                </a:solidFill>
-                <a:latin typeface="Segoe UI"/>
-              </a:rPr>
-              <a:t>- 2 proprietati semantice</a:t>
-            </a:r>
+              <a:rPr sz="1400" b="0" i="0" dirty="0">
+                <a:solidFill>
+                  <a:srgbClr val="2F3338"/>
+                </a:solidFill>
+                <a:latin typeface="Segoe UI"/>
+              </a:rPr>
+              <a:t>- 2 </a:t>
+            </a:r>
+            <a:r>
+              <a:rPr sz="1400" b="0" i="0" dirty="0" err="1">
+                <a:solidFill>
+                  <a:srgbClr val="2F3338"/>
+                </a:solidFill>
+                <a:latin typeface="Segoe UI"/>
+              </a:rPr>
+              <a:t>proprietati</a:t>
+            </a:r>
+            <a:r>
+              <a:rPr sz="1400" b="0" i="0" dirty="0">
+                <a:solidFill>
+                  <a:srgbClr val="2F3338"/>
+                </a:solidFill>
+                <a:latin typeface="Segoe UI"/>
+              </a:rPr>
+              <a:t> </a:t>
+            </a:r>
+            <a:r>
+              <a:rPr sz="1400" b="0" i="0" dirty="0" err="1">
+                <a:solidFill>
+                  <a:srgbClr val="2F3338"/>
+                </a:solidFill>
+                <a:latin typeface="Segoe UI"/>
+              </a:rPr>
+              <a:t>semantice</a:t>
+            </a:r>
+            <a:endParaRPr sz="1400" b="0" i="0" dirty="0">
+              <a:solidFill>
+                <a:srgbClr val="2F3338"/>
+              </a:solidFill>
+              <a:latin typeface="Segoe UI"/>
+            </a:endParaRPr>
           </a:p>
           <a:p>
             <a:pPr algn="l">
@@ -15705,14 +15835,47 @@
               </a:spcAft>
             </a:pPr>
             <a:r>
-              <a:rPr sz="1400" b="0" i="0">
-                <a:solidFill>
-                  <a:srgbClr val="2F3338"/>
-                </a:solidFill>
-                <a:latin typeface="Segoe UI"/>
-              </a:rPr>
-              <a:t>- 4 proprietati structurale</a:t>
-            </a:r>
+              <a:rPr sz="1400" b="0" i="0" dirty="0">
+                <a:solidFill>
+                  <a:srgbClr val="2F3338"/>
+                </a:solidFill>
+                <a:latin typeface="Segoe UI"/>
+              </a:rPr>
+              <a:t>- 4 </a:t>
+            </a:r>
+            <a:r>
+              <a:rPr sz="1400" b="0" i="0" dirty="0" err="1">
+                <a:solidFill>
+                  <a:srgbClr val="2F3338"/>
+                </a:solidFill>
+                <a:latin typeface="Segoe UI"/>
+              </a:rPr>
+              <a:t>proprietati</a:t>
+            </a:r>
+            <a:r>
+              <a:rPr sz="1400" b="0" i="0" dirty="0">
+                <a:solidFill>
+                  <a:srgbClr val="2F3338"/>
+                </a:solidFill>
+                <a:latin typeface="Segoe UI"/>
+              </a:rPr>
+              <a:t> </a:t>
+            </a:r>
+            <a:r>
+              <a:rPr sz="1400" b="0" i="0" dirty="0" err="1">
+                <a:solidFill>
+                  <a:srgbClr val="2F3338"/>
+                </a:solidFill>
+                <a:latin typeface="Segoe UI"/>
+              </a:rPr>
+              <a:t>structurale</a:t>
+            </a:r>
+            <a:endParaRPr sz="1400" b="0" i="0" dirty="0">
+              <a:solidFill>
+                <a:srgbClr val="2F3338"/>
+              </a:solidFill>
+              <a:latin typeface="Segoe UI"/>
+            </a:endParaRPr>
           </a:p>
           <a:p>
             <a:pPr algn="l">
@@ -15724,14 +15887,47 @@
               </a:spcAft>
             </a:pPr>
             <a:r>
-              <a:rPr sz="1400" b="0" i="0">
-                <a:solidFill>
-                  <a:srgbClr val="2F3338"/>
-                </a:solidFill>
-                <a:latin typeface="Segoe UI"/>
-              </a:rPr>
-              <a:t>- 4 proprietati algebrice</a:t>
-            </a:r>
+              <a:rPr sz="1400" b="0" i="0" dirty="0">
+                <a:solidFill>
+                  <a:srgbClr val="2F3338"/>
+                </a:solidFill>
+                <a:latin typeface="Segoe UI"/>
+              </a:rPr>
+              <a:t>- 4 </a:t>
+            </a:r>
+            <a:r>
+              <a:rPr sz="1400" b="0" i="0" dirty="0" err="1">
+                <a:solidFill>
+                  <a:srgbClr val="2F3338"/>
+                </a:solidFill>
+                <a:latin typeface="Segoe UI"/>
+              </a:rPr>
+              <a:t>proprietati</a:t>
+            </a:r>
+            <a:r>
+              <a:rPr sz="1400" b="0" i="0" dirty="0">
+                <a:solidFill>
+                  <a:srgbClr val="2F3338"/>
+                </a:solidFill>
+                <a:latin typeface="Segoe UI"/>
+              </a:rPr>
+              <a:t> </a:t>
+            </a:r>
+            <a:r>
+              <a:rPr sz="1400" b="0" i="0" dirty="0" err="1">
+                <a:solidFill>
+                  <a:srgbClr val="2F3338"/>
+                </a:solidFill>
+                <a:latin typeface="Segoe UI"/>
+              </a:rPr>
+              <a:t>algebrice</a:t>
+            </a:r>
+            <a:endParaRPr sz="1400" b="0" i="0" dirty="0">
+              <a:solidFill>
+                <a:srgbClr val="2F3338"/>
+              </a:solidFill>
+              <a:latin typeface="Segoe UI"/>
+            </a:endParaRPr>
           </a:p>
           <a:p>
             <a:pPr algn="l">
@@ -15743,14 +15939,47 @@
               </a:spcAft>
             </a:pPr>
             <a:r>
-              <a:rPr sz="1400" b="0" i="0">
-                <a:solidFill>
-                  <a:srgbClr val="2F3338"/>
-                </a:solidFill>
-                <a:latin typeface="Segoe UI"/>
-              </a:rPr>
-              <a:t>- 3 neutre/absorbante</a:t>
-            </a:r>
+              <a:rPr sz="1400" b="0" i="0" dirty="0">
+                <a:solidFill>
+                  <a:srgbClr val="2F3338"/>
+                </a:solidFill>
+                <a:latin typeface="Segoe UI"/>
+              </a:rPr>
+              <a:t>- 3 </a:t>
+            </a:r>
+            <a:r>
+              <a:rPr sz="1400" b="0" i="0" dirty="0" err="1">
+                <a:solidFill>
+                  <a:srgbClr val="2F3338"/>
+                </a:solidFill>
+                <a:latin typeface="Segoe UI"/>
+              </a:rPr>
+              <a:t>neutre</a:t>
+            </a:r>
+            <a:r>
+              <a:rPr sz="1400" b="0" i="0" dirty="0">
+                <a:solidFill>
+                  <a:srgbClr val="2F3338"/>
+                </a:solidFill>
+                <a:latin typeface="Segoe UI"/>
+              </a:rPr>
+              <a:t>/</a:t>
+            </a:r>
+            <a:r>
+              <a:rPr sz="1400" b="0" i="0" dirty="0" err="1">
+                <a:solidFill>
+                  <a:srgbClr val="2F3338"/>
+                </a:solidFill>
+                <a:latin typeface="Segoe UI"/>
+              </a:rPr>
+              <a:t>absorbante</a:t>
+            </a:r>
+            <a:endParaRPr sz="1400" b="0" i="0" dirty="0">
+              <a:solidFill>
+                <a:srgbClr val="2F3338"/>
+              </a:solidFill>
+              <a:latin typeface="Segoe UI"/>
+            </a:endParaRPr>
           </a:p>
           <a:p>
             <a:pPr algn="l">
@@ -15762,14 +15991,47 @@
               </a:spcAft>
             </a:pPr>
             <a:r>
-              <a:rPr sz="1400" b="0" i="0">
-                <a:solidFill>
-                  <a:srgbClr val="2F3338"/>
-                </a:solidFill>
-                <a:latin typeface="Segoe UI"/>
-              </a:rPr>
-              <a:t>- 2 negatie/scadere</a:t>
-            </a:r>
+              <a:rPr sz="1400" b="0" i="0" dirty="0">
+                <a:solidFill>
+                  <a:srgbClr val="2F3338"/>
+                </a:solidFill>
+                <a:latin typeface="Segoe UI"/>
+              </a:rPr>
+              <a:t>- 2 </a:t>
+            </a:r>
+            <a:r>
+              <a:rPr sz="1400" b="0" i="0" dirty="0" err="1">
+                <a:solidFill>
+                  <a:srgbClr val="2F3338"/>
+                </a:solidFill>
+                <a:latin typeface="Segoe UI"/>
+              </a:rPr>
+              <a:t>negatie</a:t>
+            </a:r>
+            <a:r>
+              <a:rPr sz="1400" b="0" i="0" dirty="0">
+                <a:solidFill>
+                  <a:srgbClr val="2F3338"/>
+                </a:solidFill>
+                <a:latin typeface="Segoe UI"/>
+              </a:rPr>
+              <a:t>/</a:t>
+            </a:r>
+            <a:r>
+              <a:rPr sz="1400" b="0" i="0" dirty="0" err="1">
+                <a:solidFill>
+                  <a:srgbClr val="2F3338"/>
+                </a:solidFill>
+                <a:latin typeface="Segoe UI"/>
+              </a:rPr>
+              <a:t>scadere</a:t>
+            </a:r>
+            <a:endParaRPr sz="1400" b="0" i="0" dirty="0">
+              <a:solidFill>
+                <a:srgbClr val="2F3338"/>
+              </a:solidFill>
+              <a:latin typeface="Segoe UI"/>
+            </a:endParaRPr>
           </a:p>
           <a:p>
             <a:pPr algn="l">
@@ -15781,14 +16043,114 @@
               </a:spcAft>
             </a:pPr>
             <a:r>
-              <a:rPr sz="1400" b="0" i="0">
-                <a:solidFill>
-                  <a:srgbClr val="2F3338"/>
-                </a:solidFill>
-                <a:latin typeface="Segoe UI"/>
-              </a:rPr>
-              <a:t>- 1 substitutie (total: 16)</a:t>
-            </a:r>
+              <a:rPr sz="1400" b="0" i="0" dirty="0">
+                <a:solidFill>
+                  <a:srgbClr val="2F3338"/>
+                </a:solidFill>
+                <a:latin typeface="Segoe UI"/>
+              </a:rPr>
+              <a:t>- 1 </a:t>
+            </a:r>
+            <a:r>
+              <a:rPr sz="1400" b="0" i="0" dirty="0" err="1" smtClean="0">
+                <a:solidFill>
+                  <a:srgbClr val="2F3338"/>
+                </a:solidFill>
+                <a:latin typeface="Segoe UI"/>
+              </a:rPr>
+              <a:t>substitutie</a:t>
+            </a:r>
+            <a:endParaRPr lang="ro-RO" sz="1400" b="0" i="0" dirty="0" smtClean="0">
+              <a:solidFill>
+                <a:srgbClr val="2F3338"/>
+              </a:solidFill>
+              <a:latin typeface="Segoe UI"/>
+            </a:endParaRPr>
+          </a:p>
+          <a:p>
+            <a:pPr>
+              <a:spcAft>
+                <a:spcPts val="200"/>
+              </a:spcAft>
+            </a:pPr>
+            <a:r>
+              <a:rPr lang="ro-RO" sz="1400" dirty="0">
+                <a:solidFill>
+                  <a:srgbClr val="2F3338"/>
+                </a:solidFill>
+                <a:latin typeface="Segoe UI"/>
+              </a:rPr>
+              <a:t>-</a:t>
+            </a:r>
+            <a:r>
+              <a:rPr lang="en-US" sz="1400" dirty="0">
+                <a:solidFill>
+                  <a:srgbClr val="2F3338"/>
+                </a:solidFill>
+                <a:latin typeface="Segoe UI"/>
+              </a:rPr>
+              <a:t> </a:t>
+            </a:r>
+            <a:r>
+              <a:rPr lang="en-US" sz="1400" dirty="0">
+                <a:solidFill>
+                  <a:srgbClr val="2F3338"/>
+                </a:solidFill>
+                <a:latin typeface="Segoe UI"/>
+              </a:rPr>
+              <a:t>3 Nothing/partial</a:t>
+            </a:r>
+            <a:r>
+              <a:rPr sz="1400" dirty="0">
+                <a:solidFill>
+                  <a:srgbClr val="2F3338"/>
+                </a:solidFill>
+                <a:latin typeface="Segoe UI"/>
+              </a:rPr>
+              <a:t> </a:t>
+            </a:r>
+            <a:r>
+              <a:rPr sz="1400" dirty="0">
+                <a:solidFill>
+                  <a:srgbClr val="2F3338"/>
+                </a:solidFill>
+                <a:latin typeface="Segoe UI"/>
+              </a:rPr>
+              <a:t>(total: </a:t>
+            </a:r>
+            <a:r>
+              <a:rPr sz="1400" dirty="0" smtClean="0">
+                <a:solidFill>
+                  <a:srgbClr val="2F3338"/>
+                </a:solidFill>
+                <a:latin typeface="Segoe UI"/>
+              </a:rPr>
+              <a:t>1</a:t>
+            </a:r>
+            <a:r>
+              <a:rPr lang="ro-RO" sz="1400" dirty="0" smtClean="0">
+                <a:solidFill>
+                  <a:srgbClr val="2F3338"/>
+                </a:solidFill>
+                <a:latin typeface="Segoe UI"/>
+              </a:rPr>
+              <a:t>9</a:t>
+            </a:r>
+            <a:r>
+              <a:rPr sz="1400" dirty="0" smtClean="0">
+                <a:solidFill>
+                  <a:srgbClr val="2F3338"/>
+                </a:solidFill>
+                <a:latin typeface="Segoe UI"/>
+              </a:rPr>
+              <a:t>)</a:t>
+            </a:r>
+            <a:endParaRPr sz="1400" dirty="0">
+              <a:solidFill>
+                <a:srgbClr val="2F3338"/>
+              </a:solidFill>
+              <a:latin typeface="Segoe UI"/>
+            </a:endParaRPr>
           </a:p>
         </p:txBody>
       </p:sp>
@@ -16024,7 +16386,7 @@
         <p:spPr>
           <a:xfrm>
             <a:off x="1261872" y="2908839"/>
-            <a:ext cx="9729216" cy="4050791"/>
+            <a:ext cx="9729216" cy="2092881"/>
           </a:xfrm>
           <a:prstGeom prst="rect">
             <a:avLst/>
@@ -16046,7 +16408,7 @@
               </a:spcAft>
             </a:pPr>
             <a:r>
-              <a:rPr sz="1150" b="0" i="0">
+              <a:rPr sz="1150" b="0" i="0" dirty="0">
                 <a:solidFill>
                   <a:srgbClr val="D4D4D4"/>
                 </a:solidFill>
@@ -16065,13 +16427,85 @@
               </a:spcAft>
             </a:pPr>
             <a:r>
-              <a:rPr sz="1150" b="0" i="0">
+              <a:rPr sz="1150" b="0" i="0" dirty="0">
                 <a:solidFill>
                   <a:srgbClr val="D4D4D4"/>
                 </a:solidFill>
                 <a:latin typeface="Consolas"/>
               </a:rPr>
-              <a:t>68.3% cu variabile | 31.7% fara variabile | 20.8% expr mare (&gt;8)</a:t>
+              <a:t>68.3% cu </a:t>
+            </a:r>
+            <a:r>
+              <a:rPr sz="1150" b="0" i="0" dirty="0" err="1">
+                <a:solidFill>
+                  <a:srgbClr val="D4D4D4"/>
+                </a:solidFill>
+                <a:latin typeface="Consolas"/>
+              </a:rPr>
+              <a:t>variabile</a:t>
+            </a:r>
+            <a:r>
+              <a:rPr sz="1150" b="0" i="0" dirty="0">
+                <a:solidFill>
+                  <a:srgbClr val="D4D4D4"/>
+                </a:solidFill>
+                <a:latin typeface="Consolas"/>
+              </a:rPr>
+              <a:t> | 31.7% </a:t>
+            </a:r>
+            <a:r>
+              <a:rPr sz="1150" b="0" i="0" dirty="0" err="1">
+                <a:solidFill>
+                  <a:srgbClr val="D4D4D4"/>
+                </a:solidFill>
+                <a:latin typeface="Consolas"/>
+              </a:rPr>
+              <a:t>fara</a:t>
+            </a:r>
+            <a:r>
+              <a:rPr sz="1150" b="0" i="0" dirty="0">
+                <a:solidFill>
+                  <a:srgbClr val="D4D4D4"/>
+                </a:solidFill>
+                <a:latin typeface="Consolas"/>
+              </a:rPr>
+              <a:t> </a:t>
+            </a:r>
+            <a:r>
+              <a:rPr sz="1150" b="0" i="0" dirty="0" err="1">
+                <a:solidFill>
+                  <a:srgbClr val="D4D4D4"/>
+                </a:solidFill>
+                <a:latin typeface="Consolas"/>
+              </a:rPr>
+              <a:t>variabile</a:t>
+            </a:r>
+            <a:r>
+              <a:rPr sz="1150" b="0" i="0" dirty="0">
+                <a:solidFill>
+                  <a:srgbClr val="D4D4D4"/>
+                </a:solidFill>
+                <a:latin typeface="Consolas"/>
+              </a:rPr>
+              <a:t> | 20.8% </a:t>
+            </a:r>
+            <a:r>
+              <a:rPr sz="1150" b="0" i="0" dirty="0" err="1">
+                <a:solidFill>
+                  <a:srgbClr val="D4D4D4"/>
+                </a:solidFill>
+                <a:latin typeface="Consolas"/>
+              </a:rPr>
+              <a:t>expr</a:t>
+            </a:r>
+            <a:r>
+              <a:rPr sz="1150" b="0" i="0" dirty="0">
+                <a:solidFill>
+                  <a:srgbClr val="D4D4D4"/>
+                </a:solidFill>
+                <a:latin typeface="Consolas"/>
+              </a:rPr>
+              <a:t> mare (&gt;8)</a:t>
             </a:r>
           </a:p>
           <a:p>
@@ -16083,7 +16517,7 @@
                 <a:spcPts val="200"/>
               </a:spcAft>
             </a:pPr>
-            <a:endParaRPr sz="1150" b="0" i="0">
+            <a:endParaRPr sz="1150" b="0" i="0" dirty="0">
               <a:solidFill>
                 <a:srgbClr val="D4D4D4"/>
               </a:solidFill>
@@ -16100,7 +16534,7 @@
               </a:spcAft>
             </a:pPr>
             <a:r>
-              <a:rPr sz="1150" b="0" i="0">
+              <a:rPr sz="1150" b="0" i="0" dirty="0">
                 <a:solidFill>
                   <a:srgbClr val="D4D4D4"/>
                 </a:solidFill>
@@ -16119,13 +16553,67 @@
               </a:spcAft>
             </a:pPr>
             <a:r>
-              <a:rPr sz="1150" b="0" i="0">
+              <a:rPr sz="1150" b="0" i="0" dirty="0">
                 <a:solidFill>
                   <a:srgbClr val="D4D4D4"/>
                 </a:solidFill>
                 <a:latin typeface="Consolas"/>
               </a:rPr>
-              <a:t>28.3% expresie terminala | 24.2% adancime &gt; 4</a:t>
+              <a:t>28.3% </a:t>
+            </a:r>
+            <a:r>
+              <a:rPr sz="1150" b="0" i="0" dirty="0" err="1">
+                <a:solidFill>
+                  <a:srgbClr val="D4D4D4"/>
+                </a:solidFill>
+                <a:latin typeface="Consolas"/>
+              </a:rPr>
+              <a:t>expresie</a:t>
+            </a:r>
+            <a:r>
+              <a:rPr sz="1150" b="0" i="0" dirty="0">
+                <a:solidFill>
+                  <a:srgbClr val="D4D4D4"/>
+                </a:solidFill>
+                <a:latin typeface="Consolas"/>
+              </a:rPr>
+              <a:t> </a:t>
+            </a:r>
+            <a:r>
+              <a:rPr sz="1150" b="0" i="0" dirty="0" err="1">
+                <a:solidFill>
+                  <a:srgbClr val="D4D4D4"/>
+                </a:solidFill>
+                <a:latin typeface="Consolas"/>
+              </a:rPr>
+              <a:t>terminala</a:t>
+            </a:r>
+            <a:r>
+              <a:rPr sz="1150" b="0" i="0" dirty="0">
+                <a:solidFill>
+                  <a:srgbClr val="D4D4D4"/>
+                </a:solidFill>
+                <a:latin typeface="Consolas"/>
+              </a:rPr>
+              <a:t> | 24.2% </a:t>
+            </a:r>
+            <a:r>
+              <a:rPr sz="1150" b="0" i="0" dirty="0" err="1">
+                <a:solidFill>
+                  <a:srgbClr val="D4D4D4"/>
+                </a:solidFill>
+                <a:latin typeface="Consolas"/>
+              </a:rPr>
+              <a:t>adancime</a:t>
+            </a:r>
+            <a:r>
+              <a:rPr sz="1150" b="0" i="0" dirty="0">
+                <a:solidFill>
+                  <a:srgbClr val="D4D4D4"/>
+                </a:solidFill>
+                <a:latin typeface="Consolas"/>
+              </a:rPr>
+              <a:t> &gt; 4</a:t>
             </a:r>
           </a:p>
           <a:p>
@@ -16137,7 +16625,7 @@
                 <a:spcPts val="200"/>
               </a:spcAft>
             </a:pPr>
-            <a:endParaRPr sz="1150" b="0" i="0">
+            <a:endParaRPr sz="1150" b="0" i="0" dirty="0">
               <a:solidFill>
                 <a:srgbClr val="D4D4D4"/>
               </a:solidFill>
@@ -16154,7 +16642,7 @@
               </a:spcAft>
             </a:pPr>
             <a:r>
-              <a:rPr sz="1150" b="0" i="0">
+              <a:rPr sz="1150" b="0" i="0" dirty="0">
                 <a:solidFill>
                   <a:srgbClr val="D4D4D4"/>
                 </a:solidFill>
@@ -16173,14 +16661,83 @@
               </a:spcAft>
             </a:pPr>
             <a:r>
-              <a:rPr sz="1150" b="0" i="0">
+              <a:rPr sz="1150" b="0" i="0" dirty="0">
                 <a:solidFill>
                   <a:srgbClr val="D4D4D4"/>
                 </a:solidFill>
                 <a:latin typeface="Consolas"/>
               </a:rPr>
-              <a:t>52.5% expresii mari | 16.7% expresii mici</a:t>
-            </a:r>
+              <a:t>52.5% </a:t>
+            </a:r>
+            <a:r>
+              <a:rPr sz="1150" b="0" i="0" dirty="0" err="1">
+                <a:solidFill>
+                  <a:srgbClr val="D4D4D4"/>
+                </a:solidFill>
+                <a:latin typeface="Consolas"/>
+              </a:rPr>
+              <a:t>expresii</a:t>
+            </a:r>
+            <a:r>
+              <a:rPr sz="1150" b="0" i="0" dirty="0">
+                <a:solidFill>
+                  <a:srgbClr val="D4D4D4"/>
+                </a:solidFill>
+                <a:latin typeface="Consolas"/>
+              </a:rPr>
+              <a:t> </a:t>
+            </a:r>
+            <a:r>
+              <a:rPr sz="1150" b="0" i="0" dirty="0" err="1">
+                <a:solidFill>
+                  <a:srgbClr val="D4D4D4"/>
+                </a:solidFill>
+                <a:latin typeface="Consolas"/>
+              </a:rPr>
+              <a:t>mari</a:t>
+            </a:r>
+            <a:r>
+              <a:rPr sz="1150" b="0" i="0" dirty="0">
+                <a:solidFill>
+                  <a:srgbClr val="D4D4D4"/>
+                </a:solidFill>
+                <a:latin typeface="Consolas"/>
+              </a:rPr>
+              <a:t> | 16.7% </a:t>
+            </a:r>
+            <a:r>
+              <a:rPr sz="1150" b="0" i="0" dirty="0" err="1">
+                <a:solidFill>
+                  <a:srgbClr val="D4D4D4"/>
+                </a:solidFill>
+                <a:latin typeface="Consolas"/>
+              </a:rPr>
+              <a:t>expresii</a:t>
+            </a:r>
+            <a:r>
+              <a:rPr sz="1150" b="0" i="0" dirty="0">
+                <a:solidFill>
+                  <a:srgbClr val="D4D4D4"/>
+                </a:solidFill>
+                <a:latin typeface="Consolas"/>
+              </a:rPr>
+              <a:t> </a:t>
+            </a:r>
+            <a:r>
+              <a:rPr sz="1150" b="0" i="0" dirty="0" err="1">
+                <a:solidFill>
+                  <a:srgbClr val="D4D4D4"/>
+                </a:solidFill>
+                <a:latin typeface="Consolas"/>
+              </a:rPr>
+              <a:t>mici</a:t>
+            </a:r>
+            <a:endParaRPr sz="1150" b="0" i="0" dirty="0">
+              <a:solidFill>
+                <a:srgbClr val="D4D4D4"/>
+              </a:solidFill>
+              <a:latin typeface="Consolas"/>
+            </a:endParaRPr>
           </a:p>
           <a:p>
             <a:pPr algn="l">
@@ -16191,7 +16748,7 @@
                 <a:spcPts val="200"/>
               </a:spcAft>
             </a:pPr>
-            <a:endParaRPr sz="1150" b="0" i="0">
+            <a:endParaRPr sz="1150" b="0" i="0" dirty="0">
               <a:solidFill>
                 <a:srgbClr val="D4D4D4"/>
               </a:solidFill>
@@ -16208,13 +16765,94 @@
               </a:spcAft>
             </a:pPr>
             <a:r>
-              <a:rPr sz="1150" b="0" i="0">
+              <a:rPr sz="1150" b="0" i="0" dirty="0">
                 <a:solidFill>
                   <a:srgbClr val="D4D4D4"/>
                 </a:solidFill>
                 <a:latin typeface="Consolas"/>
               </a:rPr>
-              <a:t>[... toate cele 16 proprietati: PASS ...]</a:t>
+              <a:t>[... </a:t>
+            </a:r>
+            <a:r>
+              <a:rPr sz="1150" b="0" i="0" dirty="0" err="1">
+                <a:solidFill>
+                  <a:srgbClr val="D4D4D4"/>
+                </a:solidFill>
+                <a:latin typeface="Consolas"/>
+              </a:rPr>
+              <a:t>toate</a:t>
+            </a:r>
+            <a:r>
+              <a:rPr sz="1150" b="0" i="0" dirty="0">
+                <a:solidFill>
+                  <a:srgbClr val="D4D4D4"/>
+                </a:solidFill>
+                <a:latin typeface="Consolas"/>
+              </a:rPr>
+              <a:t> </a:t>
+            </a:r>
+            <a:r>
+              <a:rPr sz="1150" b="0" i="0" dirty="0" err="1">
+                <a:solidFill>
+                  <a:srgbClr val="D4D4D4"/>
+                </a:solidFill>
+                <a:latin typeface="Consolas"/>
+              </a:rPr>
+              <a:t>cele</a:t>
+            </a:r>
+            <a:r>
+              <a:rPr sz="1150" b="0" i="0" dirty="0">
+                <a:solidFill>
+                  <a:srgbClr val="D4D4D4"/>
+                </a:solidFill>
+                <a:latin typeface="Consolas"/>
+              </a:rPr>
+              <a:t> </a:t>
+            </a:r>
+            <a:r>
+              <a:rPr sz="1150" b="0" i="0" dirty="0" smtClean="0">
+                <a:solidFill>
+                  <a:srgbClr val="D4D4D4"/>
+                </a:solidFill>
+                <a:latin typeface="Consolas"/>
+              </a:rPr>
+              <a:t>1</a:t>
+            </a:r>
+            <a:r>
+              <a:rPr lang="ro-RO" sz="1150" b="0" i="0" dirty="0" smtClean="0">
+                <a:solidFill>
+                  <a:srgbClr val="D4D4D4"/>
+                </a:solidFill>
+                <a:latin typeface="Consolas"/>
+              </a:rPr>
+              <a:t>9</a:t>
+            </a:r>
+            <a:r>
+              <a:rPr sz="1150" b="0" i="0" dirty="0" smtClean="0">
+                <a:solidFill>
+                  <a:srgbClr val="D4D4D4"/>
+                </a:solidFill>
+                <a:latin typeface="Consolas"/>
+              </a:rPr>
+              <a:t> </a:t>
+            </a:r>
+            <a:r>
+              <a:rPr sz="1150" b="0" i="0" dirty="0" err="1">
+                <a:solidFill>
+                  <a:srgbClr val="D4D4D4"/>
+                </a:solidFill>
+                <a:latin typeface="Consolas"/>
+              </a:rPr>
+              <a:t>proprietati</a:t>
+            </a:r>
+            <a:r>
+              <a:rPr sz="1150" b="0" i="0" dirty="0">
+                <a:solidFill>
+                  <a:srgbClr val="D4D4D4"/>
+                </a:solidFill>
+                <a:latin typeface="Consolas"/>
+              </a:rPr>
+              <a:t>: PASS ...]</a:t>
             </a:r>
           </a:p>
         </p:txBody>
@@ -18843,7 +19481,6 @@
                 <a:solidFill>
                   <a:srgbClr val="2F3338"/>
                 </a:solidFill>
-                <a:latin typeface="Bookman Old Style (Headings)"/>
               </a:rPr>
               <a:t>De </a:t>
             </a:r>
@@ -18852,7 +19489,6 @@
                 <a:solidFill>
                   <a:srgbClr val="2F3338"/>
                 </a:solidFill>
-                <a:latin typeface="Bookman Old Style (Headings)"/>
               </a:rPr>
               <a:t>ce</a:t>
             </a:r>
@@ -18861,7 +19497,6 @@
                 <a:solidFill>
                   <a:srgbClr val="2F3338"/>
                 </a:solidFill>
-                <a:latin typeface="Bookman Old Style (Headings)"/>
               </a:rPr>
               <a:t> </a:t>
             </a:r>
@@ -18870,7 +19505,6 @@
                 <a:solidFill>
                   <a:srgbClr val="2F3338"/>
                 </a:solidFill>
-                <a:latin typeface="Bookman Old Style (Headings)"/>
               </a:rPr>
               <a:t>avem</a:t>
             </a:r>
@@ -18879,7 +19513,6 @@
                 <a:solidFill>
                   <a:srgbClr val="2F3338"/>
                 </a:solidFill>
-                <a:latin typeface="Bookman Old Style (Headings)"/>
               </a:rPr>
               <a:t> </a:t>
             </a:r>
@@ -18888,7 +19521,6 @@
                 <a:solidFill>
                   <a:srgbClr val="2F3338"/>
                 </a:solidFill>
-                <a:latin typeface="Bookman Old Style (Headings)"/>
               </a:rPr>
               <a:t>nevoie</a:t>
             </a:r>
@@ -18897,7 +19529,6 @@
                 <a:solidFill>
                   <a:srgbClr val="2F3338"/>
                 </a:solidFill>
-                <a:latin typeface="Bookman Old Style (Headings)"/>
               </a:rPr>
               <a:t> de </a:t>
             </a:r>
@@ -18906,7 +19537,6 @@
                 <a:solidFill>
                   <a:srgbClr val="2F3338"/>
                 </a:solidFill>
-                <a:latin typeface="Bookman Old Style (Headings)"/>
               </a:rPr>
               <a:t>metode</a:t>
             </a:r>
@@ -18915,7 +19545,6 @@
                 <a:solidFill>
                   <a:srgbClr val="2F3338"/>
                 </a:solidFill>
-                <a:latin typeface="Bookman Old Style (Headings)"/>
               </a:rPr>
               <a:t> </a:t>
             </a:r>
@@ -18924,7 +19553,6 @@
                 <a:solidFill>
                   <a:srgbClr val="2F3338"/>
                 </a:solidFill>
-                <a:latin typeface="Bookman Old Style (Headings)"/>
               </a:rPr>
               <a:t>formale</a:t>
             </a:r>
@@ -18933,7 +19561,6 @@
                 <a:solidFill>
                   <a:srgbClr val="2F3338"/>
                 </a:solidFill>
-                <a:latin typeface="Bookman Old Style (Headings)"/>
               </a:rPr>
               <a:t>?</a:t>
             </a:r>
@@ -18941,7 +19568,6 @@
               <a:solidFill>
                 <a:srgbClr val="2F3338"/>
               </a:solidFill>
-              <a:latin typeface="Bookman Old Style (Headings)"/>
             </a:endParaRPr>
           </a:p>
         </p:txBody>
@@ -18954,8 +19580,8 @@
         </p:nvSpPr>
         <p:spPr>
           <a:xfrm>
-            <a:off x="1097280" y="2001520"/>
-            <a:ext cx="10058400" cy="856645"/>
+            <a:off x="1097279" y="2001520"/>
+            <a:ext cx="9917853" cy="882293"/>
           </a:xfrm>
           <a:prstGeom prst="rect">
             <a:avLst/>
@@ -18981,313 +19607,307 @@
                 <a:solidFill>
                   <a:srgbClr val="2F3338"/>
                 </a:solidFill>
-                <a:latin typeface="Consolas" panose="020B0609020204030204" pitchFamily="49" charset="0"/>
+                <a:latin typeface="Segoe UI"/>
               </a:rPr>
               <a:t>Î</a:t>
             </a:r>
             <a:r>
-              <a:rPr sz="1600" b="0" i="0" dirty="0" smtClean="0">
-                <a:solidFill>
-                  <a:srgbClr val="2F3338"/>
-                </a:solidFill>
-                <a:latin typeface="Consolas" panose="020B0609020204030204" pitchFamily="49" charset="0"/>
+              <a:rPr sz="1600" dirty="0">
+                <a:solidFill>
+                  <a:srgbClr val="2F3338"/>
+                </a:solidFill>
+                <a:latin typeface="Segoe UI"/>
               </a:rPr>
               <a:t>n </a:t>
             </a:r>
             <a:r>
-              <a:rPr sz="1600" b="0" i="0" dirty="0" err="1">
-                <a:solidFill>
-                  <a:srgbClr val="2F3338"/>
-                </a:solidFill>
-                <a:latin typeface="Consolas" panose="020B0609020204030204" pitchFamily="49" charset="0"/>
+              <a:rPr sz="1600" dirty="0" err="1">
+                <a:solidFill>
+                  <a:srgbClr val="2F3338"/>
+                </a:solidFill>
+                <a:latin typeface="Segoe UI"/>
               </a:rPr>
               <a:t>proiecte</a:t>
             </a:r>
             <a:r>
-              <a:rPr sz="1600" b="0" i="0" dirty="0">
-                <a:solidFill>
-                  <a:srgbClr val="2F3338"/>
-                </a:solidFill>
-                <a:latin typeface="Consolas" panose="020B0609020204030204" pitchFamily="49" charset="0"/>
-              </a:rPr>
-              <a:t> </a:t>
-            </a:r>
-            <a:r>
-              <a:rPr sz="1600" b="0" i="0" dirty="0" err="1">
-                <a:solidFill>
-                  <a:srgbClr val="2F3338"/>
-                </a:solidFill>
-                <a:latin typeface="Consolas" panose="020B0609020204030204" pitchFamily="49" charset="0"/>
+              <a:rPr sz="1600" dirty="0">
+                <a:solidFill>
+                  <a:srgbClr val="2F3338"/>
+                </a:solidFill>
+                <a:latin typeface="Segoe UI"/>
+              </a:rPr>
+              <a:t> </a:t>
+            </a:r>
+            <a:r>
+              <a:rPr sz="1600" dirty="0" err="1">
+                <a:solidFill>
+                  <a:srgbClr val="2F3338"/>
+                </a:solidFill>
+                <a:latin typeface="Segoe UI"/>
               </a:rPr>
               <a:t>reale</a:t>
             </a:r>
             <a:r>
-              <a:rPr sz="1600" b="0" i="0" dirty="0">
-                <a:solidFill>
-                  <a:srgbClr val="2F3338"/>
-                </a:solidFill>
-                <a:latin typeface="Consolas" panose="020B0609020204030204" pitchFamily="49" charset="0"/>
+              <a:rPr sz="1600" dirty="0">
+                <a:solidFill>
+                  <a:srgbClr val="2F3338"/>
+                </a:solidFill>
+                <a:latin typeface="Segoe UI"/>
               </a:rPr>
               <a:t>, </a:t>
             </a:r>
             <a:r>
-              <a:rPr sz="1600" b="0" i="0" dirty="0" err="1">
-                <a:solidFill>
-                  <a:srgbClr val="2F3338"/>
-                </a:solidFill>
-                <a:latin typeface="Consolas" panose="020B0609020204030204" pitchFamily="49" charset="0"/>
+              <a:rPr sz="1600" dirty="0" err="1">
+                <a:solidFill>
+                  <a:srgbClr val="2F3338"/>
+                </a:solidFill>
+                <a:latin typeface="Segoe UI"/>
               </a:rPr>
               <a:t>codul</a:t>
             </a:r>
             <a:r>
-              <a:rPr sz="1600" b="0" i="0" dirty="0">
-                <a:solidFill>
-                  <a:srgbClr val="2F3338"/>
-                </a:solidFill>
-                <a:latin typeface="Consolas" panose="020B0609020204030204" pitchFamily="49" charset="0"/>
-              </a:rPr>
-              <a:t> </a:t>
-            </a:r>
-            <a:r>
-              <a:rPr sz="1600" b="0" i="0" dirty="0" err="1">
-                <a:solidFill>
-                  <a:srgbClr val="2F3338"/>
-                </a:solidFill>
-                <a:latin typeface="Consolas" panose="020B0609020204030204" pitchFamily="49" charset="0"/>
+              <a:rPr sz="1600" dirty="0">
+                <a:solidFill>
+                  <a:srgbClr val="2F3338"/>
+                </a:solidFill>
+                <a:latin typeface="Segoe UI"/>
+              </a:rPr>
+              <a:t> </a:t>
+            </a:r>
+            <a:r>
+              <a:rPr sz="1600" dirty="0" err="1">
+                <a:solidFill>
+                  <a:srgbClr val="2F3338"/>
+                </a:solidFill>
+                <a:latin typeface="Segoe UI"/>
               </a:rPr>
               <a:t>poate</a:t>
             </a:r>
             <a:r>
-              <a:rPr sz="1600" b="0" i="0" dirty="0">
-                <a:solidFill>
-                  <a:srgbClr val="2F3338"/>
-                </a:solidFill>
-                <a:latin typeface="Consolas" panose="020B0609020204030204" pitchFamily="49" charset="0"/>
-              </a:rPr>
-              <a:t> </a:t>
-            </a:r>
-            <a:r>
-              <a:rPr sz="1600" b="0" i="0" dirty="0" smtClean="0">
-                <a:solidFill>
-                  <a:srgbClr val="2F3338"/>
-                </a:solidFill>
-                <a:latin typeface="Consolas" panose="020B0609020204030204" pitchFamily="49" charset="0"/>
+              <a:rPr sz="1600" dirty="0">
+                <a:solidFill>
+                  <a:srgbClr val="2F3338"/>
+                </a:solidFill>
+                <a:latin typeface="Segoe UI"/>
+              </a:rPr>
+              <a:t> </a:t>
+            </a:r>
+            <a:r>
+              <a:rPr sz="1600" dirty="0">
+                <a:solidFill>
+                  <a:srgbClr val="2F3338"/>
+                </a:solidFill>
+                <a:latin typeface="Segoe UI"/>
               </a:rPr>
               <a:t>p</a:t>
             </a:r>
             <a:r>
-              <a:rPr lang="ro-RO" sz="1600" b="0" i="0" dirty="0" smtClean="0">
-                <a:solidFill>
-                  <a:srgbClr val="2F3338"/>
-                </a:solidFill>
-                <a:latin typeface="Consolas" panose="020B0609020204030204" pitchFamily="49" charset="0"/>
+              <a:rPr lang="ro-RO" sz="1600" dirty="0">
+                <a:solidFill>
+                  <a:srgbClr val="2F3338"/>
+                </a:solidFill>
+                <a:latin typeface="Segoe UI"/>
               </a:rPr>
               <a:t>ă</a:t>
             </a:r>
             <a:r>
-              <a:rPr sz="1600" b="0" i="0" dirty="0" err="1" smtClean="0">
-                <a:solidFill>
-                  <a:srgbClr val="2F3338"/>
-                </a:solidFill>
-                <a:latin typeface="Consolas" panose="020B0609020204030204" pitchFamily="49" charset="0"/>
+              <a:rPr sz="1600" dirty="0" err="1">
+                <a:solidFill>
+                  <a:srgbClr val="2F3338"/>
+                </a:solidFill>
+                <a:latin typeface="Segoe UI"/>
               </a:rPr>
               <a:t>rea</a:t>
             </a:r>
             <a:r>
-              <a:rPr sz="1600" b="0" i="0" dirty="0" smtClean="0">
-                <a:solidFill>
-                  <a:srgbClr val="2F3338"/>
-                </a:solidFill>
-                <a:latin typeface="Consolas" panose="020B0609020204030204" pitchFamily="49" charset="0"/>
-              </a:rPr>
-              <a:t> </a:t>
-            </a:r>
-            <a:r>
-              <a:rPr sz="1600" b="0" i="0" dirty="0" err="1">
-                <a:solidFill>
-                  <a:srgbClr val="2F3338"/>
-                </a:solidFill>
-                <a:latin typeface="Consolas" panose="020B0609020204030204" pitchFamily="49" charset="0"/>
+              <a:rPr sz="1600" dirty="0">
+                <a:solidFill>
+                  <a:srgbClr val="2F3338"/>
+                </a:solidFill>
+                <a:latin typeface="Segoe UI"/>
+              </a:rPr>
+              <a:t> </a:t>
+            </a:r>
+            <a:r>
+              <a:rPr sz="1600" dirty="0" err="1">
+                <a:solidFill>
+                  <a:srgbClr val="2F3338"/>
+                </a:solidFill>
+                <a:latin typeface="Segoe UI"/>
               </a:rPr>
               <a:t>corect</a:t>
             </a:r>
             <a:r>
-              <a:rPr sz="1600" b="0" i="0" dirty="0">
-                <a:solidFill>
-                  <a:srgbClr val="2F3338"/>
-                </a:solidFill>
-                <a:latin typeface="Consolas" panose="020B0609020204030204" pitchFamily="49" charset="0"/>
+              <a:rPr sz="1600" dirty="0">
+                <a:solidFill>
+                  <a:srgbClr val="2F3338"/>
+                </a:solidFill>
+                <a:latin typeface="Segoe UI"/>
               </a:rPr>
               <a:t> pe </a:t>
             </a:r>
             <a:r>
-              <a:rPr sz="1600" b="0" i="0" dirty="0" err="1">
-                <a:solidFill>
-                  <a:srgbClr val="2F3338"/>
-                </a:solidFill>
-                <a:latin typeface="Consolas" panose="020B0609020204030204" pitchFamily="49" charset="0"/>
+              <a:rPr sz="1600" dirty="0" err="1">
+                <a:solidFill>
+                  <a:srgbClr val="2F3338"/>
+                </a:solidFill>
+                <a:latin typeface="Segoe UI"/>
               </a:rPr>
               <a:t>exemplele</a:t>
             </a:r>
             <a:r>
-              <a:rPr sz="1600" b="0" i="0" dirty="0">
-                <a:solidFill>
-                  <a:srgbClr val="2F3338"/>
-                </a:solidFill>
-                <a:latin typeface="Consolas" panose="020B0609020204030204" pitchFamily="49" charset="0"/>
-              </a:rPr>
-              <a:t> </a:t>
-            </a:r>
-            <a:r>
-              <a:rPr sz="1600" b="0" i="0" dirty="0" err="1">
-                <a:solidFill>
-                  <a:srgbClr val="2F3338"/>
-                </a:solidFill>
-                <a:latin typeface="Consolas" panose="020B0609020204030204" pitchFamily="49" charset="0"/>
+              <a:rPr sz="1600" dirty="0">
+                <a:solidFill>
+                  <a:srgbClr val="2F3338"/>
+                </a:solidFill>
+                <a:latin typeface="Segoe UI"/>
+              </a:rPr>
+              <a:t> </a:t>
+            </a:r>
+            <a:r>
+              <a:rPr sz="1600" dirty="0" err="1">
+                <a:solidFill>
+                  <a:srgbClr val="2F3338"/>
+                </a:solidFill>
+                <a:latin typeface="Segoe UI"/>
               </a:rPr>
               <a:t>alese</a:t>
             </a:r>
             <a:r>
-              <a:rPr sz="1600" b="0" i="0" dirty="0">
-                <a:solidFill>
-                  <a:srgbClr val="2F3338"/>
-                </a:solidFill>
-                <a:latin typeface="Consolas" panose="020B0609020204030204" pitchFamily="49" charset="0"/>
+              <a:rPr sz="1600" dirty="0">
+                <a:solidFill>
+                  <a:srgbClr val="2F3338"/>
+                </a:solidFill>
+                <a:latin typeface="Segoe UI"/>
               </a:rPr>
               <a:t> manual, </a:t>
             </a:r>
             <a:r>
-              <a:rPr sz="1600" b="0" i="0" dirty="0" err="1">
-                <a:solidFill>
-                  <a:srgbClr val="2F3338"/>
-                </a:solidFill>
-                <a:latin typeface="Consolas" panose="020B0609020204030204" pitchFamily="49" charset="0"/>
+              <a:rPr sz="1600" dirty="0" err="1">
+                <a:solidFill>
+                  <a:srgbClr val="2F3338"/>
+                </a:solidFill>
+                <a:latin typeface="Segoe UI"/>
               </a:rPr>
               <a:t>dar</a:t>
             </a:r>
             <a:r>
-              <a:rPr sz="1600" b="0" i="0" dirty="0">
-                <a:solidFill>
-                  <a:srgbClr val="2F3338"/>
-                </a:solidFill>
-                <a:latin typeface="Consolas" panose="020B0609020204030204" pitchFamily="49" charset="0"/>
-              </a:rPr>
-              <a:t> </a:t>
-            </a:r>
-            <a:r>
-              <a:rPr sz="1600" b="0" i="0" dirty="0" smtClean="0">
-                <a:solidFill>
-                  <a:srgbClr val="2F3338"/>
-                </a:solidFill>
-                <a:latin typeface="Consolas" panose="020B0609020204030204" pitchFamily="49" charset="0"/>
+              <a:rPr sz="1600" dirty="0">
+                <a:solidFill>
+                  <a:srgbClr val="2F3338"/>
+                </a:solidFill>
+                <a:latin typeface="Segoe UI"/>
+              </a:rPr>
+              <a:t> </a:t>
+            </a:r>
+            <a:r>
+              <a:rPr sz="1600" dirty="0">
+                <a:solidFill>
+                  <a:srgbClr val="2F3338"/>
+                </a:solidFill>
+                <a:latin typeface="Segoe UI"/>
               </a:rPr>
               <a:t>s</a:t>
             </a:r>
             <a:r>
-              <a:rPr lang="ro-RO" sz="1600" b="0" i="0" dirty="0" smtClean="0">
-                <a:solidFill>
-                  <a:srgbClr val="2F3338"/>
-                </a:solidFill>
-                <a:latin typeface="Consolas" panose="020B0609020204030204" pitchFamily="49" charset="0"/>
+              <a:rPr lang="ro-RO" sz="1600" dirty="0">
+                <a:solidFill>
+                  <a:srgbClr val="2F3338"/>
+                </a:solidFill>
+                <a:latin typeface="Segoe UI"/>
               </a:rPr>
               <a:t>ă</a:t>
             </a:r>
             <a:r>
-              <a:rPr sz="1600" b="0" i="0" dirty="0" smtClean="0">
-                <a:solidFill>
-                  <a:srgbClr val="2F3338"/>
-                </a:solidFill>
-                <a:latin typeface="Consolas" panose="020B0609020204030204" pitchFamily="49" charset="0"/>
+              <a:rPr sz="1600" dirty="0">
+                <a:solidFill>
+                  <a:srgbClr val="2F3338"/>
+                </a:solidFill>
+                <a:latin typeface="Segoe UI"/>
               </a:rPr>
               <a:t> e</a:t>
             </a:r>
             <a:r>
-              <a:rPr lang="ro-RO" sz="1600" b="0" i="0" dirty="0" smtClean="0">
-                <a:solidFill>
-                  <a:srgbClr val="2F3338"/>
-                </a:solidFill>
-                <a:latin typeface="Consolas" panose="020B0609020204030204" pitchFamily="49" charset="0"/>
+              <a:rPr lang="ro-RO" sz="1600" dirty="0">
+                <a:solidFill>
+                  <a:srgbClr val="2F3338"/>
+                </a:solidFill>
+                <a:latin typeface="Segoe UI"/>
               </a:rPr>
               <a:t>ș</a:t>
             </a:r>
             <a:r>
-              <a:rPr sz="1600" b="0" i="0" dirty="0" err="1" smtClean="0">
-                <a:solidFill>
-                  <a:srgbClr val="2F3338"/>
-                </a:solidFill>
-                <a:latin typeface="Consolas" panose="020B0609020204030204" pitchFamily="49" charset="0"/>
+              <a:rPr sz="1600" dirty="0" err="1">
+                <a:solidFill>
+                  <a:srgbClr val="2F3338"/>
+                </a:solidFill>
+                <a:latin typeface="Segoe UI"/>
               </a:rPr>
               <a:t>ueze</a:t>
             </a:r>
             <a:r>
-              <a:rPr sz="1600" b="0" i="0" dirty="0" smtClean="0">
-                <a:solidFill>
-                  <a:srgbClr val="2F3338"/>
-                </a:solidFill>
-                <a:latin typeface="Consolas" panose="020B0609020204030204" pitchFamily="49" charset="0"/>
-              </a:rPr>
-              <a:t> </a:t>
-            </a:r>
-            <a:r>
-              <a:rPr sz="1600" b="0" i="0" dirty="0">
-                <a:solidFill>
-                  <a:srgbClr val="2F3338"/>
-                </a:solidFill>
-                <a:latin typeface="Consolas" panose="020B0609020204030204" pitchFamily="49" charset="0"/>
+              <a:rPr sz="1600" dirty="0">
+                <a:solidFill>
+                  <a:srgbClr val="2F3338"/>
+                </a:solidFill>
+                <a:latin typeface="Segoe UI"/>
+              </a:rPr>
+              <a:t> </a:t>
+            </a:r>
+            <a:r>
+              <a:rPr sz="1600" dirty="0">
+                <a:solidFill>
+                  <a:srgbClr val="2F3338"/>
+                </a:solidFill>
+                <a:latin typeface="Segoe UI"/>
               </a:rPr>
               <a:t>pe </a:t>
             </a:r>
             <a:r>
-              <a:rPr sz="1600" b="0" i="0" dirty="0" err="1">
-                <a:solidFill>
-                  <a:srgbClr val="2F3338"/>
-                </a:solidFill>
-                <a:latin typeface="Consolas" panose="020B0609020204030204" pitchFamily="49" charset="0"/>
+              <a:rPr sz="1600" dirty="0" err="1">
+                <a:solidFill>
+                  <a:srgbClr val="2F3338"/>
+                </a:solidFill>
+                <a:latin typeface="Segoe UI"/>
               </a:rPr>
               <a:t>cazuri</a:t>
             </a:r>
             <a:r>
-              <a:rPr sz="1600" b="0" i="0" dirty="0">
-                <a:solidFill>
-                  <a:srgbClr val="2F3338"/>
-                </a:solidFill>
-                <a:latin typeface="Consolas" panose="020B0609020204030204" pitchFamily="49" charset="0"/>
-              </a:rPr>
-              <a:t> </a:t>
-            </a:r>
-            <a:r>
-              <a:rPr sz="1600" b="0" i="0" dirty="0" smtClean="0">
-                <a:solidFill>
-                  <a:srgbClr val="2F3338"/>
-                </a:solidFill>
-                <a:latin typeface="Consolas" panose="020B0609020204030204" pitchFamily="49" charset="0"/>
+              <a:rPr sz="1600" dirty="0">
+                <a:solidFill>
+                  <a:srgbClr val="2F3338"/>
+                </a:solidFill>
+                <a:latin typeface="Segoe UI"/>
+              </a:rPr>
+              <a:t> </a:t>
+            </a:r>
+            <a:r>
+              <a:rPr sz="1600" dirty="0">
+                <a:solidFill>
+                  <a:srgbClr val="2F3338"/>
+                </a:solidFill>
+                <a:latin typeface="Segoe UI"/>
               </a:rPr>
               <a:t>limit</a:t>
             </a:r>
             <a:r>
-              <a:rPr lang="ro-RO" sz="1600" b="0" i="0" dirty="0" smtClean="0">
-                <a:solidFill>
-                  <a:srgbClr val="2F3338"/>
-                </a:solidFill>
-                <a:latin typeface="Consolas" panose="020B0609020204030204" pitchFamily="49" charset="0"/>
+              <a:rPr lang="ro-RO" sz="1600" dirty="0">
+                <a:solidFill>
+                  <a:srgbClr val="2F3338"/>
+                </a:solidFill>
+                <a:latin typeface="Segoe UI"/>
               </a:rPr>
               <a:t>ă</a:t>
             </a:r>
             <a:r>
-              <a:rPr sz="1600" b="0" i="0" dirty="0" smtClean="0">
-                <a:solidFill>
-                  <a:srgbClr val="2F3338"/>
-                </a:solidFill>
-                <a:latin typeface="Consolas" panose="020B0609020204030204" pitchFamily="49" charset="0"/>
+              <a:rPr sz="1600" dirty="0">
+                <a:solidFill>
+                  <a:srgbClr val="2F3338"/>
+                </a:solidFill>
+                <a:latin typeface="Segoe UI"/>
               </a:rPr>
               <a:t>.</a:t>
             </a:r>
-            <a:endParaRPr sz="1600" b="0" i="0" dirty="0">
-              <a:solidFill>
-                <a:srgbClr val="2F3338"/>
-              </a:solidFill>
-              <a:latin typeface="Consolas" panose="020B0609020204030204" pitchFamily="49" charset="0"/>
-            </a:endParaRPr>
           </a:p>
           <a:p>
             <a:pPr algn="l">
@@ -19299,137 +19919,137 @@
               </a:spcAft>
             </a:pPr>
             <a:r>
-              <a:rPr sz="1600" b="0" i="0" dirty="0" err="1">
-                <a:solidFill>
-                  <a:srgbClr val="2F3338"/>
-                </a:solidFill>
-                <a:latin typeface="Consolas" panose="020B0609020204030204" pitchFamily="49" charset="0"/>
+              <a:rPr sz="1600" dirty="0" err="1">
+                <a:solidFill>
+                  <a:srgbClr val="2F3338"/>
+                </a:solidFill>
+                <a:latin typeface="Segoe UI"/>
               </a:rPr>
               <a:t>Metodele</a:t>
             </a:r>
             <a:r>
-              <a:rPr sz="1600" b="0" i="0" dirty="0">
-                <a:solidFill>
-                  <a:srgbClr val="2F3338"/>
-                </a:solidFill>
-                <a:latin typeface="Consolas" panose="020B0609020204030204" pitchFamily="49" charset="0"/>
-              </a:rPr>
-              <a:t> </a:t>
-            </a:r>
-            <a:r>
-              <a:rPr sz="1600" b="0" i="0" dirty="0" err="1">
-                <a:solidFill>
-                  <a:srgbClr val="2F3338"/>
-                </a:solidFill>
-                <a:latin typeface="Consolas" panose="020B0609020204030204" pitchFamily="49" charset="0"/>
+              <a:rPr sz="1600" dirty="0">
+                <a:solidFill>
+                  <a:srgbClr val="2F3338"/>
+                </a:solidFill>
+                <a:latin typeface="Segoe UI"/>
+              </a:rPr>
+              <a:t> </a:t>
+            </a:r>
+            <a:r>
+              <a:rPr sz="1600" dirty="0" err="1">
+                <a:solidFill>
+                  <a:srgbClr val="2F3338"/>
+                </a:solidFill>
+                <a:latin typeface="Segoe UI"/>
               </a:rPr>
               <a:t>formale</a:t>
             </a:r>
             <a:r>
-              <a:rPr sz="1600" b="0" i="0" dirty="0">
-                <a:solidFill>
-                  <a:srgbClr val="2F3338"/>
-                </a:solidFill>
-                <a:latin typeface="Consolas" panose="020B0609020204030204" pitchFamily="49" charset="0"/>
+              <a:rPr sz="1600" dirty="0">
+                <a:solidFill>
+                  <a:srgbClr val="2F3338"/>
+                </a:solidFill>
+                <a:latin typeface="Segoe UI"/>
               </a:rPr>
               <a:t> ne </a:t>
             </a:r>
             <a:r>
-              <a:rPr sz="1600" b="0" i="0" dirty="0" err="1" smtClean="0">
-                <a:solidFill>
-                  <a:srgbClr val="2F3338"/>
-                </a:solidFill>
-                <a:latin typeface="Consolas" panose="020B0609020204030204" pitchFamily="49" charset="0"/>
+              <a:rPr sz="1600" dirty="0" err="1">
+                <a:solidFill>
+                  <a:srgbClr val="2F3338"/>
+                </a:solidFill>
+                <a:latin typeface="Segoe UI"/>
               </a:rPr>
               <a:t>ajut</a:t>
             </a:r>
             <a:r>
-              <a:rPr lang="ro-RO" sz="1600" b="0" i="0" dirty="0" smtClean="0">
-                <a:solidFill>
-                  <a:srgbClr val="2F3338"/>
-                </a:solidFill>
-                <a:latin typeface="Consolas" panose="020B0609020204030204" pitchFamily="49" charset="0"/>
+              <a:rPr lang="ro-RO" sz="1600" dirty="0">
+                <a:solidFill>
+                  <a:srgbClr val="2F3338"/>
+                </a:solidFill>
+                <a:latin typeface="Segoe UI"/>
               </a:rPr>
               <a:t>ă</a:t>
             </a:r>
             <a:r>
-              <a:rPr sz="1600" b="0" i="0" dirty="0" smtClean="0">
-                <a:solidFill>
-                  <a:srgbClr val="2F3338"/>
-                </a:solidFill>
-                <a:latin typeface="Consolas" panose="020B0609020204030204" pitchFamily="49" charset="0"/>
+              <a:rPr sz="1600" dirty="0">
+                <a:solidFill>
+                  <a:srgbClr val="2F3338"/>
+                </a:solidFill>
+                <a:latin typeface="Segoe UI"/>
               </a:rPr>
               <a:t> s</a:t>
             </a:r>
             <a:r>
-              <a:rPr lang="ro-RO" sz="1600" b="0" i="0" dirty="0" smtClean="0">
-                <a:solidFill>
-                  <a:srgbClr val="2F3338"/>
-                </a:solidFill>
-                <a:latin typeface="Consolas" panose="020B0609020204030204" pitchFamily="49" charset="0"/>
+              <a:rPr lang="ro-RO" sz="1600" dirty="0">
+                <a:solidFill>
+                  <a:srgbClr val="2F3338"/>
+                </a:solidFill>
+                <a:latin typeface="Segoe UI"/>
               </a:rPr>
               <a:t>ă</a:t>
             </a:r>
             <a:r>
-              <a:rPr sz="1600" b="0" i="0" dirty="0" smtClean="0">
-                <a:solidFill>
-                  <a:srgbClr val="2F3338"/>
-                </a:solidFill>
-                <a:latin typeface="Consolas" panose="020B0609020204030204" pitchFamily="49" charset="0"/>
-              </a:rPr>
-              <a:t> </a:t>
-            </a:r>
-            <a:r>
-              <a:rPr sz="1600" b="0" i="0" dirty="0" err="1">
-                <a:solidFill>
-                  <a:srgbClr val="2F3338"/>
-                </a:solidFill>
-                <a:latin typeface="Consolas" panose="020B0609020204030204" pitchFamily="49" charset="0"/>
+              <a:rPr sz="1600" dirty="0">
+                <a:solidFill>
+                  <a:srgbClr val="2F3338"/>
+                </a:solidFill>
+                <a:latin typeface="Segoe UI"/>
+              </a:rPr>
+              <a:t> </a:t>
+            </a:r>
+            <a:r>
+              <a:rPr sz="1600" dirty="0" err="1">
+                <a:solidFill>
+                  <a:srgbClr val="2F3338"/>
+                </a:solidFill>
+                <a:latin typeface="Segoe UI"/>
               </a:rPr>
               <a:t>definim</a:t>
             </a:r>
             <a:r>
-              <a:rPr sz="1600" b="0" i="0" dirty="0">
-                <a:solidFill>
-                  <a:srgbClr val="2F3338"/>
-                </a:solidFill>
-                <a:latin typeface="Consolas" panose="020B0609020204030204" pitchFamily="49" charset="0"/>
-              </a:rPr>
-              <a:t> </a:t>
-            </a:r>
-            <a:r>
-              <a:rPr sz="1600" b="0" i="0" dirty="0" err="1">
-                <a:solidFill>
-                  <a:srgbClr val="2F3338"/>
-                </a:solidFill>
-                <a:latin typeface="Consolas" panose="020B0609020204030204" pitchFamily="49" charset="0"/>
+              <a:rPr sz="1600" dirty="0">
+                <a:solidFill>
+                  <a:srgbClr val="2F3338"/>
+                </a:solidFill>
+                <a:latin typeface="Segoe UI"/>
+              </a:rPr>
+              <a:t> </a:t>
+            </a:r>
+            <a:r>
+              <a:rPr sz="1600" dirty="0" err="1">
+                <a:solidFill>
+                  <a:srgbClr val="2F3338"/>
+                </a:solidFill>
+                <a:latin typeface="Segoe UI"/>
               </a:rPr>
               <a:t>clar</a:t>
             </a:r>
             <a:r>
-              <a:rPr sz="1600" b="0" i="0" dirty="0">
-                <a:solidFill>
-                  <a:srgbClr val="2F3338"/>
-                </a:solidFill>
-                <a:latin typeface="Consolas" panose="020B0609020204030204" pitchFamily="49" charset="0"/>
-              </a:rPr>
-              <a:t> </a:t>
-            </a:r>
-            <a:r>
-              <a:rPr sz="1600" b="0" i="0" dirty="0" err="1">
-                <a:solidFill>
-                  <a:srgbClr val="2F3338"/>
-                </a:solidFill>
-                <a:latin typeface="Consolas" panose="020B0609020204030204" pitchFamily="49" charset="0"/>
+              <a:rPr sz="1600" dirty="0">
+                <a:solidFill>
+                  <a:srgbClr val="2F3338"/>
+                </a:solidFill>
+                <a:latin typeface="Segoe UI"/>
+              </a:rPr>
+              <a:t> </a:t>
+            </a:r>
+            <a:r>
+              <a:rPr sz="1600" dirty="0" err="1">
+                <a:solidFill>
+                  <a:srgbClr val="2F3338"/>
+                </a:solidFill>
+                <a:latin typeface="Segoe UI"/>
               </a:rPr>
               <a:t>ce</a:t>
             </a:r>
             <a:r>
-              <a:rPr sz="1600" b="0" i="0" dirty="0">
-                <a:solidFill>
-                  <a:srgbClr val="2F3338"/>
-                </a:solidFill>
-                <a:latin typeface="Consolas" panose="020B0609020204030204" pitchFamily="49" charset="0"/>
+              <a:rPr sz="1600" dirty="0">
+                <a:solidFill>
+                  <a:srgbClr val="2F3338"/>
+                </a:solidFill>
+                <a:latin typeface="Segoe UI"/>
               </a:rPr>
               <a:t> </a:t>
             </a:r>
@@ -19438,73 +20058,95 @@
                 <a:solidFill>
                   <a:srgbClr val="2F3338"/>
                 </a:solidFill>
-                <a:latin typeface="Consolas" panose="020B0609020204030204" pitchFamily="49" charset="0"/>
+                <a:latin typeface="Segoe UI"/>
               </a:rPr>
               <a:t>î</a:t>
             </a:r>
             <a:r>
-              <a:rPr sz="1600" b="0" i="0" dirty="0" err="1" smtClean="0">
-                <a:solidFill>
-                  <a:srgbClr val="2F3338"/>
-                </a:solidFill>
-                <a:latin typeface="Consolas" panose="020B0609020204030204" pitchFamily="49" charset="0"/>
+              <a:rPr sz="1600" dirty="0" err="1">
+                <a:solidFill>
+                  <a:srgbClr val="2F3338"/>
+                </a:solidFill>
+                <a:latin typeface="Segoe UI"/>
               </a:rPr>
               <a:t>nseamn</a:t>
             </a:r>
             <a:r>
-              <a:rPr lang="ro-RO" sz="1600" b="0" i="0" dirty="0" smtClean="0">
-                <a:solidFill>
-                  <a:srgbClr val="2F3338"/>
-                </a:solidFill>
-                <a:latin typeface="Consolas" panose="020B0609020204030204" pitchFamily="49" charset="0"/>
+              <a:rPr lang="ro-RO" sz="1600" dirty="0">
+                <a:solidFill>
+                  <a:srgbClr val="2F3338"/>
+                </a:solidFill>
+                <a:latin typeface="Segoe UI"/>
               </a:rPr>
               <a:t>ă</a:t>
             </a:r>
             <a:r>
-              <a:rPr sz="1600" b="0" i="0" dirty="0" smtClean="0">
-                <a:solidFill>
-                  <a:srgbClr val="2F3338"/>
-                </a:solidFill>
-                <a:latin typeface="Consolas" panose="020B0609020204030204" pitchFamily="49" charset="0"/>
-              </a:rPr>
-              <a:t> </a:t>
-            </a:r>
-            <a:r>
-              <a:rPr sz="1600" b="0" i="0" dirty="0" err="1">
-                <a:solidFill>
-                  <a:srgbClr val="2F3338"/>
-                </a:solidFill>
-                <a:latin typeface="Consolas" panose="020B0609020204030204" pitchFamily="49" charset="0"/>
+              <a:rPr sz="1600" dirty="0">
+                <a:solidFill>
+                  <a:srgbClr val="2F3338"/>
+                </a:solidFill>
+                <a:latin typeface="Segoe UI"/>
+              </a:rPr>
+              <a:t> </a:t>
+            </a:r>
+            <a:r>
+              <a:rPr sz="1600" dirty="0" err="1">
+                <a:solidFill>
+                  <a:srgbClr val="2F3338"/>
+                </a:solidFill>
+                <a:latin typeface="Segoe UI"/>
               </a:rPr>
               <a:t>corectitudinea</a:t>
             </a:r>
             <a:r>
-              <a:rPr sz="1600" b="0" i="0" dirty="0">
-                <a:solidFill>
-                  <a:srgbClr val="2F3338"/>
-                </a:solidFill>
-                <a:latin typeface="Consolas" panose="020B0609020204030204" pitchFamily="49" charset="0"/>
-              </a:rPr>
-              <a:t> </a:t>
-            </a:r>
-            <a:r>
-              <a:rPr sz="1600" b="0" i="0" dirty="0" err="1">
-                <a:solidFill>
-                  <a:srgbClr val="2F3338"/>
-                </a:solidFill>
-                <a:latin typeface="Consolas" panose="020B0609020204030204" pitchFamily="49" charset="0"/>
-              </a:rPr>
-              <a:t>sistemului</a:t>
-            </a:r>
-            <a:r>
-              <a:rPr sz="1600" b="0" i="0" dirty="0">
-                <a:solidFill>
-                  <a:srgbClr val="2F3338"/>
-                </a:solidFill>
-                <a:latin typeface="Consolas" panose="020B0609020204030204" pitchFamily="49" charset="0"/>
-              </a:rPr>
-              <a:t>.</a:t>
-            </a:r>
+              <a:rPr sz="1600" dirty="0">
+                <a:solidFill>
+                  <a:srgbClr val="2F3338"/>
+                </a:solidFill>
+                <a:latin typeface="Segoe UI"/>
+              </a:rPr>
+              <a:t> </a:t>
+            </a:r>
+            <a:r>
+              <a:rPr sz="1600" dirty="0" err="1">
+                <a:solidFill>
+                  <a:srgbClr val="2F3338"/>
+                </a:solidFill>
+                <a:latin typeface="Segoe UI"/>
+              </a:rPr>
+              <a:t>sistemulu</a:t>
+            </a:r>
+            <a:r>
+              <a:rPr lang="ro-RO" sz="1600" dirty="0">
+                <a:solidFill>
+                  <a:srgbClr val="2F3338"/>
+                </a:solidFill>
+                <a:latin typeface="Segoe UI"/>
+              </a:rPr>
+              <a:t>i.</a:t>
+            </a:r>
+          </a:p>
+          <a:p>
+            <a:pPr>
+              <a:spcAft>
+                <a:spcPts val="200"/>
+              </a:spcAft>
+            </a:pPr>
+            <a:r>
+              <a:rPr lang="it-IT" sz="1600" dirty="0">
+                <a:solidFill>
+                  <a:srgbClr val="2F3338"/>
+                </a:solidFill>
+                <a:latin typeface="Segoe UI"/>
+              </a:rPr>
+              <a:t>Metodele formale ne permit să:</a:t>
+            </a:r>
+            <a:endParaRPr sz="1600" dirty="0">
+              <a:solidFill>
+                <a:srgbClr val="2F3338"/>
+              </a:solidFill>
+              <a:latin typeface="Segoe UI"/>
+            </a:endParaRPr>
           </a:p>
         </p:txBody>
       </p:sp>
@@ -19517,7 +20159,7 @@
         <p:spPr>
           <a:xfrm>
             <a:off x="1097280" y="2946400"/>
-            <a:ext cx="10058400" cy="2560320"/>
+            <a:ext cx="10058400" cy="1722805"/>
           </a:xfrm>
           <a:prstGeom prst="roundRect">
             <a:avLst/>
@@ -19566,8 +20208,8 @@
         </p:nvSpPr>
         <p:spPr>
           <a:xfrm>
-            <a:off x="1249680" y="3429000"/>
-            <a:ext cx="10421620" cy="1277273"/>
+            <a:off x="1249679" y="3022600"/>
+            <a:ext cx="9833188" cy="1646605"/>
           </a:xfrm>
           <a:prstGeom prst="rect">
             <a:avLst/>
@@ -19580,43 +20222,24 @@
           </a:bodyPr>
           <a:lstStyle/>
           <a:p>
-            <a:pPr algn="l">
-              <a:spcBef>
-                <a:spcPts val="0"/>
-              </a:spcBef>
+            <a:pPr marL="285750" indent="-285750">
               <a:spcAft>
                 <a:spcPts val="200"/>
               </a:spcAft>
+              <a:buFont typeface="Arial" pitchFamily="34" charset="0"/>
+              <a:buChar char="•"/>
             </a:pPr>
             <a:r>
-              <a:rPr b="0" i="0" dirty="0">
-                <a:solidFill>
-                  <a:srgbClr val="2F3338"/>
-                </a:solidFill>
-                <a:latin typeface="Segoe UI"/>
-              </a:rPr>
-              <a:t>- </a:t>
-            </a:r>
-            <a:r>
-              <a:rPr lang="ro-RO" dirty="0" err="1">
-                <a:solidFill>
-                  <a:srgbClr val="2F3338"/>
-                </a:solidFill>
-                <a:latin typeface="Segoe UI"/>
-              </a:rPr>
-              <a:t>C</a:t>
-            </a:r>
-            <a:r>
-              <a:rPr b="0" i="0" dirty="0" smtClean="0">
-                <a:solidFill>
-                  <a:srgbClr val="2F3338"/>
-                </a:solidFill>
-                <a:latin typeface="Segoe UI"/>
-              </a:rPr>
-              <a:t>e </a:t>
-            </a:r>
-            <a:r>
-              <a:rPr b="0" i="0" dirty="0" err="1" smtClean="0">
+              <a:rPr lang="ro-RO" sz="1600" dirty="0" smtClean="0">
+                <a:solidFill>
+                  <a:srgbClr val="2F3338"/>
+                </a:solidFill>
+                <a:latin typeface="Segoe UI"/>
+              </a:rPr>
+              <a:t>Definim </a:t>
+            </a:r>
+            <a:r>
+              <a:rPr sz="1600" b="0" i="0" dirty="0" err="1" smtClean="0">
                 <a:solidFill>
                   <a:srgbClr val="2F3338"/>
                 </a:solidFill>
@@ -19625,7 +20248,7 @@
               <a:t>propriet</a:t>
             </a:r>
             <a:r>
-              <a:rPr lang="ro-RO" b="0" i="0" dirty="0" smtClean="0">
+              <a:rPr lang="ro-RO" sz="1600" b="0" i="0" dirty="0" smtClean="0">
                 <a:solidFill>
                   <a:srgbClr val="2F3338"/>
                 </a:solidFill>
@@ -19634,7 +20257,7 @@
               <a:t>ă</a:t>
             </a:r>
             <a:r>
-              <a:rPr lang="ro-RO" dirty="0">
+              <a:rPr lang="ro-RO" sz="1600" dirty="0">
                 <a:solidFill>
                   <a:srgbClr val="2F3338"/>
                 </a:solidFill>
@@ -19643,7 +20266,7 @@
               <a:t>ț</a:t>
             </a:r>
             <a:r>
-              <a:rPr b="0" i="0" dirty="0" smtClean="0">
+              <a:rPr sz="1600" b="0" i="0" dirty="0" smtClean="0">
                 <a:solidFill>
                   <a:srgbClr val="2F3338"/>
                 </a:solidFill>
@@ -19652,7 +20275,16 @@
               <a:t>i </a:t>
             </a:r>
             <a:r>
-              <a:rPr b="0" i="0" dirty="0" err="1">
+              <a:rPr lang="ro-RO" sz="1600" b="0" i="0" dirty="0" smtClean="0">
+                <a:solidFill>
+                  <a:srgbClr val="2F3338"/>
+                </a:solidFill>
+                <a:latin typeface="Segoe UI"/>
+              </a:rPr>
+              <a:t>care </a:t>
+            </a:r>
+            <a:r>
+              <a:rPr sz="1600" b="0" i="0" dirty="0" err="1" smtClean="0">
                 <a:solidFill>
                   <a:srgbClr val="2F3338"/>
                 </a:solidFill>
@@ -19661,16 +20293,16 @@
               <a:t>trebuie</a:t>
             </a:r>
             <a:r>
-              <a:rPr b="0" i="0" dirty="0">
-                <a:solidFill>
-                  <a:srgbClr val="2F3338"/>
-                </a:solidFill>
-                <a:latin typeface="Segoe UI"/>
-              </a:rPr>
-              <a:t> </a:t>
-            </a:r>
-            <a:r>
-              <a:rPr b="0" i="0" dirty="0" smtClean="0">
+              <a:rPr sz="1600" b="0" i="0" dirty="0" smtClean="0">
+                <a:solidFill>
+                  <a:srgbClr val="2F3338"/>
+                </a:solidFill>
+                <a:latin typeface="Segoe UI"/>
+              </a:rPr>
+              <a:t> </a:t>
+            </a:r>
+            <a:r>
+              <a:rPr sz="1600" b="0" i="0" dirty="0" smtClean="0">
                 <a:solidFill>
                   <a:srgbClr val="2F3338"/>
                 </a:solidFill>
@@ -19679,7 +20311,7 @@
               <a:t>s</a:t>
             </a:r>
             <a:r>
-              <a:rPr lang="ro-RO" b="0" i="0" dirty="0" smtClean="0">
+              <a:rPr lang="ro-RO" sz="1600" b="0" i="0" dirty="0" smtClean="0">
                 <a:solidFill>
                   <a:srgbClr val="2F3338"/>
                 </a:solidFill>
@@ -19688,16 +20320,16 @@
               <a:t>ă</a:t>
             </a:r>
             <a:r>
-              <a:rPr b="0" i="0" dirty="0" smtClean="0">
-                <a:solidFill>
-                  <a:srgbClr val="2F3338"/>
-                </a:solidFill>
-                <a:latin typeface="Segoe UI"/>
-              </a:rPr>
-              <a:t> </a:t>
-            </a:r>
-            <a:r>
-              <a:rPr lang="ro-RO" dirty="0" smtClean="0">
+              <a:rPr sz="1600" b="0" i="0" dirty="0" smtClean="0">
+                <a:solidFill>
+                  <a:srgbClr val="2F3338"/>
+                </a:solidFill>
+                <a:latin typeface="Segoe UI"/>
+              </a:rPr>
+              <a:t> </a:t>
+            </a:r>
+            <a:r>
+              <a:rPr lang="ro-RO" sz="1600" dirty="0" smtClean="0">
                 <a:solidFill>
                   <a:srgbClr val="2F3338"/>
                 </a:solidFill>
@@ -19706,7 +20338,7 @@
               <a:t>r</a:t>
             </a:r>
             <a:r>
-              <a:rPr lang="ro-RO" dirty="0">
+              <a:rPr lang="ro-RO" sz="1600" dirty="0">
                 <a:solidFill>
                   <a:srgbClr val="2F3338"/>
                 </a:solidFill>
@@ -19715,7 +20347,7 @@
               <a:t>ă</a:t>
             </a:r>
             <a:r>
-              <a:rPr b="0" i="0" dirty="0" smtClean="0">
+              <a:rPr sz="1600" b="0" i="0" dirty="0" smtClean="0">
                 <a:solidFill>
                   <a:srgbClr val="2F3338"/>
                 </a:solidFill>
@@ -19724,7 +20356,7 @@
               <a:t>m</a:t>
             </a:r>
             <a:r>
-              <a:rPr lang="ro-RO" b="0" i="0" dirty="0" smtClean="0">
+              <a:rPr lang="ro-RO" sz="1600" b="0" i="0" dirty="0" smtClean="0">
                 <a:solidFill>
                   <a:srgbClr val="2F3338"/>
                 </a:solidFill>
@@ -19733,7 +20365,7 @@
               <a:t>â</a:t>
             </a:r>
             <a:r>
-              <a:rPr b="0" i="0" dirty="0" smtClean="0">
+              <a:rPr sz="1600" b="0" i="0" dirty="0" smtClean="0">
                 <a:solidFill>
                   <a:srgbClr val="2F3338"/>
                 </a:solidFill>
@@ -19742,7 +20374,7 @@
               <a:t>n</a:t>
             </a:r>
             <a:r>
-              <a:rPr lang="ro-RO" b="0" i="0" dirty="0" smtClean="0">
+              <a:rPr lang="ro-RO" sz="1600" b="0" i="0" dirty="0" smtClean="0">
                 <a:solidFill>
                   <a:srgbClr val="2F3338"/>
                 </a:solidFill>
@@ -19751,16 +20383,16 @@
               <a:t>ă</a:t>
             </a:r>
             <a:r>
-              <a:rPr b="0" i="0" dirty="0" smtClean="0">
-                <a:solidFill>
-                  <a:srgbClr val="2F3338"/>
-                </a:solidFill>
-                <a:latin typeface="Segoe UI"/>
-              </a:rPr>
-              <a:t> </a:t>
-            </a:r>
-            <a:r>
-              <a:rPr b="0" i="0" dirty="0" err="1">
+              <a:rPr sz="1600" b="0" i="0" dirty="0" smtClean="0">
+                <a:solidFill>
+                  <a:srgbClr val="2F3338"/>
+                </a:solidFill>
+                <a:latin typeface="Segoe UI"/>
+              </a:rPr>
+              <a:t> </a:t>
+            </a:r>
+            <a:r>
+              <a:rPr sz="1600" b="0" i="0" dirty="0" err="1">
                 <a:solidFill>
                   <a:srgbClr val="2F3338"/>
                 </a:solidFill>
@@ -19769,16 +20401,16 @@
               <a:t>adevarate</a:t>
             </a:r>
             <a:r>
-              <a:rPr b="0" i="0" dirty="0">
-                <a:solidFill>
-                  <a:srgbClr val="2F3338"/>
-                </a:solidFill>
-                <a:latin typeface="Segoe UI"/>
-              </a:rPr>
-              <a:t> </a:t>
-            </a:r>
-            <a:r>
-              <a:rPr b="0" i="0" dirty="0" err="1">
+              <a:rPr sz="1600" b="0" i="0" dirty="0">
+                <a:solidFill>
+                  <a:srgbClr val="2F3338"/>
+                </a:solidFill>
+                <a:latin typeface="Segoe UI"/>
+              </a:rPr>
+              <a:t> </a:t>
+            </a:r>
+            <a:r>
+              <a:rPr sz="1600" b="0" i="0" dirty="0" err="1">
                 <a:solidFill>
                   <a:srgbClr val="2F3338"/>
                 </a:solidFill>
@@ -19787,16 +20419,16 @@
               <a:t>pentru</a:t>
             </a:r>
             <a:r>
-              <a:rPr b="0" i="0" dirty="0">
-                <a:solidFill>
-                  <a:srgbClr val="2F3338"/>
-                </a:solidFill>
-                <a:latin typeface="Segoe UI"/>
-              </a:rPr>
-              <a:t> </a:t>
-            </a:r>
-            <a:r>
-              <a:rPr b="0" i="0" dirty="0" err="1">
+              <a:rPr sz="1600" b="0" i="0" dirty="0">
+                <a:solidFill>
+                  <a:srgbClr val="2F3338"/>
+                </a:solidFill>
+                <a:latin typeface="Segoe UI"/>
+              </a:rPr>
+              <a:t> </a:t>
+            </a:r>
+            <a:r>
+              <a:rPr sz="1600" b="0" i="0" dirty="0" err="1">
                 <a:solidFill>
                   <a:srgbClr val="2F3338"/>
                 </a:solidFill>
@@ -19805,16 +20437,16 @@
               <a:t>orice</a:t>
             </a:r>
             <a:r>
-              <a:rPr b="0" i="0" dirty="0">
-                <a:solidFill>
-                  <a:srgbClr val="2F3338"/>
-                </a:solidFill>
-                <a:latin typeface="Segoe UI"/>
-              </a:rPr>
-              <a:t> </a:t>
-            </a:r>
-            <a:r>
-              <a:rPr b="0" i="0" dirty="0" err="1">
+              <a:rPr sz="1600" b="0" i="0" dirty="0">
+                <a:solidFill>
+                  <a:srgbClr val="2F3338"/>
+                </a:solidFill>
+                <a:latin typeface="Segoe UI"/>
+              </a:rPr>
+              <a:t> </a:t>
+            </a:r>
+            <a:r>
+              <a:rPr sz="1600" b="0" i="0" dirty="0" err="1" smtClean="0">
                 <a:solidFill>
                   <a:srgbClr val="2F3338"/>
                 </a:solidFill>
@@ -19822,7 +20454,43 @@
               </a:rPr>
               <a:t>intrare</a:t>
             </a:r>
-            <a:endParaRPr b="0" i="0" dirty="0">
+            <a:r>
+              <a:rPr lang="ro-RO" sz="1600" b="0" i="0" dirty="0" smtClean="0">
+                <a:solidFill>
+                  <a:srgbClr val="2F3338"/>
+                </a:solidFill>
+                <a:latin typeface="Segoe UI"/>
+              </a:rPr>
+              <a:t> (</a:t>
+            </a:r>
+            <a:r>
+              <a:rPr lang="vi-VN" sz="1600" dirty="0">
+                <a:solidFill>
+                  <a:srgbClr val="2F3338"/>
+                </a:solidFill>
+                <a:latin typeface="Segoe UI"/>
+              </a:rPr>
+              <a:t>ex: simplify nu schimbă niciodată valoarea </a:t>
+            </a:r>
+            <a:r>
+              <a:rPr lang="vi-VN" sz="1600" dirty="0" smtClean="0">
+                <a:solidFill>
+                  <a:srgbClr val="2F3338"/>
+                </a:solidFill>
+                <a:latin typeface="Segoe UI"/>
+              </a:rPr>
+              <a:t>expresiei</a:t>
+            </a:r>
+            <a:r>
+              <a:rPr lang="ro-RO" sz="1600" dirty="0" smtClean="0">
+                <a:solidFill>
+                  <a:srgbClr val="2F3338"/>
+                </a:solidFill>
+                <a:latin typeface="Segoe UI"/>
+              </a:rPr>
+              <a:t>)</a:t>
+            </a:r>
+            <a:endParaRPr sz="1600" b="0" i="0" dirty="0">
               <a:solidFill>
                 <a:srgbClr val="2F3338"/>
               </a:solidFill>
@@ -19830,43 +20498,24 @@
             </a:endParaRPr>
           </a:p>
           <a:p>
-            <a:pPr algn="l">
-              <a:spcBef>
-                <a:spcPts val="0"/>
-              </a:spcBef>
+            <a:pPr marL="285750" indent="-285750">
               <a:spcAft>
                 <a:spcPts val="200"/>
               </a:spcAft>
+              <a:buFont typeface="Arial" pitchFamily="34" charset="0"/>
+              <a:buChar char="•"/>
             </a:pPr>
             <a:r>
-              <a:rPr b="0" i="0" dirty="0">
-                <a:solidFill>
-                  <a:srgbClr val="2F3338"/>
-                </a:solidFill>
-                <a:latin typeface="Segoe UI"/>
-              </a:rPr>
-              <a:t>- </a:t>
-            </a:r>
-            <a:r>
-              <a:rPr lang="ro-RO" dirty="0" err="1">
-                <a:solidFill>
-                  <a:srgbClr val="2F3338"/>
-                </a:solidFill>
-                <a:latin typeface="Segoe UI"/>
-              </a:rPr>
-              <a:t>C</a:t>
-            </a:r>
-            <a:r>
-              <a:rPr b="0" i="0" dirty="0" smtClean="0">
-                <a:solidFill>
-                  <a:srgbClr val="2F3338"/>
-                </a:solidFill>
-                <a:latin typeface="Segoe UI"/>
-              </a:rPr>
-              <a:t>e </a:t>
-            </a:r>
-            <a:r>
-              <a:rPr b="0" i="0" dirty="0" err="1" smtClean="0">
+              <a:rPr lang="ro-RO" sz="1600" dirty="0" smtClean="0">
+                <a:solidFill>
+                  <a:srgbClr val="2F3338"/>
+                </a:solidFill>
+                <a:latin typeface="Segoe UI"/>
+              </a:rPr>
+              <a:t>Garantăm </a:t>
+            </a:r>
+            <a:r>
+              <a:rPr sz="1600" b="0" i="0" dirty="0" err="1" smtClean="0">
                 <a:solidFill>
                   <a:srgbClr val="2F3338"/>
                 </a:solidFill>
@@ -19875,7 +20524,7 @@
               <a:t>invarian</a:t>
             </a:r>
             <a:r>
-              <a:rPr lang="ro-RO" b="0" i="0" dirty="0" smtClean="0">
+              <a:rPr lang="ro-RO" sz="1600" b="0" i="0" dirty="0" smtClean="0">
                 <a:solidFill>
                   <a:srgbClr val="2F3338"/>
                 </a:solidFill>
@@ -19884,7 +20533,7 @@
               <a:t>ț</a:t>
             </a:r>
             <a:r>
-              <a:rPr b="0" i="0" dirty="0" smtClean="0">
+              <a:rPr sz="1600" b="0" i="0" dirty="0" smtClean="0">
                 <a:solidFill>
                   <a:srgbClr val="2F3338"/>
                 </a:solidFill>
@@ -19893,7 +20542,7 @@
               <a:t>i </a:t>
             </a:r>
             <a:r>
-              <a:rPr b="0" i="0" dirty="0" err="1">
+              <a:rPr sz="1600" b="0" i="0" dirty="0" err="1">
                 <a:solidFill>
                   <a:srgbClr val="2F3338"/>
                 </a:solidFill>
@@ -19902,79 +20551,25 @@
               <a:t>semantici</a:t>
             </a:r>
             <a:r>
-              <a:rPr b="0" i="0" dirty="0">
-                <a:solidFill>
-                  <a:srgbClr val="2F3338"/>
-                </a:solidFill>
-                <a:latin typeface="Segoe UI"/>
-              </a:rPr>
-              <a:t> </a:t>
-            </a:r>
-            <a:r>
-              <a:rPr b="0" i="0" dirty="0" err="1">
-                <a:solidFill>
-                  <a:srgbClr val="2F3338"/>
-                </a:solidFill>
-                <a:latin typeface="Segoe UI"/>
-              </a:rPr>
-              <a:t>trebuie</a:t>
-            </a:r>
-            <a:r>
-              <a:rPr b="0" i="0" dirty="0">
-                <a:solidFill>
-                  <a:srgbClr val="2F3338"/>
-                </a:solidFill>
-                <a:latin typeface="Segoe UI"/>
-              </a:rPr>
-              <a:t> </a:t>
-            </a:r>
-            <a:r>
-              <a:rPr b="0" i="0" dirty="0" smtClean="0">
-                <a:solidFill>
-                  <a:srgbClr val="2F3338"/>
-                </a:solidFill>
-                <a:latin typeface="Segoe UI"/>
-              </a:rPr>
-              <a:t>p</a:t>
-            </a:r>
-            <a:r>
-              <a:rPr lang="ro-RO" b="0" i="0" dirty="0" smtClean="0">
-                <a:solidFill>
-                  <a:srgbClr val="2F3338"/>
-                </a:solidFill>
-                <a:latin typeface="Segoe UI"/>
-              </a:rPr>
-              <a:t>ăs</a:t>
-            </a:r>
-            <a:r>
-              <a:rPr b="0" i="0" dirty="0" err="1" smtClean="0">
-                <a:solidFill>
-                  <a:srgbClr val="2F3338"/>
-                </a:solidFill>
-                <a:latin typeface="Segoe UI"/>
-              </a:rPr>
-              <a:t>tra</a:t>
-            </a:r>
-            <a:r>
-              <a:rPr lang="ro-RO" b="0" i="0" dirty="0" smtClean="0">
-                <a:solidFill>
-                  <a:srgbClr val="2F3338"/>
-                </a:solidFill>
-                <a:latin typeface="Segoe UI"/>
-              </a:rPr>
-              <a:t>ț</a:t>
-            </a:r>
-            <a:r>
-              <a:rPr b="0" i="0" dirty="0" smtClean="0">
-                <a:solidFill>
-                  <a:srgbClr val="2F3338"/>
-                </a:solidFill>
-                <a:latin typeface="Segoe UI"/>
-              </a:rPr>
-              <a:t>i dup</a:t>
-            </a:r>
-            <a:r>
-              <a:rPr lang="ro-RO" b="0" i="0" dirty="0" smtClean="0">
+              <a:rPr sz="1600" b="0" i="0" dirty="0">
+                <a:solidFill>
+                  <a:srgbClr val="2F3338"/>
+                </a:solidFill>
+                <a:latin typeface="Segoe UI"/>
+              </a:rPr>
+              <a:t> </a:t>
+            </a:r>
+            <a:r>
+              <a:rPr sz="1600" b="0" i="0" dirty="0" smtClean="0">
+                <a:solidFill>
+                  <a:srgbClr val="2F3338"/>
+                </a:solidFill>
+                <a:latin typeface="Segoe UI"/>
+              </a:rPr>
+              <a:t>dup</a:t>
+            </a:r>
+            <a:r>
+              <a:rPr lang="ro-RO" sz="1600" b="0" i="0" dirty="0" smtClean="0">
                 <a:solidFill>
                   <a:srgbClr val="2F3338"/>
                 </a:solidFill>
@@ -19983,7 +20578,7 @@
               <a:t>ă</a:t>
             </a:r>
             <a:r>
-              <a:rPr b="0" i="0" dirty="0" smtClean="0">
+              <a:rPr sz="1600" b="0" i="0" dirty="0" smtClean="0">
                 <a:solidFill>
                   <a:srgbClr val="2F3338"/>
                 </a:solidFill>
@@ -19992,7 +20587,7 @@
               <a:t> transform</a:t>
             </a:r>
             <a:r>
-              <a:rPr lang="ro-RO" b="0" i="0" dirty="0" smtClean="0">
+              <a:rPr lang="ro-RO" sz="1600" b="0" i="0" dirty="0" smtClean="0">
                 <a:solidFill>
                   <a:srgbClr val="2F3338"/>
                 </a:solidFill>
@@ -20001,7 +20596,7 @@
               <a:t>ă</a:t>
             </a:r>
             <a:r>
-              <a:rPr b="0" i="0" dirty="0" err="1" smtClean="0">
+              <a:rPr sz="1600" b="0" i="0" dirty="0" err="1" smtClean="0">
                 <a:solidFill>
                   <a:srgbClr val="2F3338"/>
                 </a:solidFill>
@@ -20010,34 +20605,34 @@
               <a:t>ri</a:t>
             </a:r>
             <a:r>
-              <a:rPr b="0" i="0" dirty="0" smtClean="0">
-                <a:solidFill>
-                  <a:srgbClr val="2F3338"/>
-                </a:solidFill>
-                <a:latin typeface="Segoe UI"/>
-              </a:rPr>
-              <a:t> </a:t>
-            </a:r>
-            <a:r>
-              <a:rPr b="0" i="0" dirty="0">
-                <a:solidFill>
-                  <a:srgbClr val="2F3338"/>
-                </a:solidFill>
-                <a:latin typeface="Segoe UI"/>
-              </a:rPr>
-              <a:t>(ex: </a:t>
-            </a:r>
-            <a:r>
-              <a:rPr b="0" i="0" dirty="0" err="1">
-                <a:solidFill>
-                  <a:srgbClr val="2F3338"/>
-                </a:solidFill>
-                <a:latin typeface="Segoe UI"/>
-              </a:rPr>
-              <a:t>simplificare</a:t>
-            </a:r>
-            <a:r>
-              <a:rPr b="0" i="0" dirty="0">
+              <a:rPr sz="1600" b="0" i="0" dirty="0" smtClean="0">
+                <a:solidFill>
+                  <a:srgbClr val="2F3338"/>
+                </a:solidFill>
+                <a:latin typeface="Segoe UI"/>
+              </a:rPr>
+              <a:t> </a:t>
+            </a:r>
+            <a:r>
+              <a:rPr sz="1600" b="0" i="0" dirty="0" smtClean="0">
+                <a:solidFill>
+                  <a:srgbClr val="2F3338"/>
+                </a:solidFill>
+                <a:latin typeface="Segoe UI"/>
+              </a:rPr>
+              <a:t>(</a:t>
+            </a:r>
+            <a:r>
+              <a:rPr lang="en-US" sz="1600" dirty="0">
+                <a:solidFill>
+                  <a:srgbClr val="2F3338"/>
+                </a:solidFill>
+                <a:latin typeface="Segoe UI"/>
+              </a:rPr>
+              <a:t>ex: simplify(simplify(e)) == simplify(e)</a:t>
+            </a:r>
+            <a:r>
+              <a:rPr sz="1600" b="0" i="0" dirty="0" smtClean="0">
                 <a:solidFill>
                   <a:srgbClr val="2F3338"/>
                 </a:solidFill>
@@ -20045,179 +20640,7 @@
               </a:rPr>
               <a:t>)</a:t>
             </a:r>
-          </a:p>
-          <a:p>
-            <a:pPr algn="l">
-              <a:spcBef>
-                <a:spcPts val="0"/>
-              </a:spcBef>
-              <a:spcAft>
-                <a:spcPts val="200"/>
-              </a:spcAft>
-            </a:pPr>
-            <a:r>
-              <a:rPr b="0" i="0" dirty="0">
-                <a:solidFill>
-                  <a:srgbClr val="2F3338"/>
-                </a:solidFill>
-                <a:latin typeface="Segoe UI"/>
-              </a:rPr>
-              <a:t>- </a:t>
-            </a:r>
-            <a:r>
-              <a:rPr lang="ro-RO" dirty="0" err="1">
-                <a:solidFill>
-                  <a:srgbClr val="2F3338"/>
-                </a:solidFill>
-                <a:latin typeface="Segoe UI"/>
-              </a:rPr>
-              <a:t>C</a:t>
-            </a:r>
-            <a:r>
-              <a:rPr b="0" i="0" dirty="0" smtClean="0">
-                <a:solidFill>
-                  <a:srgbClr val="2F3338"/>
-                </a:solidFill>
-                <a:latin typeface="Segoe UI"/>
-              </a:rPr>
-              <a:t>e </a:t>
-            </a:r>
-            <a:r>
-              <a:rPr b="0" i="0" dirty="0" err="1" smtClean="0">
-                <a:solidFill>
-                  <a:srgbClr val="2F3338"/>
-                </a:solidFill>
-                <a:latin typeface="Segoe UI"/>
-              </a:rPr>
-              <a:t>garan</a:t>
-            </a:r>
-            <a:r>
-              <a:rPr lang="ro-RO" b="0" i="0" dirty="0" smtClean="0">
-                <a:solidFill>
-                  <a:srgbClr val="2F3338"/>
-                </a:solidFill>
-                <a:latin typeface="Segoe UI"/>
-              </a:rPr>
-              <a:t>ț</a:t>
-            </a:r>
-            <a:r>
-              <a:rPr b="0" i="0" dirty="0" smtClean="0">
-                <a:solidFill>
-                  <a:srgbClr val="2F3338"/>
-                </a:solidFill>
-                <a:latin typeface="Segoe UI"/>
-              </a:rPr>
-              <a:t>ii </a:t>
-            </a:r>
-            <a:r>
-              <a:rPr b="0" i="0" dirty="0" err="1">
-                <a:solidFill>
-                  <a:srgbClr val="2F3338"/>
-                </a:solidFill>
-                <a:latin typeface="Segoe UI"/>
-              </a:rPr>
-              <a:t>vrem</a:t>
-            </a:r>
-            <a:r>
-              <a:rPr b="0" i="0" dirty="0">
-                <a:solidFill>
-                  <a:srgbClr val="2F3338"/>
-                </a:solidFill>
-                <a:latin typeface="Segoe UI"/>
-              </a:rPr>
-              <a:t> </a:t>
-            </a:r>
-            <a:r>
-              <a:rPr b="0" i="0" dirty="0" err="1">
-                <a:solidFill>
-                  <a:srgbClr val="2F3338"/>
-                </a:solidFill>
-                <a:latin typeface="Segoe UI"/>
-              </a:rPr>
-              <a:t>pentru</a:t>
-            </a:r>
-            <a:r>
-              <a:rPr b="0" i="0" dirty="0">
-                <a:solidFill>
-                  <a:srgbClr val="2F3338"/>
-                </a:solidFill>
-                <a:latin typeface="Segoe UI"/>
-              </a:rPr>
-              <a:t> parser, evaluator </a:t>
-            </a:r>
-            <a:r>
-              <a:rPr lang="ro-RO" dirty="0" err="1">
-                <a:solidFill>
-                  <a:srgbClr val="2F3338"/>
-                </a:solidFill>
-                <a:latin typeface="Segoe UI"/>
-              </a:rPr>
-              <a:t>ș</a:t>
-            </a:r>
-            <a:r>
-              <a:rPr b="0" i="0" dirty="0" smtClean="0">
-                <a:solidFill>
-                  <a:srgbClr val="2F3338"/>
-                </a:solidFill>
-                <a:latin typeface="Segoe UI"/>
-              </a:rPr>
-              <a:t>i </a:t>
-            </a:r>
-            <a:r>
-              <a:rPr b="0" i="0" dirty="0" err="1" smtClean="0">
-                <a:solidFill>
-                  <a:srgbClr val="2F3338"/>
-                </a:solidFill>
-                <a:latin typeface="Segoe UI"/>
-              </a:rPr>
-              <a:t>propriet</a:t>
-            </a:r>
-            <a:r>
-              <a:rPr lang="ro-RO" b="0" i="0" dirty="0" smtClean="0">
-                <a:solidFill>
-                  <a:srgbClr val="2F3338"/>
-                </a:solidFill>
-                <a:latin typeface="Segoe UI"/>
-              </a:rPr>
-              <a:t>ă</a:t>
-            </a:r>
-            <a:r>
-              <a:rPr lang="ro-RO" dirty="0">
-                <a:solidFill>
-                  <a:srgbClr val="2F3338"/>
-                </a:solidFill>
-                <a:latin typeface="Segoe UI"/>
-              </a:rPr>
-              <a:t>ț</a:t>
-            </a:r>
-            <a:r>
-              <a:rPr b="0" i="0" dirty="0" err="1" smtClean="0">
-                <a:solidFill>
-                  <a:srgbClr val="2F3338"/>
-                </a:solidFill>
-                <a:latin typeface="Segoe UI"/>
-              </a:rPr>
-              <a:t>ile</a:t>
-            </a:r>
-            <a:r>
-              <a:rPr b="0" i="0" dirty="0" smtClean="0">
-                <a:solidFill>
-                  <a:srgbClr val="2F3338"/>
-                </a:solidFill>
-                <a:latin typeface="Segoe UI"/>
-              </a:rPr>
-              <a:t> </a:t>
-            </a:r>
-            <a:r>
-              <a:rPr b="0" i="0" dirty="0" err="1" smtClean="0">
-                <a:solidFill>
-                  <a:srgbClr val="2F3338"/>
-                </a:solidFill>
-                <a:latin typeface="Segoe UI"/>
-              </a:rPr>
-              <a:t>algebrice</a:t>
-            </a:r>
-            <a:endParaRPr b="0" i="0" dirty="0">
+            <a:endParaRPr sz="1600" b="0" i="0" dirty="0">
               <a:solidFill>
                 <a:srgbClr val="2F3338"/>
               </a:solidFill>
@@ -20225,141 +20648,128 @@
             </a:endParaRPr>
           </a:p>
           <a:p>
-            <a:pPr algn="l">
-              <a:spcBef>
-                <a:spcPts val="0"/>
-              </a:spcBef>
+            <a:pPr marL="285750" indent="-285750">
               <a:spcAft>
                 <a:spcPts val="200"/>
               </a:spcAft>
+              <a:buFont typeface="Arial" pitchFamily="34" charset="0"/>
+              <a:buChar char="•"/>
             </a:pPr>
             <a:r>
-              <a:rPr b="0" i="0" dirty="0">
-                <a:solidFill>
-                  <a:srgbClr val="2F3338"/>
-                </a:solidFill>
-                <a:latin typeface="Segoe UI"/>
-              </a:rPr>
-              <a:t>- </a:t>
-            </a:r>
-            <a:r>
-              <a:rPr lang="ro-RO" b="0" i="0" dirty="0" smtClean="0">
-                <a:solidFill>
-                  <a:srgbClr val="2F3338"/>
-                </a:solidFill>
-                <a:latin typeface="Segoe UI"/>
-              </a:rPr>
-              <a:t>C</a:t>
-            </a:r>
-            <a:r>
-              <a:rPr b="0" i="0" dirty="0" smtClean="0">
-                <a:solidFill>
-                  <a:srgbClr val="2F3338"/>
-                </a:solidFill>
-                <a:latin typeface="Segoe UI"/>
-              </a:rPr>
-              <a:t>um valid</a:t>
-            </a:r>
-            <a:r>
-              <a:rPr lang="ro-RO" b="0" i="0" dirty="0" smtClean="0">
-                <a:solidFill>
-                  <a:srgbClr val="2F3338"/>
-                </a:solidFill>
-                <a:latin typeface="Segoe UI"/>
-              </a:rPr>
-              <a:t>ă</a:t>
-            </a:r>
-            <a:r>
-              <a:rPr b="0" i="0" dirty="0" smtClean="0">
-                <a:solidFill>
-                  <a:srgbClr val="2F3338"/>
-                </a:solidFill>
-                <a:latin typeface="Segoe UI"/>
-              </a:rPr>
-              <a:t>m </a:t>
-            </a:r>
-            <a:r>
-              <a:rPr b="0" i="0" dirty="0" err="1">
-                <a:solidFill>
-                  <a:srgbClr val="2F3338"/>
-                </a:solidFill>
-                <a:latin typeface="Segoe UI"/>
-              </a:rPr>
-              <a:t>sistematic</a:t>
-            </a:r>
-            <a:r>
-              <a:rPr b="0" i="0" dirty="0">
-                <a:solidFill>
-                  <a:srgbClr val="2F3338"/>
-                </a:solidFill>
-                <a:latin typeface="Segoe UI"/>
-              </a:rPr>
-              <a:t> </a:t>
-            </a:r>
-            <a:r>
-              <a:rPr b="0" i="0" dirty="0" err="1">
-                <a:solidFill>
-                  <a:srgbClr val="2F3338"/>
-                </a:solidFill>
-                <a:latin typeface="Segoe UI"/>
-              </a:rPr>
-              <a:t>corectitudinea</a:t>
-            </a:r>
-            <a:r>
-              <a:rPr b="0" i="0" dirty="0">
-                <a:solidFill>
-                  <a:srgbClr val="2F3338"/>
-                </a:solidFill>
-                <a:latin typeface="Segoe UI"/>
-              </a:rPr>
-              <a:t> pe o </a:t>
-            </a:r>
-            <a:r>
-              <a:rPr b="0" i="0" dirty="0" err="1" smtClean="0">
-                <a:solidFill>
-                  <a:srgbClr val="2F3338"/>
-                </a:solidFill>
-                <a:latin typeface="Segoe UI"/>
-              </a:rPr>
-              <a:t>clas</a:t>
-            </a:r>
-            <a:r>
-              <a:rPr lang="ro-RO" b="0" i="0" dirty="0" smtClean="0">
-                <a:solidFill>
-                  <a:srgbClr val="2F3338"/>
-                </a:solidFill>
-                <a:latin typeface="Segoe UI"/>
-              </a:rPr>
-              <a:t>ă</a:t>
-            </a:r>
-            <a:r>
-              <a:rPr b="0" i="0" dirty="0" smtClean="0">
-                <a:solidFill>
-                  <a:srgbClr val="2F3338"/>
-                </a:solidFill>
-                <a:latin typeface="Segoe UI"/>
-              </a:rPr>
-              <a:t> </a:t>
-            </a:r>
-            <a:r>
-              <a:rPr b="0" i="0" dirty="0">
-                <a:solidFill>
-                  <a:srgbClr val="2F3338"/>
-                </a:solidFill>
-                <a:latin typeface="Segoe UI"/>
-              </a:rPr>
-              <a:t>mare de </a:t>
-            </a:r>
-            <a:r>
-              <a:rPr b="0" i="0" dirty="0" err="1">
-                <a:solidFill>
-                  <a:srgbClr val="2F3338"/>
-                </a:solidFill>
-                <a:latin typeface="Segoe UI"/>
-              </a:rPr>
-              <a:t>cazuri</a:t>
-            </a:r>
-            <a:endParaRPr b="0" i="0" dirty="0">
+              <a:rPr lang="ro-RO" sz="1600" dirty="0" smtClean="0">
+                <a:solidFill>
+                  <a:srgbClr val="2F3338"/>
+                </a:solidFill>
+                <a:latin typeface="Segoe UI"/>
+              </a:rPr>
+              <a:t>Verificăm comportamentul parserului și evaluatorului</a:t>
+            </a:r>
+            <a:r>
+              <a:rPr lang="ro-RO" sz="1600" b="0" i="0" dirty="0" smtClean="0">
+                <a:solidFill>
+                  <a:srgbClr val="2F3338"/>
+                </a:solidFill>
+                <a:latin typeface="Segoe UI"/>
+              </a:rPr>
+              <a:t> (ex: </a:t>
+            </a:r>
+            <a:r>
+              <a:rPr lang="it-IT" sz="1600" dirty="0" smtClean="0">
+                <a:solidFill>
+                  <a:srgbClr val="2F3338"/>
+                </a:solidFill>
+                <a:latin typeface="Segoe UI"/>
+              </a:rPr>
+              <a:t>parse(pretty(e</a:t>
+            </a:r>
+            <a:r>
+              <a:rPr lang="it-IT" sz="1600" dirty="0">
+                <a:solidFill>
+                  <a:srgbClr val="2F3338"/>
+                </a:solidFill>
+                <a:latin typeface="Segoe UI"/>
+              </a:rPr>
+              <a:t>)) evaluează identic cu </a:t>
+            </a:r>
+            <a:r>
+              <a:rPr lang="it-IT" sz="1600" dirty="0" smtClean="0">
+                <a:solidFill>
+                  <a:srgbClr val="2F3338"/>
+                </a:solidFill>
+                <a:latin typeface="Segoe UI"/>
+              </a:rPr>
+              <a:t>e</a:t>
+            </a:r>
+            <a:r>
+              <a:rPr lang="ro-RO" sz="1600" b="0" i="0" dirty="0" smtClean="0">
+                <a:solidFill>
+                  <a:srgbClr val="2F3338"/>
+                </a:solidFill>
+                <a:latin typeface="Segoe UI"/>
+              </a:rPr>
+              <a:t>)</a:t>
+            </a:r>
+            <a:endParaRPr sz="1600" b="0" i="0" dirty="0" smtClean="0">
+              <a:solidFill>
+                <a:srgbClr val="2F3338"/>
+              </a:solidFill>
+              <a:latin typeface="Segoe UI"/>
+            </a:endParaRPr>
+          </a:p>
+          <a:p>
+            <a:pPr marL="285750" indent="-285750">
+              <a:spcAft>
+                <a:spcPts val="200"/>
+              </a:spcAft>
+              <a:buFont typeface="Arial" pitchFamily="34" charset="0"/>
+              <a:buChar char="•"/>
+            </a:pPr>
+            <a:r>
+              <a:rPr lang="ro-RO" sz="1600" dirty="0">
+                <a:solidFill>
+                  <a:srgbClr val="2F3338"/>
+                </a:solidFill>
+                <a:latin typeface="Segoe UI"/>
+              </a:rPr>
+              <a:t>Acoperim automat sute de cazuri, nu doar exemple izolate </a:t>
+            </a:r>
+            <a:r>
+              <a:rPr lang="ro-RO" sz="1600" b="0" i="0" dirty="0" smtClean="0">
+                <a:solidFill>
+                  <a:srgbClr val="2F3338"/>
+                </a:solidFill>
+                <a:latin typeface="Segoe UI"/>
+              </a:rPr>
+              <a:t>(ex: </a:t>
+            </a:r>
+            <a:r>
+              <a:rPr lang="vi-VN" sz="1600" dirty="0" smtClean="0">
+                <a:solidFill>
+                  <a:srgbClr val="2F3338"/>
+                </a:solidFill>
+                <a:latin typeface="Segoe UI"/>
+              </a:rPr>
+              <a:t>QuickCheck </a:t>
+            </a:r>
+            <a:r>
+              <a:rPr lang="vi-VN" sz="1600" dirty="0">
+                <a:solidFill>
+                  <a:srgbClr val="2F3338"/>
+                </a:solidFill>
+                <a:latin typeface="Segoe UI"/>
+              </a:rPr>
+              <a:t>generează automat 120 de expresii per proprietate</a:t>
+            </a:r>
+            <a:r>
+              <a:rPr lang="ro-RO" sz="1600" b="0" i="0" dirty="0" smtClean="0">
+                <a:solidFill>
+                  <a:srgbClr val="2F3338"/>
+                </a:solidFill>
+                <a:latin typeface="Segoe UI"/>
+              </a:rPr>
+              <a:t>)</a:t>
+            </a:r>
+            <a:endParaRPr sz="1600" b="0" i="0" dirty="0">
               <a:solidFill>
                 <a:srgbClr val="2F3338"/>
               </a:solidFill>
@@ -20401,8 +20811,8 @@
         </p:nvSpPr>
         <p:spPr>
           <a:xfrm>
-            <a:off x="6454985" y="2784787"/>
-            <a:ext cx="4480607" cy="1719072"/>
+            <a:off x="6454984" y="2784787"/>
+            <a:ext cx="5305215" cy="2235946"/>
           </a:xfrm>
           <a:prstGeom prst="roundRect">
             <a:avLst/>
@@ -20618,10 +21028,15 @@
             <p:ph sz="quarter" idx="4"/>
           </p:nvPr>
         </p:nvSpPr>
-        <p:spPr/>
+        <p:spPr>
+          <a:xfrm>
+            <a:off x="6515943" y="2958273"/>
+            <a:ext cx="5244255" cy="2910821"/>
+          </a:xfrm>
+        </p:spPr>
         <p:txBody>
           <a:bodyPr>
-            <a:normAutofit/>
+            <a:normAutofit fontScale="92500" lnSpcReduction="10000"/>
           </a:bodyPr>
           <a:lstStyle/>
           <a:p>
@@ -20652,13 +21067,22 @@
               <a:t> </a:t>
             </a:r>
             <a:r>
-              <a:rPr lang="en-US" sz="1400" b="1" dirty="0" err="1">
+              <a:rPr lang="en-US" sz="1400" b="1" dirty="0" smtClean="0">
                 <a:solidFill>
                   <a:srgbClr val="4EC9B0"/>
                 </a:solidFill>
                 <a:latin typeface="Consolas"/>
               </a:rPr>
-              <a:t>generala</a:t>
+              <a:t>general</a:t>
+            </a:r>
+            <a:r>
+              <a:rPr lang="ro-RO" sz="1400" b="1" dirty="0" smtClean="0">
+                <a:solidFill>
+                  <a:srgbClr val="4EC9B0"/>
+                </a:solidFill>
+                <a:latin typeface="Consolas"/>
+              </a:rPr>
+              <a:t>ă</a:t>
             </a:r>
             <a:endParaRPr lang="en-US" sz="1400" b="1" dirty="0">
               <a:solidFill>
@@ -20677,22 +21101,67 @@
               </a:spcAft>
             </a:pPr>
             <a:r>
+              <a:rPr lang="en-US" sz="1400" dirty="0" smtClean="0">
+                <a:solidFill>
+                  <a:srgbClr val="D4D4D4"/>
+                </a:solidFill>
+                <a:latin typeface="Consolas"/>
+              </a:rPr>
+              <a:t>  </a:t>
+            </a:r>
+            <a:br>
+              <a:rPr lang="en-US" sz="1400" dirty="0" smtClean="0">
+                <a:solidFill>
+                  <a:srgbClr val="D4D4D4"/>
+                </a:solidFill>
+                <a:latin typeface="Consolas"/>
+              </a:rPr>
+            </a:br>
+            <a:r>
+              <a:rPr lang="en-US" sz="1400" dirty="0" err="1">
+                <a:solidFill>
+                  <a:srgbClr val="569CD6"/>
+                </a:solidFill>
+                <a:latin typeface="Consolas"/>
+              </a:rPr>
+              <a:t>prop_addCommutative</a:t>
+            </a:r>
+            <a:r>
               <a:rPr lang="en-US" sz="1400" dirty="0">
                 <a:solidFill>
-                  <a:srgbClr val="D4D4D4"/>
-                </a:solidFill>
-                <a:latin typeface="Consolas"/>
-              </a:rPr>
-              <a:t>  </a:t>
-            </a:r>
-            <a:br>
+                  <a:srgbClr val="569CD6"/>
+                </a:solidFill>
+                <a:latin typeface="Consolas"/>
+              </a:rPr>
+              <a:t> :: </a:t>
+            </a:r>
+            <a:r>
+              <a:rPr lang="en-US" sz="1400" dirty="0" err="1">
+                <a:solidFill>
+                  <a:srgbClr val="569CD6"/>
+                </a:solidFill>
+                <a:latin typeface="Consolas"/>
+              </a:rPr>
+              <a:t>Expr</a:t>
+            </a:r>
+            <a:r>
               <a:rPr lang="en-US" sz="1400" dirty="0">
                 <a:solidFill>
-                  <a:srgbClr val="D4D4D4"/>
-                </a:solidFill>
-                <a:latin typeface="Consolas"/>
-              </a:rPr>
-            </a:br>
+                  <a:srgbClr val="569CD6"/>
+                </a:solidFill>
+                <a:latin typeface="Consolas"/>
+              </a:rPr>
+              <a:t> -&gt; </a:t>
+            </a:r>
+            <a:r>
+              <a:rPr lang="en-US" sz="1400" dirty="0" err="1">
+                <a:solidFill>
+                  <a:srgbClr val="569CD6"/>
+                </a:solidFill>
+                <a:latin typeface="Consolas"/>
+              </a:rPr>
+              <a:t>Expr</a:t>
+            </a:r>
             <a:r>
               <a:rPr lang="en-US" sz="1400" dirty="0">
                 <a:solidFill>
@@ -20700,7 +21169,7 @@
                 </a:solidFill>
                 <a:latin typeface="Consolas"/>
               </a:rPr>
-              <a:t>for all a, b:</a:t>
+              <a:t> -&gt; Property</a:t>
             </a:r>
           </a:p>
           <a:p>
@@ -20713,16 +21182,279 @@
               </a:spcAft>
             </a:pPr>
             <a:r>
+              <a:rPr lang="en-US" sz="1400" dirty="0" err="1">
+                <a:solidFill>
+                  <a:srgbClr val="569CD6"/>
+                </a:solidFill>
+                <a:latin typeface="Consolas"/>
+              </a:rPr>
+              <a:t>prop_addCommutative</a:t>
+            </a:r>
+            <a:r>
               <a:rPr lang="en-US" sz="1400" dirty="0">
                 <a:solidFill>
-                  <a:srgbClr val="D4D4D4"/>
-                </a:solidFill>
-                <a:latin typeface="Consolas"/>
-              </a:rPr>
-              <a:t>  eval env (Add a b) == eval env (Add b a)</a:t>
-            </a:r>
-          </a:p>
-          <a:p>
+                  <a:srgbClr val="569CD6"/>
+                </a:solidFill>
+                <a:latin typeface="Consolas"/>
+              </a:rPr>
+              <a:t> a b =</a:t>
+            </a:r>
+          </a:p>
+          <a:p>
+            <a:pPr>
+              <a:spcBef>
+                <a:spcPts val="0"/>
+              </a:spcBef>
+              <a:spcAft>
+                <a:spcPts val="0"/>
+              </a:spcAft>
+            </a:pPr>
+            <a:r>
+              <a:rPr lang="en-US" sz="1400" dirty="0">
+                <a:solidFill>
+                  <a:srgbClr val="569CD6"/>
+                </a:solidFill>
+                <a:latin typeface="Consolas"/>
+              </a:rPr>
+              <a:t>  classify (size a + size b &lt;= 3) "</a:t>
+            </a:r>
+            <a:r>
+              <a:rPr lang="en-US" sz="1400" dirty="0" err="1">
+                <a:solidFill>
+                  <a:srgbClr val="569CD6"/>
+                </a:solidFill>
+                <a:latin typeface="Consolas"/>
+              </a:rPr>
+              <a:t>expresii</a:t>
+            </a:r>
+            <a:r>
+              <a:rPr lang="en-US" sz="1400" dirty="0">
+                <a:solidFill>
+                  <a:srgbClr val="569CD6"/>
+                </a:solidFill>
+                <a:latin typeface="Consolas"/>
+              </a:rPr>
+              <a:t> </a:t>
+            </a:r>
+            <a:r>
+              <a:rPr lang="en-US" sz="1400" dirty="0" err="1">
+                <a:solidFill>
+                  <a:srgbClr val="569CD6"/>
+                </a:solidFill>
+                <a:latin typeface="Consolas"/>
+              </a:rPr>
+              <a:t>mici</a:t>
+            </a:r>
+            <a:r>
+              <a:rPr lang="en-US" sz="1400" dirty="0">
+                <a:solidFill>
+                  <a:srgbClr val="569CD6"/>
+                </a:solidFill>
+                <a:latin typeface="Consolas"/>
+              </a:rPr>
+              <a:t>" $</a:t>
+            </a:r>
+          </a:p>
+          <a:p>
+            <a:pPr>
+              <a:spcBef>
+                <a:spcPts val="0"/>
+              </a:spcBef>
+              <a:spcAft>
+                <a:spcPts val="0"/>
+              </a:spcAft>
+            </a:pPr>
+            <a:r>
+              <a:rPr lang="en-US" sz="1400" dirty="0">
+                <a:solidFill>
+                  <a:srgbClr val="569CD6"/>
+                </a:solidFill>
+                <a:latin typeface="Consolas"/>
+              </a:rPr>
+              <a:t>  classify (size a + size b &gt; 8) "</a:t>
+            </a:r>
+            <a:r>
+              <a:rPr lang="en-US" sz="1400" dirty="0" err="1">
+                <a:solidFill>
+                  <a:srgbClr val="569CD6"/>
+                </a:solidFill>
+                <a:latin typeface="Consolas"/>
+              </a:rPr>
+              <a:t>expresii</a:t>
+            </a:r>
+            <a:r>
+              <a:rPr lang="en-US" sz="1400" dirty="0">
+                <a:solidFill>
+                  <a:srgbClr val="569CD6"/>
+                </a:solidFill>
+                <a:latin typeface="Consolas"/>
+              </a:rPr>
+              <a:t> </a:t>
+            </a:r>
+            <a:r>
+              <a:rPr lang="en-US" sz="1400" dirty="0" err="1">
+                <a:solidFill>
+                  <a:srgbClr val="569CD6"/>
+                </a:solidFill>
+                <a:latin typeface="Consolas"/>
+              </a:rPr>
+              <a:t>mari</a:t>
+            </a:r>
+            <a:r>
+              <a:rPr lang="en-US" sz="1400" dirty="0">
+                <a:solidFill>
+                  <a:srgbClr val="569CD6"/>
+                </a:solidFill>
+                <a:latin typeface="Consolas"/>
+              </a:rPr>
+              <a:t>" $</a:t>
+            </a:r>
+          </a:p>
+          <a:p>
+            <a:pPr>
+              <a:spcBef>
+                <a:spcPts val="0"/>
+              </a:spcBef>
+              <a:spcAft>
+                <a:spcPts val="0"/>
+              </a:spcAft>
+            </a:pPr>
+            <a:r>
+              <a:rPr lang="en-US" sz="1400" dirty="0">
+                <a:solidFill>
+                  <a:srgbClr val="569CD6"/>
+                </a:solidFill>
+                <a:latin typeface="Consolas"/>
+              </a:rPr>
+              <a:t>  </a:t>
+            </a:r>
+            <a:r>
+              <a:rPr lang="en-US" sz="1400" dirty="0" err="1">
+                <a:solidFill>
+                  <a:srgbClr val="569CD6"/>
+                </a:solidFill>
+                <a:latin typeface="Consolas"/>
+              </a:rPr>
+              <a:t>withEnv</a:t>
+            </a:r>
+            <a:r>
+              <a:rPr lang="en-US" sz="1400" dirty="0">
+                <a:solidFill>
+                  <a:srgbClr val="569CD6"/>
+                </a:solidFill>
+                <a:latin typeface="Consolas"/>
+              </a:rPr>
+              <a:t> (Add a b) $ \</a:t>
+            </a:r>
+            <a:r>
+              <a:rPr lang="en-US" sz="1400" dirty="0" err="1">
+                <a:solidFill>
+                  <a:srgbClr val="569CD6"/>
+                </a:solidFill>
+                <a:latin typeface="Consolas"/>
+              </a:rPr>
+              <a:t>env</a:t>
+            </a:r>
+            <a:r>
+              <a:rPr lang="en-US" sz="1400" dirty="0">
+                <a:solidFill>
+                  <a:srgbClr val="569CD6"/>
+                </a:solidFill>
+                <a:latin typeface="Consolas"/>
+              </a:rPr>
+              <a:t> -&gt;</a:t>
+            </a:r>
+          </a:p>
+          <a:p>
+            <a:pPr>
+              <a:spcBef>
+                <a:spcPts val="0"/>
+              </a:spcBef>
+              <a:spcAft>
+                <a:spcPts val="0"/>
+              </a:spcAft>
+            </a:pPr>
+            <a:r>
+              <a:rPr lang="en-US" sz="1400" dirty="0">
+                <a:solidFill>
+                  <a:srgbClr val="569CD6"/>
+                </a:solidFill>
+                <a:latin typeface="Consolas"/>
+              </a:rPr>
+              <a:t>    </a:t>
+            </a:r>
+            <a:r>
+              <a:rPr lang="en-US" sz="1400" dirty="0" err="1">
+                <a:solidFill>
+                  <a:srgbClr val="569CD6"/>
+                </a:solidFill>
+                <a:latin typeface="Consolas"/>
+              </a:rPr>
+              <a:t>eval</a:t>
+            </a:r>
+            <a:r>
+              <a:rPr lang="en-US" sz="1400" dirty="0">
+                <a:solidFill>
+                  <a:srgbClr val="569CD6"/>
+                </a:solidFill>
+                <a:latin typeface="Consolas"/>
+              </a:rPr>
+              <a:t> </a:t>
+            </a:r>
+            <a:r>
+              <a:rPr lang="en-US" sz="1400" dirty="0" err="1">
+                <a:solidFill>
+                  <a:srgbClr val="569CD6"/>
+                </a:solidFill>
+                <a:latin typeface="Consolas"/>
+              </a:rPr>
+              <a:t>env</a:t>
+            </a:r>
+            <a:r>
+              <a:rPr lang="en-US" sz="1400" dirty="0">
+                <a:solidFill>
+                  <a:srgbClr val="569CD6"/>
+                </a:solidFill>
+                <a:latin typeface="Consolas"/>
+              </a:rPr>
+              <a:t> (Add a b) === </a:t>
+            </a:r>
+            <a:r>
+              <a:rPr lang="en-US" sz="1400" dirty="0" err="1">
+                <a:solidFill>
+                  <a:srgbClr val="569CD6"/>
+                </a:solidFill>
+                <a:latin typeface="Consolas"/>
+              </a:rPr>
+              <a:t>eval</a:t>
+            </a:r>
+            <a:r>
+              <a:rPr lang="en-US" sz="1400" dirty="0">
+                <a:solidFill>
+                  <a:srgbClr val="569CD6"/>
+                </a:solidFill>
+                <a:latin typeface="Consolas"/>
+              </a:rPr>
+              <a:t> </a:t>
+            </a:r>
+            <a:r>
+              <a:rPr lang="en-US" sz="1400" dirty="0" err="1">
+                <a:solidFill>
+                  <a:srgbClr val="569CD6"/>
+                </a:solidFill>
+                <a:latin typeface="Consolas"/>
+              </a:rPr>
+              <a:t>env</a:t>
+            </a:r>
+            <a:r>
+              <a:rPr lang="en-US" sz="1400" dirty="0">
+                <a:solidFill>
+                  <a:srgbClr val="569CD6"/>
+                </a:solidFill>
+                <a:latin typeface="Consolas"/>
+              </a:rPr>
+              <a:t> (Add b a)</a:t>
+            </a:r>
             <a:endParaRPr sz="1600" dirty="0">
               <a:latin typeface="Consolas"/>
             </a:endParaRPr>
@@ -20763,16 +21495,28 @@
               <a:t> </a:t>
             </a:r>
             <a:r>
-              <a:rPr sz="1600" dirty="0" err="1">
-                <a:latin typeface="Consolas"/>
-              </a:rPr>
-              <a:t>genereaza</a:t>
+              <a:rPr sz="1600" dirty="0" err="1" smtClean="0">
+                <a:latin typeface="Consolas"/>
+              </a:rPr>
+              <a:t>genereaz</a:t>
+            </a:r>
+            <a:r>
+              <a:rPr lang="ro-RO" sz="1600" dirty="0" smtClean="0">
+                <a:latin typeface="Consolas"/>
+              </a:rPr>
+              <a:t>ă</a:t>
+            </a:r>
+            <a:r>
+              <a:rPr sz="1600" dirty="0" smtClean="0">
+                <a:latin typeface="Consolas"/>
+              </a:rPr>
+              <a:t> </a:t>
             </a:r>
             <a:r>
               <a:rPr sz="1600" dirty="0">
                 <a:latin typeface="Consolas"/>
               </a:rPr>
-              <a:t> automat </a:t>
+              <a:t>automat </a:t>
             </a:r>
             <a:r>
               <a:rPr sz="1600" dirty="0" err="1">
@@ -20899,7 +21643,12 @@
             <p:ph sz="half" idx="2"/>
           </p:nvPr>
         </p:nvSpPr>
-        <p:spPr/>
+        <p:spPr>
+          <a:xfrm>
+            <a:off x="975361" y="2958274"/>
+            <a:ext cx="5027506" cy="2910821"/>
+          </a:xfrm>
+        </p:spPr>
         <p:txBody>
           <a:bodyPr>
             <a:normAutofit/>
@@ -21055,23 +21804,6 @@
                 <a:latin typeface="Consolas"/>
               </a:rPr>
             </a:br>
-            <a:r>
-              <a:rPr lang="en-US" sz="1600" dirty="0">
-                <a:solidFill>
-                  <a:srgbClr val="D4D4D4"/>
-                </a:solidFill>
-                <a:latin typeface="Consolas"/>
-              </a:rPr>
-              <a:t/>
-            </a:r>
-            <a:br>
-              <a:rPr lang="en-US" sz="1600" dirty="0">
-                <a:solidFill>
-                  <a:srgbClr val="D4D4D4"/>
-                </a:solidFill>
-                <a:latin typeface="Consolas"/>
-              </a:rPr>
-            </a:br>
             <a:endParaRPr sz="1600" dirty="0">
               <a:latin typeface="Consolas"/>
             </a:endParaRPr>
@@ -21089,11 +21821,22 @@
               </a:rPr>
               <a:t>: </a:t>
             </a:r>
+            <a:endParaRPr lang="ro-RO" sz="1600" dirty="0" smtClean="0">
+              <a:latin typeface="Consolas"/>
+            </a:endParaRPr>
+          </a:p>
+          <a:p>
+            <a:r>
+              <a:rPr lang="ro-RO" sz="1600" dirty="0" err="1">
+                <a:latin typeface="Consolas"/>
+              </a:rPr>
+              <a:t>A</a:t>
+            </a:r>
             <a:r>
               <a:rPr sz="1600" dirty="0" err="1" smtClean="0">
                 <a:latin typeface="Consolas"/>
               </a:rPr>
-              <a:t>acoper</a:t>
+              <a:t>coper</a:t>
             </a:r>
             <a:r>
               <a:rPr lang="ro-RO" sz="1600" dirty="0" smtClean="0">
@@ -21260,10 +22003,15 @@
             <p:ph idx="1"/>
           </p:nvPr>
         </p:nvSpPr>
-        <p:spPr/>
+        <p:spPr>
+          <a:xfrm>
+            <a:off x="262467" y="1976120"/>
+            <a:ext cx="7552267" cy="3760891"/>
+          </a:xfrm>
+        </p:spPr>
         <p:txBody>
           <a:bodyPr>
-            <a:normAutofit lnSpcReduction="10000"/>
+            <a:normAutofit/>
           </a:bodyPr>
           <a:lstStyle/>
           <a:p>
@@ -21276,7 +22024,7 @@
               </a:spcAft>
             </a:pPr>
             <a:r>
-              <a:rPr lang="en-US" sz="2000" dirty="0" err="1">
+              <a:rPr lang="en-US" sz="1600" dirty="0" err="1">
                 <a:solidFill>
                   <a:srgbClr val="2F3338"/>
                 </a:solidFill>
@@ -21285,16 +22033,16 @@
               <a:t>QuickCheck</a:t>
             </a:r>
             <a:r>
-              <a:rPr lang="en-US" sz="2000" dirty="0">
-                <a:solidFill>
-                  <a:srgbClr val="2F3338"/>
-                </a:solidFill>
-                <a:latin typeface="Segoe UI"/>
-              </a:rPr>
-              <a:t> </a:t>
-            </a:r>
-            <a:r>
-              <a:rPr lang="en-US" sz="2000" dirty="0" err="1">
+              <a:rPr lang="en-US" sz="1600" dirty="0">
+                <a:solidFill>
+                  <a:srgbClr val="2F3338"/>
+                </a:solidFill>
+                <a:latin typeface="Segoe UI"/>
+              </a:rPr>
+              <a:t> </a:t>
+            </a:r>
+            <a:r>
+              <a:rPr lang="en-US" sz="1600" dirty="0" err="1">
                 <a:solidFill>
                   <a:srgbClr val="2F3338"/>
                 </a:solidFill>
@@ -21303,16 +22051,16 @@
               <a:t>este</a:t>
             </a:r>
             <a:r>
-              <a:rPr lang="en-US" sz="2000" dirty="0">
-                <a:solidFill>
-                  <a:srgbClr val="2F3338"/>
-                </a:solidFill>
-                <a:latin typeface="Segoe UI"/>
-              </a:rPr>
-              <a:t> </a:t>
-            </a:r>
-            <a:r>
-              <a:rPr lang="en-US" sz="2000" dirty="0" err="1">
+              <a:rPr lang="en-US" sz="1600" dirty="0">
+                <a:solidFill>
+                  <a:srgbClr val="2F3338"/>
+                </a:solidFill>
+                <a:latin typeface="Segoe UI"/>
+              </a:rPr>
+              <a:t> </a:t>
+            </a:r>
+            <a:r>
+              <a:rPr lang="en-US" sz="1600" dirty="0" err="1">
                 <a:solidFill>
                   <a:srgbClr val="2F3338"/>
                 </a:solidFill>
@@ -21321,7 +22069,7 @@
               <a:t>biblioteca</a:t>
             </a:r>
             <a:r>
-              <a:rPr lang="en-US" sz="2000" dirty="0">
+              <a:rPr lang="en-US" sz="1600" dirty="0">
                 <a:solidFill>
                   <a:srgbClr val="2F3338"/>
                 </a:solidFill>
@@ -21330,7 +22078,7 @@
               <a:t> Haskell </a:t>
             </a:r>
             <a:r>
-              <a:rPr lang="en-US" sz="2000" dirty="0" err="1">
+              <a:rPr lang="en-US" sz="1600" dirty="0" err="1">
                 <a:solidFill>
                   <a:srgbClr val="2F3338"/>
                 </a:solidFill>
@@ -21339,16 +22087,34 @@
               <a:t>pentru</a:t>
             </a:r>
             <a:r>
-              <a:rPr lang="en-US" sz="2000" dirty="0">
-                <a:solidFill>
-                  <a:srgbClr val="2F3338"/>
-                </a:solidFill>
-                <a:latin typeface="Segoe UI"/>
-              </a:rPr>
-              <a:t> property-based testing</a:t>
-            </a:r>
-            <a:r>
-              <a:rPr lang="en-US" sz="2400" dirty="0">
+              <a:rPr lang="en-US" sz="1600" dirty="0">
+                <a:solidFill>
+                  <a:srgbClr val="2F3338"/>
+                </a:solidFill>
+                <a:latin typeface="Segoe UI"/>
+              </a:rPr>
+              <a:t> property-based </a:t>
+            </a:r>
+            <a:r>
+              <a:rPr lang="en-US" sz="1600" dirty="0" smtClean="0">
+                <a:solidFill>
+                  <a:srgbClr val="2F3338"/>
+                </a:solidFill>
+                <a:latin typeface="Segoe UI"/>
+              </a:rPr>
+              <a:t>testing</a:t>
+            </a:r>
+            <a:r>
+              <a:rPr lang="ro-RO" sz="1600" dirty="0" smtClean="0">
+                <a:solidFill>
+                  <a:srgbClr val="2F3338"/>
+                </a:solidFill>
+                <a:latin typeface="Segoe UI"/>
+              </a:rPr>
+              <a:t>.</a:t>
+            </a:r>
+            <a:r>
+              <a:rPr lang="en-US" sz="1800" dirty="0">
                 <a:solidFill>
                   <a:srgbClr val="2F3338"/>
                 </a:solidFill>
@@ -21357,7 +22123,7 @@
               <a:t/>
             </a:r>
             <a:br>
-              <a:rPr lang="en-US" sz="2400" dirty="0">
+              <a:rPr lang="en-US" sz="1800" dirty="0">
                 <a:solidFill>
                   <a:srgbClr val="2F3338"/>
                 </a:solidFill>
@@ -21365,7 +22131,7 @@
               </a:rPr>
             </a:br>
             <a:r>
-              <a:rPr lang="en-US" sz="2400" b="1" dirty="0">
+              <a:rPr lang="en-US" sz="1800" b="1" dirty="0">
                 <a:solidFill>
                   <a:srgbClr val="4B5563"/>
                 </a:solidFill>
@@ -21374,7 +22140,7 @@
               <a:t/>
             </a:r>
             <a:br>
-              <a:rPr lang="en-US" sz="2400" b="1" dirty="0">
+              <a:rPr lang="en-US" sz="1800" b="1" dirty="0">
                 <a:solidFill>
                   <a:srgbClr val="4B5563"/>
                 </a:solidFill>
@@ -21382,7 +22148,7 @@
               </a:rPr>
             </a:br>
             <a:r>
-              <a:rPr lang="en-US" sz="2400" b="1" dirty="0" err="1">
+              <a:rPr lang="en-US" sz="1800" b="1" dirty="0" err="1">
                 <a:solidFill>
                   <a:srgbClr val="4B5563"/>
                 </a:solidFill>
@@ -21391,7 +22157,7 @@
               <a:t>Elementele-cheie</a:t>
             </a:r>
             <a:r>
-              <a:rPr lang="en-US" sz="2400" b="1" dirty="0">
+              <a:rPr lang="en-US" sz="1800" b="1" dirty="0">
                 <a:solidFill>
                   <a:srgbClr val="4B5563"/>
                 </a:solidFill>
@@ -21400,7 +22166,7 @@
               <a:t> de care ne </a:t>
             </a:r>
             <a:r>
-              <a:rPr lang="en-US" sz="2400" b="1" dirty="0" err="1">
+              <a:rPr lang="en-US" sz="1800" b="1" dirty="0" err="1">
                 <a:solidFill>
                   <a:srgbClr val="4B5563"/>
                 </a:solidFill>
@@ -21409,7 +22175,7 @@
               <a:t>folosim</a:t>
             </a:r>
             <a:r>
-              <a:rPr lang="en-US" sz="2400" b="1" dirty="0">
+              <a:rPr lang="en-US" sz="1800" b="1" dirty="0">
                 <a:solidFill>
                   <a:srgbClr val="4B5563"/>
                 </a:solidFill>
@@ -21418,7 +22184,7 @@
               <a:t> </a:t>
             </a:r>
             <a:r>
-              <a:rPr lang="ro-RO" sz="2400" b="1" dirty="0" smtClean="0">
+              <a:rPr lang="ro-RO" sz="1800" b="1" dirty="0" smtClean="0">
                 <a:solidFill>
                   <a:srgbClr val="4B5563"/>
                 </a:solidFill>
@@ -21427,7 +22193,7 @@
               <a:t>î</a:t>
             </a:r>
             <a:r>
-              <a:rPr lang="en-US" sz="2400" b="1" dirty="0" smtClean="0">
+              <a:rPr lang="en-US" sz="1800" b="1" dirty="0" smtClean="0">
                 <a:solidFill>
                   <a:srgbClr val="4B5563"/>
                 </a:solidFill>
@@ -21436,7 +22202,7 @@
               <a:t>n </a:t>
             </a:r>
             <a:r>
-              <a:rPr lang="en-US" sz="2400" b="1" dirty="0" err="1">
+              <a:rPr lang="en-US" sz="1800" b="1" dirty="0" err="1">
                 <a:solidFill>
                   <a:srgbClr val="4B5563"/>
                 </a:solidFill>
@@ -21445,7 +22211,7 @@
               <a:t>proiect</a:t>
             </a:r>
             <a:r>
-              <a:rPr lang="en-US" sz="2400" b="1" dirty="0">
+              <a:rPr lang="en-US" sz="1800" b="1" dirty="0">
                 <a:solidFill>
                   <a:srgbClr val="4B5563"/>
                 </a:solidFill>
@@ -21464,7 +22230,7 @@
               </a:spcAft>
             </a:pPr>
             <a:r>
-              <a:rPr lang="en-US" sz="2400" dirty="0">
+              <a:rPr lang="en-US" sz="1800" dirty="0">
                 <a:solidFill>
                   <a:srgbClr val="2F3338"/>
                 </a:solidFill>
@@ -21473,7 +22239,7 @@
               <a:t/>
             </a:r>
             <a:br>
-              <a:rPr lang="en-US" sz="2400" dirty="0">
+              <a:rPr lang="en-US" sz="1800" dirty="0">
                 <a:solidFill>
                   <a:srgbClr val="2F3338"/>
                 </a:solidFill>
@@ -21481,7 +22247,7 @@
               </a:rPr>
             </a:br>
             <a:r>
-              <a:rPr lang="en-US" sz="2000" dirty="0">
+              <a:rPr lang="en-US" sz="1600" dirty="0">
                 <a:solidFill>
                   <a:srgbClr val="2F3338"/>
                 </a:solidFill>
@@ -21490,7 +22256,7 @@
               <a:t>- </a:t>
             </a:r>
             <a:r>
-              <a:rPr lang="en-US" sz="2000" b="1" dirty="0">
+              <a:rPr lang="en-US" sz="1600" b="1" dirty="0">
                 <a:solidFill>
                   <a:srgbClr val="1F4E79"/>
                 </a:solidFill>
@@ -21499,7 +22265,7 @@
               <a:t>Arbitrary</a:t>
             </a:r>
             <a:r>
-              <a:rPr lang="en-US" sz="2000" dirty="0">
+              <a:rPr lang="en-US" sz="1600" dirty="0">
                 <a:solidFill>
                   <a:srgbClr val="2F3338"/>
                 </a:solidFill>
@@ -21508,7 +22274,7 @@
               <a:t> - </a:t>
             </a:r>
             <a:r>
-              <a:rPr lang="en-US" sz="2000" dirty="0" err="1">
+              <a:rPr lang="en-US" sz="1600" dirty="0" err="1">
                 <a:solidFill>
                   <a:srgbClr val="2F3338"/>
                 </a:solidFill>
@@ -21517,16 +22283,16 @@
               <a:t>clasa</a:t>
             </a:r>
             <a:r>
-              <a:rPr lang="en-US" sz="2000" dirty="0">
-                <a:solidFill>
-                  <a:srgbClr val="2F3338"/>
-                </a:solidFill>
-                <a:latin typeface="Segoe UI"/>
-              </a:rPr>
-              <a:t> </a:t>
-            </a:r>
-            <a:r>
-              <a:rPr lang="en-US" sz="2000" dirty="0" err="1">
+              <a:rPr lang="en-US" sz="1600" dirty="0">
+                <a:solidFill>
+                  <a:srgbClr val="2F3338"/>
+                </a:solidFill>
+                <a:latin typeface="Segoe UI"/>
+              </a:rPr>
+              <a:t> </a:t>
+            </a:r>
+            <a:r>
+              <a:rPr lang="en-US" sz="1600" dirty="0" err="1">
                 <a:solidFill>
                   <a:srgbClr val="2F3338"/>
                 </a:solidFill>
@@ -21535,16 +22301,16 @@
               <a:t>pentru</a:t>
             </a:r>
             <a:r>
-              <a:rPr lang="en-US" sz="2000" dirty="0">
-                <a:solidFill>
-                  <a:srgbClr val="2F3338"/>
-                </a:solidFill>
-                <a:latin typeface="Segoe UI"/>
-              </a:rPr>
-              <a:t> </a:t>
-            </a:r>
-            <a:r>
-              <a:rPr lang="en-US" sz="2000" dirty="0" err="1">
+              <a:rPr lang="en-US" sz="1600" dirty="0">
+                <a:solidFill>
+                  <a:srgbClr val="2F3338"/>
+                </a:solidFill>
+                <a:latin typeface="Segoe UI"/>
+              </a:rPr>
+              <a:t> </a:t>
+            </a:r>
+            <a:r>
+              <a:rPr lang="en-US" sz="1600" dirty="0" err="1">
                 <a:solidFill>
                   <a:srgbClr val="2F3338"/>
                 </a:solidFill>
@@ -21553,16 +22319,16 @@
               <a:t>tipuri</a:t>
             </a:r>
             <a:r>
-              <a:rPr lang="en-US" sz="2000" dirty="0">
-                <a:solidFill>
-                  <a:srgbClr val="2F3338"/>
-                </a:solidFill>
-                <a:latin typeface="Segoe UI"/>
-              </a:rPr>
-              <a:t> </a:t>
-            </a:r>
-            <a:r>
-              <a:rPr lang="en-US" sz="2000" dirty="0" err="1">
+              <a:rPr lang="en-US" sz="1600" dirty="0">
+                <a:solidFill>
+                  <a:srgbClr val="2F3338"/>
+                </a:solidFill>
+                <a:latin typeface="Segoe UI"/>
+              </a:rPr>
+              <a:t> </a:t>
+            </a:r>
+            <a:r>
+              <a:rPr lang="en-US" sz="1600" dirty="0" err="1">
                 <a:solidFill>
                   <a:srgbClr val="2F3338"/>
                 </a:solidFill>
@@ -21571,7 +22337,7 @@
               <a:t>ce</a:t>
             </a:r>
             <a:r>
-              <a:rPr lang="en-US" sz="2000" dirty="0">
+              <a:rPr lang="en-US" sz="1600" dirty="0">
                 <a:solidFill>
                   <a:srgbClr val="2F3338"/>
                 </a:solidFill>
@@ -21580,7 +22346,7 @@
               <a:t> pot fi generate </a:t>
             </a:r>
             <a:r>
-              <a:rPr lang="en-US" sz="2000" dirty="0" err="1">
+              <a:rPr lang="en-US" sz="1600" dirty="0" err="1">
                 <a:solidFill>
                   <a:srgbClr val="2F3338"/>
                 </a:solidFill>
@@ -21588,7 +22354,7 @@
               </a:rPr>
               <a:t>aleatoriu</a:t>
             </a:r>
-            <a:endParaRPr lang="en-US" sz="2000" dirty="0">
+            <a:endParaRPr lang="en-US" sz="1600" dirty="0">
               <a:solidFill>
                 <a:srgbClr val="2F3338"/>
               </a:solidFill>
@@ -21605,7 +22371,7 @@
               </a:spcAft>
             </a:pPr>
             <a:r>
-              <a:rPr lang="en-US" sz="2000" dirty="0">
+              <a:rPr lang="en-US" sz="1600" dirty="0">
                 <a:solidFill>
                   <a:srgbClr val="2F3338"/>
                 </a:solidFill>
@@ -21614,7 +22380,7 @@
               <a:t>- </a:t>
             </a:r>
             <a:r>
-              <a:rPr lang="en-US" sz="2000" b="1" dirty="0">
+              <a:rPr lang="en-US" sz="1600" b="1" dirty="0">
                 <a:solidFill>
                   <a:srgbClr val="1F4E79"/>
                 </a:solidFill>
@@ -21623,7 +22389,7 @@
               <a:t>Gen a</a:t>
             </a:r>
             <a:r>
-              <a:rPr lang="en-US" sz="2000" dirty="0">
+              <a:rPr lang="en-US" sz="1600" dirty="0">
                 <a:solidFill>
                   <a:srgbClr val="2F3338"/>
                 </a:solidFill>
@@ -21632,7 +22398,7 @@
               <a:t> - </a:t>
             </a:r>
             <a:r>
-              <a:rPr lang="en-US" sz="2000" dirty="0" err="1">
+              <a:rPr lang="en-US" sz="1600" dirty="0" err="1">
                 <a:solidFill>
                   <a:srgbClr val="2F3338"/>
                 </a:solidFill>
@@ -21641,16 +22407,16 @@
               <a:t>tipul</a:t>
             </a:r>
             <a:r>
-              <a:rPr lang="en-US" sz="2000" dirty="0">
-                <a:solidFill>
-                  <a:srgbClr val="2F3338"/>
-                </a:solidFill>
-                <a:latin typeface="Segoe UI"/>
-              </a:rPr>
-              <a:t> </a:t>
-            </a:r>
-            <a:r>
-              <a:rPr lang="en-US" sz="2000" dirty="0" err="1">
+              <a:rPr lang="en-US" sz="1600" dirty="0">
+                <a:solidFill>
+                  <a:srgbClr val="2F3338"/>
+                </a:solidFill>
+                <a:latin typeface="Segoe UI"/>
+              </a:rPr>
+              <a:t> </a:t>
+            </a:r>
+            <a:r>
+              <a:rPr lang="en-US" sz="1600" dirty="0" err="1">
                 <a:solidFill>
                   <a:srgbClr val="2F3338"/>
                 </a:solidFill>
@@ -21659,7 +22425,7 @@
               <a:t>unui</a:t>
             </a:r>
             <a:r>
-              <a:rPr lang="en-US" sz="2000" dirty="0">
+              <a:rPr lang="en-US" sz="1600" dirty="0">
                 <a:solidFill>
                   <a:srgbClr val="2F3338"/>
                 </a:solidFill>
@@ -21668,7 +22434,7 @@
               <a:t> generator de </a:t>
             </a:r>
             <a:r>
-              <a:rPr lang="en-US" sz="2000" dirty="0" err="1" smtClean="0">
+              <a:rPr lang="en-US" sz="1600" dirty="0" err="1" smtClean="0">
                 <a:solidFill>
                   <a:srgbClr val="2F3338"/>
                 </a:solidFill>
@@ -21676,7 +22442,7 @@
               </a:rPr>
               <a:t>valori</a:t>
             </a:r>
-            <a:endParaRPr lang="en-US" sz="2000" dirty="0">
+            <a:endParaRPr lang="en-US" sz="1600" dirty="0">
               <a:solidFill>
                 <a:srgbClr val="2F3338"/>
               </a:solidFill>
@@ -21693,7 +22459,7 @@
               </a:spcAft>
             </a:pPr>
             <a:r>
-              <a:rPr lang="en-US" sz="2000" dirty="0">
+              <a:rPr lang="en-US" sz="1600" dirty="0">
                 <a:solidFill>
                   <a:srgbClr val="2F3338"/>
                 </a:solidFill>
@@ -21702,7 +22468,7 @@
               <a:t>- </a:t>
             </a:r>
             <a:r>
-              <a:rPr lang="en-US" sz="2000" b="1" dirty="0">
+              <a:rPr lang="en-US" sz="1600" b="1" dirty="0">
                 <a:solidFill>
                   <a:srgbClr val="1F4E79"/>
                 </a:solidFill>
@@ -21711,7 +22477,7 @@
               <a:t>frequency</a:t>
             </a:r>
             <a:r>
-              <a:rPr lang="en-US" sz="2000" dirty="0">
+              <a:rPr lang="en-US" sz="1600" dirty="0">
                 <a:solidFill>
                   <a:srgbClr val="2F3338"/>
                 </a:solidFill>
@@ -21720,7 +22486,7 @@
               <a:t> - </a:t>
             </a:r>
             <a:r>
-              <a:rPr lang="en-US" sz="2000" dirty="0" err="1">
+              <a:rPr lang="en-US" sz="1600" dirty="0" err="1">
                 <a:solidFill>
                   <a:srgbClr val="2F3338"/>
                 </a:solidFill>
@@ -21729,16 +22495,16 @@
               <a:t>alege</a:t>
             </a:r>
             <a:r>
-              <a:rPr lang="en-US" sz="2000" dirty="0">
-                <a:solidFill>
-                  <a:srgbClr val="2F3338"/>
-                </a:solidFill>
-                <a:latin typeface="Segoe UI"/>
-              </a:rPr>
-              <a:t> </a:t>
-            </a:r>
-            <a:r>
-              <a:rPr lang="ro-RO" sz="2000" dirty="0" err="1">
+              <a:rPr lang="en-US" sz="1600" dirty="0">
+                <a:solidFill>
+                  <a:srgbClr val="2F3338"/>
+                </a:solidFill>
+                <a:latin typeface="Segoe UI"/>
+              </a:rPr>
+              <a:t> </a:t>
+            </a:r>
+            <a:r>
+              <a:rPr lang="ro-RO" sz="1600" dirty="0" err="1">
                 <a:solidFill>
                   <a:srgbClr val="2F3338"/>
                 </a:solidFill>
@@ -21747,7 +22513,7 @@
               <a:t>î</a:t>
             </a:r>
             <a:r>
-              <a:rPr lang="en-US" sz="2000" dirty="0" err="1" smtClean="0">
+              <a:rPr lang="en-US" sz="1600" dirty="0" err="1" smtClean="0">
                 <a:solidFill>
                   <a:srgbClr val="2F3338"/>
                 </a:solidFill>
@@ -21756,16 +22522,16 @@
               <a:t>ntre</a:t>
             </a:r>
             <a:r>
-              <a:rPr lang="en-US" sz="2000" dirty="0" smtClean="0">
-                <a:solidFill>
-                  <a:srgbClr val="2F3338"/>
-                </a:solidFill>
-                <a:latin typeface="Segoe UI"/>
-              </a:rPr>
-              <a:t> </a:t>
-            </a:r>
-            <a:r>
-              <a:rPr lang="en-US" sz="2000" dirty="0" err="1">
+              <a:rPr lang="en-US" sz="1600" dirty="0" smtClean="0">
+                <a:solidFill>
+                  <a:srgbClr val="2F3338"/>
+                </a:solidFill>
+                <a:latin typeface="Segoe UI"/>
+              </a:rPr>
+              <a:t> </a:t>
+            </a:r>
+            <a:r>
+              <a:rPr lang="en-US" sz="1600" dirty="0" err="1">
                 <a:solidFill>
                   <a:srgbClr val="2F3338"/>
                 </a:solidFill>
@@ -21774,7 +22540,7 @@
               <a:t>generatoare</a:t>
             </a:r>
             <a:r>
-              <a:rPr lang="en-US" sz="2000" dirty="0">
+              <a:rPr lang="en-US" sz="1600" dirty="0">
                 <a:solidFill>
                   <a:srgbClr val="2F3338"/>
                 </a:solidFill>
@@ -21783,7 +22549,7 @@
               <a:t> cu </a:t>
             </a:r>
             <a:r>
-              <a:rPr lang="en-US" sz="2000" dirty="0" err="1">
+              <a:rPr lang="en-US" sz="1600" dirty="0" err="1">
                 <a:solidFill>
                   <a:srgbClr val="2F3338"/>
                 </a:solidFill>
@@ -21792,16 +22558,16 @@
               <a:t>ponderi</a:t>
             </a:r>
             <a:r>
-              <a:rPr lang="en-US" sz="2000" dirty="0">
-                <a:solidFill>
-                  <a:srgbClr val="2F3338"/>
-                </a:solidFill>
-                <a:latin typeface="Segoe UI"/>
-              </a:rPr>
-              <a:t> </a:t>
-            </a:r>
-            <a:r>
-              <a:rPr lang="en-US" sz="2000" dirty="0" err="1">
+              <a:rPr lang="en-US" sz="1600" dirty="0">
+                <a:solidFill>
+                  <a:srgbClr val="2F3338"/>
+                </a:solidFill>
+                <a:latin typeface="Segoe UI"/>
+              </a:rPr>
+              <a:t> </a:t>
+            </a:r>
+            <a:r>
+              <a:rPr lang="en-US" sz="1600" dirty="0" err="1">
                 <a:solidFill>
                   <a:srgbClr val="2F3338"/>
                 </a:solidFill>
@@ -21809,7 +22575,7 @@
               </a:rPr>
               <a:t>explicite</a:t>
             </a:r>
-            <a:endParaRPr lang="en-US" sz="2000" dirty="0">
+            <a:endParaRPr lang="en-US" sz="1600" dirty="0">
               <a:solidFill>
                 <a:srgbClr val="2F3338"/>
               </a:solidFill>
@@ -21826,7 +22592,7 @@
               </a:spcAft>
             </a:pPr>
             <a:r>
-              <a:rPr lang="en-US" sz="2000" dirty="0">
+              <a:rPr lang="en-US" sz="1600" dirty="0">
                 <a:solidFill>
                   <a:srgbClr val="2F3338"/>
                 </a:solidFill>
@@ -21835,7 +22601,7 @@
               <a:t>- </a:t>
             </a:r>
             <a:r>
-              <a:rPr lang="en-US" sz="2000" b="1" dirty="0">
+              <a:rPr lang="en-US" sz="1600" b="1" dirty="0">
                 <a:solidFill>
                   <a:srgbClr val="1F4E79"/>
                 </a:solidFill>
@@ -21844,7 +22610,7 @@
               <a:t>sized</a:t>
             </a:r>
             <a:r>
-              <a:rPr lang="en-US" sz="2000" dirty="0">
+              <a:rPr lang="en-US" sz="1600" dirty="0">
                 <a:solidFill>
                   <a:srgbClr val="2F3338"/>
                 </a:solidFill>
@@ -21853,7 +22619,7 @@
               <a:t> - </a:t>
             </a:r>
             <a:r>
-              <a:rPr lang="en-US" sz="2000" dirty="0" err="1" smtClean="0">
+              <a:rPr lang="en-US" sz="1600" dirty="0" err="1" smtClean="0">
                 <a:solidFill>
                   <a:srgbClr val="2F3338"/>
                 </a:solidFill>
@@ -21862,7 +22628,7 @@
               <a:t>controleaz</a:t>
             </a:r>
             <a:r>
-              <a:rPr lang="ro-RO" sz="2000" dirty="0" smtClean="0">
+              <a:rPr lang="ro-RO" sz="1600" dirty="0" smtClean="0">
                 <a:solidFill>
                   <a:srgbClr val="2F3338"/>
                 </a:solidFill>
@@ -21871,16 +22637,16 @@
               <a:t>ă</a:t>
             </a:r>
             <a:r>
-              <a:rPr lang="en-US" sz="2000" dirty="0" smtClean="0">
-                <a:solidFill>
-                  <a:srgbClr val="2F3338"/>
-                </a:solidFill>
-                <a:latin typeface="Segoe UI"/>
-              </a:rPr>
-              <a:t> </a:t>
-            </a:r>
-            <a:r>
-              <a:rPr lang="en-US" sz="2000" dirty="0" err="1">
+              <a:rPr lang="en-US" sz="1600" dirty="0" smtClean="0">
+                <a:solidFill>
+                  <a:srgbClr val="2F3338"/>
+                </a:solidFill>
+                <a:latin typeface="Segoe UI"/>
+              </a:rPr>
+              <a:t> </a:t>
+            </a:r>
+            <a:r>
+              <a:rPr lang="en-US" sz="1600" dirty="0" err="1">
                 <a:solidFill>
                   <a:srgbClr val="2F3338"/>
                 </a:solidFill>
@@ -21889,16 +22655,16 @@
               <a:t>marimea</a:t>
             </a:r>
             <a:r>
-              <a:rPr lang="en-US" sz="2000" dirty="0">
-                <a:solidFill>
-                  <a:srgbClr val="2F3338"/>
-                </a:solidFill>
-                <a:latin typeface="Segoe UI"/>
-              </a:rPr>
-              <a:t> </a:t>
-            </a:r>
-            <a:r>
-              <a:rPr lang="en-US" sz="2000" dirty="0" err="1">
+              <a:rPr lang="en-US" sz="1600" dirty="0">
+                <a:solidFill>
+                  <a:srgbClr val="2F3338"/>
+                </a:solidFill>
+                <a:latin typeface="Segoe UI"/>
+              </a:rPr>
+              <a:t> </a:t>
+            </a:r>
+            <a:r>
+              <a:rPr lang="en-US" sz="1600" dirty="0" err="1">
                 <a:solidFill>
                   <a:srgbClr val="2F3338"/>
                 </a:solidFill>
@@ -21907,7 +22673,7 @@
               <a:t>expresiilor</a:t>
             </a:r>
             <a:r>
-              <a:rPr lang="en-US" sz="2000" dirty="0">
+              <a:rPr lang="en-US" sz="1600" dirty="0">
                 <a:solidFill>
                   <a:srgbClr val="2F3338"/>
                 </a:solidFill>
@@ -21926,7 +22692,7 @@
               </a:spcAft>
             </a:pPr>
             <a:r>
-              <a:rPr lang="en-US" sz="2000" dirty="0">
+              <a:rPr lang="en-US" sz="1600" dirty="0">
                 <a:solidFill>
                   <a:srgbClr val="2F3338"/>
                 </a:solidFill>
@@ -21935,7 +22701,7 @@
               <a:t>- </a:t>
             </a:r>
             <a:r>
-              <a:rPr lang="en-US" sz="2000" b="1" dirty="0">
+              <a:rPr lang="en-US" sz="1600" b="1" dirty="0">
                 <a:solidFill>
                   <a:srgbClr val="1F4E79"/>
                 </a:solidFill>
@@ -21944,7 +22710,7 @@
               <a:t>shrink</a:t>
             </a:r>
             <a:r>
-              <a:rPr lang="en-US" sz="2000" dirty="0">
+              <a:rPr lang="en-US" sz="1600" dirty="0">
                 <a:solidFill>
                   <a:srgbClr val="2F3338"/>
                 </a:solidFill>
@@ -21953,7 +22719,7 @@
               <a:t> - reduce </a:t>
             </a:r>
             <a:r>
-              <a:rPr lang="en-US" sz="2000" dirty="0" err="1">
+              <a:rPr lang="en-US" sz="1600" dirty="0" err="1">
                 <a:solidFill>
                   <a:srgbClr val="2F3338"/>
                 </a:solidFill>
@@ -21962,7 +22728,7 @@
               <a:t>contraexemplul</a:t>
             </a:r>
             <a:r>
-              <a:rPr lang="en-US" sz="2000" dirty="0">
+              <a:rPr lang="en-US" sz="1600" dirty="0">
                 <a:solidFill>
                   <a:srgbClr val="2F3338"/>
                 </a:solidFill>
@@ -21971,7 +22737,7 @@
               <a:t> la forma </a:t>
             </a:r>
             <a:r>
-              <a:rPr lang="en-US" sz="2000" dirty="0" smtClean="0">
+              <a:rPr lang="en-US" sz="1600" dirty="0" smtClean="0">
                 <a:solidFill>
                   <a:srgbClr val="2F3338"/>
                 </a:solidFill>
@@ -21980,7 +22746,7 @@
               <a:t>minim</a:t>
             </a:r>
             <a:r>
-              <a:rPr lang="ro-RO" sz="2000" dirty="0" smtClean="0">
+              <a:rPr lang="ro-RO" sz="1600" dirty="0" smtClean="0">
                 <a:solidFill>
                   <a:srgbClr val="2F3338"/>
                 </a:solidFill>
@@ -21988,7 +22754,7 @@
               </a:rPr>
               <a:t>ă</a:t>
             </a:r>
-            <a:endParaRPr lang="en-US" sz="2000" dirty="0">
+            <a:endParaRPr lang="en-US" sz="1600" dirty="0">
               <a:solidFill>
                 <a:srgbClr val="2F3338"/>
               </a:solidFill>
@@ -22005,7 +22771,7 @@
               </a:spcAft>
             </a:pPr>
             <a:r>
-              <a:rPr lang="en-US" sz="2000" dirty="0">
+              <a:rPr lang="en-US" sz="1600" dirty="0">
                 <a:solidFill>
                   <a:srgbClr val="2F3338"/>
                 </a:solidFill>
@@ -22014,7 +22780,7 @@
               <a:t>- </a:t>
             </a:r>
             <a:r>
-              <a:rPr lang="en-US" sz="2000" b="1" dirty="0">
+              <a:rPr lang="en-US" sz="1600" b="1" dirty="0">
                 <a:solidFill>
                   <a:srgbClr val="1F4E79"/>
                 </a:solidFill>
@@ -22023,7 +22789,7 @@
               <a:t>classify</a:t>
             </a:r>
             <a:r>
-              <a:rPr lang="en-US" sz="2000" dirty="0">
+              <a:rPr lang="en-US" sz="1600" dirty="0">
                 <a:solidFill>
                   <a:srgbClr val="2F3338"/>
                 </a:solidFill>
@@ -22032,7 +22798,7 @@
               <a:t> - </a:t>
             </a:r>
             <a:r>
-              <a:rPr lang="en-US" sz="2000" dirty="0" err="1" smtClean="0">
+              <a:rPr lang="en-US" sz="1600" dirty="0" err="1" smtClean="0">
                 <a:solidFill>
                   <a:srgbClr val="2F3338"/>
                 </a:solidFill>
@@ -22041,7 +22807,7 @@
               <a:t>arat</a:t>
             </a:r>
             <a:r>
-              <a:rPr lang="ro-RO" sz="2000" dirty="0" smtClean="0">
+              <a:rPr lang="ro-RO" sz="1600" dirty="0" smtClean="0">
                 <a:solidFill>
                   <a:srgbClr val="2F3338"/>
                 </a:solidFill>
@@ -22050,16 +22816,16 @@
               <a:t>ă</a:t>
             </a:r>
             <a:r>
-              <a:rPr lang="en-US" sz="2000" dirty="0" smtClean="0">
-                <a:solidFill>
-                  <a:srgbClr val="2F3338"/>
-                </a:solidFill>
-                <a:latin typeface="Segoe UI"/>
-              </a:rPr>
-              <a:t> </a:t>
-            </a:r>
-            <a:r>
-              <a:rPr lang="en-US" sz="2000" dirty="0" err="1" smtClean="0">
+              <a:rPr lang="en-US" sz="1600" dirty="0" smtClean="0">
+                <a:solidFill>
+                  <a:srgbClr val="2F3338"/>
+                </a:solidFill>
+                <a:latin typeface="Segoe UI"/>
+              </a:rPr>
+              <a:t> </a:t>
+            </a:r>
+            <a:r>
+              <a:rPr lang="en-US" sz="1600" dirty="0" err="1" smtClean="0">
                 <a:solidFill>
                   <a:srgbClr val="2F3338"/>
                 </a:solidFill>
@@ -22068,7 +22834,7 @@
               <a:t>distribu</a:t>
             </a:r>
             <a:r>
-              <a:rPr lang="ro-RO" sz="2000" dirty="0" smtClean="0">
+              <a:rPr lang="ro-RO" sz="1600" dirty="0" smtClean="0">
                 <a:solidFill>
                   <a:srgbClr val="2F3338"/>
                 </a:solidFill>
@@ -22077,7 +22843,7 @@
               <a:t>ț</a:t>
             </a:r>
             <a:r>
-              <a:rPr lang="en-US" sz="2000" dirty="0" err="1" smtClean="0">
+              <a:rPr lang="en-US" sz="1600" dirty="0" err="1" smtClean="0">
                 <a:solidFill>
                   <a:srgbClr val="2F3338"/>
                 </a:solidFill>
@@ -22086,16 +22852,16 @@
               <a:t>ia</a:t>
             </a:r>
             <a:r>
-              <a:rPr lang="en-US" sz="2000" dirty="0" smtClean="0">
-                <a:solidFill>
-                  <a:srgbClr val="2F3338"/>
-                </a:solidFill>
-                <a:latin typeface="Segoe UI"/>
-              </a:rPr>
-              <a:t> </a:t>
-            </a:r>
-            <a:r>
-              <a:rPr lang="en-US" sz="2000" dirty="0" err="1">
+              <a:rPr lang="en-US" sz="1600" dirty="0" smtClean="0">
+                <a:solidFill>
+                  <a:srgbClr val="2F3338"/>
+                </a:solidFill>
+                <a:latin typeface="Segoe UI"/>
+              </a:rPr>
+              <a:t> </a:t>
+            </a:r>
+            <a:r>
+              <a:rPr lang="en-US" sz="1600" dirty="0" err="1">
                 <a:solidFill>
                   <a:srgbClr val="2F3338"/>
                 </a:solidFill>
@@ -22104,7 +22870,7 @@
               <a:t>cazurilor</a:t>
             </a:r>
             <a:r>
-              <a:rPr lang="en-US" sz="2000" dirty="0">
+              <a:rPr lang="en-US" sz="1600" dirty="0">
                 <a:solidFill>
                   <a:srgbClr val="2F3338"/>
                 </a:solidFill>
@@ -22123,7 +22889,7 @@
               </a:spcAft>
             </a:pPr>
             <a:r>
-              <a:rPr lang="en-US" sz="2000" dirty="0">
+              <a:rPr lang="en-US" sz="1600" dirty="0">
                 <a:solidFill>
                   <a:srgbClr val="2F3338"/>
                 </a:solidFill>
@@ -22132,7 +22898,7 @@
               <a:t>- </a:t>
             </a:r>
             <a:r>
-              <a:rPr lang="en-US" sz="2000" b="1" dirty="0" err="1">
+              <a:rPr lang="en-US" sz="1600" b="1" dirty="0" err="1">
                 <a:solidFill>
                   <a:srgbClr val="1F4E79"/>
                 </a:solidFill>
@@ -22141,7 +22907,7 @@
               <a:t>quickCheckWith</a:t>
             </a:r>
             <a:r>
-              <a:rPr lang="en-US" sz="2000" dirty="0">
+              <a:rPr lang="en-US" sz="1600" dirty="0">
                 <a:solidFill>
                   <a:srgbClr val="2F3338"/>
                 </a:solidFill>
@@ -22150,7 +22916,7 @@
               <a:t> - </a:t>
             </a:r>
             <a:r>
-              <a:rPr lang="en-US" sz="2000" dirty="0" err="1" smtClean="0">
+              <a:rPr lang="en-US" sz="1600" dirty="0" err="1" smtClean="0">
                 <a:solidFill>
                   <a:srgbClr val="2F3338"/>
                 </a:solidFill>
@@ -22159,7 +22925,7 @@
               <a:t>ruleaz</a:t>
             </a:r>
             <a:r>
-              <a:rPr lang="ro-RO" sz="2000" dirty="0" smtClean="0">
+              <a:rPr lang="ro-RO" sz="1600" dirty="0" smtClean="0">
                 <a:solidFill>
                   <a:srgbClr val="2F3338"/>
                 </a:solidFill>
@@ -22168,16 +22934,16 @@
               <a:t>ă</a:t>
             </a:r>
             <a:r>
-              <a:rPr lang="en-US" sz="2000" dirty="0" smtClean="0">
-                <a:solidFill>
-                  <a:srgbClr val="2F3338"/>
-                </a:solidFill>
-                <a:latin typeface="Segoe UI"/>
-              </a:rPr>
-              <a:t> </a:t>
-            </a:r>
-            <a:r>
-              <a:rPr lang="en-US" sz="2000" dirty="0">
+              <a:rPr lang="en-US" sz="1600" dirty="0" smtClean="0">
+                <a:solidFill>
+                  <a:srgbClr val="2F3338"/>
+                </a:solidFill>
+                <a:latin typeface="Segoe UI"/>
+              </a:rPr>
+              <a:t> </a:t>
+            </a:r>
+            <a:r>
+              <a:rPr lang="en-US" sz="1600" dirty="0">
                 <a:solidFill>
                   <a:srgbClr val="2F3338"/>
                 </a:solidFill>
@@ -22186,7 +22952,7 @@
               <a:t>cu </a:t>
             </a:r>
             <a:r>
-              <a:rPr lang="en-US" sz="2000" dirty="0" err="1">
+              <a:rPr lang="en-US" sz="1600" dirty="0" err="1">
                 <a:solidFill>
                   <a:srgbClr val="2F3338"/>
                 </a:solidFill>
@@ -22195,7 +22961,7 @@
               <a:t>parametri</a:t>
             </a:r>
             <a:r>
-              <a:rPr lang="en-US" sz="2000" dirty="0">
+              <a:rPr lang="en-US" sz="1600" dirty="0">
                 <a:solidFill>
                   <a:srgbClr val="2F3338"/>
                 </a:solidFill>
@@ -22204,7 +22970,7 @@
               <a:t> custom (</a:t>
             </a:r>
             <a:r>
-              <a:rPr lang="en-US" sz="2000" dirty="0" err="1">
+              <a:rPr lang="en-US" sz="1600" dirty="0" err="1">
                 <a:solidFill>
                   <a:srgbClr val="2F3338"/>
                 </a:solidFill>
@@ -22213,7 +22979,7 @@
               <a:t>maxSuccess</a:t>
             </a:r>
             <a:r>
-              <a:rPr lang="en-US" sz="2000" dirty="0">
+              <a:rPr lang="en-US" sz="1600" dirty="0">
                 <a:solidFill>
                   <a:srgbClr val="2F3338"/>
                 </a:solidFill>
@@ -22222,7 +22988,7 @@
               <a:t>, </a:t>
             </a:r>
             <a:r>
-              <a:rPr lang="en-US" sz="2000" dirty="0" err="1">
+              <a:rPr lang="en-US" sz="1600" dirty="0" err="1">
                 <a:solidFill>
                   <a:srgbClr val="2F3338"/>
                 </a:solidFill>
@@ -22231,13 +22997,452 @@
               <a:t>maxSize</a:t>
             </a:r>
             <a:r>
-              <a:rPr lang="en-US" sz="2000" dirty="0">
+              <a:rPr lang="en-US" sz="1600" dirty="0">
                 <a:solidFill>
                   <a:srgbClr val="2F3338"/>
                 </a:solidFill>
                 <a:latin typeface="Segoe UI"/>
               </a:rPr>
               <a:t>)</a:t>
+            </a:r>
+          </a:p>
+        </p:txBody>
+      </p:sp>
+      <p:sp>
+        <p:nvSpPr>
+          <p:cNvPr id="4" name="Rounded Rectangle 3"/>
+          <p:cNvSpPr/>
+          <p:nvPr/>
+        </p:nvSpPr>
+        <p:spPr>
+          <a:xfrm>
+            <a:off x="5854702" y="2887133"/>
+            <a:ext cx="6261098" cy="1693334"/>
+          </a:xfrm>
+          <a:prstGeom prst="roundRect">
+            <a:avLst/>
+          </a:prstGeom>
+          <a:solidFill>
+            <a:srgbClr val="1E1E1E"/>
+          </a:solidFill>
+          <a:ln w="15240">
+            <a:solidFill>
+              <a:srgbClr val="2D2D30"/>
+            </a:solidFill>
+          </a:ln>
+        </p:spPr>
+        <p:style>
+          <a:lnRef idx="1">
+            <a:schemeClr val="accent1"/>
+          </a:lnRef>
+          <a:fillRef idx="3">
+            <a:schemeClr val="accent1"/>
+          </a:fillRef>
+          <a:effectRef idx="2">
+            <a:schemeClr val="accent1"/>
+          </a:effectRef>
+          <a:fontRef idx="minor">
+            <a:schemeClr val="lt1"/>
+          </a:fontRef>
+        </p:style>
+        <p:txBody>
+          <a:bodyPr rtlCol="0" anchor="ctr"/>
+          <a:lstStyle/>
+          <a:p>
+            <a:pPr algn="ctr"/>
+            <a:endParaRPr/>
+          </a:p>
+        </p:txBody>
+      </p:sp>
+      <p:sp>
+        <p:nvSpPr>
+          <p:cNvPr id="5" name="Content Placeholder 5"/>
+          <p:cNvSpPr txBox="1">
+            <a:spLocks/>
+          </p:cNvSpPr>
+          <p:nvPr/>
+        </p:nvSpPr>
+        <p:spPr>
+          <a:xfrm>
+            <a:off x="5791200" y="2958272"/>
+            <a:ext cx="6587065" cy="2910821"/>
+          </a:xfrm>
+          <a:prstGeom prst="rect">
+            <a:avLst/>
+          </a:prstGeom>
+        </p:spPr>
+        <p:txBody>
+          <a:bodyPr>
+            <a:normAutofit/>
+          </a:bodyPr>
+          <a:lstStyle>
+            <a:lvl1pPr marL="91440" indent="-91440" algn="l" defTabSz="914400" rtl="0" eaLnBrk="1" latinLnBrk="0" hangingPunct="1">
+              <a:lnSpc>
+                <a:spcPct val="110000"/>
+              </a:lnSpc>
+              <a:spcBef>
+                <a:spcPts val="1200"/>
+              </a:spcBef>
+              <a:spcAft>
+                <a:spcPts val="200"/>
+              </a:spcAft>
+              <a:buClr>
+                <a:schemeClr val="accent1"/>
+              </a:buClr>
+              <a:buSzPct val="100000"/>
+              <a:buFont typeface="Calibri" panose="020F0502020204030204" pitchFamily="34" charset="0"/>
+              <a:buChar char=" "/>
+              <a:defRPr sz="1900" kern="1200">
+                <a:solidFill>
+                  <a:schemeClr val="tx1">
+                    <a:lumMod val="75000"/>
+                    <a:lumOff val="25000"/>
+                  </a:schemeClr>
+                </a:solidFill>
+                <a:latin typeface="+mn-lt"/>
+                <a:ea typeface="+mn-ea"/>
+                <a:cs typeface="+mn-cs"/>
+              </a:defRPr>
+            </a:lvl1pPr>
+            <a:lvl2pPr marL="384048" indent="-182880" algn="l" defTabSz="914400" rtl="0" eaLnBrk="1" latinLnBrk="0" hangingPunct="1">
+              <a:lnSpc>
+                <a:spcPct val="100000"/>
+              </a:lnSpc>
+              <a:spcBef>
+                <a:spcPts val="200"/>
+              </a:spcBef>
+              <a:spcAft>
+                <a:spcPts val="400"/>
+              </a:spcAft>
+              <a:buClrTx/>
+              <a:buFont typeface="Calibri" pitchFamily="34" charset="0"/>
+              <a:buChar char="◦"/>
+              <a:defRPr sz="1700" kern="1200">
+                <a:solidFill>
+                  <a:schemeClr val="tx1">
+                    <a:lumMod val="75000"/>
+                    <a:lumOff val="25000"/>
+                  </a:schemeClr>
+                </a:solidFill>
+                <a:latin typeface="+mn-lt"/>
+                <a:ea typeface="+mn-ea"/>
+                <a:cs typeface="+mn-cs"/>
+              </a:defRPr>
+            </a:lvl2pPr>
+            <a:lvl3pPr marL="566928" indent="-182880" algn="l" defTabSz="914400" rtl="0" eaLnBrk="1" latinLnBrk="0" hangingPunct="1">
+              <a:lnSpc>
+                <a:spcPct val="100000"/>
+              </a:lnSpc>
+              <a:spcBef>
+                <a:spcPts val="200"/>
+              </a:spcBef>
+              <a:spcAft>
+                <a:spcPts val="400"/>
+              </a:spcAft>
+              <a:buClrTx/>
+              <a:buFont typeface="Calibri" pitchFamily="34" charset="0"/>
+              <a:buChar char="◦"/>
+              <a:defRPr sz="1300" kern="1200">
+                <a:solidFill>
+                  <a:schemeClr val="tx1">
+                    <a:lumMod val="75000"/>
+                    <a:lumOff val="25000"/>
+                  </a:schemeClr>
+                </a:solidFill>
+                <a:latin typeface="+mn-lt"/>
+                <a:ea typeface="+mn-ea"/>
+                <a:cs typeface="+mn-cs"/>
+              </a:defRPr>
+            </a:lvl3pPr>
+            <a:lvl4pPr marL="749808" indent="-182880" algn="l" defTabSz="914400" rtl="0" eaLnBrk="1" latinLnBrk="0" hangingPunct="1">
+              <a:lnSpc>
+                <a:spcPct val="100000"/>
+              </a:lnSpc>
+              <a:spcBef>
+                <a:spcPts val="200"/>
+              </a:spcBef>
+              <a:spcAft>
+                <a:spcPts val="400"/>
+              </a:spcAft>
+              <a:buClrTx/>
+              <a:buFont typeface="Calibri" pitchFamily="34" charset="0"/>
+              <a:buChar char="◦"/>
+              <a:defRPr sz="1300" kern="1200">
+                <a:solidFill>
+                  <a:schemeClr val="tx1">
+                    <a:lumMod val="75000"/>
+                    <a:lumOff val="25000"/>
+                  </a:schemeClr>
+                </a:solidFill>
+                <a:latin typeface="+mn-lt"/>
+                <a:ea typeface="+mn-ea"/>
+                <a:cs typeface="+mn-cs"/>
+              </a:defRPr>
+            </a:lvl4pPr>
+            <a:lvl5pPr marL="932688" indent="-182880" algn="l" defTabSz="914400" rtl="0" eaLnBrk="1" latinLnBrk="0" hangingPunct="1">
+              <a:lnSpc>
+                <a:spcPct val="100000"/>
+              </a:lnSpc>
+              <a:spcBef>
+                <a:spcPts val="200"/>
+              </a:spcBef>
+              <a:spcAft>
+                <a:spcPts val="400"/>
+              </a:spcAft>
+              <a:buClrTx/>
+              <a:buFont typeface="Calibri" pitchFamily="34" charset="0"/>
+              <a:buChar char="◦"/>
+              <a:defRPr sz="1300" kern="1200">
+                <a:solidFill>
+                  <a:schemeClr val="tx1">
+                    <a:lumMod val="75000"/>
+                    <a:lumOff val="25000"/>
+                  </a:schemeClr>
+                </a:solidFill>
+                <a:latin typeface="+mn-lt"/>
+                <a:ea typeface="+mn-ea"/>
+                <a:cs typeface="+mn-cs"/>
+              </a:defRPr>
+            </a:lvl5pPr>
+            <a:lvl6pPr marL="1100000" indent="-228600" algn="l" defTabSz="914400" rtl="0" eaLnBrk="1" latinLnBrk="0" hangingPunct="1">
+              <a:lnSpc>
+                <a:spcPct val="90000"/>
+              </a:lnSpc>
+              <a:spcBef>
+                <a:spcPts val="200"/>
+              </a:spcBef>
+              <a:spcAft>
+                <a:spcPts val="400"/>
+              </a:spcAft>
+              <a:buClr>
+                <a:schemeClr val="accent1"/>
+              </a:buClr>
+              <a:buFont typeface="Calibri" pitchFamily="34" charset="0"/>
+              <a:buChar char="◦"/>
+              <a:defRPr sz="1400" kern="1200">
+                <a:solidFill>
+                  <a:schemeClr val="tx1">
+                    <a:lumMod val="75000"/>
+                    <a:lumOff val="25000"/>
+                  </a:schemeClr>
+                </a:solidFill>
+                <a:latin typeface="+mn-lt"/>
+                <a:ea typeface="+mn-ea"/>
+                <a:cs typeface="+mn-cs"/>
+              </a:defRPr>
+            </a:lvl6pPr>
+            <a:lvl7pPr marL="1300000" indent="-228600" algn="l" defTabSz="914400" rtl="0" eaLnBrk="1" latinLnBrk="0" hangingPunct="1">
+              <a:lnSpc>
+                <a:spcPct val="90000"/>
+              </a:lnSpc>
+              <a:spcBef>
+                <a:spcPts val="200"/>
+              </a:spcBef>
+              <a:spcAft>
+                <a:spcPts val="400"/>
+              </a:spcAft>
+              <a:buClr>
+                <a:schemeClr val="accent1"/>
+              </a:buClr>
+              <a:buFont typeface="Calibri" pitchFamily="34" charset="0"/>
+              <a:buChar char="◦"/>
+              <a:defRPr sz="1400" kern="1200">
+                <a:solidFill>
+                  <a:schemeClr val="tx1">
+                    <a:lumMod val="75000"/>
+                    <a:lumOff val="25000"/>
+                  </a:schemeClr>
+                </a:solidFill>
+                <a:latin typeface="+mn-lt"/>
+                <a:ea typeface="+mn-ea"/>
+                <a:cs typeface="+mn-cs"/>
+              </a:defRPr>
+            </a:lvl7pPr>
+            <a:lvl8pPr marL="1500000" indent="-228600" algn="l" defTabSz="914400" rtl="0" eaLnBrk="1" latinLnBrk="0" hangingPunct="1">
+              <a:lnSpc>
+                <a:spcPct val="90000"/>
+              </a:lnSpc>
+              <a:spcBef>
+                <a:spcPts val="200"/>
+              </a:spcBef>
+              <a:spcAft>
+                <a:spcPts val="400"/>
+              </a:spcAft>
+              <a:buClr>
+                <a:schemeClr val="accent1"/>
+              </a:buClr>
+              <a:buFont typeface="Calibri" pitchFamily="34" charset="0"/>
+              <a:buChar char="◦"/>
+              <a:defRPr sz="1400" kern="1200">
+                <a:solidFill>
+                  <a:schemeClr val="tx1">
+                    <a:lumMod val="75000"/>
+                    <a:lumOff val="25000"/>
+                  </a:schemeClr>
+                </a:solidFill>
+                <a:latin typeface="+mn-lt"/>
+                <a:ea typeface="+mn-ea"/>
+                <a:cs typeface="+mn-cs"/>
+              </a:defRPr>
+            </a:lvl8pPr>
+            <a:lvl9pPr marL="1700000" indent="-228600" algn="l" defTabSz="914400" rtl="0" eaLnBrk="1" latinLnBrk="0" hangingPunct="1">
+              <a:lnSpc>
+                <a:spcPct val="90000"/>
+              </a:lnSpc>
+              <a:spcBef>
+                <a:spcPts val="200"/>
+              </a:spcBef>
+              <a:spcAft>
+                <a:spcPts val="400"/>
+              </a:spcAft>
+              <a:buClr>
+                <a:schemeClr val="accent1"/>
+              </a:buClr>
+              <a:buFont typeface="Calibri" pitchFamily="34" charset="0"/>
+              <a:buChar char="◦"/>
+              <a:defRPr sz="1400" kern="1200">
+                <a:solidFill>
+                  <a:schemeClr val="tx1">
+                    <a:lumMod val="75000"/>
+                    <a:lumOff val="25000"/>
+                  </a:schemeClr>
+                </a:solidFill>
+                <a:latin typeface="+mn-lt"/>
+                <a:ea typeface="+mn-ea"/>
+                <a:cs typeface="+mn-cs"/>
+              </a:defRPr>
+            </a:lvl9pPr>
+          </a:lstStyle>
+          <a:p>
+            <a:pPr>
+              <a:spcBef>
+                <a:spcPts val="0"/>
+              </a:spcBef>
+              <a:spcAft>
+                <a:spcPts val="0"/>
+              </a:spcAft>
+            </a:pPr>
+            <a:r>
+              <a:rPr lang="vi-VN" sz="1400" dirty="0">
+                <a:solidFill>
+                  <a:srgbClr val="569CD6"/>
+                </a:solidFill>
+                <a:latin typeface="Consolas"/>
+              </a:rPr>
+              <a:t>-- quickCheckWith + maxSuccess + maxSize</a:t>
+            </a:r>
+          </a:p>
+          <a:p>
+            <a:pPr>
+              <a:spcBef>
+                <a:spcPts val="0"/>
+              </a:spcBef>
+              <a:spcAft>
+                <a:spcPts val="0"/>
+              </a:spcAft>
+            </a:pPr>
+            <a:r>
+              <a:rPr lang="vi-VN" sz="1400" dirty="0">
+                <a:solidFill>
+                  <a:srgbClr val="569CD6"/>
+                </a:solidFill>
+                <a:latin typeface="Consolas"/>
+              </a:rPr>
+              <a:t>runProperty :: Testable prop =&gt; String -&gt; prop -&gt; IO ()</a:t>
+            </a:r>
+          </a:p>
+          <a:p>
+            <a:pPr>
+              <a:spcBef>
+                <a:spcPts val="0"/>
+              </a:spcBef>
+              <a:spcAft>
+                <a:spcPts val="0"/>
+              </a:spcAft>
+            </a:pPr>
+            <a:r>
+              <a:rPr lang="vi-VN" sz="1400" dirty="0">
+                <a:solidFill>
+                  <a:srgbClr val="569CD6"/>
+                </a:solidFill>
+                <a:latin typeface="Consolas"/>
+              </a:rPr>
+              <a:t>runProperty descriere prop = do</a:t>
+            </a:r>
+          </a:p>
+          <a:p>
+            <a:pPr>
+              <a:spcBef>
+                <a:spcPts val="0"/>
+              </a:spcBef>
+              <a:spcAft>
+                <a:spcPts val="0"/>
+              </a:spcAft>
+            </a:pPr>
+            <a:r>
+              <a:rPr lang="vi-VN" sz="1400" dirty="0">
+                <a:solidFill>
+                  <a:srgbClr val="569CD6"/>
+                </a:solidFill>
+                <a:latin typeface="Consolas"/>
+              </a:rPr>
+              <a:t>  putStrLn ("-- " ++ descriere)</a:t>
+            </a:r>
+          </a:p>
+          <a:p>
+            <a:pPr>
+              <a:spcBef>
+                <a:spcPts val="0"/>
+              </a:spcBef>
+              <a:spcAft>
+                <a:spcPts val="0"/>
+              </a:spcAft>
+            </a:pPr>
+            <a:r>
+              <a:rPr lang="vi-VN" sz="1400" dirty="0">
+                <a:solidFill>
+                  <a:srgbClr val="569CD6"/>
+                </a:solidFill>
+                <a:latin typeface="Consolas"/>
+              </a:rPr>
+              <a:t>  </a:t>
+            </a:r>
+            <a:r>
+              <a:rPr lang="vi-VN" sz="1400" b="1" i="1" dirty="0">
+                <a:solidFill>
+                  <a:srgbClr val="569CD6"/>
+                </a:solidFill>
+                <a:latin typeface="Consolas"/>
+              </a:rPr>
+              <a:t>quickCheckWith</a:t>
+            </a:r>
+            <a:r>
+              <a:rPr lang="vi-VN" sz="1400" dirty="0">
+                <a:solidFill>
+                  <a:srgbClr val="569CD6"/>
+                </a:solidFill>
+                <a:latin typeface="Consolas"/>
+              </a:rPr>
+              <a:t> stdArgs {maxSuccess = 120, maxSize = 12} prop</a:t>
+            </a:r>
+          </a:p>
+          <a:p>
+            <a:pPr>
+              <a:spcBef>
+                <a:spcPts val="0"/>
+              </a:spcBef>
+              <a:spcAft>
+                <a:spcPts val="0"/>
+              </a:spcAft>
+            </a:pPr>
+            <a:r>
+              <a:rPr lang="vi-VN" sz="1400" dirty="0">
+                <a:solidFill>
+                  <a:srgbClr val="569CD6"/>
+                </a:solidFill>
+                <a:latin typeface="Consolas"/>
+              </a:rPr>
+              <a:t>  putStrLn ""</a:t>
             </a:r>
           </a:p>
         </p:txBody>
@@ -22338,8 +23543,8 @@
         </p:nvSpPr>
         <p:spPr>
           <a:xfrm>
-            <a:off x="1097280" y="2057400"/>
-            <a:ext cx="9997440" cy="2806700"/>
+            <a:off x="165910" y="2057400"/>
+            <a:ext cx="7022290" cy="1955800"/>
           </a:xfrm>
           <a:prstGeom prst="roundRect">
             <a:avLst/>
@@ -22384,8 +23589,8 @@
         </p:nvSpPr>
         <p:spPr>
           <a:xfrm>
-            <a:off x="1325880" y="2194560"/>
-            <a:ext cx="9601200" cy="1697901"/>
+            <a:off x="394510" y="2194560"/>
+            <a:ext cx="6658223" cy="1944122"/>
           </a:xfrm>
           <a:prstGeom prst="rect">
             <a:avLst/>
@@ -23045,7 +24250,34 @@
                 </a:solidFill>
                 <a:latin typeface="Segoe UI"/>
               </a:rPr>
-              <a:t> custom + 16 </a:t>
+              <a:t> custom + </a:t>
+            </a:r>
+            <a:r>
+              <a:rPr sz="1600" b="0" i="0" dirty="0" smtClean="0">
+                <a:solidFill>
+                  <a:srgbClr val="2F3338"/>
+                </a:solidFill>
+                <a:latin typeface="Segoe UI"/>
+              </a:rPr>
+              <a:t>1</a:t>
+            </a:r>
+            <a:r>
+              <a:rPr lang="ro-RO" sz="1600" b="0" i="0" dirty="0" smtClean="0">
+                <a:solidFill>
+                  <a:srgbClr val="2F3338"/>
+                </a:solidFill>
+                <a:latin typeface="Segoe UI"/>
+              </a:rPr>
+              <a:t>9</a:t>
+            </a:r>
+            <a:r>
+              <a:rPr sz="1600" b="0" i="0" dirty="0" smtClean="0">
+                <a:solidFill>
+                  <a:srgbClr val="2F3338"/>
+                </a:solidFill>
+                <a:latin typeface="Segoe UI"/>
+              </a:rPr>
+              <a:t> </a:t>
             </a:r>
             <a:r>
               <a:rPr sz="1600" b="0" i="0" dirty="0" err="1" smtClean="0">
@@ -23089,6 +24321,205 @@
               </a:solidFill>
               <a:latin typeface="Segoe UI"/>
             </a:endParaRPr>
+          </a:p>
+        </p:txBody>
+      </p:sp>
+      <p:sp>
+        <p:nvSpPr>
+          <p:cNvPr id="5" name="Rectangle 4"/>
+          <p:cNvSpPr/>
+          <p:nvPr/>
+        </p:nvSpPr>
+        <p:spPr>
+          <a:xfrm>
+            <a:off x="7321976" y="2395771"/>
+            <a:ext cx="6096000" cy="2862322"/>
+          </a:xfrm>
+          <a:prstGeom prst="rect">
+            <a:avLst/>
+          </a:prstGeom>
+        </p:spPr>
+        <p:txBody>
+          <a:bodyPr>
+            <a:spAutoFit/>
+          </a:bodyPr>
+          <a:lstStyle/>
+          <a:p>
+            <a:r>
+              <a:rPr lang="en-US" sz="1200" dirty="0"/>
+              <a:t>Input:       "1 * x + -(-y)"</a:t>
+            </a:r>
+          </a:p>
+          <a:p>
+            <a:r>
+              <a:rPr lang="en-US" sz="1200" dirty="0"/>
+              <a:t>                  |</a:t>
+            </a:r>
+          </a:p>
+          <a:p>
+            <a:r>
+              <a:rPr lang="en-US" sz="1200" dirty="0"/>
+              <a:t>             </a:t>
+            </a:r>
+            <a:r>
+              <a:rPr lang="en-US" sz="1200" dirty="0" err="1"/>
+              <a:t>Parser.hs</a:t>
+            </a:r>
+            <a:endParaRPr lang="en-US" sz="1200" dirty="0"/>
+          </a:p>
+          <a:p>
+            <a:r>
+              <a:rPr lang="en-US" sz="1200" dirty="0"/>
+              <a:t>                  |</a:t>
+            </a:r>
+          </a:p>
+          <a:p>
+            <a:r>
+              <a:rPr lang="en-US" sz="1200" dirty="0"/>
+              <a:t>                  -&gt; Add (</a:t>
+            </a:r>
+            <a:r>
+              <a:rPr lang="en-US" sz="1200" dirty="0" err="1"/>
+              <a:t>Mul</a:t>
+            </a:r>
+            <a:r>
+              <a:rPr lang="en-US" sz="1200" dirty="0"/>
+              <a:t> (</a:t>
+            </a:r>
+            <a:r>
+              <a:rPr lang="en-US" sz="1200" dirty="0" err="1"/>
+              <a:t>Const</a:t>
+            </a:r>
+            <a:r>
+              <a:rPr lang="en-US" sz="1200" dirty="0"/>
+              <a:t> 1) (</a:t>
+            </a:r>
+            <a:r>
+              <a:rPr lang="en-US" sz="1200" dirty="0" err="1"/>
+              <a:t>Var</a:t>
+            </a:r>
+            <a:r>
+              <a:rPr lang="en-US" sz="1200" dirty="0"/>
+              <a:t> "x")) (</a:t>
+            </a:r>
+            <a:r>
+              <a:rPr lang="en-US" sz="1200" dirty="0" err="1"/>
+              <a:t>Neg</a:t>
+            </a:r>
+            <a:r>
+              <a:rPr lang="en-US" sz="1200" dirty="0"/>
+              <a:t> (</a:t>
+            </a:r>
+            <a:r>
+              <a:rPr lang="en-US" sz="1200" dirty="0" err="1"/>
+              <a:t>Neg</a:t>
+            </a:r>
+            <a:r>
+              <a:rPr lang="en-US" sz="1200" dirty="0"/>
+              <a:t> (</a:t>
+            </a:r>
+            <a:r>
+              <a:rPr lang="en-US" sz="1200" dirty="0" err="1"/>
+              <a:t>Var</a:t>
+            </a:r>
+            <a:r>
+              <a:rPr lang="en-US" sz="1200" dirty="0"/>
+              <a:t> "y")))</a:t>
+            </a:r>
+          </a:p>
+          <a:p>
+            <a:r>
+              <a:rPr lang="en-US" sz="1200" dirty="0"/>
+              <a:t>                  |</a:t>
+            </a:r>
+          </a:p>
+          <a:p>
+            <a:r>
+              <a:rPr lang="en-US" sz="1200" dirty="0"/>
+              <a:t>             </a:t>
+            </a:r>
+            <a:r>
+              <a:rPr lang="en-US" sz="1200" dirty="0" err="1"/>
+              <a:t>Simplify.hs</a:t>
+            </a:r>
+            <a:endParaRPr lang="en-US" sz="1200" dirty="0"/>
+          </a:p>
+          <a:p>
+            <a:r>
+              <a:rPr lang="en-US" sz="1200" dirty="0"/>
+              <a:t>                  |</a:t>
+            </a:r>
+          </a:p>
+          <a:p>
+            <a:r>
+              <a:rPr lang="en-US" sz="1200" dirty="0"/>
+              <a:t>                  -&gt; Add (</a:t>
+            </a:r>
+            <a:r>
+              <a:rPr lang="en-US" sz="1200" dirty="0" err="1"/>
+              <a:t>Var</a:t>
+            </a:r>
+            <a:r>
+              <a:rPr lang="en-US" sz="1200" dirty="0"/>
+              <a:t> "x") (</a:t>
+            </a:r>
+            <a:r>
+              <a:rPr lang="en-US" sz="1200" dirty="0" err="1"/>
+              <a:t>Var</a:t>
+            </a:r>
+            <a:r>
+              <a:rPr lang="en-US" sz="1200" dirty="0"/>
+              <a:t> "y")</a:t>
+            </a:r>
+          </a:p>
+          <a:p>
+            <a:r>
+              <a:rPr lang="en-US" sz="1200" dirty="0"/>
+              <a:t>                  |</a:t>
+            </a:r>
+          </a:p>
+          <a:p>
+            <a:r>
+              <a:rPr lang="en-US" sz="1200" dirty="0"/>
+              <a:t>         ---------+---------</a:t>
+            </a:r>
+          </a:p>
+          <a:p>
+            <a:r>
+              <a:rPr lang="en-US" sz="1200" dirty="0"/>
+              <a:t>         |                 |</a:t>
+            </a:r>
+          </a:p>
+          <a:p>
+            <a:r>
+              <a:rPr lang="en-US" sz="1200" dirty="0"/>
+              <a:t>      </a:t>
+            </a:r>
+            <a:r>
+              <a:rPr lang="en-US" sz="1200" dirty="0" err="1"/>
+              <a:t>Eval.hs</a:t>
+            </a:r>
+            <a:r>
+              <a:rPr lang="en-US" sz="1200" dirty="0"/>
+              <a:t>           </a:t>
+            </a:r>
+            <a:r>
+              <a:rPr lang="en-US" sz="1200" dirty="0" err="1"/>
+              <a:t>Pretty.hs</a:t>
+            </a:r>
+            <a:endParaRPr lang="en-US" sz="1200" dirty="0"/>
+          </a:p>
+          <a:p>
+            <a:r>
+              <a:rPr lang="en-US" sz="1200" dirty="0"/>
+              <a:t>         |                 |</a:t>
+            </a:r>
+          </a:p>
+          <a:p>
+            <a:r>
+              <a:rPr lang="en-US" sz="1200" dirty="0"/>
+              <a:t>      -&gt; Just 11        -&gt; "x + y"</a:t>
+            </a:r>
           </a:p>
         </p:txBody>
       </p:sp>
@@ -26946,19 +28377,30 @@
   <a:extraClrSchemeLst/>
   <a:extLst>
     <a:ext uri="{05A4C25C-085E-4340-85A3-A5531E510DB2}">
-      <thm15:themeFamily xmlns="" xmlns:thm15="http://schemas.microsoft.com/office/thememl/2012/main" name="TWO.pptx" id="{80AA9D2D-EE59-4148-A11E-A51EEE828B28}" vid="{AEAFD717-D3C8-4034-8F7E-D5220B0CCEB8}"/>
+      <thm15:themeFamily xmlns:thm15="http://schemas.microsoft.com/office/thememl/2012/main" xmlns="" name="TWO.pptx" id="{80AA9D2D-EE59-4148-A11E-A51EEE828B28}" vid="{AEAFD717-D3C8-4034-8F7E-D5220B0CCEB8}"/>
     </a:ext>
   </a:extLst>
 </a:theme>
 </file>
 
 <file path=customXml/item1.xml><?xml version="1.0" encoding="utf-8"?>
-<?mso-contentType ?>
-<FormTemplates xmlns="http://schemas.microsoft.com/sharepoint/v3/contenttype/forms">
-  <Display>DocumentLibraryForm</Display>
-  <Edit>DocumentLibraryForm</Edit>
-  <New>DocumentLibraryForm</New>
-</FormTemplates>
+<p:properties xmlns:p="http://schemas.microsoft.com/office/2006/metadata/properties" xmlns:xsi="http://www.w3.org/2001/XMLSchema-instance" xmlns:pc="http://schemas.microsoft.com/office/infopath/2007/PartnerControls">
+  <documentManagement>
+    <_ip_UnifiedCompliancePolicyUIAction xmlns="http://schemas.microsoft.com/sharepoint/v3" xsi:nil="true"/>
+    <Image xmlns="71af3243-3dd4-4a8d-8c0d-dd76da1f02a5">
+      <Url xsi:nil="true"/>
+      <Description xsi:nil="true"/>
+    </Image>
+    <Status xmlns="71af3243-3dd4-4a8d-8c0d-dd76da1f02a5">Not started</Status>
+    <Background xmlns="71af3243-3dd4-4a8d-8c0d-dd76da1f02a5">false</Background>
+    <_ip_UnifiedCompliancePolicyProperties xmlns="http://schemas.microsoft.com/sharepoint/v3" xsi:nil="true"/>
+    <ImageTagsTaxHTField xmlns="71af3243-3dd4-4a8d-8c0d-dd76da1f02a5">
+      <Terms xmlns="http://schemas.microsoft.com/office/infopath/2007/PartnerControls"/>
+    </ImageTagsTaxHTField>
+    <TaxCatchAll xmlns="230e9df3-be65-4c73-a93b-d1236ebd677e" xsi:nil="true"/>
+    <MediaServiceKeyPoints xmlns="71af3243-3dd4-4a8d-8c0d-dd76da1f02a5" xsi:nil="true"/>
+  </documentManagement>
+</p:properties>
 </file>
 
 <file path=customXml/item2.xml><?xml version="1.0" encoding="utf-8"?>
@@ -27268,29 +28710,22 @@
 </file>
 
 <file path=customXml/item3.xml><?xml version="1.0" encoding="utf-8"?>
-<p:properties xmlns:p="http://schemas.microsoft.com/office/2006/metadata/properties" xmlns:xsi="http://www.w3.org/2001/XMLSchema-instance" xmlns:pc="http://schemas.microsoft.com/office/infopath/2007/PartnerControls">
-  <documentManagement>
-    <_ip_UnifiedCompliancePolicyUIAction xmlns="http://schemas.microsoft.com/sharepoint/v3" xsi:nil="true"/>
-    <Image xmlns="71af3243-3dd4-4a8d-8c0d-dd76da1f02a5">
-      <Url xsi:nil="true"/>
-      <Description xsi:nil="true"/>
-    </Image>
-    <Status xmlns="71af3243-3dd4-4a8d-8c0d-dd76da1f02a5">Not started</Status>
-    <Background xmlns="71af3243-3dd4-4a8d-8c0d-dd76da1f02a5">false</Background>
-    <_ip_UnifiedCompliancePolicyProperties xmlns="http://schemas.microsoft.com/sharepoint/v3" xsi:nil="true"/>
-    <ImageTagsTaxHTField xmlns="71af3243-3dd4-4a8d-8c0d-dd76da1f02a5">
-      <Terms xmlns="http://schemas.microsoft.com/office/infopath/2007/PartnerControls"/>
-    </ImageTagsTaxHTField>
-    <TaxCatchAll xmlns="230e9df3-be65-4c73-a93b-d1236ebd677e" xsi:nil="true"/>
-    <MediaServiceKeyPoints xmlns="71af3243-3dd4-4a8d-8c0d-dd76da1f02a5" xsi:nil="true"/>
-  </documentManagement>
-</p:properties>
+<?mso-contentType ?>
+<FormTemplates xmlns="http://schemas.microsoft.com/sharepoint/v3/contenttype/forms">
+  <Display>DocumentLibraryForm</Display>
+  <Edit>DocumentLibraryForm</Edit>
+  <New>DocumentLibraryForm</New>
+</FormTemplates>
 </file>
 
 <file path=customXml/itemProps1.xml><?xml version="1.0" encoding="utf-8"?>
-<ds:datastoreItem xmlns:ds="http://schemas.openxmlformats.org/officeDocument/2006/customXml" ds:itemID="{19DAD249-BF80-48EF-9AFB-36A11BCDC2CE}">
+<ds:datastoreItem xmlns:ds="http://schemas.openxmlformats.org/officeDocument/2006/customXml" ds:itemID="{6F4F4D41-822D-40F2-A7AC-E4E6CB36CA7A}">
   <ds:schemaRefs>
-    <ds:schemaRef ds:uri="http://schemas.microsoft.com/sharepoint/v3/contenttype/forms"/>
+    <ds:schemaRef ds:uri="http://schemas.microsoft.com/office/2006/metadata/properties"/>
+    <ds:schemaRef ds:uri="http://schemas.microsoft.com/office/infopath/2007/PartnerControls"/>
+    <ds:schemaRef ds:uri="http://schemas.microsoft.com/sharepoint/v3"/>
+    <ds:schemaRef ds:uri="71af3243-3dd4-4a8d-8c0d-dd76da1f02a5"/>
+    <ds:schemaRef ds:uri="230e9df3-be65-4c73-a93b-d1236ebd677e"/>
   </ds:schemaRefs>
 </ds:datastoreItem>
 </file>
@@ -27317,13 +28752,9 @@
 </file>
 
 <file path=customXml/itemProps3.xml><?xml version="1.0" encoding="utf-8"?>
-<ds:datastoreItem xmlns:ds="http://schemas.openxmlformats.org/officeDocument/2006/customXml" ds:itemID="{6F4F4D41-822D-40F2-A7AC-E4E6CB36CA7A}">
+<ds:datastoreItem xmlns:ds="http://schemas.openxmlformats.org/officeDocument/2006/customXml" ds:itemID="{19DAD249-BF80-48EF-9AFB-36A11BCDC2CE}">
   <ds:schemaRefs>
-    <ds:schemaRef ds:uri="http://schemas.microsoft.com/office/2006/metadata/properties"/>
-    <ds:schemaRef ds:uri="http://schemas.microsoft.com/office/infopath/2007/PartnerControls"/>
-    <ds:schemaRef ds:uri="http://schemas.microsoft.com/sharepoint/v3"/>
-    <ds:schemaRef ds:uri="71af3243-3dd4-4a8d-8c0d-dd76da1f02a5"/>
-    <ds:schemaRef ds:uri="230e9df3-be65-4c73-a93b-d1236ebd677e"/>
+    <ds:schemaRef ds:uri="http://schemas.microsoft.com/sharepoint/v3/contenttype/forms"/>
   </ds:schemaRefs>
 </ds:datastoreItem>
 </file>